--- a/site/public/img/figures.pptx
+++ b/site/public/img/figures.pptx
@@ -7,6 +7,14 @@
   <p:sldIdLst>
     <p:sldId id="256" r:id="rId7"/>
     <p:sldId id="257" r:id="rId8"/>
+    <p:sldId id="258" r:id="rId9"/>
+    <p:sldId id="259" r:id="rId10"/>
+    <p:sldId id="260" r:id="rId11"/>
+    <p:sldId id="261" r:id="rId12"/>
+    <p:sldId id="262" r:id="rId13"/>
+    <p:sldId id="263" r:id="rId14"/>
+    <p:sldId id="264" r:id="rId15"/>
+    <p:sldId id="265" r:id="rId16"/>
   </p:sldIdLst>
   <p:sldSz cx="11430000" cy="6000750" type="screen4x3"/>
   <p:notesSz cx="6858000" cy="9144000"/>
@@ -4624,6 +4632,801 @@
 </p:sld>
 </file>
 
+<file path=ppt/slides/slide10.xml><?xml version="1.0" encoding="utf-8"?>
+<p:sld xmlns:a="http://schemas.openxmlformats.org/drawingml/2006/main" xmlns:p="http://schemas.openxmlformats.org/presentationml/2006/main" xmlns:r="http://schemas.openxmlformats.org/officeDocument/2006/relationships">
+  <p:cSld>
+    <p:spTree>
+      <p:nvGrpSpPr>
+        <p:cNvPr id="1" name=""/>
+        <p:cNvGrpSpPr/>
+        <p:nvPr/>
+      </p:nvGrpSpPr>
+      <p:grpSpPr/>
+      <p:sp>
+        <p:nvSpPr>
+          <p:cNvPr id="2" name="Rectangle 1"/>
+          <p:cNvSpPr/>
+          <p:nvPr/>
+        </p:nvSpPr>
+        <p:spPr>
+          <a:xfrm>
+            <a:off x="0" y="0"/>
+            <a:ext cx="11430000" cy="6000750"/>
+          </a:xfrm>
+          <a:prstGeom prst="rect">
+            <a:avLst/>
+          </a:prstGeom>
+          <a:solidFill>
+            <a:srgbClr val="FCFCFC"/>
+          </a:solidFill>
+          <a:ln>
+            <a:noFill/>
+          </a:ln>
+          <a:effectLst/>
+        </p:spPr>
+        <p:txBody>
+          <a:bodyPr rtlCol="0" anchor="ctr"/>
+          <a:lstStyle/>
+          <a:p>
+            <a:pPr algn="ctr"/>
+          </a:p>
+        </p:txBody>
+      </p:sp>
+      <p:sp>
+        <p:nvSpPr>
+          <p:cNvPr id="3" name="Rectangle 2"/>
+          <p:cNvSpPr/>
+          <p:nvPr/>
+        </p:nvSpPr>
+        <p:spPr>
+          <a:xfrm>
+            <a:off x="0" y="0"/>
+            <a:ext cx="114300" cy="6000750"/>
+          </a:xfrm>
+          <a:prstGeom prst="rect">
+            <a:avLst/>
+          </a:prstGeom>
+          <a:solidFill>
+            <a:srgbClr val="014172"/>
+          </a:solidFill>
+          <a:ln>
+            <a:noFill/>
+          </a:ln>
+          <a:effectLst/>
+        </p:spPr>
+        <p:txBody>
+          <a:bodyPr rtlCol="0" anchor="ctr"/>
+          <a:lstStyle/>
+          <a:p>
+            <a:pPr algn="ctr"/>
+          </a:p>
+        </p:txBody>
+      </p:sp>
+      <p:sp>
+        <p:nvSpPr>
+          <p:cNvPr id="4" name="Rectangle 3"/>
+          <p:cNvSpPr/>
+          <p:nvPr/>
+        </p:nvSpPr>
+        <p:spPr>
+          <a:xfrm>
+            <a:off x="0" y="0"/>
+            <a:ext cx="11430000" cy="1504950"/>
+          </a:xfrm>
+          <a:prstGeom prst="rect">
+            <a:avLst/>
+          </a:prstGeom>
+          <a:solidFill>
+            <a:srgbClr val="014172"/>
+          </a:solidFill>
+          <a:ln>
+            <a:noFill/>
+          </a:ln>
+          <a:effectLst/>
+        </p:spPr>
+        <p:txBody>
+          <a:bodyPr rtlCol="0" anchor="ctr"/>
+          <a:lstStyle/>
+          <a:p>
+            <a:pPr algn="ctr"/>
+          </a:p>
+        </p:txBody>
+      </p:sp>
+      <p:sp>
+        <p:nvSpPr>
+          <p:cNvPr id="5" name="TextBox 4"/>
+          <p:cNvSpPr txBox="1"/>
+          <p:nvPr/>
+        </p:nvSpPr>
+        <p:spPr>
+          <a:xfrm>
+            <a:off x="609600" y="361950"/>
+            <a:ext cx="7429500" cy="476250"/>
+          </a:xfrm>
+          <a:prstGeom prst="rect">
+            <a:avLst/>
+          </a:prstGeom>
+          <a:noFill/>
+        </p:spPr>
+        <p:txBody>
+          <a:bodyPr wrap="none" lIns="0" rIns="0" tIns="0" bIns="0" anchor="ctr">
+            <a:spAutoFit/>
+          </a:bodyPr>
+          <a:lstStyle/>
+          <a:p>
+            <a:pPr algn="l"/>
+            <a:r>
+              <a:rPr sz="3000" b="1">
+                <a:solidFill>
+                  <a:srgbClr val="FFFFFF"/>
+                </a:solidFill>
+                <a:latin typeface="Yu Gothic UI"/>
+              </a:rPr>
+              <a:t>ダイワ「KEEP」と シマノ「COOL」</a:t>
+            </a:r>
+          </a:p>
+        </p:txBody>
+      </p:sp>
+      <p:sp>
+        <p:nvSpPr>
+          <p:cNvPr id="6" name="TextBox 5"/>
+          <p:cNvSpPr txBox="1"/>
+          <p:nvPr/>
+        </p:nvSpPr>
+        <p:spPr>
+          <a:xfrm>
+            <a:off x="609600" y="876300"/>
+            <a:ext cx="7429500" cy="247650"/>
+          </a:xfrm>
+          <a:prstGeom prst="rect">
+            <a:avLst/>
+          </a:prstGeom>
+          <a:noFill/>
+        </p:spPr>
+        <p:txBody>
+          <a:bodyPr wrap="none" lIns="0" rIns="0" tIns="0" bIns="0" anchor="ctr">
+            <a:spAutoFit/>
+          </a:bodyPr>
+          <a:lstStyle/>
+          <a:p>
+            <a:pPr algn="l"/>
+            <a:r>
+              <a:rPr sz="1425" b="0">
+                <a:solidFill>
+                  <a:srgbClr val="DAE7F2"/>
+                </a:solidFill>
+                <a:latin typeface="Yu Gothic UI"/>
+              </a:rPr>
+              <a:t>名前は違っても、同じ物差しでした</a:t>
+            </a:r>
+          </a:p>
+        </p:txBody>
+      </p:sp>
+      <p:sp>
+        <p:nvSpPr>
+          <p:cNvPr id="7" name="Rounded Rectangle 6"/>
+          <p:cNvSpPr/>
+          <p:nvPr/>
+        </p:nvSpPr>
+        <p:spPr>
+          <a:xfrm>
+            <a:off x="8305800" y="247650"/>
+            <a:ext cx="2514600" cy="1009650"/>
+          </a:xfrm>
+          <a:prstGeom prst="roundRect">
+            <a:avLst>
+              <a:gd name="adj" fmla="val 12000"/>
+            </a:avLst>
+          </a:prstGeom>
+          <a:solidFill>
+            <a:srgbClr val="FFFFFF"/>
+          </a:solidFill>
+          <a:ln>
+            <a:noFill/>
+          </a:ln>
+          <a:effectLst>
+            <a:outerShdw blurRad="254000" dist="63500" dir="5400000" rotWithShape="0">
+              <a:srgbClr val="0B2B45">
+                <a:alpha val="30000"/>
+              </a:srgbClr>
+            </a:outerShdw>
+          </a:effectLst>
+        </p:spPr>
+        <p:txBody>
+          <a:bodyPr rtlCol="0" anchor="ctr"/>
+          <a:lstStyle/>
+          <a:p>
+            <a:pPr algn="ctr"/>
+          </a:p>
+        </p:txBody>
+      </p:sp>
+      <p:sp>
+        <p:nvSpPr>
+          <p:cNvPr id="8" name="TextBox 7"/>
+          <p:cNvSpPr txBox="1"/>
+          <p:nvPr/>
+        </p:nvSpPr>
+        <p:spPr>
+          <a:xfrm>
+            <a:off x="8515350" y="400050"/>
+            <a:ext cx="2133600" cy="209550"/>
+          </a:xfrm>
+          <a:prstGeom prst="rect">
+            <a:avLst/>
+          </a:prstGeom>
+          <a:noFill/>
+        </p:spPr>
+        <p:txBody>
+          <a:bodyPr wrap="none" lIns="0" rIns="0" tIns="0" bIns="0" anchor="ctr">
+            <a:spAutoFit/>
+          </a:bodyPr>
+          <a:lstStyle/>
+          <a:p>
+            <a:pPr algn="l"/>
+            <a:r>
+              <a:rPr sz="1125" b="0">
+                <a:solidFill>
+                  <a:srgbClr val="6A717B"/>
+                </a:solidFill>
+                <a:latin typeface="Yu Gothic UI"/>
+              </a:rPr>
+              <a:t>測り方は</a:t>
+            </a:r>
+          </a:p>
+        </p:txBody>
+      </p:sp>
+      <p:sp>
+        <p:nvSpPr>
+          <p:cNvPr id="9" name="TextBox 8"/>
+          <p:cNvSpPr txBox="1"/>
+          <p:nvPr/>
+        </p:nvSpPr>
+        <p:spPr>
+          <a:xfrm>
+            <a:off x="8515350" y="647700"/>
+            <a:ext cx="2133600" cy="533400"/>
+          </a:xfrm>
+          <a:prstGeom prst="rect">
+            <a:avLst/>
+          </a:prstGeom>
+          <a:noFill/>
+        </p:spPr>
+        <p:txBody>
+          <a:bodyPr wrap="none" lIns="0" rIns="0" tIns="0" bIns="0" anchor="ctr">
+            <a:spAutoFit/>
+          </a:bodyPr>
+          <a:lstStyle/>
+          <a:p>
+            <a:pPr algn="l"/>
+            <a:r>
+              <a:rPr sz="3900" b="1">
+                <a:solidFill>
+                  <a:srgbClr val="014172"/>
+                </a:solidFill>
+                <a:latin typeface="Yu Gothic UI"/>
+              </a:rPr>
+              <a:t>同じ</a:t>
+            </a:r>
+            <a:r>
+              <a:rPr sz="1950" b="1">
+                <a:solidFill>
+                  <a:srgbClr val="014172"/>
+                </a:solidFill>
+                <a:latin typeface="Yu Gothic UI"/>
+              </a:rPr>
+              <a:t/>
+            </a:r>
+          </a:p>
+        </p:txBody>
+      </p:sp>
+      <p:sp>
+        <p:nvSpPr>
+          <p:cNvPr id="10" name="Rounded Rectangle 9"/>
+          <p:cNvSpPr/>
+          <p:nvPr/>
+        </p:nvSpPr>
+        <p:spPr>
+          <a:xfrm>
+            <a:off x="800100" y="1866900"/>
+            <a:ext cx="4286250" cy="1428750"/>
+          </a:xfrm>
+          <a:prstGeom prst="roundRect">
+            <a:avLst>
+              <a:gd name="adj" fmla="val 5000"/>
+            </a:avLst>
+          </a:prstGeom>
+          <a:solidFill>
+            <a:srgbClr val="F2F5F8"/>
+          </a:solidFill>
+          <a:ln w="19050">
+            <a:solidFill>
+              <a:srgbClr val="DAE7F2"/>
+            </a:solidFill>
+          </a:ln>
+          <a:effectLst/>
+        </p:spPr>
+        <p:txBody>
+          <a:bodyPr rtlCol="0" anchor="ctr"/>
+          <a:lstStyle/>
+          <a:p>
+            <a:pPr algn="ctr"/>
+          </a:p>
+        </p:txBody>
+      </p:sp>
+      <p:sp>
+        <p:nvSpPr>
+          <p:cNvPr id="11" name="TextBox 10"/>
+          <p:cNvSpPr txBox="1"/>
+          <p:nvPr/>
+        </p:nvSpPr>
+        <p:spPr>
+          <a:xfrm>
+            <a:off x="1047750" y="2152650"/>
+            <a:ext cx="3810000" cy="476250"/>
+          </a:xfrm>
+          <a:prstGeom prst="rect">
+            <a:avLst/>
+          </a:prstGeom>
+          <a:noFill/>
+        </p:spPr>
+        <p:txBody>
+          <a:bodyPr wrap="none" lIns="0" rIns="0" tIns="0" bIns="0" anchor="ctr">
+            <a:spAutoFit/>
+          </a:bodyPr>
+          <a:lstStyle/>
+          <a:p>
+            <a:pPr algn="l"/>
+            <a:r>
+              <a:rPr sz="2550" b="1">
+                <a:solidFill>
+                  <a:srgbClr val="014172"/>
+                </a:solidFill>
+                <a:latin typeface="Yu Gothic UI"/>
+              </a:rPr>
+              <a:t>KEEP</a:t>
+            </a:r>
+            <a:r>
+              <a:rPr sz="1950" b="1">
+                <a:solidFill>
+                  <a:srgbClr val="2E2E33"/>
+                </a:solidFill>
+                <a:latin typeface="Yu Gothic UI"/>
+              </a:rPr>
+              <a:t>  26 〜 90</a:t>
+            </a:r>
+          </a:p>
+        </p:txBody>
+      </p:sp>
+      <p:sp>
+        <p:nvSpPr>
+          <p:cNvPr id="12" name="TextBox 11"/>
+          <p:cNvSpPr txBox="1"/>
+          <p:nvPr/>
+        </p:nvSpPr>
+        <p:spPr>
+          <a:xfrm>
+            <a:off x="1047750" y="2781300"/>
+            <a:ext cx="3810000" cy="247650"/>
+          </a:xfrm>
+          <a:prstGeom prst="rect">
+            <a:avLst/>
+          </a:prstGeom>
+          <a:noFill/>
+        </p:spPr>
+        <p:txBody>
+          <a:bodyPr wrap="none" lIns="0" rIns="0" tIns="0" bIns="0" anchor="ctr">
+            <a:spAutoFit/>
+          </a:bodyPr>
+          <a:lstStyle/>
+          <a:p>
+            <a:pPr algn="l"/>
+            <a:r>
+              <a:rPr sz="1350" b="0">
+                <a:solidFill>
+                  <a:srgbClr val="6A717B"/>
+                </a:solidFill>
+                <a:latin typeface="Yu Gothic UI"/>
+              </a:rPr>
+              <a:t>ダイワ クールラインα3</a:t>
+            </a:r>
+          </a:p>
+        </p:txBody>
+      </p:sp>
+      <p:sp>
+        <p:nvSpPr>
+          <p:cNvPr id="13" name="Rounded Rectangle 12"/>
+          <p:cNvSpPr/>
+          <p:nvPr/>
+        </p:nvSpPr>
+        <p:spPr>
+          <a:xfrm>
+            <a:off x="5848350" y="1866900"/>
+            <a:ext cx="4286250" cy="1428750"/>
+          </a:xfrm>
+          <a:prstGeom prst="roundRect">
+            <a:avLst>
+              <a:gd name="adj" fmla="val 5000"/>
+            </a:avLst>
+          </a:prstGeom>
+          <a:solidFill>
+            <a:srgbClr val="F2F5F8"/>
+          </a:solidFill>
+          <a:ln w="19050">
+            <a:solidFill>
+              <a:srgbClr val="DAE7F2"/>
+            </a:solidFill>
+          </a:ln>
+          <a:effectLst/>
+        </p:spPr>
+        <p:txBody>
+          <a:bodyPr rtlCol="0" anchor="ctr"/>
+          <a:lstStyle/>
+          <a:p>
+            <a:pPr algn="ctr"/>
+          </a:p>
+        </p:txBody>
+      </p:sp>
+      <p:sp>
+        <p:nvSpPr>
+          <p:cNvPr id="14" name="TextBox 13"/>
+          <p:cNvSpPr txBox="1"/>
+          <p:nvPr/>
+        </p:nvSpPr>
+        <p:spPr>
+          <a:xfrm>
+            <a:off x="6096000" y="2152650"/>
+            <a:ext cx="3810000" cy="476250"/>
+          </a:xfrm>
+          <a:prstGeom prst="rect">
+            <a:avLst/>
+          </a:prstGeom>
+          <a:noFill/>
+        </p:spPr>
+        <p:txBody>
+          <a:bodyPr wrap="none" lIns="0" rIns="0" tIns="0" bIns="0" anchor="ctr">
+            <a:spAutoFit/>
+          </a:bodyPr>
+          <a:lstStyle/>
+          <a:p>
+            <a:pPr algn="l"/>
+            <a:r>
+              <a:rPr sz="2550" b="1">
+                <a:solidFill>
+                  <a:srgbClr val="014172"/>
+                </a:solidFill>
+                <a:latin typeface="Yu Gothic UI"/>
+              </a:rPr>
+              <a:t>COOL</a:t>
+            </a:r>
+            <a:r>
+              <a:rPr sz="1950" b="1">
+                <a:solidFill>
+                  <a:srgbClr val="2E2E33"/>
+                </a:solidFill>
+                <a:latin typeface="Yu Gothic UI"/>
+              </a:rPr>
+              <a:t>  32 〜 140</a:t>
+            </a:r>
+          </a:p>
+        </p:txBody>
+      </p:sp>
+      <p:sp>
+        <p:nvSpPr>
+          <p:cNvPr id="15" name="TextBox 14"/>
+          <p:cNvSpPr txBox="1"/>
+          <p:nvPr/>
+        </p:nvSpPr>
+        <p:spPr>
+          <a:xfrm>
+            <a:off x="6096000" y="2781300"/>
+            <a:ext cx="3810000" cy="247650"/>
+          </a:xfrm>
+          <a:prstGeom prst="rect">
+            <a:avLst/>
+          </a:prstGeom>
+          <a:noFill/>
+        </p:spPr>
+        <p:txBody>
+          <a:bodyPr wrap="none" lIns="0" rIns="0" tIns="0" bIns="0" anchor="ctr">
+            <a:spAutoFit/>
+          </a:bodyPr>
+          <a:lstStyle/>
+          <a:p>
+            <a:pPr algn="l"/>
+            <a:r>
+              <a:rPr sz="1350" b="0">
+                <a:solidFill>
+                  <a:srgbClr val="6A717B"/>
+                </a:solidFill>
+                <a:latin typeface="Yu Gothic UI"/>
+              </a:rPr>
+              <a:t>シマノ フィクセル</a:t>
+            </a:r>
+          </a:p>
+        </p:txBody>
+      </p:sp>
+      <p:sp>
+        <p:nvSpPr>
+          <p:cNvPr id="16" name="Rounded Rectangle 15"/>
+          <p:cNvSpPr/>
+          <p:nvPr/>
+        </p:nvSpPr>
+        <p:spPr>
+          <a:xfrm>
+            <a:off x="857250" y="3600450"/>
+            <a:ext cx="9715500" cy="1447800"/>
+          </a:xfrm>
+          <a:prstGeom prst="roundRect">
+            <a:avLst>
+              <a:gd name="adj" fmla="val 4000"/>
+            </a:avLst>
+          </a:prstGeom>
+          <a:solidFill>
+            <a:srgbClr val="FFFFFF"/>
+          </a:solidFill>
+          <a:ln w="19050">
+            <a:solidFill>
+              <a:srgbClr val="DAE7F2"/>
+            </a:solidFill>
+          </a:ln>
+          <a:effectLst/>
+        </p:spPr>
+        <p:txBody>
+          <a:bodyPr rtlCol="0" anchor="ctr"/>
+          <a:lstStyle/>
+          <a:p>
+            <a:pPr algn="ctr"/>
+          </a:p>
+        </p:txBody>
+      </p:sp>
+      <p:sp>
+        <p:nvSpPr>
+          <p:cNvPr id="17" name="TextBox 16"/>
+          <p:cNvSpPr txBox="1"/>
+          <p:nvPr/>
+        </p:nvSpPr>
+        <p:spPr>
+          <a:xfrm>
+            <a:off x="1143000" y="3848100"/>
+            <a:ext cx="8572500" cy="266700"/>
+          </a:xfrm>
+          <a:prstGeom prst="rect">
+            <a:avLst/>
+          </a:prstGeom>
+          <a:noFill/>
+        </p:spPr>
+        <p:txBody>
+          <a:bodyPr wrap="none" lIns="0" rIns="0" tIns="0" bIns="0" anchor="ctr">
+            <a:spAutoFit/>
+          </a:bodyPr>
+          <a:lstStyle/>
+          <a:p>
+            <a:pPr algn="l"/>
+            <a:r>
+              <a:rPr sz="1650" b="1">
+                <a:solidFill>
+                  <a:srgbClr val="2E2E33"/>
+                </a:solidFill>
+                <a:latin typeface="Yu Gothic UI"/>
+              </a:rPr>
+              <a:t>どちらも JIS S 2048：2006 の簡便法</a:t>
+            </a:r>
+          </a:p>
+        </p:txBody>
+      </p:sp>
+      <p:sp>
+        <p:nvSpPr>
+          <p:cNvPr id="18" name="TextBox 17"/>
+          <p:cNvSpPr txBox="1"/>
+          <p:nvPr/>
+        </p:nvSpPr>
+        <p:spPr>
+          <a:xfrm>
+            <a:off x="1143000" y="4229100"/>
+            <a:ext cx="8953500" cy="247650"/>
+          </a:xfrm>
+          <a:prstGeom prst="rect">
+            <a:avLst/>
+          </a:prstGeom>
+          <a:noFill/>
+        </p:spPr>
+        <p:txBody>
+          <a:bodyPr wrap="none" lIns="0" rIns="0" tIns="0" bIns="0" anchor="ctr">
+            <a:spAutoFit/>
+          </a:bodyPr>
+          <a:lstStyle/>
+          <a:p>
+            <a:pPr algn="l"/>
+            <a:r>
+              <a:rPr sz="1275" b="0">
+                <a:solidFill>
+                  <a:srgbClr val="6A717B"/>
+                </a:solidFill>
+                <a:latin typeface="Yu Gothic UI"/>
+              </a:rPr>
+              <a:t>外気40℃ ／ 本体容量の25%の角氷 ／ 氷が溶け切るまでの時間に換算</a:t>
+            </a:r>
+          </a:p>
+        </p:txBody>
+      </p:sp>
+      <p:sp>
+        <p:nvSpPr>
+          <p:cNvPr id="19" name="TextBox 18"/>
+          <p:cNvSpPr txBox="1"/>
+          <p:nvPr/>
+        </p:nvSpPr>
+        <p:spPr>
+          <a:xfrm>
+            <a:off x="1143000" y="4572000"/>
+            <a:ext cx="8953500" cy="247650"/>
+          </a:xfrm>
+          <a:prstGeom prst="rect">
+            <a:avLst/>
+          </a:prstGeom>
+          <a:noFill/>
+        </p:spPr>
+        <p:txBody>
+          <a:bodyPr wrap="none" lIns="0" rIns="0" tIns="0" bIns="0" anchor="ctr">
+            <a:spAutoFit/>
+          </a:bodyPr>
+          <a:lstStyle/>
+          <a:p>
+            <a:pPr algn="l"/>
+            <a:r>
+              <a:rPr sz="1275" b="0">
+                <a:solidFill>
+                  <a:srgbClr val="6A717B"/>
+                </a:solidFill>
+                <a:latin typeface="Yu Gothic UI"/>
+              </a:rPr>
+              <a:t>両社とも「目安であり保証値ではない」と明記しています</a:t>
+            </a:r>
+          </a:p>
+        </p:txBody>
+      </p:sp>
+      <p:sp>
+        <p:nvSpPr>
+          <p:cNvPr id="20" name="Rectangle 19"/>
+          <p:cNvSpPr/>
+          <p:nvPr/>
+        </p:nvSpPr>
+        <p:spPr>
+          <a:xfrm>
+            <a:off x="609600" y="5295900"/>
+            <a:ext cx="10210800" cy="9525"/>
+          </a:xfrm>
+          <a:prstGeom prst="rect">
+            <a:avLst/>
+          </a:prstGeom>
+          <a:solidFill>
+            <a:srgbClr val="E2E7EC"/>
+          </a:solidFill>
+          <a:ln>
+            <a:noFill/>
+          </a:ln>
+          <a:effectLst/>
+        </p:spPr>
+        <p:txBody>
+          <a:bodyPr rtlCol="0" anchor="ctr"/>
+          <a:lstStyle/>
+          <a:p>
+            <a:pPr algn="ctr"/>
+          </a:p>
+        </p:txBody>
+      </p:sp>
+      <p:sp>
+        <p:nvSpPr>
+          <p:cNvPr id="21" name="TextBox 20"/>
+          <p:cNvSpPr txBox="1"/>
+          <p:nvPr/>
+        </p:nvSpPr>
+        <p:spPr>
+          <a:xfrm>
+            <a:off x="609600" y="5429250"/>
+            <a:ext cx="7239000" cy="247650"/>
+          </a:xfrm>
+          <a:prstGeom prst="rect">
+            <a:avLst/>
+          </a:prstGeom>
+          <a:noFill/>
+        </p:spPr>
+        <p:txBody>
+          <a:bodyPr wrap="none" lIns="0" rIns="0" tIns="0" bIns="0" anchor="ctr">
+            <a:spAutoFit/>
+          </a:bodyPr>
+          <a:lstStyle/>
+          <a:p>
+            <a:pPr algn="l"/>
+            <a:r>
+              <a:rPr sz="1425" b="1">
+                <a:solidFill>
+                  <a:srgbClr val="2E2E33"/>
+                </a:solidFill>
+                <a:latin typeface="Yu Gothic UI"/>
+              </a:rPr>
+              <a:t>名前が違うだけで、中身は同じ物差しです。</a:t>
+            </a:r>
+          </a:p>
+        </p:txBody>
+      </p:sp>
+      <p:sp>
+        <p:nvSpPr>
+          <p:cNvPr id="22" name="TextBox 21"/>
+          <p:cNvSpPr txBox="1"/>
+          <p:nvPr/>
+        </p:nvSpPr>
+        <p:spPr>
+          <a:xfrm>
+            <a:off x="609600" y="5676900"/>
+            <a:ext cx="7620000" cy="209550"/>
+          </a:xfrm>
+          <a:prstGeom prst="rect">
+            <a:avLst/>
+          </a:prstGeom>
+          <a:noFill/>
+        </p:spPr>
+        <p:txBody>
+          <a:bodyPr wrap="none" lIns="0" rIns="0" tIns="0" bIns="0" anchor="ctr">
+            <a:spAutoFit/>
+          </a:bodyPr>
+          <a:lstStyle/>
+          <a:p>
+            <a:pPr algn="l"/>
+            <a:r>
+              <a:rPr sz="1050" b="0">
+                <a:solidFill>
+                  <a:srgbClr val="6A717B"/>
+                </a:solidFill>
+                <a:latin typeface="Yu Gothic UI"/>
+              </a:rPr>
+              <a:t>両社の公表資料で確認しました（実測ではありません）</a:t>
+            </a:r>
+          </a:p>
+        </p:txBody>
+      </p:sp>
+      <p:sp>
+        <p:nvSpPr>
+          <p:cNvPr id="23" name="TextBox 22"/>
+          <p:cNvSpPr txBox="1"/>
+          <p:nvPr/>
+        </p:nvSpPr>
+        <p:spPr>
+          <a:xfrm>
+            <a:off x="7962900" y="5676900"/>
+            <a:ext cx="2857500" cy="209550"/>
+          </a:xfrm>
+          <a:prstGeom prst="rect">
+            <a:avLst/>
+          </a:prstGeom>
+          <a:noFill/>
+        </p:spPr>
+        <p:txBody>
+          <a:bodyPr wrap="none" lIns="0" rIns="0" tIns="0" bIns="0" anchor="ctr">
+            <a:spAutoFit/>
+          </a:bodyPr>
+          <a:lstStyle/>
+          <a:p>
+            <a:pPr algn="r"/>
+            <a:r>
+              <a:rPr sz="1050" b="0">
+                <a:solidFill>
+                  <a:srgbClr val="6A717B"/>
+                </a:solidFill>
+                <a:latin typeface="Yu Gothic UI"/>
+              </a:rPr>
+              <a:t>寸法で選ぶ　sunpou.nexeed-lab.com</a:t>
+            </a:r>
+          </a:p>
+        </p:txBody>
+      </p:sp>
+    </p:spTree>
+  </p:cSld>
+  <p:clrMapOvr>
+    <a:masterClrMapping/>
+  </p:clrMapOvr>
+</p:sld>
+</file>
+
 <file path=ppt/slides/slide2.xml><?xml version="1.0" encoding="utf-8"?>
 <p:sld xmlns:a="http://schemas.openxmlformats.org/drawingml/2006/main" xmlns:p="http://schemas.openxmlformats.org/presentationml/2006/main" xmlns:r="http://schemas.openxmlformats.org/officeDocument/2006/relationships">
   <p:cSld>
@@ -5584,6 +6387,7648 @@
       <p:sp>
         <p:nvSpPr>
           <p:cNvPr id="29" name="TextBox 28"/>
+          <p:cNvSpPr txBox="1"/>
+          <p:nvPr/>
+        </p:nvSpPr>
+        <p:spPr>
+          <a:xfrm>
+            <a:off x="7962900" y="5676900"/>
+            <a:ext cx="2857500" cy="209550"/>
+          </a:xfrm>
+          <a:prstGeom prst="rect">
+            <a:avLst/>
+          </a:prstGeom>
+          <a:noFill/>
+        </p:spPr>
+        <p:txBody>
+          <a:bodyPr wrap="none" lIns="0" rIns="0" tIns="0" bIns="0" anchor="ctr">
+            <a:spAutoFit/>
+          </a:bodyPr>
+          <a:lstStyle/>
+          <a:p>
+            <a:pPr algn="r"/>
+            <a:r>
+              <a:rPr sz="1050" b="0">
+                <a:solidFill>
+                  <a:srgbClr val="6A717B"/>
+                </a:solidFill>
+                <a:latin typeface="Yu Gothic UI"/>
+              </a:rPr>
+              <a:t>寸法で選ぶ　sunpou.nexeed-lab.com</a:t>
+            </a:r>
+          </a:p>
+        </p:txBody>
+      </p:sp>
+    </p:spTree>
+  </p:cSld>
+  <p:clrMapOvr>
+    <a:masterClrMapping/>
+  </p:clrMapOvr>
+</p:sld>
+</file>
+
+<file path=ppt/slides/slide3.xml><?xml version="1.0" encoding="utf-8"?>
+<p:sld xmlns:a="http://schemas.openxmlformats.org/drawingml/2006/main" xmlns:p="http://schemas.openxmlformats.org/presentationml/2006/main" xmlns:r="http://schemas.openxmlformats.org/officeDocument/2006/relationships">
+  <p:cSld>
+    <p:spTree>
+      <p:nvGrpSpPr>
+        <p:cNvPr id="1" name=""/>
+        <p:cNvGrpSpPr/>
+        <p:nvPr/>
+      </p:nvGrpSpPr>
+      <p:grpSpPr/>
+      <p:sp>
+        <p:nvSpPr>
+          <p:cNvPr id="2" name="Rectangle 1"/>
+          <p:cNvSpPr/>
+          <p:nvPr/>
+        </p:nvSpPr>
+        <p:spPr>
+          <a:xfrm>
+            <a:off x="0" y="0"/>
+            <a:ext cx="11430000" cy="6000750"/>
+          </a:xfrm>
+          <a:prstGeom prst="rect">
+            <a:avLst/>
+          </a:prstGeom>
+          <a:solidFill>
+            <a:srgbClr val="FCFCFC"/>
+          </a:solidFill>
+          <a:ln>
+            <a:noFill/>
+          </a:ln>
+          <a:effectLst/>
+        </p:spPr>
+        <p:txBody>
+          <a:bodyPr rtlCol="0" anchor="ctr"/>
+          <a:lstStyle/>
+          <a:p>
+            <a:pPr algn="ctr"/>
+          </a:p>
+        </p:txBody>
+      </p:sp>
+      <p:sp>
+        <p:nvSpPr>
+          <p:cNvPr id="3" name="Rectangle 2"/>
+          <p:cNvSpPr/>
+          <p:nvPr/>
+        </p:nvSpPr>
+        <p:spPr>
+          <a:xfrm>
+            <a:off x="0" y="0"/>
+            <a:ext cx="114300" cy="6000750"/>
+          </a:xfrm>
+          <a:prstGeom prst="rect">
+            <a:avLst/>
+          </a:prstGeom>
+          <a:solidFill>
+            <a:srgbClr val="014172"/>
+          </a:solidFill>
+          <a:ln>
+            <a:noFill/>
+          </a:ln>
+          <a:effectLst/>
+        </p:spPr>
+        <p:txBody>
+          <a:bodyPr rtlCol="0" anchor="ctr"/>
+          <a:lstStyle/>
+          <a:p>
+            <a:pPr algn="ctr"/>
+          </a:p>
+        </p:txBody>
+      </p:sp>
+      <p:sp>
+        <p:nvSpPr>
+          <p:cNvPr id="4" name="Rectangle 3"/>
+          <p:cNvSpPr/>
+          <p:nvPr/>
+        </p:nvSpPr>
+        <p:spPr>
+          <a:xfrm>
+            <a:off x="0" y="0"/>
+            <a:ext cx="11430000" cy="1504950"/>
+          </a:xfrm>
+          <a:prstGeom prst="rect">
+            <a:avLst/>
+          </a:prstGeom>
+          <a:solidFill>
+            <a:srgbClr val="014172"/>
+          </a:solidFill>
+          <a:ln>
+            <a:noFill/>
+          </a:ln>
+          <a:effectLst/>
+        </p:spPr>
+        <p:txBody>
+          <a:bodyPr rtlCol="0" anchor="ctr"/>
+          <a:lstStyle/>
+          <a:p>
+            <a:pPr algn="ctr"/>
+          </a:p>
+        </p:txBody>
+      </p:sp>
+      <p:sp>
+        <p:nvSpPr>
+          <p:cNvPr id="5" name="TextBox 4"/>
+          <p:cNvSpPr txBox="1"/>
+          <p:nvPr/>
+        </p:nvSpPr>
+        <p:spPr>
+          <a:xfrm>
+            <a:off x="609600" y="361950"/>
+            <a:ext cx="7429500" cy="476250"/>
+          </a:xfrm>
+          <a:prstGeom prst="rect">
+            <a:avLst/>
+          </a:prstGeom>
+          <a:noFill/>
+        </p:spPr>
+        <p:txBody>
+          <a:bodyPr wrap="none" lIns="0" rIns="0" tIns="0" bIns="0" anchor="ctr">
+            <a:spAutoFit/>
+          </a:bodyPr>
+          <a:lstStyle/>
+          <a:p>
+            <a:pPr algn="l"/>
+            <a:r>
+              <a:rPr sz="3000" b="1">
+                <a:solidFill>
+                  <a:srgbClr val="FFFFFF"/>
+                </a:solidFill>
+                <a:latin typeface="Yu Gothic UI"/>
+              </a:rPr>
+              <a:t>500mlは何本入る？</a:t>
+            </a:r>
+          </a:p>
+        </p:txBody>
+      </p:sp>
+      <p:sp>
+        <p:nvSpPr>
+          <p:cNvPr id="6" name="TextBox 5"/>
+          <p:cNvSpPr txBox="1"/>
+          <p:nvPr/>
+        </p:nvSpPr>
+        <p:spPr>
+          <a:xfrm>
+            <a:off x="609600" y="876300"/>
+            <a:ext cx="7429500" cy="247650"/>
+          </a:xfrm>
+          <a:prstGeom prst="rect">
+            <a:avLst/>
+          </a:prstGeom>
+          <a:noFill/>
+        </p:spPr>
+        <p:txBody>
+          <a:bodyPr wrap="none" lIns="0" rIns="0" tIns="0" bIns="0" anchor="ctr">
+            <a:spAutoFit/>
+          </a:bodyPr>
+          <a:lstStyle/>
+          <a:p>
+            <a:pPr algn="l"/>
+            <a:r>
+              <a:rPr sz="1425" b="0">
+                <a:solidFill>
+                  <a:srgbClr val="DAE7F2"/>
+                </a:solidFill>
+                <a:latin typeface="Yu Gothic UI"/>
+              </a:rPr>
+              <a:t>容量Lではなく「内寸」で決まります。同じ20Lでも15本と18本</a:t>
+            </a:r>
+          </a:p>
+        </p:txBody>
+      </p:sp>
+      <p:sp>
+        <p:nvSpPr>
+          <p:cNvPr id="7" name="Rounded Rectangle 6"/>
+          <p:cNvSpPr/>
+          <p:nvPr/>
+        </p:nvSpPr>
+        <p:spPr>
+          <a:xfrm>
+            <a:off x="8305800" y="247650"/>
+            <a:ext cx="2514600" cy="1009650"/>
+          </a:xfrm>
+          <a:prstGeom prst="roundRect">
+            <a:avLst>
+              <a:gd name="adj" fmla="val 12000"/>
+            </a:avLst>
+          </a:prstGeom>
+          <a:solidFill>
+            <a:srgbClr val="FFFFFF"/>
+          </a:solidFill>
+          <a:ln>
+            <a:noFill/>
+          </a:ln>
+          <a:effectLst>
+            <a:outerShdw blurRad="254000" dist="63500" dir="5400000" rotWithShape="0">
+              <a:srgbClr val="0B2B45">
+                <a:alpha val="30000"/>
+              </a:srgbClr>
+            </a:outerShdw>
+          </a:effectLst>
+        </p:spPr>
+        <p:txBody>
+          <a:bodyPr rtlCol="0" anchor="ctr"/>
+          <a:lstStyle/>
+          <a:p>
+            <a:pPr algn="ctr"/>
+          </a:p>
+        </p:txBody>
+      </p:sp>
+      <p:sp>
+        <p:nvSpPr>
+          <p:cNvPr id="8" name="TextBox 7"/>
+          <p:cNvSpPr txBox="1"/>
+          <p:nvPr/>
+        </p:nvSpPr>
+        <p:spPr>
+          <a:xfrm>
+            <a:off x="8515350" y="400050"/>
+            <a:ext cx="2133600" cy="209550"/>
+          </a:xfrm>
+          <a:prstGeom prst="rect">
+            <a:avLst/>
+          </a:prstGeom>
+          <a:noFill/>
+        </p:spPr>
+        <p:txBody>
+          <a:bodyPr wrap="none" lIns="0" rIns="0" tIns="0" bIns="0" anchor="ctr">
+            <a:spAutoFit/>
+          </a:bodyPr>
+          <a:lstStyle/>
+          <a:p>
+            <a:pPr algn="l"/>
+            <a:r>
+              <a:rPr sz="1125" b="0">
+                <a:solidFill>
+                  <a:srgbClr val="6A717B"/>
+                </a:solidFill>
+                <a:latin typeface="Yu Gothic UI"/>
+              </a:rPr>
+              <a:t>20Lに丸型なら</a:t>
+            </a:r>
+          </a:p>
+        </p:txBody>
+      </p:sp>
+      <p:sp>
+        <p:nvSpPr>
+          <p:cNvPr id="9" name="TextBox 8"/>
+          <p:cNvSpPr txBox="1"/>
+          <p:nvPr/>
+        </p:nvSpPr>
+        <p:spPr>
+          <a:xfrm>
+            <a:off x="8515350" y="647700"/>
+            <a:ext cx="2133600" cy="533400"/>
+          </a:xfrm>
+          <a:prstGeom prst="rect">
+            <a:avLst/>
+          </a:prstGeom>
+          <a:noFill/>
+        </p:spPr>
+        <p:txBody>
+          <a:bodyPr wrap="none" lIns="0" rIns="0" tIns="0" bIns="0" anchor="ctr">
+            <a:spAutoFit/>
+          </a:bodyPr>
+          <a:lstStyle/>
+          <a:p>
+            <a:pPr algn="l"/>
+            <a:r>
+              <a:rPr sz="3900" b="1">
+                <a:solidFill>
+                  <a:srgbClr val="014172"/>
+                </a:solidFill>
+                <a:latin typeface="Yu Gothic UI"/>
+              </a:rPr>
+              <a:t>15</a:t>
+            </a:r>
+            <a:r>
+              <a:rPr sz="1950" b="1">
+                <a:solidFill>
+                  <a:srgbClr val="014172"/>
+                </a:solidFill>
+                <a:latin typeface="Yu Gothic UI"/>
+              </a:rPr>
+              <a:t>本</a:t>
+            </a:r>
+          </a:p>
+        </p:txBody>
+      </p:sp>
+      <p:sp>
+        <p:nvSpPr>
+          <p:cNvPr id="10" name="Rectangle 9"/>
+          <p:cNvSpPr/>
+          <p:nvPr/>
+        </p:nvSpPr>
+        <p:spPr>
+          <a:xfrm>
+            <a:off x="5334000" y="2038350"/>
+            <a:ext cx="3566160" cy="2011680"/>
+          </a:xfrm>
+          <a:prstGeom prst="rect">
+            <a:avLst/>
+          </a:prstGeom>
+          <a:solidFill>
+            <a:srgbClr val="F2F5F8"/>
+          </a:solidFill>
+          <a:ln w="19050">
+            <a:solidFill>
+              <a:srgbClr val="DAE7F2"/>
+            </a:solidFill>
+          </a:ln>
+          <a:effectLst/>
+        </p:spPr>
+        <p:txBody>
+          <a:bodyPr rtlCol="0" anchor="ctr"/>
+          <a:lstStyle/>
+          <a:p>
+            <a:pPr algn="ctr"/>
+          </a:p>
+        </p:txBody>
+      </p:sp>
+      <p:sp>
+        <p:nvSpPr>
+          <p:cNvPr id="11" name="Oval 10"/>
+          <p:cNvSpPr/>
+          <p:nvPr/>
+        </p:nvSpPr>
+        <p:spPr>
+          <a:xfrm>
+            <a:off x="5334000" y="2038350"/>
+            <a:ext cx="626364" cy="626364"/>
+          </a:xfrm>
+          <a:prstGeom prst="ellipse">
+            <a:avLst/>
+          </a:prstGeom>
+          <a:solidFill>
+            <a:srgbClr val="EEF4F9"/>
+          </a:solidFill>
+          <a:ln w="19050">
+            <a:solidFill>
+              <a:srgbClr val="014172"/>
+            </a:solidFill>
+          </a:ln>
+          <a:effectLst/>
+        </p:spPr>
+        <p:txBody>
+          <a:bodyPr rtlCol="0" anchor="ctr"/>
+          <a:lstStyle/>
+          <a:p>
+            <a:pPr algn="ctr"/>
+          </a:p>
+        </p:txBody>
+      </p:sp>
+      <p:sp>
+        <p:nvSpPr>
+          <p:cNvPr id="12" name="Oval 11"/>
+          <p:cNvSpPr/>
+          <p:nvPr/>
+        </p:nvSpPr>
+        <p:spPr>
+          <a:xfrm>
+            <a:off x="5960364" y="2038350"/>
+            <a:ext cx="626364" cy="626364"/>
+          </a:xfrm>
+          <a:prstGeom prst="ellipse">
+            <a:avLst/>
+          </a:prstGeom>
+          <a:solidFill>
+            <a:srgbClr val="EEF4F9"/>
+          </a:solidFill>
+          <a:ln w="19050">
+            <a:solidFill>
+              <a:srgbClr val="014172"/>
+            </a:solidFill>
+          </a:ln>
+          <a:effectLst/>
+        </p:spPr>
+        <p:txBody>
+          <a:bodyPr rtlCol="0" anchor="ctr"/>
+          <a:lstStyle/>
+          <a:p>
+            <a:pPr algn="ctr"/>
+          </a:p>
+        </p:txBody>
+      </p:sp>
+      <p:sp>
+        <p:nvSpPr>
+          <p:cNvPr id="13" name="Oval 12"/>
+          <p:cNvSpPr/>
+          <p:nvPr/>
+        </p:nvSpPr>
+        <p:spPr>
+          <a:xfrm>
+            <a:off x="6586728" y="2038350"/>
+            <a:ext cx="626364" cy="626364"/>
+          </a:xfrm>
+          <a:prstGeom prst="ellipse">
+            <a:avLst/>
+          </a:prstGeom>
+          <a:solidFill>
+            <a:srgbClr val="EEF4F9"/>
+          </a:solidFill>
+          <a:ln w="19050">
+            <a:solidFill>
+              <a:srgbClr val="014172"/>
+            </a:solidFill>
+          </a:ln>
+          <a:effectLst/>
+        </p:spPr>
+        <p:txBody>
+          <a:bodyPr rtlCol="0" anchor="ctr"/>
+          <a:lstStyle/>
+          <a:p>
+            <a:pPr algn="ctr"/>
+          </a:p>
+        </p:txBody>
+      </p:sp>
+      <p:sp>
+        <p:nvSpPr>
+          <p:cNvPr id="14" name="Oval 13"/>
+          <p:cNvSpPr/>
+          <p:nvPr/>
+        </p:nvSpPr>
+        <p:spPr>
+          <a:xfrm>
+            <a:off x="7213092" y="2038350"/>
+            <a:ext cx="626364" cy="626364"/>
+          </a:xfrm>
+          <a:prstGeom prst="ellipse">
+            <a:avLst/>
+          </a:prstGeom>
+          <a:solidFill>
+            <a:srgbClr val="EEF4F9"/>
+          </a:solidFill>
+          <a:ln w="19050">
+            <a:solidFill>
+              <a:srgbClr val="014172"/>
+            </a:solidFill>
+          </a:ln>
+          <a:effectLst/>
+        </p:spPr>
+        <p:txBody>
+          <a:bodyPr rtlCol="0" anchor="ctr"/>
+          <a:lstStyle/>
+          <a:p>
+            <a:pPr algn="ctr"/>
+          </a:p>
+        </p:txBody>
+      </p:sp>
+      <p:sp>
+        <p:nvSpPr>
+          <p:cNvPr id="15" name="Oval 14"/>
+          <p:cNvSpPr/>
+          <p:nvPr/>
+        </p:nvSpPr>
+        <p:spPr>
+          <a:xfrm>
+            <a:off x="7839456" y="2038350"/>
+            <a:ext cx="626364" cy="626364"/>
+          </a:xfrm>
+          <a:prstGeom prst="ellipse">
+            <a:avLst/>
+          </a:prstGeom>
+          <a:solidFill>
+            <a:srgbClr val="EEF4F9"/>
+          </a:solidFill>
+          <a:ln w="19050">
+            <a:solidFill>
+              <a:srgbClr val="014172"/>
+            </a:solidFill>
+          </a:ln>
+          <a:effectLst/>
+        </p:spPr>
+        <p:txBody>
+          <a:bodyPr rtlCol="0" anchor="ctr"/>
+          <a:lstStyle/>
+          <a:p>
+            <a:pPr algn="ctr"/>
+          </a:p>
+        </p:txBody>
+      </p:sp>
+      <p:sp>
+        <p:nvSpPr>
+          <p:cNvPr id="16" name="Oval 15"/>
+          <p:cNvSpPr/>
+          <p:nvPr/>
+        </p:nvSpPr>
+        <p:spPr>
+          <a:xfrm>
+            <a:off x="5334000" y="2664714"/>
+            <a:ext cx="626364" cy="626364"/>
+          </a:xfrm>
+          <a:prstGeom prst="ellipse">
+            <a:avLst/>
+          </a:prstGeom>
+          <a:solidFill>
+            <a:srgbClr val="EEF4F9"/>
+          </a:solidFill>
+          <a:ln w="19050">
+            <a:solidFill>
+              <a:srgbClr val="014172"/>
+            </a:solidFill>
+          </a:ln>
+          <a:effectLst/>
+        </p:spPr>
+        <p:txBody>
+          <a:bodyPr rtlCol="0" anchor="ctr"/>
+          <a:lstStyle/>
+          <a:p>
+            <a:pPr algn="ctr"/>
+          </a:p>
+        </p:txBody>
+      </p:sp>
+      <p:sp>
+        <p:nvSpPr>
+          <p:cNvPr id="17" name="Oval 16"/>
+          <p:cNvSpPr/>
+          <p:nvPr/>
+        </p:nvSpPr>
+        <p:spPr>
+          <a:xfrm>
+            <a:off x="5960364" y="2664714"/>
+            <a:ext cx="626364" cy="626364"/>
+          </a:xfrm>
+          <a:prstGeom prst="ellipse">
+            <a:avLst/>
+          </a:prstGeom>
+          <a:solidFill>
+            <a:srgbClr val="EEF4F9"/>
+          </a:solidFill>
+          <a:ln w="19050">
+            <a:solidFill>
+              <a:srgbClr val="014172"/>
+            </a:solidFill>
+          </a:ln>
+          <a:effectLst/>
+        </p:spPr>
+        <p:txBody>
+          <a:bodyPr rtlCol="0" anchor="ctr"/>
+          <a:lstStyle/>
+          <a:p>
+            <a:pPr algn="ctr"/>
+          </a:p>
+        </p:txBody>
+      </p:sp>
+      <p:sp>
+        <p:nvSpPr>
+          <p:cNvPr id="18" name="Oval 17"/>
+          <p:cNvSpPr/>
+          <p:nvPr/>
+        </p:nvSpPr>
+        <p:spPr>
+          <a:xfrm>
+            <a:off x="6586728" y="2664714"/>
+            <a:ext cx="626364" cy="626364"/>
+          </a:xfrm>
+          <a:prstGeom prst="ellipse">
+            <a:avLst/>
+          </a:prstGeom>
+          <a:solidFill>
+            <a:srgbClr val="EEF4F9"/>
+          </a:solidFill>
+          <a:ln w="19050">
+            <a:solidFill>
+              <a:srgbClr val="014172"/>
+            </a:solidFill>
+          </a:ln>
+          <a:effectLst/>
+        </p:spPr>
+        <p:txBody>
+          <a:bodyPr rtlCol="0" anchor="ctr"/>
+          <a:lstStyle/>
+          <a:p>
+            <a:pPr algn="ctr"/>
+          </a:p>
+        </p:txBody>
+      </p:sp>
+      <p:sp>
+        <p:nvSpPr>
+          <p:cNvPr id="19" name="Oval 18"/>
+          <p:cNvSpPr/>
+          <p:nvPr/>
+        </p:nvSpPr>
+        <p:spPr>
+          <a:xfrm>
+            <a:off x="7213092" y="2664714"/>
+            <a:ext cx="626364" cy="626364"/>
+          </a:xfrm>
+          <a:prstGeom prst="ellipse">
+            <a:avLst/>
+          </a:prstGeom>
+          <a:solidFill>
+            <a:srgbClr val="EEF4F9"/>
+          </a:solidFill>
+          <a:ln w="19050">
+            <a:solidFill>
+              <a:srgbClr val="014172"/>
+            </a:solidFill>
+          </a:ln>
+          <a:effectLst/>
+        </p:spPr>
+        <p:txBody>
+          <a:bodyPr rtlCol="0" anchor="ctr"/>
+          <a:lstStyle/>
+          <a:p>
+            <a:pPr algn="ctr"/>
+          </a:p>
+        </p:txBody>
+      </p:sp>
+      <p:sp>
+        <p:nvSpPr>
+          <p:cNvPr id="20" name="Oval 19"/>
+          <p:cNvSpPr/>
+          <p:nvPr/>
+        </p:nvSpPr>
+        <p:spPr>
+          <a:xfrm>
+            <a:off x="7839456" y="2664714"/>
+            <a:ext cx="626364" cy="626364"/>
+          </a:xfrm>
+          <a:prstGeom prst="ellipse">
+            <a:avLst/>
+          </a:prstGeom>
+          <a:solidFill>
+            <a:srgbClr val="EEF4F9"/>
+          </a:solidFill>
+          <a:ln w="19050">
+            <a:solidFill>
+              <a:srgbClr val="014172"/>
+            </a:solidFill>
+          </a:ln>
+          <a:effectLst/>
+        </p:spPr>
+        <p:txBody>
+          <a:bodyPr rtlCol="0" anchor="ctr"/>
+          <a:lstStyle/>
+          <a:p>
+            <a:pPr algn="ctr"/>
+          </a:p>
+        </p:txBody>
+      </p:sp>
+      <p:sp>
+        <p:nvSpPr>
+          <p:cNvPr id="21" name="Oval 20"/>
+          <p:cNvSpPr/>
+          <p:nvPr/>
+        </p:nvSpPr>
+        <p:spPr>
+          <a:xfrm>
+            <a:off x="5334000" y="3291078"/>
+            <a:ext cx="626364" cy="626364"/>
+          </a:xfrm>
+          <a:prstGeom prst="ellipse">
+            <a:avLst/>
+          </a:prstGeom>
+          <a:solidFill>
+            <a:srgbClr val="EEF4F9"/>
+          </a:solidFill>
+          <a:ln w="19050">
+            <a:solidFill>
+              <a:srgbClr val="014172"/>
+            </a:solidFill>
+          </a:ln>
+          <a:effectLst/>
+        </p:spPr>
+        <p:txBody>
+          <a:bodyPr rtlCol="0" anchor="ctr"/>
+          <a:lstStyle/>
+          <a:p>
+            <a:pPr algn="ctr"/>
+          </a:p>
+        </p:txBody>
+      </p:sp>
+      <p:sp>
+        <p:nvSpPr>
+          <p:cNvPr id="22" name="Oval 21"/>
+          <p:cNvSpPr/>
+          <p:nvPr/>
+        </p:nvSpPr>
+        <p:spPr>
+          <a:xfrm>
+            <a:off x="5960364" y="3291078"/>
+            <a:ext cx="626364" cy="626364"/>
+          </a:xfrm>
+          <a:prstGeom prst="ellipse">
+            <a:avLst/>
+          </a:prstGeom>
+          <a:solidFill>
+            <a:srgbClr val="EEF4F9"/>
+          </a:solidFill>
+          <a:ln w="19050">
+            <a:solidFill>
+              <a:srgbClr val="014172"/>
+            </a:solidFill>
+          </a:ln>
+          <a:effectLst/>
+        </p:spPr>
+        <p:txBody>
+          <a:bodyPr rtlCol="0" anchor="ctr"/>
+          <a:lstStyle/>
+          <a:p>
+            <a:pPr algn="ctr"/>
+          </a:p>
+        </p:txBody>
+      </p:sp>
+      <p:sp>
+        <p:nvSpPr>
+          <p:cNvPr id="23" name="Oval 22"/>
+          <p:cNvSpPr/>
+          <p:nvPr/>
+        </p:nvSpPr>
+        <p:spPr>
+          <a:xfrm>
+            <a:off x="6586728" y="3291078"/>
+            <a:ext cx="626364" cy="626364"/>
+          </a:xfrm>
+          <a:prstGeom prst="ellipse">
+            <a:avLst/>
+          </a:prstGeom>
+          <a:solidFill>
+            <a:srgbClr val="EEF4F9"/>
+          </a:solidFill>
+          <a:ln w="19050">
+            <a:solidFill>
+              <a:srgbClr val="014172"/>
+            </a:solidFill>
+          </a:ln>
+          <a:effectLst/>
+        </p:spPr>
+        <p:txBody>
+          <a:bodyPr rtlCol="0" anchor="ctr"/>
+          <a:lstStyle/>
+          <a:p>
+            <a:pPr algn="ctr"/>
+          </a:p>
+        </p:txBody>
+      </p:sp>
+      <p:sp>
+        <p:nvSpPr>
+          <p:cNvPr id="24" name="Oval 23"/>
+          <p:cNvSpPr/>
+          <p:nvPr/>
+        </p:nvSpPr>
+        <p:spPr>
+          <a:xfrm>
+            <a:off x="7213092" y="3291078"/>
+            <a:ext cx="626364" cy="626364"/>
+          </a:xfrm>
+          <a:prstGeom prst="ellipse">
+            <a:avLst/>
+          </a:prstGeom>
+          <a:solidFill>
+            <a:srgbClr val="EEF4F9"/>
+          </a:solidFill>
+          <a:ln w="19050">
+            <a:solidFill>
+              <a:srgbClr val="014172"/>
+            </a:solidFill>
+          </a:ln>
+          <a:effectLst/>
+        </p:spPr>
+        <p:txBody>
+          <a:bodyPr rtlCol="0" anchor="ctr"/>
+          <a:lstStyle/>
+          <a:p>
+            <a:pPr algn="ctr"/>
+          </a:p>
+        </p:txBody>
+      </p:sp>
+      <p:sp>
+        <p:nvSpPr>
+          <p:cNvPr id="25" name="Oval 24"/>
+          <p:cNvSpPr/>
+          <p:nvPr/>
+        </p:nvSpPr>
+        <p:spPr>
+          <a:xfrm>
+            <a:off x="7839456" y="3291078"/>
+            <a:ext cx="626364" cy="626364"/>
+          </a:xfrm>
+          <a:prstGeom prst="ellipse">
+            <a:avLst/>
+          </a:prstGeom>
+          <a:solidFill>
+            <a:srgbClr val="EEF4F9"/>
+          </a:solidFill>
+          <a:ln w="19050">
+            <a:solidFill>
+              <a:srgbClr val="014172"/>
+            </a:solidFill>
+          </a:ln>
+          <a:effectLst/>
+        </p:spPr>
+        <p:txBody>
+          <a:bodyPr rtlCol="0" anchor="ctr"/>
+          <a:lstStyle/>
+          <a:p>
+            <a:pPr algn="ctr"/>
+          </a:p>
+        </p:txBody>
+      </p:sp>
+      <p:sp>
+        <p:nvSpPr>
+          <p:cNvPr id="26" name="TextBox 25"/>
+          <p:cNvSpPr txBox="1"/>
+          <p:nvPr/>
+        </p:nvSpPr>
+        <p:spPr>
+          <a:xfrm>
+            <a:off x="5334000" y="1752600"/>
+            <a:ext cx="3810000" cy="228600"/>
+          </a:xfrm>
+          <a:prstGeom prst="rect">
+            <a:avLst/>
+          </a:prstGeom>
+          <a:noFill/>
+        </p:spPr>
+        <p:txBody>
+          <a:bodyPr wrap="none" lIns="0" rIns="0" tIns="0" bIns="0" anchor="ctr">
+            <a:spAutoFit/>
+          </a:bodyPr>
+          <a:lstStyle/>
+          <a:p>
+            <a:pPr algn="l"/>
+            <a:r>
+              <a:rPr sz="1200" b="0">
+                <a:solidFill>
+                  <a:srgbClr val="6A717B"/>
+                </a:solidFill>
+                <a:latin typeface="Yu Gothic UI"/>
+              </a:rPr>
+              <a:t>内寸 22 × 39cm ／ 丸型 68.5φ</a:t>
+            </a:r>
+          </a:p>
+        </p:txBody>
+      </p:sp>
+      <p:sp>
+        <p:nvSpPr>
+          <p:cNvPr id="27" name="TextBox 26"/>
+          <p:cNvSpPr txBox="1"/>
+          <p:nvPr/>
+        </p:nvSpPr>
+        <p:spPr>
+          <a:xfrm>
+            <a:off x="5334000" y="4183380"/>
+            <a:ext cx="4381500" cy="228600"/>
+          </a:xfrm>
+          <a:prstGeom prst="rect">
+            <a:avLst/>
+          </a:prstGeom>
+          <a:noFill/>
+        </p:spPr>
+        <p:txBody>
+          <a:bodyPr wrap="none" lIns="0" rIns="0" tIns="0" bIns="0" anchor="ctr">
+            <a:spAutoFit/>
+          </a:bodyPr>
+          <a:lstStyle/>
+          <a:p>
+            <a:pPr algn="l"/>
+            <a:r>
+              <a:rPr sz="1125" b="0">
+                <a:solidFill>
+                  <a:srgbClr val="6A717B"/>
+                </a:solidFill>
+                <a:latin typeface="Yu Gothic UI"/>
+              </a:rPr>
+              <a:t>灰色は割り切れずに捨てられる余り</a:t>
+            </a:r>
+          </a:p>
+        </p:txBody>
+      </p:sp>
+      <p:sp>
+        <p:nvSpPr>
+          <p:cNvPr id="28" name="TextBox 27"/>
+          <p:cNvSpPr txBox="1"/>
+          <p:nvPr/>
+        </p:nvSpPr>
+        <p:spPr>
+          <a:xfrm>
+            <a:off x="685800" y="2000250"/>
+            <a:ext cx="4000500" cy="247650"/>
+          </a:xfrm>
+          <a:prstGeom prst="rect">
+            <a:avLst/>
+          </a:prstGeom>
+          <a:noFill/>
+        </p:spPr>
+        <p:txBody>
+          <a:bodyPr wrap="none" lIns="0" rIns="0" tIns="0" bIns="0" anchor="ctr">
+            <a:spAutoFit/>
+          </a:bodyPr>
+          <a:lstStyle/>
+          <a:p>
+            <a:pPr algn="l"/>
+            <a:r>
+              <a:rPr sz="1575" b="1">
+                <a:solidFill>
+                  <a:srgbClr val="2E2E33"/>
+                </a:solidFill>
+                <a:latin typeface="Yu Gothic UI"/>
+              </a:rPr>
+              <a:t>床に並ぶ数で決まります</a:t>
+            </a:r>
+          </a:p>
+        </p:txBody>
+      </p:sp>
+      <p:sp>
+        <p:nvSpPr>
+          <p:cNvPr id="29" name="TextBox 28"/>
+          <p:cNvSpPr txBox="1"/>
+          <p:nvPr/>
+        </p:nvSpPr>
+        <p:spPr>
+          <a:xfrm>
+            <a:off x="685800" y="2495550"/>
+            <a:ext cx="4000500" cy="571500"/>
+          </a:xfrm>
+          <a:prstGeom prst="rect">
+            <a:avLst/>
+          </a:prstGeom>
+          <a:noFill/>
+        </p:spPr>
+        <p:txBody>
+          <a:bodyPr wrap="none" lIns="0" rIns="0" tIns="0" bIns="0" anchor="ctr">
+            <a:spAutoFit/>
+          </a:bodyPr>
+          <a:lstStyle/>
+          <a:p>
+            <a:pPr algn="l"/>
+            <a:r>
+              <a:rPr sz="1950" b="1">
+                <a:solidFill>
+                  <a:srgbClr val="2E2E33"/>
+                </a:solidFill>
+                <a:latin typeface="Yu Gothic UI"/>
+              </a:rPr>
+              <a:t>5列 × 3行 ＝ </a:t>
+            </a:r>
+            <a:r>
+              <a:rPr sz="3450" b="1">
+                <a:solidFill>
+                  <a:srgbClr val="014172"/>
+                </a:solidFill>
+                <a:latin typeface="Yu Gothic UI"/>
+              </a:rPr>
+              <a:t>15</a:t>
+            </a:r>
+            <a:r>
+              <a:rPr sz="1800" b="1">
+                <a:solidFill>
+                  <a:srgbClr val="014172"/>
+                </a:solidFill>
+                <a:latin typeface="Yu Gothic UI"/>
+              </a:rPr>
+              <a:t>本</a:t>
+            </a:r>
+          </a:p>
+        </p:txBody>
+      </p:sp>
+      <p:sp>
+        <p:nvSpPr>
+          <p:cNvPr id="30" name="Rounded Rectangle 29"/>
+          <p:cNvSpPr/>
+          <p:nvPr/>
+        </p:nvSpPr>
+        <p:spPr>
+          <a:xfrm>
+            <a:off x="685800" y="3143250"/>
+            <a:ext cx="4000500" cy="914400"/>
+          </a:xfrm>
+          <a:prstGeom prst="roundRect">
+            <a:avLst>
+              <a:gd name="adj" fmla="val 6000"/>
+            </a:avLst>
+          </a:prstGeom>
+          <a:solidFill>
+            <a:srgbClr val="F2F5F8"/>
+          </a:solidFill>
+          <a:ln>
+            <a:noFill/>
+          </a:ln>
+          <a:effectLst/>
+        </p:spPr>
+        <p:txBody>
+          <a:bodyPr rtlCol="0" anchor="ctr"/>
+          <a:lstStyle/>
+          <a:p>
+            <a:pPr algn="ctr"/>
+          </a:p>
+        </p:txBody>
+      </p:sp>
+      <p:sp>
+        <p:nvSpPr>
+          <p:cNvPr id="31" name="TextBox 30"/>
+          <p:cNvSpPr txBox="1"/>
+          <p:nvPr/>
+        </p:nvSpPr>
+        <p:spPr>
+          <a:xfrm>
+            <a:off x="857250" y="3333750"/>
+            <a:ext cx="3619500" cy="228600"/>
+          </a:xfrm>
+          <a:prstGeom prst="rect">
+            <a:avLst/>
+          </a:prstGeom>
+          <a:noFill/>
+        </p:spPr>
+        <p:txBody>
+          <a:bodyPr wrap="none" lIns="0" rIns="0" tIns="0" bIns="0" anchor="ctr">
+            <a:spAutoFit/>
+          </a:bodyPr>
+          <a:lstStyle/>
+          <a:p>
+            <a:pPr algn="l"/>
+            <a:r>
+              <a:rPr sz="1350" b="1">
+                <a:solidFill>
+                  <a:srgbClr val="2E2E33"/>
+                </a:solidFill>
+                <a:latin typeface="Yu Gothic UI"/>
+              </a:rPr>
+              <a:t>同じ20Lでも 15本 と 18本</a:t>
+            </a:r>
+          </a:p>
+        </p:txBody>
+      </p:sp>
+      <p:sp>
+        <p:nvSpPr>
+          <p:cNvPr id="32" name="TextBox 31"/>
+          <p:cNvSpPr txBox="1"/>
+          <p:nvPr/>
+        </p:nvSpPr>
+        <p:spPr>
+          <a:xfrm>
+            <a:off x="857250" y="3638550"/>
+            <a:ext cx="3619500" cy="209550"/>
+          </a:xfrm>
+          <a:prstGeom prst="rect">
+            <a:avLst/>
+          </a:prstGeom>
+          <a:noFill/>
+        </p:spPr>
+        <p:txBody>
+          <a:bodyPr wrap="none" lIns="0" rIns="0" tIns="0" bIns="0" anchor="ctr">
+            <a:spAutoFit/>
+          </a:bodyPr>
+          <a:lstStyle/>
+          <a:p>
+            <a:pPr algn="l"/>
+            <a:r>
+              <a:rPr sz="1125" b="0">
+                <a:solidFill>
+                  <a:srgbClr val="6A717B"/>
+                </a:solidFill>
+                <a:latin typeface="Yu Gothic UI"/>
+              </a:rPr>
+              <a:t>容量Lは中身の広さを表していません</a:t>
+            </a:r>
+          </a:p>
+        </p:txBody>
+      </p:sp>
+      <p:sp>
+        <p:nvSpPr>
+          <p:cNvPr id="33" name="Rectangle 32"/>
+          <p:cNvSpPr/>
+          <p:nvPr/>
+        </p:nvSpPr>
+        <p:spPr>
+          <a:xfrm>
+            <a:off x="609600" y="5295900"/>
+            <a:ext cx="10210800" cy="9525"/>
+          </a:xfrm>
+          <a:prstGeom prst="rect">
+            <a:avLst/>
+          </a:prstGeom>
+          <a:solidFill>
+            <a:srgbClr val="E2E7EC"/>
+          </a:solidFill>
+          <a:ln>
+            <a:noFill/>
+          </a:ln>
+          <a:effectLst/>
+        </p:spPr>
+        <p:txBody>
+          <a:bodyPr rtlCol="0" anchor="ctr"/>
+          <a:lstStyle/>
+          <a:p>
+            <a:pPr algn="ctr"/>
+          </a:p>
+        </p:txBody>
+      </p:sp>
+      <p:sp>
+        <p:nvSpPr>
+          <p:cNvPr id="34" name="TextBox 33"/>
+          <p:cNvSpPr txBox="1"/>
+          <p:nvPr/>
+        </p:nvSpPr>
+        <p:spPr>
+          <a:xfrm>
+            <a:off x="609600" y="5429250"/>
+            <a:ext cx="7239000" cy="247650"/>
+          </a:xfrm>
+          <a:prstGeom prst="rect">
+            <a:avLst/>
+          </a:prstGeom>
+          <a:noFill/>
+        </p:spPr>
+        <p:txBody>
+          <a:bodyPr wrap="none" lIns="0" rIns="0" tIns="0" bIns="0" anchor="ctr">
+            <a:spAutoFit/>
+          </a:bodyPr>
+          <a:lstStyle/>
+          <a:p>
+            <a:pPr algn="l"/>
+            <a:r>
+              <a:rPr sz="1425" b="1">
+                <a:solidFill>
+                  <a:srgbClr val="2E2E33"/>
+                </a:solidFill>
+                <a:latin typeface="Yu Gothic UI"/>
+              </a:rPr>
+              <a:t>容量Lではなく、内寸の掛け算で決まります。</a:t>
+            </a:r>
+          </a:p>
+        </p:txBody>
+      </p:sp>
+      <p:sp>
+        <p:nvSpPr>
+          <p:cNvPr id="35" name="TextBox 34"/>
+          <p:cNvSpPr txBox="1"/>
+          <p:nvPr/>
+        </p:nvSpPr>
+        <p:spPr>
+          <a:xfrm>
+            <a:off x="609600" y="5676900"/>
+            <a:ext cx="7620000" cy="209550"/>
+          </a:xfrm>
+          <a:prstGeom prst="rect">
+            <a:avLst/>
+          </a:prstGeom>
+          <a:noFill/>
+        </p:spPr>
+        <p:txBody>
+          <a:bodyPr wrap="none" lIns="0" rIns="0" tIns="0" bIns="0" anchor="ctr">
+            <a:spAutoFit/>
+          </a:bodyPr>
+          <a:lstStyle/>
+          <a:p>
+            <a:pPr algn="l"/>
+            <a:r>
+              <a:rPr sz="1050" b="0">
+                <a:solidFill>
+                  <a:srgbClr val="6A717B"/>
+                </a:solidFill>
+                <a:latin typeface="Yu Gothic UI"/>
+              </a:rPr>
+              <a:t>メーカー公表値からの計算です（実測ではありません）</a:t>
+            </a:r>
+          </a:p>
+        </p:txBody>
+      </p:sp>
+      <p:sp>
+        <p:nvSpPr>
+          <p:cNvPr id="36" name="TextBox 35"/>
+          <p:cNvSpPr txBox="1"/>
+          <p:nvPr/>
+        </p:nvSpPr>
+        <p:spPr>
+          <a:xfrm>
+            <a:off x="7962900" y="5676900"/>
+            <a:ext cx="2857500" cy="209550"/>
+          </a:xfrm>
+          <a:prstGeom prst="rect">
+            <a:avLst/>
+          </a:prstGeom>
+          <a:noFill/>
+        </p:spPr>
+        <p:txBody>
+          <a:bodyPr wrap="none" lIns="0" rIns="0" tIns="0" bIns="0" anchor="ctr">
+            <a:spAutoFit/>
+          </a:bodyPr>
+          <a:lstStyle/>
+          <a:p>
+            <a:pPr algn="r"/>
+            <a:r>
+              <a:rPr sz="1050" b="0">
+                <a:solidFill>
+                  <a:srgbClr val="6A717B"/>
+                </a:solidFill>
+                <a:latin typeface="Yu Gothic UI"/>
+              </a:rPr>
+              <a:t>寸法で選ぶ　sunpou.nexeed-lab.com</a:t>
+            </a:r>
+          </a:p>
+        </p:txBody>
+      </p:sp>
+    </p:spTree>
+  </p:cSld>
+  <p:clrMapOvr>
+    <a:masterClrMapping/>
+  </p:clrMapOvr>
+</p:sld>
+</file>
+
+<file path=ppt/slides/slide4.xml><?xml version="1.0" encoding="utf-8"?>
+<p:sld xmlns:a="http://schemas.openxmlformats.org/drawingml/2006/main" xmlns:p="http://schemas.openxmlformats.org/presentationml/2006/main" xmlns:r="http://schemas.openxmlformats.org/officeDocument/2006/relationships">
+  <p:cSld>
+    <p:spTree>
+      <p:nvGrpSpPr>
+        <p:cNvPr id="1" name=""/>
+        <p:cNvGrpSpPr/>
+        <p:nvPr/>
+      </p:nvGrpSpPr>
+      <p:grpSpPr/>
+      <p:sp>
+        <p:nvSpPr>
+          <p:cNvPr id="2" name="Rectangle 1"/>
+          <p:cNvSpPr/>
+          <p:nvPr/>
+        </p:nvSpPr>
+        <p:spPr>
+          <a:xfrm>
+            <a:off x="0" y="0"/>
+            <a:ext cx="11430000" cy="6000750"/>
+          </a:xfrm>
+          <a:prstGeom prst="rect">
+            <a:avLst/>
+          </a:prstGeom>
+          <a:solidFill>
+            <a:srgbClr val="FCFCFC"/>
+          </a:solidFill>
+          <a:ln>
+            <a:noFill/>
+          </a:ln>
+          <a:effectLst/>
+        </p:spPr>
+        <p:txBody>
+          <a:bodyPr rtlCol="0" anchor="ctr"/>
+          <a:lstStyle/>
+          <a:p>
+            <a:pPr algn="ctr"/>
+          </a:p>
+        </p:txBody>
+      </p:sp>
+      <p:sp>
+        <p:nvSpPr>
+          <p:cNvPr id="3" name="Rectangle 2"/>
+          <p:cNvSpPr/>
+          <p:nvPr/>
+        </p:nvSpPr>
+        <p:spPr>
+          <a:xfrm>
+            <a:off x="0" y="0"/>
+            <a:ext cx="114300" cy="6000750"/>
+          </a:xfrm>
+          <a:prstGeom prst="rect">
+            <a:avLst/>
+          </a:prstGeom>
+          <a:solidFill>
+            <a:srgbClr val="014172"/>
+          </a:solidFill>
+          <a:ln>
+            <a:noFill/>
+          </a:ln>
+          <a:effectLst/>
+        </p:spPr>
+        <p:txBody>
+          <a:bodyPr rtlCol="0" anchor="ctr"/>
+          <a:lstStyle/>
+          <a:p>
+            <a:pPr algn="ctr"/>
+          </a:p>
+        </p:txBody>
+      </p:sp>
+      <p:sp>
+        <p:nvSpPr>
+          <p:cNvPr id="4" name="Rectangle 3"/>
+          <p:cNvSpPr/>
+          <p:nvPr/>
+        </p:nvSpPr>
+        <p:spPr>
+          <a:xfrm>
+            <a:off x="0" y="0"/>
+            <a:ext cx="11430000" cy="1504950"/>
+          </a:xfrm>
+          <a:prstGeom prst="rect">
+            <a:avLst/>
+          </a:prstGeom>
+          <a:solidFill>
+            <a:srgbClr val="014172"/>
+          </a:solidFill>
+          <a:ln>
+            <a:noFill/>
+          </a:ln>
+          <a:effectLst/>
+        </p:spPr>
+        <p:txBody>
+          <a:bodyPr rtlCol="0" anchor="ctr"/>
+          <a:lstStyle/>
+          <a:p>
+            <a:pPr algn="ctr"/>
+          </a:p>
+        </p:txBody>
+      </p:sp>
+      <p:sp>
+        <p:nvSpPr>
+          <p:cNvPr id="5" name="TextBox 4"/>
+          <p:cNvSpPr txBox="1"/>
+          <p:nvPr/>
+        </p:nvSpPr>
+        <p:spPr>
+          <a:xfrm>
+            <a:off x="609600" y="361950"/>
+            <a:ext cx="7429500" cy="476250"/>
+          </a:xfrm>
+          <a:prstGeom prst="rect">
+            <a:avLst/>
+          </a:prstGeom>
+          <a:noFill/>
+        </p:spPr>
+        <p:txBody>
+          <a:bodyPr wrap="none" lIns="0" rIns="0" tIns="0" bIns="0" anchor="ctr">
+            <a:spAutoFit/>
+          </a:bodyPr>
+          <a:lstStyle/>
+          <a:p>
+            <a:pPr algn="l"/>
+            <a:r>
+              <a:rPr sz="3000" b="1">
+                <a:solidFill>
+                  <a:srgbClr val="FFFFFF"/>
+                </a:solidFill>
+                <a:latin typeface="Yu Gothic UI"/>
+              </a:rPr>
+              <a:t>2Lペットボトルは立てて入る？</a:t>
+            </a:r>
+          </a:p>
+        </p:txBody>
+      </p:sp>
+      <p:sp>
+        <p:nvSpPr>
+          <p:cNvPr id="6" name="TextBox 5"/>
+          <p:cNvSpPr txBox="1"/>
+          <p:nvPr/>
+        </p:nvSpPr>
+        <p:spPr>
+          <a:xfrm>
+            <a:off x="609600" y="876300"/>
+            <a:ext cx="7429500" cy="247650"/>
+          </a:xfrm>
+          <a:prstGeom prst="rect">
+            <a:avLst/>
+          </a:prstGeom>
+          <a:noFill/>
+        </p:spPr>
+        <p:txBody>
+          <a:bodyPr wrap="none" lIns="0" rIns="0" tIns="0" bIns="0" anchor="ctr">
+            <a:spAutoFit/>
+          </a:bodyPr>
+          <a:lstStyle/>
+          <a:p>
+            <a:pPr algn="l"/>
+            <a:r>
+              <a:rPr sz="1425" b="0">
+                <a:solidFill>
+                  <a:srgbClr val="DAE7F2"/>
+                </a:solidFill>
+                <a:latin typeface="Yu Gothic UI"/>
+              </a:rPr>
+              <a:t>10〜25Lには、まず立ちません</a:t>
+            </a:r>
+          </a:p>
+        </p:txBody>
+      </p:sp>
+      <p:sp>
+        <p:nvSpPr>
+          <p:cNvPr id="7" name="Rounded Rectangle 6"/>
+          <p:cNvSpPr/>
+          <p:nvPr/>
+        </p:nvSpPr>
+        <p:spPr>
+          <a:xfrm>
+            <a:off x="8305800" y="247650"/>
+            <a:ext cx="2514600" cy="1009650"/>
+          </a:xfrm>
+          <a:prstGeom prst="roundRect">
+            <a:avLst>
+              <a:gd name="adj" fmla="val 12000"/>
+            </a:avLst>
+          </a:prstGeom>
+          <a:solidFill>
+            <a:srgbClr val="FFFFFF"/>
+          </a:solidFill>
+          <a:ln>
+            <a:noFill/>
+          </a:ln>
+          <a:effectLst>
+            <a:outerShdw blurRad="254000" dist="63500" dir="5400000" rotWithShape="0">
+              <a:srgbClr val="0B2B45">
+                <a:alpha val="30000"/>
+              </a:srgbClr>
+            </a:outerShdw>
+          </a:effectLst>
+        </p:spPr>
+        <p:txBody>
+          <a:bodyPr rtlCol="0" anchor="ctr"/>
+          <a:lstStyle/>
+          <a:p>
+            <a:pPr algn="ctr"/>
+          </a:p>
+        </p:txBody>
+      </p:sp>
+      <p:sp>
+        <p:nvSpPr>
+          <p:cNvPr id="8" name="TextBox 7"/>
+          <p:cNvSpPr txBox="1"/>
+          <p:nvPr/>
+        </p:nvSpPr>
+        <p:spPr>
+          <a:xfrm>
+            <a:off x="8515350" y="400050"/>
+            <a:ext cx="2133600" cy="209550"/>
+          </a:xfrm>
+          <a:prstGeom prst="rect">
+            <a:avLst/>
+          </a:prstGeom>
+          <a:noFill/>
+        </p:spPr>
+        <p:txBody>
+          <a:bodyPr wrap="none" lIns="0" rIns="0" tIns="0" bIns="0" anchor="ctr">
+            <a:spAutoFit/>
+          </a:bodyPr>
+          <a:lstStyle/>
+          <a:p>
+            <a:pPr algn="l"/>
+            <a:r>
+              <a:rPr sz="1125" b="0">
+                <a:solidFill>
+                  <a:srgbClr val="6A717B"/>
+                </a:solidFill>
+                <a:latin typeface="Yu Gothic UI"/>
+              </a:rPr>
+              <a:t>はみ出す</a:t>
+            </a:r>
+          </a:p>
+        </p:txBody>
+      </p:sp>
+      <p:sp>
+        <p:nvSpPr>
+          <p:cNvPr id="9" name="TextBox 8"/>
+          <p:cNvSpPr txBox="1"/>
+          <p:nvPr/>
+        </p:nvSpPr>
+        <p:spPr>
+          <a:xfrm>
+            <a:off x="8515350" y="647700"/>
+            <a:ext cx="2133600" cy="533400"/>
+          </a:xfrm>
+          <a:prstGeom prst="rect">
+            <a:avLst/>
+          </a:prstGeom>
+          <a:noFill/>
+        </p:spPr>
+        <p:txBody>
+          <a:bodyPr wrap="none" lIns="0" rIns="0" tIns="0" bIns="0" anchor="ctr">
+            <a:spAutoFit/>
+          </a:bodyPr>
+          <a:lstStyle/>
+          <a:p>
+            <a:pPr algn="l"/>
+            <a:r>
+              <a:rPr sz="3900" b="1">
+                <a:solidFill>
+                  <a:srgbClr val="014172"/>
+                </a:solidFill>
+                <a:latin typeface="Yu Gothic UI"/>
+              </a:rPr>
+              <a:t>51</a:t>
+            </a:r>
+            <a:r>
+              <a:rPr sz="1950" b="1">
+                <a:solidFill>
+                  <a:srgbClr val="014172"/>
+                </a:solidFill>
+                <a:latin typeface="Yu Gothic UI"/>
+              </a:rPr>
+              <a:t>mm</a:t>
+            </a:r>
+          </a:p>
+        </p:txBody>
+      </p:sp>
+      <p:sp>
+        <p:nvSpPr>
+          <p:cNvPr id="10" name="Rectangle 9"/>
+          <p:cNvSpPr/>
+          <p:nvPr/>
+        </p:nvSpPr>
+        <p:spPr>
+          <a:xfrm>
+            <a:off x="4286250" y="2524125"/>
+            <a:ext cx="2286000" cy="2428875"/>
+          </a:xfrm>
+          <a:prstGeom prst="rect">
+            <a:avLst/>
+          </a:prstGeom>
+          <a:solidFill>
+            <a:srgbClr val="F2F5F8"/>
+          </a:solidFill>
+          <a:ln w="19050">
+            <a:solidFill>
+              <a:srgbClr val="DAE7F2"/>
+            </a:solidFill>
+          </a:ln>
+          <a:effectLst/>
+        </p:spPr>
+        <p:txBody>
+          <a:bodyPr rtlCol="0" anchor="ctr"/>
+          <a:lstStyle/>
+          <a:p>
+            <a:pPr algn="ctr"/>
+          </a:p>
+        </p:txBody>
+      </p:sp>
+      <p:sp>
+        <p:nvSpPr>
+          <p:cNvPr id="11" name="TextBox 10"/>
+          <p:cNvSpPr txBox="1"/>
+          <p:nvPr/>
+        </p:nvSpPr>
+        <p:spPr>
+          <a:xfrm>
+            <a:off x="4286250" y="2257425"/>
+            <a:ext cx="2857500" cy="228600"/>
+          </a:xfrm>
+          <a:prstGeom prst="rect">
+            <a:avLst/>
+          </a:prstGeom>
+          <a:noFill/>
+        </p:spPr>
+        <p:txBody>
+          <a:bodyPr wrap="none" lIns="0" rIns="0" tIns="0" bIns="0" anchor="ctr">
+            <a:spAutoFit/>
+          </a:bodyPr>
+          <a:lstStyle/>
+          <a:p>
+            <a:pPr algn="l"/>
+            <a:r>
+              <a:rPr sz="1200" b="0">
+                <a:solidFill>
+                  <a:srgbClr val="6A717B"/>
+                </a:solidFill>
+                <a:latin typeface="Yu Gothic UI"/>
+              </a:rPr>
+              <a:t>内寸の深さ 255mm</a:t>
+            </a:r>
+          </a:p>
+        </p:txBody>
+      </p:sp>
+      <p:sp>
+        <p:nvSpPr>
+          <p:cNvPr id="12" name="Rounded Rectangle 11"/>
+          <p:cNvSpPr/>
+          <p:nvPr/>
+        </p:nvSpPr>
+        <p:spPr>
+          <a:xfrm>
+            <a:off x="4857750" y="2038350"/>
+            <a:ext cx="914400" cy="2914650"/>
+          </a:xfrm>
+          <a:prstGeom prst="roundRect">
+            <a:avLst>
+              <a:gd name="adj" fmla="val 6000"/>
+            </a:avLst>
+          </a:prstGeom>
+          <a:gradFill rotWithShape="1">
+            <a:gsLst>
+              <a:gs pos="0">
+                <a:srgbClr val="EEF4F9"/>
+              </a:gs>
+              <a:gs pos="100000">
+                <a:srgbClr val="DAE7F2"/>
+              </a:gs>
+            </a:gsLst>
+            <a:lin scaled="0" ang="16200000"/>
+          </a:gradFill>
+          <a:ln w="19050">
+            <a:solidFill>
+              <a:srgbClr val="014172"/>
+            </a:solidFill>
+          </a:ln>
+          <a:effectLst/>
+        </p:spPr>
+        <p:txBody>
+          <a:bodyPr rtlCol="0" anchor="ctr"/>
+          <a:lstStyle/>
+          <a:p>
+            <a:pPr algn="ctr"/>
+          </a:p>
+        </p:txBody>
+      </p:sp>
+      <p:sp>
+        <p:nvSpPr>
+          <p:cNvPr id="13" name="TextBox 12"/>
+          <p:cNvSpPr txBox="1"/>
+          <p:nvPr/>
+        </p:nvSpPr>
+        <p:spPr>
+          <a:xfrm>
+            <a:off x="4857750" y="5086350"/>
+            <a:ext cx="3048000" cy="228600"/>
+          </a:xfrm>
+          <a:prstGeom prst="rect">
+            <a:avLst/>
+          </a:prstGeom>
+          <a:noFill/>
+        </p:spPr>
+        <p:txBody>
+          <a:bodyPr wrap="none" lIns="0" rIns="0" tIns="0" bIns="0" anchor="ctr">
+            <a:spAutoFit/>
+          </a:bodyPr>
+          <a:lstStyle/>
+          <a:p>
+            <a:pPr algn="l"/>
+            <a:r>
+              <a:rPr sz="1200" b="0">
+                <a:solidFill>
+                  <a:srgbClr val="6A717B"/>
+                </a:solidFill>
+                <a:latin typeface="Yu Gothic UI"/>
+              </a:rPr>
+              <a:t>2Lボトル 全高 306mm</a:t>
+            </a:r>
+          </a:p>
+        </p:txBody>
+      </p:sp>
+      <p:sp>
+        <p:nvSpPr>
+          <p:cNvPr id="14" name="Rectangle 13"/>
+          <p:cNvSpPr/>
+          <p:nvPr/>
+        </p:nvSpPr>
+        <p:spPr>
+          <a:xfrm>
+            <a:off x="4857750" y="2038350"/>
+            <a:ext cx="914400" cy="485775"/>
+          </a:xfrm>
+          <a:prstGeom prst="rect">
+            <a:avLst/>
+          </a:prstGeom>
+          <a:solidFill>
+            <a:srgbClr val="FDF2E4"/>
+          </a:solidFill>
+          <a:ln w="19050">
+            <a:solidFill>
+              <a:srgbClr val="A8410F"/>
+            </a:solidFill>
+          </a:ln>
+          <a:effectLst/>
+        </p:spPr>
+        <p:txBody>
+          <a:bodyPr rtlCol="0" anchor="ctr"/>
+          <a:lstStyle/>
+          <a:p>
+            <a:pPr algn="ctr"/>
+          </a:p>
+        </p:txBody>
+      </p:sp>
+      <p:sp>
+        <p:nvSpPr>
+          <p:cNvPr id="15" name="TextBox 14"/>
+          <p:cNvSpPr txBox="1"/>
+          <p:nvPr/>
+        </p:nvSpPr>
+        <p:spPr>
+          <a:xfrm>
+            <a:off x="5905500" y="2095500"/>
+            <a:ext cx="2857500" cy="285750"/>
+          </a:xfrm>
+          <a:prstGeom prst="rect">
+            <a:avLst/>
+          </a:prstGeom>
+          <a:noFill/>
+        </p:spPr>
+        <p:txBody>
+          <a:bodyPr wrap="none" lIns="0" rIns="0" tIns="0" bIns="0" anchor="ctr">
+            <a:spAutoFit/>
+          </a:bodyPr>
+          <a:lstStyle/>
+          <a:p>
+            <a:pPr algn="l"/>
+            <a:r>
+              <a:rPr sz="1800" b="1">
+                <a:solidFill>
+                  <a:srgbClr val="A8410F"/>
+                </a:solidFill>
+                <a:latin typeface="Yu Gothic UI"/>
+              </a:rPr>
+              <a:t>51mm はみ出す</a:t>
+            </a:r>
+          </a:p>
+        </p:txBody>
+      </p:sp>
+      <p:sp>
+        <p:nvSpPr>
+          <p:cNvPr id="16" name="Rounded Rectangle 15"/>
+          <p:cNvSpPr/>
+          <p:nvPr/>
+        </p:nvSpPr>
+        <p:spPr>
+          <a:xfrm>
+            <a:off x="7429500" y="2038350"/>
+            <a:ext cx="3200400" cy="1143000"/>
+          </a:xfrm>
+          <a:prstGeom prst="roundRect">
+            <a:avLst>
+              <a:gd name="adj" fmla="val 6000"/>
+            </a:avLst>
+          </a:prstGeom>
+          <a:solidFill>
+            <a:srgbClr val="F2F5F8"/>
+          </a:solidFill>
+          <a:ln>
+            <a:noFill/>
+          </a:ln>
+          <a:effectLst/>
+        </p:spPr>
+        <p:txBody>
+          <a:bodyPr rtlCol="0" anchor="ctr"/>
+          <a:lstStyle/>
+          <a:p>
+            <a:pPr algn="ctr"/>
+          </a:p>
+        </p:txBody>
+      </p:sp>
+      <p:sp>
+        <p:nvSpPr>
+          <p:cNvPr id="17" name="TextBox 16"/>
+          <p:cNvSpPr txBox="1"/>
+          <p:nvPr/>
+        </p:nvSpPr>
+        <p:spPr>
+          <a:xfrm>
+            <a:off x="7620000" y="2247900"/>
+            <a:ext cx="2857500" cy="247650"/>
+          </a:xfrm>
+          <a:prstGeom prst="rect">
+            <a:avLst/>
+          </a:prstGeom>
+          <a:noFill/>
+        </p:spPr>
+        <p:txBody>
+          <a:bodyPr wrap="none" lIns="0" rIns="0" tIns="0" bIns="0" anchor="ctr">
+            <a:spAutoFit/>
+          </a:bodyPr>
+          <a:lstStyle/>
+          <a:p>
+            <a:pPr algn="l"/>
+            <a:r>
+              <a:rPr sz="1500" b="1">
+                <a:solidFill>
+                  <a:srgbClr val="2E2E33"/>
+                </a:solidFill>
+                <a:latin typeface="Yu Gothic UI"/>
+              </a:rPr>
+              <a:t>1.5L も同じ高さです</a:t>
+            </a:r>
+          </a:p>
+        </p:txBody>
+      </p:sp>
+      <p:sp>
+        <p:nvSpPr>
+          <p:cNvPr id="18" name="TextBox 17"/>
+          <p:cNvSpPr txBox="1"/>
+          <p:nvPr/>
+        </p:nvSpPr>
+        <p:spPr>
+          <a:xfrm>
+            <a:off x="7620000" y="2552700"/>
+            <a:ext cx="2857500" cy="228600"/>
+          </a:xfrm>
+          <a:prstGeom prst="rect">
+            <a:avLst/>
+          </a:prstGeom>
+          <a:noFill/>
+        </p:spPr>
+        <p:txBody>
+          <a:bodyPr wrap="none" lIns="0" rIns="0" tIns="0" bIns="0" anchor="ctr">
+            <a:spAutoFit/>
+          </a:bodyPr>
+          <a:lstStyle/>
+          <a:p>
+            <a:pPr algn="l"/>
+            <a:r>
+              <a:rPr sz="1200" b="0">
+                <a:solidFill>
+                  <a:srgbClr val="6A717B"/>
+                </a:solidFill>
+                <a:latin typeface="Yu Gothic UI"/>
+              </a:rPr>
+              <a:t>容量が減った分、細くなる</a:t>
+            </a:r>
+          </a:p>
+        </p:txBody>
+      </p:sp>
+      <p:sp>
+        <p:nvSpPr>
+          <p:cNvPr id="19" name="TextBox 18"/>
+          <p:cNvSpPr txBox="1"/>
+          <p:nvPr/>
+        </p:nvSpPr>
+        <p:spPr>
+          <a:xfrm>
+            <a:off x="7620000" y="2819400"/>
+            <a:ext cx="2857500" cy="228600"/>
+          </a:xfrm>
+          <a:prstGeom prst="rect">
+            <a:avLst/>
+          </a:prstGeom>
+          <a:noFill/>
+        </p:spPr>
+        <p:txBody>
+          <a:bodyPr wrap="none" lIns="0" rIns="0" tIns="0" bIns="0" anchor="ctr">
+            <a:spAutoFit/>
+          </a:bodyPr>
+          <a:lstStyle/>
+          <a:p>
+            <a:pPr algn="l"/>
+            <a:r>
+              <a:rPr sz="1200" b="0">
+                <a:solidFill>
+                  <a:srgbClr val="6A717B"/>
+                </a:solidFill>
+                <a:latin typeface="Yu Gothic UI"/>
+              </a:rPr>
+              <a:t>だけで背は変わりません</a:t>
+            </a:r>
+          </a:p>
+        </p:txBody>
+      </p:sp>
+      <p:sp>
+        <p:nvSpPr>
+          <p:cNvPr id="20" name="Rectangle 19"/>
+          <p:cNvSpPr/>
+          <p:nvPr/>
+        </p:nvSpPr>
+        <p:spPr>
+          <a:xfrm>
+            <a:off x="609600" y="5295900"/>
+            <a:ext cx="10210800" cy="9525"/>
+          </a:xfrm>
+          <a:prstGeom prst="rect">
+            <a:avLst/>
+          </a:prstGeom>
+          <a:solidFill>
+            <a:srgbClr val="E2E7EC"/>
+          </a:solidFill>
+          <a:ln>
+            <a:noFill/>
+          </a:ln>
+          <a:effectLst/>
+        </p:spPr>
+        <p:txBody>
+          <a:bodyPr rtlCol="0" anchor="ctr"/>
+          <a:lstStyle/>
+          <a:p>
+            <a:pPr algn="ctr"/>
+          </a:p>
+        </p:txBody>
+      </p:sp>
+      <p:sp>
+        <p:nvSpPr>
+          <p:cNvPr id="21" name="TextBox 20"/>
+          <p:cNvSpPr txBox="1"/>
+          <p:nvPr/>
+        </p:nvSpPr>
+        <p:spPr>
+          <a:xfrm>
+            <a:off x="609600" y="5429250"/>
+            <a:ext cx="7239000" cy="247650"/>
+          </a:xfrm>
+          <a:prstGeom prst="rect">
+            <a:avLst/>
+          </a:prstGeom>
+          <a:noFill/>
+        </p:spPr>
+        <p:txBody>
+          <a:bodyPr wrap="none" lIns="0" rIns="0" tIns="0" bIns="0" anchor="ctr">
+            <a:spAutoFit/>
+          </a:bodyPr>
+          <a:lstStyle/>
+          <a:p>
+            <a:pPr algn="l"/>
+            <a:r>
+              <a:rPr sz="1425" b="1">
+                <a:solidFill>
+                  <a:srgbClr val="2E2E33"/>
+                </a:solidFill>
+                <a:latin typeface="Yu Gothic UI"/>
+              </a:rPr>
+              <a:t>10〜25Lのクーラーボックスには、まず立ちません。</a:t>
+            </a:r>
+          </a:p>
+        </p:txBody>
+      </p:sp>
+      <p:sp>
+        <p:nvSpPr>
+          <p:cNvPr id="22" name="TextBox 21"/>
+          <p:cNvSpPr txBox="1"/>
+          <p:nvPr/>
+        </p:nvSpPr>
+        <p:spPr>
+          <a:xfrm>
+            <a:off x="609600" y="5676900"/>
+            <a:ext cx="7620000" cy="209550"/>
+          </a:xfrm>
+          <a:prstGeom prst="rect">
+            <a:avLst/>
+          </a:prstGeom>
+          <a:noFill/>
+        </p:spPr>
+        <p:txBody>
+          <a:bodyPr wrap="none" lIns="0" rIns="0" tIns="0" bIns="0" anchor="ctr">
+            <a:spAutoFit/>
+          </a:bodyPr>
+          <a:lstStyle/>
+          <a:p>
+            <a:pPr algn="l"/>
+            <a:r>
+              <a:rPr sz="1050" b="0">
+                <a:solidFill>
+                  <a:srgbClr val="6A717B"/>
+                </a:solidFill>
+                <a:latin typeface="Yu Gothic UI"/>
+              </a:rPr>
+              <a:t>メーカー公表値からの計算です（実測ではありません）</a:t>
+            </a:r>
+          </a:p>
+        </p:txBody>
+      </p:sp>
+      <p:sp>
+        <p:nvSpPr>
+          <p:cNvPr id="23" name="TextBox 22"/>
+          <p:cNvSpPr txBox="1"/>
+          <p:nvPr/>
+        </p:nvSpPr>
+        <p:spPr>
+          <a:xfrm>
+            <a:off x="7962900" y="5676900"/>
+            <a:ext cx="2857500" cy="209550"/>
+          </a:xfrm>
+          <a:prstGeom prst="rect">
+            <a:avLst/>
+          </a:prstGeom>
+          <a:noFill/>
+        </p:spPr>
+        <p:txBody>
+          <a:bodyPr wrap="none" lIns="0" rIns="0" tIns="0" bIns="0" anchor="ctr">
+            <a:spAutoFit/>
+          </a:bodyPr>
+          <a:lstStyle/>
+          <a:p>
+            <a:pPr algn="r"/>
+            <a:r>
+              <a:rPr sz="1050" b="0">
+                <a:solidFill>
+                  <a:srgbClr val="6A717B"/>
+                </a:solidFill>
+                <a:latin typeface="Yu Gothic UI"/>
+              </a:rPr>
+              <a:t>寸法で選ぶ　sunpou.nexeed-lab.com</a:t>
+            </a:r>
+          </a:p>
+        </p:txBody>
+      </p:sp>
+    </p:spTree>
+  </p:cSld>
+  <p:clrMapOvr>
+    <a:masterClrMapping/>
+  </p:clrMapOvr>
+</p:sld>
+</file>
+
+<file path=ppt/slides/slide5.xml><?xml version="1.0" encoding="utf-8"?>
+<p:sld xmlns:a="http://schemas.openxmlformats.org/drawingml/2006/main" xmlns:p="http://schemas.openxmlformats.org/presentationml/2006/main" xmlns:r="http://schemas.openxmlformats.org/officeDocument/2006/relationships">
+  <p:cSld>
+    <p:spTree>
+      <p:nvGrpSpPr>
+        <p:cNvPr id="1" name=""/>
+        <p:cNvGrpSpPr/>
+        <p:nvPr/>
+      </p:nvGrpSpPr>
+      <p:grpSpPr/>
+      <p:sp>
+        <p:nvSpPr>
+          <p:cNvPr id="2" name="Rectangle 1"/>
+          <p:cNvSpPr/>
+          <p:nvPr/>
+        </p:nvSpPr>
+        <p:spPr>
+          <a:xfrm>
+            <a:off x="0" y="0"/>
+            <a:ext cx="11430000" cy="6000750"/>
+          </a:xfrm>
+          <a:prstGeom prst="rect">
+            <a:avLst/>
+          </a:prstGeom>
+          <a:solidFill>
+            <a:srgbClr val="FCFCFC"/>
+          </a:solidFill>
+          <a:ln>
+            <a:noFill/>
+          </a:ln>
+          <a:effectLst/>
+        </p:spPr>
+        <p:txBody>
+          <a:bodyPr rtlCol="0" anchor="ctr"/>
+          <a:lstStyle/>
+          <a:p>
+            <a:pPr algn="ctr"/>
+          </a:p>
+        </p:txBody>
+      </p:sp>
+      <p:sp>
+        <p:nvSpPr>
+          <p:cNvPr id="3" name="Rectangle 2"/>
+          <p:cNvSpPr/>
+          <p:nvPr/>
+        </p:nvSpPr>
+        <p:spPr>
+          <a:xfrm>
+            <a:off x="0" y="0"/>
+            <a:ext cx="114300" cy="6000750"/>
+          </a:xfrm>
+          <a:prstGeom prst="rect">
+            <a:avLst/>
+          </a:prstGeom>
+          <a:solidFill>
+            <a:srgbClr val="014172"/>
+          </a:solidFill>
+          <a:ln>
+            <a:noFill/>
+          </a:ln>
+          <a:effectLst/>
+        </p:spPr>
+        <p:txBody>
+          <a:bodyPr rtlCol="0" anchor="ctr"/>
+          <a:lstStyle/>
+          <a:p>
+            <a:pPr algn="ctr"/>
+          </a:p>
+        </p:txBody>
+      </p:sp>
+      <p:sp>
+        <p:nvSpPr>
+          <p:cNvPr id="4" name="Rectangle 3"/>
+          <p:cNvSpPr/>
+          <p:nvPr/>
+        </p:nvSpPr>
+        <p:spPr>
+          <a:xfrm>
+            <a:off x="0" y="0"/>
+            <a:ext cx="11430000" cy="1504950"/>
+          </a:xfrm>
+          <a:prstGeom prst="rect">
+            <a:avLst/>
+          </a:prstGeom>
+          <a:solidFill>
+            <a:srgbClr val="014172"/>
+          </a:solidFill>
+          <a:ln>
+            <a:noFill/>
+          </a:ln>
+          <a:effectLst/>
+        </p:spPr>
+        <p:txBody>
+          <a:bodyPr rtlCol="0" anchor="ctr"/>
+          <a:lstStyle/>
+          <a:p>
+            <a:pPr algn="ctr"/>
+          </a:p>
+        </p:txBody>
+      </p:sp>
+      <p:sp>
+        <p:nvSpPr>
+          <p:cNvPr id="5" name="TextBox 4"/>
+          <p:cNvSpPr txBox="1"/>
+          <p:nvPr/>
+        </p:nvSpPr>
+        <p:spPr>
+          <a:xfrm>
+            <a:off x="609600" y="361950"/>
+            <a:ext cx="7429500" cy="476250"/>
+          </a:xfrm>
+          <a:prstGeom prst="rect">
+            <a:avLst/>
+          </a:prstGeom>
+          <a:noFill/>
+        </p:spPr>
+        <p:txBody>
+          <a:bodyPr wrap="none" lIns="0" rIns="0" tIns="0" bIns="0" anchor="ctr">
+            <a:spAutoFit/>
+          </a:bodyPr>
+          <a:lstStyle/>
+          <a:p>
+            <a:pPr algn="l"/>
+            <a:r>
+              <a:rPr sz="3000" b="1">
+                <a:solidFill>
+                  <a:srgbClr val="FFFFFF"/>
+                </a:solidFill>
+                <a:latin typeface="Yu Gothic UI"/>
+              </a:rPr>
+              <a:t>同じ26Lクラス。深さが1.5倍ちがう</a:t>
+            </a:r>
+          </a:p>
+        </p:txBody>
+      </p:sp>
+      <p:sp>
+        <p:nvSpPr>
+          <p:cNvPr id="6" name="TextBox 5"/>
+          <p:cNvSpPr txBox="1"/>
+          <p:nvPr/>
+        </p:nvSpPr>
+        <p:spPr>
+          <a:xfrm>
+            <a:off x="609600" y="876300"/>
+            <a:ext cx="7429500" cy="247650"/>
+          </a:xfrm>
+          <a:prstGeom prst="rect">
+            <a:avLst/>
+          </a:prstGeom>
+          <a:noFill/>
+        </p:spPr>
+        <p:txBody>
+          <a:bodyPr wrap="none" lIns="0" rIns="0" tIns="0" bIns="0" anchor="ctr">
+            <a:spAutoFit/>
+          </a:bodyPr>
+          <a:lstStyle/>
+          <a:p>
+            <a:pPr algn="l"/>
+            <a:r>
+              <a:rPr sz="1425" b="0">
+                <a:solidFill>
+                  <a:srgbClr val="DAE7F2"/>
+                </a:solidFill>
+                <a:latin typeface="Yu Gothic UI"/>
+              </a:rPr>
+              <a:t>内寸を横から見た図。橙は2Lペットボトル（全高306mm）</a:t>
+            </a:r>
+          </a:p>
+        </p:txBody>
+      </p:sp>
+      <p:sp>
+        <p:nvSpPr>
+          <p:cNvPr id="7" name="Rounded Rectangle 6"/>
+          <p:cNvSpPr/>
+          <p:nvPr/>
+        </p:nvSpPr>
+        <p:spPr>
+          <a:xfrm>
+            <a:off x="8305800" y="247650"/>
+            <a:ext cx="2514600" cy="1009650"/>
+          </a:xfrm>
+          <a:prstGeom prst="roundRect">
+            <a:avLst>
+              <a:gd name="adj" fmla="val 12000"/>
+            </a:avLst>
+          </a:prstGeom>
+          <a:solidFill>
+            <a:srgbClr val="FFFFFF"/>
+          </a:solidFill>
+          <a:ln>
+            <a:noFill/>
+          </a:ln>
+          <a:effectLst>
+            <a:outerShdw blurRad="254000" dist="63500" dir="5400000" rotWithShape="0">
+              <a:srgbClr val="0B2B45">
+                <a:alpha val="30000"/>
+              </a:srgbClr>
+            </a:outerShdw>
+          </a:effectLst>
+        </p:spPr>
+        <p:txBody>
+          <a:bodyPr rtlCol="0" anchor="ctr"/>
+          <a:lstStyle/>
+          <a:p>
+            <a:pPr algn="ctr"/>
+          </a:p>
+        </p:txBody>
+      </p:sp>
+      <p:sp>
+        <p:nvSpPr>
+          <p:cNvPr id="8" name="TextBox 7"/>
+          <p:cNvSpPr txBox="1"/>
+          <p:nvPr/>
+        </p:nvSpPr>
+        <p:spPr>
+          <a:xfrm>
+            <a:off x="8515350" y="400050"/>
+            <a:ext cx="2133600" cy="209550"/>
+          </a:xfrm>
+          <a:prstGeom prst="rect">
+            <a:avLst/>
+          </a:prstGeom>
+          <a:noFill/>
+        </p:spPr>
+        <p:txBody>
+          <a:bodyPr wrap="none" lIns="0" rIns="0" tIns="0" bIns="0" anchor="ctr">
+            <a:spAutoFit/>
+          </a:bodyPr>
+          <a:lstStyle/>
+          <a:p>
+            <a:pPr algn="l"/>
+            <a:r>
+              <a:rPr sz="1125" b="0">
+                <a:solidFill>
+                  <a:srgbClr val="6A717B"/>
+                </a:solidFill>
+                <a:latin typeface="Yu Gothic UI"/>
+              </a:rPr>
+              <a:t>深さの差が</a:t>
+            </a:r>
+          </a:p>
+        </p:txBody>
+      </p:sp>
+      <p:sp>
+        <p:nvSpPr>
+          <p:cNvPr id="9" name="TextBox 8"/>
+          <p:cNvSpPr txBox="1"/>
+          <p:nvPr/>
+        </p:nvSpPr>
+        <p:spPr>
+          <a:xfrm>
+            <a:off x="8515350" y="647700"/>
+            <a:ext cx="2133600" cy="533400"/>
+          </a:xfrm>
+          <a:prstGeom prst="rect">
+            <a:avLst/>
+          </a:prstGeom>
+          <a:noFill/>
+        </p:spPr>
+        <p:txBody>
+          <a:bodyPr wrap="none" lIns="0" rIns="0" tIns="0" bIns="0" anchor="ctr">
+            <a:spAutoFit/>
+          </a:bodyPr>
+          <a:lstStyle/>
+          <a:p>
+            <a:pPr algn="l"/>
+            <a:r>
+              <a:rPr sz="3900" b="1">
+                <a:solidFill>
+                  <a:srgbClr val="014172"/>
+                </a:solidFill>
+                <a:latin typeface="Yu Gothic UI"/>
+              </a:rPr>
+              <a:t>1.5</a:t>
+            </a:r>
+            <a:r>
+              <a:rPr sz="1950" b="1">
+                <a:solidFill>
+                  <a:srgbClr val="014172"/>
+                </a:solidFill>
+                <a:latin typeface="Yu Gothic UI"/>
+              </a:rPr>
+              <a:t>倍</a:t>
+            </a:r>
+          </a:p>
+        </p:txBody>
+      </p:sp>
+      <p:sp>
+        <p:nvSpPr>
+          <p:cNvPr id="10" name="TextBox 9"/>
+          <p:cNvSpPr txBox="1"/>
+          <p:nvPr/>
+        </p:nvSpPr>
+        <p:spPr>
+          <a:xfrm>
+            <a:off x="1428750" y="1809750"/>
+            <a:ext cx="3810000" cy="228600"/>
+          </a:xfrm>
+          <a:prstGeom prst="rect">
+            <a:avLst/>
+          </a:prstGeom>
+          <a:noFill/>
+        </p:spPr>
+        <p:txBody>
+          <a:bodyPr wrap="none" lIns="0" rIns="0" tIns="0" bIns="0" anchor="ctr">
+            <a:spAutoFit/>
+          </a:bodyPr>
+          <a:lstStyle/>
+          <a:p>
+            <a:pPr algn="l"/>
+            <a:r>
+              <a:rPr sz="1275" b="1">
+                <a:solidFill>
+                  <a:srgbClr val="2E2E33"/>
+                </a:solidFill>
+                <a:latin typeface="Yu Gothic UI"/>
+              </a:rPr>
+              <a:t>コールマン 28QT（約26L）</a:t>
+            </a:r>
+          </a:p>
+        </p:txBody>
+      </p:sp>
+      <p:sp>
+        <p:nvSpPr>
+          <p:cNvPr id="11" name="Rectangle 10"/>
+          <p:cNvSpPr/>
+          <p:nvPr/>
+        </p:nvSpPr>
+        <p:spPr>
+          <a:xfrm>
+            <a:off x="1428750" y="1895475"/>
+            <a:ext cx="2476500" cy="2867025"/>
+          </a:xfrm>
+          <a:prstGeom prst="rect">
+            <a:avLst/>
+          </a:prstGeom>
+          <a:solidFill>
+            <a:srgbClr val="F2F5F8"/>
+          </a:solidFill>
+          <a:ln w="19050">
+            <a:solidFill>
+              <a:srgbClr val="DAE7F2"/>
+            </a:solidFill>
+          </a:ln>
+          <a:effectLst/>
+        </p:spPr>
+        <p:txBody>
+          <a:bodyPr rtlCol="0" anchor="ctr"/>
+          <a:lstStyle/>
+          <a:p>
+            <a:pPr algn="ctr"/>
+          </a:p>
+        </p:txBody>
+      </p:sp>
+      <p:sp>
+        <p:nvSpPr>
+          <p:cNvPr id="12" name="Rounded Rectangle 11"/>
+          <p:cNvSpPr/>
+          <p:nvPr/>
+        </p:nvSpPr>
+        <p:spPr>
+          <a:xfrm>
+            <a:off x="2095500" y="2255901"/>
+            <a:ext cx="800100" cy="2506599"/>
+          </a:xfrm>
+          <a:prstGeom prst="roundRect">
+            <a:avLst>
+              <a:gd name="adj" fmla="val 6000"/>
+            </a:avLst>
+          </a:prstGeom>
+          <a:gradFill rotWithShape="1">
+            <a:gsLst>
+              <a:gs pos="0">
+                <a:srgbClr val="FDF2E4"/>
+              </a:gs>
+              <a:gs pos="100000">
+                <a:srgbClr val="FDF2E4"/>
+              </a:gs>
+            </a:gsLst>
+            <a:lin scaled="0" ang="16200000"/>
+          </a:gradFill>
+          <a:ln w="19050">
+            <a:solidFill>
+              <a:srgbClr val="A8410F"/>
+            </a:solidFill>
+          </a:ln>
+          <a:effectLst/>
+        </p:spPr>
+        <p:txBody>
+          <a:bodyPr rtlCol="0" anchor="ctr"/>
+          <a:lstStyle/>
+          <a:p>
+            <a:pPr algn="ctr"/>
+          </a:p>
+        </p:txBody>
+      </p:sp>
+      <p:sp>
+        <p:nvSpPr>
+          <p:cNvPr id="13" name="TextBox 12"/>
+          <p:cNvSpPr txBox="1"/>
+          <p:nvPr/>
+        </p:nvSpPr>
+        <p:spPr>
+          <a:xfrm>
+            <a:off x="1428750" y="4914900"/>
+            <a:ext cx="3810000" cy="247650"/>
+          </a:xfrm>
+          <a:prstGeom prst="rect">
+            <a:avLst/>
+          </a:prstGeom>
+          <a:noFill/>
+        </p:spPr>
+        <p:txBody>
+          <a:bodyPr wrap="none" lIns="0" rIns="0" tIns="0" bIns="0" anchor="ctr">
+            <a:spAutoFit/>
+          </a:bodyPr>
+          <a:lstStyle/>
+          <a:p>
+            <a:pPr algn="l"/>
+            <a:r>
+              <a:rPr sz="1425" b="1">
+                <a:solidFill>
+                  <a:srgbClr val="014172"/>
+                </a:solidFill>
+                <a:latin typeface="Yu Gothic UI"/>
+              </a:rPr>
+              <a:t>深さ 350mm ／ 2Lが立つ</a:t>
+            </a:r>
+          </a:p>
+        </p:txBody>
+      </p:sp>
+      <p:sp>
+        <p:nvSpPr>
+          <p:cNvPr id="14" name="TextBox 13"/>
+          <p:cNvSpPr txBox="1"/>
+          <p:nvPr/>
+        </p:nvSpPr>
+        <p:spPr>
+          <a:xfrm>
+            <a:off x="6096000" y="1809750"/>
+            <a:ext cx="3810000" cy="228600"/>
+          </a:xfrm>
+          <a:prstGeom prst="rect">
+            <a:avLst/>
+          </a:prstGeom>
+          <a:noFill/>
+        </p:spPr>
+        <p:txBody>
+          <a:bodyPr wrap="none" lIns="0" rIns="0" tIns="0" bIns="0" anchor="ctr">
+            <a:spAutoFit/>
+          </a:bodyPr>
+          <a:lstStyle/>
+          <a:p>
+            <a:pPr algn="l"/>
+            <a:r>
+              <a:rPr sz="1275" b="1">
+                <a:solidFill>
+                  <a:srgbClr val="2E2E33"/>
+                </a:solidFill>
+                <a:latin typeface="Yu Gothic UI"/>
+              </a:rPr>
+              <a:t>ダイワ PV-REX 2800（28L）</a:t>
+            </a:r>
+          </a:p>
+        </p:txBody>
+      </p:sp>
+      <p:sp>
+        <p:nvSpPr>
+          <p:cNvPr id="15" name="Rectangle 14"/>
+          <p:cNvSpPr/>
+          <p:nvPr/>
+        </p:nvSpPr>
+        <p:spPr>
+          <a:xfrm>
+            <a:off x="6096000" y="2837498"/>
+            <a:ext cx="2476500" cy="1925002"/>
+          </a:xfrm>
+          <a:prstGeom prst="rect">
+            <a:avLst/>
+          </a:prstGeom>
+          <a:solidFill>
+            <a:srgbClr val="F2F5F8"/>
+          </a:solidFill>
+          <a:ln w="19050">
+            <a:solidFill>
+              <a:srgbClr val="DAE7F2"/>
+            </a:solidFill>
+          </a:ln>
+          <a:effectLst/>
+        </p:spPr>
+        <p:txBody>
+          <a:bodyPr rtlCol="0" anchor="ctr"/>
+          <a:lstStyle/>
+          <a:p>
+            <a:pPr algn="ctr"/>
+          </a:p>
+        </p:txBody>
+      </p:sp>
+      <p:sp>
+        <p:nvSpPr>
+          <p:cNvPr id="16" name="Rounded Rectangle 15"/>
+          <p:cNvSpPr/>
+          <p:nvPr/>
+        </p:nvSpPr>
+        <p:spPr>
+          <a:xfrm>
+            <a:off x="6762750" y="2255901"/>
+            <a:ext cx="800100" cy="2506599"/>
+          </a:xfrm>
+          <a:prstGeom prst="roundRect">
+            <a:avLst>
+              <a:gd name="adj" fmla="val 6000"/>
+            </a:avLst>
+          </a:prstGeom>
+          <a:gradFill rotWithShape="1">
+            <a:gsLst>
+              <a:gs pos="0">
+                <a:srgbClr val="FDF2E4"/>
+              </a:gs>
+              <a:gs pos="100000">
+                <a:srgbClr val="FDF2E4"/>
+              </a:gs>
+            </a:gsLst>
+            <a:lin scaled="0" ang="16200000"/>
+          </a:gradFill>
+          <a:ln w="19050">
+            <a:solidFill>
+              <a:srgbClr val="A8410F"/>
+            </a:solidFill>
+          </a:ln>
+          <a:effectLst/>
+        </p:spPr>
+        <p:txBody>
+          <a:bodyPr rtlCol="0" anchor="ctr"/>
+          <a:lstStyle/>
+          <a:p>
+            <a:pPr algn="ctr"/>
+          </a:p>
+        </p:txBody>
+      </p:sp>
+      <p:sp>
+        <p:nvSpPr>
+          <p:cNvPr id="17" name="TextBox 16"/>
+          <p:cNvSpPr txBox="1"/>
+          <p:nvPr/>
+        </p:nvSpPr>
+        <p:spPr>
+          <a:xfrm>
+            <a:off x="6096000" y="4914900"/>
+            <a:ext cx="3810000" cy="247650"/>
+          </a:xfrm>
+          <a:prstGeom prst="rect">
+            <a:avLst/>
+          </a:prstGeom>
+          <a:noFill/>
+        </p:spPr>
+        <p:txBody>
+          <a:bodyPr wrap="none" lIns="0" rIns="0" tIns="0" bIns="0" anchor="ctr">
+            <a:spAutoFit/>
+          </a:bodyPr>
+          <a:lstStyle/>
+          <a:p>
+            <a:pPr algn="l"/>
+            <a:r>
+              <a:rPr sz="1425" b="1">
+                <a:solidFill>
+                  <a:srgbClr val="A8410F"/>
+                </a:solidFill>
+                <a:latin typeface="Yu Gothic UI"/>
+              </a:rPr>
+              <a:t>深さ 235mm ／ 2Lは立たない</a:t>
+            </a:r>
+          </a:p>
+        </p:txBody>
+      </p:sp>
+      <p:sp>
+        <p:nvSpPr>
+          <p:cNvPr id="18" name="TextBox 17"/>
+          <p:cNvSpPr txBox="1"/>
+          <p:nvPr/>
+        </p:nvSpPr>
+        <p:spPr>
+          <a:xfrm>
+            <a:off x="1428750" y="1970151"/>
+            <a:ext cx="3810000" cy="228600"/>
+          </a:xfrm>
+          <a:prstGeom prst="rect">
+            <a:avLst/>
+          </a:prstGeom>
+          <a:noFill/>
+        </p:spPr>
+        <p:txBody>
+          <a:bodyPr wrap="none" lIns="0" rIns="0" tIns="0" bIns="0" anchor="ctr">
+            <a:spAutoFit/>
+          </a:bodyPr>
+          <a:lstStyle/>
+          <a:p>
+            <a:pPr algn="l"/>
+            <a:r>
+              <a:rPr sz="1125" b="1">
+                <a:solidFill>
+                  <a:srgbClr val="A8410F"/>
+                </a:solidFill>
+                <a:latin typeface="Yu Gothic UI"/>
+              </a:rPr>
+              <a:t>2Lの高さ 306mm</a:t>
+            </a:r>
+          </a:p>
+        </p:txBody>
+      </p:sp>
+      <p:sp>
+        <p:nvSpPr>
+          <p:cNvPr id="19" name="Rectangle 18"/>
+          <p:cNvSpPr/>
+          <p:nvPr/>
+        </p:nvSpPr>
+        <p:spPr>
+          <a:xfrm>
+            <a:off x="609600" y="5295900"/>
+            <a:ext cx="10210800" cy="9525"/>
+          </a:xfrm>
+          <a:prstGeom prst="rect">
+            <a:avLst/>
+          </a:prstGeom>
+          <a:solidFill>
+            <a:srgbClr val="E2E7EC"/>
+          </a:solidFill>
+          <a:ln>
+            <a:noFill/>
+          </a:ln>
+          <a:effectLst/>
+        </p:spPr>
+        <p:txBody>
+          <a:bodyPr rtlCol="0" anchor="ctr"/>
+          <a:lstStyle/>
+          <a:p>
+            <a:pPr algn="ctr"/>
+          </a:p>
+        </p:txBody>
+      </p:sp>
+      <p:sp>
+        <p:nvSpPr>
+          <p:cNvPr id="20" name="TextBox 19"/>
+          <p:cNvSpPr txBox="1"/>
+          <p:nvPr/>
+        </p:nvSpPr>
+        <p:spPr>
+          <a:xfrm>
+            <a:off x="609600" y="5429250"/>
+            <a:ext cx="7239000" cy="247650"/>
+          </a:xfrm>
+          <a:prstGeom prst="rect">
+            <a:avLst/>
+          </a:prstGeom>
+          <a:noFill/>
+        </p:spPr>
+        <p:txBody>
+          <a:bodyPr wrap="none" lIns="0" rIns="0" tIns="0" bIns="0" anchor="ctr">
+            <a:spAutoFit/>
+          </a:bodyPr>
+          <a:lstStyle/>
+          <a:p>
+            <a:pPr algn="l"/>
+            <a:r>
+              <a:rPr sz="1425" b="1">
+                <a:solidFill>
+                  <a:srgbClr val="2E2E33"/>
+                </a:solidFill>
+                <a:latin typeface="Yu Gothic UI"/>
+              </a:rPr>
+              <a:t>同じ容量表示でも、深さは1.5倍ちがいます。</a:t>
+            </a:r>
+          </a:p>
+        </p:txBody>
+      </p:sp>
+      <p:sp>
+        <p:nvSpPr>
+          <p:cNvPr id="21" name="TextBox 20"/>
+          <p:cNvSpPr txBox="1"/>
+          <p:nvPr/>
+        </p:nvSpPr>
+        <p:spPr>
+          <a:xfrm>
+            <a:off x="609600" y="5676900"/>
+            <a:ext cx="7620000" cy="209550"/>
+          </a:xfrm>
+          <a:prstGeom prst="rect">
+            <a:avLst/>
+          </a:prstGeom>
+          <a:noFill/>
+        </p:spPr>
+        <p:txBody>
+          <a:bodyPr wrap="none" lIns="0" rIns="0" tIns="0" bIns="0" anchor="ctr">
+            <a:spAutoFit/>
+          </a:bodyPr>
+          <a:lstStyle/>
+          <a:p>
+            <a:pPr algn="l"/>
+            <a:r>
+              <a:rPr sz="1050" b="0">
+                <a:solidFill>
+                  <a:srgbClr val="6A717B"/>
+                </a:solidFill>
+                <a:latin typeface="Yu Gothic UI"/>
+              </a:rPr>
+              <a:t>メーカー公表値からの計算です（実測ではありません）</a:t>
+            </a:r>
+          </a:p>
+        </p:txBody>
+      </p:sp>
+      <p:sp>
+        <p:nvSpPr>
+          <p:cNvPr id="22" name="TextBox 21"/>
+          <p:cNvSpPr txBox="1"/>
+          <p:nvPr/>
+        </p:nvSpPr>
+        <p:spPr>
+          <a:xfrm>
+            <a:off x="7962900" y="5676900"/>
+            <a:ext cx="2857500" cy="209550"/>
+          </a:xfrm>
+          <a:prstGeom prst="rect">
+            <a:avLst/>
+          </a:prstGeom>
+          <a:noFill/>
+        </p:spPr>
+        <p:txBody>
+          <a:bodyPr wrap="none" lIns="0" rIns="0" tIns="0" bIns="0" anchor="ctr">
+            <a:spAutoFit/>
+          </a:bodyPr>
+          <a:lstStyle/>
+          <a:p>
+            <a:pPr algn="r"/>
+            <a:r>
+              <a:rPr sz="1050" b="0">
+                <a:solidFill>
+                  <a:srgbClr val="6A717B"/>
+                </a:solidFill>
+                <a:latin typeface="Yu Gothic UI"/>
+              </a:rPr>
+              <a:t>寸法で選ぶ　sunpou.nexeed-lab.com</a:t>
+            </a:r>
+          </a:p>
+        </p:txBody>
+      </p:sp>
+    </p:spTree>
+  </p:cSld>
+  <p:clrMapOvr>
+    <a:masterClrMapping/>
+  </p:clrMapOvr>
+</p:sld>
+</file>
+
+<file path=ppt/slides/slide6.xml><?xml version="1.0" encoding="utf-8"?>
+<p:sld xmlns:a="http://schemas.openxmlformats.org/drawingml/2006/main" xmlns:p="http://schemas.openxmlformats.org/presentationml/2006/main" xmlns:r="http://schemas.openxmlformats.org/officeDocument/2006/relationships">
+  <p:cSld>
+    <p:spTree>
+      <p:nvGrpSpPr>
+        <p:cNvPr id="1" name=""/>
+        <p:cNvGrpSpPr/>
+        <p:nvPr/>
+      </p:nvGrpSpPr>
+      <p:grpSpPr/>
+      <p:sp>
+        <p:nvSpPr>
+          <p:cNvPr id="2" name="Rectangle 1"/>
+          <p:cNvSpPr/>
+          <p:nvPr/>
+        </p:nvSpPr>
+        <p:spPr>
+          <a:xfrm>
+            <a:off x="0" y="0"/>
+            <a:ext cx="11430000" cy="6000750"/>
+          </a:xfrm>
+          <a:prstGeom prst="rect">
+            <a:avLst/>
+          </a:prstGeom>
+          <a:solidFill>
+            <a:srgbClr val="FCFCFC"/>
+          </a:solidFill>
+          <a:ln>
+            <a:noFill/>
+          </a:ln>
+          <a:effectLst/>
+        </p:spPr>
+        <p:txBody>
+          <a:bodyPr rtlCol="0" anchor="ctr"/>
+          <a:lstStyle/>
+          <a:p>
+            <a:pPr algn="ctr"/>
+          </a:p>
+        </p:txBody>
+      </p:sp>
+      <p:sp>
+        <p:nvSpPr>
+          <p:cNvPr id="3" name="Rectangle 2"/>
+          <p:cNvSpPr/>
+          <p:nvPr/>
+        </p:nvSpPr>
+        <p:spPr>
+          <a:xfrm>
+            <a:off x="0" y="0"/>
+            <a:ext cx="114300" cy="6000750"/>
+          </a:xfrm>
+          <a:prstGeom prst="rect">
+            <a:avLst/>
+          </a:prstGeom>
+          <a:solidFill>
+            <a:srgbClr val="014172"/>
+          </a:solidFill>
+          <a:ln>
+            <a:noFill/>
+          </a:ln>
+          <a:effectLst/>
+        </p:spPr>
+        <p:txBody>
+          <a:bodyPr rtlCol="0" anchor="ctr"/>
+          <a:lstStyle/>
+          <a:p>
+            <a:pPr algn="ctr"/>
+          </a:p>
+        </p:txBody>
+      </p:sp>
+      <p:sp>
+        <p:nvSpPr>
+          <p:cNvPr id="4" name="Rectangle 3"/>
+          <p:cNvSpPr/>
+          <p:nvPr/>
+        </p:nvSpPr>
+        <p:spPr>
+          <a:xfrm>
+            <a:off x="0" y="0"/>
+            <a:ext cx="11430000" cy="1504950"/>
+          </a:xfrm>
+          <a:prstGeom prst="rect">
+            <a:avLst/>
+          </a:prstGeom>
+          <a:solidFill>
+            <a:srgbClr val="014172"/>
+          </a:solidFill>
+          <a:ln>
+            <a:noFill/>
+          </a:ln>
+          <a:effectLst/>
+        </p:spPr>
+        <p:txBody>
+          <a:bodyPr rtlCol="0" anchor="ctr"/>
+          <a:lstStyle/>
+          <a:p>
+            <a:pPr algn="ctr"/>
+          </a:p>
+        </p:txBody>
+      </p:sp>
+      <p:sp>
+        <p:nvSpPr>
+          <p:cNvPr id="5" name="TextBox 4"/>
+          <p:cNvSpPr txBox="1"/>
+          <p:nvPr/>
+        </p:nvSpPr>
+        <p:spPr>
+          <a:xfrm>
+            <a:off x="609600" y="361950"/>
+            <a:ext cx="7429500" cy="476250"/>
+          </a:xfrm>
+          <a:prstGeom prst="rect">
+            <a:avLst/>
+          </a:prstGeom>
+          <a:noFill/>
+        </p:spPr>
+        <p:txBody>
+          <a:bodyPr wrap="none" lIns="0" rIns="0" tIns="0" bIns="0" anchor="ctr">
+            <a:spAutoFit/>
+          </a:bodyPr>
+          <a:lstStyle/>
+          <a:p>
+            <a:pPr algn="l"/>
+            <a:r>
+              <a:rPr sz="3000" b="1">
+                <a:solidFill>
+                  <a:srgbClr val="FFFFFF"/>
+                </a:solidFill>
+                <a:latin typeface="Yu Gothic UI"/>
+              </a:rPr>
+              <a:t>80L と 60L。長さは同じ 85cm</a:t>
+            </a:r>
+          </a:p>
+        </p:txBody>
+      </p:sp>
+      <p:sp>
+        <p:nvSpPr>
+          <p:cNvPr id="6" name="TextBox 5"/>
+          <p:cNvSpPr txBox="1"/>
+          <p:nvPr/>
+        </p:nvSpPr>
+        <p:spPr>
+          <a:xfrm>
+            <a:off x="609600" y="876300"/>
+            <a:ext cx="7429500" cy="247650"/>
+          </a:xfrm>
+          <a:prstGeom prst="rect">
+            <a:avLst/>
+          </a:prstGeom>
+          <a:noFill/>
+        </p:spPr>
+        <p:txBody>
+          <a:bodyPr wrap="none" lIns="0" rIns="0" tIns="0" bIns="0" anchor="ctr">
+            <a:spAutoFit/>
+          </a:bodyPr>
+          <a:lstStyle/>
+          <a:p>
+            <a:pPr algn="l"/>
+            <a:r>
+              <a:rPr sz="1425" b="0">
+                <a:solidFill>
+                  <a:srgbClr val="DAE7F2"/>
+                </a:solidFill>
+                <a:latin typeface="Yu Gothic UI"/>
+              </a:rPr>
+              <a:t>ダイワ トランクマスター の内寸を横から見た図</a:t>
+            </a:r>
+          </a:p>
+        </p:txBody>
+      </p:sp>
+      <p:sp>
+        <p:nvSpPr>
+          <p:cNvPr id="7" name="Rounded Rectangle 6"/>
+          <p:cNvSpPr/>
+          <p:nvPr/>
+        </p:nvSpPr>
+        <p:spPr>
+          <a:xfrm>
+            <a:off x="8305800" y="247650"/>
+            <a:ext cx="2514600" cy="1009650"/>
+          </a:xfrm>
+          <a:prstGeom prst="roundRect">
+            <a:avLst>
+              <a:gd name="adj" fmla="val 12000"/>
+            </a:avLst>
+          </a:prstGeom>
+          <a:solidFill>
+            <a:srgbClr val="FFFFFF"/>
+          </a:solidFill>
+          <a:ln>
+            <a:noFill/>
+          </a:ln>
+          <a:effectLst>
+            <a:outerShdw blurRad="254000" dist="63500" dir="5400000" rotWithShape="0">
+              <a:srgbClr val="0B2B45">
+                <a:alpha val="30000"/>
+              </a:srgbClr>
+            </a:outerShdw>
+          </a:effectLst>
+        </p:spPr>
+        <p:txBody>
+          <a:bodyPr rtlCol="0" anchor="ctr"/>
+          <a:lstStyle/>
+          <a:p>
+            <a:pPr algn="ctr"/>
+          </a:p>
+        </p:txBody>
+      </p:sp>
+      <p:sp>
+        <p:nvSpPr>
+          <p:cNvPr id="8" name="TextBox 7"/>
+          <p:cNvSpPr txBox="1"/>
+          <p:nvPr/>
+        </p:nvSpPr>
+        <p:spPr>
+          <a:xfrm>
+            <a:off x="8515350" y="400050"/>
+            <a:ext cx="2133600" cy="209550"/>
+          </a:xfrm>
+          <a:prstGeom prst="rect">
+            <a:avLst/>
+          </a:prstGeom>
+          <a:noFill/>
+        </p:spPr>
+        <p:txBody>
+          <a:bodyPr wrap="none" lIns="0" rIns="0" tIns="0" bIns="0" anchor="ctr">
+            <a:spAutoFit/>
+          </a:bodyPr>
+          <a:lstStyle/>
+          <a:p>
+            <a:pPr algn="l"/>
+            <a:r>
+              <a:rPr sz="1125" b="0">
+                <a:solidFill>
+                  <a:srgbClr val="6A717B"/>
+                </a:solidFill>
+                <a:latin typeface="Yu Gothic UI"/>
+              </a:rPr>
+              <a:t>長辺はどちらも</a:t>
+            </a:r>
+          </a:p>
+        </p:txBody>
+      </p:sp>
+      <p:sp>
+        <p:nvSpPr>
+          <p:cNvPr id="9" name="TextBox 8"/>
+          <p:cNvSpPr txBox="1"/>
+          <p:nvPr/>
+        </p:nvSpPr>
+        <p:spPr>
+          <a:xfrm>
+            <a:off x="8515350" y="647700"/>
+            <a:ext cx="2133600" cy="533400"/>
+          </a:xfrm>
+          <a:prstGeom prst="rect">
+            <a:avLst/>
+          </a:prstGeom>
+          <a:noFill/>
+        </p:spPr>
+        <p:txBody>
+          <a:bodyPr wrap="none" lIns="0" rIns="0" tIns="0" bIns="0" anchor="ctr">
+            <a:spAutoFit/>
+          </a:bodyPr>
+          <a:lstStyle/>
+          <a:p>
+            <a:pPr algn="l"/>
+            <a:r>
+              <a:rPr sz="3900" b="1">
+                <a:solidFill>
+                  <a:srgbClr val="014172"/>
+                </a:solidFill>
+                <a:latin typeface="Yu Gothic UI"/>
+              </a:rPr>
+              <a:t>85</a:t>
+            </a:r>
+            <a:r>
+              <a:rPr sz="1950" b="1">
+                <a:solidFill>
+                  <a:srgbClr val="014172"/>
+                </a:solidFill>
+                <a:latin typeface="Yu Gothic UI"/>
+              </a:rPr>
+              <a:t>cm</a:t>
+            </a:r>
+          </a:p>
+        </p:txBody>
+      </p:sp>
+      <p:sp>
+        <p:nvSpPr>
+          <p:cNvPr id="10" name="TextBox 9"/>
+          <p:cNvSpPr txBox="1"/>
+          <p:nvPr/>
+        </p:nvSpPr>
+        <p:spPr>
+          <a:xfrm>
+            <a:off x="1428750" y="1714500"/>
+            <a:ext cx="4762500" cy="228600"/>
+          </a:xfrm>
+          <a:prstGeom prst="rect">
+            <a:avLst/>
+          </a:prstGeom>
+          <a:noFill/>
+        </p:spPr>
+        <p:txBody>
+          <a:bodyPr wrap="none" lIns="0" rIns="0" tIns="0" bIns="0" anchor="ctr">
+            <a:spAutoFit/>
+          </a:bodyPr>
+          <a:lstStyle/>
+          <a:p>
+            <a:pPr algn="l"/>
+            <a:r>
+              <a:rPr sz="1275" b="1">
+                <a:solidFill>
+                  <a:srgbClr val="2E2E33"/>
+                </a:solidFill>
+                <a:latin typeface="Yu Gothic UI"/>
+              </a:rPr>
+              <a:t>80L　トランクマスターHD III 8000</a:t>
+            </a:r>
+          </a:p>
+        </p:txBody>
+      </p:sp>
+      <p:sp>
+        <p:nvSpPr>
+          <p:cNvPr id="11" name="Rectangle 10"/>
+          <p:cNvSpPr/>
+          <p:nvPr/>
+        </p:nvSpPr>
+        <p:spPr>
+          <a:xfrm>
+            <a:off x="1428750" y="2000250"/>
+            <a:ext cx="4371975" cy="1620203"/>
+          </a:xfrm>
+          <a:prstGeom prst="rect">
+            <a:avLst/>
+          </a:prstGeom>
+          <a:solidFill>
+            <a:srgbClr val="F2F5F8"/>
+          </a:solidFill>
+          <a:ln w="19050">
+            <a:solidFill>
+              <a:srgbClr val="DAE7F2"/>
+            </a:solidFill>
+          </a:ln>
+          <a:effectLst/>
+        </p:spPr>
+        <p:txBody>
+          <a:bodyPr rtlCol="0" anchor="ctr"/>
+          <a:lstStyle/>
+          <a:p>
+            <a:pPr algn="ctr"/>
+          </a:p>
+        </p:txBody>
+      </p:sp>
+      <p:sp>
+        <p:nvSpPr>
+          <p:cNvPr id="12" name="TextBox 11"/>
+          <p:cNvSpPr txBox="1"/>
+          <p:nvPr/>
+        </p:nvSpPr>
+        <p:spPr>
+          <a:xfrm>
+            <a:off x="5991225" y="2038350"/>
+            <a:ext cx="2476500" cy="247650"/>
+          </a:xfrm>
+          <a:prstGeom prst="rect">
+            <a:avLst/>
+          </a:prstGeom>
+          <a:noFill/>
+        </p:spPr>
+        <p:txBody>
+          <a:bodyPr wrap="none" lIns="0" rIns="0" tIns="0" bIns="0" anchor="ctr">
+            <a:spAutoFit/>
+          </a:bodyPr>
+          <a:lstStyle/>
+          <a:p>
+            <a:pPr algn="l"/>
+            <a:r>
+              <a:rPr sz="1575" b="1">
+                <a:solidFill>
+                  <a:srgbClr val="014172"/>
+                </a:solidFill>
+                <a:latin typeface="Yu Gothic UI"/>
+              </a:rPr>
+              <a:t>長辺 85cm</a:t>
+            </a:r>
+          </a:p>
+        </p:txBody>
+      </p:sp>
+      <p:sp>
+        <p:nvSpPr>
+          <p:cNvPr id="13" name="TextBox 12"/>
+          <p:cNvSpPr txBox="1"/>
+          <p:nvPr/>
+        </p:nvSpPr>
+        <p:spPr>
+          <a:xfrm>
+            <a:off x="5991225" y="2343150"/>
+            <a:ext cx="2476500" cy="228600"/>
+          </a:xfrm>
+          <a:prstGeom prst="rect">
+            <a:avLst/>
+          </a:prstGeom>
+          <a:noFill/>
+        </p:spPr>
+        <p:txBody>
+          <a:bodyPr wrap="none" lIns="0" rIns="0" tIns="0" bIns="0" anchor="ctr">
+            <a:spAutoFit/>
+          </a:bodyPr>
+          <a:lstStyle/>
+          <a:p>
+            <a:pPr algn="l"/>
+            <a:r>
+              <a:rPr sz="1275" b="0">
+                <a:solidFill>
+                  <a:srgbClr val="6A717B"/>
+                </a:solidFill>
+                <a:latin typeface="Yu Gothic UI"/>
+              </a:rPr>
+              <a:t>深さ 31.5cm</a:t>
+            </a:r>
+          </a:p>
+        </p:txBody>
+      </p:sp>
+      <p:sp>
+        <p:nvSpPr>
+          <p:cNvPr id="14" name="TextBox 13"/>
+          <p:cNvSpPr txBox="1"/>
+          <p:nvPr/>
+        </p:nvSpPr>
+        <p:spPr>
+          <a:xfrm>
+            <a:off x="1428750" y="3429000"/>
+            <a:ext cx="4762500" cy="228600"/>
+          </a:xfrm>
+          <a:prstGeom prst="rect">
+            <a:avLst/>
+          </a:prstGeom>
+          <a:noFill/>
+        </p:spPr>
+        <p:txBody>
+          <a:bodyPr wrap="none" lIns="0" rIns="0" tIns="0" bIns="0" anchor="ctr">
+            <a:spAutoFit/>
+          </a:bodyPr>
+          <a:lstStyle/>
+          <a:p>
+            <a:pPr algn="l"/>
+            <a:r>
+              <a:rPr sz="1275" b="1">
+                <a:solidFill>
+                  <a:srgbClr val="2E2E33"/>
+                </a:solidFill>
+                <a:latin typeface="Yu Gothic UI"/>
+              </a:rPr>
+              <a:t>60L　トランクマスターHD II 6000</a:t>
+            </a:r>
+          </a:p>
+        </p:txBody>
+      </p:sp>
+      <p:sp>
+        <p:nvSpPr>
+          <p:cNvPr id="15" name="Rectangle 14"/>
+          <p:cNvSpPr/>
+          <p:nvPr/>
+        </p:nvSpPr>
+        <p:spPr>
+          <a:xfrm>
+            <a:off x="1428750" y="3714750"/>
+            <a:ext cx="4371975" cy="1208722"/>
+          </a:xfrm>
+          <a:prstGeom prst="rect">
+            <a:avLst/>
+          </a:prstGeom>
+          <a:solidFill>
+            <a:srgbClr val="F2F5F8"/>
+          </a:solidFill>
+          <a:ln w="19050">
+            <a:solidFill>
+              <a:srgbClr val="DAE7F2"/>
+            </a:solidFill>
+          </a:ln>
+          <a:effectLst/>
+        </p:spPr>
+        <p:txBody>
+          <a:bodyPr rtlCol="0" anchor="ctr"/>
+          <a:lstStyle/>
+          <a:p>
+            <a:pPr algn="ctr"/>
+          </a:p>
+        </p:txBody>
+      </p:sp>
+      <p:sp>
+        <p:nvSpPr>
+          <p:cNvPr id="16" name="TextBox 15"/>
+          <p:cNvSpPr txBox="1"/>
+          <p:nvPr/>
+        </p:nvSpPr>
+        <p:spPr>
+          <a:xfrm>
+            <a:off x="5991225" y="3752850"/>
+            <a:ext cx="2476500" cy="247650"/>
+          </a:xfrm>
+          <a:prstGeom prst="rect">
+            <a:avLst/>
+          </a:prstGeom>
+          <a:noFill/>
+        </p:spPr>
+        <p:txBody>
+          <a:bodyPr wrap="none" lIns="0" rIns="0" tIns="0" bIns="0" anchor="ctr">
+            <a:spAutoFit/>
+          </a:bodyPr>
+          <a:lstStyle/>
+          <a:p>
+            <a:pPr algn="l"/>
+            <a:r>
+              <a:rPr sz="1575" b="1">
+                <a:solidFill>
+                  <a:srgbClr val="014172"/>
+                </a:solidFill>
+                <a:latin typeface="Yu Gothic UI"/>
+              </a:rPr>
+              <a:t>長辺 85cm</a:t>
+            </a:r>
+          </a:p>
+        </p:txBody>
+      </p:sp>
+      <p:sp>
+        <p:nvSpPr>
+          <p:cNvPr id="17" name="TextBox 16"/>
+          <p:cNvSpPr txBox="1"/>
+          <p:nvPr/>
+        </p:nvSpPr>
+        <p:spPr>
+          <a:xfrm>
+            <a:off x="5991225" y="4057650"/>
+            <a:ext cx="2476500" cy="228600"/>
+          </a:xfrm>
+          <a:prstGeom prst="rect">
+            <a:avLst/>
+          </a:prstGeom>
+          <a:noFill/>
+        </p:spPr>
+        <p:txBody>
+          <a:bodyPr wrap="none" lIns="0" rIns="0" tIns="0" bIns="0" anchor="ctr">
+            <a:spAutoFit/>
+          </a:bodyPr>
+          <a:lstStyle/>
+          <a:p>
+            <a:pPr algn="l"/>
+            <a:r>
+              <a:rPr sz="1275" b="0">
+                <a:solidFill>
+                  <a:srgbClr val="6A717B"/>
+                </a:solidFill>
+                <a:latin typeface="Yu Gothic UI"/>
+              </a:rPr>
+              <a:t>深さ 23.5cm</a:t>
+            </a:r>
+          </a:p>
+        </p:txBody>
+      </p:sp>
+      <p:sp>
+        <p:nvSpPr>
+          <p:cNvPr id="18" name="Rectangle 17"/>
+          <p:cNvSpPr/>
+          <p:nvPr/>
+        </p:nvSpPr>
+        <p:spPr>
+          <a:xfrm>
+            <a:off x="609600" y="5295900"/>
+            <a:ext cx="10210800" cy="9525"/>
+          </a:xfrm>
+          <a:prstGeom prst="rect">
+            <a:avLst/>
+          </a:prstGeom>
+          <a:solidFill>
+            <a:srgbClr val="E2E7EC"/>
+          </a:solidFill>
+          <a:ln>
+            <a:noFill/>
+          </a:ln>
+          <a:effectLst/>
+        </p:spPr>
+        <p:txBody>
+          <a:bodyPr rtlCol="0" anchor="ctr"/>
+          <a:lstStyle/>
+          <a:p>
+            <a:pPr algn="ctr"/>
+          </a:p>
+        </p:txBody>
+      </p:sp>
+      <p:sp>
+        <p:nvSpPr>
+          <p:cNvPr id="19" name="TextBox 18"/>
+          <p:cNvSpPr txBox="1"/>
+          <p:nvPr/>
+        </p:nvSpPr>
+        <p:spPr>
+          <a:xfrm>
+            <a:off x="609600" y="5429250"/>
+            <a:ext cx="7239000" cy="247650"/>
+          </a:xfrm>
+          <a:prstGeom prst="rect">
+            <a:avLst/>
+          </a:prstGeom>
+          <a:noFill/>
+        </p:spPr>
+        <p:txBody>
+          <a:bodyPr wrap="none" lIns="0" rIns="0" tIns="0" bIns="0" anchor="ctr">
+            <a:spAutoFit/>
+          </a:bodyPr>
+          <a:lstStyle/>
+          <a:p>
+            <a:pPr algn="l"/>
+            <a:r>
+              <a:rPr sz="1425" b="1">
+                <a:solidFill>
+                  <a:srgbClr val="2E2E33"/>
+                </a:solidFill>
+                <a:latin typeface="Yu Gothic UI"/>
+              </a:rPr>
+              <a:t>容量が増えても長さは同じ。増えるのは深さです。</a:t>
+            </a:r>
+          </a:p>
+        </p:txBody>
+      </p:sp>
+      <p:sp>
+        <p:nvSpPr>
+          <p:cNvPr id="20" name="TextBox 19"/>
+          <p:cNvSpPr txBox="1"/>
+          <p:nvPr/>
+        </p:nvSpPr>
+        <p:spPr>
+          <a:xfrm>
+            <a:off x="609600" y="5676900"/>
+            <a:ext cx="7620000" cy="209550"/>
+          </a:xfrm>
+          <a:prstGeom prst="rect">
+            <a:avLst/>
+          </a:prstGeom>
+          <a:noFill/>
+        </p:spPr>
+        <p:txBody>
+          <a:bodyPr wrap="none" lIns="0" rIns="0" tIns="0" bIns="0" anchor="ctr">
+            <a:spAutoFit/>
+          </a:bodyPr>
+          <a:lstStyle/>
+          <a:p>
+            <a:pPr algn="l"/>
+            <a:r>
+              <a:rPr sz="1050" b="0">
+                <a:solidFill>
+                  <a:srgbClr val="6A717B"/>
+                </a:solidFill>
+                <a:latin typeface="Yu Gothic UI"/>
+              </a:rPr>
+              <a:t>メーカー公表値からの計算です（実測ではありません）</a:t>
+            </a:r>
+          </a:p>
+        </p:txBody>
+      </p:sp>
+      <p:sp>
+        <p:nvSpPr>
+          <p:cNvPr id="21" name="TextBox 20"/>
+          <p:cNvSpPr txBox="1"/>
+          <p:nvPr/>
+        </p:nvSpPr>
+        <p:spPr>
+          <a:xfrm>
+            <a:off x="7962900" y="5676900"/>
+            <a:ext cx="2857500" cy="209550"/>
+          </a:xfrm>
+          <a:prstGeom prst="rect">
+            <a:avLst/>
+          </a:prstGeom>
+          <a:noFill/>
+        </p:spPr>
+        <p:txBody>
+          <a:bodyPr wrap="none" lIns="0" rIns="0" tIns="0" bIns="0" anchor="ctr">
+            <a:spAutoFit/>
+          </a:bodyPr>
+          <a:lstStyle/>
+          <a:p>
+            <a:pPr algn="r"/>
+            <a:r>
+              <a:rPr sz="1050" b="0">
+                <a:solidFill>
+                  <a:srgbClr val="6A717B"/>
+                </a:solidFill>
+                <a:latin typeface="Yu Gothic UI"/>
+              </a:rPr>
+              <a:t>寸法で選ぶ　sunpou.nexeed-lab.com</a:t>
+            </a:r>
+          </a:p>
+        </p:txBody>
+      </p:sp>
+    </p:spTree>
+  </p:cSld>
+  <p:clrMapOvr>
+    <a:masterClrMapping/>
+  </p:clrMapOvr>
+</p:sld>
+</file>
+
+<file path=ppt/slides/slide7.xml><?xml version="1.0" encoding="utf-8"?>
+<p:sld xmlns:a="http://schemas.openxmlformats.org/drawingml/2006/main" xmlns:p="http://schemas.openxmlformats.org/presentationml/2006/main" xmlns:r="http://schemas.openxmlformats.org/officeDocument/2006/relationships">
+  <p:cSld>
+    <p:spTree>
+      <p:nvGrpSpPr>
+        <p:cNvPr id="1" name=""/>
+        <p:cNvGrpSpPr/>
+        <p:nvPr/>
+      </p:nvGrpSpPr>
+      <p:grpSpPr/>
+      <p:sp>
+        <p:nvSpPr>
+          <p:cNvPr id="2" name="Rectangle 1"/>
+          <p:cNvSpPr/>
+          <p:nvPr/>
+        </p:nvSpPr>
+        <p:spPr>
+          <a:xfrm>
+            <a:off x="0" y="0"/>
+            <a:ext cx="11430000" cy="6000750"/>
+          </a:xfrm>
+          <a:prstGeom prst="rect">
+            <a:avLst/>
+          </a:prstGeom>
+          <a:solidFill>
+            <a:srgbClr val="FCFCFC"/>
+          </a:solidFill>
+          <a:ln>
+            <a:noFill/>
+          </a:ln>
+          <a:effectLst/>
+        </p:spPr>
+        <p:txBody>
+          <a:bodyPr rtlCol="0" anchor="ctr"/>
+          <a:lstStyle/>
+          <a:p>
+            <a:pPr algn="ctr"/>
+          </a:p>
+        </p:txBody>
+      </p:sp>
+      <p:sp>
+        <p:nvSpPr>
+          <p:cNvPr id="3" name="Rectangle 2"/>
+          <p:cNvSpPr/>
+          <p:nvPr/>
+        </p:nvSpPr>
+        <p:spPr>
+          <a:xfrm>
+            <a:off x="0" y="0"/>
+            <a:ext cx="114300" cy="6000750"/>
+          </a:xfrm>
+          <a:prstGeom prst="rect">
+            <a:avLst/>
+          </a:prstGeom>
+          <a:solidFill>
+            <a:srgbClr val="014172"/>
+          </a:solidFill>
+          <a:ln>
+            <a:noFill/>
+          </a:ln>
+          <a:effectLst/>
+        </p:spPr>
+        <p:txBody>
+          <a:bodyPr rtlCol="0" anchor="ctr"/>
+          <a:lstStyle/>
+          <a:p>
+            <a:pPr algn="ctr"/>
+          </a:p>
+        </p:txBody>
+      </p:sp>
+      <p:sp>
+        <p:nvSpPr>
+          <p:cNvPr id="4" name="Rectangle 3"/>
+          <p:cNvSpPr/>
+          <p:nvPr/>
+        </p:nvSpPr>
+        <p:spPr>
+          <a:xfrm>
+            <a:off x="0" y="0"/>
+            <a:ext cx="11430000" cy="1504950"/>
+          </a:xfrm>
+          <a:prstGeom prst="rect">
+            <a:avLst/>
+          </a:prstGeom>
+          <a:solidFill>
+            <a:srgbClr val="014172"/>
+          </a:solidFill>
+          <a:ln>
+            <a:noFill/>
+          </a:ln>
+          <a:effectLst/>
+        </p:spPr>
+        <p:txBody>
+          <a:bodyPr rtlCol="0" anchor="ctr"/>
+          <a:lstStyle/>
+          <a:p>
+            <a:pPr algn="ctr"/>
+          </a:p>
+        </p:txBody>
+      </p:sp>
+      <p:sp>
+        <p:nvSpPr>
+          <p:cNvPr id="5" name="TextBox 4"/>
+          <p:cNvSpPr txBox="1"/>
+          <p:nvPr/>
+        </p:nvSpPr>
+        <p:spPr>
+          <a:xfrm>
+            <a:off x="609600" y="361950"/>
+            <a:ext cx="7429500" cy="476250"/>
+          </a:xfrm>
+          <a:prstGeom prst="rect">
+            <a:avLst/>
+          </a:prstGeom>
+          <a:noFill/>
+        </p:spPr>
+        <p:txBody>
+          <a:bodyPr wrap="none" lIns="0" rIns="0" tIns="0" bIns="0" anchor="ctr">
+            <a:spAutoFit/>
+          </a:bodyPr>
+          <a:lstStyle/>
+          <a:p>
+            <a:pPr algn="l"/>
+            <a:r>
+              <a:rPr sz="3000" b="1">
+                <a:solidFill>
+                  <a:srgbClr val="FFFFFF"/>
+                </a:solidFill>
+                <a:latin typeface="Yu Gothic UI"/>
+              </a:rPr>
+              <a:t>「20L」は何の20L？</a:t>
+            </a:r>
+          </a:p>
+        </p:txBody>
+      </p:sp>
+      <p:sp>
+        <p:nvSpPr>
+          <p:cNvPr id="6" name="TextBox 5"/>
+          <p:cNvSpPr txBox="1"/>
+          <p:nvPr/>
+        </p:nvSpPr>
+        <p:spPr>
+          <a:xfrm>
+            <a:off x="609600" y="876300"/>
+            <a:ext cx="7429500" cy="247650"/>
+          </a:xfrm>
+          <a:prstGeom prst="rect">
+            <a:avLst/>
+          </a:prstGeom>
+          <a:noFill/>
+        </p:spPr>
+        <p:txBody>
+          <a:bodyPr wrap="none" lIns="0" rIns="0" tIns="0" bIns="0" anchor="ctr">
+            <a:spAutoFit/>
+          </a:bodyPr>
+          <a:lstStyle/>
+          <a:p>
+            <a:pPr algn="l"/>
+            <a:r>
+              <a:rPr sz="1425" b="0">
+                <a:solidFill>
+                  <a:srgbClr val="DAE7F2"/>
+                </a:solidFill>
+                <a:latin typeface="Yu Gothic UI"/>
+              </a:rPr>
+              <a:t>外寸の体積のうち、中身に使えるのは 28.9〜40.0%</a:t>
+            </a:r>
+          </a:p>
+        </p:txBody>
+      </p:sp>
+      <p:sp>
+        <p:nvSpPr>
+          <p:cNvPr id="7" name="Rounded Rectangle 6"/>
+          <p:cNvSpPr/>
+          <p:nvPr/>
+        </p:nvSpPr>
+        <p:spPr>
+          <a:xfrm>
+            <a:off x="8305800" y="247650"/>
+            <a:ext cx="2514600" cy="1009650"/>
+          </a:xfrm>
+          <a:prstGeom prst="roundRect">
+            <a:avLst>
+              <a:gd name="adj" fmla="val 12000"/>
+            </a:avLst>
+          </a:prstGeom>
+          <a:solidFill>
+            <a:srgbClr val="FFFFFF"/>
+          </a:solidFill>
+          <a:ln>
+            <a:noFill/>
+          </a:ln>
+          <a:effectLst>
+            <a:outerShdw blurRad="254000" dist="63500" dir="5400000" rotWithShape="0">
+              <a:srgbClr val="0B2B45">
+                <a:alpha val="30000"/>
+              </a:srgbClr>
+            </a:outerShdw>
+          </a:effectLst>
+        </p:spPr>
+        <p:txBody>
+          <a:bodyPr rtlCol="0" anchor="ctr"/>
+          <a:lstStyle/>
+          <a:p>
+            <a:pPr algn="ctr"/>
+          </a:p>
+        </p:txBody>
+      </p:sp>
+      <p:sp>
+        <p:nvSpPr>
+          <p:cNvPr id="8" name="TextBox 7"/>
+          <p:cNvSpPr txBox="1"/>
+          <p:nvPr/>
+        </p:nvSpPr>
+        <p:spPr>
+          <a:xfrm>
+            <a:off x="8515350" y="400050"/>
+            <a:ext cx="2133600" cy="209550"/>
+          </a:xfrm>
+          <a:prstGeom prst="rect">
+            <a:avLst/>
+          </a:prstGeom>
+          <a:noFill/>
+        </p:spPr>
+        <p:txBody>
+          <a:bodyPr wrap="none" lIns="0" rIns="0" tIns="0" bIns="0" anchor="ctr">
+            <a:spAutoFit/>
+          </a:bodyPr>
+          <a:lstStyle/>
+          <a:p>
+            <a:pPr algn="l"/>
+            <a:r>
+              <a:rPr sz="1125" b="0">
+                <a:solidFill>
+                  <a:srgbClr val="6A717B"/>
+                </a:solidFill>
+                <a:latin typeface="Yu Gothic UI"/>
+              </a:rPr>
+              <a:t>46Lの箱で使えるのは</a:t>
+            </a:r>
+          </a:p>
+        </p:txBody>
+      </p:sp>
+      <p:sp>
+        <p:nvSpPr>
+          <p:cNvPr id="9" name="TextBox 8"/>
+          <p:cNvSpPr txBox="1"/>
+          <p:nvPr/>
+        </p:nvSpPr>
+        <p:spPr>
+          <a:xfrm>
+            <a:off x="8515350" y="647700"/>
+            <a:ext cx="2133600" cy="533400"/>
+          </a:xfrm>
+          <a:prstGeom prst="rect">
+            <a:avLst/>
+          </a:prstGeom>
+          <a:noFill/>
+        </p:spPr>
+        <p:txBody>
+          <a:bodyPr wrap="none" lIns="0" rIns="0" tIns="0" bIns="0" anchor="ctr">
+            <a:spAutoFit/>
+          </a:bodyPr>
+          <a:lstStyle/>
+          <a:p>
+            <a:pPr algn="l"/>
+            <a:r>
+              <a:rPr sz="3900" b="1">
+                <a:solidFill>
+                  <a:srgbClr val="014172"/>
+                </a:solidFill>
+                <a:latin typeface="Yu Gothic UI"/>
+              </a:rPr>
+              <a:t>13.4</a:t>
+            </a:r>
+            <a:r>
+              <a:rPr sz="1950" b="1">
+                <a:solidFill>
+                  <a:srgbClr val="014172"/>
+                </a:solidFill>
+                <a:latin typeface="Yu Gothic UI"/>
+              </a:rPr>
+              <a:t>L</a:t>
+            </a:r>
+          </a:p>
+        </p:txBody>
+      </p:sp>
+      <p:sp>
+        <p:nvSpPr>
+          <p:cNvPr id="10" name="Rectangle 9"/>
+          <p:cNvSpPr/>
+          <p:nvPr/>
+        </p:nvSpPr>
+        <p:spPr>
+          <a:xfrm>
+            <a:off x="914400" y="2038350"/>
+            <a:ext cx="3857625" cy="2640330"/>
+          </a:xfrm>
+          <a:prstGeom prst="rect">
+            <a:avLst/>
+          </a:prstGeom>
+          <a:solidFill>
+            <a:srgbClr val="F2F5F8"/>
+          </a:solidFill>
+          <a:ln w="19050">
+            <a:solidFill>
+              <a:srgbClr val="DAE7F2"/>
+            </a:solidFill>
+          </a:ln>
+          <a:effectLst/>
+        </p:spPr>
+        <p:txBody>
+          <a:bodyPr rtlCol="0" anchor="ctr"/>
+          <a:lstStyle/>
+          <a:p>
+            <a:pPr algn="ctr"/>
+          </a:p>
+        </p:txBody>
+      </p:sp>
+      <p:sp>
+        <p:nvSpPr>
+          <p:cNvPr id="11" name="Rectangle 10"/>
+          <p:cNvSpPr/>
+          <p:nvPr/>
+        </p:nvSpPr>
+        <p:spPr>
+          <a:xfrm>
+            <a:off x="1548765" y="2578418"/>
+            <a:ext cx="2588895" cy="1560195"/>
+          </a:xfrm>
+          <a:prstGeom prst="rect">
+            <a:avLst/>
+          </a:prstGeom>
+          <a:solidFill>
+            <a:srgbClr val="EEF4F9"/>
+          </a:solidFill>
+          <a:ln w="28575">
+            <a:solidFill>
+              <a:srgbClr val="014172"/>
+            </a:solidFill>
+          </a:ln>
+          <a:effectLst/>
+        </p:spPr>
+        <p:txBody>
+          <a:bodyPr rtlCol="0" anchor="ctr"/>
+          <a:lstStyle/>
+          <a:p>
+            <a:pPr algn="ctr"/>
+          </a:p>
+        </p:txBody>
+      </p:sp>
+      <p:sp>
+        <p:nvSpPr>
+          <p:cNvPr id="12" name="TextBox 11"/>
+          <p:cNvSpPr txBox="1"/>
+          <p:nvPr/>
+        </p:nvSpPr>
+        <p:spPr>
+          <a:xfrm>
+            <a:off x="914400" y="1752600"/>
+            <a:ext cx="4762500" cy="228600"/>
+          </a:xfrm>
+          <a:prstGeom prst="rect">
+            <a:avLst/>
+          </a:prstGeom>
+          <a:noFill/>
+        </p:spPr>
+        <p:txBody>
+          <a:bodyPr wrap="none" lIns="0" rIns="0" tIns="0" bIns="0" anchor="ctr">
+            <a:spAutoFit/>
+          </a:bodyPr>
+          <a:lstStyle/>
+          <a:p>
+            <a:pPr algn="l"/>
+            <a:r>
+              <a:rPr sz="1200" b="0">
+                <a:solidFill>
+                  <a:srgbClr val="6A717B"/>
+                </a:solidFill>
+                <a:latin typeface="Yu Gothic UI"/>
+              </a:rPr>
+              <a:t>アイリスオーヤマ HUGEL 15L を上から見た床面</a:t>
+            </a:r>
+          </a:p>
+        </p:txBody>
+      </p:sp>
+      <p:sp>
+        <p:nvSpPr>
+          <p:cNvPr id="13" name="TextBox 12"/>
+          <p:cNvSpPr txBox="1"/>
+          <p:nvPr/>
+        </p:nvSpPr>
+        <p:spPr>
+          <a:xfrm>
+            <a:off x="914400" y="4812030"/>
+            <a:ext cx="5334000" cy="228600"/>
+          </a:xfrm>
+          <a:prstGeom prst="rect">
+            <a:avLst/>
+          </a:prstGeom>
+          <a:noFill/>
+        </p:spPr>
+        <p:txBody>
+          <a:bodyPr wrap="none" lIns="0" rIns="0" tIns="0" bIns="0" anchor="ctr">
+            <a:spAutoFit/>
+          </a:bodyPr>
+          <a:lstStyle/>
+          <a:p>
+            <a:pPr algn="l"/>
+            <a:r>
+              <a:rPr sz="1125" b="0">
+                <a:solidFill>
+                  <a:srgbClr val="6A717B"/>
+                </a:solidFill>
+                <a:latin typeface="Yu Gothic UI"/>
+              </a:rPr>
+              <a:t>外寸 45.0 × 30.8cm ／ 内寸 30.2 × 18.2cm</a:t>
+            </a:r>
+          </a:p>
+        </p:txBody>
+      </p:sp>
+      <p:sp>
+        <p:nvSpPr>
+          <p:cNvPr id="14" name="TextBox 13"/>
+          <p:cNvSpPr txBox="1"/>
+          <p:nvPr/>
+        </p:nvSpPr>
+        <p:spPr>
+          <a:xfrm>
+            <a:off x="5905500" y="2038350"/>
+            <a:ext cx="3810000" cy="228600"/>
+          </a:xfrm>
+          <a:prstGeom prst="rect">
+            <a:avLst/>
+          </a:prstGeom>
+          <a:noFill/>
+        </p:spPr>
+        <p:txBody>
+          <a:bodyPr wrap="none" lIns="0" rIns="0" tIns="0" bIns="0" anchor="ctr">
+            <a:spAutoFit/>
+          </a:bodyPr>
+          <a:lstStyle/>
+          <a:p>
+            <a:pPr algn="l"/>
+            <a:r>
+              <a:rPr sz="1275" b="0">
+                <a:solidFill>
+                  <a:srgbClr val="6A717B"/>
+                </a:solidFill>
+                <a:latin typeface="Yu Gothic UI"/>
+              </a:rPr>
+              <a:t>外寸で測ると</a:t>
+            </a:r>
+          </a:p>
+        </p:txBody>
+      </p:sp>
+      <p:sp>
+        <p:nvSpPr>
+          <p:cNvPr id="15" name="TextBox 14"/>
+          <p:cNvSpPr txBox="1"/>
+          <p:nvPr/>
+        </p:nvSpPr>
+        <p:spPr>
+          <a:xfrm>
+            <a:off x="5905500" y="2362200"/>
+            <a:ext cx="3810000" cy="533400"/>
+          </a:xfrm>
+          <a:prstGeom prst="rect">
+            <a:avLst/>
+          </a:prstGeom>
+          <a:noFill/>
+        </p:spPr>
+        <p:txBody>
+          <a:bodyPr wrap="none" lIns="0" rIns="0" tIns="0" bIns="0" anchor="ctr">
+            <a:spAutoFit/>
+          </a:bodyPr>
+          <a:lstStyle/>
+          <a:p>
+            <a:pPr algn="l"/>
+            <a:r>
+              <a:rPr sz="3600" b="1">
+                <a:solidFill>
+                  <a:srgbClr val="2E2E33"/>
+                </a:solidFill>
+                <a:latin typeface="Yu Gothic UI"/>
+              </a:rPr>
+              <a:t>46</a:t>
+            </a:r>
+            <a:r>
+              <a:rPr sz="1800" b="1">
+                <a:solidFill>
+                  <a:srgbClr val="2E2E33"/>
+                </a:solidFill>
+                <a:latin typeface="Yu Gothic UI"/>
+              </a:rPr>
+              <a:t> L の箱</a:t>
+            </a:r>
+          </a:p>
+        </p:txBody>
+      </p:sp>
+      <p:sp>
+        <p:nvSpPr>
+          <p:cNvPr id="16" name="TextBox 15"/>
+          <p:cNvSpPr txBox="1"/>
+          <p:nvPr/>
+        </p:nvSpPr>
+        <p:spPr>
+          <a:xfrm>
+            <a:off x="5905500" y="3048000"/>
+            <a:ext cx="3810000" cy="228600"/>
+          </a:xfrm>
+          <a:prstGeom prst="rect">
+            <a:avLst/>
+          </a:prstGeom>
+          <a:noFill/>
+        </p:spPr>
+        <p:txBody>
+          <a:bodyPr wrap="none" lIns="0" rIns="0" tIns="0" bIns="0" anchor="ctr">
+            <a:spAutoFit/>
+          </a:bodyPr>
+          <a:lstStyle/>
+          <a:p>
+            <a:pPr algn="l"/>
+            <a:r>
+              <a:rPr sz="1275" b="0">
+                <a:solidFill>
+                  <a:srgbClr val="6A717B"/>
+                </a:solidFill>
+                <a:latin typeface="Yu Gothic UI"/>
+              </a:rPr>
+              <a:t>中身に使えるのは</a:t>
+            </a:r>
+          </a:p>
+        </p:txBody>
+      </p:sp>
+      <p:sp>
+        <p:nvSpPr>
+          <p:cNvPr id="17" name="TextBox 16"/>
+          <p:cNvSpPr txBox="1"/>
+          <p:nvPr/>
+        </p:nvSpPr>
+        <p:spPr>
+          <a:xfrm>
+            <a:off x="5905500" y="3371850"/>
+            <a:ext cx="3810000" cy="533400"/>
+          </a:xfrm>
+          <a:prstGeom prst="rect">
+            <a:avLst/>
+          </a:prstGeom>
+          <a:noFill/>
+        </p:spPr>
+        <p:txBody>
+          <a:bodyPr wrap="none" lIns="0" rIns="0" tIns="0" bIns="0" anchor="ctr">
+            <a:spAutoFit/>
+          </a:bodyPr>
+          <a:lstStyle/>
+          <a:p>
+            <a:pPr algn="l"/>
+            <a:r>
+              <a:rPr sz="3600" b="1">
+                <a:solidFill>
+                  <a:srgbClr val="014172"/>
+                </a:solidFill>
+                <a:latin typeface="Yu Gothic UI"/>
+              </a:rPr>
+              <a:t>13.4</a:t>
+            </a:r>
+            <a:r>
+              <a:rPr sz="1800" b="1">
+                <a:solidFill>
+                  <a:srgbClr val="014172"/>
+                </a:solidFill>
+                <a:latin typeface="Yu Gothic UI"/>
+              </a:rPr>
+              <a:t> L</a:t>
+            </a:r>
+          </a:p>
+        </p:txBody>
+      </p:sp>
+      <p:sp>
+        <p:nvSpPr>
+          <p:cNvPr id="18" name="Rounded Rectangle 17"/>
+          <p:cNvSpPr/>
+          <p:nvPr/>
+        </p:nvSpPr>
+        <p:spPr>
+          <a:xfrm>
+            <a:off x="5905500" y="3981450"/>
+            <a:ext cx="4000500" cy="590550"/>
+          </a:xfrm>
+          <a:prstGeom prst="roundRect">
+            <a:avLst>
+              <a:gd name="adj" fmla="val 8000"/>
+            </a:avLst>
+          </a:prstGeom>
+          <a:solidFill>
+            <a:srgbClr val="F2F5F8"/>
+          </a:solidFill>
+          <a:ln>
+            <a:noFill/>
+          </a:ln>
+          <a:effectLst/>
+        </p:spPr>
+        <p:txBody>
+          <a:bodyPr rtlCol="0" anchor="ctr"/>
+          <a:lstStyle/>
+          <a:p>
+            <a:pPr algn="ctr"/>
+          </a:p>
+        </p:txBody>
+      </p:sp>
+      <p:sp>
+        <p:nvSpPr>
+          <p:cNvPr id="19" name="TextBox 18"/>
+          <p:cNvSpPr txBox="1"/>
+          <p:nvPr/>
+        </p:nvSpPr>
+        <p:spPr>
+          <a:xfrm>
+            <a:off x="6076950" y="4152900"/>
+            <a:ext cx="3619500" cy="247650"/>
+          </a:xfrm>
+          <a:prstGeom prst="rect">
+            <a:avLst/>
+          </a:prstGeom>
+          <a:noFill/>
+        </p:spPr>
+        <p:txBody>
+          <a:bodyPr wrap="none" lIns="0" rIns="0" tIns="0" bIns="0" anchor="ctr">
+            <a:spAutoFit/>
+          </a:bodyPr>
+          <a:lstStyle/>
+          <a:p>
+            <a:pPr algn="l"/>
+            <a:r>
+              <a:rPr sz="1425" b="1">
+                <a:solidFill>
+                  <a:srgbClr val="2E2E33"/>
+                </a:solidFill>
+                <a:latin typeface="Yu Gothic UI"/>
+              </a:rPr>
+              <a:t>公表容量は 15L</a:t>
+            </a:r>
+          </a:p>
+        </p:txBody>
+      </p:sp>
+      <p:sp>
+        <p:nvSpPr>
+          <p:cNvPr id="20" name="Rectangle 19"/>
+          <p:cNvSpPr/>
+          <p:nvPr/>
+        </p:nvSpPr>
+        <p:spPr>
+          <a:xfrm>
+            <a:off x="609600" y="5295900"/>
+            <a:ext cx="10210800" cy="9525"/>
+          </a:xfrm>
+          <a:prstGeom prst="rect">
+            <a:avLst/>
+          </a:prstGeom>
+          <a:solidFill>
+            <a:srgbClr val="E2E7EC"/>
+          </a:solidFill>
+          <a:ln>
+            <a:noFill/>
+          </a:ln>
+          <a:effectLst/>
+        </p:spPr>
+        <p:txBody>
+          <a:bodyPr rtlCol="0" anchor="ctr"/>
+          <a:lstStyle/>
+          <a:p>
+            <a:pPr algn="ctr"/>
+          </a:p>
+        </p:txBody>
+      </p:sp>
+      <p:sp>
+        <p:nvSpPr>
+          <p:cNvPr id="21" name="TextBox 20"/>
+          <p:cNvSpPr txBox="1"/>
+          <p:nvPr/>
+        </p:nvSpPr>
+        <p:spPr>
+          <a:xfrm>
+            <a:off x="609600" y="5429250"/>
+            <a:ext cx="7239000" cy="247650"/>
+          </a:xfrm>
+          <a:prstGeom prst="rect">
+            <a:avLst/>
+          </a:prstGeom>
+          <a:noFill/>
+        </p:spPr>
+        <p:txBody>
+          <a:bodyPr wrap="none" lIns="0" rIns="0" tIns="0" bIns="0" anchor="ctr">
+            <a:spAutoFit/>
+          </a:bodyPr>
+          <a:lstStyle/>
+          <a:p>
+            <a:pPr algn="l"/>
+            <a:r>
+              <a:rPr sz="1425" b="1">
+                <a:solidFill>
+                  <a:srgbClr val="2E2E33"/>
+                </a:solidFill>
+                <a:latin typeface="Yu Gothic UI"/>
+              </a:rPr>
+              <a:t>外寸で測った体積のうち、中に入るのは 28.9〜40.0% です。</a:t>
+            </a:r>
+          </a:p>
+        </p:txBody>
+      </p:sp>
+      <p:sp>
+        <p:nvSpPr>
+          <p:cNvPr id="22" name="TextBox 21"/>
+          <p:cNvSpPr txBox="1"/>
+          <p:nvPr/>
+        </p:nvSpPr>
+        <p:spPr>
+          <a:xfrm>
+            <a:off x="609600" y="5676900"/>
+            <a:ext cx="7620000" cy="209550"/>
+          </a:xfrm>
+          <a:prstGeom prst="rect">
+            <a:avLst/>
+          </a:prstGeom>
+          <a:noFill/>
+        </p:spPr>
+        <p:txBody>
+          <a:bodyPr wrap="none" lIns="0" rIns="0" tIns="0" bIns="0" anchor="ctr">
+            <a:spAutoFit/>
+          </a:bodyPr>
+          <a:lstStyle/>
+          <a:p>
+            <a:pPr algn="l"/>
+            <a:r>
+              <a:rPr sz="1050" b="0">
+                <a:solidFill>
+                  <a:srgbClr val="6A717B"/>
+                </a:solidFill>
+                <a:latin typeface="Yu Gothic UI"/>
+              </a:rPr>
+              <a:t>メーカー公表値からの計算です（実測ではありません）</a:t>
+            </a:r>
+          </a:p>
+        </p:txBody>
+      </p:sp>
+      <p:sp>
+        <p:nvSpPr>
+          <p:cNvPr id="23" name="TextBox 22"/>
+          <p:cNvSpPr txBox="1"/>
+          <p:nvPr/>
+        </p:nvSpPr>
+        <p:spPr>
+          <a:xfrm>
+            <a:off x="7962900" y="5676900"/>
+            <a:ext cx="2857500" cy="209550"/>
+          </a:xfrm>
+          <a:prstGeom prst="rect">
+            <a:avLst/>
+          </a:prstGeom>
+          <a:noFill/>
+        </p:spPr>
+        <p:txBody>
+          <a:bodyPr wrap="none" lIns="0" rIns="0" tIns="0" bIns="0" anchor="ctr">
+            <a:spAutoFit/>
+          </a:bodyPr>
+          <a:lstStyle/>
+          <a:p>
+            <a:pPr algn="r"/>
+            <a:r>
+              <a:rPr sz="1050" b="0">
+                <a:solidFill>
+                  <a:srgbClr val="6A717B"/>
+                </a:solidFill>
+                <a:latin typeface="Yu Gothic UI"/>
+              </a:rPr>
+              <a:t>寸法で選ぶ　sunpou.nexeed-lab.com</a:t>
+            </a:r>
+          </a:p>
+        </p:txBody>
+      </p:sp>
+    </p:spTree>
+  </p:cSld>
+  <p:clrMapOvr>
+    <a:masterClrMapping/>
+  </p:clrMapOvr>
+</p:sld>
+</file>
+
+<file path=ppt/slides/slide8.xml><?xml version="1.0" encoding="utf-8"?>
+<p:sld xmlns:a="http://schemas.openxmlformats.org/drawingml/2006/main" xmlns:p="http://schemas.openxmlformats.org/presentationml/2006/main" xmlns:r="http://schemas.openxmlformats.org/officeDocument/2006/relationships">
+  <p:cSld>
+    <p:spTree>
+      <p:nvGrpSpPr>
+        <p:cNvPr id="1" name=""/>
+        <p:cNvGrpSpPr/>
+        <p:nvPr/>
+      </p:nvGrpSpPr>
+      <p:grpSpPr/>
+      <p:sp>
+        <p:nvSpPr>
+          <p:cNvPr id="2" name="Rectangle 1"/>
+          <p:cNvSpPr/>
+          <p:nvPr/>
+        </p:nvSpPr>
+        <p:spPr>
+          <a:xfrm>
+            <a:off x="0" y="0"/>
+            <a:ext cx="11430000" cy="6000750"/>
+          </a:xfrm>
+          <a:prstGeom prst="rect">
+            <a:avLst/>
+          </a:prstGeom>
+          <a:solidFill>
+            <a:srgbClr val="FCFCFC"/>
+          </a:solidFill>
+          <a:ln>
+            <a:noFill/>
+          </a:ln>
+          <a:effectLst/>
+        </p:spPr>
+        <p:txBody>
+          <a:bodyPr rtlCol="0" anchor="ctr"/>
+          <a:lstStyle/>
+          <a:p>
+            <a:pPr algn="ctr"/>
+          </a:p>
+        </p:txBody>
+      </p:sp>
+      <p:sp>
+        <p:nvSpPr>
+          <p:cNvPr id="3" name="Rectangle 2"/>
+          <p:cNvSpPr/>
+          <p:nvPr/>
+        </p:nvSpPr>
+        <p:spPr>
+          <a:xfrm>
+            <a:off x="0" y="0"/>
+            <a:ext cx="114300" cy="6000750"/>
+          </a:xfrm>
+          <a:prstGeom prst="rect">
+            <a:avLst/>
+          </a:prstGeom>
+          <a:solidFill>
+            <a:srgbClr val="014172"/>
+          </a:solidFill>
+          <a:ln>
+            <a:noFill/>
+          </a:ln>
+          <a:effectLst/>
+        </p:spPr>
+        <p:txBody>
+          <a:bodyPr rtlCol="0" anchor="ctr"/>
+          <a:lstStyle/>
+          <a:p>
+            <a:pPr algn="ctr"/>
+          </a:p>
+        </p:txBody>
+      </p:sp>
+      <p:sp>
+        <p:nvSpPr>
+          <p:cNvPr id="4" name="Rectangle 3"/>
+          <p:cNvSpPr/>
+          <p:nvPr/>
+        </p:nvSpPr>
+        <p:spPr>
+          <a:xfrm>
+            <a:off x="0" y="0"/>
+            <a:ext cx="11430000" cy="1504950"/>
+          </a:xfrm>
+          <a:prstGeom prst="rect">
+            <a:avLst/>
+          </a:prstGeom>
+          <a:solidFill>
+            <a:srgbClr val="014172"/>
+          </a:solidFill>
+          <a:ln>
+            <a:noFill/>
+          </a:ln>
+          <a:effectLst/>
+        </p:spPr>
+        <p:txBody>
+          <a:bodyPr rtlCol="0" anchor="ctr"/>
+          <a:lstStyle/>
+          <a:p>
+            <a:pPr algn="ctr"/>
+          </a:p>
+        </p:txBody>
+      </p:sp>
+      <p:sp>
+        <p:nvSpPr>
+          <p:cNvPr id="5" name="TextBox 4"/>
+          <p:cNvSpPr txBox="1"/>
+          <p:nvPr/>
+        </p:nvSpPr>
+        <p:spPr>
+          <a:xfrm>
+            <a:off x="609600" y="361950"/>
+            <a:ext cx="7429500" cy="476250"/>
+          </a:xfrm>
+          <a:prstGeom prst="rect">
+            <a:avLst/>
+          </a:prstGeom>
+          <a:noFill/>
+        </p:spPr>
+        <p:txBody>
+          <a:bodyPr wrap="none" lIns="0" rIns="0" tIns="0" bIns="0" anchor="ctr">
+            <a:spAutoFit/>
+          </a:bodyPr>
+          <a:lstStyle/>
+          <a:p>
+            <a:pPr algn="l"/>
+            <a:r>
+              <a:rPr sz="3000" b="1">
+                <a:solidFill>
+                  <a:srgbClr val="FFFFFF"/>
+                </a:solidFill>
+                <a:latin typeface="Yu Gothic UI"/>
+              </a:rPr>
+              <a:t>保冷剤を入れると 500ml は何本減る？</a:t>
+            </a:r>
+          </a:p>
+        </p:txBody>
+      </p:sp>
+      <p:sp>
+        <p:nvSpPr>
+          <p:cNvPr id="6" name="TextBox 5"/>
+          <p:cNvSpPr txBox="1"/>
+          <p:nvPr/>
+        </p:nvSpPr>
+        <p:spPr>
+          <a:xfrm>
+            <a:off x="609600" y="876300"/>
+            <a:ext cx="7429500" cy="247650"/>
+          </a:xfrm>
+          <a:prstGeom prst="rect">
+            <a:avLst/>
+          </a:prstGeom>
+          <a:noFill/>
+        </p:spPr>
+        <p:txBody>
+          <a:bodyPr wrap="none" lIns="0" rIns="0" tIns="0" bIns="0" anchor="ctr">
+            <a:spAutoFit/>
+          </a:bodyPr>
+          <a:lstStyle/>
+          <a:p>
+            <a:pPr algn="l"/>
+            <a:r>
+              <a:rPr sz="1425" b="0">
+                <a:solidFill>
+                  <a:srgbClr val="DAE7F2"/>
+                </a:solidFill>
+                <a:latin typeface="Yu Gothic UI"/>
+              </a:rPr>
+              <a:t>ダイワ S2000（20L）内寸 22 × 39cm ／ 500ml角型 ／ 保冷剤なしなら18本</a:t>
+            </a:r>
+          </a:p>
+        </p:txBody>
+      </p:sp>
+      <p:sp>
+        <p:nvSpPr>
+          <p:cNvPr id="7" name="Rounded Rectangle 6"/>
+          <p:cNvSpPr/>
+          <p:nvPr/>
+        </p:nvSpPr>
+        <p:spPr>
+          <a:xfrm>
+            <a:off x="8305800" y="247650"/>
+            <a:ext cx="2514600" cy="1009650"/>
+          </a:xfrm>
+          <a:prstGeom prst="roundRect">
+            <a:avLst>
+              <a:gd name="adj" fmla="val 12000"/>
+            </a:avLst>
+          </a:prstGeom>
+          <a:solidFill>
+            <a:srgbClr val="FFFFFF"/>
+          </a:solidFill>
+          <a:ln>
+            <a:noFill/>
+          </a:ln>
+          <a:effectLst>
+            <a:outerShdw blurRad="254000" dist="63500" dir="5400000" rotWithShape="0">
+              <a:srgbClr val="0B2B45">
+                <a:alpha val="30000"/>
+              </a:srgbClr>
+            </a:outerShdw>
+          </a:effectLst>
+        </p:spPr>
+        <p:txBody>
+          <a:bodyPr rtlCol="0" anchor="ctr"/>
+          <a:lstStyle/>
+          <a:p>
+            <a:pPr algn="ctr"/>
+          </a:p>
+        </p:txBody>
+      </p:sp>
+      <p:sp>
+        <p:nvSpPr>
+          <p:cNvPr id="8" name="TextBox 7"/>
+          <p:cNvSpPr txBox="1"/>
+          <p:nvPr/>
+        </p:nvSpPr>
+        <p:spPr>
+          <a:xfrm>
+            <a:off x="8515350" y="400050"/>
+            <a:ext cx="2133600" cy="209550"/>
+          </a:xfrm>
+          <a:prstGeom prst="rect">
+            <a:avLst/>
+          </a:prstGeom>
+          <a:noFill/>
+        </p:spPr>
+        <p:txBody>
+          <a:bodyPr wrap="none" lIns="0" rIns="0" tIns="0" bIns="0" anchor="ctr">
+            <a:spAutoFit/>
+          </a:bodyPr>
+          <a:lstStyle/>
+          <a:p>
+            <a:pPr algn="l"/>
+            <a:r>
+              <a:rPr sz="1125" b="0">
+                <a:solidFill>
+                  <a:srgbClr val="6A717B"/>
+                </a:solidFill>
+                <a:latin typeface="Yu Gothic UI"/>
+              </a:rPr>
+              <a:t>寝かせると</a:t>
+            </a:r>
+          </a:p>
+        </p:txBody>
+      </p:sp>
+      <p:sp>
+        <p:nvSpPr>
+          <p:cNvPr id="9" name="TextBox 8"/>
+          <p:cNvSpPr txBox="1"/>
+          <p:nvPr/>
+        </p:nvSpPr>
+        <p:spPr>
+          <a:xfrm>
+            <a:off x="8515350" y="647700"/>
+            <a:ext cx="2133600" cy="533400"/>
+          </a:xfrm>
+          <a:prstGeom prst="rect">
+            <a:avLst/>
+          </a:prstGeom>
+          <a:noFill/>
+        </p:spPr>
+        <p:txBody>
+          <a:bodyPr wrap="none" lIns="0" rIns="0" tIns="0" bIns="0" anchor="ctr">
+            <a:spAutoFit/>
+          </a:bodyPr>
+          <a:lstStyle/>
+          <a:p>
+            <a:pPr algn="l"/>
+            <a:r>
+              <a:rPr sz="3900" b="1">
+                <a:solidFill>
+                  <a:srgbClr val="014172"/>
+                </a:solidFill>
+                <a:latin typeface="Yu Gothic UI"/>
+              </a:rPr>
+              <a:t>6</a:t>
+            </a:r>
+            <a:r>
+              <a:rPr sz="1950" b="1">
+                <a:solidFill>
+                  <a:srgbClr val="014172"/>
+                </a:solidFill>
+                <a:latin typeface="Yu Gothic UI"/>
+              </a:rPr>
+              <a:t>本</a:t>
+            </a:r>
+          </a:p>
+        </p:txBody>
+      </p:sp>
+      <p:sp>
+        <p:nvSpPr>
+          <p:cNvPr id="10" name="Rounded Rectangle 9"/>
+          <p:cNvSpPr/>
+          <p:nvPr/>
+        </p:nvSpPr>
+        <p:spPr>
+          <a:xfrm>
+            <a:off x="800100" y="1866900"/>
+            <a:ext cx="4476750" cy="2857500"/>
+          </a:xfrm>
+          <a:prstGeom prst="roundRect">
+            <a:avLst>
+              <a:gd name="adj" fmla="val 4000"/>
+            </a:avLst>
+          </a:prstGeom>
+          <a:solidFill>
+            <a:srgbClr val="FDF2E4"/>
+          </a:solidFill>
+          <a:ln w="19050">
+            <a:solidFill>
+              <a:srgbClr val="A8410F"/>
+            </a:solidFill>
+          </a:ln>
+          <a:effectLst/>
+        </p:spPr>
+        <p:txBody>
+          <a:bodyPr rtlCol="0" anchor="ctr"/>
+          <a:lstStyle/>
+          <a:p>
+            <a:pPr algn="ctr"/>
+          </a:p>
+        </p:txBody>
+      </p:sp>
+      <p:sp>
+        <p:nvSpPr>
+          <p:cNvPr id="11" name="TextBox 10"/>
+          <p:cNvSpPr txBox="1"/>
+          <p:nvPr/>
+        </p:nvSpPr>
+        <p:spPr>
+          <a:xfrm>
+            <a:off x="1047750" y="2076450"/>
+            <a:ext cx="4000500" cy="266700"/>
+          </a:xfrm>
+          <a:prstGeom prst="rect">
+            <a:avLst/>
+          </a:prstGeom>
+          <a:noFill/>
+        </p:spPr>
+        <p:txBody>
+          <a:bodyPr wrap="none" lIns="0" rIns="0" tIns="0" bIns="0" anchor="ctr">
+            <a:spAutoFit/>
+          </a:bodyPr>
+          <a:lstStyle/>
+          <a:p>
+            <a:pPr algn="l"/>
+            <a:r>
+              <a:rPr sz="1575" b="1">
+                <a:solidFill>
+                  <a:srgbClr val="2E2E33"/>
+                </a:solidFill>
+                <a:latin typeface="Yu Gothic UI"/>
+              </a:rPr>
+              <a:t>床に寝かせる</a:t>
+            </a:r>
+          </a:p>
+        </p:txBody>
+      </p:sp>
+      <p:sp>
+        <p:nvSpPr>
+          <p:cNvPr id="12" name="TextBox 11"/>
+          <p:cNvSpPr txBox="1"/>
+          <p:nvPr/>
+        </p:nvSpPr>
+        <p:spPr>
+          <a:xfrm>
+            <a:off x="1047750" y="2571750"/>
+            <a:ext cx="4000500" cy="857250"/>
+          </a:xfrm>
+          <a:prstGeom prst="rect">
+            <a:avLst/>
+          </a:prstGeom>
+          <a:noFill/>
+        </p:spPr>
+        <p:txBody>
+          <a:bodyPr wrap="none" lIns="0" rIns="0" tIns="0" bIns="0" anchor="ctr">
+            <a:spAutoFit/>
+          </a:bodyPr>
+          <a:lstStyle/>
+          <a:p>
+            <a:pPr algn="l"/>
+            <a:r>
+              <a:rPr sz="5700" b="1">
+                <a:solidFill>
+                  <a:srgbClr val="A8410F"/>
+                </a:solidFill>
+                <a:latin typeface="Yu Gothic UI"/>
+              </a:rPr>
+              <a:t>6</a:t>
+            </a:r>
+            <a:r>
+              <a:rPr sz="2250" b="1">
+                <a:solidFill>
+                  <a:srgbClr val="A8410F"/>
+                </a:solidFill>
+                <a:latin typeface="Yu Gothic UI"/>
+              </a:rPr>
+              <a:t>本</a:t>
+            </a:r>
+          </a:p>
+        </p:txBody>
+      </p:sp>
+      <p:sp>
+        <p:nvSpPr>
+          <p:cNvPr id="13" name="TextBox 12"/>
+          <p:cNvSpPr txBox="1"/>
+          <p:nvPr/>
+        </p:nvSpPr>
+        <p:spPr>
+          <a:xfrm>
+            <a:off x="1047750" y="3714750"/>
+            <a:ext cx="4000500" cy="247650"/>
+          </a:xfrm>
+          <a:prstGeom prst="rect">
+            <a:avLst/>
+          </a:prstGeom>
+          <a:noFill/>
+        </p:spPr>
+        <p:txBody>
+          <a:bodyPr wrap="none" lIns="0" rIns="0" tIns="0" bIns="0" anchor="ctr">
+            <a:spAutoFit/>
+          </a:bodyPr>
+          <a:lstStyle/>
+          <a:p>
+            <a:pPr algn="l"/>
+            <a:r>
+              <a:rPr sz="1275" b="0">
+                <a:solidFill>
+                  <a:srgbClr val="6A717B"/>
+                </a:solidFill>
+                <a:latin typeface="Yu Gothic UI"/>
+              </a:rPr>
+              <a:t>保冷剤が床を占めます</a:t>
+            </a:r>
+          </a:p>
+        </p:txBody>
+      </p:sp>
+      <p:sp>
+        <p:nvSpPr>
+          <p:cNvPr id="14" name="TextBox 13"/>
+          <p:cNvSpPr txBox="1"/>
+          <p:nvPr/>
+        </p:nvSpPr>
+        <p:spPr>
+          <a:xfrm>
+            <a:off x="1047750" y="4095750"/>
+            <a:ext cx="4000500" cy="247650"/>
+          </a:xfrm>
+          <a:prstGeom prst="rect">
+            <a:avLst/>
+          </a:prstGeom>
+          <a:noFill/>
+        </p:spPr>
+        <p:txBody>
+          <a:bodyPr wrap="none" lIns="0" rIns="0" tIns="0" bIns="0" anchor="ctr">
+            <a:spAutoFit/>
+          </a:bodyPr>
+          <a:lstStyle/>
+          <a:p>
+            <a:pPr algn="l"/>
+            <a:r>
+              <a:rPr sz="1275" b="0">
+                <a:solidFill>
+                  <a:srgbClr val="6A717B"/>
+                </a:solidFill>
+                <a:latin typeface="Yu Gothic UI"/>
+              </a:rPr>
+              <a:t>並べられる列が減ります</a:t>
+            </a:r>
+          </a:p>
+        </p:txBody>
+      </p:sp>
+      <p:sp>
+        <p:nvSpPr>
+          <p:cNvPr id="15" name="Rounded Rectangle 14"/>
+          <p:cNvSpPr/>
+          <p:nvPr/>
+        </p:nvSpPr>
+        <p:spPr>
+          <a:xfrm>
+            <a:off x="6038850" y="1866900"/>
+            <a:ext cx="4476750" cy="2857500"/>
+          </a:xfrm>
+          <a:prstGeom prst="roundRect">
+            <a:avLst>
+              <a:gd name="adj" fmla="val 4000"/>
+            </a:avLst>
+          </a:prstGeom>
+          <a:solidFill>
+            <a:srgbClr val="F2F5F8"/>
+          </a:solidFill>
+          <a:ln w="19050">
+            <a:solidFill>
+              <a:srgbClr val="DAE7F2"/>
+            </a:solidFill>
+          </a:ln>
+          <a:effectLst/>
+        </p:spPr>
+        <p:txBody>
+          <a:bodyPr rtlCol="0" anchor="ctr"/>
+          <a:lstStyle/>
+          <a:p>
+            <a:pPr algn="ctr"/>
+          </a:p>
+        </p:txBody>
+      </p:sp>
+      <p:sp>
+        <p:nvSpPr>
+          <p:cNvPr id="16" name="TextBox 15"/>
+          <p:cNvSpPr txBox="1"/>
+          <p:nvPr/>
+        </p:nvSpPr>
+        <p:spPr>
+          <a:xfrm>
+            <a:off x="6286500" y="2076450"/>
+            <a:ext cx="4000500" cy="266700"/>
+          </a:xfrm>
+          <a:prstGeom prst="rect">
+            <a:avLst/>
+          </a:prstGeom>
+          <a:noFill/>
+        </p:spPr>
+        <p:txBody>
+          <a:bodyPr wrap="none" lIns="0" rIns="0" tIns="0" bIns="0" anchor="ctr">
+            <a:spAutoFit/>
+          </a:bodyPr>
+          <a:lstStyle/>
+          <a:p>
+            <a:pPr algn="l"/>
+            <a:r>
+              <a:rPr sz="1575" b="1">
+                <a:solidFill>
+                  <a:srgbClr val="2E2E33"/>
+                </a:solidFill>
+                <a:latin typeface="Yu Gothic UI"/>
+              </a:rPr>
+              <a:t>壁に立てかける</a:t>
+            </a:r>
+          </a:p>
+        </p:txBody>
+      </p:sp>
+      <p:sp>
+        <p:nvSpPr>
+          <p:cNvPr id="17" name="TextBox 16"/>
+          <p:cNvSpPr txBox="1"/>
+          <p:nvPr/>
+        </p:nvSpPr>
+        <p:spPr>
+          <a:xfrm>
+            <a:off x="6286500" y="2571750"/>
+            <a:ext cx="4000500" cy="857250"/>
+          </a:xfrm>
+          <a:prstGeom prst="rect">
+            <a:avLst/>
+          </a:prstGeom>
+          <a:noFill/>
+        </p:spPr>
+        <p:txBody>
+          <a:bodyPr wrap="none" lIns="0" rIns="0" tIns="0" bIns="0" anchor="ctr">
+            <a:spAutoFit/>
+          </a:bodyPr>
+          <a:lstStyle/>
+          <a:p>
+            <a:pPr algn="l"/>
+            <a:r>
+              <a:rPr sz="5700" b="1">
+                <a:solidFill>
+                  <a:srgbClr val="014172"/>
+                </a:solidFill>
+                <a:latin typeface="Yu Gothic UI"/>
+              </a:rPr>
+              <a:t>18</a:t>
+            </a:r>
+            <a:r>
+              <a:rPr sz="2250" b="1">
+                <a:solidFill>
+                  <a:srgbClr val="014172"/>
+                </a:solidFill>
+                <a:latin typeface="Yu Gothic UI"/>
+              </a:rPr>
+              <a:t>本</a:t>
+            </a:r>
+          </a:p>
+        </p:txBody>
+      </p:sp>
+      <p:sp>
+        <p:nvSpPr>
+          <p:cNvPr id="18" name="TextBox 17"/>
+          <p:cNvSpPr txBox="1"/>
+          <p:nvPr/>
+        </p:nvSpPr>
+        <p:spPr>
+          <a:xfrm>
+            <a:off x="6286500" y="3714750"/>
+            <a:ext cx="4000500" cy="247650"/>
+          </a:xfrm>
+          <a:prstGeom prst="rect">
+            <a:avLst/>
+          </a:prstGeom>
+          <a:noFill/>
+        </p:spPr>
+        <p:txBody>
+          <a:bodyPr wrap="none" lIns="0" rIns="0" tIns="0" bIns="0" anchor="ctr">
+            <a:spAutoFit/>
+          </a:bodyPr>
+          <a:lstStyle/>
+          <a:p>
+            <a:pPr algn="l"/>
+            <a:r>
+              <a:rPr sz="1275" b="0">
+                <a:solidFill>
+                  <a:srgbClr val="6A717B"/>
+                </a:solidFill>
+                <a:latin typeface="Yu Gothic UI"/>
+              </a:rPr>
+              <a:t>本数は減りません</a:t>
+            </a:r>
+          </a:p>
+        </p:txBody>
+      </p:sp>
+      <p:sp>
+        <p:nvSpPr>
+          <p:cNvPr id="19" name="TextBox 18"/>
+          <p:cNvSpPr txBox="1"/>
+          <p:nvPr/>
+        </p:nvSpPr>
+        <p:spPr>
+          <a:xfrm>
+            <a:off x="6286500" y="4095750"/>
+            <a:ext cx="4000500" cy="247650"/>
+          </a:xfrm>
+          <a:prstGeom prst="rect">
+            <a:avLst/>
+          </a:prstGeom>
+          <a:noFill/>
+        </p:spPr>
+        <p:txBody>
+          <a:bodyPr wrap="none" lIns="0" rIns="0" tIns="0" bIns="0" anchor="ctr">
+            <a:spAutoFit/>
+          </a:bodyPr>
+          <a:lstStyle/>
+          <a:p>
+            <a:pPr algn="l"/>
+            <a:r>
+              <a:rPr sz="1275" b="0">
+                <a:solidFill>
+                  <a:srgbClr val="6A717B"/>
+                </a:solidFill>
+                <a:latin typeface="Yu Gothic UI"/>
+              </a:rPr>
+              <a:t>壁に立てれば床が空きます</a:t>
+            </a:r>
+          </a:p>
+        </p:txBody>
+      </p:sp>
+      <p:sp>
+        <p:nvSpPr>
+          <p:cNvPr id="20" name="Rectangle 19"/>
+          <p:cNvSpPr/>
+          <p:nvPr/>
+        </p:nvSpPr>
+        <p:spPr>
+          <a:xfrm>
+            <a:off x="609600" y="5295900"/>
+            <a:ext cx="10210800" cy="9525"/>
+          </a:xfrm>
+          <a:prstGeom prst="rect">
+            <a:avLst/>
+          </a:prstGeom>
+          <a:solidFill>
+            <a:srgbClr val="E2E7EC"/>
+          </a:solidFill>
+          <a:ln>
+            <a:noFill/>
+          </a:ln>
+          <a:effectLst/>
+        </p:spPr>
+        <p:txBody>
+          <a:bodyPr rtlCol="0" anchor="ctr"/>
+          <a:lstStyle/>
+          <a:p>
+            <a:pPr algn="ctr"/>
+          </a:p>
+        </p:txBody>
+      </p:sp>
+      <p:sp>
+        <p:nvSpPr>
+          <p:cNvPr id="21" name="TextBox 20"/>
+          <p:cNvSpPr txBox="1"/>
+          <p:nvPr/>
+        </p:nvSpPr>
+        <p:spPr>
+          <a:xfrm>
+            <a:off x="609600" y="5429250"/>
+            <a:ext cx="7239000" cy="247650"/>
+          </a:xfrm>
+          <a:prstGeom prst="rect">
+            <a:avLst/>
+          </a:prstGeom>
+          <a:noFill/>
+        </p:spPr>
+        <p:txBody>
+          <a:bodyPr wrap="none" lIns="0" rIns="0" tIns="0" bIns="0" anchor="ctr">
+            <a:spAutoFit/>
+          </a:bodyPr>
+          <a:lstStyle/>
+          <a:p>
+            <a:pPr algn="l"/>
+            <a:r>
+              <a:rPr sz="1425" b="1">
+                <a:solidFill>
+                  <a:srgbClr val="2E2E33"/>
+                </a:solidFill>
+                <a:latin typeface="Yu Gothic UI"/>
+              </a:rPr>
+              <a:t>同じ箱・同じ保冷剤でも、置き方で 6本 と 18本 に分かれます。</a:t>
+            </a:r>
+          </a:p>
+        </p:txBody>
+      </p:sp>
+      <p:sp>
+        <p:nvSpPr>
+          <p:cNvPr id="22" name="TextBox 21"/>
+          <p:cNvSpPr txBox="1"/>
+          <p:nvPr/>
+        </p:nvSpPr>
+        <p:spPr>
+          <a:xfrm>
+            <a:off x="609600" y="5676900"/>
+            <a:ext cx="7620000" cy="209550"/>
+          </a:xfrm>
+          <a:prstGeom prst="rect">
+            <a:avLst/>
+          </a:prstGeom>
+          <a:noFill/>
+        </p:spPr>
+        <p:txBody>
+          <a:bodyPr wrap="none" lIns="0" rIns="0" tIns="0" bIns="0" anchor="ctr">
+            <a:spAutoFit/>
+          </a:bodyPr>
+          <a:lstStyle/>
+          <a:p>
+            <a:pPr algn="l"/>
+            <a:r>
+              <a:rPr sz="1050" b="0">
+                <a:solidFill>
+                  <a:srgbClr val="6A717B"/>
+                </a:solidFill>
+                <a:latin typeface="Yu Gothic UI"/>
+              </a:rPr>
+              <a:t>メーカー公表の内寸と保冷剤11製品の公表寸法から計算（実測ではありません）</a:t>
+            </a:r>
+          </a:p>
+        </p:txBody>
+      </p:sp>
+      <p:sp>
+        <p:nvSpPr>
+          <p:cNvPr id="23" name="TextBox 22"/>
+          <p:cNvSpPr txBox="1"/>
+          <p:nvPr/>
+        </p:nvSpPr>
+        <p:spPr>
+          <a:xfrm>
+            <a:off x="7962900" y="5676900"/>
+            <a:ext cx="2857500" cy="209550"/>
+          </a:xfrm>
+          <a:prstGeom prst="rect">
+            <a:avLst/>
+          </a:prstGeom>
+          <a:noFill/>
+        </p:spPr>
+        <p:txBody>
+          <a:bodyPr wrap="none" lIns="0" rIns="0" tIns="0" bIns="0" anchor="ctr">
+            <a:spAutoFit/>
+          </a:bodyPr>
+          <a:lstStyle/>
+          <a:p>
+            <a:pPr algn="r"/>
+            <a:r>
+              <a:rPr sz="1050" b="0">
+                <a:solidFill>
+                  <a:srgbClr val="6A717B"/>
+                </a:solidFill>
+                <a:latin typeface="Yu Gothic UI"/>
+              </a:rPr>
+              <a:t>寸法で選ぶ　sunpou.nexeed-lab.com</a:t>
+            </a:r>
+          </a:p>
+        </p:txBody>
+      </p:sp>
+    </p:spTree>
+  </p:cSld>
+  <p:clrMapOvr>
+    <a:masterClrMapping/>
+  </p:clrMapOvr>
+</p:sld>
+</file>
+
+<file path=ppt/slides/slide9.xml><?xml version="1.0" encoding="utf-8"?>
+<p:sld xmlns:a="http://schemas.openxmlformats.org/drawingml/2006/main" xmlns:p="http://schemas.openxmlformats.org/presentationml/2006/main" xmlns:r="http://schemas.openxmlformats.org/officeDocument/2006/relationships">
+  <p:cSld>
+    <p:spTree>
+      <p:nvGrpSpPr>
+        <p:cNvPr id="1" name=""/>
+        <p:cNvGrpSpPr/>
+        <p:nvPr/>
+      </p:nvGrpSpPr>
+      <p:grpSpPr/>
+      <p:sp>
+        <p:nvSpPr>
+          <p:cNvPr id="2" name="Rectangle 1"/>
+          <p:cNvSpPr/>
+          <p:nvPr/>
+        </p:nvSpPr>
+        <p:spPr>
+          <a:xfrm>
+            <a:off x="0" y="0"/>
+            <a:ext cx="11430000" cy="6000750"/>
+          </a:xfrm>
+          <a:prstGeom prst="rect">
+            <a:avLst/>
+          </a:prstGeom>
+          <a:solidFill>
+            <a:srgbClr val="FCFCFC"/>
+          </a:solidFill>
+          <a:ln>
+            <a:noFill/>
+          </a:ln>
+          <a:effectLst/>
+        </p:spPr>
+        <p:txBody>
+          <a:bodyPr rtlCol="0" anchor="ctr"/>
+          <a:lstStyle/>
+          <a:p>
+            <a:pPr algn="ctr"/>
+          </a:p>
+        </p:txBody>
+      </p:sp>
+      <p:sp>
+        <p:nvSpPr>
+          <p:cNvPr id="3" name="Rectangle 2"/>
+          <p:cNvSpPr/>
+          <p:nvPr/>
+        </p:nvSpPr>
+        <p:spPr>
+          <a:xfrm>
+            <a:off x="0" y="0"/>
+            <a:ext cx="114300" cy="6000750"/>
+          </a:xfrm>
+          <a:prstGeom prst="rect">
+            <a:avLst/>
+          </a:prstGeom>
+          <a:solidFill>
+            <a:srgbClr val="014172"/>
+          </a:solidFill>
+          <a:ln>
+            <a:noFill/>
+          </a:ln>
+          <a:effectLst/>
+        </p:spPr>
+        <p:txBody>
+          <a:bodyPr rtlCol="0" anchor="ctr"/>
+          <a:lstStyle/>
+          <a:p>
+            <a:pPr algn="ctr"/>
+          </a:p>
+        </p:txBody>
+      </p:sp>
+      <p:sp>
+        <p:nvSpPr>
+          <p:cNvPr id="4" name="Rectangle 3"/>
+          <p:cNvSpPr/>
+          <p:nvPr/>
+        </p:nvSpPr>
+        <p:spPr>
+          <a:xfrm>
+            <a:off x="0" y="0"/>
+            <a:ext cx="11430000" cy="1504950"/>
+          </a:xfrm>
+          <a:prstGeom prst="rect">
+            <a:avLst/>
+          </a:prstGeom>
+          <a:solidFill>
+            <a:srgbClr val="014172"/>
+          </a:solidFill>
+          <a:ln>
+            <a:noFill/>
+          </a:ln>
+          <a:effectLst/>
+        </p:spPr>
+        <p:txBody>
+          <a:bodyPr rtlCol="0" anchor="ctr"/>
+          <a:lstStyle/>
+          <a:p>
+            <a:pPr algn="ctr"/>
+          </a:p>
+        </p:txBody>
+      </p:sp>
+      <p:sp>
+        <p:nvSpPr>
+          <p:cNvPr id="5" name="TextBox 4"/>
+          <p:cNvSpPr txBox="1"/>
+          <p:nvPr/>
+        </p:nvSpPr>
+        <p:spPr>
+          <a:xfrm>
+            <a:off x="609600" y="361950"/>
+            <a:ext cx="7429500" cy="476250"/>
+          </a:xfrm>
+          <a:prstGeom prst="rect">
+            <a:avLst/>
+          </a:prstGeom>
+          <a:noFill/>
+        </p:spPr>
+        <p:txBody>
+          <a:bodyPr wrap="none" lIns="0" rIns="0" tIns="0" bIns="0" anchor="ctr">
+            <a:spAutoFit/>
+          </a:bodyPr>
+          <a:lstStyle/>
+          <a:p>
+            <a:pPr algn="l"/>
+            <a:r>
+              <a:rPr sz="3000" b="1">
+                <a:solidFill>
+                  <a:srgbClr val="FFFFFF"/>
+                </a:solidFill>
+                <a:latin typeface="Yu Gothic UI"/>
+              </a:rPr>
+              <a:t>保冷剤は何枚まで入るか</a:t>
+            </a:r>
+          </a:p>
+        </p:txBody>
+      </p:sp>
+      <p:sp>
+        <p:nvSpPr>
+          <p:cNvPr id="6" name="TextBox 5"/>
+          <p:cNvSpPr txBox="1"/>
+          <p:nvPr/>
+        </p:nvSpPr>
+        <p:spPr>
+          <a:xfrm>
+            <a:off x="609600" y="876300"/>
+            <a:ext cx="7429500" cy="247650"/>
+          </a:xfrm>
+          <a:prstGeom prst="rect">
+            <a:avLst/>
+          </a:prstGeom>
+          <a:noFill/>
+        </p:spPr>
+        <p:txBody>
+          <a:bodyPr wrap="none" lIns="0" rIns="0" tIns="0" bIns="0" anchor="ctr">
+            <a:spAutoFit/>
+          </a:bodyPr>
+          <a:lstStyle/>
+          <a:p>
+            <a:pPr algn="l"/>
+            <a:r>
+              <a:rPr sz="1425" b="0">
+                <a:solidFill>
+                  <a:srgbClr val="DAE7F2"/>
+                </a:solidFill>
+                <a:latin typeface="Yu Gothic UI"/>
+              </a:rPr>
+              <a:t>氷点下パックM（196×138×厚26mm）／ 500ml角型を減らさない枚数</a:t>
+            </a:r>
+          </a:p>
+        </p:txBody>
+      </p:sp>
+      <p:sp>
+        <p:nvSpPr>
+          <p:cNvPr id="7" name="Rounded Rectangle 6"/>
+          <p:cNvSpPr/>
+          <p:nvPr/>
+        </p:nvSpPr>
+        <p:spPr>
+          <a:xfrm>
+            <a:off x="8305800" y="247650"/>
+            <a:ext cx="2514600" cy="1009650"/>
+          </a:xfrm>
+          <a:prstGeom prst="roundRect">
+            <a:avLst>
+              <a:gd name="adj" fmla="val 12000"/>
+            </a:avLst>
+          </a:prstGeom>
+          <a:solidFill>
+            <a:srgbClr val="FFFFFF"/>
+          </a:solidFill>
+          <a:ln>
+            <a:noFill/>
+          </a:ln>
+          <a:effectLst>
+            <a:outerShdw blurRad="254000" dist="63500" dir="5400000" rotWithShape="0">
+              <a:srgbClr val="0B2B45">
+                <a:alpha val="30000"/>
+              </a:srgbClr>
+            </a:outerShdw>
+          </a:effectLst>
+        </p:spPr>
+        <p:txBody>
+          <a:bodyPr rtlCol="0" anchor="ctr"/>
+          <a:lstStyle/>
+          <a:p>
+            <a:pPr algn="ctr"/>
+          </a:p>
+        </p:txBody>
+      </p:sp>
+      <p:sp>
+        <p:nvSpPr>
+          <p:cNvPr id="8" name="TextBox 7"/>
+          <p:cNvSpPr txBox="1"/>
+          <p:nvPr/>
+        </p:nvSpPr>
+        <p:spPr>
+          <a:xfrm>
+            <a:off x="8515350" y="400050"/>
+            <a:ext cx="2133600" cy="209550"/>
+          </a:xfrm>
+          <a:prstGeom prst="rect">
+            <a:avLst/>
+          </a:prstGeom>
+          <a:noFill/>
+        </p:spPr>
+        <p:txBody>
+          <a:bodyPr wrap="none" lIns="0" rIns="0" tIns="0" bIns="0" anchor="ctr">
+            <a:spAutoFit/>
+          </a:bodyPr>
+          <a:lstStyle/>
+          <a:p>
+            <a:pPr algn="l"/>
+            <a:r>
+              <a:rPr sz="1125" b="0">
+                <a:solidFill>
+                  <a:srgbClr val="6A717B"/>
+                </a:solidFill>
+                <a:latin typeface="Yu Gothic UI"/>
+              </a:rPr>
+              <a:t>いちばん多くて</a:t>
+            </a:r>
+          </a:p>
+        </p:txBody>
+      </p:sp>
+      <p:sp>
+        <p:nvSpPr>
+          <p:cNvPr id="9" name="TextBox 8"/>
+          <p:cNvSpPr txBox="1"/>
+          <p:nvPr/>
+        </p:nvSpPr>
+        <p:spPr>
+          <a:xfrm>
+            <a:off x="8515350" y="647700"/>
+            <a:ext cx="2133600" cy="533400"/>
+          </a:xfrm>
+          <a:prstGeom prst="rect">
+            <a:avLst/>
+          </a:prstGeom>
+          <a:noFill/>
+        </p:spPr>
+        <p:txBody>
+          <a:bodyPr wrap="none" lIns="0" rIns="0" tIns="0" bIns="0" anchor="ctr">
+            <a:spAutoFit/>
+          </a:bodyPr>
+          <a:lstStyle/>
+          <a:p>
+            <a:pPr algn="l"/>
+            <a:r>
+              <a:rPr sz="3900" b="1">
+                <a:solidFill>
+                  <a:srgbClr val="014172"/>
+                </a:solidFill>
+                <a:latin typeface="Yu Gothic UI"/>
+              </a:rPr>
+              <a:t>7</a:t>
+            </a:r>
+            <a:r>
+              <a:rPr sz="1950" b="1">
+                <a:solidFill>
+                  <a:srgbClr val="014172"/>
+                </a:solidFill>
+                <a:latin typeface="Yu Gothic UI"/>
+              </a:rPr>
+              <a:t>枚</a:t>
+            </a:r>
+          </a:p>
+        </p:txBody>
+      </p:sp>
+      <p:sp>
+        <p:nvSpPr>
+          <p:cNvPr id="10" name="Rectangle 9"/>
+          <p:cNvSpPr/>
+          <p:nvPr/>
+        </p:nvSpPr>
+        <p:spPr>
+          <a:xfrm>
+            <a:off x="495300" y="1676400"/>
+            <a:ext cx="10439400" cy="304800"/>
+          </a:xfrm>
+          <a:prstGeom prst="rect">
+            <a:avLst/>
+          </a:prstGeom>
+          <a:solidFill>
+            <a:srgbClr val="F2F5F8"/>
+          </a:solidFill>
+          <a:ln>
+            <a:noFill/>
+          </a:ln>
+          <a:effectLst/>
+        </p:spPr>
+        <p:txBody>
+          <a:bodyPr rtlCol="0" anchor="ctr"/>
+          <a:lstStyle/>
+          <a:p>
+            <a:pPr algn="ctr"/>
+          </a:p>
+        </p:txBody>
+      </p:sp>
+      <p:sp>
+        <p:nvSpPr>
+          <p:cNvPr id="11" name="Rectangle 10"/>
+          <p:cNvSpPr/>
+          <p:nvPr/>
+        </p:nvSpPr>
+        <p:spPr>
+          <a:xfrm>
+            <a:off x="495300" y="2057400"/>
+            <a:ext cx="10439400" cy="304800"/>
+          </a:xfrm>
+          <a:prstGeom prst="rect">
+            <a:avLst/>
+          </a:prstGeom>
+          <a:solidFill>
+            <a:srgbClr val="FCFCFC"/>
+          </a:solidFill>
+          <a:ln>
+            <a:noFill/>
+          </a:ln>
+          <a:effectLst/>
+        </p:spPr>
+        <p:txBody>
+          <a:bodyPr rtlCol="0" anchor="ctr"/>
+          <a:lstStyle/>
+          <a:p>
+            <a:pPr algn="ctr"/>
+          </a:p>
+        </p:txBody>
+      </p:sp>
+      <p:sp>
+        <p:nvSpPr>
+          <p:cNvPr id="12" name="Rectangle 11"/>
+          <p:cNvSpPr/>
+          <p:nvPr/>
+        </p:nvSpPr>
+        <p:spPr>
+          <a:xfrm>
+            <a:off x="495300" y="2438400"/>
+            <a:ext cx="10439400" cy="304800"/>
+          </a:xfrm>
+          <a:prstGeom prst="rect">
+            <a:avLst/>
+          </a:prstGeom>
+          <a:solidFill>
+            <a:srgbClr val="F2F5F8"/>
+          </a:solidFill>
+          <a:ln>
+            <a:noFill/>
+          </a:ln>
+          <a:effectLst/>
+        </p:spPr>
+        <p:txBody>
+          <a:bodyPr rtlCol="0" anchor="ctr"/>
+          <a:lstStyle/>
+          <a:p>
+            <a:pPr algn="ctr"/>
+          </a:p>
+        </p:txBody>
+      </p:sp>
+      <p:sp>
+        <p:nvSpPr>
+          <p:cNvPr id="13" name="Rectangle 12"/>
+          <p:cNvSpPr/>
+          <p:nvPr/>
+        </p:nvSpPr>
+        <p:spPr>
+          <a:xfrm>
+            <a:off x="495300" y="2819400"/>
+            <a:ext cx="10439400" cy="304800"/>
+          </a:xfrm>
+          <a:prstGeom prst="rect">
+            <a:avLst/>
+          </a:prstGeom>
+          <a:solidFill>
+            <a:srgbClr val="FCFCFC"/>
+          </a:solidFill>
+          <a:ln>
+            <a:noFill/>
+          </a:ln>
+          <a:effectLst/>
+        </p:spPr>
+        <p:txBody>
+          <a:bodyPr rtlCol="0" anchor="ctr"/>
+          <a:lstStyle/>
+          <a:p>
+            <a:pPr algn="ctr"/>
+          </a:p>
+        </p:txBody>
+      </p:sp>
+      <p:sp>
+        <p:nvSpPr>
+          <p:cNvPr id="14" name="Rectangle 13"/>
+          <p:cNvSpPr/>
+          <p:nvPr/>
+        </p:nvSpPr>
+        <p:spPr>
+          <a:xfrm>
+            <a:off x="495300" y="3200400"/>
+            <a:ext cx="10439400" cy="304800"/>
+          </a:xfrm>
+          <a:prstGeom prst="rect">
+            <a:avLst/>
+          </a:prstGeom>
+          <a:solidFill>
+            <a:srgbClr val="F2F5F8"/>
+          </a:solidFill>
+          <a:ln>
+            <a:noFill/>
+          </a:ln>
+          <a:effectLst/>
+        </p:spPr>
+        <p:txBody>
+          <a:bodyPr rtlCol="0" anchor="ctr"/>
+          <a:lstStyle/>
+          <a:p>
+            <a:pPr algn="ctr"/>
+          </a:p>
+        </p:txBody>
+      </p:sp>
+      <p:sp>
+        <p:nvSpPr>
+          <p:cNvPr id="15" name="Rectangle 14"/>
+          <p:cNvSpPr/>
+          <p:nvPr/>
+        </p:nvSpPr>
+        <p:spPr>
+          <a:xfrm>
+            <a:off x="495300" y="3581400"/>
+            <a:ext cx="10439400" cy="304800"/>
+          </a:xfrm>
+          <a:prstGeom prst="rect">
+            <a:avLst/>
+          </a:prstGeom>
+          <a:solidFill>
+            <a:srgbClr val="FCFCFC"/>
+          </a:solidFill>
+          <a:ln>
+            <a:noFill/>
+          </a:ln>
+          <a:effectLst/>
+        </p:spPr>
+        <p:txBody>
+          <a:bodyPr rtlCol="0" anchor="ctr"/>
+          <a:lstStyle/>
+          <a:p>
+            <a:pPr algn="ctr"/>
+          </a:p>
+        </p:txBody>
+      </p:sp>
+      <p:sp>
+        <p:nvSpPr>
+          <p:cNvPr id="16" name="Rectangle 15"/>
+          <p:cNvSpPr/>
+          <p:nvPr/>
+        </p:nvSpPr>
+        <p:spPr>
+          <a:xfrm>
+            <a:off x="495300" y="3962400"/>
+            <a:ext cx="10439400" cy="304800"/>
+          </a:xfrm>
+          <a:prstGeom prst="rect">
+            <a:avLst/>
+          </a:prstGeom>
+          <a:solidFill>
+            <a:srgbClr val="F2F5F8"/>
+          </a:solidFill>
+          <a:ln>
+            <a:noFill/>
+          </a:ln>
+          <a:effectLst/>
+        </p:spPr>
+        <p:txBody>
+          <a:bodyPr rtlCol="0" anchor="ctr"/>
+          <a:lstStyle/>
+          <a:p>
+            <a:pPr algn="ctr"/>
+          </a:p>
+        </p:txBody>
+      </p:sp>
+      <p:sp>
+        <p:nvSpPr>
+          <p:cNvPr id="17" name="Rectangle 16"/>
+          <p:cNvSpPr/>
+          <p:nvPr/>
+        </p:nvSpPr>
+        <p:spPr>
+          <a:xfrm>
+            <a:off x="495300" y="4343400"/>
+            <a:ext cx="10439400" cy="304800"/>
+          </a:xfrm>
+          <a:prstGeom prst="rect">
+            <a:avLst/>
+          </a:prstGeom>
+          <a:solidFill>
+            <a:srgbClr val="FCFCFC"/>
+          </a:solidFill>
+          <a:ln>
+            <a:noFill/>
+          </a:ln>
+          <a:effectLst/>
+        </p:spPr>
+        <p:txBody>
+          <a:bodyPr rtlCol="0" anchor="ctr"/>
+          <a:lstStyle/>
+          <a:p>
+            <a:pPr algn="ctr"/>
+          </a:p>
+        </p:txBody>
+      </p:sp>
+      <p:sp>
+        <p:nvSpPr>
+          <p:cNvPr id="18" name="Rectangle 17"/>
+          <p:cNvSpPr/>
+          <p:nvPr/>
+        </p:nvSpPr>
+        <p:spPr>
+          <a:xfrm>
+            <a:off x="495300" y="4724400"/>
+            <a:ext cx="10439400" cy="304800"/>
+          </a:xfrm>
+          <a:prstGeom prst="rect">
+            <a:avLst/>
+          </a:prstGeom>
+          <a:solidFill>
+            <a:srgbClr val="E6EEF6"/>
+          </a:solidFill>
+          <a:ln>
+            <a:noFill/>
+          </a:ln>
+          <a:effectLst/>
+        </p:spPr>
+        <p:txBody>
+          <a:bodyPr rtlCol="0" anchor="ctr"/>
+          <a:lstStyle/>
+          <a:p>
+            <a:pPr algn="ctr"/>
+          </a:p>
+        </p:txBody>
+      </p:sp>
+      <p:sp>
+        <p:nvSpPr>
+          <p:cNvPr id="19" name="Rectangle 18"/>
+          <p:cNvSpPr/>
+          <p:nvPr/>
+        </p:nvSpPr>
+        <p:spPr>
+          <a:xfrm>
+            <a:off x="495300" y="4724400"/>
+            <a:ext cx="47625" cy="304800"/>
+          </a:xfrm>
+          <a:prstGeom prst="rect">
+            <a:avLst/>
+          </a:prstGeom>
+          <a:solidFill>
+            <a:srgbClr val="014172"/>
+          </a:solidFill>
+          <a:ln>
+            <a:noFill/>
+          </a:ln>
+          <a:effectLst/>
+        </p:spPr>
+        <p:txBody>
+          <a:bodyPr rtlCol="0" anchor="ctr"/>
+          <a:lstStyle/>
+          <a:p>
+            <a:pPr algn="ctr"/>
+          </a:p>
+        </p:txBody>
+      </p:sp>
+      <p:sp>
+        <p:nvSpPr>
+          <p:cNvPr id="20" name="TextBox 19"/>
+          <p:cNvSpPr txBox="1"/>
+          <p:nvPr/>
+        </p:nvSpPr>
+        <p:spPr>
+          <a:xfrm>
+            <a:off x="704850" y="1714500"/>
+            <a:ext cx="3619500" cy="228600"/>
+          </a:xfrm>
+          <a:prstGeom prst="rect">
+            <a:avLst/>
+          </a:prstGeom>
+          <a:noFill/>
+        </p:spPr>
+        <p:txBody>
+          <a:bodyPr wrap="none" lIns="0" rIns="0" tIns="0" bIns="0" anchor="ctr">
+            <a:spAutoFit/>
+          </a:bodyPr>
+          <a:lstStyle/>
+          <a:p>
+            <a:pPr algn="l"/>
+            <a:r>
+              <a:rPr sz="1200" b="1">
+                <a:solidFill>
+                  <a:srgbClr val="2E2E33"/>
+                </a:solidFill>
+                <a:latin typeface="Yu Gothic UI"/>
+              </a:rPr>
+              <a:t>ダイワ S1000X（10L）</a:t>
+            </a:r>
+          </a:p>
+        </p:txBody>
+      </p:sp>
+      <p:sp>
+        <p:nvSpPr>
+          <p:cNvPr id="21" name="Rounded Rectangle 20"/>
+          <p:cNvSpPr/>
+          <p:nvPr/>
+        </p:nvSpPr>
+        <p:spPr>
+          <a:xfrm>
+            <a:off x="4476750" y="1733550"/>
+            <a:ext cx="800100" cy="190500"/>
+          </a:xfrm>
+          <a:prstGeom prst="roundRect">
+            <a:avLst>
+              <a:gd name="adj" fmla="val 30000"/>
+            </a:avLst>
+          </a:prstGeom>
+          <a:gradFill rotWithShape="1">
+            <a:gsLst>
+              <a:gs pos="0">
+                <a:srgbClr val="EEF4F9"/>
+              </a:gs>
+              <a:gs pos="100000">
+                <a:srgbClr val="DAE7F2"/>
+              </a:gs>
+            </a:gsLst>
+            <a:lin scaled="0" ang="16200000"/>
+          </a:gradFill>
+          <a:ln w="19050">
+            <a:solidFill>
+              <a:srgbClr val="014172"/>
+            </a:solidFill>
+          </a:ln>
+          <a:effectLst/>
+        </p:spPr>
+        <p:txBody>
+          <a:bodyPr rtlCol="0" anchor="ctr"/>
+          <a:lstStyle/>
+          <a:p>
+            <a:pPr algn="ctr"/>
+          </a:p>
+        </p:txBody>
+      </p:sp>
+      <p:sp>
+        <p:nvSpPr>
+          <p:cNvPr id="22" name="TextBox 21"/>
+          <p:cNvSpPr txBox="1"/>
+          <p:nvPr/>
+        </p:nvSpPr>
+        <p:spPr>
+          <a:xfrm>
+            <a:off x="5410200" y="1714500"/>
+            <a:ext cx="857250" cy="228600"/>
+          </a:xfrm>
+          <a:prstGeom prst="rect">
+            <a:avLst/>
+          </a:prstGeom>
+          <a:noFill/>
+        </p:spPr>
+        <p:txBody>
+          <a:bodyPr wrap="none" lIns="0" rIns="0" tIns="0" bIns="0" anchor="ctr">
+            <a:spAutoFit/>
+          </a:bodyPr>
+          <a:lstStyle/>
+          <a:p>
+            <a:pPr algn="l"/>
+            <a:r>
+              <a:rPr sz="1275" b="1">
+                <a:solidFill>
+                  <a:srgbClr val="014172"/>
+                </a:solidFill>
+                <a:latin typeface="Yu Gothic UI"/>
+              </a:rPr>
+              <a:t>1枚</a:t>
+            </a:r>
+          </a:p>
+        </p:txBody>
+      </p:sp>
+      <p:sp>
+        <p:nvSpPr>
+          <p:cNvPr id="23" name="TextBox 22"/>
+          <p:cNvSpPr txBox="1"/>
+          <p:nvPr/>
+        </p:nvSpPr>
+        <p:spPr>
+          <a:xfrm>
+            <a:off x="704850" y="2095500"/>
+            <a:ext cx="3619500" cy="228600"/>
+          </a:xfrm>
+          <a:prstGeom prst="rect">
+            <a:avLst/>
+          </a:prstGeom>
+          <a:noFill/>
+        </p:spPr>
+        <p:txBody>
+          <a:bodyPr wrap="none" lIns="0" rIns="0" tIns="0" bIns="0" anchor="ctr">
+            <a:spAutoFit/>
+          </a:bodyPr>
+          <a:lstStyle/>
+          <a:p>
+            <a:pPr algn="l"/>
+            <a:r>
+              <a:rPr sz="1200" b="1">
+                <a:solidFill>
+                  <a:srgbClr val="2E2E33"/>
+                </a:solidFill>
+                <a:latin typeface="Yu Gothic UI"/>
+              </a:rPr>
+              <a:t>アイリスオーヤマ HUGEL 15L</a:t>
+            </a:r>
+          </a:p>
+        </p:txBody>
+      </p:sp>
+      <p:sp>
+        <p:nvSpPr>
+          <p:cNvPr id="24" name="Rounded Rectangle 23"/>
+          <p:cNvSpPr/>
+          <p:nvPr/>
+        </p:nvSpPr>
+        <p:spPr>
+          <a:xfrm>
+            <a:off x="4476750" y="2114550"/>
+            <a:ext cx="800100" cy="190500"/>
+          </a:xfrm>
+          <a:prstGeom prst="roundRect">
+            <a:avLst>
+              <a:gd name="adj" fmla="val 30000"/>
+            </a:avLst>
+          </a:prstGeom>
+          <a:gradFill rotWithShape="1">
+            <a:gsLst>
+              <a:gs pos="0">
+                <a:srgbClr val="EEF4F9"/>
+              </a:gs>
+              <a:gs pos="100000">
+                <a:srgbClr val="DAE7F2"/>
+              </a:gs>
+            </a:gsLst>
+            <a:lin scaled="0" ang="16200000"/>
+          </a:gradFill>
+          <a:ln w="19050">
+            <a:solidFill>
+              <a:srgbClr val="014172"/>
+            </a:solidFill>
+          </a:ln>
+          <a:effectLst/>
+        </p:spPr>
+        <p:txBody>
+          <a:bodyPr rtlCol="0" anchor="ctr"/>
+          <a:lstStyle/>
+          <a:p>
+            <a:pPr algn="ctr"/>
+          </a:p>
+        </p:txBody>
+      </p:sp>
+      <p:sp>
+        <p:nvSpPr>
+          <p:cNvPr id="25" name="TextBox 24"/>
+          <p:cNvSpPr txBox="1"/>
+          <p:nvPr/>
+        </p:nvSpPr>
+        <p:spPr>
+          <a:xfrm>
+            <a:off x="5410200" y="2095500"/>
+            <a:ext cx="857250" cy="228600"/>
+          </a:xfrm>
+          <a:prstGeom prst="rect">
+            <a:avLst/>
+          </a:prstGeom>
+          <a:noFill/>
+        </p:spPr>
+        <p:txBody>
+          <a:bodyPr wrap="none" lIns="0" rIns="0" tIns="0" bIns="0" anchor="ctr">
+            <a:spAutoFit/>
+          </a:bodyPr>
+          <a:lstStyle/>
+          <a:p>
+            <a:pPr algn="l"/>
+            <a:r>
+              <a:rPr sz="1275" b="1">
+                <a:solidFill>
+                  <a:srgbClr val="014172"/>
+                </a:solidFill>
+                <a:latin typeface="Yu Gothic UI"/>
+              </a:rPr>
+              <a:t>1枚</a:t>
+            </a:r>
+          </a:p>
+        </p:txBody>
+      </p:sp>
+      <p:sp>
+        <p:nvSpPr>
+          <p:cNvPr id="26" name="TextBox 25"/>
+          <p:cNvSpPr txBox="1"/>
+          <p:nvPr/>
+        </p:nvSpPr>
+        <p:spPr>
+          <a:xfrm>
+            <a:off x="704850" y="2476500"/>
+            <a:ext cx="3619500" cy="228600"/>
+          </a:xfrm>
+          <a:prstGeom prst="rect">
+            <a:avLst/>
+          </a:prstGeom>
+          <a:noFill/>
+        </p:spPr>
+        <p:txBody>
+          <a:bodyPr wrap="none" lIns="0" rIns="0" tIns="0" bIns="0" anchor="ctr">
+            <a:spAutoFit/>
+          </a:bodyPr>
+          <a:lstStyle/>
+          <a:p>
+            <a:pPr algn="l"/>
+            <a:r>
+              <a:rPr sz="1200" b="1">
+                <a:solidFill>
+                  <a:srgbClr val="2E2E33"/>
+                </a:solidFill>
+                <a:latin typeface="Yu Gothic UI"/>
+              </a:rPr>
+              <a:t>ダイワ S1500（15L）</a:t>
+            </a:r>
+          </a:p>
+        </p:txBody>
+      </p:sp>
+      <p:sp>
+        <p:nvSpPr>
+          <p:cNvPr id="27" name="Rounded Rectangle 26"/>
+          <p:cNvSpPr/>
+          <p:nvPr/>
+        </p:nvSpPr>
+        <p:spPr>
+          <a:xfrm>
+            <a:off x="4476750" y="2495550"/>
+            <a:ext cx="800100" cy="190500"/>
+          </a:xfrm>
+          <a:prstGeom prst="roundRect">
+            <a:avLst>
+              <a:gd name="adj" fmla="val 30000"/>
+            </a:avLst>
+          </a:prstGeom>
+          <a:gradFill rotWithShape="1">
+            <a:gsLst>
+              <a:gs pos="0">
+                <a:srgbClr val="EEF4F9"/>
+              </a:gs>
+              <a:gs pos="100000">
+                <a:srgbClr val="DAE7F2"/>
+              </a:gs>
+            </a:gsLst>
+            <a:lin scaled="0" ang="16200000"/>
+          </a:gradFill>
+          <a:ln w="19050">
+            <a:solidFill>
+              <a:srgbClr val="014172"/>
+            </a:solidFill>
+          </a:ln>
+          <a:effectLst/>
+        </p:spPr>
+        <p:txBody>
+          <a:bodyPr rtlCol="0" anchor="ctr"/>
+          <a:lstStyle/>
+          <a:p>
+            <a:pPr algn="ctr"/>
+          </a:p>
+        </p:txBody>
+      </p:sp>
+      <p:sp>
+        <p:nvSpPr>
+          <p:cNvPr id="28" name="Rounded Rectangle 27"/>
+          <p:cNvSpPr/>
+          <p:nvPr/>
+        </p:nvSpPr>
+        <p:spPr>
+          <a:xfrm>
+            <a:off x="5334000" y="2495550"/>
+            <a:ext cx="800100" cy="190500"/>
+          </a:xfrm>
+          <a:prstGeom prst="roundRect">
+            <a:avLst>
+              <a:gd name="adj" fmla="val 30000"/>
+            </a:avLst>
+          </a:prstGeom>
+          <a:gradFill rotWithShape="1">
+            <a:gsLst>
+              <a:gs pos="0">
+                <a:srgbClr val="EEF4F9"/>
+              </a:gs>
+              <a:gs pos="100000">
+                <a:srgbClr val="DAE7F2"/>
+              </a:gs>
+            </a:gsLst>
+            <a:lin scaled="0" ang="16200000"/>
+          </a:gradFill>
+          <a:ln w="19050">
+            <a:solidFill>
+              <a:srgbClr val="014172"/>
+            </a:solidFill>
+          </a:ln>
+          <a:effectLst/>
+        </p:spPr>
+        <p:txBody>
+          <a:bodyPr rtlCol="0" anchor="ctr"/>
+          <a:lstStyle/>
+          <a:p>
+            <a:pPr algn="ctr"/>
+          </a:p>
+        </p:txBody>
+      </p:sp>
+      <p:sp>
+        <p:nvSpPr>
+          <p:cNvPr id="29" name="TextBox 28"/>
+          <p:cNvSpPr txBox="1"/>
+          <p:nvPr/>
+        </p:nvSpPr>
+        <p:spPr>
+          <a:xfrm>
+            <a:off x="6267450" y="2476500"/>
+            <a:ext cx="857250" cy="228600"/>
+          </a:xfrm>
+          <a:prstGeom prst="rect">
+            <a:avLst/>
+          </a:prstGeom>
+          <a:noFill/>
+        </p:spPr>
+        <p:txBody>
+          <a:bodyPr wrap="none" lIns="0" rIns="0" tIns="0" bIns="0" anchor="ctr">
+            <a:spAutoFit/>
+          </a:bodyPr>
+          <a:lstStyle/>
+          <a:p>
+            <a:pPr algn="l"/>
+            <a:r>
+              <a:rPr sz="1275" b="1">
+                <a:solidFill>
+                  <a:srgbClr val="014172"/>
+                </a:solidFill>
+                <a:latin typeface="Yu Gothic UI"/>
+              </a:rPr>
+              <a:t>2枚</a:t>
+            </a:r>
+          </a:p>
+        </p:txBody>
+      </p:sp>
+      <p:sp>
+        <p:nvSpPr>
+          <p:cNvPr id="30" name="TextBox 29"/>
+          <p:cNvSpPr txBox="1"/>
+          <p:nvPr/>
+        </p:nvSpPr>
+        <p:spPr>
+          <a:xfrm>
+            <a:off x="704850" y="2857500"/>
+            <a:ext cx="3619500" cy="228600"/>
+          </a:xfrm>
+          <a:prstGeom prst="rect">
+            <a:avLst/>
+          </a:prstGeom>
+          <a:noFill/>
+        </p:spPr>
+        <p:txBody>
+          <a:bodyPr wrap="none" lIns="0" rIns="0" tIns="0" bIns="0" anchor="ctr">
+            <a:spAutoFit/>
+          </a:bodyPr>
+          <a:lstStyle/>
+          <a:p>
+            <a:pPr algn="l"/>
+            <a:r>
+              <a:rPr sz="1200" b="1">
+                <a:solidFill>
+                  <a:srgbClr val="2E2E33"/>
+                </a:solidFill>
+                <a:latin typeface="Yu Gothic UI"/>
+              </a:rPr>
+              <a:t>ダイワ S2000（20L）</a:t>
+            </a:r>
+          </a:p>
+        </p:txBody>
+      </p:sp>
+      <p:sp>
+        <p:nvSpPr>
+          <p:cNvPr id="31" name="Rounded Rectangle 30"/>
+          <p:cNvSpPr/>
+          <p:nvPr/>
+        </p:nvSpPr>
+        <p:spPr>
+          <a:xfrm>
+            <a:off x="4476750" y="2876550"/>
+            <a:ext cx="800100" cy="190500"/>
+          </a:xfrm>
+          <a:prstGeom prst="roundRect">
+            <a:avLst>
+              <a:gd name="adj" fmla="val 30000"/>
+            </a:avLst>
+          </a:prstGeom>
+          <a:gradFill rotWithShape="1">
+            <a:gsLst>
+              <a:gs pos="0">
+                <a:srgbClr val="EEF4F9"/>
+              </a:gs>
+              <a:gs pos="100000">
+                <a:srgbClr val="DAE7F2"/>
+              </a:gs>
+            </a:gsLst>
+            <a:lin scaled="0" ang="16200000"/>
+          </a:gradFill>
+          <a:ln w="19050">
+            <a:solidFill>
+              <a:srgbClr val="014172"/>
+            </a:solidFill>
+          </a:ln>
+          <a:effectLst/>
+        </p:spPr>
+        <p:txBody>
+          <a:bodyPr rtlCol="0" anchor="ctr"/>
+          <a:lstStyle/>
+          <a:p>
+            <a:pPr algn="ctr"/>
+          </a:p>
+        </p:txBody>
+      </p:sp>
+      <p:sp>
+        <p:nvSpPr>
+          <p:cNvPr id="32" name="Rounded Rectangle 31"/>
+          <p:cNvSpPr/>
+          <p:nvPr/>
+        </p:nvSpPr>
+        <p:spPr>
+          <a:xfrm>
+            <a:off x="5334000" y="2876550"/>
+            <a:ext cx="800100" cy="190500"/>
+          </a:xfrm>
+          <a:prstGeom prst="roundRect">
+            <a:avLst>
+              <a:gd name="adj" fmla="val 30000"/>
+            </a:avLst>
+          </a:prstGeom>
+          <a:gradFill rotWithShape="1">
+            <a:gsLst>
+              <a:gs pos="0">
+                <a:srgbClr val="EEF4F9"/>
+              </a:gs>
+              <a:gs pos="100000">
+                <a:srgbClr val="DAE7F2"/>
+              </a:gs>
+            </a:gsLst>
+            <a:lin scaled="0" ang="16200000"/>
+          </a:gradFill>
+          <a:ln w="19050">
+            <a:solidFill>
+              <a:srgbClr val="014172"/>
+            </a:solidFill>
+          </a:ln>
+          <a:effectLst/>
+        </p:spPr>
+        <p:txBody>
+          <a:bodyPr rtlCol="0" anchor="ctr"/>
+          <a:lstStyle/>
+          <a:p>
+            <a:pPr algn="ctr"/>
+          </a:p>
+        </p:txBody>
+      </p:sp>
+      <p:sp>
+        <p:nvSpPr>
+          <p:cNvPr id="33" name="TextBox 32"/>
+          <p:cNvSpPr txBox="1"/>
+          <p:nvPr/>
+        </p:nvSpPr>
+        <p:spPr>
+          <a:xfrm>
+            <a:off x="6267450" y="2857500"/>
+            <a:ext cx="857250" cy="228600"/>
+          </a:xfrm>
+          <a:prstGeom prst="rect">
+            <a:avLst/>
+          </a:prstGeom>
+          <a:noFill/>
+        </p:spPr>
+        <p:txBody>
+          <a:bodyPr wrap="none" lIns="0" rIns="0" tIns="0" bIns="0" anchor="ctr">
+            <a:spAutoFit/>
+          </a:bodyPr>
+          <a:lstStyle/>
+          <a:p>
+            <a:pPr algn="l"/>
+            <a:r>
+              <a:rPr sz="1275" b="1">
+                <a:solidFill>
+                  <a:srgbClr val="014172"/>
+                </a:solidFill>
+                <a:latin typeface="Yu Gothic UI"/>
+              </a:rPr>
+              <a:t>2枚</a:t>
+            </a:r>
+          </a:p>
+        </p:txBody>
+      </p:sp>
+      <p:sp>
+        <p:nvSpPr>
+          <p:cNvPr id="34" name="TextBox 33"/>
+          <p:cNvSpPr txBox="1"/>
+          <p:nvPr/>
+        </p:nvSpPr>
+        <p:spPr>
+          <a:xfrm>
+            <a:off x="704850" y="3238500"/>
+            <a:ext cx="3619500" cy="228600"/>
+          </a:xfrm>
+          <a:prstGeom prst="rect">
+            <a:avLst/>
+          </a:prstGeom>
+          <a:noFill/>
+        </p:spPr>
+        <p:txBody>
+          <a:bodyPr wrap="none" lIns="0" rIns="0" tIns="0" bIns="0" anchor="ctr">
+            <a:spAutoFit/>
+          </a:bodyPr>
+          <a:lstStyle/>
+          <a:p>
+            <a:pPr algn="l"/>
+            <a:r>
+              <a:rPr sz="1200" b="1">
+                <a:solidFill>
+                  <a:srgbClr val="2E2E33"/>
+                </a:solidFill>
+                <a:latin typeface="Yu Gothic UI"/>
+              </a:rPr>
+              <a:t>ロゴス ハイパーL（20L）</a:t>
+            </a:r>
+          </a:p>
+        </p:txBody>
+      </p:sp>
+      <p:sp>
+        <p:nvSpPr>
+          <p:cNvPr id="35" name="Rounded Rectangle 34"/>
+          <p:cNvSpPr/>
+          <p:nvPr/>
+        </p:nvSpPr>
+        <p:spPr>
+          <a:xfrm>
+            <a:off x="4476750" y="3257550"/>
+            <a:ext cx="800100" cy="190500"/>
+          </a:xfrm>
+          <a:prstGeom prst="roundRect">
+            <a:avLst>
+              <a:gd name="adj" fmla="val 30000"/>
+            </a:avLst>
+          </a:prstGeom>
+          <a:gradFill rotWithShape="1">
+            <a:gsLst>
+              <a:gs pos="0">
+                <a:srgbClr val="EEF4F9"/>
+              </a:gs>
+              <a:gs pos="100000">
+                <a:srgbClr val="DAE7F2"/>
+              </a:gs>
+            </a:gsLst>
+            <a:lin scaled="0" ang="16200000"/>
+          </a:gradFill>
+          <a:ln w="19050">
+            <a:solidFill>
+              <a:srgbClr val="014172"/>
+            </a:solidFill>
+          </a:ln>
+          <a:effectLst/>
+        </p:spPr>
+        <p:txBody>
+          <a:bodyPr rtlCol="0" anchor="ctr"/>
+          <a:lstStyle/>
+          <a:p>
+            <a:pPr algn="ctr"/>
+          </a:p>
+        </p:txBody>
+      </p:sp>
+      <p:sp>
+        <p:nvSpPr>
+          <p:cNvPr id="36" name="Rounded Rectangle 35"/>
+          <p:cNvSpPr/>
+          <p:nvPr/>
+        </p:nvSpPr>
+        <p:spPr>
+          <a:xfrm>
+            <a:off x="5334000" y="3257550"/>
+            <a:ext cx="800100" cy="190500"/>
+          </a:xfrm>
+          <a:prstGeom prst="roundRect">
+            <a:avLst>
+              <a:gd name="adj" fmla="val 30000"/>
+            </a:avLst>
+          </a:prstGeom>
+          <a:gradFill rotWithShape="1">
+            <a:gsLst>
+              <a:gs pos="0">
+                <a:srgbClr val="EEF4F9"/>
+              </a:gs>
+              <a:gs pos="100000">
+                <a:srgbClr val="DAE7F2"/>
+              </a:gs>
+            </a:gsLst>
+            <a:lin scaled="0" ang="16200000"/>
+          </a:gradFill>
+          <a:ln w="19050">
+            <a:solidFill>
+              <a:srgbClr val="014172"/>
+            </a:solidFill>
+          </a:ln>
+          <a:effectLst/>
+        </p:spPr>
+        <p:txBody>
+          <a:bodyPr rtlCol="0" anchor="ctr"/>
+          <a:lstStyle/>
+          <a:p>
+            <a:pPr algn="ctr"/>
+          </a:p>
+        </p:txBody>
+      </p:sp>
+      <p:sp>
+        <p:nvSpPr>
+          <p:cNvPr id="37" name="Rounded Rectangle 36"/>
+          <p:cNvSpPr/>
+          <p:nvPr/>
+        </p:nvSpPr>
+        <p:spPr>
+          <a:xfrm>
+            <a:off x="6191250" y="3257550"/>
+            <a:ext cx="800100" cy="190500"/>
+          </a:xfrm>
+          <a:prstGeom prst="roundRect">
+            <a:avLst>
+              <a:gd name="adj" fmla="val 30000"/>
+            </a:avLst>
+          </a:prstGeom>
+          <a:gradFill rotWithShape="1">
+            <a:gsLst>
+              <a:gs pos="0">
+                <a:srgbClr val="EEF4F9"/>
+              </a:gs>
+              <a:gs pos="100000">
+                <a:srgbClr val="DAE7F2"/>
+              </a:gs>
+            </a:gsLst>
+            <a:lin scaled="0" ang="16200000"/>
+          </a:gradFill>
+          <a:ln w="19050">
+            <a:solidFill>
+              <a:srgbClr val="014172"/>
+            </a:solidFill>
+          </a:ln>
+          <a:effectLst/>
+        </p:spPr>
+        <p:txBody>
+          <a:bodyPr rtlCol="0" anchor="ctr"/>
+          <a:lstStyle/>
+          <a:p>
+            <a:pPr algn="ctr"/>
+          </a:p>
+        </p:txBody>
+      </p:sp>
+      <p:sp>
+        <p:nvSpPr>
+          <p:cNvPr id="38" name="TextBox 37"/>
+          <p:cNvSpPr txBox="1"/>
+          <p:nvPr/>
+        </p:nvSpPr>
+        <p:spPr>
+          <a:xfrm>
+            <a:off x="7124700" y="3238500"/>
+            <a:ext cx="857250" cy="228600"/>
+          </a:xfrm>
+          <a:prstGeom prst="rect">
+            <a:avLst/>
+          </a:prstGeom>
+          <a:noFill/>
+        </p:spPr>
+        <p:txBody>
+          <a:bodyPr wrap="none" lIns="0" rIns="0" tIns="0" bIns="0" anchor="ctr">
+            <a:spAutoFit/>
+          </a:bodyPr>
+          <a:lstStyle/>
+          <a:p>
+            <a:pPr algn="l"/>
+            <a:r>
+              <a:rPr sz="1275" b="1">
+                <a:solidFill>
+                  <a:srgbClr val="014172"/>
+                </a:solidFill>
+                <a:latin typeface="Yu Gothic UI"/>
+              </a:rPr>
+              <a:t>3枚</a:t>
+            </a:r>
+          </a:p>
+        </p:txBody>
+      </p:sp>
+      <p:sp>
+        <p:nvSpPr>
+          <p:cNvPr id="39" name="TextBox 38"/>
+          <p:cNvSpPr txBox="1"/>
+          <p:nvPr/>
+        </p:nvSpPr>
+        <p:spPr>
+          <a:xfrm>
+            <a:off x="704850" y="3619500"/>
+            <a:ext cx="3619500" cy="228600"/>
+          </a:xfrm>
+          <a:prstGeom prst="rect">
+            <a:avLst/>
+          </a:prstGeom>
+          <a:noFill/>
+        </p:spPr>
+        <p:txBody>
+          <a:bodyPr wrap="none" lIns="0" rIns="0" tIns="0" bIns="0" anchor="ctr">
+            <a:spAutoFit/>
+          </a:bodyPr>
+          <a:lstStyle/>
+          <a:p>
+            <a:pPr algn="l"/>
+            <a:r>
+              <a:rPr sz="1200" b="1">
+                <a:solidFill>
+                  <a:srgbClr val="2E2E33"/>
+                </a:solidFill>
+                <a:latin typeface="Yu Gothic UI"/>
+              </a:rPr>
+              <a:t>アイリスオーヤマ HUGEL 20L</a:t>
+            </a:r>
+          </a:p>
+        </p:txBody>
+      </p:sp>
+      <p:sp>
+        <p:nvSpPr>
+          <p:cNvPr id="40" name="Rounded Rectangle 39"/>
+          <p:cNvSpPr/>
+          <p:nvPr/>
+        </p:nvSpPr>
+        <p:spPr>
+          <a:xfrm>
+            <a:off x="4476750" y="3638550"/>
+            <a:ext cx="800100" cy="190500"/>
+          </a:xfrm>
+          <a:prstGeom prst="roundRect">
+            <a:avLst>
+              <a:gd name="adj" fmla="val 30000"/>
+            </a:avLst>
+          </a:prstGeom>
+          <a:gradFill rotWithShape="1">
+            <a:gsLst>
+              <a:gs pos="0">
+                <a:srgbClr val="EEF4F9"/>
+              </a:gs>
+              <a:gs pos="100000">
+                <a:srgbClr val="DAE7F2"/>
+              </a:gs>
+            </a:gsLst>
+            <a:lin scaled="0" ang="16200000"/>
+          </a:gradFill>
+          <a:ln w="19050">
+            <a:solidFill>
+              <a:srgbClr val="014172"/>
+            </a:solidFill>
+          </a:ln>
+          <a:effectLst/>
+        </p:spPr>
+        <p:txBody>
+          <a:bodyPr rtlCol="0" anchor="ctr"/>
+          <a:lstStyle/>
+          <a:p>
+            <a:pPr algn="ctr"/>
+          </a:p>
+        </p:txBody>
+      </p:sp>
+      <p:sp>
+        <p:nvSpPr>
+          <p:cNvPr id="41" name="Rounded Rectangle 40"/>
+          <p:cNvSpPr/>
+          <p:nvPr/>
+        </p:nvSpPr>
+        <p:spPr>
+          <a:xfrm>
+            <a:off x="5334000" y="3638550"/>
+            <a:ext cx="800100" cy="190500"/>
+          </a:xfrm>
+          <a:prstGeom prst="roundRect">
+            <a:avLst>
+              <a:gd name="adj" fmla="val 30000"/>
+            </a:avLst>
+          </a:prstGeom>
+          <a:gradFill rotWithShape="1">
+            <a:gsLst>
+              <a:gs pos="0">
+                <a:srgbClr val="EEF4F9"/>
+              </a:gs>
+              <a:gs pos="100000">
+                <a:srgbClr val="DAE7F2"/>
+              </a:gs>
+            </a:gsLst>
+            <a:lin scaled="0" ang="16200000"/>
+          </a:gradFill>
+          <a:ln w="19050">
+            <a:solidFill>
+              <a:srgbClr val="014172"/>
+            </a:solidFill>
+          </a:ln>
+          <a:effectLst/>
+        </p:spPr>
+        <p:txBody>
+          <a:bodyPr rtlCol="0" anchor="ctr"/>
+          <a:lstStyle/>
+          <a:p>
+            <a:pPr algn="ctr"/>
+          </a:p>
+        </p:txBody>
+      </p:sp>
+      <p:sp>
+        <p:nvSpPr>
+          <p:cNvPr id="42" name="Rounded Rectangle 41"/>
+          <p:cNvSpPr/>
+          <p:nvPr/>
+        </p:nvSpPr>
+        <p:spPr>
+          <a:xfrm>
+            <a:off x="6191250" y="3638550"/>
+            <a:ext cx="800100" cy="190500"/>
+          </a:xfrm>
+          <a:prstGeom prst="roundRect">
+            <a:avLst>
+              <a:gd name="adj" fmla="val 30000"/>
+            </a:avLst>
+          </a:prstGeom>
+          <a:gradFill rotWithShape="1">
+            <a:gsLst>
+              <a:gs pos="0">
+                <a:srgbClr val="EEF4F9"/>
+              </a:gs>
+              <a:gs pos="100000">
+                <a:srgbClr val="DAE7F2"/>
+              </a:gs>
+            </a:gsLst>
+            <a:lin scaled="0" ang="16200000"/>
+          </a:gradFill>
+          <a:ln w="19050">
+            <a:solidFill>
+              <a:srgbClr val="014172"/>
+            </a:solidFill>
+          </a:ln>
+          <a:effectLst/>
+        </p:spPr>
+        <p:txBody>
+          <a:bodyPr rtlCol="0" anchor="ctr"/>
+          <a:lstStyle/>
+          <a:p>
+            <a:pPr algn="ctr"/>
+          </a:p>
+        </p:txBody>
+      </p:sp>
+      <p:sp>
+        <p:nvSpPr>
+          <p:cNvPr id="43" name="Rounded Rectangle 42"/>
+          <p:cNvSpPr/>
+          <p:nvPr/>
+        </p:nvSpPr>
+        <p:spPr>
+          <a:xfrm>
+            <a:off x="7048500" y="3638550"/>
+            <a:ext cx="800100" cy="190500"/>
+          </a:xfrm>
+          <a:prstGeom prst="roundRect">
+            <a:avLst>
+              <a:gd name="adj" fmla="val 30000"/>
+            </a:avLst>
+          </a:prstGeom>
+          <a:gradFill rotWithShape="1">
+            <a:gsLst>
+              <a:gs pos="0">
+                <a:srgbClr val="EEF4F9"/>
+              </a:gs>
+              <a:gs pos="100000">
+                <a:srgbClr val="DAE7F2"/>
+              </a:gs>
+            </a:gsLst>
+            <a:lin scaled="0" ang="16200000"/>
+          </a:gradFill>
+          <a:ln w="19050">
+            <a:solidFill>
+              <a:srgbClr val="014172"/>
+            </a:solidFill>
+          </a:ln>
+          <a:effectLst/>
+        </p:spPr>
+        <p:txBody>
+          <a:bodyPr rtlCol="0" anchor="ctr"/>
+          <a:lstStyle/>
+          <a:p>
+            <a:pPr algn="ctr"/>
+          </a:p>
+        </p:txBody>
+      </p:sp>
+      <p:sp>
+        <p:nvSpPr>
+          <p:cNvPr id="44" name="TextBox 43"/>
+          <p:cNvSpPr txBox="1"/>
+          <p:nvPr/>
+        </p:nvSpPr>
+        <p:spPr>
+          <a:xfrm>
+            <a:off x="7981950" y="3619500"/>
+            <a:ext cx="857250" cy="228600"/>
+          </a:xfrm>
+          <a:prstGeom prst="rect">
+            <a:avLst/>
+          </a:prstGeom>
+          <a:noFill/>
+        </p:spPr>
+        <p:txBody>
+          <a:bodyPr wrap="none" lIns="0" rIns="0" tIns="0" bIns="0" anchor="ctr">
+            <a:spAutoFit/>
+          </a:bodyPr>
+          <a:lstStyle/>
+          <a:p>
+            <a:pPr algn="l"/>
+            <a:r>
+              <a:rPr sz="1275" b="1">
+                <a:solidFill>
+                  <a:srgbClr val="014172"/>
+                </a:solidFill>
+                <a:latin typeface="Yu Gothic UI"/>
+              </a:rPr>
+              <a:t>4枚</a:t>
+            </a:r>
+          </a:p>
+        </p:txBody>
+      </p:sp>
+      <p:sp>
+        <p:nvSpPr>
+          <p:cNvPr id="45" name="TextBox 44"/>
+          <p:cNvSpPr txBox="1"/>
+          <p:nvPr/>
+        </p:nvSpPr>
+        <p:spPr>
+          <a:xfrm>
+            <a:off x="704850" y="4000500"/>
+            <a:ext cx="3619500" cy="228600"/>
+          </a:xfrm>
+          <a:prstGeom prst="rect">
+            <a:avLst/>
+          </a:prstGeom>
+          <a:noFill/>
+        </p:spPr>
+        <p:txBody>
+          <a:bodyPr wrap="none" lIns="0" rIns="0" tIns="0" bIns="0" anchor="ctr">
+            <a:spAutoFit/>
+          </a:bodyPr>
+          <a:lstStyle/>
+          <a:p>
+            <a:pPr algn="l"/>
+            <a:r>
+              <a:rPr sz="1200" b="1">
+                <a:solidFill>
+                  <a:srgbClr val="2E2E33"/>
+                </a:solidFill>
+                <a:latin typeface="Yu Gothic UI"/>
+              </a:rPr>
+              <a:t>コールマン 28QT（約26L）</a:t>
+            </a:r>
+          </a:p>
+        </p:txBody>
+      </p:sp>
+      <p:sp>
+        <p:nvSpPr>
+          <p:cNvPr id="46" name="Rounded Rectangle 45"/>
+          <p:cNvSpPr/>
+          <p:nvPr/>
+        </p:nvSpPr>
+        <p:spPr>
+          <a:xfrm>
+            <a:off x="4476750" y="4019550"/>
+            <a:ext cx="800100" cy="190500"/>
+          </a:xfrm>
+          <a:prstGeom prst="roundRect">
+            <a:avLst>
+              <a:gd name="adj" fmla="val 30000"/>
+            </a:avLst>
+          </a:prstGeom>
+          <a:gradFill rotWithShape="1">
+            <a:gsLst>
+              <a:gs pos="0">
+                <a:srgbClr val="EEF4F9"/>
+              </a:gs>
+              <a:gs pos="100000">
+                <a:srgbClr val="DAE7F2"/>
+              </a:gs>
+            </a:gsLst>
+            <a:lin scaled="0" ang="16200000"/>
+          </a:gradFill>
+          <a:ln w="19050">
+            <a:solidFill>
+              <a:srgbClr val="014172"/>
+            </a:solidFill>
+          </a:ln>
+          <a:effectLst/>
+        </p:spPr>
+        <p:txBody>
+          <a:bodyPr rtlCol="0" anchor="ctr"/>
+          <a:lstStyle/>
+          <a:p>
+            <a:pPr algn="ctr"/>
+          </a:p>
+        </p:txBody>
+      </p:sp>
+      <p:sp>
+        <p:nvSpPr>
+          <p:cNvPr id="47" name="Rounded Rectangle 46"/>
+          <p:cNvSpPr/>
+          <p:nvPr/>
+        </p:nvSpPr>
+        <p:spPr>
+          <a:xfrm>
+            <a:off x="5334000" y="4019550"/>
+            <a:ext cx="800100" cy="190500"/>
+          </a:xfrm>
+          <a:prstGeom prst="roundRect">
+            <a:avLst>
+              <a:gd name="adj" fmla="val 30000"/>
+            </a:avLst>
+          </a:prstGeom>
+          <a:gradFill rotWithShape="1">
+            <a:gsLst>
+              <a:gs pos="0">
+                <a:srgbClr val="EEF4F9"/>
+              </a:gs>
+              <a:gs pos="100000">
+                <a:srgbClr val="DAE7F2"/>
+              </a:gs>
+            </a:gsLst>
+            <a:lin scaled="0" ang="16200000"/>
+          </a:gradFill>
+          <a:ln w="19050">
+            <a:solidFill>
+              <a:srgbClr val="014172"/>
+            </a:solidFill>
+          </a:ln>
+          <a:effectLst/>
+        </p:spPr>
+        <p:txBody>
+          <a:bodyPr rtlCol="0" anchor="ctr"/>
+          <a:lstStyle/>
+          <a:p>
+            <a:pPr algn="ctr"/>
+          </a:p>
+        </p:txBody>
+      </p:sp>
+      <p:sp>
+        <p:nvSpPr>
+          <p:cNvPr id="48" name="Rounded Rectangle 47"/>
+          <p:cNvSpPr/>
+          <p:nvPr/>
+        </p:nvSpPr>
+        <p:spPr>
+          <a:xfrm>
+            <a:off x="6191250" y="4019550"/>
+            <a:ext cx="800100" cy="190500"/>
+          </a:xfrm>
+          <a:prstGeom prst="roundRect">
+            <a:avLst>
+              <a:gd name="adj" fmla="val 30000"/>
+            </a:avLst>
+          </a:prstGeom>
+          <a:gradFill rotWithShape="1">
+            <a:gsLst>
+              <a:gs pos="0">
+                <a:srgbClr val="EEF4F9"/>
+              </a:gs>
+              <a:gs pos="100000">
+                <a:srgbClr val="DAE7F2"/>
+              </a:gs>
+            </a:gsLst>
+            <a:lin scaled="0" ang="16200000"/>
+          </a:gradFill>
+          <a:ln w="19050">
+            <a:solidFill>
+              <a:srgbClr val="014172"/>
+            </a:solidFill>
+          </a:ln>
+          <a:effectLst/>
+        </p:spPr>
+        <p:txBody>
+          <a:bodyPr rtlCol="0" anchor="ctr"/>
+          <a:lstStyle/>
+          <a:p>
+            <a:pPr algn="ctr"/>
+          </a:p>
+        </p:txBody>
+      </p:sp>
+      <p:sp>
+        <p:nvSpPr>
+          <p:cNvPr id="49" name="Rounded Rectangle 48"/>
+          <p:cNvSpPr/>
+          <p:nvPr/>
+        </p:nvSpPr>
+        <p:spPr>
+          <a:xfrm>
+            <a:off x="7048500" y="4019550"/>
+            <a:ext cx="800100" cy="190500"/>
+          </a:xfrm>
+          <a:prstGeom prst="roundRect">
+            <a:avLst>
+              <a:gd name="adj" fmla="val 30000"/>
+            </a:avLst>
+          </a:prstGeom>
+          <a:gradFill rotWithShape="1">
+            <a:gsLst>
+              <a:gs pos="0">
+                <a:srgbClr val="EEF4F9"/>
+              </a:gs>
+              <a:gs pos="100000">
+                <a:srgbClr val="DAE7F2"/>
+              </a:gs>
+            </a:gsLst>
+            <a:lin scaled="0" ang="16200000"/>
+          </a:gradFill>
+          <a:ln w="19050">
+            <a:solidFill>
+              <a:srgbClr val="014172"/>
+            </a:solidFill>
+          </a:ln>
+          <a:effectLst/>
+        </p:spPr>
+        <p:txBody>
+          <a:bodyPr rtlCol="0" anchor="ctr"/>
+          <a:lstStyle/>
+          <a:p>
+            <a:pPr algn="ctr"/>
+          </a:p>
+        </p:txBody>
+      </p:sp>
+      <p:sp>
+        <p:nvSpPr>
+          <p:cNvPr id="50" name="TextBox 49"/>
+          <p:cNvSpPr txBox="1"/>
+          <p:nvPr/>
+        </p:nvSpPr>
+        <p:spPr>
+          <a:xfrm>
+            <a:off x="7981950" y="4000500"/>
+            <a:ext cx="857250" cy="228600"/>
+          </a:xfrm>
+          <a:prstGeom prst="rect">
+            <a:avLst/>
+          </a:prstGeom>
+          <a:noFill/>
+        </p:spPr>
+        <p:txBody>
+          <a:bodyPr wrap="none" lIns="0" rIns="0" tIns="0" bIns="0" anchor="ctr">
+            <a:spAutoFit/>
+          </a:bodyPr>
+          <a:lstStyle/>
+          <a:p>
+            <a:pPr algn="l"/>
+            <a:r>
+              <a:rPr sz="1275" b="1">
+                <a:solidFill>
+                  <a:srgbClr val="014172"/>
+                </a:solidFill>
+                <a:latin typeface="Yu Gothic UI"/>
+              </a:rPr>
+              <a:t>4枚</a:t>
+            </a:r>
+          </a:p>
+        </p:txBody>
+      </p:sp>
+      <p:sp>
+        <p:nvSpPr>
+          <p:cNvPr id="51" name="TextBox 50"/>
+          <p:cNvSpPr txBox="1"/>
+          <p:nvPr/>
+        </p:nvSpPr>
+        <p:spPr>
+          <a:xfrm>
+            <a:off x="704850" y="4381500"/>
+            <a:ext cx="3619500" cy="228600"/>
+          </a:xfrm>
+          <a:prstGeom prst="rect">
+            <a:avLst/>
+          </a:prstGeom>
+          <a:noFill/>
+        </p:spPr>
+        <p:txBody>
+          <a:bodyPr wrap="none" lIns="0" rIns="0" tIns="0" bIns="0" anchor="ctr">
+            <a:spAutoFit/>
+          </a:bodyPr>
+          <a:lstStyle/>
+          <a:p>
+            <a:pPr algn="l"/>
+            <a:r>
+              <a:rPr sz="1200" b="1">
+                <a:solidFill>
+                  <a:srgbClr val="2E2E33"/>
+                </a:solidFill>
+                <a:latin typeface="Yu Gothic UI"/>
+              </a:rPr>
+              <a:t>ダイワ S2500（25L）</a:t>
+            </a:r>
+          </a:p>
+        </p:txBody>
+      </p:sp>
+      <p:sp>
+        <p:nvSpPr>
+          <p:cNvPr id="52" name="Rounded Rectangle 51"/>
+          <p:cNvSpPr/>
+          <p:nvPr/>
+        </p:nvSpPr>
+        <p:spPr>
+          <a:xfrm>
+            <a:off x="4476750" y="4400550"/>
+            <a:ext cx="800100" cy="190500"/>
+          </a:xfrm>
+          <a:prstGeom prst="roundRect">
+            <a:avLst>
+              <a:gd name="adj" fmla="val 30000"/>
+            </a:avLst>
+          </a:prstGeom>
+          <a:gradFill rotWithShape="1">
+            <a:gsLst>
+              <a:gs pos="0">
+                <a:srgbClr val="EEF4F9"/>
+              </a:gs>
+              <a:gs pos="100000">
+                <a:srgbClr val="DAE7F2"/>
+              </a:gs>
+            </a:gsLst>
+            <a:lin scaled="0" ang="16200000"/>
+          </a:gradFill>
+          <a:ln w="19050">
+            <a:solidFill>
+              <a:srgbClr val="014172"/>
+            </a:solidFill>
+          </a:ln>
+          <a:effectLst/>
+        </p:spPr>
+        <p:txBody>
+          <a:bodyPr rtlCol="0" anchor="ctr"/>
+          <a:lstStyle/>
+          <a:p>
+            <a:pPr algn="ctr"/>
+          </a:p>
+        </p:txBody>
+      </p:sp>
+      <p:sp>
+        <p:nvSpPr>
+          <p:cNvPr id="53" name="Rounded Rectangle 52"/>
+          <p:cNvSpPr/>
+          <p:nvPr/>
+        </p:nvSpPr>
+        <p:spPr>
+          <a:xfrm>
+            <a:off x="5334000" y="4400550"/>
+            <a:ext cx="800100" cy="190500"/>
+          </a:xfrm>
+          <a:prstGeom prst="roundRect">
+            <a:avLst>
+              <a:gd name="adj" fmla="val 30000"/>
+            </a:avLst>
+          </a:prstGeom>
+          <a:gradFill rotWithShape="1">
+            <a:gsLst>
+              <a:gs pos="0">
+                <a:srgbClr val="EEF4F9"/>
+              </a:gs>
+              <a:gs pos="100000">
+                <a:srgbClr val="DAE7F2"/>
+              </a:gs>
+            </a:gsLst>
+            <a:lin scaled="0" ang="16200000"/>
+          </a:gradFill>
+          <a:ln w="19050">
+            <a:solidFill>
+              <a:srgbClr val="014172"/>
+            </a:solidFill>
+          </a:ln>
+          <a:effectLst/>
+        </p:spPr>
+        <p:txBody>
+          <a:bodyPr rtlCol="0" anchor="ctr"/>
+          <a:lstStyle/>
+          <a:p>
+            <a:pPr algn="ctr"/>
+          </a:p>
+        </p:txBody>
+      </p:sp>
+      <p:sp>
+        <p:nvSpPr>
+          <p:cNvPr id="54" name="Rounded Rectangle 53"/>
+          <p:cNvSpPr/>
+          <p:nvPr/>
+        </p:nvSpPr>
+        <p:spPr>
+          <a:xfrm>
+            <a:off x="6191250" y="4400550"/>
+            <a:ext cx="800100" cy="190500"/>
+          </a:xfrm>
+          <a:prstGeom prst="roundRect">
+            <a:avLst>
+              <a:gd name="adj" fmla="val 30000"/>
+            </a:avLst>
+          </a:prstGeom>
+          <a:gradFill rotWithShape="1">
+            <a:gsLst>
+              <a:gs pos="0">
+                <a:srgbClr val="EEF4F9"/>
+              </a:gs>
+              <a:gs pos="100000">
+                <a:srgbClr val="DAE7F2"/>
+              </a:gs>
+            </a:gsLst>
+            <a:lin scaled="0" ang="16200000"/>
+          </a:gradFill>
+          <a:ln w="19050">
+            <a:solidFill>
+              <a:srgbClr val="014172"/>
+            </a:solidFill>
+          </a:ln>
+          <a:effectLst/>
+        </p:spPr>
+        <p:txBody>
+          <a:bodyPr rtlCol="0" anchor="ctr"/>
+          <a:lstStyle/>
+          <a:p>
+            <a:pPr algn="ctr"/>
+          </a:p>
+        </p:txBody>
+      </p:sp>
+      <p:sp>
+        <p:nvSpPr>
+          <p:cNvPr id="55" name="Rounded Rectangle 54"/>
+          <p:cNvSpPr/>
+          <p:nvPr/>
+        </p:nvSpPr>
+        <p:spPr>
+          <a:xfrm>
+            <a:off x="7048500" y="4400550"/>
+            <a:ext cx="800100" cy="190500"/>
+          </a:xfrm>
+          <a:prstGeom prst="roundRect">
+            <a:avLst>
+              <a:gd name="adj" fmla="val 30000"/>
+            </a:avLst>
+          </a:prstGeom>
+          <a:gradFill rotWithShape="1">
+            <a:gsLst>
+              <a:gs pos="0">
+                <a:srgbClr val="EEF4F9"/>
+              </a:gs>
+              <a:gs pos="100000">
+                <a:srgbClr val="DAE7F2"/>
+              </a:gs>
+            </a:gsLst>
+            <a:lin scaled="0" ang="16200000"/>
+          </a:gradFill>
+          <a:ln w="19050">
+            <a:solidFill>
+              <a:srgbClr val="014172"/>
+            </a:solidFill>
+          </a:ln>
+          <a:effectLst/>
+        </p:spPr>
+        <p:txBody>
+          <a:bodyPr rtlCol="0" anchor="ctr"/>
+          <a:lstStyle/>
+          <a:p>
+            <a:pPr algn="ctr"/>
+          </a:p>
+        </p:txBody>
+      </p:sp>
+      <p:sp>
+        <p:nvSpPr>
+          <p:cNvPr id="56" name="Rounded Rectangle 55"/>
+          <p:cNvSpPr/>
+          <p:nvPr/>
+        </p:nvSpPr>
+        <p:spPr>
+          <a:xfrm>
+            <a:off x="7905750" y="4400550"/>
+            <a:ext cx="800100" cy="190500"/>
+          </a:xfrm>
+          <a:prstGeom prst="roundRect">
+            <a:avLst>
+              <a:gd name="adj" fmla="val 30000"/>
+            </a:avLst>
+          </a:prstGeom>
+          <a:gradFill rotWithShape="1">
+            <a:gsLst>
+              <a:gs pos="0">
+                <a:srgbClr val="EEF4F9"/>
+              </a:gs>
+              <a:gs pos="100000">
+                <a:srgbClr val="DAE7F2"/>
+              </a:gs>
+            </a:gsLst>
+            <a:lin scaled="0" ang="16200000"/>
+          </a:gradFill>
+          <a:ln w="19050">
+            <a:solidFill>
+              <a:srgbClr val="014172"/>
+            </a:solidFill>
+          </a:ln>
+          <a:effectLst/>
+        </p:spPr>
+        <p:txBody>
+          <a:bodyPr rtlCol="0" anchor="ctr"/>
+          <a:lstStyle/>
+          <a:p>
+            <a:pPr algn="ctr"/>
+          </a:p>
+        </p:txBody>
+      </p:sp>
+      <p:sp>
+        <p:nvSpPr>
+          <p:cNvPr id="57" name="Rounded Rectangle 56"/>
+          <p:cNvSpPr/>
+          <p:nvPr/>
+        </p:nvSpPr>
+        <p:spPr>
+          <a:xfrm>
+            <a:off x="8763000" y="4400550"/>
+            <a:ext cx="800100" cy="190500"/>
+          </a:xfrm>
+          <a:prstGeom prst="roundRect">
+            <a:avLst>
+              <a:gd name="adj" fmla="val 30000"/>
+            </a:avLst>
+          </a:prstGeom>
+          <a:gradFill rotWithShape="1">
+            <a:gsLst>
+              <a:gs pos="0">
+                <a:srgbClr val="EEF4F9"/>
+              </a:gs>
+              <a:gs pos="100000">
+                <a:srgbClr val="DAE7F2"/>
+              </a:gs>
+            </a:gsLst>
+            <a:lin scaled="0" ang="16200000"/>
+          </a:gradFill>
+          <a:ln w="19050">
+            <a:solidFill>
+              <a:srgbClr val="014172"/>
+            </a:solidFill>
+          </a:ln>
+          <a:effectLst/>
+        </p:spPr>
+        <p:txBody>
+          <a:bodyPr rtlCol="0" anchor="ctr"/>
+          <a:lstStyle/>
+          <a:p>
+            <a:pPr algn="ctr"/>
+          </a:p>
+        </p:txBody>
+      </p:sp>
+      <p:sp>
+        <p:nvSpPr>
+          <p:cNvPr id="58" name="TextBox 57"/>
+          <p:cNvSpPr txBox="1"/>
+          <p:nvPr/>
+        </p:nvSpPr>
+        <p:spPr>
+          <a:xfrm>
+            <a:off x="9696450" y="4381500"/>
+            <a:ext cx="857250" cy="228600"/>
+          </a:xfrm>
+          <a:prstGeom prst="rect">
+            <a:avLst/>
+          </a:prstGeom>
+          <a:noFill/>
+        </p:spPr>
+        <p:txBody>
+          <a:bodyPr wrap="none" lIns="0" rIns="0" tIns="0" bIns="0" anchor="ctr">
+            <a:spAutoFit/>
+          </a:bodyPr>
+          <a:lstStyle/>
+          <a:p>
+            <a:pPr algn="l"/>
+            <a:r>
+              <a:rPr sz="1275" b="1">
+                <a:solidFill>
+                  <a:srgbClr val="014172"/>
+                </a:solidFill>
+                <a:latin typeface="Yu Gothic UI"/>
+              </a:rPr>
+              <a:t>6枚</a:t>
+            </a:r>
+          </a:p>
+        </p:txBody>
+      </p:sp>
+      <p:sp>
+        <p:nvSpPr>
+          <p:cNvPr id="59" name="TextBox 58"/>
+          <p:cNvSpPr txBox="1"/>
+          <p:nvPr/>
+        </p:nvSpPr>
+        <p:spPr>
+          <a:xfrm>
+            <a:off x="704850" y="4762500"/>
+            <a:ext cx="3619500" cy="228600"/>
+          </a:xfrm>
+          <a:prstGeom prst="rect">
+            <a:avLst/>
+          </a:prstGeom>
+          <a:noFill/>
+        </p:spPr>
+        <p:txBody>
+          <a:bodyPr wrap="none" lIns="0" rIns="0" tIns="0" bIns="0" anchor="ctr">
+            <a:spAutoFit/>
+          </a:bodyPr>
+          <a:lstStyle/>
+          <a:p>
+            <a:pPr algn="l"/>
+            <a:r>
+              <a:rPr sz="1200" b="1">
+                <a:solidFill>
+                  <a:srgbClr val="2E2E33"/>
+                </a:solidFill>
+                <a:latin typeface="Yu Gothic UI"/>
+              </a:rPr>
+              <a:t>アイリスオーヤマ HUGEL 40L</a:t>
+            </a:r>
+          </a:p>
+        </p:txBody>
+      </p:sp>
+      <p:sp>
+        <p:nvSpPr>
+          <p:cNvPr id="60" name="Rounded Rectangle 59"/>
+          <p:cNvSpPr/>
+          <p:nvPr/>
+        </p:nvSpPr>
+        <p:spPr>
+          <a:xfrm>
+            <a:off x="4476750" y="4781550"/>
+            <a:ext cx="800100" cy="190500"/>
+          </a:xfrm>
+          <a:prstGeom prst="roundRect">
+            <a:avLst>
+              <a:gd name="adj" fmla="val 30000"/>
+            </a:avLst>
+          </a:prstGeom>
+          <a:gradFill rotWithShape="1">
+            <a:gsLst>
+              <a:gs pos="0">
+                <a:srgbClr val="EEF4F9"/>
+              </a:gs>
+              <a:gs pos="100000">
+                <a:srgbClr val="DAE7F2"/>
+              </a:gs>
+            </a:gsLst>
+            <a:lin scaled="0" ang="16200000"/>
+          </a:gradFill>
+          <a:ln w="19050">
+            <a:solidFill>
+              <a:srgbClr val="014172"/>
+            </a:solidFill>
+          </a:ln>
+          <a:effectLst/>
+        </p:spPr>
+        <p:txBody>
+          <a:bodyPr rtlCol="0" anchor="ctr"/>
+          <a:lstStyle/>
+          <a:p>
+            <a:pPr algn="ctr"/>
+          </a:p>
+        </p:txBody>
+      </p:sp>
+      <p:sp>
+        <p:nvSpPr>
+          <p:cNvPr id="61" name="Rounded Rectangle 60"/>
+          <p:cNvSpPr/>
+          <p:nvPr/>
+        </p:nvSpPr>
+        <p:spPr>
+          <a:xfrm>
+            <a:off x="5334000" y="4781550"/>
+            <a:ext cx="800100" cy="190500"/>
+          </a:xfrm>
+          <a:prstGeom prst="roundRect">
+            <a:avLst>
+              <a:gd name="adj" fmla="val 30000"/>
+            </a:avLst>
+          </a:prstGeom>
+          <a:gradFill rotWithShape="1">
+            <a:gsLst>
+              <a:gs pos="0">
+                <a:srgbClr val="EEF4F9"/>
+              </a:gs>
+              <a:gs pos="100000">
+                <a:srgbClr val="DAE7F2"/>
+              </a:gs>
+            </a:gsLst>
+            <a:lin scaled="0" ang="16200000"/>
+          </a:gradFill>
+          <a:ln w="19050">
+            <a:solidFill>
+              <a:srgbClr val="014172"/>
+            </a:solidFill>
+          </a:ln>
+          <a:effectLst/>
+        </p:spPr>
+        <p:txBody>
+          <a:bodyPr rtlCol="0" anchor="ctr"/>
+          <a:lstStyle/>
+          <a:p>
+            <a:pPr algn="ctr"/>
+          </a:p>
+        </p:txBody>
+      </p:sp>
+      <p:sp>
+        <p:nvSpPr>
+          <p:cNvPr id="62" name="Rounded Rectangle 61"/>
+          <p:cNvSpPr/>
+          <p:nvPr/>
+        </p:nvSpPr>
+        <p:spPr>
+          <a:xfrm>
+            <a:off x="6191250" y="4781550"/>
+            <a:ext cx="800100" cy="190500"/>
+          </a:xfrm>
+          <a:prstGeom prst="roundRect">
+            <a:avLst>
+              <a:gd name="adj" fmla="val 30000"/>
+            </a:avLst>
+          </a:prstGeom>
+          <a:gradFill rotWithShape="1">
+            <a:gsLst>
+              <a:gs pos="0">
+                <a:srgbClr val="EEF4F9"/>
+              </a:gs>
+              <a:gs pos="100000">
+                <a:srgbClr val="DAE7F2"/>
+              </a:gs>
+            </a:gsLst>
+            <a:lin scaled="0" ang="16200000"/>
+          </a:gradFill>
+          <a:ln w="19050">
+            <a:solidFill>
+              <a:srgbClr val="014172"/>
+            </a:solidFill>
+          </a:ln>
+          <a:effectLst/>
+        </p:spPr>
+        <p:txBody>
+          <a:bodyPr rtlCol="0" anchor="ctr"/>
+          <a:lstStyle/>
+          <a:p>
+            <a:pPr algn="ctr"/>
+          </a:p>
+        </p:txBody>
+      </p:sp>
+      <p:sp>
+        <p:nvSpPr>
+          <p:cNvPr id="63" name="Rounded Rectangle 62"/>
+          <p:cNvSpPr/>
+          <p:nvPr/>
+        </p:nvSpPr>
+        <p:spPr>
+          <a:xfrm>
+            <a:off x="7048500" y="4781550"/>
+            <a:ext cx="800100" cy="190500"/>
+          </a:xfrm>
+          <a:prstGeom prst="roundRect">
+            <a:avLst>
+              <a:gd name="adj" fmla="val 30000"/>
+            </a:avLst>
+          </a:prstGeom>
+          <a:gradFill rotWithShape="1">
+            <a:gsLst>
+              <a:gs pos="0">
+                <a:srgbClr val="EEF4F9"/>
+              </a:gs>
+              <a:gs pos="100000">
+                <a:srgbClr val="DAE7F2"/>
+              </a:gs>
+            </a:gsLst>
+            <a:lin scaled="0" ang="16200000"/>
+          </a:gradFill>
+          <a:ln w="19050">
+            <a:solidFill>
+              <a:srgbClr val="014172"/>
+            </a:solidFill>
+          </a:ln>
+          <a:effectLst/>
+        </p:spPr>
+        <p:txBody>
+          <a:bodyPr rtlCol="0" anchor="ctr"/>
+          <a:lstStyle/>
+          <a:p>
+            <a:pPr algn="ctr"/>
+          </a:p>
+        </p:txBody>
+      </p:sp>
+      <p:sp>
+        <p:nvSpPr>
+          <p:cNvPr id="64" name="Rounded Rectangle 63"/>
+          <p:cNvSpPr/>
+          <p:nvPr/>
+        </p:nvSpPr>
+        <p:spPr>
+          <a:xfrm>
+            <a:off x="7905750" y="4781550"/>
+            <a:ext cx="800100" cy="190500"/>
+          </a:xfrm>
+          <a:prstGeom prst="roundRect">
+            <a:avLst>
+              <a:gd name="adj" fmla="val 30000"/>
+            </a:avLst>
+          </a:prstGeom>
+          <a:gradFill rotWithShape="1">
+            <a:gsLst>
+              <a:gs pos="0">
+                <a:srgbClr val="EEF4F9"/>
+              </a:gs>
+              <a:gs pos="100000">
+                <a:srgbClr val="DAE7F2"/>
+              </a:gs>
+            </a:gsLst>
+            <a:lin scaled="0" ang="16200000"/>
+          </a:gradFill>
+          <a:ln w="19050">
+            <a:solidFill>
+              <a:srgbClr val="014172"/>
+            </a:solidFill>
+          </a:ln>
+          <a:effectLst/>
+        </p:spPr>
+        <p:txBody>
+          <a:bodyPr rtlCol="0" anchor="ctr"/>
+          <a:lstStyle/>
+          <a:p>
+            <a:pPr algn="ctr"/>
+          </a:p>
+        </p:txBody>
+      </p:sp>
+      <p:sp>
+        <p:nvSpPr>
+          <p:cNvPr id="65" name="Rounded Rectangle 64"/>
+          <p:cNvSpPr/>
+          <p:nvPr/>
+        </p:nvSpPr>
+        <p:spPr>
+          <a:xfrm>
+            <a:off x="8763000" y="4781550"/>
+            <a:ext cx="800100" cy="190500"/>
+          </a:xfrm>
+          <a:prstGeom prst="roundRect">
+            <a:avLst>
+              <a:gd name="adj" fmla="val 30000"/>
+            </a:avLst>
+          </a:prstGeom>
+          <a:gradFill rotWithShape="1">
+            <a:gsLst>
+              <a:gs pos="0">
+                <a:srgbClr val="EEF4F9"/>
+              </a:gs>
+              <a:gs pos="100000">
+                <a:srgbClr val="DAE7F2"/>
+              </a:gs>
+            </a:gsLst>
+            <a:lin scaled="0" ang="16200000"/>
+          </a:gradFill>
+          <a:ln w="19050">
+            <a:solidFill>
+              <a:srgbClr val="014172"/>
+            </a:solidFill>
+          </a:ln>
+          <a:effectLst/>
+        </p:spPr>
+        <p:txBody>
+          <a:bodyPr rtlCol="0" anchor="ctr"/>
+          <a:lstStyle/>
+          <a:p>
+            <a:pPr algn="ctr"/>
+          </a:p>
+        </p:txBody>
+      </p:sp>
+      <p:sp>
+        <p:nvSpPr>
+          <p:cNvPr id="66" name="Rounded Rectangle 65"/>
+          <p:cNvSpPr/>
+          <p:nvPr/>
+        </p:nvSpPr>
+        <p:spPr>
+          <a:xfrm>
+            <a:off x="9620250" y="4781550"/>
+            <a:ext cx="800100" cy="190500"/>
+          </a:xfrm>
+          <a:prstGeom prst="roundRect">
+            <a:avLst>
+              <a:gd name="adj" fmla="val 30000"/>
+            </a:avLst>
+          </a:prstGeom>
+          <a:gradFill rotWithShape="1">
+            <a:gsLst>
+              <a:gs pos="0">
+                <a:srgbClr val="EEF4F9"/>
+              </a:gs>
+              <a:gs pos="100000">
+                <a:srgbClr val="DAE7F2"/>
+              </a:gs>
+            </a:gsLst>
+            <a:lin scaled="0" ang="16200000"/>
+          </a:gradFill>
+          <a:ln w="19050">
+            <a:solidFill>
+              <a:srgbClr val="014172"/>
+            </a:solidFill>
+          </a:ln>
+          <a:effectLst/>
+        </p:spPr>
+        <p:txBody>
+          <a:bodyPr rtlCol="0" anchor="ctr"/>
+          <a:lstStyle/>
+          <a:p>
+            <a:pPr algn="ctr"/>
+          </a:p>
+        </p:txBody>
+      </p:sp>
+      <p:sp>
+        <p:nvSpPr>
+          <p:cNvPr id="67" name="TextBox 66"/>
+          <p:cNvSpPr txBox="1"/>
+          <p:nvPr/>
+        </p:nvSpPr>
+        <p:spPr>
+          <a:xfrm>
+            <a:off x="10553700" y="4762500"/>
+            <a:ext cx="857250" cy="228600"/>
+          </a:xfrm>
+          <a:prstGeom prst="rect">
+            <a:avLst/>
+          </a:prstGeom>
+          <a:noFill/>
+        </p:spPr>
+        <p:txBody>
+          <a:bodyPr wrap="none" lIns="0" rIns="0" tIns="0" bIns="0" anchor="ctr">
+            <a:spAutoFit/>
+          </a:bodyPr>
+          <a:lstStyle/>
+          <a:p>
+            <a:pPr algn="l"/>
+            <a:r>
+              <a:rPr sz="1275" b="1">
+                <a:solidFill>
+                  <a:srgbClr val="014172"/>
+                </a:solidFill>
+                <a:latin typeface="Yu Gothic UI"/>
+              </a:rPr>
+              <a:t>7枚</a:t>
+            </a:r>
+          </a:p>
+        </p:txBody>
+      </p:sp>
+      <p:sp>
+        <p:nvSpPr>
+          <p:cNvPr id="68" name="Rectangle 67"/>
+          <p:cNvSpPr/>
+          <p:nvPr/>
+        </p:nvSpPr>
+        <p:spPr>
+          <a:xfrm>
+            <a:off x="609600" y="5295900"/>
+            <a:ext cx="10210800" cy="9525"/>
+          </a:xfrm>
+          <a:prstGeom prst="rect">
+            <a:avLst/>
+          </a:prstGeom>
+          <a:solidFill>
+            <a:srgbClr val="E2E7EC"/>
+          </a:solidFill>
+          <a:ln>
+            <a:noFill/>
+          </a:ln>
+          <a:effectLst/>
+        </p:spPr>
+        <p:txBody>
+          <a:bodyPr rtlCol="0" anchor="ctr"/>
+          <a:lstStyle/>
+          <a:p>
+            <a:pPr algn="ctr"/>
+          </a:p>
+        </p:txBody>
+      </p:sp>
+      <p:sp>
+        <p:nvSpPr>
+          <p:cNvPr id="69" name="TextBox 68"/>
+          <p:cNvSpPr txBox="1"/>
+          <p:nvPr/>
+        </p:nvSpPr>
+        <p:spPr>
+          <a:xfrm>
+            <a:off x="609600" y="5429250"/>
+            <a:ext cx="7239000" cy="247650"/>
+          </a:xfrm>
+          <a:prstGeom prst="rect">
+            <a:avLst/>
+          </a:prstGeom>
+          <a:noFill/>
+        </p:spPr>
+        <p:txBody>
+          <a:bodyPr wrap="none" lIns="0" rIns="0" tIns="0" bIns="0" anchor="ctr">
+            <a:spAutoFit/>
+          </a:bodyPr>
+          <a:lstStyle/>
+          <a:p>
+            <a:pPr algn="l"/>
+            <a:r>
+              <a:rPr sz="1425" b="1">
+                <a:solidFill>
+                  <a:srgbClr val="2E2E33"/>
+                </a:solidFill>
+                <a:latin typeface="Yu Gothic UI"/>
+              </a:rPr>
+              <a:t>同じ「入る」でも、製品で1枚と7枚に分かれます。</a:t>
+            </a:r>
+          </a:p>
+        </p:txBody>
+      </p:sp>
+      <p:sp>
+        <p:nvSpPr>
+          <p:cNvPr id="70" name="TextBox 69"/>
+          <p:cNvSpPr txBox="1"/>
+          <p:nvPr/>
+        </p:nvSpPr>
+        <p:spPr>
+          <a:xfrm>
+            <a:off x="609600" y="5676900"/>
+            <a:ext cx="7620000" cy="209550"/>
+          </a:xfrm>
+          <a:prstGeom prst="rect">
+            <a:avLst/>
+          </a:prstGeom>
+          <a:noFill/>
+        </p:spPr>
+        <p:txBody>
+          <a:bodyPr wrap="none" lIns="0" rIns="0" tIns="0" bIns="0" anchor="ctr">
+            <a:spAutoFit/>
+          </a:bodyPr>
+          <a:lstStyle/>
+          <a:p>
+            <a:pPr algn="l"/>
+            <a:r>
+              <a:rPr sz="1050" b="0">
+                <a:solidFill>
+                  <a:srgbClr val="6A717B"/>
+                </a:solidFill>
+                <a:latin typeface="Yu Gothic UI"/>
+              </a:rPr>
+              <a:t>メーカー公表値からの計算です（実測ではありません）</a:t>
+            </a:r>
+          </a:p>
+        </p:txBody>
+      </p:sp>
+      <p:sp>
+        <p:nvSpPr>
+          <p:cNvPr id="71" name="TextBox 70"/>
           <p:cNvSpPr txBox="1"/>
           <p:nvPr/>
         </p:nvSpPr>

--- a/site/public/img/figures.pptx
+++ b/site/public/img/figures.pptx
@@ -15,6 +15,10 @@
     <p:sldId id="263" r:id="rId14"/>
     <p:sldId id="264" r:id="rId15"/>
     <p:sldId id="265" r:id="rId16"/>
+    <p:sldId id="266" r:id="rId17"/>
+    <p:sldId id="267" r:id="rId18"/>
+    <p:sldId id="268" r:id="rId19"/>
+    <p:sldId id="269" r:id="rId20"/>
   </p:sldIdLst>
   <p:sldSz cx="11430000" cy="6000750" type="screen4x3"/>
   <p:notesSz cx="6858000" cy="9144000"/>
@@ -5387,6 +5391,5518 @@
       <p:sp>
         <p:nvSpPr>
           <p:cNvPr id="23" name="TextBox 22"/>
+          <p:cNvSpPr txBox="1"/>
+          <p:nvPr/>
+        </p:nvSpPr>
+        <p:spPr>
+          <a:xfrm>
+            <a:off x="7962900" y="5676900"/>
+            <a:ext cx="2857500" cy="209550"/>
+          </a:xfrm>
+          <a:prstGeom prst="rect">
+            <a:avLst/>
+          </a:prstGeom>
+          <a:noFill/>
+        </p:spPr>
+        <p:txBody>
+          <a:bodyPr wrap="none" lIns="0" rIns="0" tIns="0" bIns="0" anchor="ctr">
+            <a:spAutoFit/>
+          </a:bodyPr>
+          <a:lstStyle/>
+          <a:p>
+            <a:pPr algn="r"/>
+            <a:r>
+              <a:rPr sz="1050" b="0">
+                <a:solidFill>
+                  <a:srgbClr val="6A717B"/>
+                </a:solidFill>
+                <a:latin typeface="Yu Gothic UI"/>
+              </a:rPr>
+              <a:t>寸法で選ぶ　sunpou.nexeed-lab.com</a:t>
+            </a:r>
+          </a:p>
+        </p:txBody>
+      </p:sp>
+    </p:spTree>
+  </p:cSld>
+  <p:clrMapOvr>
+    <a:masterClrMapping/>
+  </p:clrMapOvr>
+</p:sld>
+</file>
+
+<file path=ppt/slides/slide11.xml><?xml version="1.0" encoding="utf-8"?>
+<p:sld xmlns:a="http://schemas.openxmlformats.org/drawingml/2006/main" xmlns:p="http://schemas.openxmlformats.org/presentationml/2006/main" xmlns:r="http://schemas.openxmlformats.org/officeDocument/2006/relationships">
+  <p:cSld>
+    <p:spTree>
+      <p:nvGrpSpPr>
+        <p:cNvPr id="1" name=""/>
+        <p:cNvGrpSpPr/>
+        <p:nvPr/>
+      </p:nvGrpSpPr>
+      <p:grpSpPr/>
+      <p:sp>
+        <p:nvSpPr>
+          <p:cNvPr id="2" name="Rectangle 1"/>
+          <p:cNvSpPr/>
+          <p:nvPr/>
+        </p:nvSpPr>
+        <p:spPr>
+          <a:xfrm>
+            <a:off x="0" y="0"/>
+            <a:ext cx="11430000" cy="6000750"/>
+          </a:xfrm>
+          <a:prstGeom prst="rect">
+            <a:avLst/>
+          </a:prstGeom>
+          <a:solidFill>
+            <a:srgbClr val="FCFCFC"/>
+          </a:solidFill>
+          <a:ln>
+            <a:noFill/>
+          </a:ln>
+          <a:effectLst/>
+        </p:spPr>
+        <p:txBody>
+          <a:bodyPr rtlCol="0" anchor="ctr"/>
+          <a:lstStyle/>
+          <a:p>
+            <a:pPr algn="ctr"/>
+          </a:p>
+        </p:txBody>
+      </p:sp>
+      <p:sp>
+        <p:nvSpPr>
+          <p:cNvPr id="3" name="Rectangle 2"/>
+          <p:cNvSpPr/>
+          <p:nvPr/>
+        </p:nvSpPr>
+        <p:spPr>
+          <a:xfrm>
+            <a:off x="0" y="0"/>
+            <a:ext cx="114300" cy="6000750"/>
+          </a:xfrm>
+          <a:prstGeom prst="rect">
+            <a:avLst/>
+          </a:prstGeom>
+          <a:solidFill>
+            <a:srgbClr val="014172"/>
+          </a:solidFill>
+          <a:ln>
+            <a:noFill/>
+          </a:ln>
+          <a:effectLst/>
+        </p:spPr>
+        <p:txBody>
+          <a:bodyPr rtlCol="0" anchor="ctr"/>
+          <a:lstStyle/>
+          <a:p>
+            <a:pPr algn="ctr"/>
+          </a:p>
+        </p:txBody>
+      </p:sp>
+      <p:sp>
+        <p:nvSpPr>
+          <p:cNvPr id="4" name="Rectangle 3"/>
+          <p:cNvSpPr/>
+          <p:nvPr/>
+        </p:nvSpPr>
+        <p:spPr>
+          <a:xfrm>
+            <a:off x="0" y="0"/>
+            <a:ext cx="11430000" cy="1504950"/>
+          </a:xfrm>
+          <a:prstGeom prst="rect">
+            <a:avLst/>
+          </a:prstGeom>
+          <a:solidFill>
+            <a:srgbClr val="014172"/>
+          </a:solidFill>
+          <a:ln>
+            <a:noFill/>
+          </a:ln>
+          <a:effectLst/>
+        </p:spPr>
+        <p:txBody>
+          <a:bodyPr rtlCol="0" anchor="ctr"/>
+          <a:lstStyle/>
+          <a:p>
+            <a:pPr algn="ctr"/>
+          </a:p>
+        </p:txBody>
+      </p:sp>
+      <p:sp>
+        <p:nvSpPr>
+          <p:cNvPr id="5" name="TextBox 4"/>
+          <p:cNvSpPr txBox="1"/>
+          <p:nvPr/>
+        </p:nvSpPr>
+        <p:spPr>
+          <a:xfrm>
+            <a:off x="609600" y="361950"/>
+            <a:ext cx="7429500" cy="476250"/>
+          </a:xfrm>
+          <a:prstGeom prst="rect">
+            <a:avLst/>
+          </a:prstGeom>
+          <a:noFill/>
+        </p:spPr>
+        <p:txBody>
+          <a:bodyPr wrap="none" lIns="0" rIns="0" tIns="0" bIns="0" anchor="ctr">
+            <a:spAutoFit/>
+          </a:bodyPr>
+          <a:lstStyle/>
+          <a:p>
+            <a:pPr algn="l"/>
+            <a:r>
+              <a:rPr sz="3000" b="1">
+                <a:solidFill>
+                  <a:srgbClr val="FFFFFF"/>
+                </a:solidFill>
+                <a:latin typeface="Yu Gothic UI"/>
+              </a:rPr>
+              <a:t>同じ「9号まで」でも幅が違う</a:t>
+            </a:r>
+          </a:p>
+        </p:txBody>
+      </p:sp>
+      <p:sp>
+        <p:nvSpPr>
+          <p:cNvPr id="6" name="TextBox 5"/>
+          <p:cNvSpPr txBox="1"/>
+          <p:nvPr/>
+        </p:nvSpPr>
+        <p:spPr>
+          <a:xfrm>
+            <a:off x="609600" y="876300"/>
+            <a:ext cx="7429500" cy="247650"/>
+          </a:xfrm>
+          <a:prstGeom prst="rect">
+            <a:avLst/>
+          </a:prstGeom>
+          <a:noFill/>
+        </p:spPr>
+        <p:txBody>
+          <a:bodyPr wrap="none" lIns="0" rIns="0" tIns="0" bIns="0" anchor="ctr">
+            <a:spAutoFit/>
+          </a:bodyPr>
+          <a:lstStyle/>
+          <a:p>
+            <a:pPr algn="l"/>
+            <a:r>
+              <a:rPr sz="1425" b="0">
+                <a:solidFill>
+                  <a:srgbClr val="DAE7F2"/>
+                </a:solidFill>
+                <a:latin typeface="Yu Gothic UI"/>
+              </a:rPr>
+              <a:t>横棒は本体幅。破線は9号土鍋でいちばん幅のある墨貫入（32.5cm）</a:t>
+            </a:r>
+          </a:p>
+        </p:txBody>
+      </p:sp>
+      <p:sp>
+        <p:nvSpPr>
+          <p:cNvPr id="7" name="Rounded Rectangle 6"/>
+          <p:cNvSpPr/>
+          <p:nvPr/>
+        </p:nvSpPr>
+        <p:spPr>
+          <a:xfrm>
+            <a:off x="8305800" y="247650"/>
+            <a:ext cx="2514600" cy="1009650"/>
+          </a:xfrm>
+          <a:prstGeom prst="roundRect">
+            <a:avLst>
+              <a:gd name="adj" fmla="val 12000"/>
+            </a:avLst>
+          </a:prstGeom>
+          <a:solidFill>
+            <a:srgbClr val="FFFFFF"/>
+          </a:solidFill>
+          <a:ln>
+            <a:noFill/>
+          </a:ln>
+          <a:effectLst>
+            <a:outerShdw blurRad="254000" dist="63500" dir="5400000" rotWithShape="0">
+              <a:srgbClr val="0B2B45">
+                <a:alpha val="30000"/>
+              </a:srgbClr>
+            </a:outerShdw>
+          </a:effectLst>
+        </p:spPr>
+        <p:txBody>
+          <a:bodyPr rtlCol="0" anchor="ctr"/>
+          <a:lstStyle/>
+          <a:p>
+            <a:pPr algn="ctr"/>
+          </a:p>
+        </p:txBody>
+      </p:sp>
+      <p:sp>
+        <p:nvSpPr>
+          <p:cNvPr id="8" name="TextBox 7"/>
+          <p:cNvSpPr txBox="1"/>
+          <p:nvPr/>
+        </p:nvSpPr>
+        <p:spPr>
+          <a:xfrm>
+            <a:off x="8515350" y="400050"/>
+            <a:ext cx="2133600" cy="209550"/>
+          </a:xfrm>
+          <a:prstGeom prst="rect">
+            <a:avLst/>
+          </a:prstGeom>
+          <a:noFill/>
+        </p:spPr>
+        <p:txBody>
+          <a:bodyPr wrap="none" lIns="0" rIns="0" tIns="0" bIns="0" anchor="ctr">
+            <a:spAutoFit/>
+          </a:bodyPr>
+          <a:lstStyle/>
+          <a:p>
+            <a:pPr algn="l"/>
+            <a:r>
+              <a:rPr sz="1125" b="0">
+                <a:solidFill>
+                  <a:srgbClr val="6A717B"/>
+                </a:solidFill>
+                <a:latin typeface="Yu Gothic UI"/>
+              </a:rPr>
+              <a:t>土鍋との差は最大</a:t>
+            </a:r>
+          </a:p>
+        </p:txBody>
+      </p:sp>
+      <p:sp>
+        <p:nvSpPr>
+          <p:cNvPr id="9" name="TextBox 8"/>
+          <p:cNvSpPr txBox="1"/>
+          <p:nvPr/>
+        </p:nvSpPr>
+        <p:spPr>
+          <a:xfrm>
+            <a:off x="8515350" y="647700"/>
+            <a:ext cx="2133600" cy="533400"/>
+          </a:xfrm>
+          <a:prstGeom prst="rect">
+            <a:avLst/>
+          </a:prstGeom>
+          <a:noFill/>
+        </p:spPr>
+        <p:txBody>
+          <a:bodyPr wrap="none" lIns="0" rIns="0" tIns="0" bIns="0" anchor="ctr">
+            <a:spAutoFit/>
+          </a:bodyPr>
+          <a:lstStyle/>
+          <a:p>
+            <a:pPr algn="l"/>
+            <a:r>
+              <a:rPr sz="3900" b="1">
+                <a:solidFill>
+                  <a:srgbClr val="014172"/>
+                </a:solidFill>
+                <a:latin typeface="Yu Gothic UI"/>
+              </a:rPr>
+              <a:t>6.6</a:t>
+            </a:r>
+            <a:r>
+              <a:rPr sz="1950" b="1">
+                <a:solidFill>
+                  <a:srgbClr val="014172"/>
+                </a:solidFill>
+                <a:latin typeface="Yu Gothic UI"/>
+              </a:rPr>
+              <a:t>cm</a:t>
+            </a:r>
+          </a:p>
+        </p:txBody>
+      </p:sp>
+      <p:sp>
+        <p:nvSpPr>
+          <p:cNvPr id="10" name="Rectangle 9"/>
+          <p:cNvSpPr/>
+          <p:nvPr/>
+        </p:nvSpPr>
+        <p:spPr>
+          <a:xfrm>
+            <a:off x="495300" y="1676400"/>
+            <a:ext cx="10439400" cy="400050"/>
+          </a:xfrm>
+          <a:prstGeom prst="rect">
+            <a:avLst/>
+          </a:prstGeom>
+          <a:solidFill>
+            <a:srgbClr val="F2F5F8"/>
+          </a:solidFill>
+          <a:ln>
+            <a:noFill/>
+          </a:ln>
+          <a:effectLst/>
+        </p:spPr>
+        <p:txBody>
+          <a:bodyPr rtlCol="0" anchor="ctr"/>
+          <a:lstStyle/>
+          <a:p>
+            <a:pPr algn="ctr"/>
+          </a:p>
+        </p:txBody>
+      </p:sp>
+      <p:sp>
+        <p:nvSpPr>
+          <p:cNvPr id="11" name="Rectangle 10"/>
+          <p:cNvSpPr/>
+          <p:nvPr/>
+        </p:nvSpPr>
+        <p:spPr>
+          <a:xfrm>
+            <a:off x="495300" y="2152650"/>
+            <a:ext cx="10439400" cy="400050"/>
+          </a:xfrm>
+          <a:prstGeom prst="rect">
+            <a:avLst/>
+          </a:prstGeom>
+          <a:solidFill>
+            <a:srgbClr val="FCFCFC"/>
+          </a:solidFill>
+          <a:ln>
+            <a:noFill/>
+          </a:ln>
+          <a:effectLst/>
+        </p:spPr>
+        <p:txBody>
+          <a:bodyPr rtlCol="0" anchor="ctr"/>
+          <a:lstStyle/>
+          <a:p>
+            <a:pPr algn="ctr"/>
+          </a:p>
+        </p:txBody>
+      </p:sp>
+      <p:sp>
+        <p:nvSpPr>
+          <p:cNvPr id="12" name="Rectangle 11"/>
+          <p:cNvSpPr/>
+          <p:nvPr/>
+        </p:nvSpPr>
+        <p:spPr>
+          <a:xfrm>
+            <a:off x="495300" y="2628900"/>
+            <a:ext cx="10439400" cy="400050"/>
+          </a:xfrm>
+          <a:prstGeom prst="rect">
+            <a:avLst/>
+          </a:prstGeom>
+          <a:solidFill>
+            <a:srgbClr val="F2F5F8"/>
+          </a:solidFill>
+          <a:ln>
+            <a:noFill/>
+          </a:ln>
+          <a:effectLst/>
+        </p:spPr>
+        <p:txBody>
+          <a:bodyPr rtlCol="0" anchor="ctr"/>
+          <a:lstStyle/>
+          <a:p>
+            <a:pPr algn="ctr"/>
+          </a:p>
+        </p:txBody>
+      </p:sp>
+      <p:sp>
+        <p:nvSpPr>
+          <p:cNvPr id="13" name="Rectangle 12"/>
+          <p:cNvSpPr/>
+          <p:nvPr/>
+        </p:nvSpPr>
+        <p:spPr>
+          <a:xfrm>
+            <a:off x="495300" y="3105150"/>
+            <a:ext cx="10439400" cy="400050"/>
+          </a:xfrm>
+          <a:prstGeom prst="rect">
+            <a:avLst/>
+          </a:prstGeom>
+          <a:solidFill>
+            <a:srgbClr val="FCFCFC"/>
+          </a:solidFill>
+          <a:ln>
+            <a:noFill/>
+          </a:ln>
+          <a:effectLst/>
+        </p:spPr>
+        <p:txBody>
+          <a:bodyPr rtlCol="0" anchor="ctr"/>
+          <a:lstStyle/>
+          <a:p>
+            <a:pPr algn="ctr"/>
+          </a:p>
+        </p:txBody>
+      </p:sp>
+      <p:sp>
+        <p:nvSpPr>
+          <p:cNvPr id="14" name="Rectangle 13"/>
+          <p:cNvSpPr/>
+          <p:nvPr/>
+        </p:nvSpPr>
+        <p:spPr>
+          <a:xfrm>
+            <a:off x="495300" y="3581400"/>
+            <a:ext cx="10439400" cy="400050"/>
+          </a:xfrm>
+          <a:prstGeom prst="rect">
+            <a:avLst/>
+          </a:prstGeom>
+          <a:solidFill>
+            <a:srgbClr val="F2F5F8"/>
+          </a:solidFill>
+          <a:ln>
+            <a:noFill/>
+          </a:ln>
+          <a:effectLst/>
+        </p:spPr>
+        <p:txBody>
+          <a:bodyPr rtlCol="0" anchor="ctr"/>
+          <a:lstStyle/>
+          <a:p>
+            <a:pPr algn="ctr"/>
+          </a:p>
+        </p:txBody>
+      </p:sp>
+      <p:sp>
+        <p:nvSpPr>
+          <p:cNvPr id="15" name="Rectangle 14"/>
+          <p:cNvSpPr/>
+          <p:nvPr/>
+        </p:nvSpPr>
+        <p:spPr>
+          <a:xfrm>
+            <a:off x="495300" y="4057650"/>
+            <a:ext cx="10439400" cy="400050"/>
+          </a:xfrm>
+          <a:prstGeom prst="rect">
+            <a:avLst/>
+          </a:prstGeom>
+          <a:solidFill>
+            <a:srgbClr val="FCFCFC"/>
+          </a:solidFill>
+          <a:ln>
+            <a:noFill/>
+          </a:ln>
+          <a:effectLst/>
+        </p:spPr>
+        <p:txBody>
+          <a:bodyPr rtlCol="0" anchor="ctr"/>
+          <a:lstStyle/>
+          <a:p>
+            <a:pPr algn="ctr"/>
+          </a:p>
+        </p:txBody>
+      </p:sp>
+      <p:sp>
+        <p:nvSpPr>
+          <p:cNvPr id="16" name="Rectangle 15"/>
+          <p:cNvSpPr/>
+          <p:nvPr/>
+        </p:nvSpPr>
+        <p:spPr>
+          <a:xfrm>
+            <a:off x="495300" y="4533900"/>
+            <a:ext cx="10439400" cy="400050"/>
+          </a:xfrm>
+          <a:prstGeom prst="rect">
+            <a:avLst/>
+          </a:prstGeom>
+          <a:solidFill>
+            <a:srgbClr val="E6EEF6"/>
+          </a:solidFill>
+          <a:ln>
+            <a:noFill/>
+          </a:ln>
+          <a:effectLst/>
+        </p:spPr>
+        <p:txBody>
+          <a:bodyPr rtlCol="0" anchor="ctr"/>
+          <a:lstStyle/>
+          <a:p>
+            <a:pPr algn="ctr"/>
+          </a:p>
+        </p:txBody>
+      </p:sp>
+      <p:sp>
+        <p:nvSpPr>
+          <p:cNvPr id="17" name="Rectangle 16"/>
+          <p:cNvSpPr/>
+          <p:nvPr/>
+        </p:nvSpPr>
+        <p:spPr>
+          <a:xfrm>
+            <a:off x="495300" y="4533900"/>
+            <a:ext cx="47625" cy="400050"/>
+          </a:xfrm>
+          <a:prstGeom prst="rect">
+            <a:avLst/>
+          </a:prstGeom>
+          <a:solidFill>
+            <a:srgbClr val="014172"/>
+          </a:solidFill>
+          <a:ln>
+            <a:noFill/>
+          </a:ln>
+          <a:effectLst/>
+        </p:spPr>
+        <p:txBody>
+          <a:bodyPr rtlCol="0" anchor="ctr"/>
+          <a:lstStyle/>
+          <a:p>
+            <a:pPr algn="ctr"/>
+          </a:p>
+        </p:txBody>
+      </p:sp>
+      <p:sp>
+        <p:nvSpPr>
+          <p:cNvPr id="18" name="Rounded Rectangle 17"/>
+          <p:cNvSpPr/>
+          <p:nvPr/>
+        </p:nvSpPr>
+        <p:spPr>
+          <a:xfrm>
+            <a:off x="3143250" y="1752600"/>
+            <a:ext cx="5373624" cy="247650"/>
+          </a:xfrm>
+          <a:prstGeom prst="roundRect">
+            <a:avLst>
+              <a:gd name="adj" fmla="val 30000"/>
+            </a:avLst>
+          </a:prstGeom>
+          <a:gradFill rotWithShape="1">
+            <a:gsLst>
+              <a:gs pos="0">
+                <a:srgbClr val="EEF4F9"/>
+              </a:gs>
+              <a:gs pos="100000">
+                <a:srgbClr val="DAE7F2"/>
+              </a:gs>
+            </a:gsLst>
+            <a:lin scaled="0" ang="16200000"/>
+          </a:gradFill>
+          <a:ln w="19050">
+            <a:solidFill>
+              <a:srgbClr val="014172"/>
+            </a:solidFill>
+          </a:ln>
+          <a:effectLst/>
+        </p:spPr>
+        <p:txBody>
+          <a:bodyPr rtlCol="0" anchor="ctr"/>
+          <a:lstStyle/>
+          <a:p>
+            <a:pPr algn="ctr"/>
+          </a:p>
+        </p:txBody>
+      </p:sp>
+      <p:sp>
+        <p:nvSpPr>
+          <p:cNvPr id="19" name="TextBox 18"/>
+          <p:cNvSpPr txBox="1"/>
+          <p:nvPr/>
+        </p:nvSpPr>
+        <p:spPr>
+          <a:xfrm>
+            <a:off x="704850" y="1752600"/>
+            <a:ext cx="2381250" cy="247650"/>
+          </a:xfrm>
+          <a:prstGeom prst="rect">
+            <a:avLst/>
+          </a:prstGeom>
+          <a:noFill/>
+        </p:spPr>
+        <p:txBody>
+          <a:bodyPr wrap="none" lIns="0" rIns="0" tIns="0" bIns="0" anchor="ctr">
+            <a:spAutoFit/>
+          </a:bodyPr>
+          <a:lstStyle/>
+          <a:p>
+            <a:pPr algn="l"/>
+            <a:r>
+              <a:rPr sz="1125" b="1">
+                <a:solidFill>
+                  <a:srgbClr val="2E2E33"/>
+                </a:solidFill>
+                <a:latin typeface="Yu Gothic UI"/>
+              </a:rPr>
+              <a:t>スリム</a:t>
+            </a:r>
+          </a:p>
+        </p:txBody>
+      </p:sp>
+      <p:sp>
+        <p:nvSpPr>
+          <p:cNvPr id="20" name="TextBox 19"/>
+          <p:cNvSpPr txBox="1"/>
+          <p:nvPr/>
+        </p:nvSpPr>
+        <p:spPr>
+          <a:xfrm>
+            <a:off x="8631174" y="1752600"/>
+            <a:ext cx="1047750" cy="247650"/>
+          </a:xfrm>
+          <a:prstGeom prst="rect">
+            <a:avLst/>
+          </a:prstGeom>
+          <a:noFill/>
+        </p:spPr>
+        <p:txBody>
+          <a:bodyPr wrap="none" lIns="0" rIns="0" tIns="0" bIns="0" anchor="ctr">
+            <a:spAutoFit/>
+          </a:bodyPr>
+          <a:lstStyle/>
+          <a:p>
+            <a:pPr algn="l"/>
+            <a:r>
+              <a:rPr sz="1200" b="1">
+                <a:solidFill>
+                  <a:srgbClr val="014172"/>
+                </a:solidFill>
+                <a:latin typeface="Yu Gothic UI"/>
+              </a:rPr>
+              <a:t>32.8cm</a:t>
+            </a:r>
+          </a:p>
+        </p:txBody>
+      </p:sp>
+      <p:sp>
+        <p:nvSpPr>
+          <p:cNvPr id="21" name="Rounded Rectangle 20"/>
+          <p:cNvSpPr/>
+          <p:nvPr/>
+        </p:nvSpPr>
+        <p:spPr>
+          <a:xfrm>
+            <a:off x="3143250" y="2228850"/>
+            <a:ext cx="5471922" cy="247650"/>
+          </a:xfrm>
+          <a:prstGeom prst="roundRect">
+            <a:avLst>
+              <a:gd name="adj" fmla="val 30000"/>
+            </a:avLst>
+          </a:prstGeom>
+          <a:gradFill rotWithShape="1">
+            <a:gsLst>
+              <a:gs pos="0">
+                <a:srgbClr val="EEF4F9"/>
+              </a:gs>
+              <a:gs pos="100000">
+                <a:srgbClr val="DAE7F2"/>
+              </a:gs>
+            </a:gsLst>
+            <a:lin scaled="0" ang="16200000"/>
+          </a:gradFill>
+          <a:ln w="19050">
+            <a:solidFill>
+              <a:srgbClr val="014172"/>
+            </a:solidFill>
+          </a:ln>
+          <a:effectLst/>
+        </p:spPr>
+        <p:txBody>
+          <a:bodyPr rtlCol="0" anchor="ctr"/>
+          <a:lstStyle/>
+          <a:p>
+            <a:pPr algn="ctr"/>
+          </a:p>
+        </p:txBody>
+      </p:sp>
+      <p:sp>
+        <p:nvSpPr>
+          <p:cNvPr id="22" name="TextBox 21"/>
+          <p:cNvSpPr txBox="1"/>
+          <p:nvPr/>
+        </p:nvSpPr>
+        <p:spPr>
+          <a:xfrm>
+            <a:off x="704850" y="2228850"/>
+            <a:ext cx="2381250" cy="247650"/>
+          </a:xfrm>
+          <a:prstGeom prst="rect">
+            <a:avLst/>
+          </a:prstGeom>
+          <a:noFill/>
+        </p:spPr>
+        <p:txBody>
+          <a:bodyPr wrap="none" lIns="0" rIns="0" tIns="0" bIns="0" anchor="ctr">
+            <a:spAutoFit/>
+          </a:bodyPr>
+          <a:lstStyle/>
+          <a:p>
+            <a:pPr algn="l"/>
+            <a:r>
+              <a:rPr sz="1125" b="1">
+                <a:solidFill>
+                  <a:srgbClr val="2E2E33"/>
+                </a:solidFill>
+                <a:latin typeface="Yu Gothic UI"/>
+              </a:rPr>
+              <a:t>スマート／ウィンドシールド</a:t>
+            </a:r>
+          </a:p>
+        </p:txBody>
+      </p:sp>
+      <p:sp>
+        <p:nvSpPr>
+          <p:cNvPr id="23" name="TextBox 22"/>
+          <p:cNvSpPr txBox="1"/>
+          <p:nvPr/>
+        </p:nvSpPr>
+        <p:spPr>
+          <a:xfrm>
+            <a:off x="8729472" y="2228850"/>
+            <a:ext cx="1047750" cy="247650"/>
+          </a:xfrm>
+          <a:prstGeom prst="rect">
+            <a:avLst/>
+          </a:prstGeom>
+          <a:noFill/>
+        </p:spPr>
+        <p:txBody>
+          <a:bodyPr wrap="none" lIns="0" rIns="0" tIns="0" bIns="0" anchor="ctr">
+            <a:spAutoFit/>
+          </a:bodyPr>
+          <a:lstStyle/>
+          <a:p>
+            <a:pPr algn="l"/>
+            <a:r>
+              <a:rPr sz="1200" b="1">
+                <a:solidFill>
+                  <a:srgbClr val="014172"/>
+                </a:solidFill>
+                <a:latin typeface="Yu Gothic UI"/>
+              </a:rPr>
+              <a:t>33.4cm</a:t>
+            </a:r>
+          </a:p>
+        </p:txBody>
+      </p:sp>
+      <p:sp>
+        <p:nvSpPr>
+          <p:cNvPr id="24" name="Rounded Rectangle 23"/>
+          <p:cNvSpPr/>
+          <p:nvPr/>
+        </p:nvSpPr>
+        <p:spPr>
+          <a:xfrm>
+            <a:off x="3143250" y="2705100"/>
+            <a:ext cx="5488305" cy="247650"/>
+          </a:xfrm>
+          <a:prstGeom prst="roundRect">
+            <a:avLst>
+              <a:gd name="adj" fmla="val 30000"/>
+            </a:avLst>
+          </a:prstGeom>
+          <a:gradFill rotWithShape="1">
+            <a:gsLst>
+              <a:gs pos="0">
+                <a:srgbClr val="EEF4F9"/>
+              </a:gs>
+              <a:gs pos="100000">
+                <a:srgbClr val="DAE7F2"/>
+              </a:gs>
+            </a:gsLst>
+            <a:lin scaled="0" ang="16200000"/>
+          </a:gradFill>
+          <a:ln w="19050">
+            <a:solidFill>
+              <a:srgbClr val="014172"/>
+            </a:solidFill>
+          </a:ln>
+          <a:effectLst/>
+        </p:spPr>
+        <p:txBody>
+          <a:bodyPr rtlCol="0" anchor="ctr"/>
+          <a:lstStyle/>
+          <a:p>
+            <a:pPr algn="ctr"/>
+          </a:p>
+        </p:txBody>
+      </p:sp>
+      <p:sp>
+        <p:nvSpPr>
+          <p:cNvPr id="25" name="TextBox 24"/>
+          <p:cNvSpPr txBox="1"/>
+          <p:nvPr/>
+        </p:nvSpPr>
+        <p:spPr>
+          <a:xfrm>
+            <a:off x="704850" y="2705100"/>
+            <a:ext cx="2381250" cy="247650"/>
+          </a:xfrm>
+          <a:prstGeom prst="rect">
+            <a:avLst/>
+          </a:prstGeom>
+          <a:noFill/>
+        </p:spPr>
+        <p:txBody>
+          <a:bodyPr wrap="none" lIns="0" rIns="0" tIns="0" bIns="0" anchor="ctr">
+            <a:spAutoFit/>
+          </a:bodyPr>
+          <a:lstStyle/>
+          <a:p>
+            <a:pPr algn="l"/>
+            <a:r>
+              <a:rPr sz="1125" b="1">
+                <a:solidFill>
+                  <a:srgbClr val="2E2E33"/>
+                </a:solidFill>
+                <a:latin typeface="Yu Gothic UI"/>
+              </a:rPr>
+              <a:t>達人スリムV／達人スリムβ</a:t>
+            </a:r>
+          </a:p>
+        </p:txBody>
+      </p:sp>
+      <p:sp>
+        <p:nvSpPr>
+          <p:cNvPr id="26" name="TextBox 25"/>
+          <p:cNvSpPr txBox="1"/>
+          <p:nvPr/>
+        </p:nvSpPr>
+        <p:spPr>
+          <a:xfrm>
+            <a:off x="8745855" y="2705100"/>
+            <a:ext cx="1047750" cy="247650"/>
+          </a:xfrm>
+          <a:prstGeom prst="rect">
+            <a:avLst/>
+          </a:prstGeom>
+          <a:noFill/>
+        </p:spPr>
+        <p:txBody>
+          <a:bodyPr wrap="none" lIns="0" rIns="0" tIns="0" bIns="0" anchor="ctr">
+            <a:spAutoFit/>
+          </a:bodyPr>
+          <a:lstStyle/>
+          <a:p>
+            <a:pPr algn="l"/>
+            <a:r>
+              <a:rPr sz="1200" b="1">
+                <a:solidFill>
+                  <a:srgbClr val="014172"/>
+                </a:solidFill>
+                <a:latin typeface="Yu Gothic UI"/>
+              </a:rPr>
+              <a:t>33.5cm</a:t>
+            </a:r>
+          </a:p>
+        </p:txBody>
+      </p:sp>
+      <p:sp>
+        <p:nvSpPr>
+          <p:cNvPr id="27" name="Rounded Rectangle 26"/>
+          <p:cNvSpPr/>
+          <p:nvPr/>
+        </p:nvSpPr>
+        <p:spPr>
+          <a:xfrm>
+            <a:off x="3143250" y="3181350"/>
+            <a:ext cx="5521071" cy="247650"/>
+          </a:xfrm>
+          <a:prstGeom prst="roundRect">
+            <a:avLst>
+              <a:gd name="adj" fmla="val 30000"/>
+            </a:avLst>
+          </a:prstGeom>
+          <a:gradFill rotWithShape="1">
+            <a:gsLst>
+              <a:gs pos="0">
+                <a:srgbClr val="EEF4F9"/>
+              </a:gs>
+              <a:gs pos="100000">
+                <a:srgbClr val="DAE7F2"/>
+              </a:gs>
+            </a:gsLst>
+            <a:lin scaled="0" ang="16200000"/>
+          </a:gradFill>
+          <a:ln w="19050">
+            <a:solidFill>
+              <a:srgbClr val="014172"/>
+            </a:solidFill>
+          </a:ln>
+          <a:effectLst/>
+        </p:spPr>
+        <p:txBody>
+          <a:bodyPr rtlCol="0" anchor="ctr"/>
+          <a:lstStyle/>
+          <a:p>
+            <a:pPr algn="ctr"/>
+          </a:p>
+        </p:txBody>
+      </p:sp>
+      <p:sp>
+        <p:nvSpPr>
+          <p:cNvPr id="28" name="TextBox 27"/>
+          <p:cNvSpPr txBox="1"/>
+          <p:nvPr/>
+        </p:nvSpPr>
+        <p:spPr>
+          <a:xfrm>
+            <a:off x="704850" y="3181350"/>
+            <a:ext cx="2381250" cy="247650"/>
+          </a:xfrm>
+          <a:prstGeom prst="rect">
+            <a:avLst/>
+          </a:prstGeom>
+          <a:noFill/>
+        </p:spPr>
+        <p:txBody>
+          <a:bodyPr wrap="none" lIns="0" rIns="0" tIns="0" bIns="0" anchor="ctr">
+            <a:spAutoFit/>
+          </a:bodyPr>
+          <a:lstStyle/>
+          <a:p>
+            <a:pPr algn="l"/>
+            <a:r>
+              <a:rPr sz="1125" b="1">
+                <a:solidFill>
+                  <a:srgbClr val="2E2E33"/>
+                </a:solidFill>
+                <a:latin typeface="Yu Gothic UI"/>
+              </a:rPr>
+              <a:t>BO</a:t>
+            </a:r>
+          </a:p>
+        </p:txBody>
+      </p:sp>
+      <p:sp>
+        <p:nvSpPr>
+          <p:cNvPr id="29" name="TextBox 28"/>
+          <p:cNvSpPr txBox="1"/>
+          <p:nvPr/>
+        </p:nvSpPr>
+        <p:spPr>
+          <a:xfrm>
+            <a:off x="8778621" y="3181350"/>
+            <a:ext cx="1047750" cy="247650"/>
+          </a:xfrm>
+          <a:prstGeom prst="rect">
+            <a:avLst/>
+          </a:prstGeom>
+          <a:noFill/>
+        </p:spPr>
+        <p:txBody>
+          <a:bodyPr wrap="none" lIns="0" rIns="0" tIns="0" bIns="0" anchor="ctr">
+            <a:spAutoFit/>
+          </a:bodyPr>
+          <a:lstStyle/>
+          <a:p>
+            <a:pPr algn="l"/>
+            <a:r>
+              <a:rPr sz="1200" b="1">
+                <a:solidFill>
+                  <a:srgbClr val="014172"/>
+                </a:solidFill>
+                <a:latin typeface="Yu Gothic UI"/>
+              </a:rPr>
+              <a:t>33.7cm</a:t>
+            </a:r>
+          </a:p>
+        </p:txBody>
+      </p:sp>
+      <p:sp>
+        <p:nvSpPr>
+          <p:cNvPr id="30" name="Rounded Rectangle 29"/>
+          <p:cNvSpPr/>
+          <p:nvPr/>
+        </p:nvSpPr>
+        <p:spPr>
+          <a:xfrm>
+            <a:off x="3143250" y="3657600"/>
+            <a:ext cx="5815965" cy="247650"/>
+          </a:xfrm>
+          <a:prstGeom prst="roundRect">
+            <a:avLst>
+              <a:gd name="adj" fmla="val 30000"/>
+            </a:avLst>
+          </a:prstGeom>
+          <a:gradFill rotWithShape="1">
+            <a:gsLst>
+              <a:gs pos="0">
+                <a:srgbClr val="EEF4F9"/>
+              </a:gs>
+              <a:gs pos="100000">
+                <a:srgbClr val="DAE7F2"/>
+              </a:gs>
+            </a:gsLst>
+            <a:lin scaled="0" ang="16200000"/>
+          </a:gradFill>
+          <a:ln w="19050">
+            <a:solidFill>
+              <a:srgbClr val="014172"/>
+            </a:solidFill>
+          </a:ln>
+          <a:effectLst/>
+        </p:spPr>
+        <p:txBody>
+          <a:bodyPr rtlCol="0" anchor="ctr"/>
+          <a:lstStyle/>
+          <a:p>
+            <a:pPr algn="ctr"/>
+          </a:p>
+        </p:txBody>
+      </p:sp>
+      <p:sp>
+        <p:nvSpPr>
+          <p:cNvPr id="31" name="TextBox 30"/>
+          <p:cNvSpPr txBox="1"/>
+          <p:nvPr/>
+        </p:nvSpPr>
+        <p:spPr>
+          <a:xfrm>
+            <a:off x="704850" y="3657600"/>
+            <a:ext cx="2381250" cy="247650"/>
+          </a:xfrm>
+          <a:prstGeom prst="rect">
+            <a:avLst/>
+          </a:prstGeom>
+          <a:noFill/>
+        </p:spPr>
+        <p:txBody>
+          <a:bodyPr wrap="none" lIns="0" rIns="0" tIns="0" bIns="0" anchor="ctr">
+            <a:spAutoFit/>
+          </a:bodyPr>
+          <a:lstStyle/>
+          <a:p>
+            <a:pPr algn="l"/>
+            <a:r>
+              <a:rPr sz="1125" b="1">
+                <a:solidFill>
+                  <a:srgbClr val="2E2E33"/>
+                </a:solidFill>
+                <a:latin typeface="Yu Gothic UI"/>
+              </a:rPr>
+              <a:t>アモルフォプレミアム</a:t>
+            </a:r>
+          </a:p>
+        </p:txBody>
+      </p:sp>
+      <p:sp>
+        <p:nvSpPr>
+          <p:cNvPr id="32" name="TextBox 31"/>
+          <p:cNvSpPr txBox="1"/>
+          <p:nvPr/>
+        </p:nvSpPr>
+        <p:spPr>
+          <a:xfrm>
+            <a:off x="9073515" y="3657600"/>
+            <a:ext cx="1047750" cy="247650"/>
+          </a:xfrm>
+          <a:prstGeom prst="rect">
+            <a:avLst/>
+          </a:prstGeom>
+          <a:noFill/>
+        </p:spPr>
+        <p:txBody>
+          <a:bodyPr wrap="none" lIns="0" rIns="0" tIns="0" bIns="0" anchor="ctr">
+            <a:spAutoFit/>
+          </a:bodyPr>
+          <a:lstStyle/>
+          <a:p>
+            <a:pPr algn="l"/>
+            <a:r>
+              <a:rPr sz="1200" b="1">
+                <a:solidFill>
+                  <a:srgbClr val="014172"/>
+                </a:solidFill>
+                <a:latin typeface="Yu Gothic UI"/>
+              </a:rPr>
+              <a:t>35.5cm</a:t>
+            </a:r>
+          </a:p>
+        </p:txBody>
+      </p:sp>
+      <p:sp>
+        <p:nvSpPr>
+          <p:cNvPr id="33" name="Rounded Rectangle 32"/>
+          <p:cNvSpPr/>
+          <p:nvPr/>
+        </p:nvSpPr>
+        <p:spPr>
+          <a:xfrm>
+            <a:off x="3143250" y="4133850"/>
+            <a:ext cx="5873306" cy="247650"/>
+          </a:xfrm>
+          <a:prstGeom prst="roundRect">
+            <a:avLst>
+              <a:gd name="adj" fmla="val 30000"/>
+            </a:avLst>
+          </a:prstGeom>
+          <a:gradFill rotWithShape="1">
+            <a:gsLst>
+              <a:gs pos="0">
+                <a:srgbClr val="EEF4F9"/>
+              </a:gs>
+              <a:gs pos="100000">
+                <a:srgbClr val="DAE7F2"/>
+              </a:gs>
+            </a:gsLst>
+            <a:lin scaled="0" ang="16200000"/>
+          </a:gradFill>
+          <a:ln w="19050">
+            <a:solidFill>
+              <a:srgbClr val="014172"/>
+            </a:solidFill>
+          </a:ln>
+          <a:effectLst/>
+        </p:spPr>
+        <p:txBody>
+          <a:bodyPr rtlCol="0" anchor="ctr"/>
+          <a:lstStyle/>
+          <a:p>
+            <a:pPr algn="ctr"/>
+          </a:p>
+        </p:txBody>
+      </p:sp>
+      <p:sp>
+        <p:nvSpPr>
+          <p:cNvPr id="34" name="TextBox 33"/>
+          <p:cNvSpPr txBox="1"/>
+          <p:nvPr/>
+        </p:nvSpPr>
+        <p:spPr>
+          <a:xfrm>
+            <a:off x="704850" y="4133850"/>
+            <a:ext cx="2381250" cy="247650"/>
+          </a:xfrm>
+          <a:prstGeom prst="rect">
+            <a:avLst/>
+          </a:prstGeom>
+          <a:noFill/>
+        </p:spPr>
+        <p:txBody>
+          <a:bodyPr wrap="none" lIns="0" rIns="0" tIns="0" bIns="0" anchor="ctr">
+            <a:spAutoFit/>
+          </a:bodyPr>
+          <a:lstStyle/>
+          <a:p>
+            <a:pPr algn="l"/>
+            <a:r>
+              <a:rPr sz="1125" b="1">
+                <a:solidFill>
+                  <a:srgbClr val="2E2E33"/>
+                </a:solidFill>
+                <a:latin typeface="Yu Gothic UI"/>
+              </a:rPr>
+              <a:t>雅SLIM</a:t>
+            </a:r>
+          </a:p>
+        </p:txBody>
+      </p:sp>
+      <p:sp>
+        <p:nvSpPr>
+          <p:cNvPr id="35" name="TextBox 34"/>
+          <p:cNvSpPr txBox="1"/>
+          <p:nvPr/>
+        </p:nvSpPr>
+        <p:spPr>
+          <a:xfrm>
+            <a:off x="9130856" y="4133850"/>
+            <a:ext cx="1047750" cy="247650"/>
+          </a:xfrm>
+          <a:prstGeom prst="rect">
+            <a:avLst/>
+          </a:prstGeom>
+          <a:noFill/>
+        </p:spPr>
+        <p:txBody>
+          <a:bodyPr wrap="none" lIns="0" rIns="0" tIns="0" bIns="0" anchor="ctr">
+            <a:spAutoFit/>
+          </a:bodyPr>
+          <a:lstStyle/>
+          <a:p>
+            <a:pPr algn="l"/>
+            <a:r>
+              <a:rPr sz="1200" b="1">
+                <a:solidFill>
+                  <a:srgbClr val="014172"/>
+                </a:solidFill>
+                <a:latin typeface="Yu Gothic UI"/>
+              </a:rPr>
+              <a:t>35.85cm</a:t>
+            </a:r>
+          </a:p>
+        </p:txBody>
+      </p:sp>
+      <p:sp>
+        <p:nvSpPr>
+          <p:cNvPr id="36" name="Rounded Rectangle 35"/>
+          <p:cNvSpPr/>
+          <p:nvPr/>
+        </p:nvSpPr>
+        <p:spPr>
+          <a:xfrm>
+            <a:off x="3143250" y="4610100"/>
+            <a:ext cx="6405753" cy="247650"/>
+          </a:xfrm>
+          <a:prstGeom prst="roundRect">
+            <a:avLst>
+              <a:gd name="adj" fmla="val 30000"/>
+            </a:avLst>
+          </a:prstGeom>
+          <a:gradFill rotWithShape="1">
+            <a:gsLst>
+              <a:gs pos="0">
+                <a:srgbClr val="EEF4F9"/>
+              </a:gs>
+              <a:gs pos="100000">
+                <a:srgbClr val="DAE7F2"/>
+              </a:gs>
+            </a:gsLst>
+            <a:lin scaled="0" ang="16200000"/>
+          </a:gradFill>
+          <a:ln w="19050">
+            <a:solidFill>
+              <a:srgbClr val="014172"/>
+            </a:solidFill>
+          </a:ln>
+          <a:effectLst/>
+        </p:spPr>
+        <p:txBody>
+          <a:bodyPr rtlCol="0" anchor="ctr"/>
+          <a:lstStyle/>
+          <a:p>
+            <a:pPr algn="ctr"/>
+          </a:p>
+        </p:txBody>
+      </p:sp>
+      <p:sp>
+        <p:nvSpPr>
+          <p:cNvPr id="37" name="TextBox 36"/>
+          <p:cNvSpPr txBox="1"/>
+          <p:nvPr/>
+        </p:nvSpPr>
+        <p:spPr>
+          <a:xfrm>
+            <a:off x="704850" y="4610100"/>
+            <a:ext cx="2381250" cy="247650"/>
+          </a:xfrm>
+          <a:prstGeom prst="rect">
+            <a:avLst/>
+          </a:prstGeom>
+          <a:noFill/>
+        </p:spPr>
+        <p:txBody>
+          <a:bodyPr wrap="none" lIns="0" rIns="0" tIns="0" bIns="0" anchor="ctr">
+            <a:spAutoFit/>
+          </a:bodyPr>
+          <a:lstStyle/>
+          <a:p>
+            <a:pPr algn="l"/>
+            <a:r>
+              <a:rPr sz="1125" b="1">
+                <a:solidFill>
+                  <a:srgbClr val="2E2E33"/>
+                </a:solidFill>
+                <a:latin typeface="Yu Gothic UI"/>
+              </a:rPr>
+              <a:t>極</a:t>
+            </a:r>
+          </a:p>
+        </p:txBody>
+      </p:sp>
+      <p:sp>
+        <p:nvSpPr>
+          <p:cNvPr id="38" name="TextBox 37"/>
+          <p:cNvSpPr txBox="1"/>
+          <p:nvPr/>
+        </p:nvSpPr>
+        <p:spPr>
+          <a:xfrm>
+            <a:off x="9663303" y="4610100"/>
+            <a:ext cx="1047750" cy="247650"/>
+          </a:xfrm>
+          <a:prstGeom prst="rect">
+            <a:avLst/>
+          </a:prstGeom>
+          <a:noFill/>
+        </p:spPr>
+        <p:txBody>
+          <a:bodyPr wrap="none" lIns="0" rIns="0" tIns="0" bIns="0" anchor="ctr">
+            <a:spAutoFit/>
+          </a:bodyPr>
+          <a:lstStyle/>
+          <a:p>
+            <a:pPr algn="l"/>
+            <a:r>
+              <a:rPr sz="1200" b="1">
+                <a:solidFill>
+                  <a:srgbClr val="014172"/>
+                </a:solidFill>
+                <a:latin typeface="Yu Gothic UI"/>
+              </a:rPr>
+              <a:t>39.1cm</a:t>
+            </a:r>
+          </a:p>
+        </p:txBody>
+      </p:sp>
+      <p:sp>
+        <p:nvSpPr>
+          <p:cNvPr id="39" name="Rectangle 38"/>
+          <p:cNvSpPr/>
+          <p:nvPr/>
+        </p:nvSpPr>
+        <p:spPr>
+          <a:xfrm>
+            <a:off x="8467725" y="1619250"/>
+            <a:ext cx="9525" cy="3276600"/>
+          </a:xfrm>
+          <a:prstGeom prst="rect">
+            <a:avLst/>
+          </a:prstGeom>
+          <a:noFill/>
+          <a:ln w="19050">
+            <a:solidFill>
+              <a:srgbClr val="A8410F"/>
+            </a:solidFill>
+            <a:prstDash val="dash"/>
+          </a:ln>
+          <a:effectLst/>
+        </p:spPr>
+        <p:txBody>
+          <a:bodyPr rtlCol="0" anchor="ctr"/>
+          <a:lstStyle/>
+          <a:p>
+            <a:pPr algn="ctr"/>
+          </a:p>
+        </p:txBody>
+      </p:sp>
+      <p:sp>
+        <p:nvSpPr>
+          <p:cNvPr id="40" name="TextBox 39"/>
+          <p:cNvSpPr txBox="1"/>
+          <p:nvPr/>
+        </p:nvSpPr>
+        <p:spPr>
+          <a:xfrm>
+            <a:off x="7229475" y="4991100"/>
+            <a:ext cx="2476500" cy="228600"/>
+          </a:xfrm>
+          <a:prstGeom prst="rect">
+            <a:avLst/>
+          </a:prstGeom>
+          <a:noFill/>
+        </p:spPr>
+        <p:txBody>
+          <a:bodyPr wrap="none" lIns="0" rIns="0" tIns="0" bIns="0" anchor="ctr">
+            <a:spAutoFit/>
+          </a:bodyPr>
+          <a:lstStyle/>
+          <a:p>
+            <a:pPr algn="l"/>
+            <a:r>
+              <a:rPr sz="1125" b="1">
+                <a:solidFill>
+                  <a:srgbClr val="A8410F"/>
+                </a:solidFill>
+                <a:latin typeface="Yu Gothic UI"/>
+              </a:rPr>
+              <a:t>9号土鍋 32.5cm</a:t>
+            </a:r>
+          </a:p>
+        </p:txBody>
+      </p:sp>
+      <p:sp>
+        <p:nvSpPr>
+          <p:cNvPr id="41" name="Rectangle 40"/>
+          <p:cNvSpPr/>
+          <p:nvPr/>
+        </p:nvSpPr>
+        <p:spPr>
+          <a:xfrm>
+            <a:off x="609600" y="5295900"/>
+            <a:ext cx="10210800" cy="9525"/>
+          </a:xfrm>
+          <a:prstGeom prst="rect">
+            <a:avLst/>
+          </a:prstGeom>
+          <a:solidFill>
+            <a:srgbClr val="E2E7EC"/>
+          </a:solidFill>
+          <a:ln>
+            <a:noFill/>
+          </a:ln>
+          <a:effectLst/>
+        </p:spPr>
+        <p:txBody>
+          <a:bodyPr rtlCol="0" anchor="ctr"/>
+          <a:lstStyle/>
+          <a:p>
+            <a:pPr algn="ctr"/>
+          </a:p>
+        </p:txBody>
+      </p:sp>
+      <p:sp>
+        <p:nvSpPr>
+          <p:cNvPr id="42" name="TextBox 41"/>
+          <p:cNvSpPr txBox="1"/>
+          <p:nvPr/>
+        </p:nvSpPr>
+        <p:spPr>
+          <a:xfrm>
+            <a:off x="609600" y="5429250"/>
+            <a:ext cx="7239000" cy="247650"/>
+          </a:xfrm>
+          <a:prstGeom prst="rect">
+            <a:avLst/>
+          </a:prstGeom>
+          <a:noFill/>
+        </p:spPr>
+        <p:txBody>
+          <a:bodyPr wrap="none" lIns="0" rIns="0" tIns="0" bIns="0" anchor="ctr">
+            <a:spAutoFit/>
+          </a:bodyPr>
+          <a:lstStyle/>
+          <a:p>
+            <a:pPr algn="l"/>
+            <a:r>
+              <a:rPr sz="1425" b="1">
+                <a:solidFill>
+                  <a:srgbClr val="2E2E33"/>
+                </a:solidFill>
+                <a:latin typeface="Yu Gothic UI"/>
+              </a:rPr>
+              <a:t>「9号まで」は号数の目安で、寸法ではありません。</a:t>
+            </a:r>
+          </a:p>
+        </p:txBody>
+      </p:sp>
+      <p:sp>
+        <p:nvSpPr>
+          <p:cNvPr id="43" name="TextBox 42"/>
+          <p:cNvSpPr txBox="1"/>
+          <p:nvPr/>
+        </p:nvSpPr>
+        <p:spPr>
+          <a:xfrm>
+            <a:off x="609600" y="5676900"/>
+            <a:ext cx="7620000" cy="209550"/>
+          </a:xfrm>
+          <a:prstGeom prst="rect">
+            <a:avLst/>
+          </a:prstGeom>
+          <a:noFill/>
+        </p:spPr>
+        <p:txBody>
+          <a:bodyPr wrap="none" lIns="0" rIns="0" tIns="0" bIns="0" anchor="ctr">
+            <a:spAutoFit/>
+          </a:bodyPr>
+          <a:lstStyle/>
+          <a:p>
+            <a:pPr algn="l"/>
+            <a:r>
+              <a:rPr sz="1050" b="0">
+                <a:solidFill>
+                  <a:srgbClr val="6A717B"/>
+                </a:solidFill>
+                <a:latin typeface="Yu Gothic UI"/>
+              </a:rPr>
+              <a:t>メーカー公表値からの計算です（実測ではありません）</a:t>
+            </a:r>
+          </a:p>
+        </p:txBody>
+      </p:sp>
+      <p:sp>
+        <p:nvSpPr>
+          <p:cNvPr id="44" name="TextBox 43"/>
+          <p:cNvSpPr txBox="1"/>
+          <p:nvPr/>
+        </p:nvSpPr>
+        <p:spPr>
+          <a:xfrm>
+            <a:off x="7962900" y="5676900"/>
+            <a:ext cx="2857500" cy="209550"/>
+          </a:xfrm>
+          <a:prstGeom prst="rect">
+            <a:avLst/>
+          </a:prstGeom>
+          <a:noFill/>
+        </p:spPr>
+        <p:txBody>
+          <a:bodyPr wrap="none" lIns="0" rIns="0" tIns="0" bIns="0" anchor="ctr">
+            <a:spAutoFit/>
+          </a:bodyPr>
+          <a:lstStyle/>
+          <a:p>
+            <a:pPr algn="r"/>
+            <a:r>
+              <a:rPr sz="1050" b="0">
+                <a:solidFill>
+                  <a:srgbClr val="6A717B"/>
+                </a:solidFill>
+                <a:latin typeface="Yu Gothic UI"/>
+              </a:rPr>
+              <a:t>寸法で選ぶ　sunpou.nexeed-lab.com</a:t>
+            </a:r>
+          </a:p>
+        </p:txBody>
+      </p:sp>
+    </p:spTree>
+  </p:cSld>
+  <p:clrMapOvr>
+    <a:masterClrMapping/>
+  </p:clrMapOvr>
+</p:sld>
+</file>
+
+<file path=ppt/slides/slide12.xml><?xml version="1.0" encoding="utf-8"?>
+<p:sld xmlns:a="http://schemas.openxmlformats.org/drawingml/2006/main" xmlns:p="http://schemas.openxmlformats.org/presentationml/2006/main" xmlns:r="http://schemas.openxmlformats.org/officeDocument/2006/relationships">
+  <p:cSld>
+    <p:spTree>
+      <p:nvGrpSpPr>
+        <p:cNvPr id="1" name=""/>
+        <p:cNvGrpSpPr/>
+        <p:nvPr/>
+      </p:nvGrpSpPr>
+      <p:grpSpPr/>
+      <p:sp>
+        <p:nvSpPr>
+          <p:cNvPr id="2" name="Rectangle 1"/>
+          <p:cNvSpPr/>
+          <p:nvPr/>
+        </p:nvSpPr>
+        <p:spPr>
+          <a:xfrm>
+            <a:off x="0" y="0"/>
+            <a:ext cx="11430000" cy="6000750"/>
+          </a:xfrm>
+          <a:prstGeom prst="rect">
+            <a:avLst/>
+          </a:prstGeom>
+          <a:solidFill>
+            <a:srgbClr val="FCFCFC"/>
+          </a:solidFill>
+          <a:ln>
+            <a:noFill/>
+          </a:ln>
+          <a:effectLst/>
+        </p:spPr>
+        <p:txBody>
+          <a:bodyPr rtlCol="0" anchor="ctr"/>
+          <a:lstStyle/>
+          <a:p>
+            <a:pPr algn="ctr"/>
+          </a:p>
+        </p:txBody>
+      </p:sp>
+      <p:sp>
+        <p:nvSpPr>
+          <p:cNvPr id="3" name="Rectangle 2"/>
+          <p:cNvSpPr/>
+          <p:nvPr/>
+        </p:nvSpPr>
+        <p:spPr>
+          <a:xfrm>
+            <a:off x="0" y="0"/>
+            <a:ext cx="114300" cy="6000750"/>
+          </a:xfrm>
+          <a:prstGeom prst="rect">
+            <a:avLst/>
+          </a:prstGeom>
+          <a:solidFill>
+            <a:srgbClr val="014172"/>
+          </a:solidFill>
+          <a:ln>
+            <a:noFill/>
+          </a:ln>
+          <a:effectLst/>
+        </p:spPr>
+        <p:txBody>
+          <a:bodyPr rtlCol="0" anchor="ctr"/>
+          <a:lstStyle/>
+          <a:p>
+            <a:pPr algn="ctr"/>
+          </a:p>
+        </p:txBody>
+      </p:sp>
+      <p:sp>
+        <p:nvSpPr>
+          <p:cNvPr id="4" name="Rectangle 3"/>
+          <p:cNvSpPr/>
+          <p:nvPr/>
+        </p:nvSpPr>
+        <p:spPr>
+          <a:xfrm>
+            <a:off x="0" y="0"/>
+            <a:ext cx="11430000" cy="1504950"/>
+          </a:xfrm>
+          <a:prstGeom prst="rect">
+            <a:avLst/>
+          </a:prstGeom>
+          <a:solidFill>
+            <a:srgbClr val="014172"/>
+          </a:solidFill>
+          <a:ln>
+            <a:noFill/>
+          </a:ln>
+          <a:effectLst/>
+        </p:spPr>
+        <p:txBody>
+          <a:bodyPr rtlCol="0" anchor="ctr"/>
+          <a:lstStyle/>
+          <a:p>
+            <a:pPr algn="ctr"/>
+          </a:p>
+        </p:txBody>
+      </p:sp>
+      <p:sp>
+        <p:nvSpPr>
+          <p:cNvPr id="5" name="TextBox 4"/>
+          <p:cNvSpPr txBox="1"/>
+          <p:nvPr/>
+        </p:nvSpPr>
+        <p:spPr>
+          <a:xfrm>
+            <a:off x="609600" y="361950"/>
+            <a:ext cx="7429500" cy="476250"/>
+          </a:xfrm>
+          <a:prstGeom prst="rect">
+            <a:avLst/>
+          </a:prstGeom>
+          <a:noFill/>
+        </p:spPr>
+        <p:txBody>
+          <a:bodyPr wrap="none" lIns="0" rIns="0" tIns="0" bIns="0" anchor="ctr">
+            <a:spAutoFit/>
+          </a:bodyPr>
+          <a:lstStyle/>
+          <a:p>
+            <a:pPr algn="l"/>
+            <a:r>
+              <a:rPr sz="3000" b="1">
+                <a:solidFill>
+                  <a:srgbClr val="FFFFFF"/>
+                </a:solidFill>
+                <a:latin typeface="Yu Gothic UI"/>
+              </a:rPr>
+              <a:t>ボンベ1本は55〜78分</a:t>
+            </a:r>
+          </a:p>
+        </p:txBody>
+      </p:sp>
+      <p:sp>
+        <p:nvSpPr>
+          <p:cNvPr id="6" name="TextBox 5"/>
+          <p:cNvSpPr txBox="1"/>
+          <p:nvPr/>
+        </p:nvSpPr>
+        <p:spPr>
+          <a:xfrm>
+            <a:off x="609600" y="876300"/>
+            <a:ext cx="7429500" cy="247650"/>
+          </a:xfrm>
+          <a:prstGeom prst="rect">
+            <a:avLst/>
+          </a:prstGeom>
+          <a:noFill/>
+        </p:spPr>
+        <p:txBody>
+          <a:bodyPr wrap="none" lIns="0" rIns="0" tIns="0" bIns="0" anchor="ctr">
+            <a:spAutoFit/>
+          </a:bodyPr>
+          <a:lstStyle/>
+          <a:p>
+            <a:pPr algn="l"/>
+            <a:r>
+              <a:rPr sz="1425" b="0">
+                <a:solidFill>
+                  <a:srgbClr val="DAE7F2"/>
+                </a:solidFill>
+                <a:latin typeface="Yu Gothic UI"/>
+              </a:rPr>
+              <a:t>濃い部分が「250g ÷ ガス消費量」。薄い部分まで伸びると公表の連続燃焼時間</a:t>
+            </a:r>
+          </a:p>
+        </p:txBody>
+      </p:sp>
+      <p:sp>
+        <p:nvSpPr>
+          <p:cNvPr id="7" name="Rounded Rectangle 6"/>
+          <p:cNvSpPr/>
+          <p:nvPr/>
+        </p:nvSpPr>
+        <p:spPr>
+          <a:xfrm>
+            <a:off x="8305800" y="247650"/>
+            <a:ext cx="2514600" cy="1009650"/>
+          </a:xfrm>
+          <a:prstGeom prst="roundRect">
+            <a:avLst>
+              <a:gd name="adj" fmla="val 12000"/>
+            </a:avLst>
+          </a:prstGeom>
+          <a:solidFill>
+            <a:srgbClr val="FFFFFF"/>
+          </a:solidFill>
+          <a:ln>
+            <a:noFill/>
+          </a:ln>
+          <a:effectLst>
+            <a:outerShdw blurRad="254000" dist="63500" dir="5400000" rotWithShape="0">
+              <a:srgbClr val="0B2B45">
+                <a:alpha val="30000"/>
+              </a:srgbClr>
+            </a:outerShdw>
+          </a:effectLst>
+        </p:spPr>
+        <p:txBody>
+          <a:bodyPr rtlCol="0" anchor="ctr"/>
+          <a:lstStyle/>
+          <a:p>
+            <a:pPr algn="ctr"/>
+          </a:p>
+        </p:txBody>
+      </p:sp>
+      <p:sp>
+        <p:nvSpPr>
+          <p:cNvPr id="8" name="TextBox 7"/>
+          <p:cNvSpPr txBox="1"/>
+          <p:nvPr/>
+        </p:nvSpPr>
+        <p:spPr>
+          <a:xfrm>
+            <a:off x="8515350" y="400050"/>
+            <a:ext cx="2133600" cy="209550"/>
+          </a:xfrm>
+          <a:prstGeom prst="rect">
+            <a:avLst/>
+          </a:prstGeom>
+          <a:noFill/>
+        </p:spPr>
+        <p:txBody>
+          <a:bodyPr wrap="none" lIns="0" rIns="0" tIns="0" bIns="0" anchor="ctr">
+            <a:spAutoFit/>
+          </a:bodyPr>
+          <a:lstStyle/>
+          <a:p>
+            <a:pPr algn="l"/>
+            <a:r>
+              <a:rPr sz="1125" b="0">
+                <a:solidFill>
+                  <a:srgbClr val="6A717B"/>
+                </a:solidFill>
+                <a:latin typeface="Yu Gothic UI"/>
+              </a:rPr>
+              <a:t>いちばん長くて</a:t>
+            </a:r>
+          </a:p>
+        </p:txBody>
+      </p:sp>
+      <p:sp>
+        <p:nvSpPr>
+          <p:cNvPr id="9" name="TextBox 8"/>
+          <p:cNvSpPr txBox="1"/>
+          <p:nvPr/>
+        </p:nvSpPr>
+        <p:spPr>
+          <a:xfrm>
+            <a:off x="8515350" y="647700"/>
+            <a:ext cx="2133600" cy="533400"/>
+          </a:xfrm>
+          <a:prstGeom prst="rect">
+            <a:avLst/>
+          </a:prstGeom>
+          <a:noFill/>
+        </p:spPr>
+        <p:txBody>
+          <a:bodyPr wrap="none" lIns="0" rIns="0" tIns="0" bIns="0" anchor="ctr">
+            <a:spAutoFit/>
+          </a:bodyPr>
+          <a:lstStyle/>
+          <a:p>
+            <a:pPr algn="l"/>
+            <a:r>
+              <a:rPr sz="3900" b="1">
+                <a:solidFill>
+                  <a:srgbClr val="014172"/>
+                </a:solidFill>
+                <a:latin typeface="Yu Gothic UI"/>
+              </a:rPr>
+              <a:t>78</a:t>
+            </a:r>
+            <a:r>
+              <a:rPr sz="1950" b="1">
+                <a:solidFill>
+                  <a:srgbClr val="014172"/>
+                </a:solidFill>
+                <a:latin typeface="Yu Gothic UI"/>
+              </a:rPr>
+              <a:t>分</a:t>
+            </a:r>
+          </a:p>
+        </p:txBody>
+      </p:sp>
+      <p:sp>
+        <p:nvSpPr>
+          <p:cNvPr id="10" name="Rectangle 9"/>
+          <p:cNvSpPr/>
+          <p:nvPr/>
+        </p:nvSpPr>
+        <p:spPr>
+          <a:xfrm>
+            <a:off x="495300" y="1676400"/>
+            <a:ext cx="10439400" cy="476250"/>
+          </a:xfrm>
+          <a:prstGeom prst="rect">
+            <a:avLst/>
+          </a:prstGeom>
+          <a:solidFill>
+            <a:srgbClr val="F2F5F8"/>
+          </a:solidFill>
+          <a:ln>
+            <a:noFill/>
+          </a:ln>
+          <a:effectLst/>
+        </p:spPr>
+        <p:txBody>
+          <a:bodyPr rtlCol="0" anchor="ctr"/>
+          <a:lstStyle/>
+          <a:p>
+            <a:pPr algn="ctr"/>
+          </a:p>
+        </p:txBody>
+      </p:sp>
+      <p:sp>
+        <p:nvSpPr>
+          <p:cNvPr id="11" name="Rectangle 10"/>
+          <p:cNvSpPr/>
+          <p:nvPr/>
+        </p:nvSpPr>
+        <p:spPr>
+          <a:xfrm>
+            <a:off x="495300" y="2228850"/>
+            <a:ext cx="10439400" cy="476250"/>
+          </a:xfrm>
+          <a:prstGeom prst="rect">
+            <a:avLst/>
+          </a:prstGeom>
+          <a:solidFill>
+            <a:srgbClr val="FCFCFC"/>
+          </a:solidFill>
+          <a:ln>
+            <a:noFill/>
+          </a:ln>
+          <a:effectLst/>
+        </p:spPr>
+        <p:txBody>
+          <a:bodyPr rtlCol="0" anchor="ctr"/>
+          <a:lstStyle/>
+          <a:p>
+            <a:pPr algn="ctr"/>
+          </a:p>
+        </p:txBody>
+      </p:sp>
+      <p:sp>
+        <p:nvSpPr>
+          <p:cNvPr id="12" name="Rectangle 11"/>
+          <p:cNvSpPr/>
+          <p:nvPr/>
+        </p:nvSpPr>
+        <p:spPr>
+          <a:xfrm>
+            <a:off x="495300" y="2781300"/>
+            <a:ext cx="10439400" cy="476250"/>
+          </a:xfrm>
+          <a:prstGeom prst="rect">
+            <a:avLst/>
+          </a:prstGeom>
+          <a:solidFill>
+            <a:srgbClr val="F2F5F8"/>
+          </a:solidFill>
+          <a:ln>
+            <a:noFill/>
+          </a:ln>
+          <a:effectLst/>
+        </p:spPr>
+        <p:txBody>
+          <a:bodyPr rtlCol="0" anchor="ctr"/>
+          <a:lstStyle/>
+          <a:p>
+            <a:pPr algn="ctr"/>
+          </a:p>
+        </p:txBody>
+      </p:sp>
+      <p:sp>
+        <p:nvSpPr>
+          <p:cNvPr id="13" name="Rectangle 12"/>
+          <p:cNvSpPr/>
+          <p:nvPr/>
+        </p:nvSpPr>
+        <p:spPr>
+          <a:xfrm>
+            <a:off x="495300" y="3333750"/>
+            <a:ext cx="10439400" cy="476250"/>
+          </a:xfrm>
+          <a:prstGeom prst="rect">
+            <a:avLst/>
+          </a:prstGeom>
+          <a:solidFill>
+            <a:srgbClr val="FCFCFC"/>
+          </a:solidFill>
+          <a:ln>
+            <a:noFill/>
+          </a:ln>
+          <a:effectLst/>
+        </p:spPr>
+        <p:txBody>
+          <a:bodyPr rtlCol="0" anchor="ctr"/>
+          <a:lstStyle/>
+          <a:p>
+            <a:pPr algn="ctr"/>
+          </a:p>
+        </p:txBody>
+      </p:sp>
+      <p:sp>
+        <p:nvSpPr>
+          <p:cNvPr id="14" name="Rectangle 13"/>
+          <p:cNvSpPr/>
+          <p:nvPr/>
+        </p:nvSpPr>
+        <p:spPr>
+          <a:xfrm>
+            <a:off x="495300" y="3886200"/>
+            <a:ext cx="10439400" cy="476250"/>
+          </a:xfrm>
+          <a:prstGeom prst="rect">
+            <a:avLst/>
+          </a:prstGeom>
+          <a:solidFill>
+            <a:srgbClr val="F2F5F8"/>
+          </a:solidFill>
+          <a:ln>
+            <a:noFill/>
+          </a:ln>
+          <a:effectLst/>
+        </p:spPr>
+        <p:txBody>
+          <a:bodyPr rtlCol="0" anchor="ctr"/>
+          <a:lstStyle/>
+          <a:p>
+            <a:pPr algn="ctr"/>
+          </a:p>
+        </p:txBody>
+      </p:sp>
+      <p:sp>
+        <p:nvSpPr>
+          <p:cNvPr id="15" name="Rectangle 14"/>
+          <p:cNvSpPr/>
+          <p:nvPr/>
+        </p:nvSpPr>
+        <p:spPr>
+          <a:xfrm>
+            <a:off x="495300" y="4438650"/>
+            <a:ext cx="10439400" cy="476250"/>
+          </a:xfrm>
+          <a:prstGeom prst="rect">
+            <a:avLst/>
+          </a:prstGeom>
+          <a:solidFill>
+            <a:srgbClr val="E6EEF6"/>
+          </a:solidFill>
+          <a:ln>
+            <a:noFill/>
+          </a:ln>
+          <a:effectLst/>
+        </p:spPr>
+        <p:txBody>
+          <a:bodyPr rtlCol="0" anchor="ctr"/>
+          <a:lstStyle/>
+          <a:p>
+            <a:pPr algn="ctr"/>
+          </a:p>
+        </p:txBody>
+      </p:sp>
+      <p:sp>
+        <p:nvSpPr>
+          <p:cNvPr id="16" name="Rectangle 15"/>
+          <p:cNvSpPr/>
+          <p:nvPr/>
+        </p:nvSpPr>
+        <p:spPr>
+          <a:xfrm>
+            <a:off x="495300" y="4438650"/>
+            <a:ext cx="47625" cy="476250"/>
+          </a:xfrm>
+          <a:prstGeom prst="rect">
+            <a:avLst/>
+          </a:prstGeom>
+          <a:solidFill>
+            <a:srgbClr val="014172"/>
+          </a:solidFill>
+          <a:ln>
+            <a:noFill/>
+          </a:ln>
+          <a:effectLst/>
+        </p:spPr>
+        <p:txBody>
+          <a:bodyPr rtlCol="0" anchor="ctr"/>
+          <a:lstStyle/>
+          <a:p>
+            <a:pPr algn="ctr"/>
+          </a:p>
+        </p:txBody>
+      </p:sp>
+      <p:sp>
+        <p:nvSpPr>
+          <p:cNvPr id="17" name="Rounded Rectangle 16"/>
+          <p:cNvSpPr/>
+          <p:nvPr/>
+        </p:nvSpPr>
+        <p:spPr>
+          <a:xfrm>
+            <a:off x="4000500" y="1771650"/>
+            <a:ext cx="2933700" cy="266700"/>
+          </a:xfrm>
+          <a:prstGeom prst="roundRect">
+            <a:avLst>
+              <a:gd name="adj" fmla="val 30000"/>
+            </a:avLst>
+          </a:prstGeom>
+          <a:gradFill rotWithShape="1">
+            <a:gsLst>
+              <a:gs pos="0">
+                <a:srgbClr val="EEF4F9"/>
+              </a:gs>
+              <a:gs pos="100000">
+                <a:srgbClr val="DAE7F2"/>
+              </a:gs>
+            </a:gsLst>
+            <a:lin scaled="0" ang="16200000"/>
+          </a:gradFill>
+          <a:ln w="19050">
+            <a:solidFill>
+              <a:srgbClr val="014172"/>
+            </a:solidFill>
+          </a:ln>
+          <a:effectLst/>
+        </p:spPr>
+        <p:txBody>
+          <a:bodyPr rtlCol="0" anchor="ctr"/>
+          <a:lstStyle/>
+          <a:p>
+            <a:pPr algn="ctr"/>
+          </a:p>
+        </p:txBody>
+      </p:sp>
+      <p:sp>
+        <p:nvSpPr>
+          <p:cNvPr id="18" name="TextBox 17"/>
+          <p:cNvSpPr txBox="1"/>
+          <p:nvPr/>
+        </p:nvSpPr>
+        <p:spPr>
+          <a:xfrm>
+            <a:off x="704850" y="1714500"/>
+            <a:ext cx="3143250" cy="228600"/>
+          </a:xfrm>
+          <a:prstGeom prst="rect">
+            <a:avLst/>
+          </a:prstGeom>
+          <a:noFill/>
+        </p:spPr>
+        <p:txBody>
+          <a:bodyPr wrap="none" lIns="0" rIns="0" tIns="0" bIns="0" anchor="ctr">
+            <a:spAutoFit/>
+          </a:bodyPr>
+          <a:lstStyle/>
+          <a:p>
+            <a:pPr algn="l"/>
+            <a:r>
+              <a:rPr sz="1200" b="1">
+                <a:solidFill>
+                  <a:srgbClr val="2E2E33"/>
+                </a:solidFill>
+                <a:latin typeface="Yu Gothic UI"/>
+              </a:rPr>
+              <a:t>BO</a:t>
+            </a:r>
+          </a:p>
+        </p:txBody>
+      </p:sp>
+      <p:sp>
+        <p:nvSpPr>
+          <p:cNvPr id="19" name="TextBox 18"/>
+          <p:cNvSpPr txBox="1"/>
+          <p:nvPr/>
+        </p:nvSpPr>
+        <p:spPr>
+          <a:xfrm>
+            <a:off x="704850" y="1943100"/>
+            <a:ext cx="3143250" cy="209550"/>
+          </a:xfrm>
+          <a:prstGeom prst="rect">
+            <a:avLst/>
+          </a:prstGeom>
+          <a:noFill/>
+        </p:spPr>
+        <p:txBody>
+          <a:bodyPr wrap="none" lIns="0" rIns="0" tIns="0" bIns="0" anchor="ctr">
+            <a:spAutoFit/>
+          </a:bodyPr>
+          <a:lstStyle/>
+          <a:p>
+            <a:pPr algn="l"/>
+            <a:r>
+              <a:rPr sz="1050" b="0">
+                <a:solidFill>
+                  <a:srgbClr val="6A717B"/>
+                </a:solidFill>
+                <a:latin typeface="Yu Gothic UI"/>
+              </a:rPr>
+              <a:t>286g/h ／ ＋3分</a:t>
+            </a:r>
+          </a:p>
+        </p:txBody>
+      </p:sp>
+      <p:sp>
+        <p:nvSpPr>
+          <p:cNvPr id="20" name="TextBox 19"/>
+          <p:cNvSpPr txBox="1"/>
+          <p:nvPr/>
+        </p:nvSpPr>
+        <p:spPr>
+          <a:xfrm>
+            <a:off x="7048500" y="1771650"/>
+            <a:ext cx="952500" cy="266700"/>
+          </a:xfrm>
+          <a:prstGeom prst="rect">
+            <a:avLst/>
+          </a:prstGeom>
+          <a:noFill/>
+        </p:spPr>
+        <p:txBody>
+          <a:bodyPr wrap="none" lIns="0" rIns="0" tIns="0" bIns="0" anchor="ctr">
+            <a:spAutoFit/>
+          </a:bodyPr>
+          <a:lstStyle/>
+          <a:p>
+            <a:pPr algn="l"/>
+            <a:r>
+              <a:rPr sz="1350" b="1">
+                <a:solidFill>
+                  <a:srgbClr val="014172"/>
+                </a:solidFill>
+                <a:latin typeface="Yu Gothic UI"/>
+              </a:rPr>
+              <a:t>55分</a:t>
+            </a:r>
+          </a:p>
+        </p:txBody>
+      </p:sp>
+      <p:sp>
+        <p:nvSpPr>
+          <p:cNvPr id="21" name="Rounded Rectangle 20"/>
+          <p:cNvSpPr/>
+          <p:nvPr/>
+        </p:nvSpPr>
+        <p:spPr>
+          <a:xfrm>
+            <a:off x="4000500" y="2324100"/>
+            <a:ext cx="4160520" cy="266700"/>
+          </a:xfrm>
+          <a:prstGeom prst="roundRect">
+            <a:avLst>
+              <a:gd name="adj" fmla="val 30000"/>
+            </a:avLst>
+          </a:prstGeom>
+          <a:gradFill rotWithShape="1">
+            <a:gsLst>
+              <a:gs pos="0">
+                <a:srgbClr val="EEF4F9"/>
+              </a:gs>
+              <a:gs pos="100000">
+                <a:srgbClr val="DAE7F2"/>
+              </a:gs>
+            </a:gsLst>
+            <a:lin scaled="0" ang="16200000"/>
+          </a:gradFill>
+          <a:ln w="19050">
+            <a:solidFill>
+              <a:srgbClr val="014172"/>
+            </a:solidFill>
+          </a:ln>
+          <a:effectLst/>
+        </p:spPr>
+        <p:txBody>
+          <a:bodyPr rtlCol="0" anchor="ctr"/>
+          <a:lstStyle/>
+          <a:p>
+            <a:pPr algn="ctr"/>
+          </a:p>
+        </p:txBody>
+      </p:sp>
+      <p:sp>
+        <p:nvSpPr>
+          <p:cNvPr id="22" name="TextBox 21"/>
+          <p:cNvSpPr txBox="1"/>
+          <p:nvPr/>
+        </p:nvSpPr>
+        <p:spPr>
+          <a:xfrm>
+            <a:off x="704850" y="2266950"/>
+            <a:ext cx="3143250" cy="228600"/>
+          </a:xfrm>
+          <a:prstGeom prst="rect">
+            <a:avLst/>
+          </a:prstGeom>
+          <a:noFill/>
+        </p:spPr>
+        <p:txBody>
+          <a:bodyPr wrap="none" lIns="0" rIns="0" tIns="0" bIns="0" anchor="ctr">
+            <a:spAutoFit/>
+          </a:bodyPr>
+          <a:lstStyle/>
+          <a:p>
+            <a:pPr algn="l"/>
+            <a:r>
+              <a:rPr sz="1200" b="1">
+                <a:solidFill>
+                  <a:srgbClr val="2E2E33"/>
+                </a:solidFill>
+                <a:latin typeface="Yu Gothic UI"/>
+              </a:rPr>
+              <a:t>スマート／ウィンドシールド</a:t>
+            </a:r>
+          </a:p>
+        </p:txBody>
+      </p:sp>
+      <p:sp>
+        <p:nvSpPr>
+          <p:cNvPr id="23" name="TextBox 22"/>
+          <p:cNvSpPr txBox="1"/>
+          <p:nvPr/>
+        </p:nvSpPr>
+        <p:spPr>
+          <a:xfrm>
+            <a:off x="704850" y="2495550"/>
+            <a:ext cx="3143250" cy="209550"/>
+          </a:xfrm>
+          <a:prstGeom prst="rect">
+            <a:avLst/>
+          </a:prstGeom>
+          <a:noFill/>
+        </p:spPr>
+        <p:txBody>
+          <a:bodyPr wrap="none" lIns="0" rIns="0" tIns="0" bIns="0" anchor="ctr">
+            <a:spAutoFit/>
+          </a:bodyPr>
+          <a:lstStyle/>
+          <a:p>
+            <a:pPr algn="l"/>
+            <a:r>
+              <a:rPr sz="1050" b="0">
+                <a:solidFill>
+                  <a:srgbClr val="6A717B"/>
+                </a:solidFill>
+                <a:latin typeface="Yu Gothic UI"/>
+              </a:rPr>
+              <a:t>254g/h ／ ＋19分</a:t>
+            </a:r>
+          </a:p>
+        </p:txBody>
+      </p:sp>
+      <p:sp>
+        <p:nvSpPr>
+          <p:cNvPr id="24" name="TextBox 23"/>
+          <p:cNvSpPr txBox="1"/>
+          <p:nvPr/>
+        </p:nvSpPr>
+        <p:spPr>
+          <a:xfrm>
+            <a:off x="8275320" y="2324100"/>
+            <a:ext cx="952500" cy="266700"/>
+          </a:xfrm>
+          <a:prstGeom prst="rect">
+            <a:avLst/>
+          </a:prstGeom>
+          <a:noFill/>
+        </p:spPr>
+        <p:txBody>
+          <a:bodyPr wrap="none" lIns="0" rIns="0" tIns="0" bIns="0" anchor="ctr">
+            <a:spAutoFit/>
+          </a:bodyPr>
+          <a:lstStyle/>
+          <a:p>
+            <a:pPr algn="l"/>
+            <a:r>
+              <a:rPr sz="1350" b="1">
+                <a:solidFill>
+                  <a:srgbClr val="014172"/>
+                </a:solidFill>
+                <a:latin typeface="Yu Gothic UI"/>
+              </a:rPr>
+              <a:t>78分</a:t>
+            </a:r>
+          </a:p>
+        </p:txBody>
+      </p:sp>
+      <p:sp>
+        <p:nvSpPr>
+          <p:cNvPr id="25" name="Rounded Rectangle 24"/>
+          <p:cNvSpPr/>
+          <p:nvPr/>
+        </p:nvSpPr>
+        <p:spPr>
+          <a:xfrm>
+            <a:off x="4000500" y="2876550"/>
+            <a:ext cx="3627120" cy="266700"/>
+          </a:xfrm>
+          <a:prstGeom prst="roundRect">
+            <a:avLst>
+              <a:gd name="adj" fmla="val 30000"/>
+            </a:avLst>
+          </a:prstGeom>
+          <a:gradFill rotWithShape="1">
+            <a:gsLst>
+              <a:gs pos="0">
+                <a:srgbClr val="EEF4F9"/>
+              </a:gs>
+              <a:gs pos="100000">
+                <a:srgbClr val="DAE7F2"/>
+              </a:gs>
+            </a:gsLst>
+            <a:lin scaled="0" ang="16200000"/>
+          </a:gradFill>
+          <a:ln w="19050">
+            <a:solidFill>
+              <a:srgbClr val="014172"/>
+            </a:solidFill>
+          </a:ln>
+          <a:effectLst/>
+        </p:spPr>
+        <p:txBody>
+          <a:bodyPr rtlCol="0" anchor="ctr"/>
+          <a:lstStyle/>
+          <a:p>
+            <a:pPr algn="ctr"/>
+          </a:p>
+        </p:txBody>
+      </p:sp>
+      <p:sp>
+        <p:nvSpPr>
+          <p:cNvPr id="26" name="TextBox 25"/>
+          <p:cNvSpPr txBox="1"/>
+          <p:nvPr/>
+        </p:nvSpPr>
+        <p:spPr>
+          <a:xfrm>
+            <a:off x="704850" y="2819400"/>
+            <a:ext cx="3143250" cy="228600"/>
+          </a:xfrm>
+          <a:prstGeom prst="rect">
+            <a:avLst/>
+          </a:prstGeom>
+          <a:noFill/>
+        </p:spPr>
+        <p:txBody>
+          <a:bodyPr wrap="none" lIns="0" rIns="0" tIns="0" bIns="0" anchor="ctr">
+            <a:spAutoFit/>
+          </a:bodyPr>
+          <a:lstStyle/>
+          <a:p>
+            <a:pPr algn="l"/>
+            <a:r>
+              <a:rPr sz="1200" b="1">
+                <a:solidFill>
+                  <a:srgbClr val="2E2E33"/>
+                </a:solidFill>
+                <a:latin typeface="Yu Gothic UI"/>
+              </a:rPr>
+              <a:t>達人スリムV</a:t>
+            </a:r>
+          </a:p>
+        </p:txBody>
+      </p:sp>
+      <p:sp>
+        <p:nvSpPr>
+          <p:cNvPr id="27" name="TextBox 26"/>
+          <p:cNvSpPr txBox="1"/>
+          <p:nvPr/>
+        </p:nvSpPr>
+        <p:spPr>
+          <a:xfrm>
+            <a:off x="704850" y="3048000"/>
+            <a:ext cx="3143250" cy="209550"/>
+          </a:xfrm>
+          <a:prstGeom prst="rect">
+            <a:avLst/>
+          </a:prstGeom>
+          <a:noFill/>
+        </p:spPr>
+        <p:txBody>
+          <a:bodyPr wrap="none" lIns="0" rIns="0" tIns="0" bIns="0" anchor="ctr">
+            <a:spAutoFit/>
+          </a:bodyPr>
+          <a:lstStyle/>
+          <a:p>
+            <a:pPr algn="l"/>
+            <a:r>
+              <a:rPr sz="1050" b="0">
+                <a:solidFill>
+                  <a:srgbClr val="6A717B"/>
+                </a:solidFill>
+                <a:latin typeface="Yu Gothic UI"/>
+              </a:rPr>
+              <a:t>245g/h ／ ＋7分</a:t>
+            </a:r>
+          </a:p>
+        </p:txBody>
+      </p:sp>
+      <p:sp>
+        <p:nvSpPr>
+          <p:cNvPr id="28" name="TextBox 27"/>
+          <p:cNvSpPr txBox="1"/>
+          <p:nvPr/>
+        </p:nvSpPr>
+        <p:spPr>
+          <a:xfrm>
+            <a:off x="7741920" y="2876550"/>
+            <a:ext cx="952500" cy="266700"/>
+          </a:xfrm>
+          <a:prstGeom prst="rect">
+            <a:avLst/>
+          </a:prstGeom>
+          <a:noFill/>
+        </p:spPr>
+        <p:txBody>
+          <a:bodyPr wrap="none" lIns="0" rIns="0" tIns="0" bIns="0" anchor="ctr">
+            <a:spAutoFit/>
+          </a:bodyPr>
+          <a:lstStyle/>
+          <a:p>
+            <a:pPr algn="l"/>
+            <a:r>
+              <a:rPr sz="1350" b="1">
+                <a:solidFill>
+                  <a:srgbClr val="014172"/>
+                </a:solidFill>
+                <a:latin typeface="Yu Gothic UI"/>
+              </a:rPr>
+              <a:t>68分</a:t>
+            </a:r>
+          </a:p>
+        </p:txBody>
+      </p:sp>
+      <p:sp>
+        <p:nvSpPr>
+          <p:cNvPr id="29" name="Rounded Rectangle 28"/>
+          <p:cNvSpPr/>
+          <p:nvPr/>
+        </p:nvSpPr>
+        <p:spPr>
+          <a:xfrm>
+            <a:off x="4000500" y="3429000"/>
+            <a:ext cx="3733800" cy="266700"/>
+          </a:xfrm>
+          <a:prstGeom prst="roundRect">
+            <a:avLst>
+              <a:gd name="adj" fmla="val 30000"/>
+            </a:avLst>
+          </a:prstGeom>
+          <a:gradFill rotWithShape="1">
+            <a:gsLst>
+              <a:gs pos="0">
+                <a:srgbClr val="EEF4F9"/>
+              </a:gs>
+              <a:gs pos="100000">
+                <a:srgbClr val="DAE7F2"/>
+              </a:gs>
+            </a:gsLst>
+            <a:lin scaled="0" ang="16200000"/>
+          </a:gradFill>
+          <a:ln w="19050">
+            <a:solidFill>
+              <a:srgbClr val="014172"/>
+            </a:solidFill>
+          </a:ln>
+          <a:effectLst/>
+        </p:spPr>
+        <p:txBody>
+          <a:bodyPr rtlCol="0" anchor="ctr"/>
+          <a:lstStyle/>
+          <a:p>
+            <a:pPr algn="ctr"/>
+          </a:p>
+        </p:txBody>
+      </p:sp>
+      <p:sp>
+        <p:nvSpPr>
+          <p:cNvPr id="30" name="TextBox 29"/>
+          <p:cNvSpPr txBox="1"/>
+          <p:nvPr/>
+        </p:nvSpPr>
+        <p:spPr>
+          <a:xfrm>
+            <a:off x="704850" y="3371850"/>
+            <a:ext cx="3143250" cy="228600"/>
+          </a:xfrm>
+          <a:prstGeom prst="rect">
+            <a:avLst/>
+          </a:prstGeom>
+          <a:noFill/>
+        </p:spPr>
+        <p:txBody>
+          <a:bodyPr wrap="none" lIns="0" rIns="0" tIns="0" bIns="0" anchor="ctr">
+            <a:spAutoFit/>
+          </a:bodyPr>
+          <a:lstStyle/>
+          <a:p>
+            <a:pPr algn="l"/>
+            <a:r>
+              <a:rPr sz="1200" b="1">
+                <a:solidFill>
+                  <a:srgbClr val="2E2E33"/>
+                </a:solidFill>
+                <a:latin typeface="Yu Gothic UI"/>
+              </a:rPr>
+              <a:t>スリム ほか2機種</a:t>
+            </a:r>
+          </a:p>
+        </p:txBody>
+      </p:sp>
+      <p:sp>
+        <p:nvSpPr>
+          <p:cNvPr id="31" name="TextBox 30"/>
+          <p:cNvSpPr txBox="1"/>
+          <p:nvPr/>
+        </p:nvSpPr>
+        <p:spPr>
+          <a:xfrm>
+            <a:off x="704850" y="3600450"/>
+            <a:ext cx="3143250" cy="209550"/>
+          </a:xfrm>
+          <a:prstGeom prst="rect">
+            <a:avLst/>
+          </a:prstGeom>
+          <a:noFill/>
+        </p:spPr>
+        <p:txBody>
+          <a:bodyPr wrap="none" lIns="0" rIns="0" tIns="0" bIns="0" anchor="ctr">
+            <a:spAutoFit/>
+          </a:bodyPr>
+          <a:lstStyle/>
+          <a:p>
+            <a:pPr algn="l"/>
+            <a:r>
+              <a:rPr sz="1050" b="0">
+                <a:solidFill>
+                  <a:srgbClr val="6A717B"/>
+                </a:solidFill>
+                <a:latin typeface="Yu Gothic UI"/>
+              </a:rPr>
+              <a:t>236g/h ／ ＋6分</a:t>
+            </a:r>
+          </a:p>
+        </p:txBody>
+      </p:sp>
+      <p:sp>
+        <p:nvSpPr>
+          <p:cNvPr id="32" name="TextBox 31"/>
+          <p:cNvSpPr txBox="1"/>
+          <p:nvPr/>
+        </p:nvSpPr>
+        <p:spPr>
+          <a:xfrm>
+            <a:off x="7848600" y="3429000"/>
+            <a:ext cx="952500" cy="266700"/>
+          </a:xfrm>
+          <a:prstGeom prst="rect">
+            <a:avLst/>
+          </a:prstGeom>
+          <a:noFill/>
+        </p:spPr>
+        <p:txBody>
+          <a:bodyPr wrap="none" lIns="0" rIns="0" tIns="0" bIns="0" anchor="ctr">
+            <a:spAutoFit/>
+          </a:bodyPr>
+          <a:lstStyle/>
+          <a:p>
+            <a:pPr algn="l"/>
+            <a:r>
+              <a:rPr sz="1350" b="1">
+                <a:solidFill>
+                  <a:srgbClr val="014172"/>
+                </a:solidFill>
+                <a:latin typeface="Yu Gothic UI"/>
+              </a:rPr>
+              <a:t>70分</a:t>
+            </a:r>
+          </a:p>
+        </p:txBody>
+      </p:sp>
+      <p:sp>
+        <p:nvSpPr>
+          <p:cNvPr id="33" name="Rounded Rectangle 32"/>
+          <p:cNvSpPr/>
+          <p:nvPr/>
+        </p:nvSpPr>
+        <p:spPr>
+          <a:xfrm>
+            <a:off x="4000500" y="3981450"/>
+            <a:ext cx="3840480" cy="266700"/>
+          </a:xfrm>
+          <a:prstGeom prst="roundRect">
+            <a:avLst>
+              <a:gd name="adj" fmla="val 30000"/>
+            </a:avLst>
+          </a:prstGeom>
+          <a:gradFill rotWithShape="1">
+            <a:gsLst>
+              <a:gs pos="0">
+                <a:srgbClr val="EEF4F9"/>
+              </a:gs>
+              <a:gs pos="100000">
+                <a:srgbClr val="DAE7F2"/>
+              </a:gs>
+            </a:gsLst>
+            <a:lin scaled="0" ang="16200000"/>
+          </a:gradFill>
+          <a:ln w="19050">
+            <a:solidFill>
+              <a:srgbClr val="014172"/>
+            </a:solidFill>
+          </a:ln>
+          <a:effectLst/>
+        </p:spPr>
+        <p:txBody>
+          <a:bodyPr rtlCol="0" anchor="ctr"/>
+          <a:lstStyle/>
+          <a:p>
+            <a:pPr algn="ctr"/>
+          </a:p>
+        </p:txBody>
+      </p:sp>
+      <p:sp>
+        <p:nvSpPr>
+          <p:cNvPr id="34" name="TextBox 33"/>
+          <p:cNvSpPr txBox="1"/>
+          <p:nvPr/>
+        </p:nvSpPr>
+        <p:spPr>
+          <a:xfrm>
+            <a:off x="704850" y="3924300"/>
+            <a:ext cx="3143250" cy="228600"/>
+          </a:xfrm>
+          <a:prstGeom prst="rect">
+            <a:avLst/>
+          </a:prstGeom>
+          <a:noFill/>
+        </p:spPr>
+        <p:txBody>
+          <a:bodyPr wrap="none" lIns="0" rIns="0" tIns="0" bIns="0" anchor="ctr">
+            <a:spAutoFit/>
+          </a:bodyPr>
+          <a:lstStyle/>
+          <a:p>
+            <a:pPr algn="l"/>
+            <a:r>
+              <a:rPr sz="1200" b="1">
+                <a:solidFill>
+                  <a:srgbClr val="2E2E33"/>
+                </a:solidFill>
+                <a:latin typeface="Yu Gothic UI"/>
+              </a:rPr>
+              <a:t>エコプレミアムIII</a:t>
+            </a:r>
+          </a:p>
+        </p:txBody>
+      </p:sp>
+      <p:sp>
+        <p:nvSpPr>
+          <p:cNvPr id="35" name="TextBox 34"/>
+          <p:cNvSpPr txBox="1"/>
+          <p:nvPr/>
+        </p:nvSpPr>
+        <p:spPr>
+          <a:xfrm>
+            <a:off x="704850" y="4152900"/>
+            <a:ext cx="3143250" cy="209550"/>
+          </a:xfrm>
+          <a:prstGeom prst="rect">
+            <a:avLst/>
+          </a:prstGeom>
+          <a:noFill/>
+        </p:spPr>
+        <p:txBody>
+          <a:bodyPr wrap="none" lIns="0" rIns="0" tIns="0" bIns="0" anchor="ctr">
+            <a:spAutoFit/>
+          </a:bodyPr>
+          <a:lstStyle/>
+          <a:p>
+            <a:pPr algn="l"/>
+            <a:r>
+              <a:rPr sz="1050" b="0">
+                <a:solidFill>
+                  <a:srgbClr val="6A717B"/>
+                </a:solidFill>
+                <a:latin typeface="Yu Gothic UI"/>
+              </a:rPr>
+              <a:t>210g/h ／ ＋1分</a:t>
+            </a:r>
+          </a:p>
+        </p:txBody>
+      </p:sp>
+      <p:sp>
+        <p:nvSpPr>
+          <p:cNvPr id="36" name="TextBox 35"/>
+          <p:cNvSpPr txBox="1"/>
+          <p:nvPr/>
+        </p:nvSpPr>
+        <p:spPr>
+          <a:xfrm>
+            <a:off x="7955280" y="3981450"/>
+            <a:ext cx="952500" cy="266700"/>
+          </a:xfrm>
+          <a:prstGeom prst="rect">
+            <a:avLst/>
+          </a:prstGeom>
+          <a:noFill/>
+        </p:spPr>
+        <p:txBody>
+          <a:bodyPr wrap="none" lIns="0" rIns="0" tIns="0" bIns="0" anchor="ctr">
+            <a:spAutoFit/>
+          </a:bodyPr>
+          <a:lstStyle/>
+          <a:p>
+            <a:pPr algn="l"/>
+            <a:r>
+              <a:rPr sz="1350" b="1">
+                <a:solidFill>
+                  <a:srgbClr val="014172"/>
+                </a:solidFill>
+                <a:latin typeface="Yu Gothic UI"/>
+              </a:rPr>
+              <a:t>72分</a:t>
+            </a:r>
+          </a:p>
+        </p:txBody>
+      </p:sp>
+      <p:sp>
+        <p:nvSpPr>
+          <p:cNvPr id="37" name="Rounded Rectangle 36"/>
+          <p:cNvSpPr/>
+          <p:nvPr/>
+        </p:nvSpPr>
+        <p:spPr>
+          <a:xfrm>
+            <a:off x="4000500" y="4533900"/>
+            <a:ext cx="5974080" cy="266700"/>
+          </a:xfrm>
+          <a:prstGeom prst="roundRect">
+            <a:avLst>
+              <a:gd name="adj" fmla="val 30000"/>
+            </a:avLst>
+          </a:prstGeom>
+          <a:gradFill rotWithShape="1">
+            <a:gsLst>
+              <a:gs pos="0">
+                <a:srgbClr val="EEF4F9"/>
+              </a:gs>
+              <a:gs pos="100000">
+                <a:srgbClr val="DAE7F2"/>
+              </a:gs>
+            </a:gsLst>
+            <a:lin scaled="0" ang="16200000"/>
+          </a:gradFill>
+          <a:ln w="19050">
+            <a:solidFill>
+              <a:srgbClr val="014172"/>
+            </a:solidFill>
+          </a:ln>
+          <a:effectLst/>
+        </p:spPr>
+        <p:txBody>
+          <a:bodyPr rtlCol="0" anchor="ctr"/>
+          <a:lstStyle/>
+          <a:p>
+            <a:pPr algn="ctr"/>
+          </a:p>
+        </p:txBody>
+      </p:sp>
+      <p:sp>
+        <p:nvSpPr>
+          <p:cNvPr id="38" name="TextBox 37"/>
+          <p:cNvSpPr txBox="1"/>
+          <p:nvPr/>
+        </p:nvSpPr>
+        <p:spPr>
+          <a:xfrm>
+            <a:off x="704850" y="4476750"/>
+            <a:ext cx="3143250" cy="228600"/>
+          </a:xfrm>
+          <a:prstGeom prst="rect">
+            <a:avLst/>
+          </a:prstGeom>
+          <a:noFill/>
+        </p:spPr>
+        <p:txBody>
+          <a:bodyPr wrap="none" lIns="0" rIns="0" tIns="0" bIns="0" anchor="ctr">
+            <a:spAutoFit/>
+          </a:bodyPr>
+          <a:lstStyle/>
+          <a:p>
+            <a:pPr algn="l"/>
+            <a:r>
+              <a:rPr sz="1200" b="1">
+                <a:solidFill>
+                  <a:srgbClr val="2E2E33"/>
+                </a:solidFill>
+                <a:latin typeface="Yu Gothic UI"/>
+              </a:rPr>
+              <a:t>ミニ</a:t>
+            </a:r>
+          </a:p>
+        </p:txBody>
+      </p:sp>
+      <p:sp>
+        <p:nvSpPr>
+          <p:cNvPr id="39" name="TextBox 38"/>
+          <p:cNvSpPr txBox="1"/>
+          <p:nvPr/>
+        </p:nvSpPr>
+        <p:spPr>
+          <a:xfrm>
+            <a:off x="704850" y="4705350"/>
+            <a:ext cx="3143250" cy="209550"/>
+          </a:xfrm>
+          <a:prstGeom prst="rect">
+            <a:avLst/>
+          </a:prstGeom>
+          <a:noFill/>
+        </p:spPr>
+        <p:txBody>
+          <a:bodyPr wrap="none" lIns="0" rIns="0" tIns="0" bIns="0" anchor="ctr">
+            <a:spAutoFit/>
+          </a:bodyPr>
+          <a:lstStyle/>
+          <a:p>
+            <a:pPr algn="l"/>
+            <a:r>
+              <a:rPr sz="1050" b="0">
+                <a:solidFill>
+                  <a:srgbClr val="6A717B"/>
+                </a:solidFill>
+                <a:latin typeface="Yu Gothic UI"/>
+              </a:rPr>
+              <a:t>135g/h ／ ＋1分</a:t>
+            </a:r>
+          </a:p>
+        </p:txBody>
+      </p:sp>
+      <p:sp>
+        <p:nvSpPr>
+          <p:cNvPr id="40" name="TextBox 39"/>
+          <p:cNvSpPr txBox="1"/>
+          <p:nvPr/>
+        </p:nvSpPr>
+        <p:spPr>
+          <a:xfrm>
+            <a:off x="10088880" y="4533900"/>
+            <a:ext cx="952500" cy="266700"/>
+          </a:xfrm>
+          <a:prstGeom prst="rect">
+            <a:avLst/>
+          </a:prstGeom>
+          <a:noFill/>
+        </p:spPr>
+        <p:txBody>
+          <a:bodyPr wrap="none" lIns="0" rIns="0" tIns="0" bIns="0" anchor="ctr">
+            <a:spAutoFit/>
+          </a:bodyPr>
+          <a:lstStyle/>
+          <a:p>
+            <a:pPr algn="l"/>
+            <a:r>
+              <a:rPr sz="1350" b="1">
+                <a:solidFill>
+                  <a:srgbClr val="014172"/>
+                </a:solidFill>
+                <a:latin typeface="Yu Gothic UI"/>
+              </a:rPr>
+              <a:t>112分</a:t>
+            </a:r>
+          </a:p>
+        </p:txBody>
+      </p:sp>
+      <p:sp>
+        <p:nvSpPr>
+          <p:cNvPr id="41" name="Rectangle 40"/>
+          <p:cNvSpPr/>
+          <p:nvPr/>
+        </p:nvSpPr>
+        <p:spPr>
+          <a:xfrm>
+            <a:off x="609600" y="5295900"/>
+            <a:ext cx="10210800" cy="9525"/>
+          </a:xfrm>
+          <a:prstGeom prst="rect">
+            <a:avLst/>
+          </a:prstGeom>
+          <a:solidFill>
+            <a:srgbClr val="E2E7EC"/>
+          </a:solidFill>
+          <a:ln>
+            <a:noFill/>
+          </a:ln>
+          <a:effectLst/>
+        </p:spPr>
+        <p:txBody>
+          <a:bodyPr rtlCol="0" anchor="ctr"/>
+          <a:lstStyle/>
+          <a:p>
+            <a:pPr algn="ctr"/>
+          </a:p>
+        </p:txBody>
+      </p:sp>
+      <p:sp>
+        <p:nvSpPr>
+          <p:cNvPr id="42" name="TextBox 41"/>
+          <p:cNvSpPr txBox="1"/>
+          <p:nvPr/>
+        </p:nvSpPr>
+        <p:spPr>
+          <a:xfrm>
+            <a:off x="609600" y="5429250"/>
+            <a:ext cx="7239000" cy="247650"/>
+          </a:xfrm>
+          <a:prstGeom prst="rect">
+            <a:avLst/>
+          </a:prstGeom>
+          <a:noFill/>
+        </p:spPr>
+        <p:txBody>
+          <a:bodyPr wrap="none" lIns="0" rIns="0" tIns="0" bIns="0" anchor="ctr">
+            <a:spAutoFit/>
+          </a:bodyPr>
+          <a:lstStyle/>
+          <a:p>
+            <a:pPr algn="l"/>
+            <a:r>
+              <a:rPr sz="1425" b="1">
+                <a:solidFill>
+                  <a:srgbClr val="2E2E33"/>
+                </a:solidFill>
+                <a:latin typeface="Yu Gothic UI"/>
+              </a:rPr>
+              <a:t>火力が強い機種ほど、早く使い切ります。</a:t>
+            </a:r>
+          </a:p>
+        </p:txBody>
+      </p:sp>
+      <p:sp>
+        <p:nvSpPr>
+          <p:cNvPr id="43" name="TextBox 42"/>
+          <p:cNvSpPr txBox="1"/>
+          <p:nvPr/>
+        </p:nvSpPr>
+        <p:spPr>
+          <a:xfrm>
+            <a:off x="609600" y="5676900"/>
+            <a:ext cx="7620000" cy="209550"/>
+          </a:xfrm>
+          <a:prstGeom prst="rect">
+            <a:avLst/>
+          </a:prstGeom>
+          <a:noFill/>
+        </p:spPr>
+        <p:txBody>
+          <a:bodyPr wrap="none" lIns="0" rIns="0" tIns="0" bIns="0" anchor="ctr">
+            <a:spAutoFit/>
+          </a:bodyPr>
+          <a:lstStyle/>
+          <a:p>
+            <a:pPr algn="l"/>
+            <a:r>
+              <a:rPr sz="1050" b="0">
+                <a:solidFill>
+                  <a:srgbClr val="6A717B"/>
+                </a:solidFill>
+                <a:latin typeface="Yu Gothic UI"/>
+              </a:rPr>
+              <a:t>メーカー公表値からの計算です（実測ではありません）</a:t>
+            </a:r>
+          </a:p>
+        </p:txBody>
+      </p:sp>
+      <p:sp>
+        <p:nvSpPr>
+          <p:cNvPr id="44" name="TextBox 43"/>
+          <p:cNvSpPr txBox="1"/>
+          <p:nvPr/>
+        </p:nvSpPr>
+        <p:spPr>
+          <a:xfrm>
+            <a:off x="7962900" y="5676900"/>
+            <a:ext cx="2857500" cy="209550"/>
+          </a:xfrm>
+          <a:prstGeom prst="rect">
+            <a:avLst/>
+          </a:prstGeom>
+          <a:noFill/>
+        </p:spPr>
+        <p:txBody>
+          <a:bodyPr wrap="none" lIns="0" rIns="0" tIns="0" bIns="0" anchor="ctr">
+            <a:spAutoFit/>
+          </a:bodyPr>
+          <a:lstStyle/>
+          <a:p>
+            <a:pPr algn="r"/>
+            <a:r>
+              <a:rPr sz="1050" b="0">
+                <a:solidFill>
+                  <a:srgbClr val="6A717B"/>
+                </a:solidFill>
+                <a:latin typeface="Yu Gothic UI"/>
+              </a:rPr>
+              <a:t>寸法で選ぶ　sunpou.nexeed-lab.com</a:t>
+            </a:r>
+          </a:p>
+        </p:txBody>
+      </p:sp>
+    </p:spTree>
+  </p:cSld>
+  <p:clrMapOvr>
+    <a:masterClrMapping/>
+  </p:clrMapOvr>
+</p:sld>
+</file>
+
+<file path=ppt/slides/slide13.xml><?xml version="1.0" encoding="utf-8"?>
+<p:sld xmlns:a="http://schemas.openxmlformats.org/drawingml/2006/main" xmlns:p="http://schemas.openxmlformats.org/presentationml/2006/main" xmlns:r="http://schemas.openxmlformats.org/officeDocument/2006/relationships">
+  <p:cSld>
+    <p:spTree>
+      <p:nvGrpSpPr>
+        <p:cNvPr id="1" name=""/>
+        <p:cNvGrpSpPr/>
+        <p:nvPr/>
+      </p:nvGrpSpPr>
+      <p:grpSpPr/>
+      <p:sp>
+        <p:nvSpPr>
+          <p:cNvPr id="2" name="Rectangle 1"/>
+          <p:cNvSpPr/>
+          <p:nvPr/>
+        </p:nvSpPr>
+        <p:spPr>
+          <a:xfrm>
+            <a:off x="0" y="0"/>
+            <a:ext cx="11430000" cy="6000750"/>
+          </a:xfrm>
+          <a:prstGeom prst="rect">
+            <a:avLst/>
+          </a:prstGeom>
+          <a:solidFill>
+            <a:srgbClr val="FCFCFC"/>
+          </a:solidFill>
+          <a:ln>
+            <a:noFill/>
+          </a:ln>
+          <a:effectLst/>
+        </p:spPr>
+        <p:txBody>
+          <a:bodyPr rtlCol="0" anchor="ctr"/>
+          <a:lstStyle/>
+          <a:p>
+            <a:pPr algn="ctr"/>
+          </a:p>
+        </p:txBody>
+      </p:sp>
+      <p:sp>
+        <p:nvSpPr>
+          <p:cNvPr id="3" name="Rectangle 2"/>
+          <p:cNvSpPr/>
+          <p:nvPr/>
+        </p:nvSpPr>
+        <p:spPr>
+          <a:xfrm>
+            <a:off x="0" y="0"/>
+            <a:ext cx="114300" cy="6000750"/>
+          </a:xfrm>
+          <a:prstGeom prst="rect">
+            <a:avLst/>
+          </a:prstGeom>
+          <a:solidFill>
+            <a:srgbClr val="014172"/>
+          </a:solidFill>
+          <a:ln>
+            <a:noFill/>
+          </a:ln>
+          <a:effectLst/>
+        </p:spPr>
+        <p:txBody>
+          <a:bodyPr rtlCol="0" anchor="ctr"/>
+          <a:lstStyle/>
+          <a:p>
+            <a:pPr algn="ctr"/>
+          </a:p>
+        </p:txBody>
+      </p:sp>
+      <p:sp>
+        <p:nvSpPr>
+          <p:cNvPr id="4" name="Rectangle 3"/>
+          <p:cNvSpPr/>
+          <p:nvPr/>
+        </p:nvSpPr>
+        <p:spPr>
+          <a:xfrm>
+            <a:off x="0" y="0"/>
+            <a:ext cx="11430000" cy="1504950"/>
+          </a:xfrm>
+          <a:prstGeom prst="rect">
+            <a:avLst/>
+          </a:prstGeom>
+          <a:solidFill>
+            <a:srgbClr val="014172"/>
+          </a:solidFill>
+          <a:ln>
+            <a:noFill/>
+          </a:ln>
+          <a:effectLst/>
+        </p:spPr>
+        <p:txBody>
+          <a:bodyPr rtlCol="0" anchor="ctr"/>
+          <a:lstStyle/>
+          <a:p>
+            <a:pPr algn="ctr"/>
+          </a:p>
+        </p:txBody>
+      </p:sp>
+      <p:sp>
+        <p:nvSpPr>
+          <p:cNvPr id="5" name="TextBox 4"/>
+          <p:cNvSpPr txBox="1"/>
+          <p:nvPr/>
+        </p:nvSpPr>
+        <p:spPr>
+          <a:xfrm>
+            <a:off x="609600" y="361950"/>
+            <a:ext cx="7429500" cy="476250"/>
+          </a:xfrm>
+          <a:prstGeom prst="rect">
+            <a:avLst/>
+          </a:prstGeom>
+          <a:noFill/>
+        </p:spPr>
+        <p:txBody>
+          <a:bodyPr wrap="none" lIns="0" rIns="0" tIns="0" bIns="0" anchor="ctr">
+            <a:spAutoFit/>
+          </a:bodyPr>
+          <a:lstStyle/>
+          <a:p>
+            <a:pPr algn="l"/>
+            <a:r>
+              <a:rPr sz="3000" b="1">
+                <a:solidFill>
+                  <a:srgbClr val="FFFFFF"/>
+                </a:solidFill>
+                <a:latin typeface="Yu Gothic UI"/>
+              </a:rPr>
+              <a:t>6本に届くのは「全部まかなう」とき</a:t>
+            </a:r>
+          </a:p>
+        </p:txBody>
+      </p:sp>
+      <p:sp>
+        <p:nvSpPr>
+          <p:cNvPr id="6" name="TextBox 5"/>
+          <p:cNvSpPr txBox="1"/>
+          <p:nvPr/>
+        </p:nvSpPr>
+        <p:spPr>
+          <a:xfrm>
+            <a:off x="609600" y="876300"/>
+            <a:ext cx="7429500" cy="247650"/>
+          </a:xfrm>
+          <a:prstGeom prst="rect">
+            <a:avLst/>
+          </a:prstGeom>
+          <a:noFill/>
+        </p:spPr>
+        <p:txBody>
+          <a:bodyPr wrap="none" lIns="0" rIns="0" tIns="0" bIns="0" anchor="ctr">
+            <a:spAutoFit/>
+          </a:bodyPr>
+          <a:lstStyle/>
+          <a:p>
+            <a:pPr algn="l"/>
+            <a:r>
+              <a:rPr sz="1425" b="0">
+                <a:solidFill>
+                  <a:srgbClr val="DAE7F2"/>
+                </a:solidFill>
+                <a:latin typeface="Yu Gothic UI"/>
+              </a:rPr>
+              <a:t>1人・1週間あたり ／ 気温10℃での計算</a:t>
+            </a:r>
+          </a:p>
+        </p:txBody>
+      </p:sp>
+      <p:sp>
+        <p:nvSpPr>
+          <p:cNvPr id="7" name="Rounded Rectangle 6"/>
+          <p:cNvSpPr/>
+          <p:nvPr/>
+        </p:nvSpPr>
+        <p:spPr>
+          <a:xfrm>
+            <a:off x="8305800" y="247650"/>
+            <a:ext cx="2514600" cy="1009650"/>
+          </a:xfrm>
+          <a:prstGeom prst="roundRect">
+            <a:avLst>
+              <a:gd name="adj" fmla="val 12000"/>
+            </a:avLst>
+          </a:prstGeom>
+          <a:solidFill>
+            <a:srgbClr val="FFFFFF"/>
+          </a:solidFill>
+          <a:ln>
+            <a:noFill/>
+          </a:ln>
+          <a:effectLst>
+            <a:outerShdw blurRad="254000" dist="63500" dir="5400000" rotWithShape="0">
+              <a:srgbClr val="0B2B45">
+                <a:alpha val="30000"/>
+              </a:srgbClr>
+            </a:outerShdw>
+          </a:effectLst>
+        </p:spPr>
+        <p:txBody>
+          <a:bodyPr rtlCol="0" anchor="ctr"/>
+          <a:lstStyle/>
+          <a:p>
+            <a:pPr algn="ctr"/>
+          </a:p>
+        </p:txBody>
+      </p:sp>
+      <p:sp>
+        <p:nvSpPr>
+          <p:cNvPr id="8" name="TextBox 7"/>
+          <p:cNvSpPr txBox="1"/>
+          <p:nvPr/>
+        </p:nvSpPr>
+        <p:spPr>
+          <a:xfrm>
+            <a:off x="8515350" y="400050"/>
+            <a:ext cx="2133600" cy="209550"/>
+          </a:xfrm>
+          <a:prstGeom prst="rect">
+            <a:avLst/>
+          </a:prstGeom>
+          <a:noFill/>
+        </p:spPr>
+        <p:txBody>
+          <a:bodyPr wrap="none" lIns="0" rIns="0" tIns="0" bIns="0" anchor="ctr">
+            <a:spAutoFit/>
+          </a:bodyPr>
+          <a:lstStyle/>
+          <a:p>
+            <a:pPr algn="l"/>
+            <a:r>
+              <a:rPr sz="1125" b="0">
+                <a:solidFill>
+                  <a:srgbClr val="6A717B"/>
+                </a:solidFill>
+                <a:latin typeface="Yu Gothic UI"/>
+              </a:rPr>
+              <a:t>全部まかなっても</a:t>
+            </a:r>
+          </a:p>
+        </p:txBody>
+      </p:sp>
+      <p:sp>
+        <p:nvSpPr>
+          <p:cNvPr id="9" name="TextBox 8"/>
+          <p:cNvSpPr txBox="1"/>
+          <p:nvPr/>
+        </p:nvSpPr>
+        <p:spPr>
+          <a:xfrm>
+            <a:off x="8515350" y="647700"/>
+            <a:ext cx="2133600" cy="533400"/>
+          </a:xfrm>
+          <a:prstGeom prst="rect">
+            <a:avLst/>
+          </a:prstGeom>
+          <a:noFill/>
+        </p:spPr>
+        <p:txBody>
+          <a:bodyPr wrap="none" lIns="0" rIns="0" tIns="0" bIns="0" anchor="ctr">
+            <a:spAutoFit/>
+          </a:bodyPr>
+          <a:lstStyle/>
+          <a:p>
+            <a:pPr algn="l"/>
+            <a:r>
+              <a:rPr sz="3900" b="1">
+                <a:solidFill>
+                  <a:srgbClr val="014172"/>
+                </a:solidFill>
+                <a:latin typeface="Yu Gothic UI"/>
+              </a:rPr>
+              <a:t>5.8</a:t>
+            </a:r>
+            <a:r>
+              <a:rPr sz="1950" b="1">
+                <a:solidFill>
+                  <a:srgbClr val="014172"/>
+                </a:solidFill>
+                <a:latin typeface="Yu Gothic UI"/>
+              </a:rPr>
+              <a:t>本</a:t>
+            </a:r>
+          </a:p>
+        </p:txBody>
+      </p:sp>
+      <p:sp>
+        <p:nvSpPr>
+          <p:cNvPr id="10" name="Rectangle 9"/>
+          <p:cNvSpPr/>
+          <p:nvPr/>
+        </p:nvSpPr>
+        <p:spPr>
+          <a:xfrm>
+            <a:off x="495300" y="1905000"/>
+            <a:ext cx="10439400" cy="647700"/>
+          </a:xfrm>
+          <a:prstGeom prst="rect">
+            <a:avLst/>
+          </a:prstGeom>
+          <a:solidFill>
+            <a:srgbClr val="E6EEF6"/>
+          </a:solidFill>
+          <a:ln>
+            <a:noFill/>
+          </a:ln>
+          <a:effectLst/>
+        </p:spPr>
+        <p:txBody>
+          <a:bodyPr rtlCol="0" anchor="ctr"/>
+          <a:lstStyle/>
+          <a:p>
+            <a:pPr algn="ctr"/>
+          </a:p>
+        </p:txBody>
+      </p:sp>
+      <p:sp>
+        <p:nvSpPr>
+          <p:cNvPr id="11" name="Rectangle 10"/>
+          <p:cNvSpPr/>
+          <p:nvPr/>
+        </p:nvSpPr>
+        <p:spPr>
+          <a:xfrm>
+            <a:off x="495300" y="1905000"/>
+            <a:ext cx="47625" cy="647700"/>
+          </a:xfrm>
+          <a:prstGeom prst="rect">
+            <a:avLst/>
+          </a:prstGeom>
+          <a:solidFill>
+            <a:srgbClr val="014172"/>
+          </a:solidFill>
+          <a:ln>
+            <a:noFill/>
+          </a:ln>
+          <a:effectLst/>
+        </p:spPr>
+        <p:txBody>
+          <a:bodyPr rtlCol="0" anchor="ctr"/>
+          <a:lstStyle/>
+          <a:p>
+            <a:pPr algn="ctr"/>
+          </a:p>
+        </p:txBody>
+      </p:sp>
+      <p:sp>
+        <p:nvSpPr>
+          <p:cNvPr id="12" name="Rectangle 11"/>
+          <p:cNvSpPr/>
+          <p:nvPr/>
+        </p:nvSpPr>
+        <p:spPr>
+          <a:xfrm>
+            <a:off x="495300" y="2628900"/>
+            <a:ext cx="10439400" cy="647700"/>
+          </a:xfrm>
+          <a:prstGeom prst="rect">
+            <a:avLst/>
+          </a:prstGeom>
+          <a:solidFill>
+            <a:srgbClr val="FCFCFC"/>
+          </a:solidFill>
+          <a:ln>
+            <a:noFill/>
+          </a:ln>
+          <a:effectLst/>
+        </p:spPr>
+        <p:txBody>
+          <a:bodyPr rtlCol="0" anchor="ctr"/>
+          <a:lstStyle/>
+          <a:p>
+            <a:pPr algn="ctr"/>
+          </a:p>
+        </p:txBody>
+      </p:sp>
+      <p:sp>
+        <p:nvSpPr>
+          <p:cNvPr id="13" name="Rectangle 12"/>
+          <p:cNvSpPr/>
+          <p:nvPr/>
+        </p:nvSpPr>
+        <p:spPr>
+          <a:xfrm>
+            <a:off x="495300" y="3352800"/>
+            <a:ext cx="10439400" cy="647700"/>
+          </a:xfrm>
+          <a:prstGeom prst="rect">
+            <a:avLst/>
+          </a:prstGeom>
+          <a:solidFill>
+            <a:srgbClr val="F2F5F8"/>
+          </a:solidFill>
+          <a:ln>
+            <a:noFill/>
+          </a:ln>
+          <a:effectLst/>
+        </p:spPr>
+        <p:txBody>
+          <a:bodyPr rtlCol="0" anchor="ctr"/>
+          <a:lstStyle/>
+          <a:p>
+            <a:pPr algn="ctr"/>
+          </a:p>
+        </p:txBody>
+      </p:sp>
+      <p:sp>
+        <p:nvSpPr>
+          <p:cNvPr id="14" name="Rectangle 13"/>
+          <p:cNvSpPr/>
+          <p:nvPr/>
+        </p:nvSpPr>
+        <p:spPr>
+          <a:xfrm>
+            <a:off x="495300" y="4076700"/>
+            <a:ext cx="10439400" cy="647700"/>
+          </a:xfrm>
+          <a:prstGeom prst="rect">
+            <a:avLst/>
+          </a:prstGeom>
+          <a:solidFill>
+            <a:srgbClr val="FCFCFC"/>
+          </a:solidFill>
+          <a:ln>
+            <a:noFill/>
+          </a:ln>
+          <a:effectLst/>
+        </p:spPr>
+        <p:txBody>
+          <a:bodyPr rtlCol="0" anchor="ctr"/>
+          <a:lstStyle/>
+          <a:p>
+            <a:pPr algn="ctr"/>
+          </a:p>
+        </p:txBody>
+      </p:sp>
+      <p:sp>
+        <p:nvSpPr>
+          <p:cNvPr id="15" name="Rounded Rectangle 14"/>
+          <p:cNvSpPr/>
+          <p:nvPr/>
+        </p:nvSpPr>
+        <p:spPr>
+          <a:xfrm>
+            <a:off x="4095750" y="2057400"/>
+            <a:ext cx="5248275" cy="323850"/>
+          </a:xfrm>
+          <a:prstGeom prst="roundRect">
+            <a:avLst>
+              <a:gd name="adj" fmla="val 30000"/>
+            </a:avLst>
+          </a:prstGeom>
+          <a:gradFill rotWithShape="1">
+            <a:gsLst>
+              <a:gs pos="0">
+                <a:srgbClr val="EEF4F9"/>
+              </a:gs>
+              <a:gs pos="100000">
+                <a:srgbClr val="DAE7F2"/>
+              </a:gs>
+            </a:gsLst>
+            <a:lin scaled="0" ang="16200000"/>
+          </a:gradFill>
+          <a:ln w="19050">
+            <a:solidFill>
+              <a:srgbClr val="014172"/>
+            </a:solidFill>
+          </a:ln>
+          <a:effectLst/>
+        </p:spPr>
+        <p:txBody>
+          <a:bodyPr rtlCol="0" anchor="ctr"/>
+          <a:lstStyle/>
+          <a:p>
+            <a:pPr algn="ctr"/>
+          </a:p>
+        </p:txBody>
+      </p:sp>
+      <p:sp>
+        <p:nvSpPr>
+          <p:cNvPr id="16" name="TextBox 15"/>
+          <p:cNvSpPr txBox="1"/>
+          <p:nvPr/>
+        </p:nvSpPr>
+        <p:spPr>
+          <a:xfrm>
+            <a:off x="704850" y="2019300"/>
+            <a:ext cx="3333750" cy="228600"/>
+          </a:xfrm>
+          <a:prstGeom prst="rect">
+            <a:avLst/>
+          </a:prstGeom>
+          <a:noFill/>
+        </p:spPr>
+        <p:txBody>
+          <a:bodyPr wrap="none" lIns="0" rIns="0" tIns="0" bIns="0" anchor="ctr">
+            <a:spAutoFit/>
+          </a:bodyPr>
+          <a:lstStyle/>
+          <a:p>
+            <a:pPr algn="l"/>
+            <a:r>
+              <a:rPr sz="1200" b="1">
+                <a:solidFill>
+                  <a:srgbClr val="2E2E33"/>
+                </a:solidFill>
+                <a:latin typeface="Yu Gothic UI"/>
+              </a:rPr>
+              <a:t>食事＋カップ麺＋飲み物＋お湯</a:t>
+            </a:r>
+          </a:p>
+        </p:txBody>
+      </p:sp>
+      <p:sp>
+        <p:nvSpPr>
+          <p:cNvPr id="17" name="TextBox 16"/>
+          <p:cNvSpPr txBox="1"/>
+          <p:nvPr/>
+        </p:nvSpPr>
+        <p:spPr>
+          <a:xfrm>
+            <a:off x="704850" y="2266950"/>
+            <a:ext cx="3333750" cy="209550"/>
+          </a:xfrm>
+          <a:prstGeom prst="rect">
+            <a:avLst/>
+          </a:prstGeom>
+          <a:noFill/>
+        </p:spPr>
+        <p:txBody>
+          <a:bodyPr wrap="none" lIns="0" rIns="0" tIns="0" bIns="0" anchor="ctr">
+            <a:spAutoFit/>
+          </a:bodyPr>
+          <a:lstStyle/>
+          <a:p>
+            <a:pPr algn="l"/>
+            <a:r>
+              <a:rPr sz="1050" b="0">
+                <a:solidFill>
+                  <a:srgbClr val="6A717B"/>
+                </a:solidFill>
+                <a:latin typeface="Yu Gothic UI"/>
+              </a:rPr>
+              <a:t>全部まかなう</a:t>
+            </a:r>
+          </a:p>
+        </p:txBody>
+      </p:sp>
+      <p:sp>
+        <p:nvSpPr>
+          <p:cNvPr id="18" name="TextBox 17"/>
+          <p:cNvSpPr txBox="1"/>
+          <p:nvPr/>
+        </p:nvSpPr>
+        <p:spPr>
+          <a:xfrm>
+            <a:off x="9458325" y="2057400"/>
+            <a:ext cx="952500" cy="323850"/>
+          </a:xfrm>
+          <a:prstGeom prst="rect">
+            <a:avLst/>
+          </a:prstGeom>
+          <a:noFill/>
+        </p:spPr>
+        <p:txBody>
+          <a:bodyPr wrap="none" lIns="0" rIns="0" tIns="0" bIns="0" anchor="ctr">
+            <a:spAutoFit/>
+          </a:bodyPr>
+          <a:lstStyle/>
+          <a:p>
+            <a:pPr algn="l"/>
+            <a:r>
+              <a:rPr sz="1425" b="1">
+                <a:solidFill>
+                  <a:srgbClr val="014172"/>
+                </a:solidFill>
+                <a:latin typeface="Yu Gothic UI"/>
+              </a:rPr>
+              <a:t>5.8本</a:t>
+            </a:r>
+          </a:p>
+        </p:txBody>
+      </p:sp>
+      <p:sp>
+        <p:nvSpPr>
+          <p:cNvPr id="19" name="Rounded Rectangle 18"/>
+          <p:cNvSpPr/>
+          <p:nvPr/>
+        </p:nvSpPr>
+        <p:spPr>
+          <a:xfrm>
+            <a:off x="4095750" y="2781300"/>
+            <a:ext cx="4071938" cy="323850"/>
+          </a:xfrm>
+          <a:prstGeom prst="roundRect">
+            <a:avLst>
+              <a:gd name="adj" fmla="val 30000"/>
+            </a:avLst>
+          </a:prstGeom>
+          <a:gradFill rotWithShape="1">
+            <a:gsLst>
+              <a:gs pos="0">
+                <a:srgbClr val="EEF4F9"/>
+              </a:gs>
+              <a:gs pos="100000">
+                <a:srgbClr val="DAE7F2"/>
+              </a:gs>
+            </a:gsLst>
+            <a:lin scaled="0" ang="16200000"/>
+          </a:gradFill>
+          <a:ln w="19050">
+            <a:solidFill>
+              <a:srgbClr val="014172"/>
+            </a:solidFill>
+          </a:ln>
+          <a:effectLst/>
+        </p:spPr>
+        <p:txBody>
+          <a:bodyPr rtlCol="0" anchor="ctr"/>
+          <a:lstStyle/>
+          <a:p>
+            <a:pPr algn="ctr"/>
+          </a:p>
+        </p:txBody>
+      </p:sp>
+      <p:sp>
+        <p:nvSpPr>
+          <p:cNvPr id="20" name="TextBox 19"/>
+          <p:cNvSpPr txBox="1"/>
+          <p:nvPr/>
+        </p:nvSpPr>
+        <p:spPr>
+          <a:xfrm>
+            <a:off x="704850" y="2743200"/>
+            <a:ext cx="3333750" cy="228600"/>
+          </a:xfrm>
+          <a:prstGeom prst="rect">
+            <a:avLst/>
+          </a:prstGeom>
+          <a:noFill/>
+        </p:spPr>
+        <p:txBody>
+          <a:bodyPr wrap="none" lIns="0" rIns="0" tIns="0" bIns="0" anchor="ctr">
+            <a:spAutoFit/>
+          </a:bodyPr>
+          <a:lstStyle/>
+          <a:p>
+            <a:pPr algn="l"/>
+            <a:r>
+              <a:rPr sz="1200" b="1">
+                <a:solidFill>
+                  <a:srgbClr val="2E2E33"/>
+                </a:solidFill>
+                <a:latin typeface="Yu Gothic UI"/>
+              </a:rPr>
+              <a:t>食事＋飲み物＋お湯</a:t>
+            </a:r>
+          </a:p>
+        </p:txBody>
+      </p:sp>
+      <p:sp>
+        <p:nvSpPr>
+          <p:cNvPr id="21" name="TextBox 20"/>
+          <p:cNvSpPr txBox="1"/>
+          <p:nvPr/>
+        </p:nvSpPr>
+        <p:spPr>
+          <a:xfrm>
+            <a:off x="704850" y="2990850"/>
+            <a:ext cx="3333750" cy="209550"/>
+          </a:xfrm>
+          <a:prstGeom prst="rect">
+            <a:avLst/>
+          </a:prstGeom>
+          <a:noFill/>
+        </p:spPr>
+        <p:txBody>
+          <a:bodyPr wrap="none" lIns="0" rIns="0" tIns="0" bIns="0" anchor="ctr">
+            <a:spAutoFit/>
+          </a:bodyPr>
+          <a:lstStyle/>
+          <a:p>
+            <a:pPr algn="l"/>
+            <a:r>
+              <a:rPr sz="1050" b="0">
+                <a:solidFill>
+                  <a:srgbClr val="6A717B"/>
+                </a:solidFill>
+                <a:latin typeface="Yu Gothic UI"/>
+              </a:rPr>
+              <a:t>カップ麺なし</a:t>
+            </a:r>
+          </a:p>
+        </p:txBody>
+      </p:sp>
+      <p:sp>
+        <p:nvSpPr>
+          <p:cNvPr id="22" name="TextBox 21"/>
+          <p:cNvSpPr txBox="1"/>
+          <p:nvPr/>
+        </p:nvSpPr>
+        <p:spPr>
+          <a:xfrm>
+            <a:off x="8281988" y="2781300"/>
+            <a:ext cx="952500" cy="323850"/>
+          </a:xfrm>
+          <a:prstGeom prst="rect">
+            <a:avLst/>
+          </a:prstGeom>
+          <a:noFill/>
+        </p:spPr>
+        <p:txBody>
+          <a:bodyPr wrap="none" lIns="0" rIns="0" tIns="0" bIns="0" anchor="ctr">
+            <a:spAutoFit/>
+          </a:bodyPr>
+          <a:lstStyle/>
+          <a:p>
+            <a:pPr algn="l"/>
+            <a:r>
+              <a:rPr sz="1425" b="1">
+                <a:solidFill>
+                  <a:srgbClr val="014172"/>
+                </a:solidFill>
+                <a:latin typeface="Yu Gothic UI"/>
+              </a:rPr>
+              <a:t>4.5本</a:t>
+            </a:r>
+          </a:p>
+        </p:txBody>
+      </p:sp>
+      <p:sp>
+        <p:nvSpPr>
+          <p:cNvPr id="23" name="Rounded Rectangle 22"/>
+          <p:cNvSpPr/>
+          <p:nvPr/>
+        </p:nvSpPr>
+        <p:spPr>
+          <a:xfrm>
+            <a:off x="4095750" y="3505200"/>
+            <a:ext cx="2895600" cy="323850"/>
+          </a:xfrm>
+          <a:prstGeom prst="roundRect">
+            <a:avLst>
+              <a:gd name="adj" fmla="val 30000"/>
+            </a:avLst>
+          </a:prstGeom>
+          <a:gradFill rotWithShape="1">
+            <a:gsLst>
+              <a:gs pos="0">
+                <a:srgbClr val="EEF4F9"/>
+              </a:gs>
+              <a:gs pos="100000">
+                <a:srgbClr val="DAE7F2"/>
+              </a:gs>
+            </a:gsLst>
+            <a:lin scaled="0" ang="16200000"/>
+          </a:gradFill>
+          <a:ln w="19050">
+            <a:solidFill>
+              <a:srgbClr val="014172"/>
+            </a:solidFill>
+          </a:ln>
+          <a:effectLst/>
+        </p:spPr>
+        <p:txBody>
+          <a:bodyPr rtlCol="0" anchor="ctr"/>
+          <a:lstStyle/>
+          <a:p>
+            <a:pPr algn="ctr"/>
+          </a:p>
+        </p:txBody>
+      </p:sp>
+      <p:sp>
+        <p:nvSpPr>
+          <p:cNvPr id="24" name="TextBox 23"/>
+          <p:cNvSpPr txBox="1"/>
+          <p:nvPr/>
+        </p:nvSpPr>
+        <p:spPr>
+          <a:xfrm>
+            <a:off x="704850" y="3467100"/>
+            <a:ext cx="3333750" cy="228600"/>
+          </a:xfrm>
+          <a:prstGeom prst="rect">
+            <a:avLst/>
+          </a:prstGeom>
+          <a:noFill/>
+        </p:spPr>
+        <p:txBody>
+          <a:bodyPr wrap="none" lIns="0" rIns="0" tIns="0" bIns="0" anchor="ctr">
+            <a:spAutoFit/>
+          </a:bodyPr>
+          <a:lstStyle/>
+          <a:p>
+            <a:pPr algn="l"/>
+            <a:r>
+              <a:rPr sz="1200" b="1">
+                <a:solidFill>
+                  <a:srgbClr val="2E2E33"/>
+                </a:solidFill>
+                <a:latin typeface="Yu Gothic UI"/>
+              </a:rPr>
+              <a:t>食事＋飲み物</a:t>
+            </a:r>
+          </a:p>
+        </p:txBody>
+      </p:sp>
+      <p:sp>
+        <p:nvSpPr>
+          <p:cNvPr id="25" name="TextBox 24"/>
+          <p:cNvSpPr txBox="1"/>
+          <p:nvPr/>
+        </p:nvSpPr>
+        <p:spPr>
+          <a:xfrm>
+            <a:off x="704850" y="3714750"/>
+            <a:ext cx="3333750" cy="209550"/>
+          </a:xfrm>
+          <a:prstGeom prst="rect">
+            <a:avLst/>
+          </a:prstGeom>
+          <a:noFill/>
+        </p:spPr>
+        <p:txBody>
+          <a:bodyPr wrap="none" lIns="0" rIns="0" tIns="0" bIns="0" anchor="ctr">
+            <a:spAutoFit/>
+          </a:bodyPr>
+          <a:lstStyle/>
+          <a:p>
+            <a:pPr algn="l"/>
+            <a:r>
+              <a:rPr sz="1050" b="0">
+                <a:solidFill>
+                  <a:srgbClr val="6A717B"/>
+                </a:solidFill>
+                <a:latin typeface="Yu Gothic UI"/>
+              </a:rPr>
+              <a:t>お湯を沸かさない</a:t>
+            </a:r>
+          </a:p>
+        </p:txBody>
+      </p:sp>
+      <p:sp>
+        <p:nvSpPr>
+          <p:cNvPr id="26" name="TextBox 25"/>
+          <p:cNvSpPr txBox="1"/>
+          <p:nvPr/>
+        </p:nvSpPr>
+        <p:spPr>
+          <a:xfrm>
+            <a:off x="7105650" y="3505200"/>
+            <a:ext cx="952500" cy="323850"/>
+          </a:xfrm>
+          <a:prstGeom prst="rect">
+            <a:avLst/>
+          </a:prstGeom>
+          <a:noFill/>
+        </p:spPr>
+        <p:txBody>
+          <a:bodyPr wrap="none" lIns="0" rIns="0" tIns="0" bIns="0" anchor="ctr">
+            <a:spAutoFit/>
+          </a:bodyPr>
+          <a:lstStyle/>
+          <a:p>
+            <a:pPr algn="l"/>
+            <a:r>
+              <a:rPr sz="1425" b="1">
+                <a:solidFill>
+                  <a:srgbClr val="014172"/>
+                </a:solidFill>
+                <a:latin typeface="Yu Gothic UI"/>
+              </a:rPr>
+              <a:t>3.2本</a:t>
+            </a:r>
+          </a:p>
+        </p:txBody>
+      </p:sp>
+      <p:sp>
+        <p:nvSpPr>
+          <p:cNvPr id="27" name="Rounded Rectangle 26"/>
+          <p:cNvSpPr/>
+          <p:nvPr/>
+        </p:nvSpPr>
+        <p:spPr>
+          <a:xfrm>
+            <a:off x="4095750" y="4229100"/>
+            <a:ext cx="2262188" cy="323850"/>
+          </a:xfrm>
+          <a:prstGeom prst="roundRect">
+            <a:avLst>
+              <a:gd name="adj" fmla="val 30000"/>
+            </a:avLst>
+          </a:prstGeom>
+          <a:gradFill rotWithShape="1">
+            <a:gsLst>
+              <a:gs pos="0">
+                <a:srgbClr val="EEF4F9"/>
+              </a:gs>
+              <a:gs pos="100000">
+                <a:srgbClr val="DAE7F2"/>
+              </a:gs>
+            </a:gsLst>
+            <a:lin scaled="0" ang="16200000"/>
+          </a:gradFill>
+          <a:ln w="19050">
+            <a:solidFill>
+              <a:srgbClr val="014172"/>
+            </a:solidFill>
+          </a:ln>
+          <a:effectLst/>
+        </p:spPr>
+        <p:txBody>
+          <a:bodyPr rtlCol="0" anchor="ctr"/>
+          <a:lstStyle/>
+          <a:p>
+            <a:pPr algn="ctr"/>
+          </a:p>
+        </p:txBody>
+      </p:sp>
+      <p:sp>
+        <p:nvSpPr>
+          <p:cNvPr id="28" name="TextBox 27"/>
+          <p:cNvSpPr txBox="1"/>
+          <p:nvPr/>
+        </p:nvSpPr>
+        <p:spPr>
+          <a:xfrm>
+            <a:off x="704850" y="4191000"/>
+            <a:ext cx="3333750" cy="228600"/>
+          </a:xfrm>
+          <a:prstGeom prst="rect">
+            <a:avLst/>
+          </a:prstGeom>
+          <a:noFill/>
+        </p:spPr>
+        <p:txBody>
+          <a:bodyPr wrap="none" lIns="0" rIns="0" tIns="0" bIns="0" anchor="ctr">
+            <a:spAutoFit/>
+          </a:bodyPr>
+          <a:lstStyle/>
+          <a:p>
+            <a:pPr algn="l"/>
+            <a:r>
+              <a:rPr sz="1200" b="1">
+                <a:solidFill>
+                  <a:srgbClr val="2E2E33"/>
+                </a:solidFill>
+                <a:latin typeface="Yu Gothic UI"/>
+              </a:rPr>
+              <a:t>食事だけ</a:t>
+            </a:r>
+          </a:p>
+        </p:txBody>
+      </p:sp>
+      <p:sp>
+        <p:nvSpPr>
+          <p:cNvPr id="29" name="TextBox 28"/>
+          <p:cNvSpPr txBox="1"/>
+          <p:nvPr/>
+        </p:nvSpPr>
+        <p:spPr>
+          <a:xfrm>
+            <a:off x="704850" y="4438650"/>
+            <a:ext cx="3333750" cy="209550"/>
+          </a:xfrm>
+          <a:prstGeom prst="rect">
+            <a:avLst/>
+          </a:prstGeom>
+          <a:noFill/>
+        </p:spPr>
+        <p:txBody>
+          <a:bodyPr wrap="none" lIns="0" rIns="0" tIns="0" bIns="0" anchor="ctr">
+            <a:spAutoFit/>
+          </a:bodyPr>
+          <a:lstStyle/>
+          <a:p>
+            <a:pPr algn="l"/>
+            <a:r>
+              <a:rPr sz="1050" b="0">
+                <a:solidFill>
+                  <a:srgbClr val="6A717B"/>
+                </a:solidFill>
+                <a:latin typeface="Yu Gothic UI"/>
+              </a:rPr>
+              <a:t>1日3回のレトルト</a:t>
+            </a:r>
+          </a:p>
+        </p:txBody>
+      </p:sp>
+      <p:sp>
+        <p:nvSpPr>
+          <p:cNvPr id="30" name="TextBox 29"/>
+          <p:cNvSpPr txBox="1"/>
+          <p:nvPr/>
+        </p:nvSpPr>
+        <p:spPr>
+          <a:xfrm>
+            <a:off x="6472238" y="4229100"/>
+            <a:ext cx="952500" cy="323850"/>
+          </a:xfrm>
+          <a:prstGeom prst="rect">
+            <a:avLst/>
+          </a:prstGeom>
+          <a:noFill/>
+        </p:spPr>
+        <p:txBody>
+          <a:bodyPr wrap="none" lIns="0" rIns="0" tIns="0" bIns="0" anchor="ctr">
+            <a:spAutoFit/>
+          </a:bodyPr>
+          <a:lstStyle/>
+          <a:p>
+            <a:pPr algn="l"/>
+            <a:r>
+              <a:rPr sz="1425" b="1">
+                <a:solidFill>
+                  <a:srgbClr val="014172"/>
+                </a:solidFill>
+                <a:latin typeface="Yu Gothic UI"/>
+              </a:rPr>
+              <a:t>2.5本</a:t>
+            </a:r>
+          </a:p>
+        </p:txBody>
+      </p:sp>
+      <p:sp>
+        <p:nvSpPr>
+          <p:cNvPr id="31" name="Rectangle 30"/>
+          <p:cNvSpPr/>
+          <p:nvPr/>
+        </p:nvSpPr>
+        <p:spPr>
+          <a:xfrm>
+            <a:off x="9525000" y="1828800"/>
+            <a:ext cx="9525" cy="2857500"/>
+          </a:xfrm>
+          <a:prstGeom prst="rect">
+            <a:avLst/>
+          </a:prstGeom>
+          <a:noFill/>
+          <a:ln w="19050">
+            <a:solidFill>
+              <a:srgbClr val="A8410F"/>
+            </a:solidFill>
+            <a:prstDash val="dash"/>
+          </a:ln>
+          <a:effectLst/>
+        </p:spPr>
+        <p:txBody>
+          <a:bodyPr rtlCol="0" anchor="ctr"/>
+          <a:lstStyle/>
+          <a:p>
+            <a:pPr algn="ctr"/>
+          </a:p>
+        </p:txBody>
+      </p:sp>
+      <p:sp>
+        <p:nvSpPr>
+          <p:cNvPr id="32" name="TextBox 31"/>
+          <p:cNvSpPr txBox="1"/>
+          <p:nvPr/>
+        </p:nvSpPr>
+        <p:spPr>
+          <a:xfrm>
+            <a:off x="7620000" y="1581150"/>
+            <a:ext cx="2476500" cy="228600"/>
+          </a:xfrm>
+          <a:prstGeom prst="rect">
+            <a:avLst/>
+          </a:prstGeom>
+          <a:noFill/>
+        </p:spPr>
+        <p:txBody>
+          <a:bodyPr wrap="none" lIns="0" rIns="0" tIns="0" bIns="0" anchor="ctr">
+            <a:spAutoFit/>
+          </a:bodyPr>
+          <a:lstStyle/>
+          <a:p>
+            <a:pPr algn="l"/>
+            <a:r>
+              <a:rPr sz="1200" b="1">
+                <a:solidFill>
+                  <a:srgbClr val="A8410F"/>
+                </a:solidFill>
+                <a:latin typeface="Yu Gothic UI"/>
+              </a:rPr>
+              <a:t>農林水産省の目安 6本</a:t>
+            </a:r>
+          </a:p>
+        </p:txBody>
+      </p:sp>
+      <p:sp>
+        <p:nvSpPr>
+          <p:cNvPr id="33" name="Rectangle 32"/>
+          <p:cNvSpPr/>
+          <p:nvPr/>
+        </p:nvSpPr>
+        <p:spPr>
+          <a:xfrm>
+            <a:off x="609600" y="5295900"/>
+            <a:ext cx="10210800" cy="9525"/>
+          </a:xfrm>
+          <a:prstGeom prst="rect">
+            <a:avLst/>
+          </a:prstGeom>
+          <a:solidFill>
+            <a:srgbClr val="E2E7EC"/>
+          </a:solidFill>
+          <a:ln>
+            <a:noFill/>
+          </a:ln>
+          <a:effectLst/>
+        </p:spPr>
+        <p:txBody>
+          <a:bodyPr rtlCol="0" anchor="ctr"/>
+          <a:lstStyle/>
+          <a:p>
+            <a:pPr algn="ctr"/>
+          </a:p>
+        </p:txBody>
+      </p:sp>
+      <p:sp>
+        <p:nvSpPr>
+          <p:cNvPr id="34" name="TextBox 33"/>
+          <p:cNvSpPr txBox="1"/>
+          <p:nvPr/>
+        </p:nvSpPr>
+        <p:spPr>
+          <a:xfrm>
+            <a:off x="609600" y="5429250"/>
+            <a:ext cx="7239000" cy="247650"/>
+          </a:xfrm>
+          <a:prstGeom prst="rect">
+            <a:avLst/>
+          </a:prstGeom>
+          <a:noFill/>
+        </p:spPr>
+        <p:txBody>
+          <a:bodyPr wrap="none" lIns="0" rIns="0" tIns="0" bIns="0" anchor="ctr">
+            <a:spAutoFit/>
+          </a:bodyPr>
+          <a:lstStyle/>
+          <a:p>
+            <a:pPr algn="l"/>
+            <a:r>
+              <a:rPr sz="1425" b="1">
+                <a:solidFill>
+                  <a:srgbClr val="2E2E33"/>
+                </a:solidFill>
+                <a:latin typeface="Yu Gothic UI"/>
+              </a:rPr>
+              <a:t>「1人6本」はカップ麺まで含めた全部の想定でした。</a:t>
+            </a:r>
+          </a:p>
+        </p:txBody>
+      </p:sp>
+      <p:sp>
+        <p:nvSpPr>
+          <p:cNvPr id="35" name="TextBox 34"/>
+          <p:cNvSpPr txBox="1"/>
+          <p:nvPr/>
+        </p:nvSpPr>
+        <p:spPr>
+          <a:xfrm>
+            <a:off x="609600" y="5676900"/>
+            <a:ext cx="7620000" cy="209550"/>
+          </a:xfrm>
+          <a:prstGeom prst="rect">
+            <a:avLst/>
+          </a:prstGeom>
+          <a:noFill/>
+        </p:spPr>
+        <p:txBody>
+          <a:bodyPr wrap="none" lIns="0" rIns="0" tIns="0" bIns="0" anchor="ctr">
+            <a:spAutoFit/>
+          </a:bodyPr>
+          <a:lstStyle/>
+          <a:p>
+            <a:pPr algn="l"/>
+            <a:r>
+              <a:rPr sz="1050" b="0">
+                <a:solidFill>
+                  <a:srgbClr val="6A717B"/>
+                </a:solidFill>
+                <a:latin typeface="Yu Gothic UI"/>
+              </a:rPr>
+              <a:t>農水省とイワタニの公表値からの計算です（実測ではありません）</a:t>
+            </a:r>
+          </a:p>
+        </p:txBody>
+      </p:sp>
+      <p:sp>
+        <p:nvSpPr>
+          <p:cNvPr id="36" name="TextBox 35"/>
+          <p:cNvSpPr txBox="1"/>
+          <p:nvPr/>
+        </p:nvSpPr>
+        <p:spPr>
+          <a:xfrm>
+            <a:off x="7962900" y="5676900"/>
+            <a:ext cx="2857500" cy="209550"/>
+          </a:xfrm>
+          <a:prstGeom prst="rect">
+            <a:avLst/>
+          </a:prstGeom>
+          <a:noFill/>
+        </p:spPr>
+        <p:txBody>
+          <a:bodyPr wrap="none" lIns="0" rIns="0" tIns="0" bIns="0" anchor="ctr">
+            <a:spAutoFit/>
+          </a:bodyPr>
+          <a:lstStyle/>
+          <a:p>
+            <a:pPr algn="r"/>
+            <a:r>
+              <a:rPr sz="1050" b="0">
+                <a:solidFill>
+                  <a:srgbClr val="6A717B"/>
+                </a:solidFill>
+                <a:latin typeface="Yu Gothic UI"/>
+              </a:rPr>
+              <a:t>寸法で選ぶ　sunpou.nexeed-lab.com</a:t>
+            </a:r>
+          </a:p>
+        </p:txBody>
+      </p:sp>
+    </p:spTree>
+  </p:cSld>
+  <p:clrMapOvr>
+    <a:masterClrMapping/>
+  </p:clrMapOvr>
+</p:sld>
+</file>
+
+<file path=ppt/slides/slide14.xml><?xml version="1.0" encoding="utf-8"?>
+<p:sld xmlns:a="http://schemas.openxmlformats.org/drawingml/2006/main" xmlns:p="http://schemas.openxmlformats.org/presentationml/2006/main" xmlns:r="http://schemas.openxmlformats.org/officeDocument/2006/relationships">
+  <p:cSld>
+    <p:spTree>
+      <p:nvGrpSpPr>
+        <p:cNvPr id="1" name=""/>
+        <p:cNvGrpSpPr/>
+        <p:nvPr/>
+      </p:nvGrpSpPr>
+      <p:grpSpPr/>
+      <p:sp>
+        <p:nvSpPr>
+          <p:cNvPr id="2" name="Rectangle 1"/>
+          <p:cNvSpPr/>
+          <p:nvPr/>
+        </p:nvSpPr>
+        <p:spPr>
+          <a:xfrm>
+            <a:off x="0" y="0"/>
+            <a:ext cx="11430000" cy="6000750"/>
+          </a:xfrm>
+          <a:prstGeom prst="rect">
+            <a:avLst/>
+          </a:prstGeom>
+          <a:solidFill>
+            <a:srgbClr val="FCFCFC"/>
+          </a:solidFill>
+          <a:ln>
+            <a:noFill/>
+          </a:ln>
+          <a:effectLst/>
+        </p:spPr>
+        <p:txBody>
+          <a:bodyPr rtlCol="0" anchor="ctr"/>
+          <a:lstStyle/>
+          <a:p>
+            <a:pPr algn="ctr"/>
+          </a:p>
+        </p:txBody>
+      </p:sp>
+      <p:sp>
+        <p:nvSpPr>
+          <p:cNvPr id="3" name="Rectangle 2"/>
+          <p:cNvSpPr/>
+          <p:nvPr/>
+        </p:nvSpPr>
+        <p:spPr>
+          <a:xfrm>
+            <a:off x="0" y="0"/>
+            <a:ext cx="114300" cy="6000750"/>
+          </a:xfrm>
+          <a:prstGeom prst="rect">
+            <a:avLst/>
+          </a:prstGeom>
+          <a:solidFill>
+            <a:srgbClr val="014172"/>
+          </a:solidFill>
+          <a:ln>
+            <a:noFill/>
+          </a:ln>
+          <a:effectLst/>
+        </p:spPr>
+        <p:txBody>
+          <a:bodyPr rtlCol="0" anchor="ctr"/>
+          <a:lstStyle/>
+          <a:p>
+            <a:pPr algn="ctr"/>
+          </a:p>
+        </p:txBody>
+      </p:sp>
+      <p:sp>
+        <p:nvSpPr>
+          <p:cNvPr id="4" name="Rectangle 3"/>
+          <p:cNvSpPr/>
+          <p:nvPr/>
+        </p:nvSpPr>
+        <p:spPr>
+          <a:xfrm>
+            <a:off x="0" y="0"/>
+            <a:ext cx="11430000" cy="1504950"/>
+          </a:xfrm>
+          <a:prstGeom prst="rect">
+            <a:avLst/>
+          </a:prstGeom>
+          <a:solidFill>
+            <a:srgbClr val="014172"/>
+          </a:solidFill>
+          <a:ln>
+            <a:noFill/>
+          </a:ln>
+          <a:effectLst/>
+        </p:spPr>
+        <p:txBody>
+          <a:bodyPr rtlCol="0" anchor="ctr"/>
+          <a:lstStyle/>
+          <a:p>
+            <a:pPr algn="ctr"/>
+          </a:p>
+        </p:txBody>
+      </p:sp>
+      <p:sp>
+        <p:nvSpPr>
+          <p:cNvPr id="5" name="TextBox 4"/>
+          <p:cNvSpPr txBox="1"/>
+          <p:nvPr/>
+        </p:nvSpPr>
+        <p:spPr>
+          <a:xfrm>
+            <a:off x="609600" y="361950"/>
+            <a:ext cx="7429500" cy="476250"/>
+          </a:xfrm>
+          <a:prstGeom prst="rect">
+            <a:avLst/>
+          </a:prstGeom>
+          <a:noFill/>
+        </p:spPr>
+        <p:txBody>
+          <a:bodyPr wrap="none" lIns="0" rIns="0" tIns="0" bIns="0" anchor="ctr">
+            <a:spAutoFit/>
+          </a:bodyPr>
+          <a:lstStyle/>
+          <a:p>
+            <a:pPr algn="l"/>
+            <a:r>
+              <a:rPr sz="3000" b="1">
+                <a:solidFill>
+                  <a:srgbClr val="FFFFFF"/>
+                </a:solidFill>
+                <a:latin typeface="Yu Gothic UI"/>
+              </a:rPr>
+              <a:t>土鍋の「号数」は幅を決めていません</a:t>
+            </a:r>
+          </a:p>
+        </p:txBody>
+      </p:sp>
+      <p:sp>
+        <p:nvSpPr>
+          <p:cNvPr id="6" name="TextBox 5"/>
+          <p:cNvSpPr txBox="1"/>
+          <p:nvPr/>
+        </p:nvSpPr>
+        <p:spPr>
+          <a:xfrm>
+            <a:off x="609600" y="876300"/>
+            <a:ext cx="7429500" cy="247650"/>
+          </a:xfrm>
+          <a:prstGeom prst="rect">
+            <a:avLst/>
+          </a:prstGeom>
+          <a:noFill/>
+        </p:spPr>
+        <p:txBody>
+          <a:bodyPr wrap="none" lIns="0" rIns="0" tIns="0" bIns="0" anchor="ctr">
+            <a:spAutoFit/>
+          </a:bodyPr>
+          <a:lstStyle/>
+          <a:p>
+            <a:pPr algn="l"/>
+            <a:r>
+              <a:rPr sz="1425" b="0">
+                <a:solidFill>
+                  <a:srgbClr val="DAE7F2"/>
+                </a:solidFill>
+                <a:latin typeface="Yu Gothic UI"/>
+              </a:rPr>
+              <a:t>銀峯陶器の公表寸法。同じ号数でもシリーズで幅が違う（幅は取手込み）</a:t>
+            </a:r>
+          </a:p>
+        </p:txBody>
+      </p:sp>
+      <p:sp>
+        <p:nvSpPr>
+          <p:cNvPr id="7" name="Rounded Rectangle 6"/>
+          <p:cNvSpPr/>
+          <p:nvPr/>
+        </p:nvSpPr>
+        <p:spPr>
+          <a:xfrm>
+            <a:off x="8305800" y="247650"/>
+            <a:ext cx="2514600" cy="1009650"/>
+          </a:xfrm>
+          <a:prstGeom prst="roundRect">
+            <a:avLst>
+              <a:gd name="adj" fmla="val 12000"/>
+            </a:avLst>
+          </a:prstGeom>
+          <a:solidFill>
+            <a:srgbClr val="FFFFFF"/>
+          </a:solidFill>
+          <a:ln>
+            <a:noFill/>
+          </a:ln>
+          <a:effectLst>
+            <a:outerShdw blurRad="254000" dist="63500" dir="5400000" rotWithShape="0">
+              <a:srgbClr val="0B2B45">
+                <a:alpha val="30000"/>
+              </a:srgbClr>
+            </a:outerShdw>
+          </a:effectLst>
+        </p:spPr>
+        <p:txBody>
+          <a:bodyPr rtlCol="0" anchor="ctr"/>
+          <a:lstStyle/>
+          <a:p>
+            <a:pPr algn="ctr"/>
+          </a:p>
+        </p:txBody>
+      </p:sp>
+      <p:sp>
+        <p:nvSpPr>
+          <p:cNvPr id="8" name="TextBox 7"/>
+          <p:cNvSpPr txBox="1"/>
+          <p:nvPr/>
+        </p:nvSpPr>
+        <p:spPr>
+          <a:xfrm>
+            <a:off x="8515350" y="400050"/>
+            <a:ext cx="2133600" cy="209550"/>
+          </a:xfrm>
+          <a:prstGeom prst="rect">
+            <a:avLst/>
+          </a:prstGeom>
+          <a:noFill/>
+        </p:spPr>
+        <p:txBody>
+          <a:bodyPr wrap="none" lIns="0" rIns="0" tIns="0" bIns="0" anchor="ctr">
+            <a:spAutoFit/>
+          </a:bodyPr>
+          <a:lstStyle/>
+          <a:p>
+            <a:pPr algn="l"/>
+            <a:r>
+              <a:rPr sz="1125" b="0">
+                <a:solidFill>
+                  <a:srgbClr val="6A717B"/>
+                </a:solidFill>
+                <a:latin typeface="Yu Gothic UI"/>
+              </a:rPr>
+              <a:t>コンロの本体幅</a:t>
+            </a:r>
+          </a:p>
+        </p:txBody>
+      </p:sp>
+      <p:sp>
+        <p:nvSpPr>
+          <p:cNvPr id="9" name="TextBox 8"/>
+          <p:cNvSpPr txBox="1"/>
+          <p:nvPr/>
+        </p:nvSpPr>
+        <p:spPr>
+          <a:xfrm>
+            <a:off x="8515350" y="647700"/>
+            <a:ext cx="2133600" cy="533400"/>
+          </a:xfrm>
+          <a:prstGeom prst="rect">
+            <a:avLst/>
+          </a:prstGeom>
+          <a:noFill/>
+        </p:spPr>
+        <p:txBody>
+          <a:bodyPr wrap="none" lIns="0" rIns="0" tIns="0" bIns="0" anchor="ctr">
+            <a:spAutoFit/>
+          </a:bodyPr>
+          <a:lstStyle/>
+          <a:p>
+            <a:pPr algn="l"/>
+            <a:r>
+              <a:rPr sz="3900" b="1">
+                <a:solidFill>
+                  <a:srgbClr val="014172"/>
+                </a:solidFill>
+                <a:latin typeface="Yu Gothic UI"/>
+              </a:rPr>
+              <a:t>33.4</a:t>
+            </a:r>
+            <a:r>
+              <a:rPr sz="1950" b="1">
+                <a:solidFill>
+                  <a:srgbClr val="014172"/>
+                </a:solidFill>
+                <a:latin typeface="Yu Gothic UI"/>
+              </a:rPr>
+              <a:t>cm</a:t>
+            </a:r>
+          </a:p>
+        </p:txBody>
+      </p:sp>
+      <p:sp>
+        <p:nvSpPr>
+          <p:cNvPr id="10" name="Rectangle 9"/>
+          <p:cNvSpPr/>
+          <p:nvPr/>
+        </p:nvSpPr>
+        <p:spPr>
+          <a:xfrm>
+            <a:off x="495300" y="1771650"/>
+            <a:ext cx="10439400" cy="552450"/>
+          </a:xfrm>
+          <a:prstGeom prst="rect">
+            <a:avLst/>
+          </a:prstGeom>
+          <a:solidFill>
+            <a:srgbClr val="F2F5F8"/>
+          </a:solidFill>
+          <a:ln>
+            <a:noFill/>
+          </a:ln>
+          <a:effectLst/>
+        </p:spPr>
+        <p:txBody>
+          <a:bodyPr rtlCol="0" anchor="ctr"/>
+          <a:lstStyle/>
+          <a:p>
+            <a:pPr algn="ctr"/>
+          </a:p>
+        </p:txBody>
+      </p:sp>
+      <p:sp>
+        <p:nvSpPr>
+          <p:cNvPr id="11" name="Rectangle 10"/>
+          <p:cNvSpPr/>
+          <p:nvPr/>
+        </p:nvSpPr>
+        <p:spPr>
+          <a:xfrm>
+            <a:off x="495300" y="2400300"/>
+            <a:ext cx="10439400" cy="552450"/>
+          </a:xfrm>
+          <a:prstGeom prst="rect">
+            <a:avLst/>
+          </a:prstGeom>
+          <a:solidFill>
+            <a:srgbClr val="FCFCFC"/>
+          </a:solidFill>
+          <a:ln>
+            <a:noFill/>
+          </a:ln>
+          <a:effectLst/>
+        </p:spPr>
+        <p:txBody>
+          <a:bodyPr rtlCol="0" anchor="ctr"/>
+          <a:lstStyle/>
+          <a:p>
+            <a:pPr algn="ctr"/>
+          </a:p>
+        </p:txBody>
+      </p:sp>
+      <p:sp>
+        <p:nvSpPr>
+          <p:cNvPr id="12" name="Rectangle 11"/>
+          <p:cNvSpPr/>
+          <p:nvPr/>
+        </p:nvSpPr>
+        <p:spPr>
+          <a:xfrm>
+            <a:off x="495300" y="3028950"/>
+            <a:ext cx="10439400" cy="552450"/>
+          </a:xfrm>
+          <a:prstGeom prst="rect">
+            <a:avLst/>
+          </a:prstGeom>
+          <a:solidFill>
+            <a:srgbClr val="F2F5F8"/>
+          </a:solidFill>
+          <a:ln>
+            <a:noFill/>
+          </a:ln>
+          <a:effectLst/>
+        </p:spPr>
+        <p:txBody>
+          <a:bodyPr rtlCol="0" anchor="ctr"/>
+          <a:lstStyle/>
+          <a:p>
+            <a:pPr algn="ctr"/>
+          </a:p>
+        </p:txBody>
+      </p:sp>
+      <p:sp>
+        <p:nvSpPr>
+          <p:cNvPr id="13" name="Rectangle 12"/>
+          <p:cNvSpPr/>
+          <p:nvPr/>
+        </p:nvSpPr>
+        <p:spPr>
+          <a:xfrm>
+            <a:off x="495300" y="3657600"/>
+            <a:ext cx="10439400" cy="552450"/>
+          </a:xfrm>
+          <a:prstGeom prst="rect">
+            <a:avLst/>
+          </a:prstGeom>
+          <a:solidFill>
+            <a:srgbClr val="E6EEF6"/>
+          </a:solidFill>
+          <a:ln>
+            <a:noFill/>
+          </a:ln>
+          <a:effectLst/>
+        </p:spPr>
+        <p:txBody>
+          <a:bodyPr rtlCol="0" anchor="ctr"/>
+          <a:lstStyle/>
+          <a:p>
+            <a:pPr algn="ctr"/>
+          </a:p>
+        </p:txBody>
+      </p:sp>
+      <p:sp>
+        <p:nvSpPr>
+          <p:cNvPr id="14" name="Rectangle 13"/>
+          <p:cNvSpPr/>
+          <p:nvPr/>
+        </p:nvSpPr>
+        <p:spPr>
+          <a:xfrm>
+            <a:off x="495300" y="3657600"/>
+            <a:ext cx="47625" cy="552450"/>
+          </a:xfrm>
+          <a:prstGeom prst="rect">
+            <a:avLst/>
+          </a:prstGeom>
+          <a:solidFill>
+            <a:srgbClr val="014172"/>
+          </a:solidFill>
+          <a:ln>
+            <a:noFill/>
+          </a:ln>
+          <a:effectLst/>
+        </p:spPr>
+        <p:txBody>
+          <a:bodyPr rtlCol="0" anchor="ctr"/>
+          <a:lstStyle/>
+          <a:p>
+            <a:pPr algn="ctr"/>
+          </a:p>
+        </p:txBody>
+      </p:sp>
+      <p:sp>
+        <p:nvSpPr>
+          <p:cNvPr id="15" name="Rectangle 14"/>
+          <p:cNvSpPr/>
+          <p:nvPr/>
+        </p:nvSpPr>
+        <p:spPr>
+          <a:xfrm>
+            <a:off x="495300" y="4286250"/>
+            <a:ext cx="10439400" cy="552450"/>
+          </a:xfrm>
+          <a:prstGeom prst="rect">
+            <a:avLst/>
+          </a:prstGeom>
+          <a:solidFill>
+            <a:srgbClr val="F2F5F8"/>
+          </a:solidFill>
+          <a:ln>
+            <a:noFill/>
+          </a:ln>
+          <a:effectLst/>
+        </p:spPr>
+        <p:txBody>
+          <a:bodyPr rtlCol="0" anchor="ctr"/>
+          <a:lstStyle/>
+          <a:p>
+            <a:pPr algn="ctr"/>
+          </a:p>
+        </p:txBody>
+      </p:sp>
+      <p:sp>
+        <p:nvSpPr>
+          <p:cNvPr id="16" name="Rounded Rectangle 15"/>
+          <p:cNvSpPr/>
+          <p:nvPr/>
+        </p:nvSpPr>
+        <p:spPr>
+          <a:xfrm>
+            <a:off x="3486150" y="1905000"/>
+            <a:ext cx="209550" cy="285750"/>
+          </a:xfrm>
+          <a:prstGeom prst="roundRect">
+            <a:avLst>
+              <a:gd name="adj" fmla="val 30000"/>
+            </a:avLst>
+          </a:prstGeom>
+          <a:gradFill rotWithShape="1">
+            <a:gsLst>
+              <a:gs pos="0">
+                <a:srgbClr val="EEF4F9"/>
+              </a:gs>
+              <a:gs pos="100000">
+                <a:srgbClr val="DAE7F2"/>
+              </a:gs>
+            </a:gsLst>
+            <a:lin scaled="0" ang="16200000"/>
+          </a:gradFill>
+          <a:ln w="19050">
+            <a:solidFill>
+              <a:srgbClr val="014172"/>
+            </a:solidFill>
+          </a:ln>
+          <a:effectLst/>
+        </p:spPr>
+        <p:txBody>
+          <a:bodyPr rtlCol="0" anchor="ctr"/>
+          <a:lstStyle/>
+          <a:p>
+            <a:pPr algn="ctr"/>
+          </a:p>
+        </p:txBody>
+      </p:sp>
+      <p:sp>
+        <p:nvSpPr>
+          <p:cNvPr id="17" name="TextBox 16"/>
+          <p:cNvSpPr txBox="1"/>
+          <p:nvPr/>
+        </p:nvSpPr>
+        <p:spPr>
+          <a:xfrm>
+            <a:off x="704850" y="1905000"/>
+            <a:ext cx="1714500" cy="285750"/>
+          </a:xfrm>
+          <a:prstGeom prst="rect">
+            <a:avLst/>
+          </a:prstGeom>
+          <a:noFill/>
+        </p:spPr>
+        <p:txBody>
+          <a:bodyPr wrap="none" lIns="0" rIns="0" tIns="0" bIns="0" anchor="ctr">
+            <a:spAutoFit/>
+          </a:bodyPr>
+          <a:lstStyle/>
+          <a:p>
+            <a:pPr algn="l"/>
+            <a:r>
+              <a:rPr sz="1500" b="1">
+                <a:solidFill>
+                  <a:srgbClr val="2E2E33"/>
+                </a:solidFill>
+                <a:latin typeface="Yu Gothic UI"/>
+              </a:rPr>
+              <a:t>6号</a:t>
+            </a:r>
+          </a:p>
+        </p:txBody>
+      </p:sp>
+      <p:sp>
+        <p:nvSpPr>
+          <p:cNvPr id="18" name="TextBox 17"/>
+          <p:cNvSpPr txBox="1"/>
+          <p:nvPr/>
+        </p:nvSpPr>
+        <p:spPr>
+          <a:xfrm>
+            <a:off x="3829050" y="1905000"/>
+            <a:ext cx="1714500" cy="285750"/>
+          </a:xfrm>
+          <a:prstGeom prst="rect">
+            <a:avLst/>
+          </a:prstGeom>
+          <a:noFill/>
+        </p:spPr>
+        <p:txBody>
+          <a:bodyPr wrap="none" lIns="0" rIns="0" tIns="0" bIns="0" anchor="ctr">
+            <a:spAutoFit/>
+          </a:bodyPr>
+          <a:lstStyle/>
+          <a:p>
+            <a:pPr algn="l"/>
+            <a:r>
+              <a:rPr sz="1275" b="1">
+                <a:solidFill>
+                  <a:srgbClr val="014172"/>
+                </a:solidFill>
+                <a:latin typeface="Yu Gothic UI"/>
+              </a:rPr>
+              <a:t>21〜22cm</a:t>
+            </a:r>
+          </a:p>
+        </p:txBody>
+      </p:sp>
+      <p:sp>
+        <p:nvSpPr>
+          <p:cNvPr id="19" name="Rounded Rectangle 18"/>
+          <p:cNvSpPr/>
+          <p:nvPr/>
+        </p:nvSpPr>
+        <p:spPr>
+          <a:xfrm>
+            <a:off x="4114800" y="2533650"/>
+            <a:ext cx="523875" cy="285750"/>
+          </a:xfrm>
+          <a:prstGeom prst="roundRect">
+            <a:avLst>
+              <a:gd name="adj" fmla="val 30000"/>
+            </a:avLst>
+          </a:prstGeom>
+          <a:gradFill rotWithShape="1">
+            <a:gsLst>
+              <a:gs pos="0">
+                <a:srgbClr val="EEF4F9"/>
+              </a:gs>
+              <a:gs pos="100000">
+                <a:srgbClr val="DAE7F2"/>
+              </a:gs>
+            </a:gsLst>
+            <a:lin scaled="0" ang="16200000"/>
+          </a:gradFill>
+          <a:ln w="19050">
+            <a:solidFill>
+              <a:srgbClr val="014172"/>
+            </a:solidFill>
+          </a:ln>
+          <a:effectLst/>
+        </p:spPr>
+        <p:txBody>
+          <a:bodyPr rtlCol="0" anchor="ctr"/>
+          <a:lstStyle/>
+          <a:p>
+            <a:pPr algn="ctr"/>
+          </a:p>
+        </p:txBody>
+      </p:sp>
+      <p:sp>
+        <p:nvSpPr>
+          <p:cNvPr id="20" name="TextBox 19"/>
+          <p:cNvSpPr txBox="1"/>
+          <p:nvPr/>
+        </p:nvSpPr>
+        <p:spPr>
+          <a:xfrm>
+            <a:off x="704850" y="2533650"/>
+            <a:ext cx="1714500" cy="285750"/>
+          </a:xfrm>
+          <a:prstGeom prst="rect">
+            <a:avLst/>
+          </a:prstGeom>
+          <a:noFill/>
+        </p:spPr>
+        <p:txBody>
+          <a:bodyPr wrap="none" lIns="0" rIns="0" tIns="0" bIns="0" anchor="ctr">
+            <a:spAutoFit/>
+          </a:bodyPr>
+          <a:lstStyle/>
+          <a:p>
+            <a:pPr algn="l"/>
+            <a:r>
+              <a:rPr sz="1500" b="1">
+                <a:solidFill>
+                  <a:srgbClr val="2E2E33"/>
+                </a:solidFill>
+                <a:latin typeface="Yu Gothic UI"/>
+              </a:rPr>
+              <a:t>7号</a:t>
+            </a:r>
+          </a:p>
+        </p:txBody>
+      </p:sp>
+      <p:sp>
+        <p:nvSpPr>
+          <p:cNvPr id="21" name="TextBox 20"/>
+          <p:cNvSpPr txBox="1"/>
+          <p:nvPr/>
+        </p:nvSpPr>
+        <p:spPr>
+          <a:xfrm>
+            <a:off x="4772025" y="2533650"/>
+            <a:ext cx="1714500" cy="285750"/>
+          </a:xfrm>
+          <a:prstGeom prst="rect">
+            <a:avLst/>
+          </a:prstGeom>
+          <a:noFill/>
+        </p:spPr>
+        <p:txBody>
+          <a:bodyPr wrap="none" lIns="0" rIns="0" tIns="0" bIns="0" anchor="ctr">
+            <a:spAutoFit/>
+          </a:bodyPr>
+          <a:lstStyle/>
+          <a:p>
+            <a:pPr algn="l"/>
+            <a:r>
+              <a:rPr sz="1275" b="1">
+                <a:solidFill>
+                  <a:srgbClr val="014172"/>
+                </a:solidFill>
+                <a:latin typeface="Yu Gothic UI"/>
+              </a:rPr>
+              <a:t>24〜26.5cm</a:t>
+            </a:r>
+          </a:p>
+        </p:txBody>
+      </p:sp>
+      <p:sp>
+        <p:nvSpPr>
+          <p:cNvPr id="22" name="Rounded Rectangle 21"/>
+          <p:cNvSpPr/>
+          <p:nvPr/>
+        </p:nvSpPr>
+        <p:spPr>
+          <a:xfrm>
+            <a:off x="4743450" y="3162300"/>
+            <a:ext cx="523875" cy="285750"/>
+          </a:xfrm>
+          <a:prstGeom prst="roundRect">
+            <a:avLst>
+              <a:gd name="adj" fmla="val 30000"/>
+            </a:avLst>
+          </a:prstGeom>
+          <a:gradFill rotWithShape="1">
+            <a:gsLst>
+              <a:gs pos="0">
+                <a:srgbClr val="EEF4F9"/>
+              </a:gs>
+              <a:gs pos="100000">
+                <a:srgbClr val="DAE7F2"/>
+              </a:gs>
+            </a:gsLst>
+            <a:lin scaled="0" ang="16200000"/>
+          </a:gradFill>
+          <a:ln w="19050">
+            <a:solidFill>
+              <a:srgbClr val="014172"/>
+            </a:solidFill>
+          </a:ln>
+          <a:effectLst/>
+        </p:spPr>
+        <p:txBody>
+          <a:bodyPr rtlCol="0" anchor="ctr"/>
+          <a:lstStyle/>
+          <a:p>
+            <a:pPr algn="ctr"/>
+          </a:p>
+        </p:txBody>
+      </p:sp>
+      <p:sp>
+        <p:nvSpPr>
+          <p:cNvPr id="23" name="TextBox 22"/>
+          <p:cNvSpPr txBox="1"/>
+          <p:nvPr/>
+        </p:nvSpPr>
+        <p:spPr>
+          <a:xfrm>
+            <a:off x="704850" y="3162300"/>
+            <a:ext cx="1714500" cy="285750"/>
+          </a:xfrm>
+          <a:prstGeom prst="rect">
+            <a:avLst/>
+          </a:prstGeom>
+          <a:noFill/>
+        </p:spPr>
+        <p:txBody>
+          <a:bodyPr wrap="none" lIns="0" rIns="0" tIns="0" bIns="0" anchor="ctr">
+            <a:spAutoFit/>
+          </a:bodyPr>
+          <a:lstStyle/>
+          <a:p>
+            <a:pPr algn="l"/>
+            <a:r>
+              <a:rPr sz="1500" b="1">
+                <a:solidFill>
+                  <a:srgbClr val="2E2E33"/>
+                </a:solidFill>
+                <a:latin typeface="Yu Gothic UI"/>
+              </a:rPr>
+              <a:t>8号</a:t>
+            </a:r>
+          </a:p>
+        </p:txBody>
+      </p:sp>
+      <p:sp>
+        <p:nvSpPr>
+          <p:cNvPr id="24" name="TextBox 23"/>
+          <p:cNvSpPr txBox="1"/>
+          <p:nvPr/>
+        </p:nvSpPr>
+        <p:spPr>
+          <a:xfrm>
+            <a:off x="5400675" y="3162300"/>
+            <a:ext cx="1714500" cy="285750"/>
+          </a:xfrm>
+          <a:prstGeom prst="rect">
+            <a:avLst/>
+          </a:prstGeom>
+          <a:noFill/>
+        </p:spPr>
+        <p:txBody>
+          <a:bodyPr wrap="none" lIns="0" rIns="0" tIns="0" bIns="0" anchor="ctr">
+            <a:spAutoFit/>
+          </a:bodyPr>
+          <a:lstStyle/>
+          <a:p>
+            <a:pPr algn="l"/>
+            <a:r>
+              <a:rPr sz="1275" b="1">
+                <a:solidFill>
+                  <a:srgbClr val="014172"/>
+                </a:solidFill>
+                <a:latin typeface="Yu Gothic UI"/>
+              </a:rPr>
+              <a:t>27〜29.5cm</a:t>
+            </a:r>
+          </a:p>
+        </p:txBody>
+      </p:sp>
+      <p:sp>
+        <p:nvSpPr>
+          <p:cNvPr id="25" name="Rounded Rectangle 24"/>
+          <p:cNvSpPr/>
+          <p:nvPr/>
+        </p:nvSpPr>
+        <p:spPr>
+          <a:xfrm>
+            <a:off x="5581650" y="3790950"/>
+            <a:ext cx="314325" cy="285750"/>
+          </a:xfrm>
+          <a:prstGeom prst="roundRect">
+            <a:avLst>
+              <a:gd name="adj" fmla="val 30000"/>
+            </a:avLst>
+          </a:prstGeom>
+          <a:gradFill rotWithShape="1">
+            <a:gsLst>
+              <a:gs pos="0">
+                <a:srgbClr val="EEF4F9"/>
+              </a:gs>
+              <a:gs pos="100000">
+                <a:srgbClr val="DAE7F2"/>
+              </a:gs>
+            </a:gsLst>
+            <a:lin scaled="0" ang="16200000"/>
+          </a:gradFill>
+          <a:ln w="19050">
+            <a:solidFill>
+              <a:srgbClr val="014172"/>
+            </a:solidFill>
+          </a:ln>
+          <a:effectLst/>
+        </p:spPr>
+        <p:txBody>
+          <a:bodyPr rtlCol="0" anchor="ctr"/>
+          <a:lstStyle/>
+          <a:p>
+            <a:pPr algn="ctr"/>
+          </a:p>
+        </p:txBody>
+      </p:sp>
+      <p:sp>
+        <p:nvSpPr>
+          <p:cNvPr id="26" name="TextBox 25"/>
+          <p:cNvSpPr txBox="1"/>
+          <p:nvPr/>
+        </p:nvSpPr>
+        <p:spPr>
+          <a:xfrm>
+            <a:off x="704850" y="3790950"/>
+            <a:ext cx="1714500" cy="285750"/>
+          </a:xfrm>
+          <a:prstGeom prst="rect">
+            <a:avLst/>
+          </a:prstGeom>
+          <a:noFill/>
+        </p:spPr>
+        <p:txBody>
+          <a:bodyPr wrap="none" lIns="0" rIns="0" tIns="0" bIns="0" anchor="ctr">
+            <a:spAutoFit/>
+          </a:bodyPr>
+          <a:lstStyle/>
+          <a:p>
+            <a:pPr algn="l"/>
+            <a:r>
+              <a:rPr sz="1500" b="1">
+                <a:solidFill>
+                  <a:srgbClr val="2E2E33"/>
+                </a:solidFill>
+                <a:latin typeface="Yu Gothic UI"/>
+              </a:rPr>
+              <a:t>9号</a:t>
+            </a:r>
+          </a:p>
+        </p:txBody>
+      </p:sp>
+      <p:sp>
+        <p:nvSpPr>
+          <p:cNvPr id="27" name="TextBox 26"/>
+          <p:cNvSpPr txBox="1"/>
+          <p:nvPr/>
+        </p:nvSpPr>
+        <p:spPr>
+          <a:xfrm>
+            <a:off x="6029325" y="3790950"/>
+            <a:ext cx="1714500" cy="285750"/>
+          </a:xfrm>
+          <a:prstGeom prst="rect">
+            <a:avLst/>
+          </a:prstGeom>
+          <a:noFill/>
+        </p:spPr>
+        <p:txBody>
+          <a:bodyPr wrap="none" lIns="0" rIns="0" tIns="0" bIns="0" anchor="ctr">
+            <a:spAutoFit/>
+          </a:bodyPr>
+          <a:lstStyle/>
+          <a:p>
+            <a:pPr algn="l"/>
+            <a:r>
+              <a:rPr sz="1275" b="1">
+                <a:solidFill>
+                  <a:srgbClr val="014172"/>
+                </a:solidFill>
+                <a:latin typeface="Yu Gothic UI"/>
+              </a:rPr>
+              <a:t>31〜32.5cm</a:t>
+            </a:r>
+          </a:p>
+        </p:txBody>
+      </p:sp>
+      <p:sp>
+        <p:nvSpPr>
+          <p:cNvPr id="28" name="Rounded Rectangle 27"/>
+          <p:cNvSpPr/>
+          <p:nvPr/>
+        </p:nvSpPr>
+        <p:spPr>
+          <a:xfrm>
+            <a:off x="6210300" y="4419600"/>
+            <a:ext cx="419100" cy="285750"/>
+          </a:xfrm>
+          <a:prstGeom prst="roundRect">
+            <a:avLst>
+              <a:gd name="adj" fmla="val 30000"/>
+            </a:avLst>
+          </a:prstGeom>
+          <a:gradFill rotWithShape="1">
+            <a:gsLst>
+              <a:gs pos="0">
+                <a:srgbClr val="EEF4F9"/>
+              </a:gs>
+              <a:gs pos="100000">
+                <a:srgbClr val="DAE7F2"/>
+              </a:gs>
+            </a:gsLst>
+            <a:lin scaled="0" ang="16200000"/>
+          </a:gradFill>
+          <a:ln w="19050">
+            <a:solidFill>
+              <a:srgbClr val="014172"/>
+            </a:solidFill>
+          </a:ln>
+          <a:effectLst/>
+        </p:spPr>
+        <p:txBody>
+          <a:bodyPr rtlCol="0" anchor="ctr"/>
+          <a:lstStyle/>
+          <a:p>
+            <a:pPr algn="ctr"/>
+          </a:p>
+        </p:txBody>
+      </p:sp>
+      <p:sp>
+        <p:nvSpPr>
+          <p:cNvPr id="29" name="TextBox 28"/>
+          <p:cNvSpPr txBox="1"/>
+          <p:nvPr/>
+        </p:nvSpPr>
+        <p:spPr>
+          <a:xfrm>
+            <a:off x="704850" y="4419600"/>
+            <a:ext cx="1714500" cy="285750"/>
+          </a:xfrm>
+          <a:prstGeom prst="rect">
+            <a:avLst/>
+          </a:prstGeom>
+          <a:noFill/>
+        </p:spPr>
+        <p:txBody>
+          <a:bodyPr wrap="none" lIns="0" rIns="0" tIns="0" bIns="0" anchor="ctr">
+            <a:spAutoFit/>
+          </a:bodyPr>
+          <a:lstStyle/>
+          <a:p>
+            <a:pPr algn="l"/>
+            <a:r>
+              <a:rPr sz="1500" b="1">
+                <a:solidFill>
+                  <a:srgbClr val="2E2E33"/>
+                </a:solidFill>
+                <a:latin typeface="Yu Gothic UI"/>
+              </a:rPr>
+              <a:t>10号</a:t>
+            </a:r>
+          </a:p>
+        </p:txBody>
+      </p:sp>
+      <p:sp>
+        <p:nvSpPr>
+          <p:cNvPr id="30" name="TextBox 29"/>
+          <p:cNvSpPr txBox="1"/>
+          <p:nvPr/>
+        </p:nvSpPr>
+        <p:spPr>
+          <a:xfrm>
+            <a:off x="6762750" y="4419600"/>
+            <a:ext cx="1714500" cy="285750"/>
+          </a:xfrm>
+          <a:prstGeom prst="rect">
+            <a:avLst/>
+          </a:prstGeom>
+          <a:noFill/>
+        </p:spPr>
+        <p:txBody>
+          <a:bodyPr wrap="none" lIns="0" rIns="0" tIns="0" bIns="0" anchor="ctr">
+            <a:spAutoFit/>
+          </a:bodyPr>
+          <a:lstStyle/>
+          <a:p>
+            <a:pPr algn="l"/>
+            <a:r>
+              <a:rPr sz="1275" b="1">
+                <a:solidFill>
+                  <a:srgbClr val="014172"/>
+                </a:solidFill>
+                <a:latin typeface="Yu Gothic UI"/>
+              </a:rPr>
+              <a:t>34〜36cm</a:t>
+            </a:r>
+          </a:p>
+        </p:txBody>
+      </p:sp>
+      <p:sp>
+        <p:nvSpPr>
+          <p:cNvPr id="31" name="Rectangle 30"/>
+          <p:cNvSpPr/>
+          <p:nvPr/>
+        </p:nvSpPr>
+        <p:spPr>
+          <a:xfrm>
+            <a:off x="6084570" y="1695450"/>
+            <a:ext cx="9525" cy="3067050"/>
+          </a:xfrm>
+          <a:prstGeom prst="rect">
+            <a:avLst/>
+          </a:prstGeom>
+          <a:noFill/>
+          <a:ln w="19050">
+            <a:solidFill>
+              <a:srgbClr val="A8410F"/>
+            </a:solidFill>
+            <a:prstDash val="dash"/>
+          </a:ln>
+          <a:effectLst/>
+        </p:spPr>
+        <p:txBody>
+          <a:bodyPr rtlCol="0" anchor="ctr"/>
+          <a:lstStyle/>
+          <a:p>
+            <a:pPr algn="ctr"/>
+          </a:p>
+        </p:txBody>
+      </p:sp>
+      <p:sp>
+        <p:nvSpPr>
+          <p:cNvPr id="32" name="TextBox 31"/>
+          <p:cNvSpPr txBox="1"/>
+          <p:nvPr/>
+        </p:nvSpPr>
+        <p:spPr>
+          <a:xfrm>
+            <a:off x="5513070" y="1447800"/>
+            <a:ext cx="4000500" cy="228600"/>
+          </a:xfrm>
+          <a:prstGeom prst="rect">
+            <a:avLst/>
+          </a:prstGeom>
+          <a:noFill/>
+        </p:spPr>
+        <p:txBody>
+          <a:bodyPr wrap="none" lIns="0" rIns="0" tIns="0" bIns="0" anchor="ctr">
+            <a:spAutoFit/>
+          </a:bodyPr>
+          <a:lstStyle/>
+          <a:p>
+            <a:pPr algn="l"/>
+            <a:r>
+              <a:rPr sz="1200" b="1">
+                <a:solidFill>
+                  <a:srgbClr val="A8410F"/>
+                </a:solidFill>
+                <a:latin typeface="Yu Gothic UI"/>
+              </a:rPr>
+              <a:t>カセットコンロの本体幅 33.4cm</a:t>
+            </a:r>
+          </a:p>
+        </p:txBody>
+      </p:sp>
+      <p:sp>
+        <p:nvSpPr>
+          <p:cNvPr id="33" name="Rectangle 32"/>
+          <p:cNvSpPr/>
+          <p:nvPr/>
+        </p:nvSpPr>
+        <p:spPr>
+          <a:xfrm>
+            <a:off x="609600" y="5295900"/>
+            <a:ext cx="10210800" cy="9525"/>
+          </a:xfrm>
+          <a:prstGeom prst="rect">
+            <a:avLst/>
+          </a:prstGeom>
+          <a:solidFill>
+            <a:srgbClr val="E2E7EC"/>
+          </a:solidFill>
+          <a:ln>
+            <a:noFill/>
+          </a:ln>
+          <a:effectLst/>
+        </p:spPr>
+        <p:txBody>
+          <a:bodyPr rtlCol="0" anchor="ctr"/>
+          <a:lstStyle/>
+          <a:p>
+            <a:pPr algn="ctr"/>
+          </a:p>
+        </p:txBody>
+      </p:sp>
+      <p:sp>
+        <p:nvSpPr>
+          <p:cNvPr id="34" name="TextBox 33"/>
+          <p:cNvSpPr txBox="1"/>
+          <p:nvPr/>
+        </p:nvSpPr>
+        <p:spPr>
+          <a:xfrm>
+            <a:off x="609600" y="5429250"/>
+            <a:ext cx="7239000" cy="247650"/>
+          </a:xfrm>
+          <a:prstGeom prst="rect">
+            <a:avLst/>
+          </a:prstGeom>
+          <a:noFill/>
+        </p:spPr>
+        <p:txBody>
+          <a:bodyPr wrap="none" lIns="0" rIns="0" tIns="0" bIns="0" anchor="ctr">
+            <a:spAutoFit/>
+          </a:bodyPr>
+          <a:lstStyle/>
+          <a:p>
+            <a:pPr algn="l"/>
+            <a:r>
+              <a:rPr sz="1425" b="1">
+                <a:solidFill>
+                  <a:srgbClr val="2E2E33"/>
+                </a:solidFill>
+                <a:latin typeface="Yu Gothic UI"/>
+              </a:rPr>
+              <a:t>同じ号数でも、シリーズで幅が違います。</a:t>
+            </a:r>
+          </a:p>
+        </p:txBody>
+      </p:sp>
+      <p:sp>
+        <p:nvSpPr>
+          <p:cNvPr id="35" name="TextBox 34"/>
+          <p:cNvSpPr txBox="1"/>
+          <p:nvPr/>
+        </p:nvSpPr>
+        <p:spPr>
+          <a:xfrm>
+            <a:off x="609600" y="5676900"/>
+            <a:ext cx="7620000" cy="209550"/>
+          </a:xfrm>
+          <a:prstGeom prst="rect">
+            <a:avLst/>
+          </a:prstGeom>
+          <a:noFill/>
+        </p:spPr>
+        <p:txBody>
+          <a:bodyPr wrap="none" lIns="0" rIns="0" tIns="0" bIns="0" anchor="ctr">
+            <a:spAutoFit/>
+          </a:bodyPr>
+          <a:lstStyle/>
+          <a:p>
+            <a:pPr algn="l"/>
+            <a:r>
+              <a:rPr sz="1050" b="0">
+                <a:solidFill>
+                  <a:srgbClr val="6A717B"/>
+                </a:solidFill>
+                <a:latin typeface="Yu Gothic UI"/>
+              </a:rPr>
+              <a:t>メーカー公表値からの計算です（実測ではありません）</a:t>
+            </a:r>
+          </a:p>
+        </p:txBody>
+      </p:sp>
+      <p:sp>
+        <p:nvSpPr>
+          <p:cNvPr id="36" name="TextBox 35"/>
           <p:cNvSpPr txBox="1"/>
           <p:nvPr/>
         </p:nvSpPr>

--- a/site/public/img/figures.pptx
+++ b/site/public/img/figures.pptx
@@ -19,6 +19,11 @@
     <p:sldId id="267" r:id="rId18"/>
     <p:sldId id="268" r:id="rId19"/>
     <p:sldId id="269" r:id="rId20"/>
+    <p:sldId id="270" r:id="rId21"/>
+    <p:sldId id="271" r:id="rId22"/>
+    <p:sldId id="272" r:id="rId23"/>
+    <p:sldId id="273" r:id="rId24"/>
+    <p:sldId id="274" r:id="rId25"/>
   </p:sldIdLst>
   <p:sldSz cx="11430000" cy="6000750" type="screen4x3"/>
   <p:notesSz cx="6858000" cy="9144000"/>
@@ -10903,6 +10908,6644 @@
       <p:sp>
         <p:nvSpPr>
           <p:cNvPr id="36" name="TextBox 35"/>
+          <p:cNvSpPr txBox="1"/>
+          <p:nvPr/>
+        </p:nvSpPr>
+        <p:spPr>
+          <a:xfrm>
+            <a:off x="7962900" y="5676900"/>
+            <a:ext cx="2857500" cy="209550"/>
+          </a:xfrm>
+          <a:prstGeom prst="rect">
+            <a:avLst/>
+          </a:prstGeom>
+          <a:noFill/>
+        </p:spPr>
+        <p:txBody>
+          <a:bodyPr wrap="none" lIns="0" rIns="0" tIns="0" bIns="0" anchor="ctr">
+            <a:spAutoFit/>
+          </a:bodyPr>
+          <a:lstStyle/>
+          <a:p>
+            <a:pPr algn="r"/>
+            <a:r>
+              <a:rPr sz="1050" b="0">
+                <a:solidFill>
+                  <a:srgbClr val="6A717B"/>
+                </a:solidFill>
+                <a:latin typeface="Yu Gothic UI"/>
+              </a:rPr>
+              <a:t>寸法で選ぶ　sunpou.nexeed-lab.com</a:t>
+            </a:r>
+          </a:p>
+        </p:txBody>
+      </p:sp>
+    </p:spTree>
+  </p:cSld>
+  <p:clrMapOvr>
+    <a:masterClrMapping/>
+  </p:clrMapOvr>
+</p:sld>
+</file>
+
+<file path=ppt/slides/slide15.xml><?xml version="1.0" encoding="utf-8"?>
+<p:sld xmlns:a="http://schemas.openxmlformats.org/drawingml/2006/main" xmlns:p="http://schemas.openxmlformats.org/presentationml/2006/main" xmlns:r="http://schemas.openxmlformats.org/officeDocument/2006/relationships">
+  <p:cSld>
+    <p:spTree>
+      <p:nvGrpSpPr>
+        <p:cNvPr id="1" name=""/>
+        <p:cNvGrpSpPr/>
+        <p:nvPr/>
+      </p:nvGrpSpPr>
+      <p:grpSpPr/>
+      <p:sp>
+        <p:nvSpPr>
+          <p:cNvPr id="2" name="Rectangle 1"/>
+          <p:cNvSpPr/>
+          <p:nvPr/>
+        </p:nvSpPr>
+        <p:spPr>
+          <a:xfrm>
+            <a:off x="0" y="0"/>
+            <a:ext cx="11430000" cy="6000750"/>
+          </a:xfrm>
+          <a:prstGeom prst="rect">
+            <a:avLst/>
+          </a:prstGeom>
+          <a:solidFill>
+            <a:srgbClr val="FCFCFC"/>
+          </a:solidFill>
+          <a:ln>
+            <a:noFill/>
+          </a:ln>
+          <a:effectLst/>
+        </p:spPr>
+        <p:txBody>
+          <a:bodyPr rtlCol="0" anchor="ctr"/>
+          <a:lstStyle/>
+          <a:p>
+            <a:pPr algn="ctr"/>
+          </a:p>
+        </p:txBody>
+      </p:sp>
+      <p:sp>
+        <p:nvSpPr>
+          <p:cNvPr id="3" name="Rectangle 2"/>
+          <p:cNvSpPr/>
+          <p:nvPr/>
+        </p:nvSpPr>
+        <p:spPr>
+          <a:xfrm>
+            <a:off x="0" y="0"/>
+            <a:ext cx="114300" cy="6000750"/>
+          </a:xfrm>
+          <a:prstGeom prst="rect">
+            <a:avLst/>
+          </a:prstGeom>
+          <a:solidFill>
+            <a:srgbClr val="014172"/>
+          </a:solidFill>
+          <a:ln>
+            <a:noFill/>
+          </a:ln>
+          <a:effectLst/>
+        </p:spPr>
+        <p:txBody>
+          <a:bodyPr rtlCol="0" anchor="ctr"/>
+          <a:lstStyle/>
+          <a:p>
+            <a:pPr algn="ctr"/>
+          </a:p>
+        </p:txBody>
+      </p:sp>
+      <p:sp>
+        <p:nvSpPr>
+          <p:cNvPr id="4" name="Rectangle 3"/>
+          <p:cNvSpPr/>
+          <p:nvPr/>
+        </p:nvSpPr>
+        <p:spPr>
+          <a:xfrm>
+            <a:off x="0" y="0"/>
+            <a:ext cx="11430000" cy="1504950"/>
+          </a:xfrm>
+          <a:prstGeom prst="rect">
+            <a:avLst/>
+          </a:prstGeom>
+          <a:solidFill>
+            <a:srgbClr val="014172"/>
+          </a:solidFill>
+          <a:ln>
+            <a:noFill/>
+          </a:ln>
+          <a:effectLst/>
+        </p:spPr>
+        <p:txBody>
+          <a:bodyPr rtlCol="0" anchor="ctr"/>
+          <a:lstStyle/>
+          <a:p>
+            <a:pPr algn="ctr"/>
+          </a:p>
+        </p:txBody>
+      </p:sp>
+      <p:sp>
+        <p:nvSpPr>
+          <p:cNvPr id="5" name="TextBox 4"/>
+          <p:cNvSpPr txBox="1"/>
+          <p:nvPr/>
+        </p:nvSpPr>
+        <p:spPr>
+          <a:xfrm>
+            <a:off x="609600" y="361950"/>
+            <a:ext cx="7429500" cy="476250"/>
+          </a:xfrm>
+          <a:prstGeom prst="rect">
+            <a:avLst/>
+          </a:prstGeom>
+          <a:noFill/>
+        </p:spPr>
+        <p:txBody>
+          <a:bodyPr wrap="none" lIns="0" rIns="0" tIns="0" bIns="0" anchor="ctr">
+            <a:spAutoFit/>
+          </a:bodyPr>
+          <a:lstStyle/>
+          <a:p>
+            <a:pPr algn="l"/>
+            <a:r>
+              <a:rPr sz="3000" b="1">
+                <a:solidFill>
+                  <a:srgbClr val="FFFFFF"/>
+                </a:solidFill>
+                <a:latin typeface="Yu Gothic UI"/>
+              </a:rPr>
+              <a:t>同じ「180」でも天板の高さが違う</a:t>
+            </a:r>
+          </a:p>
+        </p:txBody>
+      </p:sp>
+      <p:sp>
+        <p:nvSpPr>
+          <p:cNvPr id="6" name="TextBox 5"/>
+          <p:cNvSpPr txBox="1"/>
+          <p:nvPr/>
+        </p:nvSpPr>
+        <p:spPr>
+          <a:xfrm>
+            <a:off x="609600" y="876300"/>
+            <a:ext cx="7429500" cy="247650"/>
+          </a:xfrm>
+          <a:prstGeom prst="rect">
+            <a:avLst/>
+          </a:prstGeom>
+          <a:noFill/>
+        </p:spPr>
+        <p:txBody>
+          <a:bodyPr wrap="none" lIns="0" rIns="0" tIns="0" bIns="0" anchor="ctr">
+            <a:spAutoFit/>
+          </a:bodyPr>
+          <a:lstStyle/>
+          <a:p>
+            <a:pPr algn="l"/>
+            <a:r>
+              <a:rPr sz="1425" b="0">
+                <a:solidFill>
+                  <a:srgbClr val="DAE7F2"/>
+                </a:solidFill>
+                <a:latin typeface="Yu Gothic UI"/>
+              </a:rPr>
+              <a:t>型番に180が付く4シリーズのメーカー公表値</a:t>
+            </a:r>
+          </a:p>
+        </p:txBody>
+      </p:sp>
+      <p:sp>
+        <p:nvSpPr>
+          <p:cNvPr id="7" name="Rounded Rectangle 6"/>
+          <p:cNvSpPr/>
+          <p:nvPr/>
+        </p:nvSpPr>
+        <p:spPr>
+          <a:xfrm>
+            <a:off x="8305800" y="247650"/>
+            <a:ext cx="2514600" cy="1009650"/>
+          </a:xfrm>
+          <a:prstGeom prst="roundRect">
+            <a:avLst>
+              <a:gd name="adj" fmla="val 12000"/>
+            </a:avLst>
+          </a:prstGeom>
+          <a:solidFill>
+            <a:srgbClr val="FFFFFF"/>
+          </a:solidFill>
+          <a:ln>
+            <a:noFill/>
+          </a:ln>
+          <a:effectLst>
+            <a:outerShdw blurRad="254000" dist="63500" dir="5400000" rotWithShape="0">
+              <a:srgbClr val="0B2B45">
+                <a:alpha val="30000"/>
+              </a:srgbClr>
+            </a:outerShdw>
+          </a:effectLst>
+        </p:spPr>
+        <p:txBody>
+          <a:bodyPr rtlCol="0" anchor="ctr"/>
+          <a:lstStyle/>
+          <a:p>
+            <a:pPr algn="ctr"/>
+          </a:p>
+        </p:txBody>
+      </p:sp>
+      <p:sp>
+        <p:nvSpPr>
+          <p:cNvPr id="8" name="TextBox 7"/>
+          <p:cNvSpPr txBox="1"/>
+          <p:nvPr/>
+        </p:nvSpPr>
+        <p:spPr>
+          <a:xfrm>
+            <a:off x="8515350" y="400050"/>
+            <a:ext cx="2133600" cy="209550"/>
+          </a:xfrm>
+          <a:prstGeom prst="rect">
+            <a:avLst/>
+          </a:prstGeom>
+          <a:noFill/>
+        </p:spPr>
+        <p:txBody>
+          <a:bodyPr wrap="none" lIns="0" rIns="0" tIns="0" bIns="0" anchor="ctr">
+            <a:spAutoFit/>
+          </a:bodyPr>
+          <a:lstStyle/>
+          <a:p>
+            <a:pPr algn="l"/>
+            <a:r>
+              <a:rPr sz="1125" b="0">
+                <a:solidFill>
+                  <a:srgbClr val="6A717B"/>
+                </a:solidFill>
+                <a:latin typeface="Yu Gothic UI"/>
+              </a:rPr>
+              <a:t>実際に立てるのは</a:t>
+            </a:r>
+          </a:p>
+        </p:txBody>
+      </p:sp>
+      <p:sp>
+        <p:nvSpPr>
+          <p:cNvPr id="9" name="TextBox 8"/>
+          <p:cNvSpPr txBox="1"/>
+          <p:nvPr/>
+        </p:nvSpPr>
+        <p:spPr>
+          <a:xfrm>
+            <a:off x="8515350" y="647700"/>
+            <a:ext cx="2133600" cy="533400"/>
+          </a:xfrm>
+          <a:prstGeom prst="rect">
+            <a:avLst/>
+          </a:prstGeom>
+          <a:noFill/>
+        </p:spPr>
+        <p:txBody>
+          <a:bodyPr wrap="none" lIns="0" rIns="0" tIns="0" bIns="0" anchor="ctr">
+            <a:spAutoFit/>
+          </a:bodyPr>
+          <a:lstStyle/>
+          <a:p>
+            <a:pPr algn="l"/>
+            <a:r>
+              <a:rPr sz="3900" b="1">
+                <a:solidFill>
+                  <a:srgbClr val="014172"/>
+                </a:solidFill>
+                <a:latin typeface="Yu Gothic UI"/>
+              </a:rPr>
+              <a:t>1.40</a:t>
+            </a:r>
+            <a:r>
+              <a:rPr sz="1950" b="1">
+                <a:solidFill>
+                  <a:srgbClr val="014172"/>
+                </a:solidFill>
+                <a:latin typeface="Yu Gothic UI"/>
+              </a:rPr>
+              <a:t>m</a:t>
+            </a:r>
+          </a:p>
+        </p:txBody>
+      </p:sp>
+      <p:sp>
+        <p:nvSpPr>
+          <p:cNvPr id="10" name="Rectangle 9"/>
+          <p:cNvSpPr/>
+          <p:nvPr/>
+        </p:nvSpPr>
+        <p:spPr>
+          <a:xfrm>
+            <a:off x="495300" y="1676400"/>
+            <a:ext cx="10439400" cy="571500"/>
+          </a:xfrm>
+          <a:prstGeom prst="rect">
+            <a:avLst/>
+          </a:prstGeom>
+          <a:solidFill>
+            <a:srgbClr val="F2F5F8"/>
+          </a:solidFill>
+          <a:ln>
+            <a:noFill/>
+          </a:ln>
+          <a:effectLst/>
+        </p:spPr>
+        <p:txBody>
+          <a:bodyPr rtlCol="0" anchor="ctr"/>
+          <a:lstStyle/>
+          <a:p>
+            <a:pPr algn="ctr"/>
+          </a:p>
+        </p:txBody>
+      </p:sp>
+      <p:sp>
+        <p:nvSpPr>
+          <p:cNvPr id="11" name="Rectangle 10"/>
+          <p:cNvSpPr/>
+          <p:nvPr/>
+        </p:nvSpPr>
+        <p:spPr>
+          <a:xfrm>
+            <a:off x="495300" y="2324100"/>
+            <a:ext cx="10439400" cy="571500"/>
+          </a:xfrm>
+          <a:prstGeom prst="rect">
+            <a:avLst/>
+          </a:prstGeom>
+          <a:solidFill>
+            <a:srgbClr val="FCFCFC"/>
+          </a:solidFill>
+          <a:ln>
+            <a:noFill/>
+          </a:ln>
+          <a:effectLst/>
+        </p:spPr>
+        <p:txBody>
+          <a:bodyPr rtlCol="0" anchor="ctr"/>
+          <a:lstStyle/>
+          <a:p>
+            <a:pPr algn="ctr"/>
+          </a:p>
+        </p:txBody>
+      </p:sp>
+      <p:sp>
+        <p:nvSpPr>
+          <p:cNvPr id="12" name="Rectangle 11"/>
+          <p:cNvSpPr/>
+          <p:nvPr/>
+        </p:nvSpPr>
+        <p:spPr>
+          <a:xfrm>
+            <a:off x="495300" y="2971800"/>
+            <a:ext cx="10439400" cy="571500"/>
+          </a:xfrm>
+          <a:prstGeom prst="rect">
+            <a:avLst/>
+          </a:prstGeom>
+          <a:solidFill>
+            <a:srgbClr val="F2F5F8"/>
+          </a:solidFill>
+          <a:ln>
+            <a:noFill/>
+          </a:ln>
+          <a:effectLst/>
+        </p:spPr>
+        <p:txBody>
+          <a:bodyPr rtlCol="0" anchor="ctr"/>
+          <a:lstStyle/>
+          <a:p>
+            <a:pPr algn="ctr"/>
+          </a:p>
+        </p:txBody>
+      </p:sp>
+      <p:sp>
+        <p:nvSpPr>
+          <p:cNvPr id="13" name="Rectangle 12"/>
+          <p:cNvSpPr/>
+          <p:nvPr/>
+        </p:nvSpPr>
+        <p:spPr>
+          <a:xfrm>
+            <a:off x="495300" y="3619500"/>
+            <a:ext cx="10439400" cy="571500"/>
+          </a:xfrm>
+          <a:prstGeom prst="rect">
+            <a:avLst/>
+          </a:prstGeom>
+          <a:solidFill>
+            <a:srgbClr val="FCFCFC"/>
+          </a:solidFill>
+          <a:ln>
+            <a:noFill/>
+          </a:ln>
+          <a:effectLst/>
+        </p:spPr>
+        <p:txBody>
+          <a:bodyPr rtlCol="0" anchor="ctr"/>
+          <a:lstStyle/>
+          <a:p>
+            <a:pPr algn="ctr"/>
+          </a:p>
+        </p:txBody>
+      </p:sp>
+      <p:sp>
+        <p:nvSpPr>
+          <p:cNvPr id="14" name="Rectangle 13"/>
+          <p:cNvSpPr/>
+          <p:nvPr/>
+        </p:nvSpPr>
+        <p:spPr>
+          <a:xfrm>
+            <a:off x="495300" y="4267200"/>
+            <a:ext cx="10439400" cy="571500"/>
+          </a:xfrm>
+          <a:prstGeom prst="rect">
+            <a:avLst/>
+          </a:prstGeom>
+          <a:solidFill>
+            <a:srgbClr val="E6EEF6"/>
+          </a:solidFill>
+          <a:ln>
+            <a:noFill/>
+          </a:ln>
+          <a:effectLst/>
+        </p:spPr>
+        <p:txBody>
+          <a:bodyPr rtlCol="0" anchor="ctr"/>
+          <a:lstStyle/>
+          <a:p>
+            <a:pPr algn="ctr"/>
+          </a:p>
+        </p:txBody>
+      </p:sp>
+      <p:sp>
+        <p:nvSpPr>
+          <p:cNvPr id="15" name="Rectangle 14"/>
+          <p:cNvSpPr/>
+          <p:nvPr/>
+        </p:nvSpPr>
+        <p:spPr>
+          <a:xfrm>
+            <a:off x="495300" y="4267200"/>
+            <a:ext cx="47625" cy="571500"/>
+          </a:xfrm>
+          <a:prstGeom prst="rect">
+            <a:avLst/>
+          </a:prstGeom>
+          <a:solidFill>
+            <a:srgbClr val="014172"/>
+          </a:solidFill>
+          <a:ln>
+            <a:noFill/>
+          </a:ln>
+          <a:effectLst/>
+        </p:spPr>
+        <p:txBody>
+          <a:bodyPr rtlCol="0" anchor="ctr"/>
+          <a:lstStyle/>
+          <a:p>
+            <a:pPr algn="ctr"/>
+          </a:p>
+        </p:txBody>
+      </p:sp>
+      <p:sp>
+        <p:nvSpPr>
+          <p:cNvPr id="16" name="Rounded Rectangle 15"/>
+          <p:cNvSpPr/>
+          <p:nvPr/>
+        </p:nvSpPr>
+        <p:spPr>
+          <a:xfrm>
+            <a:off x="3810000" y="1828800"/>
+            <a:ext cx="5829300" cy="285750"/>
+          </a:xfrm>
+          <a:prstGeom prst="roundRect">
+            <a:avLst>
+              <a:gd name="adj" fmla="val 30000"/>
+            </a:avLst>
+          </a:prstGeom>
+          <a:gradFill rotWithShape="1">
+            <a:gsLst>
+              <a:gs pos="0">
+                <a:srgbClr val="EEF4F9"/>
+              </a:gs>
+              <a:gs pos="100000">
+                <a:srgbClr val="DAE7F2"/>
+              </a:gs>
+            </a:gsLst>
+            <a:lin scaled="0" ang="16200000"/>
+          </a:gradFill>
+          <a:ln w="19050">
+            <a:solidFill>
+              <a:srgbClr val="014172"/>
+            </a:solidFill>
+          </a:ln>
+          <a:effectLst/>
+        </p:spPr>
+        <p:txBody>
+          <a:bodyPr rtlCol="0" anchor="ctr"/>
+          <a:lstStyle/>
+          <a:p>
+            <a:pPr algn="ctr"/>
+          </a:p>
+        </p:txBody>
+      </p:sp>
+      <p:sp>
+        <p:nvSpPr>
+          <p:cNvPr id="17" name="TextBox 16"/>
+          <p:cNvSpPr txBox="1"/>
+          <p:nvPr/>
+        </p:nvSpPr>
+        <p:spPr>
+          <a:xfrm>
+            <a:off x="704850" y="1771650"/>
+            <a:ext cx="3048000" cy="228600"/>
+          </a:xfrm>
+          <a:prstGeom prst="rect">
+            <a:avLst/>
+          </a:prstGeom>
+          <a:noFill/>
+        </p:spPr>
+        <p:txBody>
+          <a:bodyPr wrap="none" lIns="0" rIns="0" tIns="0" bIns="0" anchor="ctr">
+            <a:spAutoFit/>
+          </a:bodyPr>
+          <a:lstStyle/>
+          <a:p>
+            <a:pPr algn="l"/>
+            <a:r>
+              <a:rPr sz="1200" b="1">
+                <a:solidFill>
+                  <a:srgbClr val="2E2E33"/>
+                </a:solidFill>
+                <a:latin typeface="Yu Gothic UI"/>
+              </a:rPr>
+              <a:t>アルインコ BSA-180A</a:t>
+            </a:r>
+          </a:p>
+        </p:txBody>
+      </p:sp>
+      <p:sp>
+        <p:nvSpPr>
+          <p:cNvPr id="18" name="TextBox 17"/>
+          <p:cNvSpPr txBox="1"/>
+          <p:nvPr/>
+        </p:nvSpPr>
+        <p:spPr>
+          <a:xfrm>
+            <a:off x="704850" y="2019300"/>
+            <a:ext cx="3048000" cy="209550"/>
+          </a:xfrm>
+          <a:prstGeom prst="rect">
+            <a:avLst/>
+          </a:prstGeom>
+          <a:noFill/>
+        </p:spPr>
+        <p:txBody>
+          <a:bodyPr wrap="none" lIns="0" rIns="0" tIns="0" bIns="0" anchor="ctr">
+            <a:spAutoFit/>
+          </a:bodyPr>
+          <a:lstStyle/>
+          <a:p>
+            <a:pPr algn="l"/>
+            <a:r>
+              <a:rPr sz="1050" b="0">
+                <a:solidFill>
+                  <a:srgbClr val="6A717B"/>
+                </a:solidFill>
+                <a:latin typeface="Yu Gothic UI"/>
+              </a:rPr>
+              <a:t>専用脚立</a:t>
+            </a:r>
+          </a:p>
+        </p:txBody>
+      </p:sp>
+      <p:sp>
+        <p:nvSpPr>
+          <p:cNvPr id="19" name="TextBox 18"/>
+          <p:cNvSpPr txBox="1"/>
+          <p:nvPr/>
+        </p:nvSpPr>
+        <p:spPr>
+          <a:xfrm>
+            <a:off x="9753600" y="1828800"/>
+            <a:ext cx="1047750" cy="285750"/>
+          </a:xfrm>
+          <a:prstGeom prst="rect">
+            <a:avLst/>
+          </a:prstGeom>
+          <a:noFill/>
+        </p:spPr>
+        <p:txBody>
+          <a:bodyPr wrap="none" lIns="0" rIns="0" tIns="0" bIns="0" anchor="ctr">
+            <a:spAutoFit/>
+          </a:bodyPr>
+          <a:lstStyle/>
+          <a:p>
+            <a:pPr algn="l"/>
+            <a:r>
+              <a:rPr sz="1350" b="1">
+                <a:solidFill>
+                  <a:srgbClr val="014172"/>
+                </a:solidFill>
+                <a:latin typeface="Yu Gothic UI"/>
+              </a:rPr>
+              <a:t>1.80m</a:t>
+            </a:r>
+          </a:p>
+        </p:txBody>
+      </p:sp>
+      <p:sp>
+        <p:nvSpPr>
+          <p:cNvPr id="20" name="Rounded Rectangle 19"/>
+          <p:cNvSpPr/>
+          <p:nvPr/>
+        </p:nvSpPr>
+        <p:spPr>
+          <a:xfrm>
+            <a:off x="3810000" y="2476500"/>
+            <a:ext cx="5829300" cy="285750"/>
+          </a:xfrm>
+          <a:prstGeom prst="roundRect">
+            <a:avLst>
+              <a:gd name="adj" fmla="val 30000"/>
+            </a:avLst>
+          </a:prstGeom>
+          <a:gradFill rotWithShape="1">
+            <a:gsLst>
+              <a:gs pos="0">
+                <a:srgbClr val="EEF4F9"/>
+              </a:gs>
+              <a:gs pos="100000">
+                <a:srgbClr val="DAE7F2"/>
+              </a:gs>
+            </a:gsLst>
+            <a:lin scaled="0" ang="16200000"/>
+          </a:gradFill>
+          <a:ln w="19050">
+            <a:solidFill>
+              <a:srgbClr val="014172"/>
+            </a:solidFill>
+          </a:ln>
+          <a:effectLst/>
+        </p:spPr>
+        <p:txBody>
+          <a:bodyPr rtlCol="0" anchor="ctr"/>
+          <a:lstStyle/>
+          <a:p>
+            <a:pPr algn="ctr"/>
+          </a:p>
+        </p:txBody>
+      </p:sp>
+      <p:sp>
+        <p:nvSpPr>
+          <p:cNvPr id="21" name="TextBox 20"/>
+          <p:cNvSpPr txBox="1"/>
+          <p:nvPr/>
+        </p:nvSpPr>
+        <p:spPr>
+          <a:xfrm>
+            <a:off x="704850" y="2419350"/>
+            <a:ext cx="3048000" cy="228600"/>
+          </a:xfrm>
+          <a:prstGeom prst="rect">
+            <a:avLst/>
+          </a:prstGeom>
+          <a:noFill/>
+        </p:spPr>
+        <p:txBody>
+          <a:bodyPr wrap="none" lIns="0" rIns="0" tIns="0" bIns="0" anchor="ctr">
+            <a:spAutoFit/>
+          </a:bodyPr>
+          <a:lstStyle/>
+          <a:p>
+            <a:pPr algn="l"/>
+            <a:r>
+              <a:rPr sz="1200" b="1">
+                <a:solidFill>
+                  <a:srgbClr val="2E2E33"/>
+                </a:solidFill>
+                <a:latin typeface="Yu Gothic UI"/>
+              </a:rPr>
+              <a:t>ピカ SEC-S180</a:t>
+            </a:r>
+          </a:p>
+        </p:txBody>
+      </p:sp>
+      <p:sp>
+        <p:nvSpPr>
+          <p:cNvPr id="22" name="TextBox 21"/>
+          <p:cNvSpPr txBox="1"/>
+          <p:nvPr/>
+        </p:nvSpPr>
+        <p:spPr>
+          <a:xfrm>
+            <a:off x="704850" y="2667000"/>
+            <a:ext cx="3048000" cy="209550"/>
+          </a:xfrm>
+          <a:prstGeom prst="rect">
+            <a:avLst/>
+          </a:prstGeom>
+          <a:noFill/>
+        </p:spPr>
+        <p:txBody>
+          <a:bodyPr wrap="none" lIns="0" rIns="0" tIns="0" bIns="0" anchor="ctr">
+            <a:spAutoFit/>
+          </a:bodyPr>
+          <a:lstStyle/>
+          <a:p>
+            <a:pPr algn="l"/>
+            <a:r>
+              <a:rPr sz="1050" b="0">
+                <a:solidFill>
+                  <a:srgbClr val="6A717B"/>
+                </a:solidFill>
+                <a:latin typeface="Yu Gothic UI"/>
+              </a:rPr>
+              <a:t>専用脚立</a:t>
+            </a:r>
+          </a:p>
+        </p:txBody>
+      </p:sp>
+      <p:sp>
+        <p:nvSpPr>
+          <p:cNvPr id="23" name="TextBox 22"/>
+          <p:cNvSpPr txBox="1"/>
+          <p:nvPr/>
+        </p:nvSpPr>
+        <p:spPr>
+          <a:xfrm>
+            <a:off x="9753600" y="2476500"/>
+            <a:ext cx="1047750" cy="285750"/>
+          </a:xfrm>
+          <a:prstGeom prst="rect">
+            <a:avLst/>
+          </a:prstGeom>
+          <a:noFill/>
+        </p:spPr>
+        <p:txBody>
+          <a:bodyPr wrap="none" lIns="0" rIns="0" tIns="0" bIns="0" anchor="ctr">
+            <a:spAutoFit/>
+          </a:bodyPr>
+          <a:lstStyle/>
+          <a:p>
+            <a:pPr algn="l"/>
+            <a:r>
+              <a:rPr sz="1350" b="1">
+                <a:solidFill>
+                  <a:srgbClr val="014172"/>
+                </a:solidFill>
+                <a:latin typeface="Yu Gothic UI"/>
+              </a:rPr>
+              <a:t>1.80m</a:t>
+            </a:r>
+          </a:p>
+        </p:txBody>
+      </p:sp>
+      <p:sp>
+        <p:nvSpPr>
+          <p:cNvPr id="24" name="Rounded Rectangle 23"/>
+          <p:cNvSpPr/>
+          <p:nvPr/>
+        </p:nvSpPr>
+        <p:spPr>
+          <a:xfrm>
+            <a:off x="3810000" y="3124200"/>
+            <a:ext cx="5505450" cy="285750"/>
+          </a:xfrm>
+          <a:prstGeom prst="roundRect">
+            <a:avLst>
+              <a:gd name="adj" fmla="val 30000"/>
+            </a:avLst>
+          </a:prstGeom>
+          <a:gradFill rotWithShape="1">
+            <a:gsLst>
+              <a:gs pos="0">
+                <a:srgbClr val="EEF4F9"/>
+              </a:gs>
+              <a:gs pos="100000">
+                <a:srgbClr val="DAE7F2"/>
+              </a:gs>
+            </a:gsLst>
+            <a:lin scaled="0" ang="16200000"/>
+          </a:gradFill>
+          <a:ln w="19050">
+            <a:solidFill>
+              <a:srgbClr val="014172"/>
+            </a:solidFill>
+          </a:ln>
+          <a:effectLst/>
+        </p:spPr>
+        <p:txBody>
+          <a:bodyPr rtlCol="0" anchor="ctr"/>
+          <a:lstStyle/>
+          <a:p>
+            <a:pPr algn="ctr"/>
+          </a:p>
+        </p:txBody>
+      </p:sp>
+      <p:sp>
+        <p:nvSpPr>
+          <p:cNvPr id="25" name="TextBox 24"/>
+          <p:cNvSpPr txBox="1"/>
+          <p:nvPr/>
+        </p:nvSpPr>
+        <p:spPr>
+          <a:xfrm>
+            <a:off x="704850" y="3067050"/>
+            <a:ext cx="3048000" cy="228600"/>
+          </a:xfrm>
+          <a:prstGeom prst="rect">
+            <a:avLst/>
+          </a:prstGeom>
+          <a:noFill/>
+        </p:spPr>
+        <p:txBody>
+          <a:bodyPr wrap="none" lIns="0" rIns="0" tIns="0" bIns="0" anchor="ctr">
+            <a:spAutoFit/>
+          </a:bodyPr>
+          <a:lstStyle/>
+          <a:p>
+            <a:pPr algn="l"/>
+            <a:r>
+              <a:rPr sz="1200" b="1">
+                <a:solidFill>
+                  <a:srgbClr val="2E2E33"/>
+                </a:solidFill>
+                <a:latin typeface="Yu Gothic UI"/>
+              </a:rPr>
+              <a:t>長谷川工業 RHB-18a</a:t>
+            </a:r>
+          </a:p>
+        </p:txBody>
+      </p:sp>
+      <p:sp>
+        <p:nvSpPr>
+          <p:cNvPr id="26" name="TextBox 25"/>
+          <p:cNvSpPr txBox="1"/>
+          <p:nvPr/>
+        </p:nvSpPr>
+        <p:spPr>
+          <a:xfrm>
+            <a:off x="704850" y="3314700"/>
+            <a:ext cx="3048000" cy="209550"/>
+          </a:xfrm>
+          <a:prstGeom prst="rect">
+            <a:avLst/>
+          </a:prstGeom>
+          <a:noFill/>
+        </p:spPr>
+        <p:txBody>
+          <a:bodyPr wrap="none" lIns="0" rIns="0" tIns="0" bIns="0" anchor="ctr">
+            <a:spAutoFit/>
+          </a:bodyPr>
+          <a:lstStyle/>
+          <a:p>
+            <a:pPr algn="l"/>
+            <a:r>
+              <a:rPr sz="1050" b="0">
+                <a:solidFill>
+                  <a:srgbClr val="6A717B"/>
+                </a:solidFill>
+                <a:latin typeface="Yu Gothic UI"/>
+              </a:rPr>
+              <a:t>はしご兼用脚立</a:t>
+            </a:r>
+          </a:p>
+        </p:txBody>
+      </p:sp>
+      <p:sp>
+        <p:nvSpPr>
+          <p:cNvPr id="27" name="TextBox 26"/>
+          <p:cNvSpPr txBox="1"/>
+          <p:nvPr/>
+        </p:nvSpPr>
+        <p:spPr>
+          <a:xfrm>
+            <a:off x="9429750" y="3124200"/>
+            <a:ext cx="1047750" cy="285750"/>
+          </a:xfrm>
+          <a:prstGeom prst="rect">
+            <a:avLst/>
+          </a:prstGeom>
+          <a:noFill/>
+        </p:spPr>
+        <p:txBody>
+          <a:bodyPr wrap="none" lIns="0" rIns="0" tIns="0" bIns="0" anchor="ctr">
+            <a:spAutoFit/>
+          </a:bodyPr>
+          <a:lstStyle/>
+          <a:p>
+            <a:pPr algn="l"/>
+            <a:r>
+              <a:rPr sz="1350" b="1">
+                <a:solidFill>
+                  <a:srgbClr val="014172"/>
+                </a:solidFill>
+                <a:latin typeface="Yu Gothic UI"/>
+              </a:rPr>
+              <a:t>1.70m</a:t>
+            </a:r>
+          </a:p>
+        </p:txBody>
+      </p:sp>
+      <p:sp>
+        <p:nvSpPr>
+          <p:cNvPr id="28" name="Rounded Rectangle 27"/>
+          <p:cNvSpPr/>
+          <p:nvPr/>
+        </p:nvSpPr>
+        <p:spPr>
+          <a:xfrm>
+            <a:off x="3810000" y="3771900"/>
+            <a:ext cx="5440680" cy="285750"/>
+          </a:xfrm>
+          <a:prstGeom prst="roundRect">
+            <a:avLst>
+              <a:gd name="adj" fmla="val 30000"/>
+            </a:avLst>
+          </a:prstGeom>
+          <a:gradFill rotWithShape="1">
+            <a:gsLst>
+              <a:gs pos="0">
+                <a:srgbClr val="EEF4F9"/>
+              </a:gs>
+              <a:gs pos="100000">
+                <a:srgbClr val="DAE7F2"/>
+              </a:gs>
+            </a:gsLst>
+            <a:lin scaled="0" ang="16200000"/>
+          </a:gradFill>
+          <a:ln w="19050">
+            <a:solidFill>
+              <a:srgbClr val="014172"/>
+            </a:solidFill>
+          </a:ln>
+          <a:effectLst/>
+        </p:spPr>
+        <p:txBody>
+          <a:bodyPr rtlCol="0" anchor="ctr"/>
+          <a:lstStyle/>
+          <a:p>
+            <a:pPr algn="ctr"/>
+          </a:p>
+        </p:txBody>
+      </p:sp>
+      <p:sp>
+        <p:nvSpPr>
+          <p:cNvPr id="29" name="TextBox 28"/>
+          <p:cNvSpPr txBox="1"/>
+          <p:nvPr/>
+        </p:nvSpPr>
+        <p:spPr>
+          <a:xfrm>
+            <a:off x="704850" y="3714750"/>
+            <a:ext cx="3048000" cy="228600"/>
+          </a:xfrm>
+          <a:prstGeom prst="rect">
+            <a:avLst/>
+          </a:prstGeom>
+          <a:noFill/>
+        </p:spPr>
+        <p:txBody>
+          <a:bodyPr wrap="none" lIns="0" rIns="0" tIns="0" bIns="0" anchor="ctr">
+            <a:spAutoFit/>
+          </a:bodyPr>
+          <a:lstStyle/>
+          <a:p>
+            <a:pPr algn="l"/>
+            <a:r>
+              <a:rPr sz="1200" b="1">
+                <a:solidFill>
+                  <a:srgbClr val="2E2E33"/>
+                </a:solidFill>
+                <a:latin typeface="Yu Gothic UI"/>
+              </a:rPr>
+              <a:t>ピカ MCX-180</a:t>
+            </a:r>
+          </a:p>
+        </p:txBody>
+      </p:sp>
+      <p:sp>
+        <p:nvSpPr>
+          <p:cNvPr id="30" name="TextBox 29"/>
+          <p:cNvSpPr txBox="1"/>
+          <p:nvPr/>
+        </p:nvSpPr>
+        <p:spPr>
+          <a:xfrm>
+            <a:off x="704850" y="3962400"/>
+            <a:ext cx="3048000" cy="209550"/>
+          </a:xfrm>
+          <a:prstGeom prst="rect">
+            <a:avLst/>
+          </a:prstGeom>
+          <a:noFill/>
+        </p:spPr>
+        <p:txBody>
+          <a:bodyPr wrap="none" lIns="0" rIns="0" tIns="0" bIns="0" anchor="ctr">
+            <a:spAutoFit/>
+          </a:bodyPr>
+          <a:lstStyle/>
+          <a:p>
+            <a:pPr algn="l"/>
+            <a:r>
+              <a:rPr sz="1050" b="0">
+                <a:solidFill>
+                  <a:srgbClr val="6A717B"/>
+                </a:solidFill>
+                <a:latin typeface="Yu Gothic UI"/>
+              </a:rPr>
+              <a:t>はしご兼用脚立</a:t>
+            </a:r>
+          </a:p>
+        </p:txBody>
+      </p:sp>
+      <p:sp>
+        <p:nvSpPr>
+          <p:cNvPr id="31" name="TextBox 30"/>
+          <p:cNvSpPr txBox="1"/>
+          <p:nvPr/>
+        </p:nvSpPr>
+        <p:spPr>
+          <a:xfrm>
+            <a:off x="9364980" y="3771900"/>
+            <a:ext cx="1047750" cy="285750"/>
+          </a:xfrm>
+          <a:prstGeom prst="rect">
+            <a:avLst/>
+          </a:prstGeom>
+          <a:noFill/>
+        </p:spPr>
+        <p:txBody>
+          <a:bodyPr wrap="none" lIns="0" rIns="0" tIns="0" bIns="0" anchor="ctr">
+            <a:spAutoFit/>
+          </a:bodyPr>
+          <a:lstStyle/>
+          <a:p>
+            <a:pPr algn="l"/>
+            <a:r>
+              <a:rPr sz="1350" b="1">
+                <a:solidFill>
+                  <a:srgbClr val="014172"/>
+                </a:solidFill>
+                <a:latin typeface="Yu Gothic UI"/>
+              </a:rPr>
+              <a:t>1.68m</a:t>
+            </a:r>
+          </a:p>
+        </p:txBody>
+      </p:sp>
+      <p:sp>
+        <p:nvSpPr>
+          <p:cNvPr id="32" name="Rounded Rectangle 31"/>
+          <p:cNvSpPr/>
+          <p:nvPr/>
+        </p:nvSpPr>
+        <p:spPr>
+          <a:xfrm>
+            <a:off x="3810000" y="4419600"/>
+            <a:ext cx="4533900" cy="285750"/>
+          </a:xfrm>
+          <a:prstGeom prst="roundRect">
+            <a:avLst>
+              <a:gd name="adj" fmla="val 30000"/>
+            </a:avLst>
+          </a:prstGeom>
+          <a:gradFill rotWithShape="1">
+            <a:gsLst>
+              <a:gs pos="0">
+                <a:srgbClr val="FDF2E4"/>
+              </a:gs>
+              <a:gs pos="100000">
+                <a:srgbClr val="FDF2E4"/>
+              </a:gs>
+            </a:gsLst>
+            <a:lin scaled="0" ang="16200000"/>
+          </a:gradFill>
+          <a:ln w="19050">
+            <a:solidFill>
+              <a:srgbClr val="A8410F"/>
+            </a:solidFill>
+          </a:ln>
+          <a:effectLst/>
+        </p:spPr>
+        <p:txBody>
+          <a:bodyPr rtlCol="0" anchor="ctr"/>
+          <a:lstStyle/>
+          <a:p>
+            <a:pPr algn="ctr"/>
+          </a:p>
+        </p:txBody>
+      </p:sp>
+      <p:sp>
+        <p:nvSpPr>
+          <p:cNvPr id="33" name="TextBox 32"/>
+          <p:cNvSpPr txBox="1"/>
+          <p:nvPr/>
+        </p:nvSpPr>
+        <p:spPr>
+          <a:xfrm>
+            <a:off x="704850" y="4362450"/>
+            <a:ext cx="3048000" cy="228600"/>
+          </a:xfrm>
+          <a:prstGeom prst="rect">
+            <a:avLst/>
+          </a:prstGeom>
+          <a:noFill/>
+        </p:spPr>
+        <p:txBody>
+          <a:bodyPr wrap="none" lIns="0" rIns="0" tIns="0" bIns="0" anchor="ctr">
+            <a:spAutoFit/>
+          </a:bodyPr>
+          <a:lstStyle/>
+          <a:p>
+            <a:pPr algn="l"/>
+            <a:r>
+              <a:rPr sz="1200" b="1">
+                <a:solidFill>
+                  <a:srgbClr val="2E2E33"/>
+                </a:solidFill>
+                <a:latin typeface="Yu Gothic UI"/>
+              </a:rPr>
+              <a:t>RHB-18a に立てる高さ</a:t>
+            </a:r>
+          </a:p>
+        </p:txBody>
+      </p:sp>
+      <p:sp>
+        <p:nvSpPr>
+          <p:cNvPr id="34" name="TextBox 33"/>
+          <p:cNvSpPr txBox="1"/>
+          <p:nvPr/>
+        </p:nvSpPr>
+        <p:spPr>
+          <a:xfrm>
+            <a:off x="704850" y="4610100"/>
+            <a:ext cx="3048000" cy="209550"/>
+          </a:xfrm>
+          <a:prstGeom prst="rect">
+            <a:avLst/>
+          </a:prstGeom>
+          <a:noFill/>
+        </p:spPr>
+        <p:txBody>
+          <a:bodyPr wrap="none" lIns="0" rIns="0" tIns="0" bIns="0" anchor="ctr">
+            <a:spAutoFit/>
+          </a:bodyPr>
+          <a:lstStyle/>
+          <a:p>
+            <a:pPr algn="l"/>
+            <a:r>
+              <a:rPr sz="1050" b="0">
+                <a:solidFill>
+                  <a:srgbClr val="6A717B"/>
+                </a:solidFill>
+                <a:latin typeface="Yu Gothic UI"/>
+              </a:rPr>
+              <a:t>天板には乗れません</a:t>
+            </a:r>
+          </a:p>
+        </p:txBody>
+      </p:sp>
+      <p:sp>
+        <p:nvSpPr>
+          <p:cNvPr id="35" name="TextBox 34"/>
+          <p:cNvSpPr txBox="1"/>
+          <p:nvPr/>
+        </p:nvSpPr>
+        <p:spPr>
+          <a:xfrm>
+            <a:off x="8458200" y="4419600"/>
+            <a:ext cx="1047750" cy="285750"/>
+          </a:xfrm>
+          <a:prstGeom prst="rect">
+            <a:avLst/>
+          </a:prstGeom>
+          <a:noFill/>
+        </p:spPr>
+        <p:txBody>
+          <a:bodyPr wrap="none" lIns="0" rIns="0" tIns="0" bIns="0" anchor="ctr">
+            <a:spAutoFit/>
+          </a:bodyPr>
+          <a:lstStyle/>
+          <a:p>
+            <a:pPr algn="l"/>
+            <a:r>
+              <a:rPr sz="1350" b="1">
+                <a:solidFill>
+                  <a:srgbClr val="A8410F"/>
+                </a:solidFill>
+                <a:latin typeface="Yu Gothic UI"/>
+              </a:rPr>
+              <a:t>1.40m</a:t>
+            </a:r>
+          </a:p>
+        </p:txBody>
+      </p:sp>
+      <p:sp>
+        <p:nvSpPr>
+          <p:cNvPr id="36" name="Rectangle 35"/>
+          <p:cNvSpPr/>
+          <p:nvPr/>
+        </p:nvSpPr>
+        <p:spPr>
+          <a:xfrm>
+            <a:off x="609600" y="5295900"/>
+            <a:ext cx="10210800" cy="9525"/>
+          </a:xfrm>
+          <a:prstGeom prst="rect">
+            <a:avLst/>
+          </a:prstGeom>
+          <a:solidFill>
+            <a:srgbClr val="E2E7EC"/>
+          </a:solidFill>
+          <a:ln>
+            <a:noFill/>
+          </a:ln>
+          <a:effectLst/>
+        </p:spPr>
+        <p:txBody>
+          <a:bodyPr rtlCol="0" anchor="ctr"/>
+          <a:lstStyle/>
+          <a:p>
+            <a:pPr algn="ctr"/>
+          </a:p>
+        </p:txBody>
+      </p:sp>
+      <p:sp>
+        <p:nvSpPr>
+          <p:cNvPr id="37" name="TextBox 36"/>
+          <p:cNvSpPr txBox="1"/>
+          <p:nvPr/>
+        </p:nvSpPr>
+        <p:spPr>
+          <a:xfrm>
+            <a:off x="609600" y="5429250"/>
+            <a:ext cx="7239000" cy="247650"/>
+          </a:xfrm>
+          <a:prstGeom prst="rect">
+            <a:avLst/>
+          </a:prstGeom>
+          <a:noFill/>
+        </p:spPr>
+        <p:txBody>
+          <a:bodyPr wrap="none" lIns="0" rIns="0" tIns="0" bIns="0" anchor="ctr">
+            <a:spAutoFit/>
+          </a:bodyPr>
+          <a:lstStyle/>
+          <a:p>
+            <a:pPr algn="l"/>
+            <a:r>
+              <a:rPr sz="1425" b="1">
+                <a:solidFill>
+                  <a:srgbClr val="2E2E33"/>
+                </a:solidFill>
+                <a:latin typeface="Yu Gothic UI"/>
+              </a:rPr>
+              <a:t>専用脚立は型番＝天板高さ。はしご兼用脚立は型番より9〜12cm低い値でした。</a:t>
+            </a:r>
+          </a:p>
+        </p:txBody>
+      </p:sp>
+      <p:sp>
+        <p:nvSpPr>
+          <p:cNvPr id="38" name="TextBox 37"/>
+          <p:cNvSpPr txBox="1"/>
+          <p:nvPr/>
+        </p:nvSpPr>
+        <p:spPr>
+          <a:xfrm>
+            <a:off x="609600" y="5676900"/>
+            <a:ext cx="7620000" cy="209550"/>
+          </a:xfrm>
+          <a:prstGeom prst="rect">
+            <a:avLst/>
+          </a:prstGeom>
+          <a:noFill/>
+        </p:spPr>
+        <p:txBody>
+          <a:bodyPr wrap="none" lIns="0" rIns="0" tIns="0" bIns="0" anchor="ctr">
+            <a:spAutoFit/>
+          </a:bodyPr>
+          <a:lstStyle/>
+          <a:p>
+            <a:pPr algn="l"/>
+            <a:r>
+              <a:rPr sz="1050" b="0">
+                <a:solidFill>
+                  <a:srgbClr val="6A717B"/>
+                </a:solidFill>
+                <a:latin typeface="Yu Gothic UI"/>
+              </a:rPr>
+              <a:t>メーカー公表値からの計算です（実測ではありません）</a:t>
+            </a:r>
+          </a:p>
+        </p:txBody>
+      </p:sp>
+      <p:sp>
+        <p:nvSpPr>
+          <p:cNvPr id="39" name="TextBox 38"/>
+          <p:cNvSpPr txBox="1"/>
+          <p:nvPr/>
+        </p:nvSpPr>
+        <p:spPr>
+          <a:xfrm>
+            <a:off x="7962900" y="5676900"/>
+            <a:ext cx="2857500" cy="209550"/>
+          </a:xfrm>
+          <a:prstGeom prst="rect">
+            <a:avLst/>
+          </a:prstGeom>
+          <a:noFill/>
+        </p:spPr>
+        <p:txBody>
+          <a:bodyPr wrap="none" lIns="0" rIns="0" tIns="0" bIns="0" anchor="ctr">
+            <a:spAutoFit/>
+          </a:bodyPr>
+          <a:lstStyle/>
+          <a:p>
+            <a:pPr algn="r"/>
+            <a:r>
+              <a:rPr sz="1050" b="0">
+                <a:solidFill>
+                  <a:srgbClr val="6A717B"/>
+                </a:solidFill>
+                <a:latin typeface="Yu Gothic UI"/>
+              </a:rPr>
+              <a:t>寸法で選ぶ　sunpou.nexeed-lab.com</a:t>
+            </a:r>
+          </a:p>
+        </p:txBody>
+      </p:sp>
+    </p:spTree>
+  </p:cSld>
+  <p:clrMapOvr>
+    <a:masterClrMapping/>
+  </p:clrMapOvr>
+</p:sld>
+</file>
+
+<file path=ppt/slides/slide16.xml><?xml version="1.0" encoding="utf-8"?>
+<p:sld xmlns:a="http://schemas.openxmlformats.org/drawingml/2006/main" xmlns:p="http://schemas.openxmlformats.org/presentationml/2006/main" xmlns:r="http://schemas.openxmlformats.org/officeDocument/2006/relationships">
+  <p:cSld>
+    <p:spTree>
+      <p:nvGrpSpPr>
+        <p:cNvPr id="1" name=""/>
+        <p:cNvGrpSpPr/>
+        <p:nvPr/>
+      </p:nvGrpSpPr>
+      <p:grpSpPr/>
+      <p:sp>
+        <p:nvSpPr>
+          <p:cNvPr id="2" name="Rectangle 1"/>
+          <p:cNvSpPr/>
+          <p:nvPr/>
+        </p:nvSpPr>
+        <p:spPr>
+          <a:xfrm>
+            <a:off x="0" y="0"/>
+            <a:ext cx="11430000" cy="6000750"/>
+          </a:xfrm>
+          <a:prstGeom prst="rect">
+            <a:avLst/>
+          </a:prstGeom>
+          <a:solidFill>
+            <a:srgbClr val="FCFCFC"/>
+          </a:solidFill>
+          <a:ln>
+            <a:noFill/>
+          </a:ln>
+          <a:effectLst/>
+        </p:spPr>
+        <p:txBody>
+          <a:bodyPr rtlCol="0" anchor="ctr"/>
+          <a:lstStyle/>
+          <a:p>
+            <a:pPr algn="ctr"/>
+          </a:p>
+        </p:txBody>
+      </p:sp>
+      <p:sp>
+        <p:nvSpPr>
+          <p:cNvPr id="3" name="Rectangle 2"/>
+          <p:cNvSpPr/>
+          <p:nvPr/>
+        </p:nvSpPr>
+        <p:spPr>
+          <a:xfrm>
+            <a:off x="0" y="0"/>
+            <a:ext cx="114300" cy="6000750"/>
+          </a:xfrm>
+          <a:prstGeom prst="rect">
+            <a:avLst/>
+          </a:prstGeom>
+          <a:solidFill>
+            <a:srgbClr val="014172"/>
+          </a:solidFill>
+          <a:ln>
+            <a:noFill/>
+          </a:ln>
+          <a:effectLst/>
+        </p:spPr>
+        <p:txBody>
+          <a:bodyPr rtlCol="0" anchor="ctr"/>
+          <a:lstStyle/>
+          <a:p>
+            <a:pPr algn="ctr"/>
+          </a:p>
+        </p:txBody>
+      </p:sp>
+      <p:sp>
+        <p:nvSpPr>
+          <p:cNvPr id="4" name="Rectangle 3"/>
+          <p:cNvSpPr/>
+          <p:nvPr/>
+        </p:nvSpPr>
+        <p:spPr>
+          <a:xfrm>
+            <a:off x="0" y="0"/>
+            <a:ext cx="11430000" cy="1504950"/>
+          </a:xfrm>
+          <a:prstGeom prst="rect">
+            <a:avLst/>
+          </a:prstGeom>
+          <a:solidFill>
+            <a:srgbClr val="014172"/>
+          </a:solidFill>
+          <a:ln>
+            <a:noFill/>
+          </a:ln>
+          <a:effectLst/>
+        </p:spPr>
+        <p:txBody>
+          <a:bodyPr rtlCol="0" anchor="ctr"/>
+          <a:lstStyle/>
+          <a:p>
+            <a:pPr algn="ctr"/>
+          </a:p>
+        </p:txBody>
+      </p:sp>
+      <p:sp>
+        <p:nvSpPr>
+          <p:cNvPr id="5" name="TextBox 4"/>
+          <p:cNvSpPr txBox="1"/>
+          <p:nvPr/>
+        </p:nvSpPr>
+        <p:spPr>
+          <a:xfrm>
+            <a:off x="609600" y="361950"/>
+            <a:ext cx="7429500" cy="476250"/>
+          </a:xfrm>
+          <a:prstGeom prst="rect">
+            <a:avLst/>
+          </a:prstGeom>
+          <a:noFill/>
+        </p:spPr>
+        <p:txBody>
+          <a:bodyPr wrap="none" lIns="0" rIns="0" tIns="0" bIns="0" anchor="ctr">
+            <a:spAutoFit/>
+          </a:bodyPr>
+          <a:lstStyle/>
+          <a:p>
+            <a:pPr algn="l"/>
+            <a:r>
+              <a:rPr sz="3000" b="1">
+                <a:solidFill>
+                  <a:srgbClr val="FFFFFF"/>
+                </a:solidFill>
+                <a:latin typeface="Yu Gothic UI"/>
+              </a:rPr>
+              <a:t>同じ高さに立つのに 1.7kg と 6.3kg</a:t>
+            </a:r>
+          </a:p>
+        </p:txBody>
+      </p:sp>
+      <p:sp>
+        <p:nvSpPr>
+          <p:cNvPr id="6" name="TextBox 5"/>
+          <p:cNvSpPr txBox="1"/>
+          <p:nvPr/>
+        </p:nvSpPr>
+        <p:spPr>
+          <a:xfrm>
+            <a:off x="609600" y="876300"/>
+            <a:ext cx="7429500" cy="247650"/>
+          </a:xfrm>
+          <a:prstGeom prst="rect">
+            <a:avLst/>
+          </a:prstGeom>
+          <a:noFill/>
+        </p:spPr>
+        <p:txBody>
+          <a:bodyPr wrap="none" lIns="0" rIns="0" tIns="0" bIns="0" anchor="ctr">
+            <a:spAutoFit/>
+          </a:bodyPr>
+          <a:lstStyle/>
+          <a:p>
+            <a:pPr algn="l"/>
+            <a:r>
+              <a:rPr sz="1425" b="0">
+                <a:solidFill>
+                  <a:srgbClr val="DAE7F2"/>
+                </a:solidFill>
+                <a:latin typeface="Yu Gothic UI"/>
+              </a:rPr>
+              <a:t>足を置ける高さが0.5〜0.6mの5製品</a:t>
+            </a:r>
+          </a:p>
+        </p:txBody>
+      </p:sp>
+      <p:sp>
+        <p:nvSpPr>
+          <p:cNvPr id="7" name="Rounded Rectangle 6"/>
+          <p:cNvSpPr/>
+          <p:nvPr/>
+        </p:nvSpPr>
+        <p:spPr>
+          <a:xfrm>
+            <a:off x="8305800" y="247650"/>
+            <a:ext cx="2514600" cy="1009650"/>
+          </a:xfrm>
+          <a:prstGeom prst="roundRect">
+            <a:avLst>
+              <a:gd name="adj" fmla="val 12000"/>
+            </a:avLst>
+          </a:prstGeom>
+          <a:solidFill>
+            <a:srgbClr val="FFFFFF"/>
+          </a:solidFill>
+          <a:ln>
+            <a:noFill/>
+          </a:ln>
+          <a:effectLst>
+            <a:outerShdw blurRad="254000" dist="63500" dir="5400000" rotWithShape="0">
+              <a:srgbClr val="0B2B45">
+                <a:alpha val="30000"/>
+              </a:srgbClr>
+            </a:outerShdw>
+          </a:effectLst>
+        </p:spPr>
+        <p:txBody>
+          <a:bodyPr rtlCol="0" anchor="ctr"/>
+          <a:lstStyle/>
+          <a:p>
+            <a:pPr algn="ctr"/>
+          </a:p>
+        </p:txBody>
+      </p:sp>
+      <p:sp>
+        <p:nvSpPr>
+          <p:cNvPr id="8" name="TextBox 7"/>
+          <p:cNvSpPr txBox="1"/>
+          <p:nvPr/>
+        </p:nvSpPr>
+        <p:spPr>
+          <a:xfrm>
+            <a:off x="8515350" y="400050"/>
+            <a:ext cx="2133600" cy="209550"/>
+          </a:xfrm>
+          <a:prstGeom prst="rect">
+            <a:avLst/>
+          </a:prstGeom>
+          <a:noFill/>
+        </p:spPr>
+        <p:txBody>
+          <a:bodyPr wrap="none" lIns="0" rIns="0" tIns="0" bIns="0" anchor="ctr">
+            <a:spAutoFit/>
+          </a:bodyPr>
+          <a:lstStyle/>
+          <a:p>
+            <a:pPr algn="l"/>
+            <a:r>
+              <a:rPr sz="1125" b="0">
+                <a:solidFill>
+                  <a:srgbClr val="6A717B"/>
+                </a:solidFill>
+                <a:latin typeface="Yu Gothic UI"/>
+              </a:rPr>
+              <a:t>いちばん重いもの</a:t>
+            </a:r>
+          </a:p>
+        </p:txBody>
+      </p:sp>
+      <p:sp>
+        <p:nvSpPr>
+          <p:cNvPr id="9" name="TextBox 8"/>
+          <p:cNvSpPr txBox="1"/>
+          <p:nvPr/>
+        </p:nvSpPr>
+        <p:spPr>
+          <a:xfrm>
+            <a:off x="8515350" y="647700"/>
+            <a:ext cx="2133600" cy="533400"/>
+          </a:xfrm>
+          <a:prstGeom prst="rect">
+            <a:avLst/>
+          </a:prstGeom>
+          <a:noFill/>
+        </p:spPr>
+        <p:txBody>
+          <a:bodyPr wrap="none" lIns="0" rIns="0" tIns="0" bIns="0" anchor="ctr">
+            <a:spAutoFit/>
+          </a:bodyPr>
+          <a:lstStyle/>
+          <a:p>
+            <a:pPr algn="l"/>
+            <a:r>
+              <a:rPr sz="3900" b="1">
+                <a:solidFill>
+                  <a:srgbClr val="014172"/>
+                </a:solidFill>
+                <a:latin typeface="Yu Gothic UI"/>
+              </a:rPr>
+              <a:t>6.3</a:t>
+            </a:r>
+            <a:r>
+              <a:rPr sz="1950" b="1">
+                <a:solidFill>
+                  <a:srgbClr val="014172"/>
+                </a:solidFill>
+                <a:latin typeface="Yu Gothic UI"/>
+              </a:rPr>
+              <a:t>kg</a:t>
+            </a:r>
+          </a:p>
+        </p:txBody>
+      </p:sp>
+      <p:sp>
+        <p:nvSpPr>
+          <p:cNvPr id="10" name="Rectangle 9"/>
+          <p:cNvSpPr/>
+          <p:nvPr/>
+        </p:nvSpPr>
+        <p:spPr>
+          <a:xfrm>
+            <a:off x="495300" y="1676400"/>
+            <a:ext cx="10439400" cy="571500"/>
+          </a:xfrm>
+          <a:prstGeom prst="rect">
+            <a:avLst/>
+          </a:prstGeom>
+          <a:solidFill>
+            <a:srgbClr val="F2F5F8"/>
+          </a:solidFill>
+          <a:ln>
+            <a:noFill/>
+          </a:ln>
+          <a:effectLst/>
+        </p:spPr>
+        <p:txBody>
+          <a:bodyPr rtlCol="0" anchor="ctr"/>
+          <a:lstStyle/>
+          <a:p>
+            <a:pPr algn="ctr"/>
+          </a:p>
+        </p:txBody>
+      </p:sp>
+      <p:sp>
+        <p:nvSpPr>
+          <p:cNvPr id="11" name="Rectangle 10"/>
+          <p:cNvSpPr/>
+          <p:nvPr/>
+        </p:nvSpPr>
+        <p:spPr>
+          <a:xfrm>
+            <a:off x="495300" y="2324100"/>
+            <a:ext cx="10439400" cy="571500"/>
+          </a:xfrm>
+          <a:prstGeom prst="rect">
+            <a:avLst/>
+          </a:prstGeom>
+          <a:solidFill>
+            <a:srgbClr val="FCFCFC"/>
+          </a:solidFill>
+          <a:ln>
+            <a:noFill/>
+          </a:ln>
+          <a:effectLst/>
+        </p:spPr>
+        <p:txBody>
+          <a:bodyPr rtlCol="0" anchor="ctr"/>
+          <a:lstStyle/>
+          <a:p>
+            <a:pPr algn="ctr"/>
+          </a:p>
+        </p:txBody>
+      </p:sp>
+      <p:sp>
+        <p:nvSpPr>
+          <p:cNvPr id="12" name="Rectangle 11"/>
+          <p:cNvSpPr/>
+          <p:nvPr/>
+        </p:nvSpPr>
+        <p:spPr>
+          <a:xfrm>
+            <a:off x="495300" y="2971800"/>
+            <a:ext cx="10439400" cy="571500"/>
+          </a:xfrm>
+          <a:prstGeom prst="rect">
+            <a:avLst/>
+          </a:prstGeom>
+          <a:solidFill>
+            <a:srgbClr val="F2F5F8"/>
+          </a:solidFill>
+          <a:ln>
+            <a:noFill/>
+          </a:ln>
+          <a:effectLst/>
+        </p:spPr>
+        <p:txBody>
+          <a:bodyPr rtlCol="0" anchor="ctr"/>
+          <a:lstStyle/>
+          <a:p>
+            <a:pPr algn="ctr"/>
+          </a:p>
+        </p:txBody>
+      </p:sp>
+      <p:sp>
+        <p:nvSpPr>
+          <p:cNvPr id="13" name="Rectangle 12"/>
+          <p:cNvSpPr/>
+          <p:nvPr/>
+        </p:nvSpPr>
+        <p:spPr>
+          <a:xfrm>
+            <a:off x="495300" y="3619500"/>
+            <a:ext cx="10439400" cy="571500"/>
+          </a:xfrm>
+          <a:prstGeom prst="rect">
+            <a:avLst/>
+          </a:prstGeom>
+          <a:solidFill>
+            <a:srgbClr val="FCFCFC"/>
+          </a:solidFill>
+          <a:ln>
+            <a:noFill/>
+          </a:ln>
+          <a:effectLst/>
+        </p:spPr>
+        <p:txBody>
+          <a:bodyPr rtlCol="0" anchor="ctr"/>
+          <a:lstStyle/>
+          <a:p>
+            <a:pPr algn="ctr"/>
+          </a:p>
+        </p:txBody>
+      </p:sp>
+      <p:sp>
+        <p:nvSpPr>
+          <p:cNvPr id="14" name="Rectangle 13"/>
+          <p:cNvSpPr/>
+          <p:nvPr/>
+        </p:nvSpPr>
+        <p:spPr>
+          <a:xfrm>
+            <a:off x="495300" y="4267200"/>
+            <a:ext cx="10439400" cy="571500"/>
+          </a:xfrm>
+          <a:prstGeom prst="rect">
+            <a:avLst/>
+          </a:prstGeom>
+          <a:solidFill>
+            <a:srgbClr val="E6EEF6"/>
+          </a:solidFill>
+          <a:ln>
+            <a:noFill/>
+          </a:ln>
+          <a:effectLst/>
+        </p:spPr>
+        <p:txBody>
+          <a:bodyPr rtlCol="0" anchor="ctr"/>
+          <a:lstStyle/>
+          <a:p>
+            <a:pPr algn="ctr"/>
+          </a:p>
+        </p:txBody>
+      </p:sp>
+      <p:sp>
+        <p:nvSpPr>
+          <p:cNvPr id="15" name="Rectangle 14"/>
+          <p:cNvSpPr/>
+          <p:nvPr/>
+        </p:nvSpPr>
+        <p:spPr>
+          <a:xfrm>
+            <a:off x="495300" y="4267200"/>
+            <a:ext cx="47625" cy="571500"/>
+          </a:xfrm>
+          <a:prstGeom prst="rect">
+            <a:avLst/>
+          </a:prstGeom>
+          <a:solidFill>
+            <a:srgbClr val="014172"/>
+          </a:solidFill>
+          <a:ln>
+            <a:noFill/>
+          </a:ln>
+          <a:effectLst/>
+        </p:spPr>
+        <p:txBody>
+          <a:bodyPr rtlCol="0" anchor="ctr"/>
+          <a:lstStyle/>
+          <a:p>
+            <a:pPr algn="ctr"/>
+          </a:p>
+        </p:txBody>
+      </p:sp>
+      <p:sp>
+        <p:nvSpPr>
+          <p:cNvPr id="16" name="Rounded Rectangle 15"/>
+          <p:cNvSpPr/>
+          <p:nvPr/>
+        </p:nvSpPr>
+        <p:spPr>
+          <a:xfrm>
+            <a:off x="4095750" y="1828800"/>
+            <a:ext cx="1489710" cy="285750"/>
+          </a:xfrm>
+          <a:prstGeom prst="roundRect">
+            <a:avLst>
+              <a:gd name="adj" fmla="val 30000"/>
+            </a:avLst>
+          </a:prstGeom>
+          <a:gradFill rotWithShape="1">
+            <a:gsLst>
+              <a:gs pos="0">
+                <a:srgbClr val="EEF4F9"/>
+              </a:gs>
+              <a:gs pos="100000">
+                <a:srgbClr val="DAE7F2"/>
+              </a:gs>
+            </a:gsLst>
+            <a:lin scaled="0" ang="16200000"/>
+          </a:gradFill>
+          <a:ln w="19050">
+            <a:solidFill>
+              <a:srgbClr val="014172"/>
+            </a:solidFill>
+          </a:ln>
+          <a:effectLst/>
+        </p:spPr>
+        <p:txBody>
+          <a:bodyPr rtlCol="0" anchor="ctr"/>
+          <a:lstStyle/>
+          <a:p>
+            <a:pPr algn="ctr"/>
+          </a:p>
+        </p:txBody>
+      </p:sp>
+      <p:sp>
+        <p:nvSpPr>
+          <p:cNvPr id="17" name="TextBox 16"/>
+          <p:cNvSpPr txBox="1"/>
+          <p:nvPr/>
+        </p:nvSpPr>
+        <p:spPr>
+          <a:xfrm>
+            <a:off x="704850" y="1771650"/>
+            <a:ext cx="3333750" cy="228600"/>
+          </a:xfrm>
+          <a:prstGeom prst="rect">
+            <a:avLst/>
+          </a:prstGeom>
+          <a:noFill/>
+        </p:spPr>
+        <p:txBody>
+          <a:bodyPr wrap="none" lIns="0" rIns="0" tIns="0" bIns="0" anchor="ctr">
+            <a:spAutoFit/>
+          </a:bodyPr>
+          <a:lstStyle/>
+          <a:p>
+            <a:pPr algn="l"/>
+            <a:r>
+              <a:rPr sz="1200" b="1">
+                <a:solidFill>
+                  <a:srgbClr val="2E2E33"/>
+                </a:solidFill>
+                <a:latin typeface="Yu Gothic UI"/>
+              </a:rPr>
+              <a:t>アルインコ CCA-60K</a:t>
+            </a:r>
+          </a:p>
+        </p:txBody>
+      </p:sp>
+      <p:sp>
+        <p:nvSpPr>
+          <p:cNvPr id="18" name="TextBox 17"/>
+          <p:cNvSpPr txBox="1"/>
+          <p:nvPr/>
+        </p:nvSpPr>
+        <p:spPr>
+          <a:xfrm>
+            <a:off x="704850" y="2019300"/>
+            <a:ext cx="3333750" cy="209550"/>
+          </a:xfrm>
+          <a:prstGeom prst="rect">
+            <a:avLst/>
+          </a:prstGeom>
+          <a:noFill/>
+        </p:spPr>
+        <p:txBody>
+          <a:bodyPr wrap="none" lIns="0" rIns="0" tIns="0" bIns="0" anchor="ctr">
+            <a:spAutoFit/>
+          </a:bodyPr>
+          <a:lstStyle/>
+          <a:p>
+            <a:pPr algn="l"/>
+            <a:r>
+              <a:rPr sz="1050" b="0">
+                <a:solidFill>
+                  <a:srgbClr val="6A717B"/>
+                </a:solidFill>
+                <a:latin typeface="Yu Gothic UI"/>
+              </a:rPr>
+              <a:t>踏台 ／ 0.56m</a:t>
+            </a:r>
+          </a:p>
+        </p:txBody>
+      </p:sp>
+      <p:sp>
+        <p:nvSpPr>
+          <p:cNvPr id="19" name="TextBox 18"/>
+          <p:cNvSpPr txBox="1"/>
+          <p:nvPr/>
+        </p:nvSpPr>
+        <p:spPr>
+          <a:xfrm>
+            <a:off x="5699760" y="1828800"/>
+            <a:ext cx="1047750" cy="285750"/>
+          </a:xfrm>
+          <a:prstGeom prst="rect">
+            <a:avLst/>
+          </a:prstGeom>
+          <a:noFill/>
+        </p:spPr>
+        <p:txBody>
+          <a:bodyPr wrap="none" lIns="0" rIns="0" tIns="0" bIns="0" anchor="ctr">
+            <a:spAutoFit/>
+          </a:bodyPr>
+          <a:lstStyle/>
+          <a:p>
+            <a:pPr algn="l"/>
+            <a:r>
+              <a:rPr sz="1350" b="1">
+                <a:solidFill>
+                  <a:srgbClr val="014172"/>
+                </a:solidFill>
+                <a:latin typeface="Yu Gothic UI"/>
+              </a:rPr>
+              <a:t>1.7kg</a:t>
+            </a:r>
+          </a:p>
+        </p:txBody>
+      </p:sp>
+      <p:sp>
+        <p:nvSpPr>
+          <p:cNvPr id="20" name="Rounded Rectangle 19"/>
+          <p:cNvSpPr/>
+          <p:nvPr/>
+        </p:nvSpPr>
+        <p:spPr>
+          <a:xfrm>
+            <a:off x="4095750" y="2476500"/>
+            <a:ext cx="1577340" cy="285750"/>
+          </a:xfrm>
+          <a:prstGeom prst="roundRect">
+            <a:avLst>
+              <a:gd name="adj" fmla="val 30000"/>
+            </a:avLst>
+          </a:prstGeom>
+          <a:gradFill rotWithShape="1">
+            <a:gsLst>
+              <a:gs pos="0">
+                <a:srgbClr val="EEF4F9"/>
+              </a:gs>
+              <a:gs pos="100000">
+                <a:srgbClr val="DAE7F2"/>
+              </a:gs>
+            </a:gsLst>
+            <a:lin scaled="0" ang="16200000"/>
+          </a:gradFill>
+          <a:ln w="19050">
+            <a:solidFill>
+              <a:srgbClr val="014172"/>
+            </a:solidFill>
+          </a:ln>
+          <a:effectLst/>
+        </p:spPr>
+        <p:txBody>
+          <a:bodyPr rtlCol="0" anchor="ctr"/>
+          <a:lstStyle/>
+          <a:p>
+            <a:pPr algn="ctr"/>
+          </a:p>
+        </p:txBody>
+      </p:sp>
+      <p:sp>
+        <p:nvSpPr>
+          <p:cNvPr id="21" name="TextBox 20"/>
+          <p:cNvSpPr txBox="1"/>
+          <p:nvPr/>
+        </p:nvSpPr>
+        <p:spPr>
+          <a:xfrm>
+            <a:off x="704850" y="2419350"/>
+            <a:ext cx="3333750" cy="228600"/>
+          </a:xfrm>
+          <a:prstGeom prst="rect">
+            <a:avLst/>
+          </a:prstGeom>
+          <a:noFill/>
+        </p:spPr>
+        <p:txBody>
+          <a:bodyPr wrap="none" lIns="0" rIns="0" tIns="0" bIns="0" anchor="ctr">
+            <a:spAutoFit/>
+          </a:bodyPr>
+          <a:lstStyle/>
+          <a:p>
+            <a:pPr algn="l"/>
+            <a:r>
+              <a:rPr sz="1200" b="1">
+                <a:solidFill>
+                  <a:srgbClr val="2E2E33"/>
+                </a:solidFill>
+                <a:latin typeface="Yu Gothic UI"/>
+              </a:rPr>
+              <a:t>長谷川工業 SE-6a</a:t>
+            </a:r>
+          </a:p>
+        </p:txBody>
+      </p:sp>
+      <p:sp>
+        <p:nvSpPr>
+          <p:cNvPr id="22" name="TextBox 21"/>
+          <p:cNvSpPr txBox="1"/>
+          <p:nvPr/>
+        </p:nvSpPr>
+        <p:spPr>
+          <a:xfrm>
+            <a:off x="704850" y="2667000"/>
+            <a:ext cx="3333750" cy="209550"/>
+          </a:xfrm>
+          <a:prstGeom prst="rect">
+            <a:avLst/>
+          </a:prstGeom>
+          <a:noFill/>
+        </p:spPr>
+        <p:txBody>
+          <a:bodyPr wrap="none" lIns="0" rIns="0" tIns="0" bIns="0" anchor="ctr">
+            <a:spAutoFit/>
+          </a:bodyPr>
+          <a:lstStyle/>
+          <a:p>
+            <a:pPr algn="l"/>
+            <a:r>
+              <a:rPr sz="1050" b="0">
+                <a:solidFill>
+                  <a:srgbClr val="6A717B"/>
+                </a:solidFill>
+                <a:latin typeface="Yu Gothic UI"/>
+              </a:rPr>
+              <a:t>踏台 ／ 0.56m</a:t>
+            </a:r>
+          </a:p>
+        </p:txBody>
+      </p:sp>
+      <p:sp>
+        <p:nvSpPr>
+          <p:cNvPr id="23" name="TextBox 22"/>
+          <p:cNvSpPr txBox="1"/>
+          <p:nvPr/>
+        </p:nvSpPr>
+        <p:spPr>
+          <a:xfrm>
+            <a:off x="5787390" y="2476500"/>
+            <a:ext cx="1047750" cy="285750"/>
+          </a:xfrm>
+          <a:prstGeom prst="rect">
+            <a:avLst/>
+          </a:prstGeom>
+          <a:noFill/>
+        </p:spPr>
+        <p:txBody>
+          <a:bodyPr wrap="none" lIns="0" rIns="0" tIns="0" bIns="0" anchor="ctr">
+            <a:spAutoFit/>
+          </a:bodyPr>
+          <a:lstStyle/>
+          <a:p>
+            <a:pPr algn="l"/>
+            <a:r>
+              <a:rPr sz="1350" b="1">
+                <a:solidFill>
+                  <a:srgbClr val="014172"/>
+                </a:solidFill>
+                <a:latin typeface="Yu Gothic UI"/>
+              </a:rPr>
+              <a:t>1.8kg</a:t>
+            </a:r>
+          </a:p>
+        </p:txBody>
+      </p:sp>
+      <p:sp>
+        <p:nvSpPr>
+          <p:cNvPr id="24" name="Rounded Rectangle 23"/>
+          <p:cNvSpPr/>
+          <p:nvPr/>
+        </p:nvSpPr>
+        <p:spPr>
+          <a:xfrm>
+            <a:off x="4095750" y="3124200"/>
+            <a:ext cx="3067050" cy="285750"/>
+          </a:xfrm>
+          <a:prstGeom prst="roundRect">
+            <a:avLst>
+              <a:gd name="adj" fmla="val 30000"/>
+            </a:avLst>
+          </a:prstGeom>
+          <a:gradFill rotWithShape="1">
+            <a:gsLst>
+              <a:gs pos="0">
+                <a:srgbClr val="EEF4F9"/>
+              </a:gs>
+              <a:gs pos="100000">
+                <a:srgbClr val="DAE7F2"/>
+              </a:gs>
+            </a:gsLst>
+            <a:lin scaled="0" ang="16200000"/>
+          </a:gradFill>
+          <a:ln w="19050">
+            <a:solidFill>
+              <a:srgbClr val="014172"/>
+            </a:solidFill>
+          </a:ln>
+          <a:effectLst/>
+        </p:spPr>
+        <p:txBody>
+          <a:bodyPr rtlCol="0" anchor="ctr"/>
+          <a:lstStyle/>
+          <a:p>
+            <a:pPr algn="ctr"/>
+          </a:p>
+        </p:txBody>
+      </p:sp>
+      <p:sp>
+        <p:nvSpPr>
+          <p:cNvPr id="25" name="TextBox 24"/>
+          <p:cNvSpPr txBox="1"/>
+          <p:nvPr/>
+        </p:nvSpPr>
+        <p:spPr>
+          <a:xfrm>
+            <a:off x="704850" y="3067050"/>
+            <a:ext cx="3333750" cy="228600"/>
+          </a:xfrm>
+          <a:prstGeom prst="rect">
+            <a:avLst/>
+          </a:prstGeom>
+          <a:noFill/>
+        </p:spPr>
+        <p:txBody>
+          <a:bodyPr wrap="none" lIns="0" rIns="0" tIns="0" bIns="0" anchor="ctr">
+            <a:spAutoFit/>
+          </a:bodyPr>
+          <a:lstStyle/>
+          <a:p>
+            <a:pPr algn="l"/>
+            <a:r>
+              <a:rPr sz="1200" b="1">
+                <a:solidFill>
+                  <a:srgbClr val="2E2E33"/>
+                </a:solidFill>
+                <a:latin typeface="Yu Gothic UI"/>
+              </a:rPr>
+              <a:t>長谷川工業 EFA-05</a:t>
+            </a:r>
+          </a:p>
+        </p:txBody>
+      </p:sp>
+      <p:sp>
+        <p:nvSpPr>
+          <p:cNvPr id="26" name="TextBox 25"/>
+          <p:cNvSpPr txBox="1"/>
+          <p:nvPr/>
+        </p:nvSpPr>
+        <p:spPr>
+          <a:xfrm>
+            <a:off x="704850" y="3314700"/>
+            <a:ext cx="3333750" cy="209550"/>
+          </a:xfrm>
+          <a:prstGeom prst="rect">
+            <a:avLst/>
+          </a:prstGeom>
+          <a:noFill/>
+        </p:spPr>
+        <p:txBody>
+          <a:bodyPr wrap="none" lIns="0" rIns="0" tIns="0" bIns="0" anchor="ctr">
+            <a:spAutoFit/>
+          </a:bodyPr>
+          <a:lstStyle/>
+          <a:p>
+            <a:pPr algn="l"/>
+            <a:r>
+              <a:rPr sz="1050" b="0">
+                <a:solidFill>
+                  <a:srgbClr val="6A717B"/>
+                </a:solidFill>
+                <a:latin typeface="Yu Gothic UI"/>
+              </a:rPr>
+              <a:t>踏台（上わく付き）／ 0.51m</a:t>
+            </a:r>
+          </a:p>
+        </p:txBody>
+      </p:sp>
+      <p:sp>
+        <p:nvSpPr>
+          <p:cNvPr id="27" name="TextBox 26"/>
+          <p:cNvSpPr txBox="1"/>
+          <p:nvPr/>
+        </p:nvSpPr>
+        <p:spPr>
+          <a:xfrm>
+            <a:off x="7277100" y="3124200"/>
+            <a:ext cx="1047750" cy="285750"/>
+          </a:xfrm>
+          <a:prstGeom prst="rect">
+            <a:avLst/>
+          </a:prstGeom>
+          <a:noFill/>
+        </p:spPr>
+        <p:txBody>
+          <a:bodyPr wrap="none" lIns="0" rIns="0" tIns="0" bIns="0" anchor="ctr">
+            <a:spAutoFit/>
+          </a:bodyPr>
+          <a:lstStyle/>
+          <a:p>
+            <a:pPr algn="l"/>
+            <a:r>
+              <a:rPr sz="1350" b="1">
+                <a:solidFill>
+                  <a:srgbClr val="014172"/>
+                </a:solidFill>
+                <a:latin typeface="Yu Gothic UI"/>
+              </a:rPr>
+              <a:t>3.5kg</a:t>
+            </a:r>
+          </a:p>
+        </p:txBody>
+      </p:sp>
+      <p:sp>
+        <p:nvSpPr>
+          <p:cNvPr id="28" name="Rounded Rectangle 27"/>
+          <p:cNvSpPr/>
+          <p:nvPr/>
+        </p:nvSpPr>
+        <p:spPr>
+          <a:xfrm>
+            <a:off x="4095750" y="3771900"/>
+            <a:ext cx="3154680" cy="285750"/>
+          </a:xfrm>
+          <a:prstGeom prst="roundRect">
+            <a:avLst>
+              <a:gd name="adj" fmla="val 30000"/>
+            </a:avLst>
+          </a:prstGeom>
+          <a:gradFill rotWithShape="1">
+            <a:gsLst>
+              <a:gs pos="0">
+                <a:srgbClr val="EEF4F9"/>
+              </a:gs>
+              <a:gs pos="100000">
+                <a:srgbClr val="DAE7F2"/>
+              </a:gs>
+            </a:gsLst>
+            <a:lin scaled="0" ang="16200000"/>
+          </a:gradFill>
+          <a:ln w="19050">
+            <a:solidFill>
+              <a:srgbClr val="014172"/>
+            </a:solidFill>
+          </a:ln>
+          <a:effectLst/>
+        </p:spPr>
+        <p:txBody>
+          <a:bodyPr rtlCol="0" anchor="ctr"/>
+          <a:lstStyle/>
+          <a:p>
+            <a:pPr algn="ctr"/>
+          </a:p>
+        </p:txBody>
+      </p:sp>
+      <p:sp>
+        <p:nvSpPr>
+          <p:cNvPr id="29" name="TextBox 28"/>
+          <p:cNvSpPr txBox="1"/>
+          <p:nvPr/>
+        </p:nvSpPr>
+        <p:spPr>
+          <a:xfrm>
+            <a:off x="704850" y="3714750"/>
+            <a:ext cx="3333750" cy="228600"/>
+          </a:xfrm>
+          <a:prstGeom prst="rect">
+            <a:avLst/>
+          </a:prstGeom>
+          <a:noFill/>
+        </p:spPr>
+        <p:txBody>
+          <a:bodyPr wrap="none" lIns="0" rIns="0" tIns="0" bIns="0" anchor="ctr">
+            <a:spAutoFit/>
+          </a:bodyPr>
+          <a:lstStyle/>
+          <a:p>
+            <a:pPr algn="l"/>
+            <a:r>
+              <a:rPr sz="1200" b="1">
+                <a:solidFill>
+                  <a:srgbClr val="2E2E33"/>
+                </a:solidFill>
+                <a:latin typeface="Yu Gothic UI"/>
+              </a:rPr>
+              <a:t>長谷川工業 RHB-09a</a:t>
+            </a:r>
+          </a:p>
+        </p:txBody>
+      </p:sp>
+      <p:sp>
+        <p:nvSpPr>
+          <p:cNvPr id="30" name="TextBox 29"/>
+          <p:cNvSpPr txBox="1"/>
+          <p:nvPr/>
+        </p:nvSpPr>
+        <p:spPr>
+          <a:xfrm>
+            <a:off x="704850" y="3962400"/>
+            <a:ext cx="3333750" cy="209550"/>
+          </a:xfrm>
+          <a:prstGeom prst="rect">
+            <a:avLst/>
+          </a:prstGeom>
+          <a:noFill/>
+        </p:spPr>
+        <p:txBody>
+          <a:bodyPr wrap="none" lIns="0" rIns="0" tIns="0" bIns="0" anchor="ctr">
+            <a:spAutoFit/>
+          </a:bodyPr>
+          <a:lstStyle/>
+          <a:p>
+            <a:pPr algn="l"/>
+            <a:r>
+              <a:rPr sz="1050" b="0">
+                <a:solidFill>
+                  <a:srgbClr val="6A717B"/>
+                </a:solidFill>
+                <a:latin typeface="Yu Gothic UI"/>
+              </a:rPr>
+              <a:t>はしご兼用脚立 ／ 0.50m</a:t>
+            </a:r>
+          </a:p>
+        </p:txBody>
+      </p:sp>
+      <p:sp>
+        <p:nvSpPr>
+          <p:cNvPr id="31" name="TextBox 30"/>
+          <p:cNvSpPr txBox="1"/>
+          <p:nvPr/>
+        </p:nvSpPr>
+        <p:spPr>
+          <a:xfrm>
+            <a:off x="7364730" y="3771900"/>
+            <a:ext cx="1047750" cy="285750"/>
+          </a:xfrm>
+          <a:prstGeom prst="rect">
+            <a:avLst/>
+          </a:prstGeom>
+          <a:noFill/>
+        </p:spPr>
+        <p:txBody>
+          <a:bodyPr wrap="none" lIns="0" rIns="0" tIns="0" bIns="0" anchor="ctr">
+            <a:spAutoFit/>
+          </a:bodyPr>
+          <a:lstStyle/>
+          <a:p>
+            <a:pPr algn="l"/>
+            <a:r>
+              <a:rPr sz="1350" b="1">
+                <a:solidFill>
+                  <a:srgbClr val="014172"/>
+                </a:solidFill>
+                <a:latin typeface="Yu Gothic UI"/>
+              </a:rPr>
+              <a:t>3.6kg</a:t>
+            </a:r>
+          </a:p>
+        </p:txBody>
+      </p:sp>
+      <p:sp>
+        <p:nvSpPr>
+          <p:cNvPr id="32" name="Rounded Rectangle 31"/>
+          <p:cNvSpPr/>
+          <p:nvPr/>
+        </p:nvSpPr>
+        <p:spPr>
+          <a:xfrm>
+            <a:off x="4095750" y="4419600"/>
+            <a:ext cx="5520690" cy="285750"/>
+          </a:xfrm>
+          <a:prstGeom prst="roundRect">
+            <a:avLst>
+              <a:gd name="adj" fmla="val 30000"/>
+            </a:avLst>
+          </a:prstGeom>
+          <a:gradFill rotWithShape="1">
+            <a:gsLst>
+              <a:gs pos="0">
+                <a:srgbClr val="EEF4F9"/>
+              </a:gs>
+              <a:gs pos="100000">
+                <a:srgbClr val="DAE7F2"/>
+              </a:gs>
+            </a:gsLst>
+            <a:lin scaled="0" ang="16200000"/>
+          </a:gradFill>
+          <a:ln w="19050">
+            <a:solidFill>
+              <a:srgbClr val="014172"/>
+            </a:solidFill>
+          </a:ln>
+          <a:effectLst/>
+        </p:spPr>
+        <p:txBody>
+          <a:bodyPr rtlCol="0" anchor="ctr"/>
+          <a:lstStyle/>
+          <a:p>
+            <a:pPr algn="ctr"/>
+          </a:p>
+        </p:txBody>
+      </p:sp>
+      <p:sp>
+        <p:nvSpPr>
+          <p:cNvPr id="33" name="TextBox 32"/>
+          <p:cNvSpPr txBox="1"/>
+          <p:nvPr/>
+        </p:nvSpPr>
+        <p:spPr>
+          <a:xfrm>
+            <a:off x="704850" y="4362450"/>
+            <a:ext cx="3333750" cy="228600"/>
+          </a:xfrm>
+          <a:prstGeom prst="rect">
+            <a:avLst/>
+          </a:prstGeom>
+          <a:noFill/>
+        </p:spPr>
+        <p:txBody>
+          <a:bodyPr wrap="none" lIns="0" rIns="0" tIns="0" bIns="0" anchor="ctr">
+            <a:spAutoFit/>
+          </a:bodyPr>
+          <a:lstStyle/>
+          <a:p>
+            <a:pPr algn="l"/>
+            <a:r>
+              <a:rPr sz="1200" b="1">
+                <a:solidFill>
+                  <a:srgbClr val="2E2E33"/>
+                </a:solidFill>
+                <a:latin typeface="Yu Gothic UI"/>
+              </a:rPr>
+              <a:t>長谷川工業 SWH-09</a:t>
+            </a:r>
+          </a:p>
+        </p:txBody>
+      </p:sp>
+      <p:sp>
+        <p:nvSpPr>
+          <p:cNvPr id="34" name="TextBox 33"/>
+          <p:cNvSpPr txBox="1"/>
+          <p:nvPr/>
+        </p:nvSpPr>
+        <p:spPr>
+          <a:xfrm>
+            <a:off x="704850" y="4610100"/>
+            <a:ext cx="3333750" cy="209550"/>
+          </a:xfrm>
+          <a:prstGeom prst="rect">
+            <a:avLst/>
+          </a:prstGeom>
+          <a:noFill/>
+        </p:spPr>
+        <p:txBody>
+          <a:bodyPr wrap="none" lIns="0" rIns="0" tIns="0" bIns="0" anchor="ctr">
+            <a:spAutoFit/>
+          </a:bodyPr>
+          <a:lstStyle/>
+          <a:p>
+            <a:pPr algn="l"/>
+            <a:r>
+              <a:rPr sz="1050" b="0">
+                <a:solidFill>
+                  <a:srgbClr val="6A717B"/>
+                </a:solidFill>
+                <a:latin typeface="Yu Gothic UI"/>
+              </a:rPr>
+              <a:t>強力型脚立 ／ 0.60m</a:t>
+            </a:r>
+          </a:p>
+        </p:txBody>
+      </p:sp>
+      <p:sp>
+        <p:nvSpPr>
+          <p:cNvPr id="35" name="TextBox 34"/>
+          <p:cNvSpPr txBox="1"/>
+          <p:nvPr/>
+        </p:nvSpPr>
+        <p:spPr>
+          <a:xfrm>
+            <a:off x="9730740" y="4419600"/>
+            <a:ext cx="1047750" cy="285750"/>
+          </a:xfrm>
+          <a:prstGeom prst="rect">
+            <a:avLst/>
+          </a:prstGeom>
+          <a:noFill/>
+        </p:spPr>
+        <p:txBody>
+          <a:bodyPr wrap="none" lIns="0" rIns="0" tIns="0" bIns="0" anchor="ctr">
+            <a:spAutoFit/>
+          </a:bodyPr>
+          <a:lstStyle/>
+          <a:p>
+            <a:pPr algn="l"/>
+            <a:r>
+              <a:rPr sz="1350" b="1">
+                <a:solidFill>
+                  <a:srgbClr val="014172"/>
+                </a:solidFill>
+                <a:latin typeface="Yu Gothic UI"/>
+              </a:rPr>
+              <a:t>6.3kg</a:t>
+            </a:r>
+          </a:p>
+        </p:txBody>
+      </p:sp>
+      <p:sp>
+        <p:nvSpPr>
+          <p:cNvPr id="36" name="Rectangle 35"/>
+          <p:cNvSpPr/>
+          <p:nvPr/>
+        </p:nvSpPr>
+        <p:spPr>
+          <a:xfrm>
+            <a:off x="609600" y="5295900"/>
+            <a:ext cx="10210800" cy="9525"/>
+          </a:xfrm>
+          <a:prstGeom prst="rect">
+            <a:avLst/>
+          </a:prstGeom>
+          <a:solidFill>
+            <a:srgbClr val="E2E7EC"/>
+          </a:solidFill>
+          <a:ln>
+            <a:noFill/>
+          </a:ln>
+          <a:effectLst/>
+        </p:spPr>
+        <p:txBody>
+          <a:bodyPr rtlCol="0" anchor="ctr"/>
+          <a:lstStyle/>
+          <a:p>
+            <a:pPr algn="ctr"/>
+          </a:p>
+        </p:txBody>
+      </p:sp>
+      <p:sp>
+        <p:nvSpPr>
+          <p:cNvPr id="37" name="TextBox 36"/>
+          <p:cNvSpPr txBox="1"/>
+          <p:nvPr/>
+        </p:nvSpPr>
+        <p:spPr>
+          <a:xfrm>
+            <a:off x="609600" y="5429250"/>
+            <a:ext cx="7239000" cy="247650"/>
+          </a:xfrm>
+          <a:prstGeom prst="rect">
+            <a:avLst/>
+          </a:prstGeom>
+          <a:noFill/>
+        </p:spPr>
+        <p:txBody>
+          <a:bodyPr wrap="none" lIns="0" rIns="0" tIns="0" bIns="0" anchor="ctr">
+            <a:spAutoFit/>
+          </a:bodyPr>
+          <a:lstStyle/>
+          <a:p>
+            <a:pPr algn="l"/>
+            <a:r>
+              <a:rPr sz="1425" b="1">
+                <a:solidFill>
+                  <a:srgbClr val="2E2E33"/>
+                </a:solidFill>
+                <a:latin typeface="Yu Gothic UI"/>
+              </a:rPr>
+              <a:t>踏台は天板高さ、脚立は使用最大高さでそろえています。</a:t>
+            </a:r>
+          </a:p>
+        </p:txBody>
+      </p:sp>
+      <p:sp>
+        <p:nvSpPr>
+          <p:cNvPr id="38" name="TextBox 37"/>
+          <p:cNvSpPr txBox="1"/>
+          <p:nvPr/>
+        </p:nvSpPr>
+        <p:spPr>
+          <a:xfrm>
+            <a:off x="609600" y="5676900"/>
+            <a:ext cx="7620000" cy="209550"/>
+          </a:xfrm>
+          <a:prstGeom prst="rect">
+            <a:avLst/>
+          </a:prstGeom>
+          <a:noFill/>
+        </p:spPr>
+        <p:txBody>
+          <a:bodyPr wrap="none" lIns="0" rIns="0" tIns="0" bIns="0" anchor="ctr">
+            <a:spAutoFit/>
+          </a:bodyPr>
+          <a:lstStyle/>
+          <a:p>
+            <a:pPr algn="l"/>
+            <a:r>
+              <a:rPr sz="1050" b="0">
+                <a:solidFill>
+                  <a:srgbClr val="6A717B"/>
+                </a:solidFill>
+                <a:latin typeface="Yu Gothic UI"/>
+              </a:rPr>
+              <a:t>メーカー公表値からの計算です（実測ではありません）</a:t>
+            </a:r>
+          </a:p>
+        </p:txBody>
+      </p:sp>
+      <p:sp>
+        <p:nvSpPr>
+          <p:cNvPr id="39" name="TextBox 38"/>
+          <p:cNvSpPr txBox="1"/>
+          <p:nvPr/>
+        </p:nvSpPr>
+        <p:spPr>
+          <a:xfrm>
+            <a:off x="7962900" y="5676900"/>
+            <a:ext cx="2857500" cy="209550"/>
+          </a:xfrm>
+          <a:prstGeom prst="rect">
+            <a:avLst/>
+          </a:prstGeom>
+          <a:noFill/>
+        </p:spPr>
+        <p:txBody>
+          <a:bodyPr wrap="none" lIns="0" rIns="0" tIns="0" bIns="0" anchor="ctr">
+            <a:spAutoFit/>
+          </a:bodyPr>
+          <a:lstStyle/>
+          <a:p>
+            <a:pPr algn="r"/>
+            <a:r>
+              <a:rPr sz="1050" b="0">
+                <a:solidFill>
+                  <a:srgbClr val="6A717B"/>
+                </a:solidFill>
+                <a:latin typeface="Yu Gothic UI"/>
+              </a:rPr>
+              <a:t>寸法で選ぶ　sunpou.nexeed-lab.com</a:t>
+            </a:r>
+          </a:p>
+        </p:txBody>
+      </p:sp>
+    </p:spTree>
+  </p:cSld>
+  <p:clrMapOvr>
+    <a:masterClrMapping/>
+  </p:clrMapOvr>
+</p:sld>
+</file>
+
+<file path=ppt/slides/slide17.xml><?xml version="1.0" encoding="utf-8"?>
+<p:sld xmlns:a="http://schemas.openxmlformats.org/drawingml/2006/main" xmlns:p="http://schemas.openxmlformats.org/presentationml/2006/main" xmlns:r="http://schemas.openxmlformats.org/officeDocument/2006/relationships">
+  <p:cSld>
+    <p:spTree>
+      <p:nvGrpSpPr>
+        <p:cNvPr id="1" name=""/>
+        <p:cNvGrpSpPr/>
+        <p:nvPr/>
+      </p:nvGrpSpPr>
+      <p:grpSpPr/>
+      <p:sp>
+        <p:nvSpPr>
+          <p:cNvPr id="2" name="Rectangle 1"/>
+          <p:cNvSpPr/>
+          <p:nvPr/>
+        </p:nvSpPr>
+        <p:spPr>
+          <a:xfrm>
+            <a:off x="0" y="0"/>
+            <a:ext cx="11430000" cy="6000750"/>
+          </a:xfrm>
+          <a:prstGeom prst="rect">
+            <a:avLst/>
+          </a:prstGeom>
+          <a:solidFill>
+            <a:srgbClr val="FCFCFC"/>
+          </a:solidFill>
+          <a:ln>
+            <a:noFill/>
+          </a:ln>
+          <a:effectLst/>
+        </p:spPr>
+        <p:txBody>
+          <a:bodyPr rtlCol="0" anchor="ctr"/>
+          <a:lstStyle/>
+          <a:p>
+            <a:pPr algn="ctr"/>
+          </a:p>
+        </p:txBody>
+      </p:sp>
+      <p:sp>
+        <p:nvSpPr>
+          <p:cNvPr id="3" name="Rectangle 2"/>
+          <p:cNvSpPr/>
+          <p:nvPr/>
+        </p:nvSpPr>
+        <p:spPr>
+          <a:xfrm>
+            <a:off x="0" y="0"/>
+            <a:ext cx="114300" cy="6000750"/>
+          </a:xfrm>
+          <a:prstGeom prst="rect">
+            <a:avLst/>
+          </a:prstGeom>
+          <a:solidFill>
+            <a:srgbClr val="014172"/>
+          </a:solidFill>
+          <a:ln>
+            <a:noFill/>
+          </a:ln>
+          <a:effectLst/>
+        </p:spPr>
+        <p:txBody>
+          <a:bodyPr rtlCol="0" anchor="ctr"/>
+          <a:lstStyle/>
+          <a:p>
+            <a:pPr algn="ctr"/>
+          </a:p>
+        </p:txBody>
+      </p:sp>
+      <p:sp>
+        <p:nvSpPr>
+          <p:cNvPr id="4" name="Rectangle 3"/>
+          <p:cNvSpPr/>
+          <p:nvPr/>
+        </p:nvSpPr>
+        <p:spPr>
+          <a:xfrm>
+            <a:off x="0" y="0"/>
+            <a:ext cx="11430000" cy="1504950"/>
+          </a:xfrm>
+          <a:prstGeom prst="rect">
+            <a:avLst/>
+          </a:prstGeom>
+          <a:solidFill>
+            <a:srgbClr val="014172"/>
+          </a:solidFill>
+          <a:ln>
+            <a:noFill/>
+          </a:ln>
+          <a:effectLst/>
+        </p:spPr>
+        <p:txBody>
+          <a:bodyPr rtlCol="0" anchor="ctr"/>
+          <a:lstStyle/>
+          <a:p>
+            <a:pPr algn="ctr"/>
+          </a:p>
+        </p:txBody>
+      </p:sp>
+      <p:sp>
+        <p:nvSpPr>
+          <p:cNvPr id="5" name="TextBox 4"/>
+          <p:cNvSpPr txBox="1"/>
+          <p:nvPr/>
+        </p:nvSpPr>
+        <p:spPr>
+          <a:xfrm>
+            <a:off x="609600" y="361950"/>
+            <a:ext cx="7429500" cy="476250"/>
+          </a:xfrm>
+          <a:prstGeom prst="rect">
+            <a:avLst/>
+          </a:prstGeom>
+          <a:noFill/>
+        </p:spPr>
+        <p:txBody>
+          <a:bodyPr wrap="none" lIns="0" rIns="0" tIns="0" bIns="0" anchor="ctr">
+            <a:spAutoFit/>
+          </a:bodyPr>
+          <a:lstStyle/>
+          <a:p>
+            <a:pPr algn="l"/>
+            <a:r>
+              <a:rPr sz="3000" b="1">
+                <a:solidFill>
+                  <a:srgbClr val="FFFFFF"/>
+                </a:solidFill>
+                <a:latin typeface="Yu Gothic UI"/>
+              </a:rPr>
+              <a:t>伸縮脚は21〜45cm。階段には届きません</a:t>
+            </a:r>
+          </a:p>
+        </p:txBody>
+      </p:sp>
+      <p:sp>
+        <p:nvSpPr>
+          <p:cNvPr id="6" name="TextBox 5"/>
+          <p:cNvSpPr txBox="1"/>
+          <p:nvPr/>
+        </p:nvSpPr>
+        <p:spPr>
+          <a:xfrm>
+            <a:off x="609600" y="876300"/>
+            <a:ext cx="7429500" cy="247650"/>
+          </a:xfrm>
+          <a:prstGeom prst="rect">
+            <a:avLst/>
+          </a:prstGeom>
+          <a:noFill/>
+        </p:spPr>
+        <p:txBody>
+          <a:bodyPr wrap="none" lIns="0" rIns="0" tIns="0" bIns="0" anchor="ctr">
+            <a:spAutoFit/>
+          </a:bodyPr>
+          <a:lstStyle/>
+          <a:p>
+            <a:pPr algn="l"/>
+            <a:r>
+              <a:rPr sz="1425" b="0">
+                <a:solidFill>
+                  <a:srgbClr val="DAE7F2"/>
+                </a:solidFill>
+                <a:latin typeface="Yu Gothic UI"/>
+              </a:rPr>
+              <a:t>3社5シリーズの公表値</a:t>
+            </a:r>
+          </a:p>
+        </p:txBody>
+      </p:sp>
+      <p:sp>
+        <p:nvSpPr>
+          <p:cNvPr id="7" name="Rounded Rectangle 6"/>
+          <p:cNvSpPr/>
+          <p:nvPr/>
+        </p:nvSpPr>
+        <p:spPr>
+          <a:xfrm>
+            <a:off x="8305800" y="247650"/>
+            <a:ext cx="2514600" cy="1009650"/>
+          </a:xfrm>
+          <a:prstGeom prst="roundRect">
+            <a:avLst>
+              <a:gd name="adj" fmla="val 12000"/>
+            </a:avLst>
+          </a:prstGeom>
+          <a:solidFill>
+            <a:srgbClr val="FFFFFF"/>
+          </a:solidFill>
+          <a:ln>
+            <a:noFill/>
+          </a:ln>
+          <a:effectLst>
+            <a:outerShdw blurRad="254000" dist="63500" dir="5400000" rotWithShape="0">
+              <a:srgbClr val="0B2B45">
+                <a:alpha val="30000"/>
+              </a:srgbClr>
+            </a:outerShdw>
+          </a:effectLst>
+        </p:spPr>
+        <p:txBody>
+          <a:bodyPr rtlCol="0" anchor="ctr"/>
+          <a:lstStyle/>
+          <a:p>
+            <a:pPr algn="ctr"/>
+          </a:p>
+        </p:txBody>
+      </p:sp>
+      <p:sp>
+        <p:nvSpPr>
+          <p:cNvPr id="8" name="TextBox 7"/>
+          <p:cNvSpPr txBox="1"/>
+          <p:nvPr/>
+        </p:nvSpPr>
+        <p:spPr>
+          <a:xfrm>
+            <a:off x="8515350" y="400050"/>
+            <a:ext cx="2133600" cy="209550"/>
+          </a:xfrm>
+          <a:prstGeom prst="rect">
+            <a:avLst/>
+          </a:prstGeom>
+          <a:noFill/>
+        </p:spPr>
+        <p:txBody>
+          <a:bodyPr wrap="none" lIns="0" rIns="0" tIns="0" bIns="0" anchor="ctr">
+            <a:spAutoFit/>
+          </a:bodyPr>
+          <a:lstStyle/>
+          <a:p>
+            <a:pPr algn="l"/>
+            <a:r>
+              <a:rPr sz="1125" b="0">
+                <a:solidFill>
+                  <a:srgbClr val="6A717B"/>
+                </a:solidFill>
+                <a:latin typeface="Yu Gothic UI"/>
+              </a:rPr>
+              <a:t>階段で必要な高低差</a:t>
+            </a:r>
+          </a:p>
+        </p:txBody>
+      </p:sp>
+      <p:sp>
+        <p:nvSpPr>
+          <p:cNvPr id="9" name="TextBox 8"/>
+          <p:cNvSpPr txBox="1"/>
+          <p:nvPr/>
+        </p:nvSpPr>
+        <p:spPr>
+          <a:xfrm>
+            <a:off x="8515350" y="647700"/>
+            <a:ext cx="2133600" cy="533400"/>
+          </a:xfrm>
+          <a:prstGeom prst="rect">
+            <a:avLst/>
+          </a:prstGeom>
+          <a:noFill/>
+        </p:spPr>
+        <p:txBody>
+          <a:bodyPr wrap="none" lIns="0" rIns="0" tIns="0" bIns="0" anchor="ctr">
+            <a:spAutoFit/>
+          </a:bodyPr>
+          <a:lstStyle/>
+          <a:p>
+            <a:pPr algn="l"/>
+            <a:r>
+              <a:rPr sz="3900" b="1">
+                <a:solidFill>
+                  <a:srgbClr val="014172"/>
+                </a:solidFill>
+                <a:latin typeface="Yu Gothic UI"/>
+              </a:rPr>
+              <a:t>69</a:t>
+            </a:r>
+            <a:r>
+              <a:rPr sz="1950" b="1">
+                <a:solidFill>
+                  <a:srgbClr val="014172"/>
+                </a:solidFill>
+                <a:latin typeface="Yu Gothic UI"/>
+              </a:rPr>
+              <a:t>cm</a:t>
+            </a:r>
+          </a:p>
+        </p:txBody>
+      </p:sp>
+      <p:sp>
+        <p:nvSpPr>
+          <p:cNvPr id="10" name="Rectangle 9"/>
+          <p:cNvSpPr/>
+          <p:nvPr/>
+        </p:nvSpPr>
+        <p:spPr>
+          <a:xfrm>
+            <a:off x="495300" y="1676400"/>
+            <a:ext cx="10439400" cy="514350"/>
+          </a:xfrm>
+          <a:prstGeom prst="rect">
+            <a:avLst/>
+          </a:prstGeom>
+          <a:solidFill>
+            <a:srgbClr val="F2F5F8"/>
+          </a:solidFill>
+          <a:ln>
+            <a:noFill/>
+          </a:ln>
+          <a:effectLst/>
+        </p:spPr>
+        <p:txBody>
+          <a:bodyPr rtlCol="0" anchor="ctr"/>
+          <a:lstStyle/>
+          <a:p>
+            <a:pPr algn="ctr"/>
+          </a:p>
+        </p:txBody>
+      </p:sp>
+      <p:sp>
+        <p:nvSpPr>
+          <p:cNvPr id="11" name="Rectangle 10"/>
+          <p:cNvSpPr/>
+          <p:nvPr/>
+        </p:nvSpPr>
+        <p:spPr>
+          <a:xfrm>
+            <a:off x="495300" y="2266950"/>
+            <a:ext cx="10439400" cy="514350"/>
+          </a:xfrm>
+          <a:prstGeom prst="rect">
+            <a:avLst/>
+          </a:prstGeom>
+          <a:solidFill>
+            <a:srgbClr val="FCFCFC"/>
+          </a:solidFill>
+          <a:ln>
+            <a:noFill/>
+          </a:ln>
+          <a:effectLst/>
+        </p:spPr>
+        <p:txBody>
+          <a:bodyPr rtlCol="0" anchor="ctr"/>
+          <a:lstStyle/>
+          <a:p>
+            <a:pPr algn="ctr"/>
+          </a:p>
+        </p:txBody>
+      </p:sp>
+      <p:sp>
+        <p:nvSpPr>
+          <p:cNvPr id="12" name="Rectangle 11"/>
+          <p:cNvSpPr/>
+          <p:nvPr/>
+        </p:nvSpPr>
+        <p:spPr>
+          <a:xfrm>
+            <a:off x="495300" y="2857500"/>
+            <a:ext cx="10439400" cy="514350"/>
+          </a:xfrm>
+          <a:prstGeom prst="rect">
+            <a:avLst/>
+          </a:prstGeom>
+          <a:solidFill>
+            <a:srgbClr val="F2F5F8"/>
+          </a:solidFill>
+          <a:ln>
+            <a:noFill/>
+          </a:ln>
+          <a:effectLst/>
+        </p:spPr>
+        <p:txBody>
+          <a:bodyPr rtlCol="0" anchor="ctr"/>
+          <a:lstStyle/>
+          <a:p>
+            <a:pPr algn="ctr"/>
+          </a:p>
+        </p:txBody>
+      </p:sp>
+      <p:sp>
+        <p:nvSpPr>
+          <p:cNvPr id="13" name="Rectangle 12"/>
+          <p:cNvSpPr/>
+          <p:nvPr/>
+        </p:nvSpPr>
+        <p:spPr>
+          <a:xfrm>
+            <a:off x="495300" y="3448050"/>
+            <a:ext cx="10439400" cy="514350"/>
+          </a:xfrm>
+          <a:prstGeom prst="rect">
+            <a:avLst/>
+          </a:prstGeom>
+          <a:solidFill>
+            <a:srgbClr val="FCFCFC"/>
+          </a:solidFill>
+          <a:ln>
+            <a:noFill/>
+          </a:ln>
+          <a:effectLst/>
+        </p:spPr>
+        <p:txBody>
+          <a:bodyPr rtlCol="0" anchor="ctr"/>
+          <a:lstStyle/>
+          <a:p>
+            <a:pPr algn="ctr"/>
+          </a:p>
+        </p:txBody>
+      </p:sp>
+      <p:sp>
+        <p:nvSpPr>
+          <p:cNvPr id="14" name="Rectangle 13"/>
+          <p:cNvSpPr/>
+          <p:nvPr/>
+        </p:nvSpPr>
+        <p:spPr>
+          <a:xfrm>
+            <a:off x="495300" y="4038600"/>
+            <a:ext cx="10439400" cy="514350"/>
+          </a:xfrm>
+          <a:prstGeom prst="rect">
+            <a:avLst/>
+          </a:prstGeom>
+          <a:solidFill>
+            <a:srgbClr val="F2F5F8"/>
+          </a:solidFill>
+          <a:ln>
+            <a:noFill/>
+          </a:ln>
+          <a:effectLst/>
+        </p:spPr>
+        <p:txBody>
+          <a:bodyPr rtlCol="0" anchor="ctr"/>
+          <a:lstStyle/>
+          <a:p>
+            <a:pPr algn="ctr"/>
+          </a:p>
+        </p:txBody>
+      </p:sp>
+      <p:sp>
+        <p:nvSpPr>
+          <p:cNvPr id="15" name="Rectangle 14"/>
+          <p:cNvSpPr/>
+          <p:nvPr/>
+        </p:nvSpPr>
+        <p:spPr>
+          <a:xfrm>
+            <a:off x="495300" y="4629150"/>
+            <a:ext cx="10439400" cy="514350"/>
+          </a:xfrm>
+          <a:prstGeom prst="rect">
+            <a:avLst/>
+          </a:prstGeom>
+          <a:solidFill>
+            <a:srgbClr val="E6EEF6"/>
+          </a:solidFill>
+          <a:ln>
+            <a:noFill/>
+          </a:ln>
+          <a:effectLst/>
+        </p:spPr>
+        <p:txBody>
+          <a:bodyPr rtlCol="0" anchor="ctr"/>
+          <a:lstStyle/>
+          <a:p>
+            <a:pPr algn="ctr"/>
+          </a:p>
+        </p:txBody>
+      </p:sp>
+      <p:sp>
+        <p:nvSpPr>
+          <p:cNvPr id="16" name="Rectangle 15"/>
+          <p:cNvSpPr/>
+          <p:nvPr/>
+        </p:nvSpPr>
+        <p:spPr>
+          <a:xfrm>
+            <a:off x="495300" y="4629150"/>
+            <a:ext cx="47625" cy="514350"/>
+          </a:xfrm>
+          <a:prstGeom prst="rect">
+            <a:avLst/>
+          </a:prstGeom>
+          <a:solidFill>
+            <a:srgbClr val="014172"/>
+          </a:solidFill>
+          <a:ln>
+            <a:noFill/>
+          </a:ln>
+          <a:effectLst/>
+        </p:spPr>
+        <p:txBody>
+          <a:bodyPr rtlCol="0" anchor="ctr"/>
+          <a:lstStyle/>
+          <a:p>
+            <a:pPr algn="ctr"/>
+          </a:p>
+        </p:txBody>
+      </p:sp>
+      <p:sp>
+        <p:nvSpPr>
+          <p:cNvPr id="17" name="Rounded Rectangle 16"/>
+          <p:cNvSpPr/>
+          <p:nvPr/>
+        </p:nvSpPr>
+        <p:spPr>
+          <a:xfrm>
+            <a:off x="4095750" y="1809750"/>
+            <a:ext cx="1720215" cy="266700"/>
+          </a:xfrm>
+          <a:prstGeom prst="roundRect">
+            <a:avLst>
+              <a:gd name="adj" fmla="val 30000"/>
+            </a:avLst>
+          </a:prstGeom>
+          <a:gradFill rotWithShape="1">
+            <a:gsLst>
+              <a:gs pos="0">
+                <a:srgbClr val="EEF4F9"/>
+              </a:gs>
+              <a:gs pos="100000">
+                <a:srgbClr val="DAE7F2"/>
+              </a:gs>
+            </a:gsLst>
+            <a:lin scaled="0" ang="16200000"/>
+          </a:gradFill>
+          <a:ln w="19050">
+            <a:solidFill>
+              <a:srgbClr val="014172"/>
+            </a:solidFill>
+          </a:ln>
+          <a:effectLst/>
+        </p:spPr>
+        <p:txBody>
+          <a:bodyPr rtlCol="0" anchor="ctr"/>
+          <a:lstStyle/>
+          <a:p>
+            <a:pPr algn="ctr"/>
+          </a:p>
+        </p:txBody>
+      </p:sp>
+      <p:sp>
+        <p:nvSpPr>
+          <p:cNvPr id="18" name="TextBox 17"/>
+          <p:cNvSpPr txBox="1"/>
+          <p:nvPr/>
+        </p:nvSpPr>
+        <p:spPr>
+          <a:xfrm>
+            <a:off x="704850" y="1752600"/>
+            <a:ext cx="3333750" cy="228600"/>
+          </a:xfrm>
+          <a:prstGeom prst="rect">
+            <a:avLst/>
+          </a:prstGeom>
+          <a:noFill/>
+        </p:spPr>
+        <p:txBody>
+          <a:bodyPr wrap="none" lIns="0" rIns="0" tIns="0" bIns="0" anchor="ctr">
+            <a:spAutoFit/>
+          </a:bodyPr>
+          <a:lstStyle/>
+          <a:p>
+            <a:pPr algn="l"/>
+            <a:r>
+              <a:rPr sz="1200" b="1">
+                <a:solidFill>
+                  <a:srgbClr val="2E2E33"/>
+                </a:solidFill>
+                <a:latin typeface="Yu Gothic UI"/>
+              </a:rPr>
+              <a:t>長谷川工業 RZS</a:t>
+            </a:r>
+          </a:p>
+        </p:txBody>
+      </p:sp>
+      <p:sp>
+        <p:nvSpPr>
+          <p:cNvPr id="19" name="TextBox 18"/>
+          <p:cNvSpPr txBox="1"/>
+          <p:nvPr/>
+        </p:nvSpPr>
+        <p:spPr>
+          <a:xfrm>
+            <a:off x="704850" y="1981200"/>
+            <a:ext cx="3333750" cy="209550"/>
+          </a:xfrm>
+          <a:prstGeom prst="rect">
+            <a:avLst/>
+          </a:prstGeom>
+          <a:noFill/>
+        </p:spPr>
+        <p:txBody>
+          <a:bodyPr wrap="none" lIns="0" rIns="0" tIns="0" bIns="0" anchor="ctr">
+            <a:spAutoFit/>
+          </a:bodyPr>
+          <a:lstStyle/>
+          <a:p>
+            <a:pPr algn="l"/>
+            <a:r>
+              <a:rPr sz="1050" b="0">
+                <a:solidFill>
+                  <a:srgbClr val="6A717B"/>
+                </a:solidFill>
+                <a:latin typeface="Yu Gothic UI"/>
+              </a:rPr>
+              <a:t>脚軽伸縮タイプ／専用脚立</a:t>
+            </a:r>
+          </a:p>
+        </p:txBody>
+      </p:sp>
+      <p:sp>
+        <p:nvSpPr>
+          <p:cNvPr id="20" name="TextBox 19"/>
+          <p:cNvSpPr txBox="1"/>
+          <p:nvPr/>
+        </p:nvSpPr>
+        <p:spPr>
+          <a:xfrm>
+            <a:off x="5930265" y="1809750"/>
+            <a:ext cx="1047750" cy="266700"/>
+          </a:xfrm>
+          <a:prstGeom prst="rect">
+            <a:avLst/>
+          </a:prstGeom>
+          <a:noFill/>
+        </p:spPr>
+        <p:txBody>
+          <a:bodyPr wrap="none" lIns="0" rIns="0" tIns="0" bIns="0" anchor="ctr">
+            <a:spAutoFit/>
+          </a:bodyPr>
+          <a:lstStyle/>
+          <a:p>
+            <a:pPr algn="l"/>
+            <a:r>
+              <a:rPr sz="1350" b="1">
+                <a:solidFill>
+                  <a:srgbClr val="014172"/>
+                </a:solidFill>
+                <a:latin typeface="Yu Gothic UI"/>
+              </a:rPr>
+              <a:t>21cm</a:t>
+            </a:r>
+          </a:p>
+        </p:txBody>
+      </p:sp>
+      <p:sp>
+        <p:nvSpPr>
+          <p:cNvPr id="21" name="Rounded Rectangle 20"/>
+          <p:cNvSpPr/>
+          <p:nvPr/>
+        </p:nvSpPr>
+        <p:spPr>
+          <a:xfrm>
+            <a:off x="4095750" y="2400300"/>
+            <a:ext cx="2539365" cy="266700"/>
+          </a:xfrm>
+          <a:prstGeom prst="roundRect">
+            <a:avLst>
+              <a:gd name="adj" fmla="val 30000"/>
+            </a:avLst>
+          </a:prstGeom>
+          <a:gradFill rotWithShape="1">
+            <a:gsLst>
+              <a:gs pos="0">
+                <a:srgbClr val="EEF4F9"/>
+              </a:gs>
+              <a:gs pos="100000">
+                <a:srgbClr val="DAE7F2"/>
+              </a:gs>
+            </a:gsLst>
+            <a:lin scaled="0" ang="16200000"/>
+          </a:gradFill>
+          <a:ln w="19050">
+            <a:solidFill>
+              <a:srgbClr val="014172"/>
+            </a:solidFill>
+          </a:ln>
+          <a:effectLst/>
+        </p:spPr>
+        <p:txBody>
+          <a:bodyPr rtlCol="0" anchor="ctr"/>
+          <a:lstStyle/>
+          <a:p>
+            <a:pPr algn="ctr"/>
+          </a:p>
+        </p:txBody>
+      </p:sp>
+      <p:sp>
+        <p:nvSpPr>
+          <p:cNvPr id="22" name="TextBox 21"/>
+          <p:cNvSpPr txBox="1"/>
+          <p:nvPr/>
+        </p:nvSpPr>
+        <p:spPr>
+          <a:xfrm>
+            <a:off x="704850" y="2343150"/>
+            <a:ext cx="3333750" cy="228600"/>
+          </a:xfrm>
+          <a:prstGeom prst="rect">
+            <a:avLst/>
+          </a:prstGeom>
+          <a:noFill/>
+        </p:spPr>
+        <p:txBody>
+          <a:bodyPr wrap="none" lIns="0" rIns="0" tIns="0" bIns="0" anchor="ctr">
+            <a:spAutoFit/>
+          </a:bodyPr>
+          <a:lstStyle/>
+          <a:p>
+            <a:pPr algn="l"/>
+            <a:r>
+              <a:rPr sz="1200" b="1">
+                <a:solidFill>
+                  <a:srgbClr val="2E2E33"/>
+                </a:solidFill>
+                <a:latin typeface="Yu Gothic UI"/>
+              </a:rPr>
+              <a:t>長谷川工業 RYZB</a:t>
+            </a:r>
+          </a:p>
+        </p:txBody>
+      </p:sp>
+      <p:sp>
+        <p:nvSpPr>
+          <p:cNvPr id="23" name="TextBox 22"/>
+          <p:cNvSpPr txBox="1"/>
+          <p:nvPr/>
+        </p:nvSpPr>
+        <p:spPr>
+          <a:xfrm>
+            <a:off x="704850" y="2571750"/>
+            <a:ext cx="3333750" cy="209550"/>
+          </a:xfrm>
+          <a:prstGeom prst="rect">
+            <a:avLst/>
+          </a:prstGeom>
+          <a:noFill/>
+        </p:spPr>
+        <p:txBody>
+          <a:bodyPr wrap="none" lIns="0" rIns="0" tIns="0" bIns="0" anchor="ctr">
+            <a:spAutoFit/>
+          </a:bodyPr>
+          <a:lstStyle/>
+          <a:p>
+            <a:pPr algn="l"/>
+            <a:r>
+              <a:rPr sz="1050" b="0">
+                <a:solidFill>
+                  <a:srgbClr val="6A717B"/>
+                </a:solidFill>
+                <a:latin typeface="Yu Gothic UI"/>
+              </a:rPr>
+              <a:t>はしご兼用伸縮脚立</a:t>
+            </a:r>
+          </a:p>
+        </p:txBody>
+      </p:sp>
+      <p:sp>
+        <p:nvSpPr>
+          <p:cNvPr id="24" name="TextBox 23"/>
+          <p:cNvSpPr txBox="1"/>
+          <p:nvPr/>
+        </p:nvSpPr>
+        <p:spPr>
+          <a:xfrm>
+            <a:off x="6749415" y="2400300"/>
+            <a:ext cx="1047750" cy="266700"/>
+          </a:xfrm>
+          <a:prstGeom prst="rect">
+            <a:avLst/>
+          </a:prstGeom>
+          <a:noFill/>
+        </p:spPr>
+        <p:txBody>
+          <a:bodyPr wrap="none" lIns="0" rIns="0" tIns="0" bIns="0" anchor="ctr">
+            <a:spAutoFit/>
+          </a:bodyPr>
+          <a:lstStyle/>
+          <a:p>
+            <a:pPr algn="l"/>
+            <a:r>
+              <a:rPr sz="1350" b="1">
+                <a:solidFill>
+                  <a:srgbClr val="014172"/>
+                </a:solidFill>
+                <a:latin typeface="Yu Gothic UI"/>
+              </a:rPr>
+              <a:t>31cm</a:t>
+            </a:r>
+          </a:p>
+        </p:txBody>
+      </p:sp>
+      <p:sp>
+        <p:nvSpPr>
+          <p:cNvPr id="25" name="Rounded Rectangle 24"/>
+          <p:cNvSpPr/>
+          <p:nvPr/>
+        </p:nvSpPr>
+        <p:spPr>
+          <a:xfrm>
+            <a:off x="4095750" y="2990850"/>
+            <a:ext cx="2539365" cy="266700"/>
+          </a:xfrm>
+          <a:prstGeom prst="roundRect">
+            <a:avLst>
+              <a:gd name="adj" fmla="val 30000"/>
+            </a:avLst>
+          </a:prstGeom>
+          <a:gradFill rotWithShape="1">
+            <a:gsLst>
+              <a:gs pos="0">
+                <a:srgbClr val="EEF4F9"/>
+              </a:gs>
+              <a:gs pos="100000">
+                <a:srgbClr val="DAE7F2"/>
+              </a:gs>
+            </a:gsLst>
+            <a:lin scaled="0" ang="16200000"/>
+          </a:gradFill>
+          <a:ln w="19050">
+            <a:solidFill>
+              <a:srgbClr val="014172"/>
+            </a:solidFill>
+          </a:ln>
+          <a:effectLst/>
+        </p:spPr>
+        <p:txBody>
+          <a:bodyPr rtlCol="0" anchor="ctr"/>
+          <a:lstStyle/>
+          <a:p>
+            <a:pPr algn="ctr"/>
+          </a:p>
+        </p:txBody>
+      </p:sp>
+      <p:sp>
+        <p:nvSpPr>
+          <p:cNvPr id="26" name="TextBox 25"/>
+          <p:cNvSpPr txBox="1"/>
+          <p:nvPr/>
+        </p:nvSpPr>
+        <p:spPr>
+          <a:xfrm>
+            <a:off x="704850" y="2933700"/>
+            <a:ext cx="3333750" cy="228600"/>
+          </a:xfrm>
+          <a:prstGeom prst="rect">
+            <a:avLst/>
+          </a:prstGeom>
+          <a:noFill/>
+        </p:spPr>
+        <p:txBody>
+          <a:bodyPr wrap="none" lIns="0" rIns="0" tIns="0" bIns="0" anchor="ctr">
+            <a:spAutoFit/>
+          </a:bodyPr>
+          <a:lstStyle/>
+          <a:p>
+            <a:pPr algn="l"/>
+            <a:r>
+              <a:rPr sz="1200" b="1">
+                <a:solidFill>
+                  <a:srgbClr val="2E2E33"/>
+                </a:solidFill>
+                <a:latin typeface="Yu Gothic UI"/>
+              </a:rPr>
+              <a:t>ピカ スタッピー SXJ</a:t>
+            </a:r>
+          </a:p>
+        </p:txBody>
+      </p:sp>
+      <p:sp>
+        <p:nvSpPr>
+          <p:cNvPr id="27" name="TextBox 26"/>
+          <p:cNvSpPr txBox="1"/>
+          <p:nvPr/>
+        </p:nvSpPr>
+        <p:spPr>
+          <a:xfrm>
+            <a:off x="704850" y="3162300"/>
+            <a:ext cx="3333750" cy="209550"/>
+          </a:xfrm>
+          <a:prstGeom prst="rect">
+            <a:avLst/>
+          </a:prstGeom>
+          <a:noFill/>
+        </p:spPr>
+        <p:txBody>
+          <a:bodyPr wrap="none" lIns="0" rIns="0" tIns="0" bIns="0" anchor="ctr">
+            <a:spAutoFit/>
+          </a:bodyPr>
+          <a:lstStyle/>
+          <a:p>
+            <a:pPr algn="l"/>
+            <a:r>
+              <a:rPr sz="1050" b="0">
+                <a:solidFill>
+                  <a:srgbClr val="6A717B"/>
+                </a:solidFill>
+                <a:latin typeface="Yu Gothic UI"/>
+              </a:rPr>
+              <a:t>四脚アジャスト式</a:t>
+            </a:r>
+          </a:p>
+        </p:txBody>
+      </p:sp>
+      <p:sp>
+        <p:nvSpPr>
+          <p:cNvPr id="28" name="TextBox 27"/>
+          <p:cNvSpPr txBox="1"/>
+          <p:nvPr/>
+        </p:nvSpPr>
+        <p:spPr>
+          <a:xfrm>
+            <a:off x="6749415" y="2990850"/>
+            <a:ext cx="1047750" cy="266700"/>
+          </a:xfrm>
+          <a:prstGeom prst="rect">
+            <a:avLst/>
+          </a:prstGeom>
+          <a:noFill/>
+        </p:spPr>
+        <p:txBody>
+          <a:bodyPr wrap="none" lIns="0" rIns="0" tIns="0" bIns="0" anchor="ctr">
+            <a:spAutoFit/>
+          </a:bodyPr>
+          <a:lstStyle/>
+          <a:p>
+            <a:pPr algn="l"/>
+            <a:r>
+              <a:rPr sz="1350" b="1">
+                <a:solidFill>
+                  <a:srgbClr val="014172"/>
+                </a:solidFill>
+                <a:latin typeface="Yu Gothic UI"/>
+              </a:rPr>
+              <a:t>31cm</a:t>
+            </a:r>
+          </a:p>
+        </p:txBody>
+      </p:sp>
+      <p:sp>
+        <p:nvSpPr>
+          <p:cNvPr id="29" name="Rounded Rectangle 28"/>
+          <p:cNvSpPr/>
+          <p:nvPr/>
+        </p:nvSpPr>
+        <p:spPr>
+          <a:xfrm>
+            <a:off x="4095750" y="3581400"/>
+            <a:ext cx="3604260" cy="266700"/>
+          </a:xfrm>
+          <a:prstGeom prst="roundRect">
+            <a:avLst>
+              <a:gd name="adj" fmla="val 30000"/>
+            </a:avLst>
+          </a:prstGeom>
+          <a:gradFill rotWithShape="1">
+            <a:gsLst>
+              <a:gs pos="0">
+                <a:srgbClr val="EEF4F9"/>
+              </a:gs>
+              <a:gs pos="100000">
+                <a:srgbClr val="DAE7F2"/>
+              </a:gs>
+            </a:gsLst>
+            <a:lin scaled="0" ang="16200000"/>
+          </a:gradFill>
+          <a:ln w="19050">
+            <a:solidFill>
+              <a:srgbClr val="014172"/>
+            </a:solidFill>
+          </a:ln>
+          <a:effectLst/>
+        </p:spPr>
+        <p:txBody>
+          <a:bodyPr rtlCol="0" anchor="ctr"/>
+          <a:lstStyle/>
+          <a:p>
+            <a:pPr algn="ctr"/>
+          </a:p>
+        </p:txBody>
+      </p:sp>
+      <p:sp>
+        <p:nvSpPr>
+          <p:cNvPr id="30" name="TextBox 29"/>
+          <p:cNvSpPr txBox="1"/>
+          <p:nvPr/>
+        </p:nvSpPr>
+        <p:spPr>
+          <a:xfrm>
+            <a:off x="704850" y="3524250"/>
+            <a:ext cx="3333750" cy="228600"/>
+          </a:xfrm>
+          <a:prstGeom prst="rect">
+            <a:avLst/>
+          </a:prstGeom>
+          <a:noFill/>
+        </p:spPr>
+        <p:txBody>
+          <a:bodyPr wrap="none" lIns="0" rIns="0" tIns="0" bIns="0" anchor="ctr">
+            <a:spAutoFit/>
+          </a:bodyPr>
+          <a:lstStyle/>
+          <a:p>
+            <a:pPr algn="l"/>
+            <a:r>
+              <a:rPr sz="1200" b="1">
+                <a:solidFill>
+                  <a:srgbClr val="2E2E33"/>
+                </a:solidFill>
+                <a:latin typeface="Yu Gothic UI"/>
+              </a:rPr>
+              <a:t>アルインコ PRT-FX</a:t>
+            </a:r>
+          </a:p>
+        </p:txBody>
+      </p:sp>
+      <p:sp>
+        <p:nvSpPr>
+          <p:cNvPr id="31" name="TextBox 30"/>
+          <p:cNvSpPr txBox="1"/>
+          <p:nvPr/>
+        </p:nvSpPr>
+        <p:spPr>
+          <a:xfrm>
+            <a:off x="704850" y="3752850"/>
+            <a:ext cx="3333750" cy="209550"/>
+          </a:xfrm>
+          <a:prstGeom prst="rect">
+            <a:avLst/>
+          </a:prstGeom>
+          <a:noFill/>
+        </p:spPr>
+        <p:txBody>
+          <a:bodyPr wrap="none" lIns="0" rIns="0" tIns="0" bIns="0" anchor="ctr">
+            <a:spAutoFit/>
+          </a:bodyPr>
+          <a:lstStyle/>
+          <a:p>
+            <a:pPr algn="l"/>
+            <a:r>
+              <a:rPr sz="1050" b="0">
+                <a:solidFill>
+                  <a:srgbClr val="6A717B"/>
+                </a:solidFill>
+                <a:latin typeface="Yu Gothic UI"/>
+              </a:rPr>
+              <a:t>伸縮脚付専用脚立</a:t>
+            </a:r>
+          </a:p>
+        </p:txBody>
+      </p:sp>
+      <p:sp>
+        <p:nvSpPr>
+          <p:cNvPr id="32" name="TextBox 31"/>
+          <p:cNvSpPr txBox="1"/>
+          <p:nvPr/>
+        </p:nvSpPr>
+        <p:spPr>
+          <a:xfrm>
+            <a:off x="7814310" y="3581400"/>
+            <a:ext cx="1047750" cy="266700"/>
+          </a:xfrm>
+          <a:prstGeom prst="rect">
+            <a:avLst/>
+          </a:prstGeom>
+          <a:noFill/>
+        </p:spPr>
+        <p:txBody>
+          <a:bodyPr wrap="none" lIns="0" rIns="0" tIns="0" bIns="0" anchor="ctr">
+            <a:spAutoFit/>
+          </a:bodyPr>
+          <a:lstStyle/>
+          <a:p>
+            <a:pPr algn="l"/>
+            <a:r>
+              <a:rPr sz="1350" b="1">
+                <a:solidFill>
+                  <a:srgbClr val="014172"/>
+                </a:solidFill>
+                <a:latin typeface="Yu Gothic UI"/>
+              </a:rPr>
+              <a:t>44cm</a:t>
+            </a:r>
+          </a:p>
+        </p:txBody>
+      </p:sp>
+      <p:sp>
+        <p:nvSpPr>
+          <p:cNvPr id="33" name="Rounded Rectangle 32"/>
+          <p:cNvSpPr/>
+          <p:nvPr/>
+        </p:nvSpPr>
+        <p:spPr>
+          <a:xfrm>
+            <a:off x="4095750" y="4171950"/>
+            <a:ext cx="3686175" cy="266700"/>
+          </a:xfrm>
+          <a:prstGeom prst="roundRect">
+            <a:avLst>
+              <a:gd name="adj" fmla="val 30000"/>
+            </a:avLst>
+          </a:prstGeom>
+          <a:gradFill rotWithShape="1">
+            <a:gsLst>
+              <a:gs pos="0">
+                <a:srgbClr val="EEF4F9"/>
+              </a:gs>
+              <a:gs pos="100000">
+                <a:srgbClr val="DAE7F2"/>
+              </a:gs>
+            </a:gsLst>
+            <a:lin scaled="0" ang="16200000"/>
+          </a:gradFill>
+          <a:ln w="19050">
+            <a:solidFill>
+              <a:srgbClr val="014172"/>
+            </a:solidFill>
+          </a:ln>
+          <a:effectLst/>
+        </p:spPr>
+        <p:txBody>
+          <a:bodyPr rtlCol="0" anchor="ctr"/>
+          <a:lstStyle/>
+          <a:p>
+            <a:pPr algn="ctr"/>
+          </a:p>
+        </p:txBody>
+      </p:sp>
+      <p:sp>
+        <p:nvSpPr>
+          <p:cNvPr id="34" name="TextBox 33"/>
+          <p:cNvSpPr txBox="1"/>
+          <p:nvPr/>
+        </p:nvSpPr>
+        <p:spPr>
+          <a:xfrm>
+            <a:off x="704850" y="4114800"/>
+            <a:ext cx="3333750" cy="228600"/>
+          </a:xfrm>
+          <a:prstGeom prst="rect">
+            <a:avLst/>
+          </a:prstGeom>
+          <a:noFill/>
+        </p:spPr>
+        <p:txBody>
+          <a:bodyPr wrap="none" lIns="0" rIns="0" tIns="0" bIns="0" anchor="ctr">
+            <a:spAutoFit/>
+          </a:bodyPr>
+          <a:lstStyle/>
+          <a:p>
+            <a:pPr algn="l"/>
+            <a:r>
+              <a:rPr sz="1200" b="1">
+                <a:solidFill>
+                  <a:srgbClr val="2E2E33"/>
+                </a:solidFill>
+                <a:latin typeface="Yu Gothic UI"/>
+              </a:rPr>
+              <a:t>ピカ かるノビ SCL</a:t>
+            </a:r>
+          </a:p>
+        </p:txBody>
+      </p:sp>
+      <p:sp>
+        <p:nvSpPr>
+          <p:cNvPr id="35" name="TextBox 34"/>
+          <p:cNvSpPr txBox="1"/>
+          <p:nvPr/>
+        </p:nvSpPr>
+        <p:spPr>
+          <a:xfrm>
+            <a:off x="704850" y="4343400"/>
+            <a:ext cx="3333750" cy="209550"/>
+          </a:xfrm>
+          <a:prstGeom prst="rect">
+            <a:avLst/>
+          </a:prstGeom>
+          <a:noFill/>
+        </p:spPr>
+        <p:txBody>
+          <a:bodyPr wrap="none" lIns="0" rIns="0" tIns="0" bIns="0" anchor="ctr">
+            <a:spAutoFit/>
+          </a:bodyPr>
+          <a:lstStyle/>
+          <a:p>
+            <a:pPr algn="l"/>
+            <a:r>
+              <a:rPr sz="1050" b="0">
+                <a:solidFill>
+                  <a:srgbClr val="6A717B"/>
+                </a:solidFill>
+                <a:latin typeface="Yu Gothic UI"/>
+              </a:rPr>
+              <a:t>階段用／前後の脚の長さが違う</a:t>
+            </a:r>
+          </a:p>
+        </p:txBody>
+      </p:sp>
+      <p:sp>
+        <p:nvSpPr>
+          <p:cNvPr id="36" name="TextBox 35"/>
+          <p:cNvSpPr txBox="1"/>
+          <p:nvPr/>
+        </p:nvSpPr>
+        <p:spPr>
+          <a:xfrm>
+            <a:off x="7896225" y="4171950"/>
+            <a:ext cx="1047750" cy="266700"/>
+          </a:xfrm>
+          <a:prstGeom prst="rect">
+            <a:avLst/>
+          </a:prstGeom>
+          <a:noFill/>
+        </p:spPr>
+        <p:txBody>
+          <a:bodyPr wrap="none" lIns="0" rIns="0" tIns="0" bIns="0" anchor="ctr">
+            <a:spAutoFit/>
+          </a:bodyPr>
+          <a:lstStyle/>
+          <a:p>
+            <a:pPr algn="l"/>
+            <a:r>
+              <a:rPr sz="1350" b="1">
+                <a:solidFill>
+                  <a:srgbClr val="014172"/>
+                </a:solidFill>
+                <a:latin typeface="Yu Gothic UI"/>
+              </a:rPr>
+              <a:t>45cm</a:t>
+            </a:r>
+          </a:p>
+        </p:txBody>
+      </p:sp>
+      <p:sp>
+        <p:nvSpPr>
+          <p:cNvPr id="37" name="Rounded Rectangle 36"/>
+          <p:cNvSpPr/>
+          <p:nvPr/>
+        </p:nvSpPr>
+        <p:spPr>
+          <a:xfrm>
+            <a:off x="4095750" y="4762500"/>
+            <a:ext cx="5652135" cy="266700"/>
+          </a:xfrm>
+          <a:prstGeom prst="roundRect">
+            <a:avLst>
+              <a:gd name="adj" fmla="val 30000"/>
+            </a:avLst>
+          </a:prstGeom>
+          <a:gradFill rotWithShape="1">
+            <a:gsLst>
+              <a:gs pos="0">
+                <a:srgbClr val="FDF2E4"/>
+              </a:gs>
+              <a:gs pos="100000">
+                <a:srgbClr val="FDF2E4"/>
+              </a:gs>
+            </a:gsLst>
+            <a:lin scaled="0" ang="16200000"/>
+          </a:gradFill>
+          <a:ln w="19050">
+            <a:solidFill>
+              <a:srgbClr val="A8410F"/>
+            </a:solidFill>
+          </a:ln>
+          <a:effectLst/>
+        </p:spPr>
+        <p:txBody>
+          <a:bodyPr rtlCol="0" anchor="ctr"/>
+          <a:lstStyle/>
+          <a:p>
+            <a:pPr algn="ctr"/>
+          </a:p>
+        </p:txBody>
+      </p:sp>
+      <p:sp>
+        <p:nvSpPr>
+          <p:cNvPr id="38" name="TextBox 37"/>
+          <p:cNvSpPr txBox="1"/>
+          <p:nvPr/>
+        </p:nvSpPr>
+        <p:spPr>
+          <a:xfrm>
+            <a:off x="704850" y="4705350"/>
+            <a:ext cx="3333750" cy="228600"/>
+          </a:xfrm>
+          <a:prstGeom prst="rect">
+            <a:avLst/>
+          </a:prstGeom>
+          <a:noFill/>
+        </p:spPr>
+        <p:txBody>
+          <a:bodyPr wrap="none" lIns="0" rIns="0" tIns="0" bIns="0" anchor="ctr">
+            <a:spAutoFit/>
+          </a:bodyPr>
+          <a:lstStyle/>
+          <a:p>
+            <a:pPr algn="l"/>
+            <a:r>
+              <a:rPr sz="1200" b="1">
+                <a:solidFill>
+                  <a:srgbClr val="2E2E33"/>
+                </a:solidFill>
+                <a:latin typeface="Yu Gothic UI"/>
+              </a:rPr>
+              <a:t>階段で必要な高低差</a:t>
+            </a:r>
+          </a:p>
+        </p:txBody>
+      </p:sp>
+      <p:sp>
+        <p:nvSpPr>
+          <p:cNvPr id="39" name="TextBox 38"/>
+          <p:cNvSpPr txBox="1"/>
+          <p:nvPr/>
+        </p:nvSpPr>
+        <p:spPr>
+          <a:xfrm>
+            <a:off x="704850" y="4933950"/>
+            <a:ext cx="3333750" cy="209550"/>
+          </a:xfrm>
+          <a:prstGeom prst="rect">
+            <a:avLst/>
+          </a:prstGeom>
+          <a:noFill/>
+        </p:spPr>
+        <p:txBody>
+          <a:bodyPr wrap="none" lIns="0" rIns="0" tIns="0" bIns="0" anchor="ctr">
+            <a:spAutoFit/>
+          </a:bodyPr>
+          <a:lstStyle/>
+          <a:p>
+            <a:pPr algn="l"/>
+            <a:r>
+              <a:rPr sz="1050" b="0">
+                <a:solidFill>
+                  <a:srgbClr val="6A717B"/>
+                </a:solidFill>
+                <a:latin typeface="Yu Gothic UI"/>
+              </a:rPr>
+              <a:t>踏面15cm・蹴上げ23cm・3段ぶん</a:t>
+            </a:r>
+          </a:p>
+        </p:txBody>
+      </p:sp>
+      <p:sp>
+        <p:nvSpPr>
+          <p:cNvPr id="40" name="TextBox 39"/>
+          <p:cNvSpPr txBox="1"/>
+          <p:nvPr/>
+        </p:nvSpPr>
+        <p:spPr>
+          <a:xfrm>
+            <a:off x="9862185" y="4762500"/>
+            <a:ext cx="1047750" cy="266700"/>
+          </a:xfrm>
+          <a:prstGeom prst="rect">
+            <a:avLst/>
+          </a:prstGeom>
+          <a:noFill/>
+        </p:spPr>
+        <p:txBody>
+          <a:bodyPr wrap="none" lIns="0" rIns="0" tIns="0" bIns="0" anchor="ctr">
+            <a:spAutoFit/>
+          </a:bodyPr>
+          <a:lstStyle/>
+          <a:p>
+            <a:pPr algn="l"/>
+            <a:r>
+              <a:rPr sz="1350" b="1">
+                <a:solidFill>
+                  <a:srgbClr val="A8410F"/>
+                </a:solidFill>
+                <a:latin typeface="Yu Gothic UI"/>
+              </a:rPr>
+              <a:t>69cm</a:t>
+            </a:r>
+          </a:p>
+        </p:txBody>
+      </p:sp>
+      <p:sp>
+        <p:nvSpPr>
+          <p:cNvPr id="41" name="Rectangle 40"/>
+          <p:cNvSpPr/>
+          <p:nvPr/>
+        </p:nvSpPr>
+        <p:spPr>
+          <a:xfrm>
+            <a:off x="609600" y="5295900"/>
+            <a:ext cx="10210800" cy="9525"/>
+          </a:xfrm>
+          <a:prstGeom prst="rect">
+            <a:avLst/>
+          </a:prstGeom>
+          <a:solidFill>
+            <a:srgbClr val="E2E7EC"/>
+          </a:solidFill>
+          <a:ln>
+            <a:noFill/>
+          </a:ln>
+          <a:effectLst/>
+        </p:spPr>
+        <p:txBody>
+          <a:bodyPr rtlCol="0" anchor="ctr"/>
+          <a:lstStyle/>
+          <a:p>
+            <a:pPr algn="ctr"/>
+          </a:p>
+        </p:txBody>
+      </p:sp>
+      <p:sp>
+        <p:nvSpPr>
+          <p:cNvPr id="42" name="TextBox 41"/>
+          <p:cNvSpPr txBox="1"/>
+          <p:nvPr/>
+        </p:nvSpPr>
+        <p:spPr>
+          <a:xfrm>
+            <a:off x="609600" y="5429250"/>
+            <a:ext cx="7239000" cy="247650"/>
+          </a:xfrm>
+          <a:prstGeom prst="rect">
+            <a:avLst/>
+          </a:prstGeom>
+          <a:noFill/>
+        </p:spPr>
+        <p:txBody>
+          <a:bodyPr wrap="none" lIns="0" rIns="0" tIns="0" bIns="0" anchor="ctr">
+            <a:spAutoFit/>
+          </a:bodyPr>
+          <a:lstStyle/>
+          <a:p>
+            <a:pPr algn="l"/>
+            <a:r>
+              <a:rPr sz="1425" b="1">
+                <a:solidFill>
+                  <a:srgbClr val="2E2E33"/>
+                </a:solidFill>
+                <a:latin typeface="Yu Gothic UI"/>
+              </a:rPr>
+              <a:t>前脚と後脚は3段離れます。1段で済ませるには踏面が28cm近く必要でした。</a:t>
+            </a:r>
+          </a:p>
+        </p:txBody>
+      </p:sp>
+      <p:sp>
+        <p:nvSpPr>
+          <p:cNvPr id="43" name="TextBox 42"/>
+          <p:cNvSpPr txBox="1"/>
+          <p:nvPr/>
+        </p:nvSpPr>
+        <p:spPr>
+          <a:xfrm>
+            <a:off x="609600" y="5676900"/>
+            <a:ext cx="7620000" cy="209550"/>
+          </a:xfrm>
+          <a:prstGeom prst="rect">
+            <a:avLst/>
+          </a:prstGeom>
+          <a:noFill/>
+        </p:spPr>
+        <p:txBody>
+          <a:bodyPr wrap="none" lIns="0" rIns="0" tIns="0" bIns="0" anchor="ctr">
+            <a:spAutoFit/>
+          </a:bodyPr>
+          <a:lstStyle/>
+          <a:p>
+            <a:pPr algn="l"/>
+            <a:r>
+              <a:rPr sz="1050" b="0">
+                <a:solidFill>
+                  <a:srgbClr val="6A717B"/>
+                </a:solidFill>
+                <a:latin typeface="Yu Gothic UI"/>
+              </a:rPr>
+              <a:t>メーカー公表値からの計算です（実測ではありません）</a:t>
+            </a:r>
+          </a:p>
+        </p:txBody>
+      </p:sp>
+      <p:sp>
+        <p:nvSpPr>
+          <p:cNvPr id="44" name="TextBox 43"/>
+          <p:cNvSpPr txBox="1"/>
+          <p:nvPr/>
+        </p:nvSpPr>
+        <p:spPr>
+          <a:xfrm>
+            <a:off x="7962900" y="5676900"/>
+            <a:ext cx="2857500" cy="209550"/>
+          </a:xfrm>
+          <a:prstGeom prst="rect">
+            <a:avLst/>
+          </a:prstGeom>
+          <a:noFill/>
+        </p:spPr>
+        <p:txBody>
+          <a:bodyPr wrap="none" lIns="0" rIns="0" tIns="0" bIns="0" anchor="ctr">
+            <a:spAutoFit/>
+          </a:bodyPr>
+          <a:lstStyle/>
+          <a:p>
+            <a:pPr algn="r"/>
+            <a:r>
+              <a:rPr sz="1050" b="0">
+                <a:solidFill>
+                  <a:srgbClr val="6A717B"/>
+                </a:solidFill>
+                <a:latin typeface="Yu Gothic UI"/>
+              </a:rPr>
+              <a:t>寸法で選ぶ　sunpou.nexeed-lab.com</a:t>
+            </a:r>
+          </a:p>
+        </p:txBody>
+      </p:sp>
+    </p:spTree>
+  </p:cSld>
+  <p:clrMapOvr>
+    <a:masterClrMapping/>
+  </p:clrMapOvr>
+</p:sld>
+</file>
+
+<file path=ppt/slides/slide18.xml><?xml version="1.0" encoding="utf-8"?>
+<p:sld xmlns:a="http://schemas.openxmlformats.org/drawingml/2006/main" xmlns:p="http://schemas.openxmlformats.org/presentationml/2006/main" xmlns:r="http://schemas.openxmlformats.org/officeDocument/2006/relationships">
+  <p:cSld>
+    <p:spTree>
+      <p:nvGrpSpPr>
+        <p:cNvPr id="1" name=""/>
+        <p:cNvGrpSpPr/>
+        <p:nvPr/>
+      </p:nvGrpSpPr>
+      <p:grpSpPr/>
+      <p:sp>
+        <p:nvSpPr>
+          <p:cNvPr id="2" name="Rectangle 1"/>
+          <p:cNvSpPr/>
+          <p:nvPr/>
+        </p:nvSpPr>
+        <p:spPr>
+          <a:xfrm>
+            <a:off x="0" y="0"/>
+            <a:ext cx="11430000" cy="6000750"/>
+          </a:xfrm>
+          <a:prstGeom prst="rect">
+            <a:avLst/>
+          </a:prstGeom>
+          <a:solidFill>
+            <a:srgbClr val="FCFCFC"/>
+          </a:solidFill>
+          <a:ln>
+            <a:noFill/>
+          </a:ln>
+          <a:effectLst/>
+        </p:spPr>
+        <p:txBody>
+          <a:bodyPr rtlCol="0" anchor="ctr"/>
+          <a:lstStyle/>
+          <a:p>
+            <a:pPr algn="ctr"/>
+          </a:p>
+        </p:txBody>
+      </p:sp>
+      <p:sp>
+        <p:nvSpPr>
+          <p:cNvPr id="3" name="Rectangle 2"/>
+          <p:cNvSpPr/>
+          <p:nvPr/>
+        </p:nvSpPr>
+        <p:spPr>
+          <a:xfrm>
+            <a:off x="0" y="0"/>
+            <a:ext cx="114300" cy="6000750"/>
+          </a:xfrm>
+          <a:prstGeom prst="rect">
+            <a:avLst/>
+          </a:prstGeom>
+          <a:solidFill>
+            <a:srgbClr val="014172"/>
+          </a:solidFill>
+          <a:ln>
+            <a:noFill/>
+          </a:ln>
+          <a:effectLst/>
+        </p:spPr>
+        <p:txBody>
+          <a:bodyPr rtlCol="0" anchor="ctr"/>
+          <a:lstStyle/>
+          <a:p>
+            <a:pPr algn="ctr"/>
+          </a:p>
+        </p:txBody>
+      </p:sp>
+      <p:sp>
+        <p:nvSpPr>
+          <p:cNvPr id="4" name="Rectangle 3"/>
+          <p:cNvSpPr/>
+          <p:nvPr/>
+        </p:nvSpPr>
+        <p:spPr>
+          <a:xfrm>
+            <a:off x="0" y="0"/>
+            <a:ext cx="11430000" cy="1504950"/>
+          </a:xfrm>
+          <a:prstGeom prst="rect">
+            <a:avLst/>
+          </a:prstGeom>
+          <a:solidFill>
+            <a:srgbClr val="014172"/>
+          </a:solidFill>
+          <a:ln>
+            <a:noFill/>
+          </a:ln>
+          <a:effectLst/>
+        </p:spPr>
+        <p:txBody>
+          <a:bodyPr rtlCol="0" anchor="ctr"/>
+          <a:lstStyle/>
+          <a:p>
+            <a:pPr algn="ctr"/>
+          </a:p>
+        </p:txBody>
+      </p:sp>
+      <p:sp>
+        <p:nvSpPr>
+          <p:cNvPr id="5" name="TextBox 4"/>
+          <p:cNvSpPr txBox="1"/>
+          <p:nvPr/>
+        </p:nvSpPr>
+        <p:spPr>
+          <a:xfrm>
+            <a:off x="609600" y="361950"/>
+            <a:ext cx="7429500" cy="476250"/>
+          </a:xfrm>
+          <a:prstGeom prst="rect">
+            <a:avLst/>
+          </a:prstGeom>
+          <a:noFill/>
+        </p:spPr>
+        <p:txBody>
+          <a:bodyPr wrap="none" lIns="0" rIns="0" tIns="0" bIns="0" anchor="ctr">
+            <a:spAutoFit/>
+          </a:bodyPr>
+          <a:lstStyle/>
+          <a:p>
+            <a:pPr algn="l"/>
+            <a:r>
+              <a:rPr sz="3000" b="1">
+                <a:solidFill>
+                  <a:srgbClr val="FFFFFF"/>
+                </a:solidFill>
+                <a:latin typeface="Yu Gothic UI"/>
+              </a:rPr>
+              <a:t>「踏台」の天板は0.30mから1.61mまで</a:t>
+            </a:r>
+          </a:p>
+        </p:txBody>
+      </p:sp>
+      <p:sp>
+        <p:nvSpPr>
+          <p:cNvPr id="6" name="TextBox 5"/>
+          <p:cNvSpPr txBox="1"/>
+          <p:nvPr/>
+        </p:nvSpPr>
+        <p:spPr>
+          <a:xfrm>
+            <a:off x="609600" y="876300"/>
+            <a:ext cx="7429500" cy="247650"/>
+          </a:xfrm>
+          <a:prstGeom prst="rect">
+            <a:avLst/>
+          </a:prstGeom>
+          <a:noFill/>
+        </p:spPr>
+        <p:txBody>
+          <a:bodyPr wrap="none" lIns="0" rIns="0" tIns="0" bIns="0" anchor="ctr">
+            <a:spAutoFit/>
+          </a:bodyPr>
+          <a:lstStyle/>
+          <a:p>
+            <a:pPr algn="l"/>
+            <a:r>
+              <a:rPr sz="1425" b="0">
+                <a:solidFill>
+                  <a:srgbClr val="DAE7F2"/>
+                </a:solidFill>
+                <a:latin typeface="Yu Gothic UI"/>
+              </a:rPr>
+              <a:t>メーカーが呼び分けている天板高さの範囲</a:t>
+            </a:r>
+          </a:p>
+        </p:txBody>
+      </p:sp>
+      <p:sp>
+        <p:nvSpPr>
+          <p:cNvPr id="7" name="Rounded Rectangle 6"/>
+          <p:cNvSpPr/>
+          <p:nvPr/>
+        </p:nvSpPr>
+        <p:spPr>
+          <a:xfrm>
+            <a:off x="8305800" y="247650"/>
+            <a:ext cx="2514600" cy="1009650"/>
+          </a:xfrm>
+          <a:prstGeom prst="roundRect">
+            <a:avLst>
+              <a:gd name="adj" fmla="val 12000"/>
+            </a:avLst>
+          </a:prstGeom>
+          <a:solidFill>
+            <a:srgbClr val="FFFFFF"/>
+          </a:solidFill>
+          <a:ln>
+            <a:noFill/>
+          </a:ln>
+          <a:effectLst>
+            <a:outerShdw blurRad="254000" dist="63500" dir="5400000" rotWithShape="0">
+              <a:srgbClr val="0B2B45">
+                <a:alpha val="30000"/>
+              </a:srgbClr>
+            </a:outerShdw>
+          </a:effectLst>
+        </p:spPr>
+        <p:txBody>
+          <a:bodyPr rtlCol="0" anchor="ctr"/>
+          <a:lstStyle/>
+          <a:p>
+            <a:pPr algn="ctr"/>
+          </a:p>
+        </p:txBody>
+      </p:sp>
+      <p:sp>
+        <p:nvSpPr>
+          <p:cNvPr id="8" name="TextBox 7"/>
+          <p:cNvSpPr txBox="1"/>
+          <p:nvPr/>
+        </p:nvSpPr>
+        <p:spPr>
+          <a:xfrm>
+            <a:off x="8515350" y="400050"/>
+            <a:ext cx="2133600" cy="209550"/>
+          </a:xfrm>
+          <a:prstGeom prst="rect">
+            <a:avLst/>
+          </a:prstGeom>
+          <a:noFill/>
+        </p:spPr>
+        <p:txBody>
+          <a:bodyPr wrap="none" lIns="0" rIns="0" tIns="0" bIns="0" anchor="ctr">
+            <a:spAutoFit/>
+          </a:bodyPr>
+          <a:lstStyle/>
+          <a:p>
+            <a:pPr algn="l"/>
+            <a:r>
+              <a:rPr sz="1125" b="0">
+                <a:solidFill>
+                  <a:srgbClr val="6A717B"/>
+                </a:solidFill>
+                <a:latin typeface="Yu Gothic UI"/>
+              </a:rPr>
+              <a:t>踏台なのに最大</a:t>
+            </a:r>
+          </a:p>
+        </p:txBody>
+      </p:sp>
+      <p:sp>
+        <p:nvSpPr>
+          <p:cNvPr id="9" name="TextBox 8"/>
+          <p:cNvSpPr txBox="1"/>
+          <p:nvPr/>
+        </p:nvSpPr>
+        <p:spPr>
+          <a:xfrm>
+            <a:off x="8515350" y="647700"/>
+            <a:ext cx="2133600" cy="533400"/>
+          </a:xfrm>
+          <a:prstGeom prst="rect">
+            <a:avLst/>
+          </a:prstGeom>
+          <a:noFill/>
+        </p:spPr>
+        <p:txBody>
+          <a:bodyPr wrap="none" lIns="0" rIns="0" tIns="0" bIns="0" anchor="ctr">
+            <a:spAutoFit/>
+          </a:bodyPr>
+          <a:lstStyle/>
+          <a:p>
+            <a:pPr algn="l"/>
+            <a:r>
+              <a:rPr sz="3900" b="1">
+                <a:solidFill>
+                  <a:srgbClr val="014172"/>
+                </a:solidFill>
+                <a:latin typeface="Yu Gothic UI"/>
+              </a:rPr>
+              <a:t>1.61</a:t>
+            </a:r>
+            <a:r>
+              <a:rPr sz="1950" b="1">
+                <a:solidFill>
+                  <a:srgbClr val="014172"/>
+                </a:solidFill>
+                <a:latin typeface="Yu Gothic UI"/>
+              </a:rPr>
+              <a:t>m</a:t>
+            </a:r>
+          </a:p>
+        </p:txBody>
+      </p:sp>
+      <p:sp>
+        <p:nvSpPr>
+          <p:cNvPr id="10" name="Rectangle 9"/>
+          <p:cNvSpPr/>
+          <p:nvPr/>
+        </p:nvSpPr>
+        <p:spPr>
+          <a:xfrm>
+            <a:off x="495300" y="1905000"/>
+            <a:ext cx="10439400" cy="723900"/>
+          </a:xfrm>
+          <a:prstGeom prst="rect">
+            <a:avLst/>
+          </a:prstGeom>
+          <a:solidFill>
+            <a:srgbClr val="F2F5F8"/>
+          </a:solidFill>
+          <a:ln>
+            <a:noFill/>
+          </a:ln>
+          <a:effectLst/>
+        </p:spPr>
+        <p:txBody>
+          <a:bodyPr rtlCol="0" anchor="ctr"/>
+          <a:lstStyle/>
+          <a:p>
+            <a:pPr algn="ctr"/>
+          </a:p>
+        </p:txBody>
+      </p:sp>
+      <p:sp>
+        <p:nvSpPr>
+          <p:cNvPr id="11" name="Rectangle 10"/>
+          <p:cNvSpPr/>
+          <p:nvPr/>
+        </p:nvSpPr>
+        <p:spPr>
+          <a:xfrm>
+            <a:off x="495300" y="2705100"/>
+            <a:ext cx="10439400" cy="723900"/>
+          </a:xfrm>
+          <a:prstGeom prst="rect">
+            <a:avLst/>
+          </a:prstGeom>
+          <a:solidFill>
+            <a:srgbClr val="E6EEF6"/>
+          </a:solidFill>
+          <a:ln>
+            <a:noFill/>
+          </a:ln>
+          <a:effectLst/>
+        </p:spPr>
+        <p:txBody>
+          <a:bodyPr rtlCol="0" anchor="ctr"/>
+          <a:lstStyle/>
+          <a:p>
+            <a:pPr algn="ctr"/>
+          </a:p>
+        </p:txBody>
+      </p:sp>
+      <p:sp>
+        <p:nvSpPr>
+          <p:cNvPr id="12" name="Rectangle 11"/>
+          <p:cNvSpPr/>
+          <p:nvPr/>
+        </p:nvSpPr>
+        <p:spPr>
+          <a:xfrm>
+            <a:off x="495300" y="2705100"/>
+            <a:ext cx="47625" cy="723900"/>
+          </a:xfrm>
+          <a:prstGeom prst="rect">
+            <a:avLst/>
+          </a:prstGeom>
+          <a:solidFill>
+            <a:srgbClr val="014172"/>
+          </a:solidFill>
+          <a:ln>
+            <a:noFill/>
+          </a:ln>
+          <a:effectLst/>
+        </p:spPr>
+        <p:txBody>
+          <a:bodyPr rtlCol="0" anchor="ctr"/>
+          <a:lstStyle/>
+          <a:p>
+            <a:pPr algn="ctr"/>
+          </a:p>
+        </p:txBody>
+      </p:sp>
+      <p:sp>
+        <p:nvSpPr>
+          <p:cNvPr id="13" name="Rectangle 12"/>
+          <p:cNvSpPr/>
+          <p:nvPr/>
+        </p:nvSpPr>
+        <p:spPr>
+          <a:xfrm>
+            <a:off x="495300" y="3505200"/>
+            <a:ext cx="10439400" cy="723900"/>
+          </a:xfrm>
+          <a:prstGeom prst="rect">
+            <a:avLst/>
+          </a:prstGeom>
+          <a:solidFill>
+            <a:srgbClr val="F2F5F8"/>
+          </a:solidFill>
+          <a:ln>
+            <a:noFill/>
+          </a:ln>
+          <a:effectLst/>
+        </p:spPr>
+        <p:txBody>
+          <a:bodyPr rtlCol="0" anchor="ctr"/>
+          <a:lstStyle/>
+          <a:p>
+            <a:pPr algn="ctr"/>
+          </a:p>
+        </p:txBody>
+      </p:sp>
+      <p:sp>
+        <p:nvSpPr>
+          <p:cNvPr id="14" name="Rounded Rectangle 13"/>
+          <p:cNvSpPr/>
+          <p:nvPr/>
+        </p:nvSpPr>
+        <p:spPr>
+          <a:xfrm>
+            <a:off x="4362450" y="2095500"/>
+            <a:ext cx="1213485" cy="323850"/>
+          </a:xfrm>
+          <a:prstGeom prst="roundRect">
+            <a:avLst>
+              <a:gd name="adj" fmla="val 30000"/>
+            </a:avLst>
+          </a:prstGeom>
+          <a:gradFill rotWithShape="1">
+            <a:gsLst>
+              <a:gs pos="0">
+                <a:srgbClr val="EEF4F9"/>
+              </a:gs>
+              <a:gs pos="100000">
+                <a:srgbClr val="DAE7F2"/>
+              </a:gs>
+            </a:gsLst>
+            <a:lin scaled="0" ang="16200000"/>
+          </a:gradFill>
+          <a:ln w="19050">
+            <a:solidFill>
+              <a:srgbClr val="014172"/>
+            </a:solidFill>
+          </a:ln>
+          <a:effectLst/>
+        </p:spPr>
+        <p:txBody>
+          <a:bodyPr rtlCol="0" anchor="ctr"/>
+          <a:lstStyle/>
+          <a:p>
+            <a:pPr algn="ctr"/>
+          </a:p>
+        </p:txBody>
+      </p:sp>
+      <p:sp>
+        <p:nvSpPr>
+          <p:cNvPr id="15" name="TextBox 14"/>
+          <p:cNvSpPr txBox="1"/>
+          <p:nvPr/>
+        </p:nvSpPr>
+        <p:spPr>
+          <a:xfrm>
+            <a:off x="704850" y="2038350"/>
+            <a:ext cx="2857500" cy="228600"/>
+          </a:xfrm>
+          <a:prstGeom prst="rect">
+            <a:avLst/>
+          </a:prstGeom>
+          <a:noFill/>
+        </p:spPr>
+        <p:txBody>
+          <a:bodyPr wrap="none" lIns="0" rIns="0" tIns="0" bIns="0" anchor="ctr">
+            <a:spAutoFit/>
+          </a:bodyPr>
+          <a:lstStyle/>
+          <a:p>
+            <a:pPr algn="l"/>
+            <a:r>
+              <a:rPr sz="1275" b="1">
+                <a:solidFill>
+                  <a:srgbClr val="2E2E33"/>
+                </a:solidFill>
+                <a:latin typeface="Yu Gothic UI"/>
+              </a:rPr>
+              <a:t>踏台（上わくなし）</a:t>
+            </a:r>
+          </a:p>
+        </p:txBody>
+      </p:sp>
+      <p:sp>
+        <p:nvSpPr>
+          <p:cNvPr id="16" name="TextBox 15"/>
+          <p:cNvSpPr txBox="1"/>
+          <p:nvPr/>
+        </p:nvSpPr>
+        <p:spPr>
+          <a:xfrm>
+            <a:off x="704850" y="2286000"/>
+            <a:ext cx="2857500" cy="209550"/>
+          </a:xfrm>
+          <a:prstGeom prst="rect">
+            <a:avLst/>
+          </a:prstGeom>
+          <a:noFill/>
+        </p:spPr>
+        <p:txBody>
+          <a:bodyPr wrap="none" lIns="0" rIns="0" tIns="0" bIns="0" anchor="ctr">
+            <a:spAutoFit/>
+          </a:bodyPr>
+          <a:lstStyle/>
+          <a:p>
+            <a:pPr algn="l"/>
+            <a:r>
+              <a:rPr sz="1125" b="0">
+                <a:solidFill>
+                  <a:srgbClr val="6A717B"/>
+                </a:solidFill>
+                <a:latin typeface="Yu Gothic UI"/>
+              </a:rPr>
+              <a:t>0.30 〜 0.79m</a:t>
+            </a:r>
+          </a:p>
+        </p:txBody>
+      </p:sp>
+      <p:sp>
+        <p:nvSpPr>
+          <p:cNvPr id="17" name="Rounded Rectangle 16"/>
+          <p:cNvSpPr/>
+          <p:nvPr/>
+        </p:nvSpPr>
+        <p:spPr>
+          <a:xfrm>
+            <a:off x="4882515" y="2895600"/>
+            <a:ext cx="2724150" cy="323850"/>
+          </a:xfrm>
+          <a:prstGeom prst="roundRect">
+            <a:avLst>
+              <a:gd name="adj" fmla="val 30000"/>
+            </a:avLst>
+          </a:prstGeom>
+          <a:gradFill rotWithShape="1">
+            <a:gsLst>
+              <a:gs pos="0">
+                <a:srgbClr val="EEF4F9"/>
+              </a:gs>
+              <a:gs pos="100000">
+                <a:srgbClr val="DAE7F2"/>
+              </a:gs>
+            </a:gsLst>
+            <a:lin scaled="0" ang="16200000"/>
+          </a:gradFill>
+          <a:ln w="19050">
+            <a:solidFill>
+              <a:srgbClr val="014172"/>
+            </a:solidFill>
+          </a:ln>
+          <a:effectLst/>
+        </p:spPr>
+        <p:txBody>
+          <a:bodyPr rtlCol="0" anchor="ctr"/>
+          <a:lstStyle/>
+          <a:p>
+            <a:pPr algn="ctr"/>
+          </a:p>
+        </p:txBody>
+      </p:sp>
+      <p:sp>
+        <p:nvSpPr>
+          <p:cNvPr id="18" name="TextBox 17"/>
+          <p:cNvSpPr txBox="1"/>
+          <p:nvPr/>
+        </p:nvSpPr>
+        <p:spPr>
+          <a:xfrm>
+            <a:off x="704850" y="2838450"/>
+            <a:ext cx="2857500" cy="228600"/>
+          </a:xfrm>
+          <a:prstGeom prst="rect">
+            <a:avLst/>
+          </a:prstGeom>
+          <a:noFill/>
+        </p:spPr>
+        <p:txBody>
+          <a:bodyPr wrap="none" lIns="0" rIns="0" tIns="0" bIns="0" anchor="ctr">
+            <a:spAutoFit/>
+          </a:bodyPr>
+          <a:lstStyle/>
+          <a:p>
+            <a:pPr algn="l"/>
+            <a:r>
+              <a:rPr sz="1275" b="1">
+                <a:solidFill>
+                  <a:srgbClr val="2E2E33"/>
+                </a:solidFill>
+                <a:latin typeface="Yu Gothic UI"/>
+              </a:rPr>
+              <a:t>踏台（上わく付き）</a:t>
+            </a:r>
+          </a:p>
+        </p:txBody>
+      </p:sp>
+      <p:sp>
+        <p:nvSpPr>
+          <p:cNvPr id="19" name="TextBox 18"/>
+          <p:cNvSpPr txBox="1"/>
+          <p:nvPr/>
+        </p:nvSpPr>
+        <p:spPr>
+          <a:xfrm>
+            <a:off x="704850" y="3086100"/>
+            <a:ext cx="2857500" cy="209550"/>
+          </a:xfrm>
+          <a:prstGeom prst="rect">
+            <a:avLst/>
+          </a:prstGeom>
+          <a:noFill/>
+        </p:spPr>
+        <p:txBody>
+          <a:bodyPr wrap="none" lIns="0" rIns="0" tIns="0" bIns="0" anchor="ctr">
+            <a:spAutoFit/>
+          </a:bodyPr>
+          <a:lstStyle/>
+          <a:p>
+            <a:pPr algn="l"/>
+            <a:r>
+              <a:rPr sz="1125" b="0">
+                <a:solidFill>
+                  <a:srgbClr val="6A717B"/>
+                </a:solidFill>
+                <a:latin typeface="Yu Gothic UI"/>
+              </a:rPr>
+              <a:t>0.51 〜 1.61m</a:t>
+            </a:r>
+          </a:p>
+        </p:txBody>
+      </p:sp>
+      <p:sp>
+        <p:nvSpPr>
+          <p:cNvPr id="20" name="Rounded Rectangle 19"/>
+          <p:cNvSpPr/>
+          <p:nvPr/>
+        </p:nvSpPr>
+        <p:spPr>
+          <a:xfrm>
+            <a:off x="4882515" y="3695700"/>
+            <a:ext cx="5423535" cy="323850"/>
+          </a:xfrm>
+          <a:prstGeom prst="roundRect">
+            <a:avLst>
+              <a:gd name="adj" fmla="val 30000"/>
+            </a:avLst>
+          </a:prstGeom>
+          <a:gradFill rotWithShape="1">
+            <a:gsLst>
+              <a:gs pos="0">
+                <a:srgbClr val="EEF4F9"/>
+              </a:gs>
+              <a:gs pos="100000">
+                <a:srgbClr val="DAE7F2"/>
+              </a:gs>
+            </a:gsLst>
+            <a:lin scaled="0" ang="16200000"/>
+          </a:gradFill>
+          <a:ln w="19050">
+            <a:solidFill>
+              <a:srgbClr val="014172"/>
+            </a:solidFill>
+          </a:ln>
+          <a:effectLst/>
+        </p:spPr>
+        <p:txBody>
+          <a:bodyPr rtlCol="0" anchor="ctr"/>
+          <a:lstStyle/>
+          <a:p>
+            <a:pPr algn="ctr"/>
+          </a:p>
+        </p:txBody>
+      </p:sp>
+      <p:sp>
+        <p:nvSpPr>
+          <p:cNvPr id="21" name="TextBox 20"/>
+          <p:cNvSpPr txBox="1"/>
+          <p:nvPr/>
+        </p:nvSpPr>
+        <p:spPr>
+          <a:xfrm>
+            <a:off x="704850" y="3638550"/>
+            <a:ext cx="2857500" cy="228600"/>
+          </a:xfrm>
+          <a:prstGeom prst="rect">
+            <a:avLst/>
+          </a:prstGeom>
+          <a:noFill/>
+        </p:spPr>
+        <p:txBody>
+          <a:bodyPr wrap="none" lIns="0" rIns="0" tIns="0" bIns="0" anchor="ctr">
+            <a:spAutoFit/>
+          </a:bodyPr>
+          <a:lstStyle/>
+          <a:p>
+            <a:pPr algn="l"/>
+            <a:r>
+              <a:rPr sz="1275" b="1">
+                <a:solidFill>
+                  <a:srgbClr val="2E2E33"/>
+                </a:solidFill>
+                <a:latin typeface="Yu Gothic UI"/>
+              </a:rPr>
+              <a:t>脚立</a:t>
+            </a:r>
+          </a:p>
+        </p:txBody>
+      </p:sp>
+      <p:sp>
+        <p:nvSpPr>
+          <p:cNvPr id="22" name="TextBox 21"/>
+          <p:cNvSpPr txBox="1"/>
+          <p:nvPr/>
+        </p:nvSpPr>
+        <p:spPr>
+          <a:xfrm>
+            <a:off x="704850" y="3886200"/>
+            <a:ext cx="2857500" cy="209550"/>
+          </a:xfrm>
+          <a:prstGeom prst="rect">
+            <a:avLst/>
+          </a:prstGeom>
+          <a:noFill/>
+        </p:spPr>
+        <p:txBody>
+          <a:bodyPr wrap="none" lIns="0" rIns="0" tIns="0" bIns="0" anchor="ctr">
+            <a:spAutoFit/>
+          </a:bodyPr>
+          <a:lstStyle/>
+          <a:p>
+            <a:pPr algn="l"/>
+            <a:r>
+              <a:rPr sz="1125" b="0">
+                <a:solidFill>
+                  <a:srgbClr val="6A717B"/>
+                </a:solidFill>
+                <a:latin typeface="Yu Gothic UI"/>
+              </a:rPr>
+              <a:t>0.51 〜 2.70m</a:t>
+            </a:r>
+          </a:p>
+        </p:txBody>
+      </p:sp>
+      <p:sp>
+        <p:nvSpPr>
+          <p:cNvPr id="23" name="Rectangle 22"/>
+          <p:cNvSpPr/>
+          <p:nvPr/>
+        </p:nvSpPr>
+        <p:spPr>
+          <a:xfrm>
+            <a:off x="5600700" y="1809750"/>
+            <a:ext cx="9525" cy="2305050"/>
+          </a:xfrm>
+          <a:prstGeom prst="rect">
+            <a:avLst/>
+          </a:prstGeom>
+          <a:noFill/>
+          <a:ln w="19050">
+            <a:solidFill>
+              <a:srgbClr val="A8410F"/>
+            </a:solidFill>
+            <a:prstDash val="dash"/>
+          </a:ln>
+          <a:effectLst/>
+        </p:spPr>
+        <p:txBody>
+          <a:bodyPr rtlCol="0" anchor="ctr"/>
+          <a:lstStyle/>
+          <a:p>
+            <a:pPr algn="ctr"/>
+          </a:p>
+        </p:txBody>
+      </p:sp>
+      <p:sp>
+        <p:nvSpPr>
+          <p:cNvPr id="24" name="TextBox 23"/>
+          <p:cNvSpPr txBox="1"/>
+          <p:nvPr/>
+        </p:nvSpPr>
+        <p:spPr>
+          <a:xfrm>
+            <a:off x="4743450" y="1562100"/>
+            <a:ext cx="2857500" cy="228600"/>
+          </a:xfrm>
+          <a:prstGeom prst="rect">
+            <a:avLst/>
+          </a:prstGeom>
+          <a:noFill/>
+        </p:spPr>
+        <p:txBody>
+          <a:bodyPr wrap="none" lIns="0" rIns="0" tIns="0" bIns="0" anchor="ctr">
+            <a:spAutoFit/>
+          </a:bodyPr>
+          <a:lstStyle/>
+          <a:p>
+            <a:pPr algn="l"/>
+            <a:r>
+              <a:rPr sz="1200" b="1">
+                <a:solidFill>
+                  <a:srgbClr val="A8410F"/>
+                </a:solidFill>
+                <a:latin typeface="Yu Gothic UI"/>
+              </a:rPr>
+              <a:t>天板高さ 80cm</a:t>
+            </a:r>
+          </a:p>
+        </p:txBody>
+      </p:sp>
+      <p:sp>
+        <p:nvSpPr>
+          <p:cNvPr id="25" name="TextBox 24"/>
+          <p:cNvSpPr txBox="1"/>
+          <p:nvPr/>
+        </p:nvSpPr>
+        <p:spPr>
+          <a:xfrm>
+            <a:off x="3429000" y="4267200"/>
+            <a:ext cx="571500" cy="209550"/>
+          </a:xfrm>
+          <a:prstGeom prst="rect">
+            <a:avLst/>
+          </a:prstGeom>
+          <a:noFill/>
+        </p:spPr>
+        <p:txBody>
+          <a:bodyPr wrap="none" lIns="0" rIns="0" tIns="0" bIns="0" anchor="ctr">
+            <a:spAutoFit/>
+          </a:bodyPr>
+          <a:lstStyle/>
+          <a:p>
+            <a:pPr algn="l"/>
+            <a:r>
+              <a:rPr sz="1050" b="0">
+                <a:solidFill>
+                  <a:srgbClr val="6A717B"/>
+                </a:solidFill>
+                <a:latin typeface="Yu Gothic UI"/>
+              </a:rPr>
+              <a:t>0</a:t>
+            </a:r>
+          </a:p>
+        </p:txBody>
+      </p:sp>
+      <p:sp>
+        <p:nvSpPr>
+          <p:cNvPr id="26" name="TextBox 25"/>
+          <p:cNvSpPr txBox="1"/>
+          <p:nvPr/>
+        </p:nvSpPr>
+        <p:spPr>
+          <a:xfrm>
+            <a:off x="5905500" y="4267200"/>
+            <a:ext cx="571500" cy="209550"/>
+          </a:xfrm>
+          <a:prstGeom prst="rect">
+            <a:avLst/>
+          </a:prstGeom>
+          <a:noFill/>
+        </p:spPr>
+        <p:txBody>
+          <a:bodyPr wrap="none" lIns="0" rIns="0" tIns="0" bIns="0" anchor="ctr">
+            <a:spAutoFit/>
+          </a:bodyPr>
+          <a:lstStyle/>
+          <a:p>
+            <a:pPr algn="l"/>
+            <a:r>
+              <a:rPr sz="1050" b="0">
+                <a:solidFill>
+                  <a:srgbClr val="6A717B"/>
+                </a:solidFill>
+                <a:latin typeface="Yu Gothic UI"/>
+              </a:rPr>
+              <a:t>1m</a:t>
+            </a:r>
+          </a:p>
+        </p:txBody>
+      </p:sp>
+      <p:sp>
+        <p:nvSpPr>
+          <p:cNvPr id="27" name="TextBox 26"/>
+          <p:cNvSpPr txBox="1"/>
+          <p:nvPr/>
+        </p:nvSpPr>
+        <p:spPr>
+          <a:xfrm>
+            <a:off x="8382000" y="4267200"/>
+            <a:ext cx="571500" cy="209550"/>
+          </a:xfrm>
+          <a:prstGeom prst="rect">
+            <a:avLst/>
+          </a:prstGeom>
+          <a:noFill/>
+        </p:spPr>
+        <p:txBody>
+          <a:bodyPr wrap="none" lIns="0" rIns="0" tIns="0" bIns="0" anchor="ctr">
+            <a:spAutoFit/>
+          </a:bodyPr>
+          <a:lstStyle/>
+          <a:p>
+            <a:pPr algn="l"/>
+            <a:r>
+              <a:rPr sz="1050" b="0">
+                <a:solidFill>
+                  <a:srgbClr val="6A717B"/>
+                </a:solidFill>
+                <a:latin typeface="Yu Gothic UI"/>
+              </a:rPr>
+              <a:t>2m</a:t>
+            </a:r>
+          </a:p>
+        </p:txBody>
+      </p:sp>
+      <p:sp>
+        <p:nvSpPr>
+          <p:cNvPr id="28" name="Rectangle 27"/>
+          <p:cNvSpPr/>
+          <p:nvPr/>
+        </p:nvSpPr>
+        <p:spPr>
+          <a:xfrm>
+            <a:off x="609600" y="5295900"/>
+            <a:ext cx="10210800" cy="9525"/>
+          </a:xfrm>
+          <a:prstGeom prst="rect">
+            <a:avLst/>
+          </a:prstGeom>
+          <a:solidFill>
+            <a:srgbClr val="E2E7EC"/>
+          </a:solidFill>
+          <a:ln>
+            <a:noFill/>
+          </a:ln>
+          <a:effectLst/>
+        </p:spPr>
+        <p:txBody>
+          <a:bodyPr rtlCol="0" anchor="ctr"/>
+          <a:lstStyle/>
+          <a:p>
+            <a:pPr algn="ctr"/>
+          </a:p>
+        </p:txBody>
+      </p:sp>
+      <p:sp>
+        <p:nvSpPr>
+          <p:cNvPr id="29" name="TextBox 28"/>
+          <p:cNvSpPr txBox="1"/>
+          <p:nvPr/>
+        </p:nvSpPr>
+        <p:spPr>
+          <a:xfrm>
+            <a:off x="609600" y="5429250"/>
+            <a:ext cx="7239000" cy="247650"/>
+          </a:xfrm>
+          <a:prstGeom prst="rect">
+            <a:avLst/>
+          </a:prstGeom>
+          <a:noFill/>
+        </p:spPr>
+        <p:txBody>
+          <a:bodyPr wrap="none" lIns="0" rIns="0" tIns="0" bIns="0" anchor="ctr">
+            <a:spAutoFit/>
+          </a:bodyPr>
+          <a:lstStyle/>
+          <a:p>
+            <a:pPr algn="l"/>
+            <a:r>
+              <a:rPr sz="1425" b="1">
+                <a:solidFill>
+                  <a:srgbClr val="2E2E33"/>
+                </a:solidFill>
+                <a:latin typeface="Yu Gothic UI"/>
+              </a:rPr>
+              <a:t>上わくが付くと、80cmを超えても「踏台」と呼ばれていました。</a:t>
+            </a:r>
+          </a:p>
+        </p:txBody>
+      </p:sp>
+      <p:sp>
+        <p:nvSpPr>
+          <p:cNvPr id="30" name="TextBox 29"/>
+          <p:cNvSpPr txBox="1"/>
+          <p:nvPr/>
+        </p:nvSpPr>
+        <p:spPr>
+          <a:xfrm>
+            <a:off x="609600" y="5676900"/>
+            <a:ext cx="7620000" cy="209550"/>
+          </a:xfrm>
+          <a:prstGeom prst="rect">
+            <a:avLst/>
+          </a:prstGeom>
+          <a:noFill/>
+        </p:spPr>
+        <p:txBody>
+          <a:bodyPr wrap="none" lIns="0" rIns="0" tIns="0" bIns="0" anchor="ctr">
+            <a:spAutoFit/>
+          </a:bodyPr>
+          <a:lstStyle/>
+          <a:p>
+            <a:pPr algn="l"/>
+            <a:r>
+              <a:rPr sz="1050" b="0">
+                <a:solidFill>
+                  <a:srgbClr val="6A717B"/>
+                </a:solidFill>
+                <a:latin typeface="Yu Gothic UI"/>
+              </a:rPr>
+              <a:t>メーカー公表値からの計算です（実測ではありません）</a:t>
+            </a:r>
+          </a:p>
+        </p:txBody>
+      </p:sp>
+      <p:sp>
+        <p:nvSpPr>
+          <p:cNvPr id="31" name="TextBox 30"/>
+          <p:cNvSpPr txBox="1"/>
+          <p:nvPr/>
+        </p:nvSpPr>
+        <p:spPr>
+          <a:xfrm>
+            <a:off x="7962900" y="5676900"/>
+            <a:ext cx="2857500" cy="209550"/>
+          </a:xfrm>
+          <a:prstGeom prst="rect">
+            <a:avLst/>
+          </a:prstGeom>
+          <a:noFill/>
+        </p:spPr>
+        <p:txBody>
+          <a:bodyPr wrap="none" lIns="0" rIns="0" tIns="0" bIns="0" anchor="ctr">
+            <a:spAutoFit/>
+          </a:bodyPr>
+          <a:lstStyle/>
+          <a:p>
+            <a:pPr algn="r"/>
+            <a:r>
+              <a:rPr sz="1050" b="0">
+                <a:solidFill>
+                  <a:srgbClr val="6A717B"/>
+                </a:solidFill>
+                <a:latin typeface="Yu Gothic UI"/>
+              </a:rPr>
+              <a:t>寸法で選ぶ　sunpou.nexeed-lab.com</a:t>
+            </a:r>
+          </a:p>
+        </p:txBody>
+      </p:sp>
+    </p:spTree>
+  </p:cSld>
+  <p:clrMapOvr>
+    <a:masterClrMapping/>
+  </p:clrMapOvr>
+</p:sld>
+</file>
+
+<file path=ppt/slides/slide19.xml><?xml version="1.0" encoding="utf-8"?>
+<p:sld xmlns:a="http://schemas.openxmlformats.org/drawingml/2006/main" xmlns:p="http://schemas.openxmlformats.org/presentationml/2006/main" xmlns:r="http://schemas.openxmlformats.org/officeDocument/2006/relationships">
+  <p:cSld>
+    <p:spTree>
+      <p:nvGrpSpPr>
+        <p:cNvPr id="1" name=""/>
+        <p:cNvGrpSpPr/>
+        <p:nvPr/>
+      </p:nvGrpSpPr>
+      <p:grpSpPr/>
+      <p:sp>
+        <p:nvSpPr>
+          <p:cNvPr id="2" name="Rectangle 1"/>
+          <p:cNvSpPr/>
+          <p:nvPr/>
+        </p:nvSpPr>
+        <p:spPr>
+          <a:xfrm>
+            <a:off x="0" y="0"/>
+            <a:ext cx="11430000" cy="6000750"/>
+          </a:xfrm>
+          <a:prstGeom prst="rect">
+            <a:avLst/>
+          </a:prstGeom>
+          <a:solidFill>
+            <a:srgbClr val="FCFCFC"/>
+          </a:solidFill>
+          <a:ln>
+            <a:noFill/>
+          </a:ln>
+          <a:effectLst/>
+        </p:spPr>
+        <p:txBody>
+          <a:bodyPr rtlCol="0" anchor="ctr"/>
+          <a:lstStyle/>
+          <a:p>
+            <a:pPr algn="ctr"/>
+          </a:p>
+        </p:txBody>
+      </p:sp>
+      <p:sp>
+        <p:nvSpPr>
+          <p:cNvPr id="3" name="Rectangle 2"/>
+          <p:cNvSpPr/>
+          <p:nvPr/>
+        </p:nvSpPr>
+        <p:spPr>
+          <a:xfrm>
+            <a:off x="0" y="0"/>
+            <a:ext cx="114300" cy="6000750"/>
+          </a:xfrm>
+          <a:prstGeom prst="rect">
+            <a:avLst/>
+          </a:prstGeom>
+          <a:solidFill>
+            <a:srgbClr val="014172"/>
+          </a:solidFill>
+          <a:ln>
+            <a:noFill/>
+          </a:ln>
+          <a:effectLst/>
+        </p:spPr>
+        <p:txBody>
+          <a:bodyPr rtlCol="0" anchor="ctr"/>
+          <a:lstStyle/>
+          <a:p>
+            <a:pPr algn="ctr"/>
+          </a:p>
+        </p:txBody>
+      </p:sp>
+      <p:sp>
+        <p:nvSpPr>
+          <p:cNvPr id="4" name="Rectangle 3"/>
+          <p:cNvSpPr/>
+          <p:nvPr/>
+        </p:nvSpPr>
+        <p:spPr>
+          <a:xfrm>
+            <a:off x="0" y="0"/>
+            <a:ext cx="11430000" cy="1504950"/>
+          </a:xfrm>
+          <a:prstGeom prst="rect">
+            <a:avLst/>
+          </a:prstGeom>
+          <a:solidFill>
+            <a:srgbClr val="014172"/>
+          </a:solidFill>
+          <a:ln>
+            <a:noFill/>
+          </a:ln>
+          <a:effectLst/>
+        </p:spPr>
+        <p:txBody>
+          <a:bodyPr rtlCol="0" anchor="ctr"/>
+          <a:lstStyle/>
+          <a:p>
+            <a:pPr algn="ctr"/>
+          </a:p>
+        </p:txBody>
+      </p:sp>
+      <p:sp>
+        <p:nvSpPr>
+          <p:cNvPr id="5" name="TextBox 4"/>
+          <p:cNvSpPr txBox="1"/>
+          <p:nvPr/>
+        </p:nvSpPr>
+        <p:spPr>
+          <a:xfrm>
+            <a:off x="609600" y="361950"/>
+            <a:ext cx="7429500" cy="476250"/>
+          </a:xfrm>
+          <a:prstGeom prst="rect">
+            <a:avLst/>
+          </a:prstGeom>
+          <a:noFill/>
+        </p:spPr>
+        <p:txBody>
+          <a:bodyPr wrap="none" lIns="0" rIns="0" tIns="0" bIns="0" anchor="ctr">
+            <a:spAutoFit/>
+          </a:bodyPr>
+          <a:lstStyle/>
+          <a:p>
+            <a:pPr algn="l"/>
+            <a:r>
+              <a:rPr sz="3000" b="1">
+                <a:solidFill>
+                  <a:srgbClr val="FFFFFF"/>
+                </a:solidFill>
+                <a:latin typeface="Yu Gothic UI"/>
+              </a:rPr>
+              <a:t>届きたい高さ − 身長 ＝ 必要な足場</a:t>
+            </a:r>
+          </a:p>
+        </p:txBody>
+      </p:sp>
+      <p:sp>
+        <p:nvSpPr>
+          <p:cNvPr id="6" name="TextBox 5"/>
+          <p:cNvSpPr txBox="1"/>
+          <p:nvPr/>
+        </p:nvSpPr>
+        <p:spPr>
+          <a:xfrm>
+            <a:off x="609600" y="876300"/>
+            <a:ext cx="7429500" cy="247650"/>
+          </a:xfrm>
+          <a:prstGeom prst="rect">
+            <a:avLst/>
+          </a:prstGeom>
+          <a:noFill/>
+        </p:spPr>
+        <p:txBody>
+          <a:bodyPr wrap="none" lIns="0" rIns="0" tIns="0" bIns="0" anchor="ctr">
+            <a:spAutoFit/>
+          </a:bodyPr>
+          <a:lstStyle/>
+          <a:p>
+            <a:pPr algn="l"/>
+            <a:r>
+              <a:rPr sz="1425" b="0">
+                <a:solidFill>
+                  <a:srgbClr val="DAE7F2"/>
+                </a:solidFill>
+                <a:latin typeface="Yu Gothic UI"/>
+              </a:rPr>
+              <a:t>長谷川工業の「身長＋天板高さ＝作業高さ」を逆に使う（身長160cm基準）</a:t>
+            </a:r>
+          </a:p>
+        </p:txBody>
+      </p:sp>
+      <p:sp>
+        <p:nvSpPr>
+          <p:cNvPr id="7" name="Rounded Rectangle 6"/>
+          <p:cNvSpPr/>
+          <p:nvPr/>
+        </p:nvSpPr>
+        <p:spPr>
+          <a:xfrm>
+            <a:off x="8305800" y="247650"/>
+            <a:ext cx="2514600" cy="1009650"/>
+          </a:xfrm>
+          <a:prstGeom prst="roundRect">
+            <a:avLst>
+              <a:gd name="adj" fmla="val 12000"/>
+            </a:avLst>
+          </a:prstGeom>
+          <a:solidFill>
+            <a:srgbClr val="FFFFFF"/>
+          </a:solidFill>
+          <a:ln>
+            <a:noFill/>
+          </a:ln>
+          <a:effectLst>
+            <a:outerShdw blurRad="254000" dist="63500" dir="5400000" rotWithShape="0">
+              <a:srgbClr val="0B2B45">
+                <a:alpha val="30000"/>
+              </a:srgbClr>
+            </a:outerShdw>
+          </a:effectLst>
+        </p:spPr>
+        <p:txBody>
+          <a:bodyPr rtlCol="0" anchor="ctr"/>
+          <a:lstStyle/>
+          <a:p>
+            <a:pPr algn="ctr"/>
+          </a:p>
+        </p:txBody>
+      </p:sp>
+      <p:sp>
+        <p:nvSpPr>
+          <p:cNvPr id="8" name="TextBox 7"/>
+          <p:cNvSpPr txBox="1"/>
+          <p:nvPr/>
+        </p:nvSpPr>
+        <p:spPr>
+          <a:xfrm>
+            <a:off x="8515350" y="400050"/>
+            <a:ext cx="2133600" cy="209550"/>
+          </a:xfrm>
+          <a:prstGeom prst="rect">
+            <a:avLst/>
+          </a:prstGeom>
+          <a:noFill/>
+        </p:spPr>
+        <p:txBody>
+          <a:bodyPr wrap="none" lIns="0" rIns="0" tIns="0" bIns="0" anchor="ctr">
+            <a:spAutoFit/>
+          </a:bodyPr>
+          <a:lstStyle/>
+          <a:p>
+            <a:pPr algn="l"/>
+            <a:r>
+              <a:rPr sz="1125" b="0">
+                <a:solidFill>
+                  <a:srgbClr val="6A717B"/>
+                </a:solidFill>
+                <a:latin typeface="Yu Gothic UI"/>
+              </a:rPr>
+              <a:t>2.4mに届くには</a:t>
+            </a:r>
+          </a:p>
+        </p:txBody>
+      </p:sp>
+      <p:sp>
+        <p:nvSpPr>
+          <p:cNvPr id="9" name="TextBox 8"/>
+          <p:cNvSpPr txBox="1"/>
+          <p:nvPr/>
+        </p:nvSpPr>
+        <p:spPr>
+          <a:xfrm>
+            <a:off x="8515350" y="647700"/>
+            <a:ext cx="2133600" cy="533400"/>
+          </a:xfrm>
+          <a:prstGeom prst="rect">
+            <a:avLst/>
+          </a:prstGeom>
+          <a:noFill/>
+        </p:spPr>
+        <p:txBody>
+          <a:bodyPr wrap="none" lIns="0" rIns="0" tIns="0" bIns="0" anchor="ctr">
+            <a:spAutoFit/>
+          </a:bodyPr>
+          <a:lstStyle/>
+          <a:p>
+            <a:pPr algn="l"/>
+            <a:r>
+              <a:rPr sz="3900" b="1">
+                <a:solidFill>
+                  <a:srgbClr val="014172"/>
+                </a:solidFill>
+                <a:latin typeface="Yu Gothic UI"/>
+              </a:rPr>
+              <a:t>0.8</a:t>
+            </a:r>
+            <a:r>
+              <a:rPr sz="1950" b="1">
+                <a:solidFill>
+                  <a:srgbClr val="014172"/>
+                </a:solidFill>
+                <a:latin typeface="Yu Gothic UI"/>
+              </a:rPr>
+              <a:t>m</a:t>
+            </a:r>
+          </a:p>
+        </p:txBody>
+      </p:sp>
+      <p:sp>
+        <p:nvSpPr>
+          <p:cNvPr id="10" name="Rounded Rectangle 9"/>
+          <p:cNvSpPr/>
+          <p:nvPr/>
+        </p:nvSpPr>
+        <p:spPr>
+          <a:xfrm>
+            <a:off x="1200150" y="1771650"/>
+            <a:ext cx="2476500" cy="1028700"/>
+          </a:xfrm>
+          <a:prstGeom prst="roundRect">
+            <a:avLst>
+              <a:gd name="adj" fmla="val 6000"/>
+            </a:avLst>
+          </a:prstGeom>
+          <a:solidFill>
+            <a:srgbClr val="F2F5F8"/>
+          </a:solidFill>
+          <a:ln w="19050">
+            <a:solidFill>
+              <a:srgbClr val="DAE7F2"/>
+            </a:solidFill>
+          </a:ln>
+          <a:effectLst/>
+        </p:spPr>
+        <p:txBody>
+          <a:bodyPr rtlCol="0" anchor="ctr"/>
+          <a:lstStyle/>
+          <a:p>
+            <a:pPr algn="ctr"/>
+          </a:p>
+        </p:txBody>
+      </p:sp>
+      <p:sp>
+        <p:nvSpPr>
+          <p:cNvPr id="11" name="TextBox 10"/>
+          <p:cNvSpPr txBox="1"/>
+          <p:nvPr/>
+        </p:nvSpPr>
+        <p:spPr>
+          <a:xfrm>
+            <a:off x="1428750" y="1943100"/>
+            <a:ext cx="2095500" cy="228600"/>
+          </a:xfrm>
+          <a:prstGeom prst="rect">
+            <a:avLst/>
+          </a:prstGeom>
+          <a:noFill/>
+        </p:spPr>
+        <p:txBody>
+          <a:bodyPr wrap="none" lIns="0" rIns="0" tIns="0" bIns="0" anchor="ctr">
+            <a:spAutoFit/>
+          </a:bodyPr>
+          <a:lstStyle/>
+          <a:p>
+            <a:pPr algn="l"/>
+            <a:r>
+              <a:rPr sz="1200" b="0">
+                <a:solidFill>
+                  <a:srgbClr val="6A717B"/>
+                </a:solidFill>
+                <a:latin typeface="Yu Gothic UI"/>
+              </a:rPr>
+              <a:t>届きたい高さ</a:t>
+            </a:r>
+          </a:p>
+        </p:txBody>
+      </p:sp>
+      <p:sp>
+        <p:nvSpPr>
+          <p:cNvPr id="12" name="TextBox 11"/>
+          <p:cNvSpPr txBox="1"/>
+          <p:nvPr/>
+        </p:nvSpPr>
+        <p:spPr>
+          <a:xfrm>
+            <a:off x="1428750" y="2266950"/>
+            <a:ext cx="2095500" cy="419100"/>
+          </a:xfrm>
+          <a:prstGeom prst="rect">
+            <a:avLst/>
+          </a:prstGeom>
+          <a:noFill/>
+        </p:spPr>
+        <p:txBody>
+          <a:bodyPr wrap="none" lIns="0" rIns="0" tIns="0" bIns="0" anchor="ctr">
+            <a:spAutoFit/>
+          </a:bodyPr>
+          <a:lstStyle/>
+          <a:p>
+            <a:pPr algn="l"/>
+            <a:r>
+              <a:rPr sz="2550" b="1">
+                <a:solidFill>
+                  <a:srgbClr val="014172"/>
+                </a:solidFill>
+                <a:latin typeface="Yu Gothic UI"/>
+              </a:rPr>
+              <a:t>2.4m</a:t>
+            </a:r>
+          </a:p>
+        </p:txBody>
+      </p:sp>
+      <p:sp>
+        <p:nvSpPr>
+          <p:cNvPr id="13" name="Rounded Rectangle 12"/>
+          <p:cNvSpPr/>
+          <p:nvPr/>
+        </p:nvSpPr>
+        <p:spPr>
+          <a:xfrm>
+            <a:off x="4533900" y="1771650"/>
+            <a:ext cx="2476500" cy="1028700"/>
+          </a:xfrm>
+          <a:prstGeom prst="roundRect">
+            <a:avLst>
+              <a:gd name="adj" fmla="val 6000"/>
+            </a:avLst>
+          </a:prstGeom>
+          <a:solidFill>
+            <a:srgbClr val="F2F5F8"/>
+          </a:solidFill>
+          <a:ln w="19050">
+            <a:solidFill>
+              <a:srgbClr val="DAE7F2"/>
+            </a:solidFill>
+          </a:ln>
+          <a:effectLst/>
+        </p:spPr>
+        <p:txBody>
+          <a:bodyPr rtlCol="0" anchor="ctr"/>
+          <a:lstStyle/>
+          <a:p>
+            <a:pPr algn="ctr"/>
+          </a:p>
+        </p:txBody>
+      </p:sp>
+      <p:sp>
+        <p:nvSpPr>
+          <p:cNvPr id="14" name="TextBox 13"/>
+          <p:cNvSpPr txBox="1"/>
+          <p:nvPr/>
+        </p:nvSpPr>
+        <p:spPr>
+          <a:xfrm>
+            <a:off x="4762500" y="1943100"/>
+            <a:ext cx="2095500" cy="228600"/>
+          </a:xfrm>
+          <a:prstGeom prst="rect">
+            <a:avLst/>
+          </a:prstGeom>
+          <a:noFill/>
+        </p:spPr>
+        <p:txBody>
+          <a:bodyPr wrap="none" lIns="0" rIns="0" tIns="0" bIns="0" anchor="ctr">
+            <a:spAutoFit/>
+          </a:bodyPr>
+          <a:lstStyle/>
+          <a:p>
+            <a:pPr algn="l"/>
+            <a:r>
+              <a:rPr sz="1200" b="0">
+                <a:solidFill>
+                  <a:srgbClr val="6A717B"/>
+                </a:solidFill>
+                <a:latin typeface="Yu Gothic UI"/>
+              </a:rPr>
+              <a:t>身長</a:t>
+            </a:r>
+          </a:p>
+        </p:txBody>
+      </p:sp>
+      <p:sp>
+        <p:nvSpPr>
+          <p:cNvPr id="15" name="TextBox 14"/>
+          <p:cNvSpPr txBox="1"/>
+          <p:nvPr/>
+        </p:nvSpPr>
+        <p:spPr>
+          <a:xfrm>
+            <a:off x="4762500" y="2266950"/>
+            <a:ext cx="2095500" cy="419100"/>
+          </a:xfrm>
+          <a:prstGeom prst="rect">
+            <a:avLst/>
+          </a:prstGeom>
+          <a:noFill/>
+        </p:spPr>
+        <p:txBody>
+          <a:bodyPr wrap="none" lIns="0" rIns="0" tIns="0" bIns="0" anchor="ctr">
+            <a:spAutoFit/>
+          </a:bodyPr>
+          <a:lstStyle/>
+          <a:p>
+            <a:pPr algn="l"/>
+            <a:r>
+              <a:rPr sz="2550" b="1">
+                <a:solidFill>
+                  <a:srgbClr val="014172"/>
+                </a:solidFill>
+                <a:latin typeface="Yu Gothic UI"/>
+              </a:rPr>
+              <a:t>1.6m</a:t>
+            </a:r>
+          </a:p>
+        </p:txBody>
+      </p:sp>
+      <p:sp>
+        <p:nvSpPr>
+          <p:cNvPr id="16" name="Rounded Rectangle 15"/>
+          <p:cNvSpPr/>
+          <p:nvPr/>
+        </p:nvSpPr>
+        <p:spPr>
+          <a:xfrm>
+            <a:off x="7962900" y="1771650"/>
+            <a:ext cx="2476500" cy="1028700"/>
+          </a:xfrm>
+          <a:prstGeom prst="roundRect">
+            <a:avLst>
+              <a:gd name="adj" fmla="val 6000"/>
+            </a:avLst>
+          </a:prstGeom>
+          <a:solidFill>
+            <a:srgbClr val="E6EEF6"/>
+          </a:solidFill>
+          <a:ln w="19050">
+            <a:solidFill>
+              <a:srgbClr val="DAE7F2"/>
+            </a:solidFill>
+          </a:ln>
+          <a:effectLst/>
+        </p:spPr>
+        <p:txBody>
+          <a:bodyPr rtlCol="0" anchor="ctr"/>
+          <a:lstStyle/>
+          <a:p>
+            <a:pPr algn="ctr"/>
+          </a:p>
+        </p:txBody>
+      </p:sp>
+      <p:sp>
+        <p:nvSpPr>
+          <p:cNvPr id="17" name="TextBox 16"/>
+          <p:cNvSpPr txBox="1"/>
+          <p:nvPr/>
+        </p:nvSpPr>
+        <p:spPr>
+          <a:xfrm>
+            <a:off x="8191500" y="1943100"/>
+            <a:ext cx="2095500" cy="228600"/>
+          </a:xfrm>
+          <a:prstGeom prst="rect">
+            <a:avLst/>
+          </a:prstGeom>
+          <a:noFill/>
+        </p:spPr>
+        <p:txBody>
+          <a:bodyPr wrap="none" lIns="0" rIns="0" tIns="0" bIns="0" anchor="ctr">
+            <a:spAutoFit/>
+          </a:bodyPr>
+          <a:lstStyle/>
+          <a:p>
+            <a:pPr algn="l"/>
+            <a:r>
+              <a:rPr sz="1200" b="0">
+                <a:solidFill>
+                  <a:srgbClr val="6A717B"/>
+                </a:solidFill>
+                <a:latin typeface="Yu Gothic UI"/>
+              </a:rPr>
+              <a:t>必要な足場</a:t>
+            </a:r>
+          </a:p>
+        </p:txBody>
+      </p:sp>
+      <p:sp>
+        <p:nvSpPr>
+          <p:cNvPr id="18" name="TextBox 17"/>
+          <p:cNvSpPr txBox="1"/>
+          <p:nvPr/>
+        </p:nvSpPr>
+        <p:spPr>
+          <a:xfrm>
+            <a:off x="8191500" y="2266950"/>
+            <a:ext cx="2095500" cy="419100"/>
+          </a:xfrm>
+          <a:prstGeom prst="rect">
+            <a:avLst/>
+          </a:prstGeom>
+          <a:noFill/>
+        </p:spPr>
+        <p:txBody>
+          <a:bodyPr wrap="none" lIns="0" rIns="0" tIns="0" bIns="0" anchor="ctr">
+            <a:spAutoFit/>
+          </a:bodyPr>
+          <a:lstStyle/>
+          <a:p>
+            <a:pPr algn="l"/>
+            <a:r>
+              <a:rPr sz="2550" b="1">
+                <a:solidFill>
+                  <a:srgbClr val="014172"/>
+                </a:solidFill>
+                <a:latin typeface="Yu Gothic UI"/>
+              </a:rPr>
+              <a:t>0.8m</a:t>
+            </a:r>
+          </a:p>
+        </p:txBody>
+      </p:sp>
+      <p:sp>
+        <p:nvSpPr>
+          <p:cNvPr id="19" name="TextBox 18"/>
+          <p:cNvSpPr txBox="1"/>
+          <p:nvPr/>
+        </p:nvSpPr>
+        <p:spPr>
+          <a:xfrm>
+            <a:off x="4019550" y="2076450"/>
+            <a:ext cx="571500" cy="419100"/>
+          </a:xfrm>
+          <a:prstGeom prst="rect">
+            <a:avLst/>
+          </a:prstGeom>
+          <a:noFill/>
+        </p:spPr>
+        <p:txBody>
+          <a:bodyPr wrap="none" lIns="0" rIns="0" tIns="0" bIns="0" anchor="ctr">
+            <a:spAutoFit/>
+          </a:bodyPr>
+          <a:lstStyle/>
+          <a:p>
+            <a:pPr algn="l"/>
+            <a:r>
+              <a:rPr sz="2250" b="1">
+                <a:solidFill>
+                  <a:srgbClr val="6A717B"/>
+                </a:solidFill>
+                <a:latin typeface="Yu Gothic UI"/>
+              </a:rPr>
+              <a:t>−</a:t>
+            </a:r>
+          </a:p>
+        </p:txBody>
+      </p:sp>
+      <p:sp>
+        <p:nvSpPr>
+          <p:cNvPr id="20" name="TextBox 19"/>
+          <p:cNvSpPr txBox="1"/>
+          <p:nvPr/>
+        </p:nvSpPr>
+        <p:spPr>
+          <a:xfrm>
+            <a:off x="7486650" y="2076450"/>
+            <a:ext cx="571500" cy="419100"/>
+          </a:xfrm>
+          <a:prstGeom prst="rect">
+            <a:avLst/>
+          </a:prstGeom>
+          <a:noFill/>
+        </p:spPr>
+        <p:txBody>
+          <a:bodyPr wrap="none" lIns="0" rIns="0" tIns="0" bIns="0" anchor="ctr">
+            <a:spAutoFit/>
+          </a:bodyPr>
+          <a:lstStyle/>
+          <a:p>
+            <a:pPr algn="l"/>
+            <a:r>
+              <a:rPr sz="2250" b="1">
+                <a:solidFill>
+                  <a:srgbClr val="6A717B"/>
+                </a:solidFill>
+                <a:latin typeface="Yu Gothic UI"/>
+              </a:rPr>
+              <a:t>＝</a:t>
+            </a:r>
+          </a:p>
+        </p:txBody>
+      </p:sp>
+      <p:sp>
+        <p:nvSpPr>
+          <p:cNvPr id="21" name="TextBox 20"/>
+          <p:cNvSpPr txBox="1"/>
+          <p:nvPr/>
+        </p:nvSpPr>
+        <p:spPr>
+          <a:xfrm>
+            <a:off x="685800" y="3048000"/>
+            <a:ext cx="4762500" cy="247650"/>
+          </a:xfrm>
+          <a:prstGeom prst="rect">
+            <a:avLst/>
+          </a:prstGeom>
+          <a:noFill/>
+        </p:spPr>
+        <p:txBody>
+          <a:bodyPr wrap="none" lIns="0" rIns="0" tIns="0" bIns="0" anchor="ctr">
+            <a:spAutoFit/>
+          </a:bodyPr>
+          <a:lstStyle/>
+          <a:p>
+            <a:pPr algn="l"/>
+            <a:r>
+              <a:rPr sz="1500" b="1">
+                <a:solidFill>
+                  <a:srgbClr val="2E2E33"/>
+                </a:solidFill>
+                <a:latin typeface="Yu Gothic UI"/>
+              </a:rPr>
+              <a:t>0.8m に足を置ける3つの選び方</a:t>
+            </a:r>
+          </a:p>
+        </p:txBody>
+      </p:sp>
+      <p:sp>
+        <p:nvSpPr>
+          <p:cNvPr id="22" name="Rounded Rectangle 21"/>
+          <p:cNvSpPr/>
+          <p:nvPr/>
+        </p:nvSpPr>
+        <p:spPr>
+          <a:xfrm>
+            <a:off x="704850" y="3390900"/>
+            <a:ext cx="3048000" cy="1428750"/>
+          </a:xfrm>
+          <a:prstGeom prst="roundRect">
+            <a:avLst>
+              <a:gd name="adj" fmla="val 5000"/>
+            </a:avLst>
+          </a:prstGeom>
+          <a:solidFill>
+            <a:srgbClr val="FFFFFF"/>
+          </a:solidFill>
+          <a:ln w="19050">
+            <a:solidFill>
+              <a:srgbClr val="DAE7F2"/>
+            </a:solidFill>
+          </a:ln>
+          <a:effectLst/>
+        </p:spPr>
+        <p:txBody>
+          <a:bodyPr rtlCol="0" anchor="ctr"/>
+          <a:lstStyle/>
+          <a:p>
+            <a:pPr algn="ctr"/>
+          </a:p>
+        </p:txBody>
+      </p:sp>
+      <p:sp>
+        <p:nvSpPr>
+          <p:cNvPr id="23" name="TextBox 22"/>
+          <p:cNvSpPr txBox="1"/>
+          <p:nvPr/>
+        </p:nvSpPr>
+        <p:spPr>
+          <a:xfrm>
+            <a:off x="914400" y="3581400"/>
+            <a:ext cx="2762250" cy="228600"/>
+          </a:xfrm>
+          <a:prstGeom prst="rect">
+            <a:avLst/>
+          </a:prstGeom>
+          <a:noFill/>
+        </p:spPr>
+        <p:txBody>
+          <a:bodyPr wrap="none" lIns="0" rIns="0" tIns="0" bIns="0" anchor="ctr">
+            <a:spAutoFit/>
+          </a:bodyPr>
+          <a:lstStyle/>
+          <a:p>
+            <a:pPr algn="l"/>
+            <a:r>
+              <a:rPr sz="1200" b="0">
+                <a:solidFill>
+                  <a:srgbClr val="6A717B"/>
+                </a:solidFill>
+                <a:latin typeface="Yu Gothic UI"/>
+              </a:rPr>
+              <a:t>踏台</a:t>
+            </a:r>
+          </a:p>
+        </p:txBody>
+      </p:sp>
+      <p:sp>
+        <p:nvSpPr>
+          <p:cNvPr id="24" name="TextBox 23"/>
+          <p:cNvSpPr txBox="1"/>
+          <p:nvPr/>
+        </p:nvSpPr>
+        <p:spPr>
+          <a:xfrm>
+            <a:off x="914400" y="3848100"/>
+            <a:ext cx="2762250" cy="247650"/>
+          </a:xfrm>
+          <a:prstGeom prst="rect">
+            <a:avLst/>
+          </a:prstGeom>
+          <a:noFill/>
+        </p:spPr>
+        <p:txBody>
+          <a:bodyPr wrap="none" lIns="0" rIns="0" tIns="0" bIns="0" anchor="ctr">
+            <a:spAutoFit/>
+          </a:bodyPr>
+          <a:lstStyle/>
+          <a:p>
+            <a:pPr algn="l"/>
+            <a:r>
+              <a:rPr sz="1275" b="1">
+                <a:solidFill>
+                  <a:srgbClr val="2E2E33"/>
+                </a:solidFill>
+                <a:latin typeface="Yu Gothic UI"/>
+              </a:rPr>
+              <a:t>アルインコ CCA-80K</a:t>
+            </a:r>
+          </a:p>
+        </p:txBody>
+      </p:sp>
+      <p:sp>
+        <p:nvSpPr>
+          <p:cNvPr id="25" name="TextBox 24"/>
+          <p:cNvSpPr txBox="1"/>
+          <p:nvPr/>
+        </p:nvSpPr>
+        <p:spPr>
+          <a:xfrm>
+            <a:off x="914400" y="4152900"/>
+            <a:ext cx="2762250" cy="247650"/>
+          </a:xfrm>
+          <a:prstGeom prst="rect">
+            <a:avLst/>
+          </a:prstGeom>
+          <a:noFill/>
+        </p:spPr>
+        <p:txBody>
+          <a:bodyPr wrap="none" lIns="0" rIns="0" tIns="0" bIns="0" anchor="ctr">
+            <a:spAutoFit/>
+          </a:bodyPr>
+          <a:lstStyle/>
+          <a:p>
+            <a:pPr algn="l"/>
+            <a:r>
+              <a:rPr sz="1350" b="1">
+                <a:solidFill>
+                  <a:srgbClr val="014172"/>
+                </a:solidFill>
+                <a:latin typeface="Yu Gothic UI"/>
+              </a:rPr>
+              <a:t>0.79m ／ 2.5kg</a:t>
+            </a:r>
+          </a:p>
+        </p:txBody>
+      </p:sp>
+      <p:sp>
+        <p:nvSpPr>
+          <p:cNvPr id="26" name="TextBox 25"/>
+          <p:cNvSpPr txBox="1"/>
+          <p:nvPr/>
+        </p:nvSpPr>
+        <p:spPr>
+          <a:xfrm>
+            <a:off x="914400" y="4476750"/>
+            <a:ext cx="2762250" cy="228600"/>
+          </a:xfrm>
+          <a:prstGeom prst="rect">
+            <a:avLst/>
+          </a:prstGeom>
+          <a:noFill/>
+        </p:spPr>
+        <p:txBody>
+          <a:bodyPr wrap="none" lIns="0" rIns="0" tIns="0" bIns="0" anchor="ctr">
+            <a:spAutoFit/>
+          </a:bodyPr>
+          <a:lstStyle/>
+          <a:p>
+            <a:pPr algn="l"/>
+            <a:r>
+              <a:rPr sz="1050" b="0">
+                <a:solidFill>
+                  <a:srgbClr val="6A717B"/>
+                </a:solidFill>
+                <a:latin typeface="Yu Gothic UI"/>
+              </a:rPr>
+              <a:t>いちばん軽く、短くしまえる</a:t>
+            </a:r>
+          </a:p>
+        </p:txBody>
+      </p:sp>
+      <p:sp>
+        <p:nvSpPr>
+          <p:cNvPr id="27" name="Rounded Rectangle 26"/>
+          <p:cNvSpPr/>
+          <p:nvPr/>
+        </p:nvSpPr>
+        <p:spPr>
+          <a:xfrm>
+            <a:off x="4133850" y="3390900"/>
+            <a:ext cx="3048000" cy="1428750"/>
+          </a:xfrm>
+          <a:prstGeom prst="roundRect">
+            <a:avLst>
+              <a:gd name="adj" fmla="val 5000"/>
+            </a:avLst>
+          </a:prstGeom>
+          <a:solidFill>
+            <a:srgbClr val="FFFFFF"/>
+          </a:solidFill>
+          <a:ln w="19050">
+            <a:solidFill>
+              <a:srgbClr val="DAE7F2"/>
+            </a:solidFill>
+          </a:ln>
+          <a:effectLst/>
+        </p:spPr>
+        <p:txBody>
+          <a:bodyPr rtlCol="0" anchor="ctr"/>
+          <a:lstStyle/>
+          <a:p>
+            <a:pPr algn="ctr"/>
+          </a:p>
+        </p:txBody>
+      </p:sp>
+      <p:sp>
+        <p:nvSpPr>
+          <p:cNvPr id="28" name="TextBox 27"/>
+          <p:cNvSpPr txBox="1"/>
+          <p:nvPr/>
+        </p:nvSpPr>
+        <p:spPr>
+          <a:xfrm>
+            <a:off x="4343400" y="3581400"/>
+            <a:ext cx="2762250" cy="228600"/>
+          </a:xfrm>
+          <a:prstGeom prst="rect">
+            <a:avLst/>
+          </a:prstGeom>
+          <a:noFill/>
+        </p:spPr>
+        <p:txBody>
+          <a:bodyPr wrap="none" lIns="0" rIns="0" tIns="0" bIns="0" anchor="ctr">
+            <a:spAutoFit/>
+          </a:bodyPr>
+          <a:lstStyle/>
+          <a:p>
+            <a:pPr algn="l"/>
+            <a:r>
+              <a:rPr sz="1200" b="0">
+                <a:solidFill>
+                  <a:srgbClr val="6A717B"/>
+                </a:solidFill>
+                <a:latin typeface="Yu Gothic UI"/>
+              </a:rPr>
+              <a:t>踏台（上わく付き）</a:t>
+            </a:r>
+          </a:p>
+        </p:txBody>
+      </p:sp>
+      <p:sp>
+        <p:nvSpPr>
+          <p:cNvPr id="29" name="TextBox 28"/>
+          <p:cNvSpPr txBox="1"/>
+          <p:nvPr/>
+        </p:nvSpPr>
+        <p:spPr>
+          <a:xfrm>
+            <a:off x="4343400" y="3848100"/>
+            <a:ext cx="2762250" cy="247650"/>
+          </a:xfrm>
+          <a:prstGeom prst="rect">
+            <a:avLst/>
+          </a:prstGeom>
+          <a:noFill/>
+        </p:spPr>
+        <p:txBody>
+          <a:bodyPr wrap="none" lIns="0" rIns="0" tIns="0" bIns="0" anchor="ctr">
+            <a:spAutoFit/>
+          </a:bodyPr>
+          <a:lstStyle/>
+          <a:p>
+            <a:pPr algn="l"/>
+            <a:r>
+              <a:rPr sz="1275" b="1">
+                <a:solidFill>
+                  <a:srgbClr val="2E2E33"/>
+                </a:solidFill>
+                <a:latin typeface="Yu Gothic UI"/>
+              </a:rPr>
+              <a:t>アルインコ TBF-4</a:t>
+            </a:r>
+          </a:p>
+        </p:txBody>
+      </p:sp>
+      <p:sp>
+        <p:nvSpPr>
+          <p:cNvPr id="30" name="TextBox 29"/>
+          <p:cNvSpPr txBox="1"/>
+          <p:nvPr/>
+        </p:nvSpPr>
+        <p:spPr>
+          <a:xfrm>
+            <a:off x="4343400" y="4152900"/>
+            <a:ext cx="2762250" cy="247650"/>
+          </a:xfrm>
+          <a:prstGeom prst="rect">
+            <a:avLst/>
+          </a:prstGeom>
+          <a:noFill/>
+        </p:spPr>
+        <p:txBody>
+          <a:bodyPr wrap="none" lIns="0" rIns="0" tIns="0" bIns="0" anchor="ctr">
+            <a:spAutoFit/>
+          </a:bodyPr>
+          <a:lstStyle/>
+          <a:p>
+            <a:pPr algn="l"/>
+            <a:r>
+              <a:rPr sz="1350" b="1">
+                <a:solidFill>
+                  <a:srgbClr val="014172"/>
+                </a:solidFill>
+                <a:latin typeface="Yu Gothic UI"/>
+              </a:rPr>
+              <a:t>0.77m ／ 3.8kg</a:t>
+            </a:r>
+          </a:p>
+        </p:txBody>
+      </p:sp>
+      <p:sp>
+        <p:nvSpPr>
+          <p:cNvPr id="31" name="TextBox 30"/>
+          <p:cNvSpPr txBox="1"/>
+          <p:nvPr/>
+        </p:nvSpPr>
+        <p:spPr>
+          <a:xfrm>
+            <a:off x="4343400" y="4476750"/>
+            <a:ext cx="2762250" cy="228600"/>
+          </a:xfrm>
+          <a:prstGeom prst="rect">
+            <a:avLst/>
+          </a:prstGeom>
+          <a:noFill/>
+        </p:spPr>
+        <p:txBody>
+          <a:bodyPr wrap="none" lIns="0" rIns="0" tIns="0" bIns="0" anchor="ctr">
+            <a:spAutoFit/>
+          </a:bodyPr>
+          <a:lstStyle/>
+          <a:p>
+            <a:pPr algn="l"/>
+            <a:r>
+              <a:rPr sz="1050" b="0">
+                <a:solidFill>
+                  <a:srgbClr val="6A717B"/>
+                </a:solidFill>
+                <a:latin typeface="Yu Gothic UI"/>
+              </a:rPr>
+              <a:t>手すりが天板の60cm上</a:t>
+            </a:r>
+          </a:p>
+        </p:txBody>
+      </p:sp>
+      <p:sp>
+        <p:nvSpPr>
+          <p:cNvPr id="32" name="Rounded Rectangle 31"/>
+          <p:cNvSpPr/>
+          <p:nvPr/>
+        </p:nvSpPr>
+        <p:spPr>
+          <a:xfrm>
+            <a:off x="7562850" y="3390900"/>
+            <a:ext cx="3048000" cy="1428750"/>
+          </a:xfrm>
+          <a:prstGeom prst="roundRect">
+            <a:avLst>
+              <a:gd name="adj" fmla="val 5000"/>
+            </a:avLst>
+          </a:prstGeom>
+          <a:solidFill>
+            <a:srgbClr val="FFFFFF"/>
+          </a:solidFill>
+          <a:ln w="19050">
+            <a:solidFill>
+              <a:srgbClr val="DAE7F2"/>
+            </a:solidFill>
+          </a:ln>
+          <a:effectLst/>
+        </p:spPr>
+        <p:txBody>
+          <a:bodyPr rtlCol="0" anchor="ctr"/>
+          <a:lstStyle/>
+          <a:p>
+            <a:pPr algn="ctr"/>
+          </a:p>
+        </p:txBody>
+      </p:sp>
+      <p:sp>
+        <p:nvSpPr>
+          <p:cNvPr id="33" name="TextBox 32"/>
+          <p:cNvSpPr txBox="1"/>
+          <p:nvPr/>
+        </p:nvSpPr>
+        <p:spPr>
+          <a:xfrm>
+            <a:off x="7772400" y="3581400"/>
+            <a:ext cx="2762250" cy="228600"/>
+          </a:xfrm>
+          <a:prstGeom prst="rect">
+            <a:avLst/>
+          </a:prstGeom>
+          <a:noFill/>
+        </p:spPr>
+        <p:txBody>
+          <a:bodyPr wrap="none" lIns="0" rIns="0" tIns="0" bIns="0" anchor="ctr">
+            <a:spAutoFit/>
+          </a:bodyPr>
+          <a:lstStyle/>
+          <a:p>
+            <a:pPr algn="l"/>
+            <a:r>
+              <a:rPr sz="1200" b="0">
+                <a:solidFill>
+                  <a:srgbClr val="6A717B"/>
+                </a:solidFill>
+                <a:latin typeface="Yu Gothic UI"/>
+              </a:rPr>
+              <a:t>はしご兼用脚立</a:t>
+            </a:r>
+          </a:p>
+        </p:txBody>
+      </p:sp>
+      <p:sp>
+        <p:nvSpPr>
+          <p:cNvPr id="34" name="TextBox 33"/>
+          <p:cNvSpPr txBox="1"/>
+          <p:nvPr/>
+        </p:nvSpPr>
+        <p:spPr>
+          <a:xfrm>
+            <a:off x="7772400" y="3848100"/>
+            <a:ext cx="2762250" cy="247650"/>
+          </a:xfrm>
+          <a:prstGeom prst="rect">
+            <a:avLst/>
+          </a:prstGeom>
+          <a:noFill/>
+        </p:spPr>
+        <p:txBody>
+          <a:bodyPr wrap="none" lIns="0" rIns="0" tIns="0" bIns="0" anchor="ctr">
+            <a:spAutoFit/>
+          </a:bodyPr>
+          <a:lstStyle/>
+          <a:p>
+            <a:pPr algn="l"/>
+            <a:r>
+              <a:rPr sz="1275" b="1">
+                <a:solidFill>
+                  <a:srgbClr val="2E2E33"/>
+                </a:solidFill>
+                <a:latin typeface="Yu Gothic UI"/>
+              </a:rPr>
+              <a:t>長谷川工業 RHB-12a</a:t>
+            </a:r>
+          </a:p>
+        </p:txBody>
+      </p:sp>
+      <p:sp>
+        <p:nvSpPr>
+          <p:cNvPr id="35" name="TextBox 34"/>
+          <p:cNvSpPr txBox="1"/>
+          <p:nvPr/>
+        </p:nvSpPr>
+        <p:spPr>
+          <a:xfrm>
+            <a:off x="7772400" y="4152900"/>
+            <a:ext cx="2762250" cy="247650"/>
+          </a:xfrm>
+          <a:prstGeom prst="rect">
+            <a:avLst/>
+          </a:prstGeom>
+          <a:noFill/>
+        </p:spPr>
+        <p:txBody>
+          <a:bodyPr wrap="none" lIns="0" rIns="0" tIns="0" bIns="0" anchor="ctr">
+            <a:spAutoFit/>
+          </a:bodyPr>
+          <a:lstStyle/>
+          <a:p>
+            <a:pPr algn="l"/>
+            <a:r>
+              <a:rPr sz="1350" b="1">
+                <a:solidFill>
+                  <a:srgbClr val="014172"/>
+                </a:solidFill>
+                <a:latin typeface="Yu Gothic UI"/>
+              </a:rPr>
+              <a:t>0.80m ／ 4.5kg</a:t>
+            </a:r>
+          </a:p>
+        </p:txBody>
+      </p:sp>
+      <p:sp>
+        <p:nvSpPr>
+          <p:cNvPr id="36" name="TextBox 35"/>
+          <p:cNvSpPr txBox="1"/>
+          <p:nvPr/>
+        </p:nvSpPr>
+        <p:spPr>
+          <a:xfrm>
+            <a:off x="7772400" y="4476750"/>
+            <a:ext cx="2762250" cy="228600"/>
+          </a:xfrm>
+          <a:prstGeom prst="rect">
+            <a:avLst/>
+          </a:prstGeom>
+          <a:noFill/>
+        </p:spPr>
+        <p:txBody>
+          <a:bodyPr wrap="none" lIns="0" rIns="0" tIns="0" bIns="0" anchor="ctr">
+            <a:spAutoFit/>
+          </a:bodyPr>
+          <a:lstStyle/>
+          <a:p>
+            <a:pPr algn="l"/>
+            <a:r>
+              <a:rPr sz="1050" b="0">
+                <a:solidFill>
+                  <a:srgbClr val="6A717B"/>
+                </a:solidFill>
+                <a:latin typeface="Yu Gothic UI"/>
+              </a:rPr>
+              <a:t>天板には乗れない</a:t>
+            </a:r>
+          </a:p>
+        </p:txBody>
+      </p:sp>
+      <p:sp>
+        <p:nvSpPr>
+          <p:cNvPr id="37" name="Rectangle 36"/>
+          <p:cNvSpPr/>
+          <p:nvPr/>
+        </p:nvSpPr>
+        <p:spPr>
+          <a:xfrm>
+            <a:off x="609600" y="5295900"/>
+            <a:ext cx="10210800" cy="9525"/>
+          </a:xfrm>
+          <a:prstGeom prst="rect">
+            <a:avLst/>
+          </a:prstGeom>
+          <a:solidFill>
+            <a:srgbClr val="E2E7EC"/>
+          </a:solidFill>
+          <a:ln>
+            <a:noFill/>
+          </a:ln>
+          <a:effectLst/>
+        </p:spPr>
+        <p:txBody>
+          <a:bodyPr rtlCol="0" anchor="ctr"/>
+          <a:lstStyle/>
+          <a:p>
+            <a:pPr algn="ctr"/>
+          </a:p>
+        </p:txBody>
+      </p:sp>
+      <p:sp>
+        <p:nvSpPr>
+          <p:cNvPr id="38" name="TextBox 37"/>
+          <p:cNvSpPr txBox="1"/>
+          <p:nvPr/>
+        </p:nvSpPr>
+        <p:spPr>
+          <a:xfrm>
+            <a:off x="609600" y="5429250"/>
+            <a:ext cx="7239000" cy="247650"/>
+          </a:xfrm>
+          <a:prstGeom prst="rect">
+            <a:avLst/>
+          </a:prstGeom>
+          <a:noFill/>
+        </p:spPr>
+        <p:txBody>
+          <a:bodyPr wrap="none" lIns="0" rIns="0" tIns="0" bIns="0" anchor="ctr">
+            <a:spAutoFit/>
+          </a:bodyPr>
+          <a:lstStyle/>
+          <a:p>
+            <a:pPr algn="l"/>
+            <a:r>
+              <a:rPr sz="1425" b="1">
+                <a:solidFill>
+                  <a:srgbClr val="2E2E33"/>
+                </a:solidFill>
+                <a:latin typeface="Yu Gothic UI"/>
+              </a:rPr>
+              <a:t>脚立の「足を置ける高さ」は天板高さではなく、使用最大高さです。</a:t>
+            </a:r>
+          </a:p>
+        </p:txBody>
+      </p:sp>
+      <p:sp>
+        <p:nvSpPr>
+          <p:cNvPr id="39" name="TextBox 38"/>
+          <p:cNvSpPr txBox="1"/>
+          <p:nvPr/>
+        </p:nvSpPr>
+        <p:spPr>
+          <a:xfrm>
+            <a:off x="609600" y="5676900"/>
+            <a:ext cx="7620000" cy="209550"/>
+          </a:xfrm>
+          <a:prstGeom prst="rect">
+            <a:avLst/>
+          </a:prstGeom>
+          <a:noFill/>
+        </p:spPr>
+        <p:txBody>
+          <a:bodyPr wrap="none" lIns="0" rIns="0" tIns="0" bIns="0" anchor="ctr">
+            <a:spAutoFit/>
+          </a:bodyPr>
+          <a:lstStyle/>
+          <a:p>
+            <a:pPr algn="l"/>
+            <a:r>
+              <a:rPr sz="1050" b="0">
+                <a:solidFill>
+                  <a:srgbClr val="6A717B"/>
+                </a:solidFill>
+                <a:latin typeface="Yu Gothic UI"/>
+              </a:rPr>
+              <a:t>メーカー公表値からの計算です（実測ではありません）</a:t>
+            </a:r>
+          </a:p>
+        </p:txBody>
+      </p:sp>
+      <p:sp>
+        <p:nvSpPr>
+          <p:cNvPr id="40" name="TextBox 39"/>
           <p:cNvSpPr txBox="1"/>
           <p:nvPr/>
         </p:nvSpPr>

--- a/site/public/img/figures.pptx
+++ b/site/public/img/figures.pptx
@@ -24,6 +24,12 @@
     <p:sldId id="272" r:id="rId23"/>
     <p:sldId id="273" r:id="rId24"/>
     <p:sldId id="274" r:id="rId25"/>
+    <p:sldId id="275" r:id="rId26"/>
+    <p:sldId id="276" r:id="rId27"/>
+    <p:sldId id="277" r:id="rId28"/>
+    <p:sldId id="278" r:id="rId29"/>
+    <p:sldId id="279" r:id="rId30"/>
+    <p:sldId id="280" r:id="rId31"/>
   </p:sldIdLst>
   <p:sldSz cx="11430000" cy="6000750" type="screen4x3"/>
   <p:notesSz cx="6858000" cy="9144000"/>
@@ -18546,6 +18552,7637 @@
       <p:sp>
         <p:nvSpPr>
           <p:cNvPr id="29" name="TextBox 28"/>
+          <p:cNvSpPr txBox="1"/>
+          <p:nvPr/>
+        </p:nvSpPr>
+        <p:spPr>
+          <a:xfrm>
+            <a:off x="7962900" y="5676900"/>
+            <a:ext cx="2857500" cy="209550"/>
+          </a:xfrm>
+          <a:prstGeom prst="rect">
+            <a:avLst/>
+          </a:prstGeom>
+          <a:noFill/>
+        </p:spPr>
+        <p:txBody>
+          <a:bodyPr wrap="none" lIns="0" rIns="0" tIns="0" bIns="0" anchor="ctr">
+            <a:spAutoFit/>
+          </a:bodyPr>
+          <a:lstStyle/>
+          <a:p>
+            <a:pPr algn="r"/>
+            <a:r>
+              <a:rPr sz="1050" b="0">
+                <a:solidFill>
+                  <a:srgbClr val="6A717B"/>
+                </a:solidFill>
+                <a:latin typeface="Yu Gothic UI"/>
+              </a:rPr>
+              <a:t>寸法で選ぶ　sunpou.nexeed-lab.com</a:t>
+            </a:r>
+          </a:p>
+        </p:txBody>
+      </p:sp>
+    </p:spTree>
+  </p:cSld>
+  <p:clrMapOvr>
+    <a:masterClrMapping/>
+  </p:clrMapOvr>
+</p:sld>
+</file>
+
+<file path=ppt/slides/slide20.xml><?xml version="1.0" encoding="utf-8"?>
+<p:sld xmlns:a="http://schemas.openxmlformats.org/drawingml/2006/main" xmlns:p="http://schemas.openxmlformats.org/presentationml/2006/main" xmlns:r="http://schemas.openxmlformats.org/officeDocument/2006/relationships">
+  <p:cSld>
+    <p:spTree>
+      <p:nvGrpSpPr>
+        <p:cNvPr id="1" name=""/>
+        <p:cNvGrpSpPr/>
+        <p:nvPr/>
+      </p:nvGrpSpPr>
+      <p:grpSpPr/>
+      <p:sp>
+        <p:nvSpPr>
+          <p:cNvPr id="2" name="Rectangle 1"/>
+          <p:cNvSpPr/>
+          <p:nvPr/>
+        </p:nvSpPr>
+        <p:spPr>
+          <a:xfrm>
+            <a:off x="0" y="0"/>
+            <a:ext cx="11430000" cy="6000750"/>
+          </a:xfrm>
+          <a:prstGeom prst="rect">
+            <a:avLst/>
+          </a:prstGeom>
+          <a:solidFill>
+            <a:srgbClr val="FCFCFC"/>
+          </a:solidFill>
+          <a:ln>
+            <a:noFill/>
+          </a:ln>
+          <a:effectLst/>
+        </p:spPr>
+        <p:txBody>
+          <a:bodyPr rtlCol="0" anchor="ctr"/>
+          <a:lstStyle/>
+          <a:p>
+            <a:pPr algn="ctr"/>
+          </a:p>
+        </p:txBody>
+      </p:sp>
+      <p:sp>
+        <p:nvSpPr>
+          <p:cNvPr id="3" name="Rectangle 2"/>
+          <p:cNvSpPr/>
+          <p:nvPr/>
+        </p:nvSpPr>
+        <p:spPr>
+          <a:xfrm>
+            <a:off x="0" y="0"/>
+            <a:ext cx="114300" cy="6000750"/>
+          </a:xfrm>
+          <a:prstGeom prst="rect">
+            <a:avLst/>
+          </a:prstGeom>
+          <a:solidFill>
+            <a:srgbClr val="014172"/>
+          </a:solidFill>
+          <a:ln>
+            <a:noFill/>
+          </a:ln>
+          <a:effectLst/>
+        </p:spPr>
+        <p:txBody>
+          <a:bodyPr rtlCol="0" anchor="ctr"/>
+          <a:lstStyle/>
+          <a:p>
+            <a:pPr algn="ctr"/>
+          </a:p>
+        </p:txBody>
+      </p:sp>
+      <p:sp>
+        <p:nvSpPr>
+          <p:cNvPr id="4" name="Rectangle 3"/>
+          <p:cNvSpPr/>
+          <p:nvPr/>
+        </p:nvSpPr>
+        <p:spPr>
+          <a:xfrm>
+            <a:off x="0" y="0"/>
+            <a:ext cx="11430000" cy="1504950"/>
+          </a:xfrm>
+          <a:prstGeom prst="rect">
+            <a:avLst/>
+          </a:prstGeom>
+          <a:solidFill>
+            <a:srgbClr val="014172"/>
+          </a:solidFill>
+          <a:ln>
+            <a:noFill/>
+          </a:ln>
+          <a:effectLst/>
+        </p:spPr>
+        <p:txBody>
+          <a:bodyPr rtlCol="0" anchor="ctr"/>
+          <a:lstStyle/>
+          <a:p>
+            <a:pPr algn="ctr"/>
+          </a:p>
+        </p:txBody>
+      </p:sp>
+      <p:sp>
+        <p:nvSpPr>
+          <p:cNvPr id="5" name="TextBox 4"/>
+          <p:cNvSpPr txBox="1"/>
+          <p:nvPr/>
+        </p:nvSpPr>
+        <p:spPr>
+          <a:xfrm>
+            <a:off x="609600" y="361950"/>
+            <a:ext cx="7429500" cy="476250"/>
+          </a:xfrm>
+          <a:prstGeom prst="rect">
+            <a:avLst/>
+          </a:prstGeom>
+          <a:noFill/>
+        </p:spPr>
+        <p:txBody>
+          <a:bodyPr wrap="none" lIns="0" rIns="0" tIns="0" bIns="0" anchor="ctr">
+            <a:spAutoFit/>
+          </a:bodyPr>
+          <a:lstStyle/>
+          <a:p>
+            <a:pPr algn="l"/>
+            <a:r>
+              <a:rPr sz="3000" b="1">
+                <a:solidFill>
+                  <a:srgbClr val="FFFFFF"/>
+                </a:solidFill>
+                <a:latin typeface="Yu Gothic UI"/>
+              </a:rPr>
+              <a:t>1.5L も 2L とほぼ同じ高さ</a:t>
+            </a:r>
+          </a:p>
+        </p:txBody>
+      </p:sp>
+      <p:sp>
+        <p:nvSpPr>
+          <p:cNvPr id="6" name="TextBox 5"/>
+          <p:cNvSpPr txBox="1"/>
+          <p:nvPr/>
+        </p:nvSpPr>
+        <p:spPr>
+          <a:xfrm>
+            <a:off x="609600" y="876300"/>
+            <a:ext cx="7429500" cy="247650"/>
+          </a:xfrm>
+          <a:prstGeom prst="rect">
+            <a:avLst/>
+          </a:prstGeom>
+          <a:noFill/>
+        </p:spPr>
+        <p:txBody>
+          <a:bodyPr wrap="none" lIns="0" rIns="0" tIns="0" bIns="0" anchor="ctr">
+            <a:spAutoFit/>
+          </a:bodyPr>
+          <a:lstStyle/>
+          <a:p>
+            <a:pPr algn="l"/>
+            <a:r>
+              <a:rPr sz="1425" b="0">
+                <a:solidFill>
+                  <a:srgbClr val="DAE7F2"/>
+                </a:solidFill>
+                <a:latin typeface="Yu Gothic UI"/>
+              </a:rPr>
+              <a:t>棒がボトルの全高、線がクーラーボックスの内寸の深さ</a:t>
+            </a:r>
+          </a:p>
+        </p:txBody>
+      </p:sp>
+      <p:sp>
+        <p:nvSpPr>
+          <p:cNvPr id="7" name="Rounded Rectangle 6"/>
+          <p:cNvSpPr/>
+          <p:nvPr/>
+        </p:nvSpPr>
+        <p:spPr>
+          <a:xfrm>
+            <a:off x="8305800" y="247650"/>
+            <a:ext cx="2514600" cy="1009650"/>
+          </a:xfrm>
+          <a:prstGeom prst="roundRect">
+            <a:avLst>
+              <a:gd name="adj" fmla="val 12000"/>
+            </a:avLst>
+          </a:prstGeom>
+          <a:solidFill>
+            <a:srgbClr val="FFFFFF"/>
+          </a:solidFill>
+          <a:ln>
+            <a:noFill/>
+          </a:ln>
+          <a:effectLst>
+            <a:outerShdw blurRad="254000" dist="63500" dir="5400000" rotWithShape="0">
+              <a:srgbClr val="0B2B45">
+                <a:alpha val="30000"/>
+              </a:srgbClr>
+            </a:outerShdw>
+          </a:effectLst>
+        </p:spPr>
+        <p:txBody>
+          <a:bodyPr rtlCol="0" anchor="ctr"/>
+          <a:lstStyle/>
+          <a:p>
+            <a:pPr algn="ctr"/>
+          </a:p>
+        </p:txBody>
+      </p:sp>
+      <p:sp>
+        <p:nvSpPr>
+          <p:cNvPr id="8" name="TextBox 7"/>
+          <p:cNvSpPr txBox="1"/>
+          <p:nvPr/>
+        </p:nvSpPr>
+        <p:spPr>
+          <a:xfrm>
+            <a:off x="8515350" y="400050"/>
+            <a:ext cx="2133600" cy="209550"/>
+          </a:xfrm>
+          <a:prstGeom prst="rect">
+            <a:avLst/>
+          </a:prstGeom>
+          <a:noFill/>
+        </p:spPr>
+        <p:txBody>
+          <a:bodyPr wrap="none" lIns="0" rIns="0" tIns="0" bIns="0" anchor="ctr">
+            <a:spAutoFit/>
+          </a:bodyPr>
+          <a:lstStyle/>
+          <a:p>
+            <a:pPr algn="l"/>
+            <a:r>
+              <a:rPr sz="1125" b="0">
+                <a:solidFill>
+                  <a:srgbClr val="6A717B"/>
+                </a:solidFill>
+                <a:latin typeface="Yu Gothic UI"/>
+              </a:rPr>
+              <a:t>立つのは深さ</a:t>
+            </a:r>
+          </a:p>
+        </p:txBody>
+      </p:sp>
+      <p:sp>
+        <p:nvSpPr>
+          <p:cNvPr id="9" name="TextBox 8"/>
+          <p:cNvSpPr txBox="1"/>
+          <p:nvPr/>
+        </p:nvSpPr>
+        <p:spPr>
+          <a:xfrm>
+            <a:off x="8515350" y="647700"/>
+            <a:ext cx="2133600" cy="533400"/>
+          </a:xfrm>
+          <a:prstGeom prst="rect">
+            <a:avLst/>
+          </a:prstGeom>
+          <a:noFill/>
+        </p:spPr>
+        <p:txBody>
+          <a:bodyPr wrap="none" lIns="0" rIns="0" tIns="0" bIns="0" anchor="ctr">
+            <a:spAutoFit/>
+          </a:bodyPr>
+          <a:lstStyle/>
+          <a:p>
+            <a:pPr algn="l"/>
+            <a:r>
+              <a:rPr sz="3900" b="1">
+                <a:solidFill>
+                  <a:srgbClr val="014172"/>
+                </a:solidFill>
+                <a:latin typeface="Yu Gothic UI"/>
+              </a:rPr>
+              <a:t>310</a:t>
+            </a:r>
+            <a:r>
+              <a:rPr sz="1950" b="1">
+                <a:solidFill>
+                  <a:srgbClr val="014172"/>
+                </a:solidFill>
+                <a:latin typeface="Yu Gothic UI"/>
+              </a:rPr>
+              <a:t>mm</a:t>
+            </a:r>
+          </a:p>
+        </p:txBody>
+      </p:sp>
+      <p:sp>
+        <p:nvSpPr>
+          <p:cNvPr id="10" name="Rectangle 9"/>
+          <p:cNvSpPr/>
+          <p:nvPr/>
+        </p:nvSpPr>
+        <p:spPr>
+          <a:xfrm>
+            <a:off x="495300" y="1771650"/>
+            <a:ext cx="10439400" cy="476250"/>
+          </a:xfrm>
+          <a:prstGeom prst="rect">
+            <a:avLst/>
+          </a:prstGeom>
+          <a:solidFill>
+            <a:srgbClr val="F2F5F8"/>
+          </a:solidFill>
+          <a:ln>
+            <a:noFill/>
+          </a:ln>
+          <a:effectLst/>
+        </p:spPr>
+        <p:txBody>
+          <a:bodyPr rtlCol="0" anchor="ctr"/>
+          <a:lstStyle/>
+          <a:p>
+            <a:pPr algn="ctr"/>
+          </a:p>
+        </p:txBody>
+      </p:sp>
+      <p:sp>
+        <p:nvSpPr>
+          <p:cNvPr id="11" name="Rectangle 10"/>
+          <p:cNvSpPr/>
+          <p:nvPr/>
+        </p:nvSpPr>
+        <p:spPr>
+          <a:xfrm>
+            <a:off x="495300" y="2324100"/>
+            <a:ext cx="10439400" cy="476250"/>
+          </a:xfrm>
+          <a:prstGeom prst="rect">
+            <a:avLst/>
+          </a:prstGeom>
+          <a:solidFill>
+            <a:srgbClr val="FCFCFC"/>
+          </a:solidFill>
+          <a:ln>
+            <a:noFill/>
+          </a:ln>
+          <a:effectLst/>
+        </p:spPr>
+        <p:txBody>
+          <a:bodyPr rtlCol="0" anchor="ctr"/>
+          <a:lstStyle/>
+          <a:p>
+            <a:pPr algn="ctr"/>
+          </a:p>
+        </p:txBody>
+      </p:sp>
+      <p:sp>
+        <p:nvSpPr>
+          <p:cNvPr id="12" name="Rectangle 11"/>
+          <p:cNvSpPr/>
+          <p:nvPr/>
+        </p:nvSpPr>
+        <p:spPr>
+          <a:xfrm>
+            <a:off x="495300" y="2876550"/>
+            <a:ext cx="10439400" cy="476250"/>
+          </a:xfrm>
+          <a:prstGeom prst="rect">
+            <a:avLst/>
+          </a:prstGeom>
+          <a:solidFill>
+            <a:srgbClr val="F2F5F8"/>
+          </a:solidFill>
+          <a:ln>
+            <a:noFill/>
+          </a:ln>
+          <a:effectLst/>
+        </p:spPr>
+        <p:txBody>
+          <a:bodyPr rtlCol="0" anchor="ctr"/>
+          <a:lstStyle/>
+          <a:p>
+            <a:pPr algn="ctr"/>
+          </a:p>
+        </p:txBody>
+      </p:sp>
+      <p:sp>
+        <p:nvSpPr>
+          <p:cNvPr id="13" name="Rectangle 12"/>
+          <p:cNvSpPr/>
+          <p:nvPr/>
+        </p:nvSpPr>
+        <p:spPr>
+          <a:xfrm>
+            <a:off x="495300" y="3429000"/>
+            <a:ext cx="10439400" cy="476250"/>
+          </a:xfrm>
+          <a:prstGeom prst="rect">
+            <a:avLst/>
+          </a:prstGeom>
+          <a:solidFill>
+            <a:srgbClr val="FCFCFC"/>
+          </a:solidFill>
+          <a:ln>
+            <a:noFill/>
+          </a:ln>
+          <a:effectLst/>
+        </p:spPr>
+        <p:txBody>
+          <a:bodyPr rtlCol="0" anchor="ctr"/>
+          <a:lstStyle/>
+          <a:p>
+            <a:pPr algn="ctr"/>
+          </a:p>
+        </p:txBody>
+      </p:sp>
+      <p:sp>
+        <p:nvSpPr>
+          <p:cNvPr id="14" name="Rectangle 13"/>
+          <p:cNvSpPr/>
+          <p:nvPr/>
+        </p:nvSpPr>
+        <p:spPr>
+          <a:xfrm>
+            <a:off x="495300" y="3981450"/>
+            <a:ext cx="10439400" cy="476250"/>
+          </a:xfrm>
+          <a:prstGeom prst="rect">
+            <a:avLst/>
+          </a:prstGeom>
+          <a:solidFill>
+            <a:srgbClr val="E6EEF6"/>
+          </a:solidFill>
+          <a:ln>
+            <a:noFill/>
+          </a:ln>
+          <a:effectLst/>
+        </p:spPr>
+        <p:txBody>
+          <a:bodyPr rtlCol="0" anchor="ctr"/>
+          <a:lstStyle/>
+          <a:p>
+            <a:pPr algn="ctr"/>
+          </a:p>
+        </p:txBody>
+      </p:sp>
+      <p:sp>
+        <p:nvSpPr>
+          <p:cNvPr id="15" name="Rectangle 14"/>
+          <p:cNvSpPr/>
+          <p:nvPr/>
+        </p:nvSpPr>
+        <p:spPr>
+          <a:xfrm>
+            <a:off x="495300" y="3981450"/>
+            <a:ext cx="47625" cy="476250"/>
+          </a:xfrm>
+          <a:prstGeom prst="rect">
+            <a:avLst/>
+          </a:prstGeom>
+          <a:solidFill>
+            <a:srgbClr val="014172"/>
+          </a:solidFill>
+          <a:ln>
+            <a:noFill/>
+          </a:ln>
+          <a:effectLst/>
+        </p:spPr>
+        <p:txBody>
+          <a:bodyPr rtlCol="0" anchor="ctr"/>
+          <a:lstStyle/>
+          <a:p>
+            <a:pPr algn="ctr"/>
+          </a:p>
+        </p:txBody>
+      </p:sp>
+      <p:sp>
+        <p:nvSpPr>
+          <p:cNvPr id="16" name="Rounded Rectangle 15"/>
+          <p:cNvSpPr/>
+          <p:nvPr/>
+        </p:nvSpPr>
+        <p:spPr>
+          <a:xfrm>
+            <a:off x="4572000" y="1885950"/>
+            <a:ext cx="3248025" cy="266700"/>
+          </a:xfrm>
+          <a:prstGeom prst="roundRect">
+            <a:avLst>
+              <a:gd name="adj" fmla="val 30000"/>
+            </a:avLst>
+          </a:prstGeom>
+          <a:gradFill rotWithShape="1">
+            <a:gsLst>
+              <a:gs pos="0">
+                <a:srgbClr val="F2F5F8"/>
+              </a:gs>
+              <a:gs pos="100000">
+                <a:srgbClr val="F2F5F8"/>
+              </a:gs>
+            </a:gsLst>
+            <a:lin scaled="0" ang="16200000"/>
+          </a:gradFill>
+          <a:ln w="19050">
+            <a:solidFill>
+              <a:srgbClr val="6A717B"/>
+            </a:solidFill>
+          </a:ln>
+          <a:effectLst/>
+        </p:spPr>
+        <p:txBody>
+          <a:bodyPr rtlCol="0" anchor="ctr"/>
+          <a:lstStyle/>
+          <a:p>
+            <a:pPr algn="ctr"/>
+          </a:p>
+        </p:txBody>
+      </p:sp>
+      <p:sp>
+        <p:nvSpPr>
+          <p:cNvPr id="17" name="TextBox 16"/>
+          <p:cNvSpPr txBox="1"/>
+          <p:nvPr/>
+        </p:nvSpPr>
+        <p:spPr>
+          <a:xfrm>
+            <a:off x="704850" y="1885950"/>
+            <a:ext cx="3619500" cy="266700"/>
+          </a:xfrm>
+          <a:prstGeom prst="rect">
+            <a:avLst/>
+          </a:prstGeom>
+          <a:noFill/>
+        </p:spPr>
+        <p:txBody>
+          <a:bodyPr wrap="none" lIns="0" rIns="0" tIns="0" bIns="0" anchor="ctr">
+            <a:spAutoFit/>
+          </a:bodyPr>
+          <a:lstStyle/>
+          <a:p>
+            <a:pPr algn="l"/>
+            <a:r>
+              <a:rPr sz="1200" b="1">
+                <a:solidFill>
+                  <a:srgbClr val="2E2E33"/>
+                </a:solidFill>
+                <a:latin typeface="Yu Gothic UI"/>
+              </a:rPr>
+              <a:t>ダイワ10L・20L　内寸の深さ 220mm</a:t>
+            </a:r>
+          </a:p>
+        </p:txBody>
+      </p:sp>
+      <p:sp>
+        <p:nvSpPr>
+          <p:cNvPr id="18" name="TextBox 17"/>
+          <p:cNvSpPr txBox="1"/>
+          <p:nvPr/>
+        </p:nvSpPr>
+        <p:spPr>
+          <a:xfrm>
+            <a:off x="7934325" y="1885950"/>
+            <a:ext cx="1524000" cy="266700"/>
+          </a:xfrm>
+          <a:prstGeom prst="rect">
+            <a:avLst/>
+          </a:prstGeom>
+          <a:noFill/>
+        </p:spPr>
+        <p:txBody>
+          <a:bodyPr wrap="none" lIns="0" rIns="0" tIns="0" bIns="0" anchor="ctr">
+            <a:spAutoFit/>
+          </a:bodyPr>
+          <a:lstStyle/>
+          <a:p>
+            <a:pPr algn="l"/>
+            <a:r>
+              <a:rPr sz="1200" b="1">
+                <a:solidFill>
+                  <a:srgbClr val="6A717B"/>
+                </a:solidFill>
+                <a:latin typeface="Yu Gothic UI"/>
+              </a:rPr>
+              <a:t>立たない</a:t>
+            </a:r>
+          </a:p>
+        </p:txBody>
+      </p:sp>
+      <p:sp>
+        <p:nvSpPr>
+          <p:cNvPr id="19" name="Rounded Rectangle 18"/>
+          <p:cNvSpPr/>
+          <p:nvPr/>
+        </p:nvSpPr>
+        <p:spPr>
+          <a:xfrm>
+            <a:off x="4572000" y="2438400"/>
+            <a:ext cx="3395662" cy="266700"/>
+          </a:xfrm>
+          <a:prstGeom prst="roundRect">
+            <a:avLst>
+              <a:gd name="adj" fmla="val 30000"/>
+            </a:avLst>
+          </a:prstGeom>
+          <a:gradFill rotWithShape="1">
+            <a:gsLst>
+              <a:gs pos="0">
+                <a:srgbClr val="F2F5F8"/>
+              </a:gs>
+              <a:gs pos="100000">
+                <a:srgbClr val="F2F5F8"/>
+              </a:gs>
+            </a:gsLst>
+            <a:lin scaled="0" ang="16200000"/>
+          </a:gradFill>
+          <a:ln w="19050">
+            <a:solidFill>
+              <a:srgbClr val="6A717B"/>
+            </a:solidFill>
+          </a:ln>
+          <a:effectLst/>
+        </p:spPr>
+        <p:txBody>
+          <a:bodyPr rtlCol="0" anchor="ctr"/>
+          <a:lstStyle/>
+          <a:p>
+            <a:pPr algn="ctr"/>
+          </a:p>
+        </p:txBody>
+      </p:sp>
+      <p:sp>
+        <p:nvSpPr>
+          <p:cNvPr id="20" name="TextBox 19"/>
+          <p:cNvSpPr txBox="1"/>
+          <p:nvPr/>
+        </p:nvSpPr>
+        <p:spPr>
+          <a:xfrm>
+            <a:off x="704850" y="2438400"/>
+            <a:ext cx="3619500" cy="266700"/>
+          </a:xfrm>
+          <a:prstGeom prst="rect">
+            <a:avLst/>
+          </a:prstGeom>
+          <a:noFill/>
+        </p:spPr>
+        <p:txBody>
+          <a:bodyPr wrap="none" lIns="0" rIns="0" tIns="0" bIns="0" anchor="ctr">
+            <a:spAutoFit/>
+          </a:bodyPr>
+          <a:lstStyle/>
+          <a:p>
+            <a:pPr algn="l"/>
+            <a:r>
+              <a:rPr sz="1200" b="1">
+                <a:solidFill>
+                  <a:srgbClr val="2E2E33"/>
+                </a:solidFill>
+                <a:latin typeface="Yu Gothic UI"/>
+              </a:rPr>
+              <a:t>ダイワ15L　内寸の深さ 230mm</a:t>
+            </a:r>
+          </a:p>
+        </p:txBody>
+      </p:sp>
+      <p:sp>
+        <p:nvSpPr>
+          <p:cNvPr id="21" name="TextBox 20"/>
+          <p:cNvSpPr txBox="1"/>
+          <p:nvPr/>
+        </p:nvSpPr>
+        <p:spPr>
+          <a:xfrm>
+            <a:off x="8081962" y="2438400"/>
+            <a:ext cx="1524000" cy="266700"/>
+          </a:xfrm>
+          <a:prstGeom prst="rect">
+            <a:avLst/>
+          </a:prstGeom>
+          <a:noFill/>
+        </p:spPr>
+        <p:txBody>
+          <a:bodyPr wrap="none" lIns="0" rIns="0" tIns="0" bIns="0" anchor="ctr">
+            <a:spAutoFit/>
+          </a:bodyPr>
+          <a:lstStyle/>
+          <a:p>
+            <a:pPr algn="l"/>
+            <a:r>
+              <a:rPr sz="1200" b="1">
+                <a:solidFill>
+                  <a:srgbClr val="6A717B"/>
+                </a:solidFill>
+                <a:latin typeface="Yu Gothic UI"/>
+              </a:rPr>
+              <a:t>立たない</a:t>
+            </a:r>
+          </a:p>
+        </p:txBody>
+      </p:sp>
+      <p:sp>
+        <p:nvSpPr>
+          <p:cNvPr id="22" name="Rounded Rectangle 21"/>
+          <p:cNvSpPr/>
+          <p:nvPr/>
+        </p:nvSpPr>
+        <p:spPr>
+          <a:xfrm>
+            <a:off x="4572000" y="2990850"/>
+            <a:ext cx="3587591" cy="266700"/>
+          </a:xfrm>
+          <a:prstGeom prst="roundRect">
+            <a:avLst>
+              <a:gd name="adj" fmla="val 30000"/>
+            </a:avLst>
+          </a:prstGeom>
+          <a:gradFill rotWithShape="1">
+            <a:gsLst>
+              <a:gs pos="0">
+                <a:srgbClr val="F2F5F8"/>
+              </a:gs>
+              <a:gs pos="100000">
+                <a:srgbClr val="F2F5F8"/>
+              </a:gs>
+            </a:gsLst>
+            <a:lin scaled="0" ang="16200000"/>
+          </a:gradFill>
+          <a:ln w="19050">
+            <a:solidFill>
+              <a:srgbClr val="6A717B"/>
+            </a:solidFill>
+          </a:ln>
+          <a:effectLst/>
+        </p:spPr>
+        <p:txBody>
+          <a:bodyPr rtlCol="0" anchor="ctr"/>
+          <a:lstStyle/>
+          <a:p>
+            <a:pPr algn="ctr"/>
+          </a:p>
+        </p:txBody>
+      </p:sp>
+      <p:sp>
+        <p:nvSpPr>
+          <p:cNvPr id="23" name="TextBox 22"/>
+          <p:cNvSpPr txBox="1"/>
+          <p:nvPr/>
+        </p:nvSpPr>
+        <p:spPr>
+          <a:xfrm>
+            <a:off x="704850" y="2990850"/>
+            <a:ext cx="3619500" cy="266700"/>
+          </a:xfrm>
+          <a:prstGeom prst="rect">
+            <a:avLst/>
+          </a:prstGeom>
+          <a:noFill/>
+        </p:spPr>
+        <p:txBody>
+          <a:bodyPr wrap="none" lIns="0" rIns="0" tIns="0" bIns="0" anchor="ctr">
+            <a:spAutoFit/>
+          </a:bodyPr>
+          <a:lstStyle/>
+          <a:p>
+            <a:pPr algn="l"/>
+            <a:r>
+              <a:rPr sz="1200" b="1">
+                <a:solidFill>
+                  <a:srgbClr val="2E2E33"/>
+                </a:solidFill>
+                <a:latin typeface="Yu Gothic UI"/>
+              </a:rPr>
+              <a:t>ロゴス・アイリス　内寸の深さ 243mm</a:t>
+            </a:r>
+          </a:p>
+        </p:txBody>
+      </p:sp>
+      <p:sp>
+        <p:nvSpPr>
+          <p:cNvPr id="24" name="TextBox 23"/>
+          <p:cNvSpPr txBox="1"/>
+          <p:nvPr/>
+        </p:nvSpPr>
+        <p:spPr>
+          <a:xfrm>
+            <a:off x="8273891" y="2990850"/>
+            <a:ext cx="1524000" cy="266700"/>
+          </a:xfrm>
+          <a:prstGeom prst="rect">
+            <a:avLst/>
+          </a:prstGeom>
+          <a:noFill/>
+        </p:spPr>
+        <p:txBody>
+          <a:bodyPr wrap="none" lIns="0" rIns="0" tIns="0" bIns="0" anchor="ctr">
+            <a:spAutoFit/>
+          </a:bodyPr>
+          <a:lstStyle/>
+          <a:p>
+            <a:pPr algn="l"/>
+            <a:r>
+              <a:rPr sz="1200" b="1">
+                <a:solidFill>
+                  <a:srgbClr val="6A717B"/>
+                </a:solidFill>
+                <a:latin typeface="Yu Gothic UI"/>
+              </a:rPr>
+              <a:t>立たない</a:t>
+            </a:r>
+          </a:p>
+        </p:txBody>
+      </p:sp>
+      <p:sp>
+        <p:nvSpPr>
+          <p:cNvPr id="25" name="Rounded Rectangle 24"/>
+          <p:cNvSpPr/>
+          <p:nvPr/>
+        </p:nvSpPr>
+        <p:spPr>
+          <a:xfrm>
+            <a:off x="4572000" y="3543300"/>
+            <a:ext cx="3764756" cy="266700"/>
+          </a:xfrm>
+          <a:prstGeom prst="roundRect">
+            <a:avLst>
+              <a:gd name="adj" fmla="val 30000"/>
+            </a:avLst>
+          </a:prstGeom>
+          <a:gradFill rotWithShape="1">
+            <a:gsLst>
+              <a:gs pos="0">
+                <a:srgbClr val="F2F5F8"/>
+              </a:gs>
+              <a:gs pos="100000">
+                <a:srgbClr val="F2F5F8"/>
+              </a:gs>
+            </a:gsLst>
+            <a:lin scaled="0" ang="16200000"/>
+          </a:gradFill>
+          <a:ln w="19050">
+            <a:solidFill>
+              <a:srgbClr val="6A717B"/>
+            </a:solidFill>
+          </a:ln>
+          <a:effectLst/>
+        </p:spPr>
+        <p:txBody>
+          <a:bodyPr rtlCol="0" anchor="ctr"/>
+          <a:lstStyle/>
+          <a:p>
+            <a:pPr algn="ctr"/>
+          </a:p>
+        </p:txBody>
+      </p:sp>
+      <p:sp>
+        <p:nvSpPr>
+          <p:cNvPr id="26" name="TextBox 25"/>
+          <p:cNvSpPr txBox="1"/>
+          <p:nvPr/>
+        </p:nvSpPr>
+        <p:spPr>
+          <a:xfrm>
+            <a:off x="704850" y="3543300"/>
+            <a:ext cx="3619500" cy="266700"/>
+          </a:xfrm>
+          <a:prstGeom prst="rect">
+            <a:avLst/>
+          </a:prstGeom>
+          <a:noFill/>
+        </p:spPr>
+        <p:txBody>
+          <a:bodyPr wrap="none" lIns="0" rIns="0" tIns="0" bIns="0" anchor="ctr">
+            <a:spAutoFit/>
+          </a:bodyPr>
+          <a:lstStyle/>
+          <a:p>
+            <a:pPr algn="l"/>
+            <a:r>
+              <a:rPr sz="1200" b="1">
+                <a:solidFill>
+                  <a:srgbClr val="2E2E33"/>
+                </a:solidFill>
+                <a:latin typeface="Yu Gothic UI"/>
+              </a:rPr>
+              <a:t>ダイワ25L　内寸の深さ 255mm</a:t>
+            </a:r>
+          </a:p>
+        </p:txBody>
+      </p:sp>
+      <p:sp>
+        <p:nvSpPr>
+          <p:cNvPr id="27" name="TextBox 26"/>
+          <p:cNvSpPr txBox="1"/>
+          <p:nvPr/>
+        </p:nvSpPr>
+        <p:spPr>
+          <a:xfrm>
+            <a:off x="8451056" y="3543300"/>
+            <a:ext cx="1524000" cy="266700"/>
+          </a:xfrm>
+          <a:prstGeom prst="rect">
+            <a:avLst/>
+          </a:prstGeom>
+          <a:noFill/>
+        </p:spPr>
+        <p:txBody>
+          <a:bodyPr wrap="none" lIns="0" rIns="0" tIns="0" bIns="0" anchor="ctr">
+            <a:spAutoFit/>
+          </a:bodyPr>
+          <a:lstStyle/>
+          <a:p>
+            <a:pPr algn="l"/>
+            <a:r>
+              <a:rPr sz="1200" b="1">
+                <a:solidFill>
+                  <a:srgbClr val="6A717B"/>
+                </a:solidFill>
+                <a:latin typeface="Yu Gothic UI"/>
+              </a:rPr>
+              <a:t>立たない</a:t>
+            </a:r>
+          </a:p>
+        </p:txBody>
+      </p:sp>
+      <p:sp>
+        <p:nvSpPr>
+          <p:cNvPr id="28" name="Rounded Rectangle 27"/>
+          <p:cNvSpPr/>
+          <p:nvPr/>
+        </p:nvSpPr>
+        <p:spPr>
+          <a:xfrm>
+            <a:off x="4572000" y="4095750"/>
+            <a:ext cx="4576762" cy="266700"/>
+          </a:xfrm>
+          <a:prstGeom prst="roundRect">
+            <a:avLst>
+              <a:gd name="adj" fmla="val 30000"/>
+            </a:avLst>
+          </a:prstGeom>
+          <a:gradFill rotWithShape="1">
+            <a:gsLst>
+              <a:gs pos="0">
+                <a:srgbClr val="EEF4F9"/>
+              </a:gs>
+              <a:gs pos="100000">
+                <a:srgbClr val="DAE7F2"/>
+              </a:gs>
+            </a:gsLst>
+            <a:lin scaled="0" ang="16200000"/>
+          </a:gradFill>
+          <a:ln w="19050">
+            <a:solidFill>
+              <a:srgbClr val="014172"/>
+            </a:solidFill>
+          </a:ln>
+          <a:effectLst/>
+        </p:spPr>
+        <p:txBody>
+          <a:bodyPr rtlCol="0" anchor="ctr"/>
+          <a:lstStyle/>
+          <a:p>
+            <a:pPr algn="ctr"/>
+          </a:p>
+        </p:txBody>
+      </p:sp>
+      <p:sp>
+        <p:nvSpPr>
+          <p:cNvPr id="29" name="TextBox 28"/>
+          <p:cNvSpPr txBox="1"/>
+          <p:nvPr/>
+        </p:nvSpPr>
+        <p:spPr>
+          <a:xfrm>
+            <a:off x="704850" y="4095750"/>
+            <a:ext cx="3619500" cy="266700"/>
+          </a:xfrm>
+          <a:prstGeom prst="rect">
+            <a:avLst/>
+          </a:prstGeom>
+          <a:noFill/>
+        </p:spPr>
+        <p:txBody>
+          <a:bodyPr wrap="none" lIns="0" rIns="0" tIns="0" bIns="0" anchor="ctr">
+            <a:spAutoFit/>
+          </a:bodyPr>
+          <a:lstStyle/>
+          <a:p>
+            <a:pPr algn="l"/>
+            <a:r>
+              <a:rPr sz="1200" b="1">
+                <a:solidFill>
+                  <a:srgbClr val="2E2E33"/>
+                </a:solidFill>
+                <a:latin typeface="Yu Gothic UI"/>
+              </a:rPr>
+              <a:t>アイリス40L　内寸の深さ 310mm</a:t>
+            </a:r>
+          </a:p>
+        </p:txBody>
+      </p:sp>
+      <p:sp>
+        <p:nvSpPr>
+          <p:cNvPr id="30" name="TextBox 29"/>
+          <p:cNvSpPr txBox="1"/>
+          <p:nvPr/>
+        </p:nvSpPr>
+        <p:spPr>
+          <a:xfrm>
+            <a:off x="9263062" y="4095750"/>
+            <a:ext cx="1524000" cy="266700"/>
+          </a:xfrm>
+          <a:prstGeom prst="rect">
+            <a:avLst/>
+          </a:prstGeom>
+          <a:noFill/>
+        </p:spPr>
+        <p:txBody>
+          <a:bodyPr wrap="none" lIns="0" rIns="0" tIns="0" bIns="0" anchor="ctr">
+            <a:spAutoFit/>
+          </a:bodyPr>
+          <a:lstStyle/>
+          <a:p>
+            <a:pPr algn="l"/>
+            <a:r>
+              <a:rPr sz="1200" b="1">
+                <a:solidFill>
+                  <a:srgbClr val="014172"/>
+                </a:solidFill>
+                <a:latin typeface="Yu Gothic UI"/>
+              </a:rPr>
+              <a:t>2Lが立つ</a:t>
+            </a:r>
+          </a:p>
+        </p:txBody>
+      </p:sp>
+      <p:sp>
+        <p:nvSpPr>
+          <p:cNvPr id="31" name="Rectangle 30"/>
+          <p:cNvSpPr/>
+          <p:nvPr/>
+        </p:nvSpPr>
+        <p:spPr>
+          <a:xfrm>
+            <a:off x="9089708" y="1695450"/>
+            <a:ext cx="9525" cy="2686050"/>
+          </a:xfrm>
+          <a:prstGeom prst="rect">
+            <a:avLst/>
+          </a:prstGeom>
+          <a:noFill/>
+          <a:ln w="19050">
+            <a:solidFill>
+              <a:srgbClr val="A8410F"/>
+            </a:solidFill>
+            <a:prstDash val="dash"/>
+          </a:ln>
+          <a:effectLst/>
+        </p:spPr>
+        <p:txBody>
+          <a:bodyPr rtlCol="0" anchor="ctr"/>
+          <a:lstStyle/>
+          <a:p>
+            <a:pPr algn="ctr"/>
+          </a:p>
+        </p:txBody>
+      </p:sp>
+      <p:sp>
+        <p:nvSpPr>
+          <p:cNvPr id="32" name="TextBox 31"/>
+          <p:cNvSpPr txBox="1"/>
+          <p:nvPr/>
+        </p:nvSpPr>
+        <p:spPr>
+          <a:xfrm>
+            <a:off x="8708708" y="1447800"/>
+            <a:ext cx="3048000" cy="228600"/>
+          </a:xfrm>
+          <a:prstGeom prst="rect">
+            <a:avLst/>
+          </a:prstGeom>
+          <a:noFill/>
+        </p:spPr>
+        <p:txBody>
+          <a:bodyPr wrap="none" lIns="0" rIns="0" tIns="0" bIns="0" anchor="ctr">
+            <a:spAutoFit/>
+          </a:bodyPr>
+          <a:lstStyle/>
+          <a:p>
+            <a:pPr algn="l"/>
+            <a:r>
+              <a:rPr sz="1200" b="1">
+                <a:solidFill>
+                  <a:srgbClr val="A8410F"/>
+                </a:solidFill>
+                <a:latin typeface="Yu Gothic UI"/>
+              </a:rPr>
+              <a:t>2Lの全高 306mm</a:t>
+            </a:r>
+          </a:p>
+        </p:txBody>
+      </p:sp>
+      <p:sp>
+        <p:nvSpPr>
+          <p:cNvPr id="33" name="Rectangle 32"/>
+          <p:cNvSpPr/>
+          <p:nvPr/>
+        </p:nvSpPr>
+        <p:spPr>
+          <a:xfrm>
+            <a:off x="609600" y="5295900"/>
+            <a:ext cx="10210800" cy="9525"/>
+          </a:xfrm>
+          <a:prstGeom prst="rect">
+            <a:avLst/>
+          </a:prstGeom>
+          <a:solidFill>
+            <a:srgbClr val="E2E7EC"/>
+          </a:solidFill>
+          <a:ln>
+            <a:noFill/>
+          </a:ln>
+          <a:effectLst/>
+        </p:spPr>
+        <p:txBody>
+          <a:bodyPr rtlCol="0" anchor="ctr"/>
+          <a:lstStyle/>
+          <a:p>
+            <a:pPr algn="ctr"/>
+          </a:p>
+        </p:txBody>
+      </p:sp>
+      <p:sp>
+        <p:nvSpPr>
+          <p:cNvPr id="34" name="TextBox 33"/>
+          <p:cNvSpPr txBox="1"/>
+          <p:nvPr/>
+        </p:nvSpPr>
+        <p:spPr>
+          <a:xfrm>
+            <a:off x="609600" y="5429250"/>
+            <a:ext cx="7239000" cy="247650"/>
+          </a:xfrm>
+          <a:prstGeom prst="rect">
+            <a:avLst/>
+          </a:prstGeom>
+          <a:noFill/>
+        </p:spPr>
+        <p:txBody>
+          <a:bodyPr wrap="none" lIns="0" rIns="0" tIns="0" bIns="0" anchor="ctr">
+            <a:spAutoFit/>
+          </a:bodyPr>
+          <a:lstStyle/>
+          <a:p>
+            <a:pPr algn="l"/>
+            <a:r>
+              <a:rPr sz="1425" b="1">
+                <a:solidFill>
+                  <a:srgbClr val="2E2E33"/>
+                </a:solidFill>
+                <a:latin typeface="Yu Gothic UI"/>
+              </a:rPr>
+              <a:t>1.5L（305〜307.5mm）は 2L（305〜306mm）とほぼ同じ高さです。</a:t>
+            </a:r>
+          </a:p>
+        </p:txBody>
+      </p:sp>
+      <p:sp>
+        <p:nvSpPr>
+          <p:cNvPr id="35" name="TextBox 34"/>
+          <p:cNvSpPr txBox="1"/>
+          <p:nvPr/>
+        </p:nvSpPr>
+        <p:spPr>
+          <a:xfrm>
+            <a:off x="609600" y="5676900"/>
+            <a:ext cx="7620000" cy="209550"/>
+          </a:xfrm>
+          <a:prstGeom prst="rect">
+            <a:avLst/>
+          </a:prstGeom>
+          <a:noFill/>
+        </p:spPr>
+        <p:txBody>
+          <a:bodyPr wrap="none" lIns="0" rIns="0" tIns="0" bIns="0" anchor="ctr">
+            <a:spAutoFit/>
+          </a:bodyPr>
+          <a:lstStyle/>
+          <a:p>
+            <a:pPr algn="l"/>
+            <a:r>
+              <a:rPr sz="1050" b="0">
+                <a:solidFill>
+                  <a:srgbClr val="6A717B"/>
+                </a:solidFill>
+                <a:latin typeface="Yu Gothic UI"/>
+              </a:rPr>
+              <a:t>出典：ボトル＝料材開発／深さ＝各メーカー公式の内寸</a:t>
+            </a:r>
+          </a:p>
+        </p:txBody>
+      </p:sp>
+      <p:sp>
+        <p:nvSpPr>
+          <p:cNvPr id="36" name="TextBox 35"/>
+          <p:cNvSpPr txBox="1"/>
+          <p:nvPr/>
+        </p:nvSpPr>
+        <p:spPr>
+          <a:xfrm>
+            <a:off x="7962900" y="5676900"/>
+            <a:ext cx="2857500" cy="209550"/>
+          </a:xfrm>
+          <a:prstGeom prst="rect">
+            <a:avLst/>
+          </a:prstGeom>
+          <a:noFill/>
+        </p:spPr>
+        <p:txBody>
+          <a:bodyPr wrap="none" lIns="0" rIns="0" tIns="0" bIns="0" anchor="ctr">
+            <a:spAutoFit/>
+          </a:bodyPr>
+          <a:lstStyle/>
+          <a:p>
+            <a:pPr algn="r"/>
+            <a:r>
+              <a:rPr sz="1050" b="0">
+                <a:solidFill>
+                  <a:srgbClr val="6A717B"/>
+                </a:solidFill>
+                <a:latin typeface="Yu Gothic UI"/>
+              </a:rPr>
+              <a:t>寸法で選ぶ　sunpou.nexeed-lab.com</a:t>
+            </a:r>
+          </a:p>
+        </p:txBody>
+      </p:sp>
+    </p:spTree>
+  </p:cSld>
+  <p:clrMapOvr>
+    <a:masterClrMapping/>
+  </p:clrMapOvr>
+</p:sld>
+</file>
+
+<file path=ppt/slides/slide21.xml><?xml version="1.0" encoding="utf-8"?>
+<p:sld xmlns:a="http://schemas.openxmlformats.org/drawingml/2006/main" xmlns:p="http://schemas.openxmlformats.org/presentationml/2006/main" xmlns:r="http://schemas.openxmlformats.org/officeDocument/2006/relationships">
+  <p:cSld>
+    <p:spTree>
+      <p:nvGrpSpPr>
+        <p:cNvPr id="1" name=""/>
+        <p:cNvGrpSpPr/>
+        <p:nvPr/>
+      </p:nvGrpSpPr>
+      <p:grpSpPr/>
+      <p:sp>
+        <p:nvSpPr>
+          <p:cNvPr id="2" name="Rectangle 1"/>
+          <p:cNvSpPr/>
+          <p:nvPr/>
+        </p:nvSpPr>
+        <p:spPr>
+          <a:xfrm>
+            <a:off x="0" y="0"/>
+            <a:ext cx="11430000" cy="6000750"/>
+          </a:xfrm>
+          <a:prstGeom prst="rect">
+            <a:avLst/>
+          </a:prstGeom>
+          <a:solidFill>
+            <a:srgbClr val="FCFCFC"/>
+          </a:solidFill>
+          <a:ln>
+            <a:noFill/>
+          </a:ln>
+          <a:effectLst/>
+        </p:spPr>
+        <p:txBody>
+          <a:bodyPr rtlCol="0" anchor="ctr"/>
+          <a:lstStyle/>
+          <a:p>
+            <a:pPr algn="ctr"/>
+          </a:p>
+        </p:txBody>
+      </p:sp>
+      <p:sp>
+        <p:nvSpPr>
+          <p:cNvPr id="3" name="Rectangle 2"/>
+          <p:cNvSpPr/>
+          <p:nvPr/>
+        </p:nvSpPr>
+        <p:spPr>
+          <a:xfrm>
+            <a:off x="0" y="0"/>
+            <a:ext cx="114300" cy="6000750"/>
+          </a:xfrm>
+          <a:prstGeom prst="rect">
+            <a:avLst/>
+          </a:prstGeom>
+          <a:solidFill>
+            <a:srgbClr val="014172"/>
+          </a:solidFill>
+          <a:ln>
+            <a:noFill/>
+          </a:ln>
+          <a:effectLst/>
+        </p:spPr>
+        <p:txBody>
+          <a:bodyPr rtlCol="0" anchor="ctr"/>
+          <a:lstStyle/>
+          <a:p>
+            <a:pPr algn="ctr"/>
+          </a:p>
+        </p:txBody>
+      </p:sp>
+      <p:sp>
+        <p:nvSpPr>
+          <p:cNvPr id="4" name="Rectangle 3"/>
+          <p:cNvSpPr/>
+          <p:nvPr/>
+        </p:nvSpPr>
+        <p:spPr>
+          <a:xfrm>
+            <a:off x="0" y="0"/>
+            <a:ext cx="11430000" cy="1504950"/>
+          </a:xfrm>
+          <a:prstGeom prst="rect">
+            <a:avLst/>
+          </a:prstGeom>
+          <a:solidFill>
+            <a:srgbClr val="014172"/>
+          </a:solidFill>
+          <a:ln>
+            <a:noFill/>
+          </a:ln>
+          <a:effectLst/>
+        </p:spPr>
+        <p:txBody>
+          <a:bodyPr rtlCol="0" anchor="ctr"/>
+          <a:lstStyle/>
+          <a:p>
+            <a:pPr algn="ctr"/>
+          </a:p>
+        </p:txBody>
+      </p:sp>
+      <p:sp>
+        <p:nvSpPr>
+          <p:cNvPr id="5" name="TextBox 4"/>
+          <p:cNvSpPr txBox="1"/>
+          <p:nvPr/>
+        </p:nvSpPr>
+        <p:spPr>
+          <a:xfrm>
+            <a:off x="609600" y="361950"/>
+            <a:ext cx="7429500" cy="476250"/>
+          </a:xfrm>
+          <a:prstGeom prst="rect">
+            <a:avLst/>
+          </a:prstGeom>
+          <a:noFill/>
+        </p:spPr>
+        <p:txBody>
+          <a:bodyPr wrap="none" lIns="0" rIns="0" tIns="0" bIns="0" anchor="ctr">
+            <a:spAutoFit/>
+          </a:bodyPr>
+          <a:lstStyle/>
+          <a:p>
+            <a:pPr algn="l"/>
+            <a:r>
+              <a:rPr sz="3000" b="1">
+                <a:solidFill>
+                  <a:srgbClr val="FFFFFF"/>
+                </a:solidFill>
+                <a:latin typeface="Yu Gothic UI"/>
+              </a:rPr>
+              <a:t>床面積が同じでも本数は違う</a:t>
+            </a:r>
+          </a:p>
+        </p:txBody>
+      </p:sp>
+      <p:sp>
+        <p:nvSpPr>
+          <p:cNvPr id="6" name="TextBox 5"/>
+          <p:cNvSpPr txBox="1"/>
+          <p:nvPr/>
+        </p:nvSpPr>
+        <p:spPr>
+          <a:xfrm>
+            <a:off x="609600" y="876300"/>
+            <a:ext cx="7429500" cy="247650"/>
+          </a:xfrm>
+          <a:prstGeom prst="rect">
+            <a:avLst/>
+          </a:prstGeom>
+          <a:noFill/>
+        </p:spPr>
+        <p:txBody>
+          <a:bodyPr wrap="none" lIns="0" rIns="0" tIns="0" bIns="0" anchor="ctr">
+            <a:spAutoFit/>
+          </a:bodyPr>
+          <a:lstStyle/>
+          <a:p>
+            <a:pPr algn="l"/>
+            <a:r>
+              <a:rPr sz="1425" b="0">
+                <a:solidFill>
+                  <a:srgbClr val="DAE7F2"/>
+                </a:solidFill>
+                <a:latin typeface="Yu Gothic UI"/>
+              </a:rPr>
+              <a:t>どちらも 858cm² ／ 丸型ボトル 胴径 68.5mm ／ 灰色は割り切れない余り</a:t>
+            </a:r>
+          </a:p>
+        </p:txBody>
+      </p:sp>
+      <p:sp>
+        <p:nvSpPr>
+          <p:cNvPr id="7" name="Rounded Rectangle 6"/>
+          <p:cNvSpPr/>
+          <p:nvPr/>
+        </p:nvSpPr>
+        <p:spPr>
+          <a:xfrm>
+            <a:off x="8305800" y="247650"/>
+            <a:ext cx="2514600" cy="1009650"/>
+          </a:xfrm>
+          <a:prstGeom prst="roundRect">
+            <a:avLst>
+              <a:gd name="adj" fmla="val 12000"/>
+            </a:avLst>
+          </a:prstGeom>
+          <a:solidFill>
+            <a:srgbClr val="FFFFFF"/>
+          </a:solidFill>
+          <a:ln>
+            <a:noFill/>
+          </a:ln>
+          <a:effectLst>
+            <a:outerShdw blurRad="254000" dist="63500" dir="5400000" rotWithShape="0">
+              <a:srgbClr val="0B2B45">
+                <a:alpha val="30000"/>
+              </a:srgbClr>
+            </a:outerShdw>
+          </a:effectLst>
+        </p:spPr>
+        <p:txBody>
+          <a:bodyPr rtlCol="0" anchor="ctr"/>
+          <a:lstStyle/>
+          <a:p>
+            <a:pPr algn="ctr"/>
+          </a:p>
+        </p:txBody>
+      </p:sp>
+      <p:sp>
+        <p:nvSpPr>
+          <p:cNvPr id="8" name="TextBox 7"/>
+          <p:cNvSpPr txBox="1"/>
+          <p:nvPr/>
+        </p:nvSpPr>
+        <p:spPr>
+          <a:xfrm>
+            <a:off x="8515350" y="400050"/>
+            <a:ext cx="2133600" cy="209550"/>
+          </a:xfrm>
+          <a:prstGeom prst="rect">
+            <a:avLst/>
+          </a:prstGeom>
+          <a:noFill/>
+        </p:spPr>
+        <p:txBody>
+          <a:bodyPr wrap="none" lIns="0" rIns="0" tIns="0" bIns="0" anchor="ctr">
+            <a:spAutoFit/>
+          </a:bodyPr>
+          <a:lstStyle/>
+          <a:p>
+            <a:pPr algn="l"/>
+            <a:r>
+              <a:rPr sz="1125" b="0">
+                <a:solidFill>
+                  <a:srgbClr val="6A717B"/>
+                </a:solidFill>
+                <a:latin typeface="Yu Gothic UI"/>
+              </a:rPr>
+              <a:t>ロゴスは</a:t>
+            </a:r>
+          </a:p>
+        </p:txBody>
+      </p:sp>
+      <p:sp>
+        <p:nvSpPr>
+          <p:cNvPr id="9" name="TextBox 8"/>
+          <p:cNvSpPr txBox="1"/>
+          <p:nvPr/>
+        </p:nvSpPr>
+        <p:spPr>
+          <a:xfrm>
+            <a:off x="8515350" y="647700"/>
+            <a:ext cx="2133600" cy="533400"/>
+          </a:xfrm>
+          <a:prstGeom prst="rect">
+            <a:avLst/>
+          </a:prstGeom>
+          <a:noFill/>
+        </p:spPr>
+        <p:txBody>
+          <a:bodyPr wrap="none" lIns="0" rIns="0" tIns="0" bIns="0" anchor="ctr">
+            <a:spAutoFit/>
+          </a:bodyPr>
+          <a:lstStyle/>
+          <a:p>
+            <a:pPr algn="l"/>
+            <a:r>
+              <a:rPr sz="3900" b="1">
+                <a:solidFill>
+                  <a:srgbClr val="014172"/>
+                </a:solidFill>
+                <a:latin typeface="Yu Gothic UI"/>
+              </a:rPr>
+              <a:t>12</a:t>
+            </a:r>
+            <a:r>
+              <a:rPr sz="1950" b="1">
+                <a:solidFill>
+                  <a:srgbClr val="014172"/>
+                </a:solidFill>
+                <a:latin typeface="Yu Gothic UI"/>
+              </a:rPr>
+              <a:t>本</a:t>
+            </a:r>
+          </a:p>
+        </p:txBody>
+      </p:sp>
+      <p:sp>
+        <p:nvSpPr>
+          <p:cNvPr id="10" name="TextBox 9"/>
+          <p:cNvSpPr txBox="1"/>
+          <p:nvPr/>
+        </p:nvSpPr>
+        <p:spPr>
+          <a:xfrm>
+            <a:off x="762000" y="1905000"/>
+            <a:ext cx="4953000" cy="228600"/>
+          </a:xfrm>
+          <a:prstGeom prst="rect">
+            <a:avLst/>
+          </a:prstGeom>
+          <a:noFill/>
+        </p:spPr>
+        <p:txBody>
+          <a:bodyPr wrap="none" lIns="0" rIns="0" tIns="0" bIns="0" anchor="ctr">
+            <a:spAutoFit/>
+          </a:bodyPr>
+          <a:lstStyle/>
+          <a:p>
+            <a:pPr algn="l"/>
+            <a:r>
+              <a:rPr sz="1200" b="1">
+                <a:solidFill>
+                  <a:srgbClr val="2E2E33"/>
+                </a:solidFill>
+                <a:latin typeface="Yu Gothic UI"/>
+              </a:rPr>
+              <a:t>ダイワ S2000（20L）　内寸 22 × 39cm</a:t>
+            </a:r>
+          </a:p>
+        </p:txBody>
+      </p:sp>
+      <p:sp>
+        <p:nvSpPr>
+          <p:cNvPr id="11" name="Rectangle 10"/>
+          <p:cNvSpPr/>
+          <p:nvPr/>
+        </p:nvSpPr>
+        <p:spPr>
+          <a:xfrm>
+            <a:off x="762000" y="2190750"/>
+            <a:ext cx="2748915" cy="1550670"/>
+          </a:xfrm>
+          <a:prstGeom prst="rect">
+            <a:avLst/>
+          </a:prstGeom>
+          <a:solidFill>
+            <a:srgbClr val="F2F5F8"/>
+          </a:solidFill>
+          <a:ln w="19050">
+            <a:solidFill>
+              <a:srgbClr val="DAE7F2"/>
+            </a:solidFill>
+          </a:ln>
+          <a:effectLst/>
+        </p:spPr>
+        <p:txBody>
+          <a:bodyPr rtlCol="0" anchor="ctr"/>
+          <a:lstStyle/>
+          <a:p>
+            <a:pPr algn="ctr"/>
+          </a:p>
+        </p:txBody>
+      </p:sp>
+      <p:sp>
+        <p:nvSpPr>
+          <p:cNvPr id="12" name="Oval 11"/>
+          <p:cNvSpPr/>
+          <p:nvPr/>
+        </p:nvSpPr>
+        <p:spPr>
+          <a:xfrm>
+            <a:off x="762000" y="2190750"/>
+            <a:ext cx="482822" cy="482822"/>
+          </a:xfrm>
+          <a:prstGeom prst="ellipse">
+            <a:avLst/>
+          </a:prstGeom>
+          <a:solidFill>
+            <a:srgbClr val="EEF4F9"/>
+          </a:solidFill>
+          <a:ln w="19050">
+            <a:solidFill>
+              <a:srgbClr val="014172"/>
+            </a:solidFill>
+          </a:ln>
+          <a:effectLst/>
+        </p:spPr>
+        <p:txBody>
+          <a:bodyPr rtlCol="0" anchor="ctr"/>
+          <a:lstStyle/>
+          <a:p>
+            <a:pPr algn="ctr"/>
+          </a:p>
+        </p:txBody>
+      </p:sp>
+      <p:sp>
+        <p:nvSpPr>
+          <p:cNvPr id="13" name="Oval 12"/>
+          <p:cNvSpPr/>
+          <p:nvPr/>
+        </p:nvSpPr>
+        <p:spPr>
+          <a:xfrm>
+            <a:off x="1244822" y="2190750"/>
+            <a:ext cx="482822" cy="482822"/>
+          </a:xfrm>
+          <a:prstGeom prst="ellipse">
+            <a:avLst/>
+          </a:prstGeom>
+          <a:solidFill>
+            <a:srgbClr val="EEF4F9"/>
+          </a:solidFill>
+          <a:ln w="19050">
+            <a:solidFill>
+              <a:srgbClr val="014172"/>
+            </a:solidFill>
+          </a:ln>
+          <a:effectLst/>
+        </p:spPr>
+        <p:txBody>
+          <a:bodyPr rtlCol="0" anchor="ctr"/>
+          <a:lstStyle/>
+          <a:p>
+            <a:pPr algn="ctr"/>
+          </a:p>
+        </p:txBody>
+      </p:sp>
+      <p:sp>
+        <p:nvSpPr>
+          <p:cNvPr id="14" name="Oval 13"/>
+          <p:cNvSpPr/>
+          <p:nvPr/>
+        </p:nvSpPr>
+        <p:spPr>
+          <a:xfrm>
+            <a:off x="1727644" y="2190750"/>
+            <a:ext cx="482822" cy="482822"/>
+          </a:xfrm>
+          <a:prstGeom prst="ellipse">
+            <a:avLst/>
+          </a:prstGeom>
+          <a:solidFill>
+            <a:srgbClr val="EEF4F9"/>
+          </a:solidFill>
+          <a:ln w="19050">
+            <a:solidFill>
+              <a:srgbClr val="014172"/>
+            </a:solidFill>
+          </a:ln>
+          <a:effectLst/>
+        </p:spPr>
+        <p:txBody>
+          <a:bodyPr rtlCol="0" anchor="ctr"/>
+          <a:lstStyle/>
+          <a:p>
+            <a:pPr algn="ctr"/>
+          </a:p>
+        </p:txBody>
+      </p:sp>
+      <p:sp>
+        <p:nvSpPr>
+          <p:cNvPr id="15" name="Oval 14"/>
+          <p:cNvSpPr/>
+          <p:nvPr/>
+        </p:nvSpPr>
+        <p:spPr>
+          <a:xfrm>
+            <a:off x="2210467" y="2190750"/>
+            <a:ext cx="482822" cy="482822"/>
+          </a:xfrm>
+          <a:prstGeom prst="ellipse">
+            <a:avLst/>
+          </a:prstGeom>
+          <a:solidFill>
+            <a:srgbClr val="EEF4F9"/>
+          </a:solidFill>
+          <a:ln w="19050">
+            <a:solidFill>
+              <a:srgbClr val="014172"/>
+            </a:solidFill>
+          </a:ln>
+          <a:effectLst/>
+        </p:spPr>
+        <p:txBody>
+          <a:bodyPr rtlCol="0" anchor="ctr"/>
+          <a:lstStyle/>
+          <a:p>
+            <a:pPr algn="ctr"/>
+          </a:p>
+        </p:txBody>
+      </p:sp>
+      <p:sp>
+        <p:nvSpPr>
+          <p:cNvPr id="16" name="Oval 15"/>
+          <p:cNvSpPr/>
+          <p:nvPr/>
+        </p:nvSpPr>
+        <p:spPr>
+          <a:xfrm>
+            <a:off x="2693289" y="2190750"/>
+            <a:ext cx="482822" cy="482822"/>
+          </a:xfrm>
+          <a:prstGeom prst="ellipse">
+            <a:avLst/>
+          </a:prstGeom>
+          <a:solidFill>
+            <a:srgbClr val="EEF4F9"/>
+          </a:solidFill>
+          <a:ln w="19050">
+            <a:solidFill>
+              <a:srgbClr val="014172"/>
+            </a:solidFill>
+          </a:ln>
+          <a:effectLst/>
+        </p:spPr>
+        <p:txBody>
+          <a:bodyPr rtlCol="0" anchor="ctr"/>
+          <a:lstStyle/>
+          <a:p>
+            <a:pPr algn="ctr"/>
+          </a:p>
+        </p:txBody>
+      </p:sp>
+      <p:sp>
+        <p:nvSpPr>
+          <p:cNvPr id="17" name="Oval 16"/>
+          <p:cNvSpPr/>
+          <p:nvPr/>
+        </p:nvSpPr>
+        <p:spPr>
+          <a:xfrm>
+            <a:off x="762000" y="2673572"/>
+            <a:ext cx="482822" cy="482822"/>
+          </a:xfrm>
+          <a:prstGeom prst="ellipse">
+            <a:avLst/>
+          </a:prstGeom>
+          <a:solidFill>
+            <a:srgbClr val="EEF4F9"/>
+          </a:solidFill>
+          <a:ln w="19050">
+            <a:solidFill>
+              <a:srgbClr val="014172"/>
+            </a:solidFill>
+          </a:ln>
+          <a:effectLst/>
+        </p:spPr>
+        <p:txBody>
+          <a:bodyPr rtlCol="0" anchor="ctr"/>
+          <a:lstStyle/>
+          <a:p>
+            <a:pPr algn="ctr"/>
+          </a:p>
+        </p:txBody>
+      </p:sp>
+      <p:sp>
+        <p:nvSpPr>
+          <p:cNvPr id="18" name="Oval 17"/>
+          <p:cNvSpPr/>
+          <p:nvPr/>
+        </p:nvSpPr>
+        <p:spPr>
+          <a:xfrm>
+            <a:off x="1244822" y="2673572"/>
+            <a:ext cx="482822" cy="482822"/>
+          </a:xfrm>
+          <a:prstGeom prst="ellipse">
+            <a:avLst/>
+          </a:prstGeom>
+          <a:solidFill>
+            <a:srgbClr val="EEF4F9"/>
+          </a:solidFill>
+          <a:ln w="19050">
+            <a:solidFill>
+              <a:srgbClr val="014172"/>
+            </a:solidFill>
+          </a:ln>
+          <a:effectLst/>
+        </p:spPr>
+        <p:txBody>
+          <a:bodyPr rtlCol="0" anchor="ctr"/>
+          <a:lstStyle/>
+          <a:p>
+            <a:pPr algn="ctr"/>
+          </a:p>
+        </p:txBody>
+      </p:sp>
+      <p:sp>
+        <p:nvSpPr>
+          <p:cNvPr id="19" name="Oval 18"/>
+          <p:cNvSpPr/>
+          <p:nvPr/>
+        </p:nvSpPr>
+        <p:spPr>
+          <a:xfrm>
+            <a:off x="1727644" y="2673572"/>
+            <a:ext cx="482822" cy="482822"/>
+          </a:xfrm>
+          <a:prstGeom prst="ellipse">
+            <a:avLst/>
+          </a:prstGeom>
+          <a:solidFill>
+            <a:srgbClr val="EEF4F9"/>
+          </a:solidFill>
+          <a:ln w="19050">
+            <a:solidFill>
+              <a:srgbClr val="014172"/>
+            </a:solidFill>
+          </a:ln>
+          <a:effectLst/>
+        </p:spPr>
+        <p:txBody>
+          <a:bodyPr rtlCol="0" anchor="ctr"/>
+          <a:lstStyle/>
+          <a:p>
+            <a:pPr algn="ctr"/>
+          </a:p>
+        </p:txBody>
+      </p:sp>
+      <p:sp>
+        <p:nvSpPr>
+          <p:cNvPr id="20" name="Oval 19"/>
+          <p:cNvSpPr/>
+          <p:nvPr/>
+        </p:nvSpPr>
+        <p:spPr>
+          <a:xfrm>
+            <a:off x="2210467" y="2673572"/>
+            <a:ext cx="482822" cy="482822"/>
+          </a:xfrm>
+          <a:prstGeom prst="ellipse">
+            <a:avLst/>
+          </a:prstGeom>
+          <a:solidFill>
+            <a:srgbClr val="EEF4F9"/>
+          </a:solidFill>
+          <a:ln w="19050">
+            <a:solidFill>
+              <a:srgbClr val="014172"/>
+            </a:solidFill>
+          </a:ln>
+          <a:effectLst/>
+        </p:spPr>
+        <p:txBody>
+          <a:bodyPr rtlCol="0" anchor="ctr"/>
+          <a:lstStyle/>
+          <a:p>
+            <a:pPr algn="ctr"/>
+          </a:p>
+        </p:txBody>
+      </p:sp>
+      <p:sp>
+        <p:nvSpPr>
+          <p:cNvPr id="21" name="Oval 20"/>
+          <p:cNvSpPr/>
+          <p:nvPr/>
+        </p:nvSpPr>
+        <p:spPr>
+          <a:xfrm>
+            <a:off x="2693289" y="2673572"/>
+            <a:ext cx="482822" cy="482822"/>
+          </a:xfrm>
+          <a:prstGeom prst="ellipse">
+            <a:avLst/>
+          </a:prstGeom>
+          <a:solidFill>
+            <a:srgbClr val="EEF4F9"/>
+          </a:solidFill>
+          <a:ln w="19050">
+            <a:solidFill>
+              <a:srgbClr val="014172"/>
+            </a:solidFill>
+          </a:ln>
+          <a:effectLst/>
+        </p:spPr>
+        <p:txBody>
+          <a:bodyPr rtlCol="0" anchor="ctr"/>
+          <a:lstStyle/>
+          <a:p>
+            <a:pPr algn="ctr"/>
+          </a:p>
+        </p:txBody>
+      </p:sp>
+      <p:sp>
+        <p:nvSpPr>
+          <p:cNvPr id="22" name="Oval 21"/>
+          <p:cNvSpPr/>
+          <p:nvPr/>
+        </p:nvSpPr>
+        <p:spPr>
+          <a:xfrm>
+            <a:off x="762000" y="3156394"/>
+            <a:ext cx="482822" cy="482822"/>
+          </a:xfrm>
+          <a:prstGeom prst="ellipse">
+            <a:avLst/>
+          </a:prstGeom>
+          <a:solidFill>
+            <a:srgbClr val="EEF4F9"/>
+          </a:solidFill>
+          <a:ln w="19050">
+            <a:solidFill>
+              <a:srgbClr val="014172"/>
+            </a:solidFill>
+          </a:ln>
+          <a:effectLst/>
+        </p:spPr>
+        <p:txBody>
+          <a:bodyPr rtlCol="0" anchor="ctr"/>
+          <a:lstStyle/>
+          <a:p>
+            <a:pPr algn="ctr"/>
+          </a:p>
+        </p:txBody>
+      </p:sp>
+      <p:sp>
+        <p:nvSpPr>
+          <p:cNvPr id="23" name="Oval 22"/>
+          <p:cNvSpPr/>
+          <p:nvPr/>
+        </p:nvSpPr>
+        <p:spPr>
+          <a:xfrm>
+            <a:off x="1244822" y="3156394"/>
+            <a:ext cx="482822" cy="482822"/>
+          </a:xfrm>
+          <a:prstGeom prst="ellipse">
+            <a:avLst/>
+          </a:prstGeom>
+          <a:solidFill>
+            <a:srgbClr val="EEF4F9"/>
+          </a:solidFill>
+          <a:ln w="19050">
+            <a:solidFill>
+              <a:srgbClr val="014172"/>
+            </a:solidFill>
+          </a:ln>
+          <a:effectLst/>
+        </p:spPr>
+        <p:txBody>
+          <a:bodyPr rtlCol="0" anchor="ctr"/>
+          <a:lstStyle/>
+          <a:p>
+            <a:pPr algn="ctr"/>
+          </a:p>
+        </p:txBody>
+      </p:sp>
+      <p:sp>
+        <p:nvSpPr>
+          <p:cNvPr id="24" name="Oval 23"/>
+          <p:cNvSpPr/>
+          <p:nvPr/>
+        </p:nvSpPr>
+        <p:spPr>
+          <a:xfrm>
+            <a:off x="1727644" y="3156394"/>
+            <a:ext cx="482822" cy="482822"/>
+          </a:xfrm>
+          <a:prstGeom prst="ellipse">
+            <a:avLst/>
+          </a:prstGeom>
+          <a:solidFill>
+            <a:srgbClr val="EEF4F9"/>
+          </a:solidFill>
+          <a:ln w="19050">
+            <a:solidFill>
+              <a:srgbClr val="014172"/>
+            </a:solidFill>
+          </a:ln>
+          <a:effectLst/>
+        </p:spPr>
+        <p:txBody>
+          <a:bodyPr rtlCol="0" anchor="ctr"/>
+          <a:lstStyle/>
+          <a:p>
+            <a:pPr algn="ctr"/>
+          </a:p>
+        </p:txBody>
+      </p:sp>
+      <p:sp>
+        <p:nvSpPr>
+          <p:cNvPr id="25" name="Oval 24"/>
+          <p:cNvSpPr/>
+          <p:nvPr/>
+        </p:nvSpPr>
+        <p:spPr>
+          <a:xfrm>
+            <a:off x="2210467" y="3156394"/>
+            <a:ext cx="482822" cy="482822"/>
+          </a:xfrm>
+          <a:prstGeom prst="ellipse">
+            <a:avLst/>
+          </a:prstGeom>
+          <a:solidFill>
+            <a:srgbClr val="EEF4F9"/>
+          </a:solidFill>
+          <a:ln w="19050">
+            <a:solidFill>
+              <a:srgbClr val="014172"/>
+            </a:solidFill>
+          </a:ln>
+          <a:effectLst/>
+        </p:spPr>
+        <p:txBody>
+          <a:bodyPr rtlCol="0" anchor="ctr"/>
+          <a:lstStyle/>
+          <a:p>
+            <a:pPr algn="ctr"/>
+          </a:p>
+        </p:txBody>
+      </p:sp>
+      <p:sp>
+        <p:nvSpPr>
+          <p:cNvPr id="26" name="Oval 25"/>
+          <p:cNvSpPr/>
+          <p:nvPr/>
+        </p:nvSpPr>
+        <p:spPr>
+          <a:xfrm>
+            <a:off x="2693289" y="3156394"/>
+            <a:ext cx="482822" cy="482822"/>
+          </a:xfrm>
+          <a:prstGeom prst="ellipse">
+            <a:avLst/>
+          </a:prstGeom>
+          <a:solidFill>
+            <a:srgbClr val="EEF4F9"/>
+          </a:solidFill>
+          <a:ln w="19050">
+            <a:solidFill>
+              <a:srgbClr val="014172"/>
+            </a:solidFill>
+          </a:ln>
+          <a:effectLst/>
+        </p:spPr>
+        <p:txBody>
+          <a:bodyPr rtlCol="0" anchor="ctr"/>
+          <a:lstStyle/>
+          <a:p>
+            <a:pPr algn="ctr"/>
+          </a:p>
+        </p:txBody>
+      </p:sp>
+      <p:sp>
+        <p:nvSpPr>
+          <p:cNvPr id="27" name="TextBox 26"/>
+          <p:cNvSpPr txBox="1"/>
+          <p:nvPr/>
+        </p:nvSpPr>
+        <p:spPr>
+          <a:xfrm>
+            <a:off x="762000" y="3893820"/>
+            <a:ext cx="4953000" cy="228600"/>
+          </a:xfrm>
+          <a:prstGeom prst="rect">
+            <a:avLst/>
+          </a:prstGeom>
+          <a:noFill/>
+        </p:spPr>
+        <p:txBody>
+          <a:bodyPr wrap="none" lIns="0" rIns="0" tIns="0" bIns="0" anchor="ctr">
+            <a:spAutoFit/>
+          </a:bodyPr>
+          <a:lstStyle/>
+          <a:p>
+            <a:pPr algn="l"/>
+            <a:r>
+              <a:rPr sz="1125" b="0">
+                <a:solidFill>
+                  <a:srgbClr val="6A717B"/>
+                </a:solidFill>
+                <a:latin typeface="Yu Gothic UI"/>
+              </a:rPr>
+              <a:t>39 ÷ 6.85 ＝ 5.7 → 5列 ／ 22 ÷ 6.85 ＝ 3.2 → 3行</a:t>
+            </a:r>
+          </a:p>
+        </p:txBody>
+      </p:sp>
+      <p:sp>
+        <p:nvSpPr>
+          <p:cNvPr id="28" name="TextBox 27"/>
+          <p:cNvSpPr txBox="1"/>
+          <p:nvPr/>
+        </p:nvSpPr>
+        <p:spPr>
+          <a:xfrm>
+            <a:off x="5905500" y="1905000"/>
+            <a:ext cx="4953000" cy="228600"/>
+          </a:xfrm>
+          <a:prstGeom prst="rect">
+            <a:avLst/>
+          </a:prstGeom>
+          <a:noFill/>
+        </p:spPr>
+        <p:txBody>
+          <a:bodyPr wrap="none" lIns="0" rIns="0" tIns="0" bIns="0" anchor="ctr">
+            <a:spAutoFit/>
+          </a:bodyPr>
+          <a:lstStyle/>
+          <a:p>
+            <a:pPr algn="l"/>
+            <a:r>
+              <a:rPr sz="1200" b="1">
+                <a:solidFill>
+                  <a:srgbClr val="2E2E33"/>
+                </a:solidFill>
+                <a:latin typeface="Yu Gothic UI"/>
+              </a:rPr>
+              <a:t>ロゴス ハイパー氷点下クーラーL（20L）　内寸 33 × 26cm</a:t>
+            </a:r>
+          </a:p>
+        </p:txBody>
+      </p:sp>
+      <p:sp>
+        <p:nvSpPr>
+          <p:cNvPr id="29" name="Rectangle 28"/>
+          <p:cNvSpPr/>
+          <p:nvPr/>
+        </p:nvSpPr>
+        <p:spPr>
+          <a:xfrm>
+            <a:off x="5905500" y="2190750"/>
+            <a:ext cx="2326005" cy="1832610"/>
+          </a:xfrm>
+          <a:prstGeom prst="rect">
+            <a:avLst/>
+          </a:prstGeom>
+          <a:solidFill>
+            <a:srgbClr val="F2F5F8"/>
+          </a:solidFill>
+          <a:ln w="19050">
+            <a:solidFill>
+              <a:srgbClr val="DAE7F2"/>
+            </a:solidFill>
+          </a:ln>
+          <a:effectLst/>
+        </p:spPr>
+        <p:txBody>
+          <a:bodyPr rtlCol="0" anchor="ctr"/>
+          <a:lstStyle/>
+          <a:p>
+            <a:pPr algn="ctr"/>
+          </a:p>
+        </p:txBody>
+      </p:sp>
+      <p:sp>
+        <p:nvSpPr>
+          <p:cNvPr id="30" name="Oval 29"/>
+          <p:cNvSpPr/>
+          <p:nvPr/>
+        </p:nvSpPr>
+        <p:spPr>
+          <a:xfrm>
+            <a:off x="5905500" y="2190750"/>
+            <a:ext cx="482822" cy="482822"/>
+          </a:xfrm>
+          <a:prstGeom prst="ellipse">
+            <a:avLst/>
+          </a:prstGeom>
+          <a:solidFill>
+            <a:srgbClr val="EEF4F9"/>
+          </a:solidFill>
+          <a:ln w="19050">
+            <a:solidFill>
+              <a:srgbClr val="014172"/>
+            </a:solidFill>
+          </a:ln>
+          <a:effectLst/>
+        </p:spPr>
+        <p:txBody>
+          <a:bodyPr rtlCol="0" anchor="ctr"/>
+          <a:lstStyle/>
+          <a:p>
+            <a:pPr algn="ctr"/>
+          </a:p>
+        </p:txBody>
+      </p:sp>
+      <p:sp>
+        <p:nvSpPr>
+          <p:cNvPr id="31" name="Oval 30"/>
+          <p:cNvSpPr/>
+          <p:nvPr/>
+        </p:nvSpPr>
+        <p:spPr>
+          <a:xfrm>
+            <a:off x="6388322" y="2190750"/>
+            <a:ext cx="482822" cy="482822"/>
+          </a:xfrm>
+          <a:prstGeom prst="ellipse">
+            <a:avLst/>
+          </a:prstGeom>
+          <a:solidFill>
+            <a:srgbClr val="EEF4F9"/>
+          </a:solidFill>
+          <a:ln w="19050">
+            <a:solidFill>
+              <a:srgbClr val="014172"/>
+            </a:solidFill>
+          </a:ln>
+          <a:effectLst/>
+        </p:spPr>
+        <p:txBody>
+          <a:bodyPr rtlCol="0" anchor="ctr"/>
+          <a:lstStyle/>
+          <a:p>
+            <a:pPr algn="ctr"/>
+          </a:p>
+        </p:txBody>
+      </p:sp>
+      <p:sp>
+        <p:nvSpPr>
+          <p:cNvPr id="32" name="Oval 31"/>
+          <p:cNvSpPr/>
+          <p:nvPr/>
+        </p:nvSpPr>
+        <p:spPr>
+          <a:xfrm>
+            <a:off x="6871144" y="2190750"/>
+            <a:ext cx="482822" cy="482822"/>
+          </a:xfrm>
+          <a:prstGeom prst="ellipse">
+            <a:avLst/>
+          </a:prstGeom>
+          <a:solidFill>
+            <a:srgbClr val="EEF4F9"/>
+          </a:solidFill>
+          <a:ln w="19050">
+            <a:solidFill>
+              <a:srgbClr val="014172"/>
+            </a:solidFill>
+          </a:ln>
+          <a:effectLst/>
+        </p:spPr>
+        <p:txBody>
+          <a:bodyPr rtlCol="0" anchor="ctr"/>
+          <a:lstStyle/>
+          <a:p>
+            <a:pPr algn="ctr"/>
+          </a:p>
+        </p:txBody>
+      </p:sp>
+      <p:sp>
+        <p:nvSpPr>
+          <p:cNvPr id="33" name="Oval 32"/>
+          <p:cNvSpPr/>
+          <p:nvPr/>
+        </p:nvSpPr>
+        <p:spPr>
+          <a:xfrm>
+            <a:off x="7353967" y="2190750"/>
+            <a:ext cx="482822" cy="482822"/>
+          </a:xfrm>
+          <a:prstGeom prst="ellipse">
+            <a:avLst/>
+          </a:prstGeom>
+          <a:solidFill>
+            <a:srgbClr val="EEF4F9"/>
+          </a:solidFill>
+          <a:ln w="19050">
+            <a:solidFill>
+              <a:srgbClr val="014172"/>
+            </a:solidFill>
+          </a:ln>
+          <a:effectLst/>
+        </p:spPr>
+        <p:txBody>
+          <a:bodyPr rtlCol="0" anchor="ctr"/>
+          <a:lstStyle/>
+          <a:p>
+            <a:pPr algn="ctr"/>
+          </a:p>
+        </p:txBody>
+      </p:sp>
+      <p:sp>
+        <p:nvSpPr>
+          <p:cNvPr id="34" name="Oval 33"/>
+          <p:cNvSpPr/>
+          <p:nvPr/>
+        </p:nvSpPr>
+        <p:spPr>
+          <a:xfrm>
+            <a:off x="5905500" y="2673572"/>
+            <a:ext cx="482822" cy="482822"/>
+          </a:xfrm>
+          <a:prstGeom prst="ellipse">
+            <a:avLst/>
+          </a:prstGeom>
+          <a:solidFill>
+            <a:srgbClr val="EEF4F9"/>
+          </a:solidFill>
+          <a:ln w="19050">
+            <a:solidFill>
+              <a:srgbClr val="014172"/>
+            </a:solidFill>
+          </a:ln>
+          <a:effectLst/>
+        </p:spPr>
+        <p:txBody>
+          <a:bodyPr rtlCol="0" anchor="ctr"/>
+          <a:lstStyle/>
+          <a:p>
+            <a:pPr algn="ctr"/>
+          </a:p>
+        </p:txBody>
+      </p:sp>
+      <p:sp>
+        <p:nvSpPr>
+          <p:cNvPr id="35" name="Oval 34"/>
+          <p:cNvSpPr/>
+          <p:nvPr/>
+        </p:nvSpPr>
+        <p:spPr>
+          <a:xfrm>
+            <a:off x="6388322" y="2673572"/>
+            <a:ext cx="482822" cy="482822"/>
+          </a:xfrm>
+          <a:prstGeom prst="ellipse">
+            <a:avLst/>
+          </a:prstGeom>
+          <a:solidFill>
+            <a:srgbClr val="EEF4F9"/>
+          </a:solidFill>
+          <a:ln w="19050">
+            <a:solidFill>
+              <a:srgbClr val="014172"/>
+            </a:solidFill>
+          </a:ln>
+          <a:effectLst/>
+        </p:spPr>
+        <p:txBody>
+          <a:bodyPr rtlCol="0" anchor="ctr"/>
+          <a:lstStyle/>
+          <a:p>
+            <a:pPr algn="ctr"/>
+          </a:p>
+        </p:txBody>
+      </p:sp>
+      <p:sp>
+        <p:nvSpPr>
+          <p:cNvPr id="36" name="Oval 35"/>
+          <p:cNvSpPr/>
+          <p:nvPr/>
+        </p:nvSpPr>
+        <p:spPr>
+          <a:xfrm>
+            <a:off x="6871144" y="2673572"/>
+            <a:ext cx="482822" cy="482822"/>
+          </a:xfrm>
+          <a:prstGeom prst="ellipse">
+            <a:avLst/>
+          </a:prstGeom>
+          <a:solidFill>
+            <a:srgbClr val="EEF4F9"/>
+          </a:solidFill>
+          <a:ln w="19050">
+            <a:solidFill>
+              <a:srgbClr val="014172"/>
+            </a:solidFill>
+          </a:ln>
+          <a:effectLst/>
+        </p:spPr>
+        <p:txBody>
+          <a:bodyPr rtlCol="0" anchor="ctr"/>
+          <a:lstStyle/>
+          <a:p>
+            <a:pPr algn="ctr"/>
+          </a:p>
+        </p:txBody>
+      </p:sp>
+      <p:sp>
+        <p:nvSpPr>
+          <p:cNvPr id="37" name="Oval 36"/>
+          <p:cNvSpPr/>
+          <p:nvPr/>
+        </p:nvSpPr>
+        <p:spPr>
+          <a:xfrm>
+            <a:off x="7353967" y="2673572"/>
+            <a:ext cx="482822" cy="482822"/>
+          </a:xfrm>
+          <a:prstGeom prst="ellipse">
+            <a:avLst/>
+          </a:prstGeom>
+          <a:solidFill>
+            <a:srgbClr val="EEF4F9"/>
+          </a:solidFill>
+          <a:ln w="19050">
+            <a:solidFill>
+              <a:srgbClr val="014172"/>
+            </a:solidFill>
+          </a:ln>
+          <a:effectLst/>
+        </p:spPr>
+        <p:txBody>
+          <a:bodyPr rtlCol="0" anchor="ctr"/>
+          <a:lstStyle/>
+          <a:p>
+            <a:pPr algn="ctr"/>
+          </a:p>
+        </p:txBody>
+      </p:sp>
+      <p:sp>
+        <p:nvSpPr>
+          <p:cNvPr id="38" name="Oval 37"/>
+          <p:cNvSpPr/>
+          <p:nvPr/>
+        </p:nvSpPr>
+        <p:spPr>
+          <a:xfrm>
+            <a:off x="5905500" y="3156394"/>
+            <a:ext cx="482822" cy="482822"/>
+          </a:xfrm>
+          <a:prstGeom prst="ellipse">
+            <a:avLst/>
+          </a:prstGeom>
+          <a:solidFill>
+            <a:srgbClr val="EEF4F9"/>
+          </a:solidFill>
+          <a:ln w="19050">
+            <a:solidFill>
+              <a:srgbClr val="014172"/>
+            </a:solidFill>
+          </a:ln>
+          <a:effectLst/>
+        </p:spPr>
+        <p:txBody>
+          <a:bodyPr rtlCol="0" anchor="ctr"/>
+          <a:lstStyle/>
+          <a:p>
+            <a:pPr algn="ctr"/>
+          </a:p>
+        </p:txBody>
+      </p:sp>
+      <p:sp>
+        <p:nvSpPr>
+          <p:cNvPr id="39" name="Oval 38"/>
+          <p:cNvSpPr/>
+          <p:nvPr/>
+        </p:nvSpPr>
+        <p:spPr>
+          <a:xfrm>
+            <a:off x="6388322" y="3156394"/>
+            <a:ext cx="482822" cy="482822"/>
+          </a:xfrm>
+          <a:prstGeom prst="ellipse">
+            <a:avLst/>
+          </a:prstGeom>
+          <a:solidFill>
+            <a:srgbClr val="EEF4F9"/>
+          </a:solidFill>
+          <a:ln w="19050">
+            <a:solidFill>
+              <a:srgbClr val="014172"/>
+            </a:solidFill>
+          </a:ln>
+          <a:effectLst/>
+        </p:spPr>
+        <p:txBody>
+          <a:bodyPr rtlCol="0" anchor="ctr"/>
+          <a:lstStyle/>
+          <a:p>
+            <a:pPr algn="ctr"/>
+          </a:p>
+        </p:txBody>
+      </p:sp>
+      <p:sp>
+        <p:nvSpPr>
+          <p:cNvPr id="40" name="Oval 39"/>
+          <p:cNvSpPr/>
+          <p:nvPr/>
+        </p:nvSpPr>
+        <p:spPr>
+          <a:xfrm>
+            <a:off x="6871144" y="3156394"/>
+            <a:ext cx="482822" cy="482822"/>
+          </a:xfrm>
+          <a:prstGeom prst="ellipse">
+            <a:avLst/>
+          </a:prstGeom>
+          <a:solidFill>
+            <a:srgbClr val="EEF4F9"/>
+          </a:solidFill>
+          <a:ln w="19050">
+            <a:solidFill>
+              <a:srgbClr val="014172"/>
+            </a:solidFill>
+          </a:ln>
+          <a:effectLst/>
+        </p:spPr>
+        <p:txBody>
+          <a:bodyPr rtlCol="0" anchor="ctr"/>
+          <a:lstStyle/>
+          <a:p>
+            <a:pPr algn="ctr"/>
+          </a:p>
+        </p:txBody>
+      </p:sp>
+      <p:sp>
+        <p:nvSpPr>
+          <p:cNvPr id="41" name="Oval 40"/>
+          <p:cNvSpPr/>
+          <p:nvPr/>
+        </p:nvSpPr>
+        <p:spPr>
+          <a:xfrm>
+            <a:off x="7353967" y="3156394"/>
+            <a:ext cx="482822" cy="482822"/>
+          </a:xfrm>
+          <a:prstGeom prst="ellipse">
+            <a:avLst/>
+          </a:prstGeom>
+          <a:solidFill>
+            <a:srgbClr val="EEF4F9"/>
+          </a:solidFill>
+          <a:ln w="19050">
+            <a:solidFill>
+              <a:srgbClr val="014172"/>
+            </a:solidFill>
+          </a:ln>
+          <a:effectLst/>
+        </p:spPr>
+        <p:txBody>
+          <a:bodyPr rtlCol="0" anchor="ctr"/>
+          <a:lstStyle/>
+          <a:p>
+            <a:pPr algn="ctr"/>
+          </a:p>
+        </p:txBody>
+      </p:sp>
+      <p:sp>
+        <p:nvSpPr>
+          <p:cNvPr id="42" name="TextBox 41"/>
+          <p:cNvSpPr txBox="1"/>
+          <p:nvPr/>
+        </p:nvSpPr>
+        <p:spPr>
+          <a:xfrm>
+            <a:off x="5905500" y="4175760"/>
+            <a:ext cx="4953000" cy="228600"/>
+          </a:xfrm>
+          <a:prstGeom prst="rect">
+            <a:avLst/>
+          </a:prstGeom>
+          <a:noFill/>
+        </p:spPr>
+        <p:txBody>
+          <a:bodyPr wrap="none" lIns="0" rIns="0" tIns="0" bIns="0" anchor="ctr">
+            <a:spAutoFit/>
+          </a:bodyPr>
+          <a:lstStyle/>
+          <a:p>
+            <a:pPr algn="l"/>
+            <a:r>
+              <a:rPr sz="1125" b="0">
+                <a:solidFill>
+                  <a:srgbClr val="6A717B"/>
+                </a:solidFill>
+                <a:latin typeface="Yu Gothic UI"/>
+              </a:rPr>
+              <a:t>33 ÷ 6.85 ＝ 4.8 → 4列 ／ 26 ÷ 6.85 ＝ 3.8 → 3行</a:t>
+            </a:r>
+          </a:p>
+        </p:txBody>
+      </p:sp>
+      <p:sp>
+        <p:nvSpPr>
+          <p:cNvPr id="43" name="TextBox 42"/>
+          <p:cNvSpPr txBox="1"/>
+          <p:nvPr/>
+        </p:nvSpPr>
+        <p:spPr>
+          <a:xfrm>
+            <a:off x="762000" y="4572000"/>
+            <a:ext cx="3810000" cy="419100"/>
+          </a:xfrm>
+          <a:prstGeom prst="rect">
+            <a:avLst/>
+          </a:prstGeom>
+          <a:noFill/>
+        </p:spPr>
+        <p:txBody>
+          <a:bodyPr wrap="none" lIns="0" rIns="0" tIns="0" bIns="0" anchor="ctr">
+            <a:spAutoFit/>
+          </a:bodyPr>
+          <a:lstStyle/>
+          <a:p>
+            <a:pPr algn="l"/>
+            <a:r>
+              <a:rPr sz="1650" b="1">
+                <a:solidFill>
+                  <a:srgbClr val="2E2E33"/>
+                </a:solidFill>
+                <a:latin typeface="Yu Gothic UI"/>
+              </a:rPr>
+              <a:t>5列 × 3行 ＝ </a:t>
+            </a:r>
+            <a:r>
+              <a:rPr sz="2550" b="1">
+                <a:solidFill>
+                  <a:srgbClr val="014172"/>
+                </a:solidFill>
+                <a:latin typeface="Yu Gothic UI"/>
+              </a:rPr>
+              <a:t>15</a:t>
+            </a:r>
+            <a:r>
+              <a:rPr sz="1500" b="1">
+                <a:solidFill>
+                  <a:srgbClr val="014172"/>
+                </a:solidFill>
+                <a:latin typeface="Yu Gothic UI"/>
+              </a:rPr>
+              <a:t>本</a:t>
+            </a:r>
+          </a:p>
+        </p:txBody>
+      </p:sp>
+      <p:sp>
+        <p:nvSpPr>
+          <p:cNvPr id="44" name="TextBox 43"/>
+          <p:cNvSpPr txBox="1"/>
+          <p:nvPr/>
+        </p:nvSpPr>
+        <p:spPr>
+          <a:xfrm>
+            <a:off x="5905500" y="4572000"/>
+            <a:ext cx="3810000" cy="419100"/>
+          </a:xfrm>
+          <a:prstGeom prst="rect">
+            <a:avLst/>
+          </a:prstGeom>
+          <a:noFill/>
+        </p:spPr>
+        <p:txBody>
+          <a:bodyPr wrap="none" lIns="0" rIns="0" tIns="0" bIns="0" anchor="ctr">
+            <a:spAutoFit/>
+          </a:bodyPr>
+          <a:lstStyle/>
+          <a:p>
+            <a:pPr algn="l"/>
+            <a:r>
+              <a:rPr sz="1650" b="1">
+                <a:solidFill>
+                  <a:srgbClr val="2E2E33"/>
+                </a:solidFill>
+                <a:latin typeface="Yu Gothic UI"/>
+              </a:rPr>
+              <a:t>4列 × 3行 ＝ </a:t>
+            </a:r>
+            <a:r>
+              <a:rPr sz="2550" b="1">
+                <a:solidFill>
+                  <a:srgbClr val="014172"/>
+                </a:solidFill>
+                <a:latin typeface="Yu Gothic UI"/>
+              </a:rPr>
+              <a:t>12</a:t>
+            </a:r>
+            <a:r>
+              <a:rPr sz="1500" b="1">
+                <a:solidFill>
+                  <a:srgbClr val="014172"/>
+                </a:solidFill>
+                <a:latin typeface="Yu Gothic UI"/>
+              </a:rPr>
+              <a:t>本</a:t>
+            </a:r>
+          </a:p>
+        </p:txBody>
+      </p:sp>
+      <p:sp>
+        <p:nvSpPr>
+          <p:cNvPr id="45" name="Rectangle 44"/>
+          <p:cNvSpPr/>
+          <p:nvPr/>
+        </p:nvSpPr>
+        <p:spPr>
+          <a:xfrm>
+            <a:off x="609600" y="5295900"/>
+            <a:ext cx="10210800" cy="9525"/>
+          </a:xfrm>
+          <a:prstGeom prst="rect">
+            <a:avLst/>
+          </a:prstGeom>
+          <a:solidFill>
+            <a:srgbClr val="E2E7EC"/>
+          </a:solidFill>
+          <a:ln>
+            <a:noFill/>
+          </a:ln>
+          <a:effectLst/>
+        </p:spPr>
+        <p:txBody>
+          <a:bodyPr rtlCol="0" anchor="ctr"/>
+          <a:lstStyle/>
+          <a:p>
+            <a:pPr algn="ctr"/>
+          </a:p>
+        </p:txBody>
+      </p:sp>
+      <p:sp>
+        <p:nvSpPr>
+          <p:cNvPr id="46" name="TextBox 45"/>
+          <p:cNvSpPr txBox="1"/>
+          <p:nvPr/>
+        </p:nvSpPr>
+        <p:spPr>
+          <a:xfrm>
+            <a:off x="609600" y="5429250"/>
+            <a:ext cx="7239000" cy="247650"/>
+          </a:xfrm>
+          <a:prstGeom prst="rect">
+            <a:avLst/>
+          </a:prstGeom>
+          <a:noFill/>
+        </p:spPr>
+        <p:txBody>
+          <a:bodyPr wrap="none" lIns="0" rIns="0" tIns="0" bIns="0" anchor="ctr">
+            <a:spAutoFit/>
+          </a:bodyPr>
+          <a:lstStyle/>
+          <a:p>
+            <a:pPr algn="l"/>
+            <a:r>
+              <a:rPr sz="1425" b="1">
+                <a:solidFill>
+                  <a:srgbClr val="2E2E33"/>
+                </a:solidFill>
+                <a:latin typeface="Yu Gothic UI"/>
+              </a:rPr>
+              <a:t>広さではなく、胴径で割り切れるかで決まります。</a:t>
+            </a:r>
+          </a:p>
+        </p:txBody>
+      </p:sp>
+      <p:sp>
+        <p:nvSpPr>
+          <p:cNvPr id="47" name="TextBox 46"/>
+          <p:cNvSpPr txBox="1"/>
+          <p:nvPr/>
+        </p:nvSpPr>
+        <p:spPr>
+          <a:xfrm>
+            <a:off x="609600" y="5676900"/>
+            <a:ext cx="7620000" cy="209550"/>
+          </a:xfrm>
+          <a:prstGeom prst="rect">
+            <a:avLst/>
+          </a:prstGeom>
+          <a:noFill/>
+        </p:spPr>
+        <p:txBody>
+          <a:bodyPr wrap="none" lIns="0" rIns="0" tIns="0" bIns="0" anchor="ctr">
+            <a:spAutoFit/>
+          </a:bodyPr>
+          <a:lstStyle/>
+          <a:p>
+            <a:pPr algn="l"/>
+            <a:r>
+              <a:rPr sz="1050" b="0">
+                <a:solidFill>
+                  <a:srgbClr val="6A717B"/>
+                </a:solidFill>
+                <a:latin typeface="Yu Gothic UI"/>
+              </a:rPr>
+              <a:t>メーカー公表値からの計算です（実測ではありません）</a:t>
+            </a:r>
+          </a:p>
+        </p:txBody>
+      </p:sp>
+      <p:sp>
+        <p:nvSpPr>
+          <p:cNvPr id="48" name="TextBox 47"/>
+          <p:cNvSpPr txBox="1"/>
+          <p:nvPr/>
+        </p:nvSpPr>
+        <p:spPr>
+          <a:xfrm>
+            <a:off x="7962900" y="5676900"/>
+            <a:ext cx="2857500" cy="209550"/>
+          </a:xfrm>
+          <a:prstGeom prst="rect">
+            <a:avLst/>
+          </a:prstGeom>
+          <a:noFill/>
+        </p:spPr>
+        <p:txBody>
+          <a:bodyPr wrap="none" lIns="0" rIns="0" tIns="0" bIns="0" anchor="ctr">
+            <a:spAutoFit/>
+          </a:bodyPr>
+          <a:lstStyle/>
+          <a:p>
+            <a:pPr algn="r"/>
+            <a:r>
+              <a:rPr sz="1050" b="0">
+                <a:solidFill>
+                  <a:srgbClr val="6A717B"/>
+                </a:solidFill>
+                <a:latin typeface="Yu Gothic UI"/>
+              </a:rPr>
+              <a:t>寸法で選ぶ　sunpou.nexeed-lab.com</a:t>
+            </a:r>
+          </a:p>
+        </p:txBody>
+      </p:sp>
+    </p:spTree>
+  </p:cSld>
+  <p:clrMapOvr>
+    <a:masterClrMapping/>
+  </p:clrMapOvr>
+</p:sld>
+</file>
+
+<file path=ppt/slides/slide22.xml><?xml version="1.0" encoding="utf-8"?>
+<p:sld xmlns:a="http://schemas.openxmlformats.org/drawingml/2006/main" xmlns:p="http://schemas.openxmlformats.org/presentationml/2006/main" xmlns:r="http://schemas.openxmlformats.org/officeDocument/2006/relationships">
+  <p:cSld>
+    <p:spTree>
+      <p:nvGrpSpPr>
+        <p:cNvPr id="1" name=""/>
+        <p:cNvGrpSpPr/>
+        <p:nvPr/>
+      </p:nvGrpSpPr>
+      <p:grpSpPr/>
+      <p:sp>
+        <p:nvSpPr>
+          <p:cNvPr id="2" name="Rectangle 1"/>
+          <p:cNvSpPr/>
+          <p:nvPr/>
+        </p:nvSpPr>
+        <p:spPr>
+          <a:xfrm>
+            <a:off x="0" y="0"/>
+            <a:ext cx="11430000" cy="6000750"/>
+          </a:xfrm>
+          <a:prstGeom prst="rect">
+            <a:avLst/>
+          </a:prstGeom>
+          <a:solidFill>
+            <a:srgbClr val="FCFCFC"/>
+          </a:solidFill>
+          <a:ln>
+            <a:noFill/>
+          </a:ln>
+          <a:effectLst/>
+        </p:spPr>
+        <p:txBody>
+          <a:bodyPr rtlCol="0" anchor="ctr"/>
+          <a:lstStyle/>
+          <a:p>
+            <a:pPr algn="ctr"/>
+          </a:p>
+        </p:txBody>
+      </p:sp>
+      <p:sp>
+        <p:nvSpPr>
+          <p:cNvPr id="3" name="Rectangle 2"/>
+          <p:cNvSpPr/>
+          <p:nvPr/>
+        </p:nvSpPr>
+        <p:spPr>
+          <a:xfrm>
+            <a:off x="0" y="0"/>
+            <a:ext cx="114300" cy="6000750"/>
+          </a:xfrm>
+          <a:prstGeom prst="rect">
+            <a:avLst/>
+          </a:prstGeom>
+          <a:solidFill>
+            <a:srgbClr val="014172"/>
+          </a:solidFill>
+          <a:ln>
+            <a:noFill/>
+          </a:ln>
+          <a:effectLst/>
+        </p:spPr>
+        <p:txBody>
+          <a:bodyPr rtlCol="0" anchor="ctr"/>
+          <a:lstStyle/>
+          <a:p>
+            <a:pPr algn="ctr"/>
+          </a:p>
+        </p:txBody>
+      </p:sp>
+      <p:sp>
+        <p:nvSpPr>
+          <p:cNvPr id="4" name="Rectangle 3"/>
+          <p:cNvSpPr/>
+          <p:nvPr/>
+        </p:nvSpPr>
+        <p:spPr>
+          <a:xfrm>
+            <a:off x="0" y="0"/>
+            <a:ext cx="11430000" cy="1504950"/>
+          </a:xfrm>
+          <a:prstGeom prst="rect">
+            <a:avLst/>
+          </a:prstGeom>
+          <a:solidFill>
+            <a:srgbClr val="014172"/>
+          </a:solidFill>
+          <a:ln>
+            <a:noFill/>
+          </a:ln>
+          <a:effectLst/>
+        </p:spPr>
+        <p:txBody>
+          <a:bodyPr rtlCol="0" anchor="ctr"/>
+          <a:lstStyle/>
+          <a:p>
+            <a:pPr algn="ctr"/>
+          </a:p>
+        </p:txBody>
+      </p:sp>
+      <p:sp>
+        <p:nvSpPr>
+          <p:cNvPr id="5" name="TextBox 4"/>
+          <p:cNvSpPr txBox="1"/>
+          <p:nvPr/>
+        </p:nvSpPr>
+        <p:spPr>
+          <a:xfrm>
+            <a:off x="609600" y="361950"/>
+            <a:ext cx="7429500" cy="476250"/>
+          </a:xfrm>
+          <a:prstGeom prst="rect">
+            <a:avLst/>
+          </a:prstGeom>
+          <a:noFill/>
+        </p:spPr>
+        <p:txBody>
+          <a:bodyPr wrap="none" lIns="0" rIns="0" tIns="0" bIns="0" anchor="ctr">
+            <a:spAutoFit/>
+          </a:bodyPr>
+          <a:lstStyle/>
+          <a:p>
+            <a:pPr algn="l"/>
+            <a:r>
+              <a:rPr sz="3000" b="1">
+                <a:solidFill>
+                  <a:srgbClr val="FFFFFF"/>
+                </a:solidFill>
+                <a:latin typeface="Yu Gothic UI"/>
+              </a:rPr>
+              <a:t>公表容量は 20L と 22L。どちらも 15本</a:t>
+            </a:r>
+          </a:p>
+        </p:txBody>
+      </p:sp>
+      <p:sp>
+        <p:nvSpPr>
+          <p:cNvPr id="6" name="TextBox 5"/>
+          <p:cNvSpPr txBox="1"/>
+          <p:nvPr/>
+        </p:nvSpPr>
+        <p:spPr>
+          <a:xfrm>
+            <a:off x="609600" y="876300"/>
+            <a:ext cx="7429500" cy="247650"/>
+          </a:xfrm>
+          <a:prstGeom prst="rect">
+            <a:avLst/>
+          </a:prstGeom>
+          <a:noFill/>
+        </p:spPr>
+        <p:txBody>
+          <a:bodyPr wrap="none" lIns="0" rIns="0" tIns="0" bIns="0" anchor="ctr">
+            <a:spAutoFit/>
+          </a:bodyPr>
+          <a:lstStyle/>
+          <a:p>
+            <a:pPr algn="l"/>
+            <a:r>
+              <a:rPr sz="1425" b="0">
+                <a:solidFill>
+                  <a:srgbClr val="DAE7F2"/>
+                </a:solidFill>
+                <a:latin typeface="Yu Gothic UI"/>
+              </a:rPr>
+              <a:t>ボトルはシマノ公表の前提 Φ66 × 全高207mm ／ 灰色は使えない余り</a:t>
+            </a:r>
+          </a:p>
+        </p:txBody>
+      </p:sp>
+      <p:sp>
+        <p:nvSpPr>
+          <p:cNvPr id="7" name="Rounded Rectangle 6"/>
+          <p:cNvSpPr/>
+          <p:nvPr/>
+        </p:nvSpPr>
+        <p:spPr>
+          <a:xfrm>
+            <a:off x="8305800" y="247650"/>
+            <a:ext cx="2514600" cy="1009650"/>
+          </a:xfrm>
+          <a:prstGeom prst="roundRect">
+            <a:avLst>
+              <a:gd name="adj" fmla="val 12000"/>
+            </a:avLst>
+          </a:prstGeom>
+          <a:solidFill>
+            <a:srgbClr val="FFFFFF"/>
+          </a:solidFill>
+          <a:ln>
+            <a:noFill/>
+          </a:ln>
+          <a:effectLst>
+            <a:outerShdw blurRad="254000" dist="63500" dir="5400000" rotWithShape="0">
+              <a:srgbClr val="0B2B45">
+                <a:alpha val="30000"/>
+              </a:srgbClr>
+            </a:outerShdw>
+          </a:effectLst>
+        </p:spPr>
+        <p:txBody>
+          <a:bodyPr rtlCol="0" anchor="ctr"/>
+          <a:lstStyle/>
+          <a:p>
+            <a:pPr algn="ctr"/>
+          </a:p>
+        </p:txBody>
+      </p:sp>
+      <p:sp>
+        <p:nvSpPr>
+          <p:cNvPr id="8" name="TextBox 7"/>
+          <p:cNvSpPr txBox="1"/>
+          <p:nvPr/>
+        </p:nvSpPr>
+        <p:spPr>
+          <a:xfrm>
+            <a:off x="8515350" y="400050"/>
+            <a:ext cx="2133600" cy="209550"/>
+          </a:xfrm>
+          <a:prstGeom prst="rect">
+            <a:avLst/>
+          </a:prstGeom>
+          <a:noFill/>
+        </p:spPr>
+        <p:txBody>
+          <a:bodyPr wrap="none" lIns="0" rIns="0" tIns="0" bIns="0" anchor="ctr">
+            <a:spAutoFit/>
+          </a:bodyPr>
+          <a:lstStyle/>
+          <a:p>
+            <a:pPr algn="l"/>
+            <a:r>
+              <a:rPr sz="1125" b="0">
+                <a:solidFill>
+                  <a:srgbClr val="6A717B"/>
+                </a:solidFill>
+                <a:latin typeface="Yu Gothic UI"/>
+              </a:rPr>
+              <a:t>どちらも</a:t>
+            </a:r>
+          </a:p>
+        </p:txBody>
+      </p:sp>
+      <p:sp>
+        <p:nvSpPr>
+          <p:cNvPr id="9" name="TextBox 8"/>
+          <p:cNvSpPr txBox="1"/>
+          <p:nvPr/>
+        </p:nvSpPr>
+        <p:spPr>
+          <a:xfrm>
+            <a:off x="8515350" y="647700"/>
+            <a:ext cx="2133600" cy="533400"/>
+          </a:xfrm>
+          <a:prstGeom prst="rect">
+            <a:avLst/>
+          </a:prstGeom>
+          <a:noFill/>
+        </p:spPr>
+        <p:txBody>
+          <a:bodyPr wrap="none" lIns="0" rIns="0" tIns="0" bIns="0" anchor="ctr">
+            <a:spAutoFit/>
+          </a:bodyPr>
+          <a:lstStyle/>
+          <a:p>
+            <a:pPr algn="l"/>
+            <a:r>
+              <a:rPr sz="3900" b="1">
+                <a:solidFill>
+                  <a:srgbClr val="014172"/>
+                </a:solidFill>
+                <a:latin typeface="Yu Gothic UI"/>
+              </a:rPr>
+              <a:t>15</a:t>
+            </a:r>
+            <a:r>
+              <a:rPr sz="1950" b="1">
+                <a:solidFill>
+                  <a:srgbClr val="014172"/>
+                </a:solidFill>
+                <a:latin typeface="Yu Gothic UI"/>
+              </a:rPr>
+              <a:t>本</a:t>
+            </a:r>
+          </a:p>
+        </p:txBody>
+      </p:sp>
+      <p:sp>
+        <p:nvSpPr>
+          <p:cNvPr id="10" name="TextBox 9"/>
+          <p:cNvSpPr txBox="1"/>
+          <p:nvPr/>
+        </p:nvSpPr>
+        <p:spPr>
+          <a:xfrm>
+            <a:off x="762000" y="1905000"/>
+            <a:ext cx="4953000" cy="228600"/>
+          </a:xfrm>
+          <a:prstGeom prst="rect">
+            <a:avLst/>
+          </a:prstGeom>
+          <a:noFill/>
+        </p:spPr>
+        <p:txBody>
+          <a:bodyPr wrap="none" lIns="0" rIns="0" tIns="0" bIns="0" anchor="ctr">
+            <a:spAutoFit/>
+          </a:bodyPr>
+          <a:lstStyle/>
+          <a:p>
+            <a:pPr algn="l"/>
+            <a:r>
+              <a:rPr sz="1200" b="1">
+                <a:solidFill>
+                  <a:srgbClr val="2E2E33"/>
+                </a:solidFill>
+                <a:latin typeface="Yu Gothic UI"/>
+              </a:rPr>
+              <a:t>ダイワ クールラインα3 2000（20L）　内寸 22 × 39cm</a:t>
+            </a:r>
+          </a:p>
+        </p:txBody>
+      </p:sp>
+      <p:sp>
+        <p:nvSpPr>
+          <p:cNvPr id="11" name="Rectangle 10"/>
+          <p:cNvSpPr/>
+          <p:nvPr/>
+        </p:nvSpPr>
+        <p:spPr>
+          <a:xfrm>
+            <a:off x="762000" y="2190750"/>
+            <a:ext cx="2674620" cy="1508760"/>
+          </a:xfrm>
+          <a:prstGeom prst="rect">
+            <a:avLst/>
+          </a:prstGeom>
+          <a:solidFill>
+            <a:srgbClr val="F2F5F8"/>
+          </a:solidFill>
+          <a:ln w="19050">
+            <a:solidFill>
+              <a:srgbClr val="DAE7F2"/>
+            </a:solidFill>
+          </a:ln>
+          <a:effectLst/>
+        </p:spPr>
+        <p:txBody>
+          <a:bodyPr rtlCol="0" anchor="ctr"/>
+          <a:lstStyle/>
+          <a:p>
+            <a:pPr algn="ctr"/>
+          </a:p>
+        </p:txBody>
+      </p:sp>
+      <p:sp>
+        <p:nvSpPr>
+          <p:cNvPr id="12" name="Oval 11"/>
+          <p:cNvSpPr/>
+          <p:nvPr/>
+        </p:nvSpPr>
+        <p:spPr>
+          <a:xfrm>
+            <a:off x="762000" y="2190750"/>
+            <a:ext cx="452628" cy="452628"/>
+          </a:xfrm>
+          <a:prstGeom prst="ellipse">
+            <a:avLst/>
+          </a:prstGeom>
+          <a:solidFill>
+            <a:srgbClr val="EEF4F9"/>
+          </a:solidFill>
+          <a:ln w="19050">
+            <a:solidFill>
+              <a:srgbClr val="014172"/>
+            </a:solidFill>
+          </a:ln>
+          <a:effectLst/>
+        </p:spPr>
+        <p:txBody>
+          <a:bodyPr rtlCol="0" anchor="ctr"/>
+          <a:lstStyle/>
+          <a:p>
+            <a:pPr algn="ctr"/>
+          </a:p>
+        </p:txBody>
+      </p:sp>
+      <p:sp>
+        <p:nvSpPr>
+          <p:cNvPr id="13" name="Oval 12"/>
+          <p:cNvSpPr/>
+          <p:nvPr/>
+        </p:nvSpPr>
+        <p:spPr>
+          <a:xfrm>
+            <a:off x="1214628" y="2190750"/>
+            <a:ext cx="452628" cy="452628"/>
+          </a:xfrm>
+          <a:prstGeom prst="ellipse">
+            <a:avLst/>
+          </a:prstGeom>
+          <a:solidFill>
+            <a:srgbClr val="EEF4F9"/>
+          </a:solidFill>
+          <a:ln w="19050">
+            <a:solidFill>
+              <a:srgbClr val="014172"/>
+            </a:solidFill>
+          </a:ln>
+          <a:effectLst/>
+        </p:spPr>
+        <p:txBody>
+          <a:bodyPr rtlCol="0" anchor="ctr"/>
+          <a:lstStyle/>
+          <a:p>
+            <a:pPr algn="ctr"/>
+          </a:p>
+        </p:txBody>
+      </p:sp>
+      <p:sp>
+        <p:nvSpPr>
+          <p:cNvPr id="14" name="Oval 13"/>
+          <p:cNvSpPr/>
+          <p:nvPr/>
+        </p:nvSpPr>
+        <p:spPr>
+          <a:xfrm>
+            <a:off x="1667256" y="2190750"/>
+            <a:ext cx="452628" cy="452628"/>
+          </a:xfrm>
+          <a:prstGeom prst="ellipse">
+            <a:avLst/>
+          </a:prstGeom>
+          <a:solidFill>
+            <a:srgbClr val="EEF4F9"/>
+          </a:solidFill>
+          <a:ln w="19050">
+            <a:solidFill>
+              <a:srgbClr val="014172"/>
+            </a:solidFill>
+          </a:ln>
+          <a:effectLst/>
+        </p:spPr>
+        <p:txBody>
+          <a:bodyPr rtlCol="0" anchor="ctr"/>
+          <a:lstStyle/>
+          <a:p>
+            <a:pPr algn="ctr"/>
+          </a:p>
+        </p:txBody>
+      </p:sp>
+      <p:sp>
+        <p:nvSpPr>
+          <p:cNvPr id="15" name="Oval 14"/>
+          <p:cNvSpPr/>
+          <p:nvPr/>
+        </p:nvSpPr>
+        <p:spPr>
+          <a:xfrm>
+            <a:off x="2119884" y="2190750"/>
+            <a:ext cx="452628" cy="452628"/>
+          </a:xfrm>
+          <a:prstGeom prst="ellipse">
+            <a:avLst/>
+          </a:prstGeom>
+          <a:solidFill>
+            <a:srgbClr val="EEF4F9"/>
+          </a:solidFill>
+          <a:ln w="19050">
+            <a:solidFill>
+              <a:srgbClr val="014172"/>
+            </a:solidFill>
+          </a:ln>
+          <a:effectLst/>
+        </p:spPr>
+        <p:txBody>
+          <a:bodyPr rtlCol="0" anchor="ctr"/>
+          <a:lstStyle/>
+          <a:p>
+            <a:pPr algn="ctr"/>
+          </a:p>
+        </p:txBody>
+      </p:sp>
+      <p:sp>
+        <p:nvSpPr>
+          <p:cNvPr id="16" name="Oval 15"/>
+          <p:cNvSpPr/>
+          <p:nvPr/>
+        </p:nvSpPr>
+        <p:spPr>
+          <a:xfrm>
+            <a:off x="2572512" y="2190750"/>
+            <a:ext cx="452628" cy="452628"/>
+          </a:xfrm>
+          <a:prstGeom prst="ellipse">
+            <a:avLst/>
+          </a:prstGeom>
+          <a:solidFill>
+            <a:srgbClr val="EEF4F9"/>
+          </a:solidFill>
+          <a:ln w="19050">
+            <a:solidFill>
+              <a:srgbClr val="014172"/>
+            </a:solidFill>
+          </a:ln>
+          <a:effectLst/>
+        </p:spPr>
+        <p:txBody>
+          <a:bodyPr rtlCol="0" anchor="ctr"/>
+          <a:lstStyle/>
+          <a:p>
+            <a:pPr algn="ctr"/>
+          </a:p>
+        </p:txBody>
+      </p:sp>
+      <p:sp>
+        <p:nvSpPr>
+          <p:cNvPr id="17" name="Oval 16"/>
+          <p:cNvSpPr/>
+          <p:nvPr/>
+        </p:nvSpPr>
+        <p:spPr>
+          <a:xfrm>
+            <a:off x="762000" y="2643378"/>
+            <a:ext cx="452628" cy="452628"/>
+          </a:xfrm>
+          <a:prstGeom prst="ellipse">
+            <a:avLst/>
+          </a:prstGeom>
+          <a:solidFill>
+            <a:srgbClr val="EEF4F9"/>
+          </a:solidFill>
+          <a:ln w="19050">
+            <a:solidFill>
+              <a:srgbClr val="014172"/>
+            </a:solidFill>
+          </a:ln>
+          <a:effectLst/>
+        </p:spPr>
+        <p:txBody>
+          <a:bodyPr rtlCol="0" anchor="ctr"/>
+          <a:lstStyle/>
+          <a:p>
+            <a:pPr algn="ctr"/>
+          </a:p>
+        </p:txBody>
+      </p:sp>
+      <p:sp>
+        <p:nvSpPr>
+          <p:cNvPr id="18" name="Oval 17"/>
+          <p:cNvSpPr/>
+          <p:nvPr/>
+        </p:nvSpPr>
+        <p:spPr>
+          <a:xfrm>
+            <a:off x="1214628" y="2643378"/>
+            <a:ext cx="452628" cy="452628"/>
+          </a:xfrm>
+          <a:prstGeom prst="ellipse">
+            <a:avLst/>
+          </a:prstGeom>
+          <a:solidFill>
+            <a:srgbClr val="EEF4F9"/>
+          </a:solidFill>
+          <a:ln w="19050">
+            <a:solidFill>
+              <a:srgbClr val="014172"/>
+            </a:solidFill>
+          </a:ln>
+          <a:effectLst/>
+        </p:spPr>
+        <p:txBody>
+          <a:bodyPr rtlCol="0" anchor="ctr"/>
+          <a:lstStyle/>
+          <a:p>
+            <a:pPr algn="ctr"/>
+          </a:p>
+        </p:txBody>
+      </p:sp>
+      <p:sp>
+        <p:nvSpPr>
+          <p:cNvPr id="19" name="Oval 18"/>
+          <p:cNvSpPr/>
+          <p:nvPr/>
+        </p:nvSpPr>
+        <p:spPr>
+          <a:xfrm>
+            <a:off x="1667256" y="2643378"/>
+            <a:ext cx="452628" cy="452628"/>
+          </a:xfrm>
+          <a:prstGeom prst="ellipse">
+            <a:avLst/>
+          </a:prstGeom>
+          <a:solidFill>
+            <a:srgbClr val="EEF4F9"/>
+          </a:solidFill>
+          <a:ln w="19050">
+            <a:solidFill>
+              <a:srgbClr val="014172"/>
+            </a:solidFill>
+          </a:ln>
+          <a:effectLst/>
+        </p:spPr>
+        <p:txBody>
+          <a:bodyPr rtlCol="0" anchor="ctr"/>
+          <a:lstStyle/>
+          <a:p>
+            <a:pPr algn="ctr"/>
+          </a:p>
+        </p:txBody>
+      </p:sp>
+      <p:sp>
+        <p:nvSpPr>
+          <p:cNvPr id="20" name="Oval 19"/>
+          <p:cNvSpPr/>
+          <p:nvPr/>
+        </p:nvSpPr>
+        <p:spPr>
+          <a:xfrm>
+            <a:off x="2119884" y="2643378"/>
+            <a:ext cx="452628" cy="452628"/>
+          </a:xfrm>
+          <a:prstGeom prst="ellipse">
+            <a:avLst/>
+          </a:prstGeom>
+          <a:solidFill>
+            <a:srgbClr val="EEF4F9"/>
+          </a:solidFill>
+          <a:ln w="19050">
+            <a:solidFill>
+              <a:srgbClr val="014172"/>
+            </a:solidFill>
+          </a:ln>
+          <a:effectLst/>
+        </p:spPr>
+        <p:txBody>
+          <a:bodyPr rtlCol="0" anchor="ctr"/>
+          <a:lstStyle/>
+          <a:p>
+            <a:pPr algn="ctr"/>
+          </a:p>
+        </p:txBody>
+      </p:sp>
+      <p:sp>
+        <p:nvSpPr>
+          <p:cNvPr id="21" name="Oval 20"/>
+          <p:cNvSpPr/>
+          <p:nvPr/>
+        </p:nvSpPr>
+        <p:spPr>
+          <a:xfrm>
+            <a:off x="2572512" y="2643378"/>
+            <a:ext cx="452628" cy="452628"/>
+          </a:xfrm>
+          <a:prstGeom prst="ellipse">
+            <a:avLst/>
+          </a:prstGeom>
+          <a:solidFill>
+            <a:srgbClr val="EEF4F9"/>
+          </a:solidFill>
+          <a:ln w="19050">
+            <a:solidFill>
+              <a:srgbClr val="014172"/>
+            </a:solidFill>
+          </a:ln>
+          <a:effectLst/>
+        </p:spPr>
+        <p:txBody>
+          <a:bodyPr rtlCol="0" anchor="ctr"/>
+          <a:lstStyle/>
+          <a:p>
+            <a:pPr algn="ctr"/>
+          </a:p>
+        </p:txBody>
+      </p:sp>
+      <p:sp>
+        <p:nvSpPr>
+          <p:cNvPr id="22" name="Oval 21"/>
+          <p:cNvSpPr/>
+          <p:nvPr/>
+        </p:nvSpPr>
+        <p:spPr>
+          <a:xfrm>
+            <a:off x="762000" y="3096006"/>
+            <a:ext cx="452628" cy="452628"/>
+          </a:xfrm>
+          <a:prstGeom prst="ellipse">
+            <a:avLst/>
+          </a:prstGeom>
+          <a:solidFill>
+            <a:srgbClr val="EEF4F9"/>
+          </a:solidFill>
+          <a:ln w="19050">
+            <a:solidFill>
+              <a:srgbClr val="014172"/>
+            </a:solidFill>
+          </a:ln>
+          <a:effectLst/>
+        </p:spPr>
+        <p:txBody>
+          <a:bodyPr rtlCol="0" anchor="ctr"/>
+          <a:lstStyle/>
+          <a:p>
+            <a:pPr algn="ctr"/>
+          </a:p>
+        </p:txBody>
+      </p:sp>
+      <p:sp>
+        <p:nvSpPr>
+          <p:cNvPr id="23" name="Oval 22"/>
+          <p:cNvSpPr/>
+          <p:nvPr/>
+        </p:nvSpPr>
+        <p:spPr>
+          <a:xfrm>
+            <a:off x="1214628" y="3096006"/>
+            <a:ext cx="452628" cy="452628"/>
+          </a:xfrm>
+          <a:prstGeom prst="ellipse">
+            <a:avLst/>
+          </a:prstGeom>
+          <a:solidFill>
+            <a:srgbClr val="EEF4F9"/>
+          </a:solidFill>
+          <a:ln w="19050">
+            <a:solidFill>
+              <a:srgbClr val="014172"/>
+            </a:solidFill>
+          </a:ln>
+          <a:effectLst/>
+        </p:spPr>
+        <p:txBody>
+          <a:bodyPr rtlCol="0" anchor="ctr"/>
+          <a:lstStyle/>
+          <a:p>
+            <a:pPr algn="ctr"/>
+          </a:p>
+        </p:txBody>
+      </p:sp>
+      <p:sp>
+        <p:nvSpPr>
+          <p:cNvPr id="24" name="Oval 23"/>
+          <p:cNvSpPr/>
+          <p:nvPr/>
+        </p:nvSpPr>
+        <p:spPr>
+          <a:xfrm>
+            <a:off x="1667256" y="3096006"/>
+            <a:ext cx="452628" cy="452628"/>
+          </a:xfrm>
+          <a:prstGeom prst="ellipse">
+            <a:avLst/>
+          </a:prstGeom>
+          <a:solidFill>
+            <a:srgbClr val="EEF4F9"/>
+          </a:solidFill>
+          <a:ln w="19050">
+            <a:solidFill>
+              <a:srgbClr val="014172"/>
+            </a:solidFill>
+          </a:ln>
+          <a:effectLst/>
+        </p:spPr>
+        <p:txBody>
+          <a:bodyPr rtlCol="0" anchor="ctr"/>
+          <a:lstStyle/>
+          <a:p>
+            <a:pPr algn="ctr"/>
+          </a:p>
+        </p:txBody>
+      </p:sp>
+      <p:sp>
+        <p:nvSpPr>
+          <p:cNvPr id="25" name="Oval 24"/>
+          <p:cNvSpPr/>
+          <p:nvPr/>
+        </p:nvSpPr>
+        <p:spPr>
+          <a:xfrm>
+            <a:off x="2119884" y="3096006"/>
+            <a:ext cx="452628" cy="452628"/>
+          </a:xfrm>
+          <a:prstGeom prst="ellipse">
+            <a:avLst/>
+          </a:prstGeom>
+          <a:solidFill>
+            <a:srgbClr val="EEF4F9"/>
+          </a:solidFill>
+          <a:ln w="19050">
+            <a:solidFill>
+              <a:srgbClr val="014172"/>
+            </a:solidFill>
+          </a:ln>
+          <a:effectLst/>
+        </p:spPr>
+        <p:txBody>
+          <a:bodyPr rtlCol="0" anchor="ctr"/>
+          <a:lstStyle/>
+          <a:p>
+            <a:pPr algn="ctr"/>
+          </a:p>
+        </p:txBody>
+      </p:sp>
+      <p:sp>
+        <p:nvSpPr>
+          <p:cNvPr id="26" name="Oval 25"/>
+          <p:cNvSpPr/>
+          <p:nvPr/>
+        </p:nvSpPr>
+        <p:spPr>
+          <a:xfrm>
+            <a:off x="2572512" y="3096006"/>
+            <a:ext cx="452628" cy="452628"/>
+          </a:xfrm>
+          <a:prstGeom prst="ellipse">
+            <a:avLst/>
+          </a:prstGeom>
+          <a:solidFill>
+            <a:srgbClr val="EEF4F9"/>
+          </a:solidFill>
+          <a:ln w="19050">
+            <a:solidFill>
+              <a:srgbClr val="014172"/>
+            </a:solidFill>
+          </a:ln>
+          <a:effectLst/>
+        </p:spPr>
+        <p:txBody>
+          <a:bodyPr rtlCol="0" anchor="ctr"/>
+          <a:lstStyle/>
+          <a:p>
+            <a:pPr algn="ctr"/>
+          </a:p>
+        </p:txBody>
+      </p:sp>
+      <p:sp>
+        <p:nvSpPr>
+          <p:cNvPr id="27" name="TextBox 26"/>
+          <p:cNvSpPr txBox="1"/>
+          <p:nvPr/>
+        </p:nvSpPr>
+        <p:spPr>
+          <a:xfrm>
+            <a:off x="762000" y="3851910"/>
+            <a:ext cx="4953000" cy="228600"/>
+          </a:xfrm>
+          <a:prstGeom prst="rect">
+            <a:avLst/>
+          </a:prstGeom>
+          <a:noFill/>
+        </p:spPr>
+        <p:txBody>
+          <a:bodyPr wrap="none" lIns="0" rIns="0" tIns="0" bIns="0" anchor="ctr">
+            <a:spAutoFit/>
+          </a:bodyPr>
+          <a:lstStyle/>
+          <a:p>
+            <a:pPr algn="l"/>
+            <a:r>
+              <a:rPr sz="1125" b="0">
+                <a:solidFill>
+                  <a:srgbClr val="6A717B"/>
+                </a:solidFill>
+                <a:latin typeface="Yu Gothic UI"/>
+              </a:rPr>
+              <a:t>メーカーの公表は18本（前提にしたボトルが違う）</a:t>
+            </a:r>
+          </a:p>
+        </p:txBody>
+      </p:sp>
+      <p:sp>
+        <p:nvSpPr>
+          <p:cNvPr id="28" name="TextBox 27"/>
+          <p:cNvSpPr txBox="1"/>
+          <p:nvPr/>
+        </p:nvSpPr>
+        <p:spPr>
+          <a:xfrm>
+            <a:off x="762000" y="4305300"/>
+            <a:ext cx="3810000" cy="419100"/>
+          </a:xfrm>
+          <a:prstGeom prst="rect">
+            <a:avLst/>
+          </a:prstGeom>
+          <a:noFill/>
+        </p:spPr>
+        <p:txBody>
+          <a:bodyPr wrap="none" lIns="0" rIns="0" tIns="0" bIns="0" anchor="ctr">
+            <a:spAutoFit/>
+          </a:bodyPr>
+          <a:lstStyle/>
+          <a:p>
+            <a:pPr algn="l"/>
+            <a:r>
+              <a:rPr sz="1650" b="1">
+                <a:solidFill>
+                  <a:srgbClr val="2E2E33"/>
+                </a:solidFill>
+                <a:latin typeface="Yu Gothic UI"/>
+              </a:rPr>
+              <a:t>3列 × 5行 ＝ </a:t>
+            </a:r>
+            <a:r>
+              <a:rPr sz="2550" b="1">
+                <a:solidFill>
+                  <a:srgbClr val="014172"/>
+                </a:solidFill>
+                <a:latin typeface="Yu Gothic UI"/>
+              </a:rPr>
+              <a:t>15</a:t>
+            </a:r>
+            <a:r>
+              <a:rPr sz="1500" b="1">
+                <a:solidFill>
+                  <a:srgbClr val="014172"/>
+                </a:solidFill>
+                <a:latin typeface="Yu Gothic UI"/>
+              </a:rPr>
+              <a:t>本</a:t>
+            </a:r>
+          </a:p>
+        </p:txBody>
+      </p:sp>
+      <p:sp>
+        <p:nvSpPr>
+          <p:cNvPr id="29" name="TextBox 28"/>
+          <p:cNvSpPr txBox="1"/>
+          <p:nvPr/>
+        </p:nvSpPr>
+        <p:spPr>
+          <a:xfrm>
+            <a:off x="5905500" y="1905000"/>
+            <a:ext cx="4953000" cy="228600"/>
+          </a:xfrm>
+          <a:prstGeom prst="rect">
+            <a:avLst/>
+          </a:prstGeom>
+          <a:noFill/>
+        </p:spPr>
+        <p:txBody>
+          <a:bodyPr wrap="none" lIns="0" rIns="0" tIns="0" bIns="0" anchor="ctr">
+            <a:spAutoFit/>
+          </a:bodyPr>
+          <a:lstStyle/>
+          <a:p>
+            <a:pPr algn="l"/>
+            <a:r>
+              <a:rPr sz="1200" b="1">
+                <a:solidFill>
+                  <a:srgbClr val="2E2E33"/>
+                </a:solidFill>
+                <a:latin typeface="Yu Gothic UI"/>
+              </a:rPr>
+              <a:t>シマノ フィクセル 22L　内寸（底部）21.1 × 39.1cm</a:t>
+            </a:r>
+          </a:p>
+        </p:txBody>
+      </p:sp>
+      <p:sp>
+        <p:nvSpPr>
+          <p:cNvPr id="30" name="Rectangle 29"/>
+          <p:cNvSpPr/>
+          <p:nvPr/>
+        </p:nvSpPr>
+        <p:spPr>
+          <a:xfrm>
+            <a:off x="5905500" y="2190750"/>
+            <a:ext cx="2681478" cy="1447038"/>
+          </a:xfrm>
+          <a:prstGeom prst="rect">
+            <a:avLst/>
+          </a:prstGeom>
+          <a:solidFill>
+            <a:srgbClr val="F2F5F8"/>
+          </a:solidFill>
+          <a:ln w="19050">
+            <a:solidFill>
+              <a:srgbClr val="DAE7F2"/>
+            </a:solidFill>
+          </a:ln>
+          <a:effectLst/>
+        </p:spPr>
+        <p:txBody>
+          <a:bodyPr rtlCol="0" anchor="ctr"/>
+          <a:lstStyle/>
+          <a:p>
+            <a:pPr algn="ctr"/>
+          </a:p>
+        </p:txBody>
+      </p:sp>
+      <p:sp>
+        <p:nvSpPr>
+          <p:cNvPr id="31" name="Oval 30"/>
+          <p:cNvSpPr/>
+          <p:nvPr/>
+        </p:nvSpPr>
+        <p:spPr>
+          <a:xfrm>
+            <a:off x="5905500" y="2190750"/>
+            <a:ext cx="452628" cy="452628"/>
+          </a:xfrm>
+          <a:prstGeom prst="ellipse">
+            <a:avLst/>
+          </a:prstGeom>
+          <a:solidFill>
+            <a:srgbClr val="EEF4F9"/>
+          </a:solidFill>
+          <a:ln w="19050">
+            <a:solidFill>
+              <a:srgbClr val="014172"/>
+            </a:solidFill>
+          </a:ln>
+          <a:effectLst/>
+        </p:spPr>
+        <p:txBody>
+          <a:bodyPr rtlCol="0" anchor="ctr"/>
+          <a:lstStyle/>
+          <a:p>
+            <a:pPr algn="ctr"/>
+          </a:p>
+        </p:txBody>
+      </p:sp>
+      <p:sp>
+        <p:nvSpPr>
+          <p:cNvPr id="32" name="Oval 31"/>
+          <p:cNvSpPr/>
+          <p:nvPr/>
+        </p:nvSpPr>
+        <p:spPr>
+          <a:xfrm>
+            <a:off x="6358128" y="2190750"/>
+            <a:ext cx="452628" cy="452628"/>
+          </a:xfrm>
+          <a:prstGeom prst="ellipse">
+            <a:avLst/>
+          </a:prstGeom>
+          <a:solidFill>
+            <a:srgbClr val="EEF4F9"/>
+          </a:solidFill>
+          <a:ln w="19050">
+            <a:solidFill>
+              <a:srgbClr val="014172"/>
+            </a:solidFill>
+          </a:ln>
+          <a:effectLst/>
+        </p:spPr>
+        <p:txBody>
+          <a:bodyPr rtlCol="0" anchor="ctr"/>
+          <a:lstStyle/>
+          <a:p>
+            <a:pPr algn="ctr"/>
+          </a:p>
+        </p:txBody>
+      </p:sp>
+      <p:sp>
+        <p:nvSpPr>
+          <p:cNvPr id="33" name="Oval 32"/>
+          <p:cNvSpPr/>
+          <p:nvPr/>
+        </p:nvSpPr>
+        <p:spPr>
+          <a:xfrm>
+            <a:off x="6810756" y="2190750"/>
+            <a:ext cx="452628" cy="452628"/>
+          </a:xfrm>
+          <a:prstGeom prst="ellipse">
+            <a:avLst/>
+          </a:prstGeom>
+          <a:solidFill>
+            <a:srgbClr val="EEF4F9"/>
+          </a:solidFill>
+          <a:ln w="19050">
+            <a:solidFill>
+              <a:srgbClr val="014172"/>
+            </a:solidFill>
+          </a:ln>
+          <a:effectLst/>
+        </p:spPr>
+        <p:txBody>
+          <a:bodyPr rtlCol="0" anchor="ctr"/>
+          <a:lstStyle/>
+          <a:p>
+            <a:pPr algn="ctr"/>
+          </a:p>
+        </p:txBody>
+      </p:sp>
+      <p:sp>
+        <p:nvSpPr>
+          <p:cNvPr id="34" name="Oval 33"/>
+          <p:cNvSpPr/>
+          <p:nvPr/>
+        </p:nvSpPr>
+        <p:spPr>
+          <a:xfrm>
+            <a:off x="7263384" y="2190750"/>
+            <a:ext cx="452628" cy="452628"/>
+          </a:xfrm>
+          <a:prstGeom prst="ellipse">
+            <a:avLst/>
+          </a:prstGeom>
+          <a:solidFill>
+            <a:srgbClr val="EEF4F9"/>
+          </a:solidFill>
+          <a:ln w="19050">
+            <a:solidFill>
+              <a:srgbClr val="014172"/>
+            </a:solidFill>
+          </a:ln>
+          <a:effectLst/>
+        </p:spPr>
+        <p:txBody>
+          <a:bodyPr rtlCol="0" anchor="ctr"/>
+          <a:lstStyle/>
+          <a:p>
+            <a:pPr algn="ctr"/>
+          </a:p>
+        </p:txBody>
+      </p:sp>
+      <p:sp>
+        <p:nvSpPr>
+          <p:cNvPr id="35" name="Oval 34"/>
+          <p:cNvSpPr/>
+          <p:nvPr/>
+        </p:nvSpPr>
+        <p:spPr>
+          <a:xfrm>
+            <a:off x="7716012" y="2190750"/>
+            <a:ext cx="452628" cy="452628"/>
+          </a:xfrm>
+          <a:prstGeom prst="ellipse">
+            <a:avLst/>
+          </a:prstGeom>
+          <a:solidFill>
+            <a:srgbClr val="EEF4F9"/>
+          </a:solidFill>
+          <a:ln w="19050">
+            <a:solidFill>
+              <a:srgbClr val="014172"/>
+            </a:solidFill>
+          </a:ln>
+          <a:effectLst/>
+        </p:spPr>
+        <p:txBody>
+          <a:bodyPr rtlCol="0" anchor="ctr"/>
+          <a:lstStyle/>
+          <a:p>
+            <a:pPr algn="ctr"/>
+          </a:p>
+        </p:txBody>
+      </p:sp>
+      <p:sp>
+        <p:nvSpPr>
+          <p:cNvPr id="36" name="Oval 35"/>
+          <p:cNvSpPr/>
+          <p:nvPr/>
+        </p:nvSpPr>
+        <p:spPr>
+          <a:xfrm>
+            <a:off x="5905500" y="2643378"/>
+            <a:ext cx="452628" cy="452628"/>
+          </a:xfrm>
+          <a:prstGeom prst="ellipse">
+            <a:avLst/>
+          </a:prstGeom>
+          <a:solidFill>
+            <a:srgbClr val="EEF4F9"/>
+          </a:solidFill>
+          <a:ln w="19050">
+            <a:solidFill>
+              <a:srgbClr val="014172"/>
+            </a:solidFill>
+          </a:ln>
+          <a:effectLst/>
+        </p:spPr>
+        <p:txBody>
+          <a:bodyPr rtlCol="0" anchor="ctr"/>
+          <a:lstStyle/>
+          <a:p>
+            <a:pPr algn="ctr"/>
+          </a:p>
+        </p:txBody>
+      </p:sp>
+      <p:sp>
+        <p:nvSpPr>
+          <p:cNvPr id="37" name="Oval 36"/>
+          <p:cNvSpPr/>
+          <p:nvPr/>
+        </p:nvSpPr>
+        <p:spPr>
+          <a:xfrm>
+            <a:off x="6358128" y="2643378"/>
+            <a:ext cx="452628" cy="452628"/>
+          </a:xfrm>
+          <a:prstGeom prst="ellipse">
+            <a:avLst/>
+          </a:prstGeom>
+          <a:solidFill>
+            <a:srgbClr val="EEF4F9"/>
+          </a:solidFill>
+          <a:ln w="19050">
+            <a:solidFill>
+              <a:srgbClr val="014172"/>
+            </a:solidFill>
+          </a:ln>
+          <a:effectLst/>
+        </p:spPr>
+        <p:txBody>
+          <a:bodyPr rtlCol="0" anchor="ctr"/>
+          <a:lstStyle/>
+          <a:p>
+            <a:pPr algn="ctr"/>
+          </a:p>
+        </p:txBody>
+      </p:sp>
+      <p:sp>
+        <p:nvSpPr>
+          <p:cNvPr id="38" name="Oval 37"/>
+          <p:cNvSpPr/>
+          <p:nvPr/>
+        </p:nvSpPr>
+        <p:spPr>
+          <a:xfrm>
+            <a:off x="6810756" y="2643378"/>
+            <a:ext cx="452628" cy="452628"/>
+          </a:xfrm>
+          <a:prstGeom prst="ellipse">
+            <a:avLst/>
+          </a:prstGeom>
+          <a:solidFill>
+            <a:srgbClr val="EEF4F9"/>
+          </a:solidFill>
+          <a:ln w="19050">
+            <a:solidFill>
+              <a:srgbClr val="014172"/>
+            </a:solidFill>
+          </a:ln>
+          <a:effectLst/>
+        </p:spPr>
+        <p:txBody>
+          <a:bodyPr rtlCol="0" anchor="ctr"/>
+          <a:lstStyle/>
+          <a:p>
+            <a:pPr algn="ctr"/>
+          </a:p>
+        </p:txBody>
+      </p:sp>
+      <p:sp>
+        <p:nvSpPr>
+          <p:cNvPr id="39" name="Oval 38"/>
+          <p:cNvSpPr/>
+          <p:nvPr/>
+        </p:nvSpPr>
+        <p:spPr>
+          <a:xfrm>
+            <a:off x="7263384" y="2643378"/>
+            <a:ext cx="452628" cy="452628"/>
+          </a:xfrm>
+          <a:prstGeom prst="ellipse">
+            <a:avLst/>
+          </a:prstGeom>
+          <a:solidFill>
+            <a:srgbClr val="EEF4F9"/>
+          </a:solidFill>
+          <a:ln w="19050">
+            <a:solidFill>
+              <a:srgbClr val="014172"/>
+            </a:solidFill>
+          </a:ln>
+          <a:effectLst/>
+        </p:spPr>
+        <p:txBody>
+          <a:bodyPr rtlCol="0" anchor="ctr"/>
+          <a:lstStyle/>
+          <a:p>
+            <a:pPr algn="ctr"/>
+          </a:p>
+        </p:txBody>
+      </p:sp>
+      <p:sp>
+        <p:nvSpPr>
+          <p:cNvPr id="40" name="Oval 39"/>
+          <p:cNvSpPr/>
+          <p:nvPr/>
+        </p:nvSpPr>
+        <p:spPr>
+          <a:xfrm>
+            <a:off x="7716012" y="2643378"/>
+            <a:ext cx="452628" cy="452628"/>
+          </a:xfrm>
+          <a:prstGeom prst="ellipse">
+            <a:avLst/>
+          </a:prstGeom>
+          <a:solidFill>
+            <a:srgbClr val="EEF4F9"/>
+          </a:solidFill>
+          <a:ln w="19050">
+            <a:solidFill>
+              <a:srgbClr val="014172"/>
+            </a:solidFill>
+          </a:ln>
+          <a:effectLst/>
+        </p:spPr>
+        <p:txBody>
+          <a:bodyPr rtlCol="0" anchor="ctr"/>
+          <a:lstStyle/>
+          <a:p>
+            <a:pPr algn="ctr"/>
+          </a:p>
+        </p:txBody>
+      </p:sp>
+      <p:sp>
+        <p:nvSpPr>
+          <p:cNvPr id="41" name="Oval 40"/>
+          <p:cNvSpPr/>
+          <p:nvPr/>
+        </p:nvSpPr>
+        <p:spPr>
+          <a:xfrm>
+            <a:off x="5905500" y="3096006"/>
+            <a:ext cx="452628" cy="452628"/>
+          </a:xfrm>
+          <a:prstGeom prst="ellipse">
+            <a:avLst/>
+          </a:prstGeom>
+          <a:solidFill>
+            <a:srgbClr val="EEF4F9"/>
+          </a:solidFill>
+          <a:ln w="19050">
+            <a:solidFill>
+              <a:srgbClr val="014172"/>
+            </a:solidFill>
+          </a:ln>
+          <a:effectLst/>
+        </p:spPr>
+        <p:txBody>
+          <a:bodyPr rtlCol="0" anchor="ctr"/>
+          <a:lstStyle/>
+          <a:p>
+            <a:pPr algn="ctr"/>
+          </a:p>
+        </p:txBody>
+      </p:sp>
+      <p:sp>
+        <p:nvSpPr>
+          <p:cNvPr id="42" name="Oval 41"/>
+          <p:cNvSpPr/>
+          <p:nvPr/>
+        </p:nvSpPr>
+        <p:spPr>
+          <a:xfrm>
+            <a:off x="6358128" y="3096006"/>
+            <a:ext cx="452628" cy="452628"/>
+          </a:xfrm>
+          <a:prstGeom prst="ellipse">
+            <a:avLst/>
+          </a:prstGeom>
+          <a:solidFill>
+            <a:srgbClr val="EEF4F9"/>
+          </a:solidFill>
+          <a:ln w="19050">
+            <a:solidFill>
+              <a:srgbClr val="014172"/>
+            </a:solidFill>
+          </a:ln>
+          <a:effectLst/>
+        </p:spPr>
+        <p:txBody>
+          <a:bodyPr rtlCol="0" anchor="ctr"/>
+          <a:lstStyle/>
+          <a:p>
+            <a:pPr algn="ctr"/>
+          </a:p>
+        </p:txBody>
+      </p:sp>
+      <p:sp>
+        <p:nvSpPr>
+          <p:cNvPr id="43" name="Oval 42"/>
+          <p:cNvSpPr/>
+          <p:nvPr/>
+        </p:nvSpPr>
+        <p:spPr>
+          <a:xfrm>
+            <a:off x="6810756" y="3096006"/>
+            <a:ext cx="452628" cy="452628"/>
+          </a:xfrm>
+          <a:prstGeom prst="ellipse">
+            <a:avLst/>
+          </a:prstGeom>
+          <a:solidFill>
+            <a:srgbClr val="EEF4F9"/>
+          </a:solidFill>
+          <a:ln w="19050">
+            <a:solidFill>
+              <a:srgbClr val="014172"/>
+            </a:solidFill>
+          </a:ln>
+          <a:effectLst/>
+        </p:spPr>
+        <p:txBody>
+          <a:bodyPr rtlCol="0" anchor="ctr"/>
+          <a:lstStyle/>
+          <a:p>
+            <a:pPr algn="ctr"/>
+          </a:p>
+        </p:txBody>
+      </p:sp>
+      <p:sp>
+        <p:nvSpPr>
+          <p:cNvPr id="44" name="Oval 43"/>
+          <p:cNvSpPr/>
+          <p:nvPr/>
+        </p:nvSpPr>
+        <p:spPr>
+          <a:xfrm>
+            <a:off x="7263384" y="3096006"/>
+            <a:ext cx="452628" cy="452628"/>
+          </a:xfrm>
+          <a:prstGeom prst="ellipse">
+            <a:avLst/>
+          </a:prstGeom>
+          <a:solidFill>
+            <a:srgbClr val="EEF4F9"/>
+          </a:solidFill>
+          <a:ln w="19050">
+            <a:solidFill>
+              <a:srgbClr val="014172"/>
+            </a:solidFill>
+          </a:ln>
+          <a:effectLst/>
+        </p:spPr>
+        <p:txBody>
+          <a:bodyPr rtlCol="0" anchor="ctr"/>
+          <a:lstStyle/>
+          <a:p>
+            <a:pPr algn="ctr"/>
+          </a:p>
+        </p:txBody>
+      </p:sp>
+      <p:sp>
+        <p:nvSpPr>
+          <p:cNvPr id="45" name="Oval 44"/>
+          <p:cNvSpPr/>
+          <p:nvPr/>
+        </p:nvSpPr>
+        <p:spPr>
+          <a:xfrm>
+            <a:off x="7716012" y="3096006"/>
+            <a:ext cx="452628" cy="452628"/>
+          </a:xfrm>
+          <a:prstGeom prst="ellipse">
+            <a:avLst/>
+          </a:prstGeom>
+          <a:solidFill>
+            <a:srgbClr val="EEF4F9"/>
+          </a:solidFill>
+          <a:ln w="19050">
+            <a:solidFill>
+              <a:srgbClr val="014172"/>
+            </a:solidFill>
+          </a:ln>
+          <a:effectLst/>
+        </p:spPr>
+        <p:txBody>
+          <a:bodyPr rtlCol="0" anchor="ctr"/>
+          <a:lstStyle/>
+          <a:p>
+            <a:pPr algn="ctr"/>
+          </a:p>
+        </p:txBody>
+      </p:sp>
+      <p:sp>
+        <p:nvSpPr>
+          <p:cNvPr id="46" name="TextBox 45"/>
+          <p:cNvSpPr txBox="1"/>
+          <p:nvPr/>
+        </p:nvSpPr>
+        <p:spPr>
+          <a:xfrm>
+            <a:off x="5905500" y="3790188"/>
+            <a:ext cx="4953000" cy="228600"/>
+          </a:xfrm>
+          <a:prstGeom prst="rect">
+            <a:avLst/>
+          </a:prstGeom>
+          <a:noFill/>
+        </p:spPr>
+        <p:txBody>
+          <a:bodyPr wrap="none" lIns="0" rIns="0" tIns="0" bIns="0" anchor="ctr">
+            <a:spAutoFit/>
+          </a:bodyPr>
+          <a:lstStyle/>
+          <a:p>
+            <a:pPr algn="l"/>
+            <a:r>
+              <a:rPr sz="1125" b="0">
+                <a:solidFill>
+                  <a:srgbClr val="6A717B"/>
+                </a:solidFill>
+                <a:latin typeface="Yu Gothic UI"/>
+              </a:rPr>
+              <a:t>本数の公表なし。内寸は「底部」の値を使った</a:t>
+            </a:r>
+          </a:p>
+        </p:txBody>
+      </p:sp>
+      <p:sp>
+        <p:nvSpPr>
+          <p:cNvPr id="47" name="TextBox 46"/>
+          <p:cNvSpPr txBox="1"/>
+          <p:nvPr/>
+        </p:nvSpPr>
+        <p:spPr>
+          <a:xfrm>
+            <a:off x="5905500" y="4305300"/>
+            <a:ext cx="3810000" cy="419100"/>
+          </a:xfrm>
+          <a:prstGeom prst="rect">
+            <a:avLst/>
+          </a:prstGeom>
+          <a:noFill/>
+        </p:spPr>
+        <p:txBody>
+          <a:bodyPr wrap="none" lIns="0" rIns="0" tIns="0" bIns="0" anchor="ctr">
+            <a:spAutoFit/>
+          </a:bodyPr>
+          <a:lstStyle/>
+          <a:p>
+            <a:pPr algn="l"/>
+            <a:r>
+              <a:rPr sz="1650" b="1">
+                <a:solidFill>
+                  <a:srgbClr val="2E2E33"/>
+                </a:solidFill>
+                <a:latin typeface="Yu Gothic UI"/>
+              </a:rPr>
+              <a:t>3列 × 5行 ＝ </a:t>
+            </a:r>
+            <a:r>
+              <a:rPr sz="2550" b="1">
+                <a:solidFill>
+                  <a:srgbClr val="014172"/>
+                </a:solidFill>
+                <a:latin typeface="Yu Gothic UI"/>
+              </a:rPr>
+              <a:t>15</a:t>
+            </a:r>
+            <a:r>
+              <a:rPr sz="1500" b="1">
+                <a:solidFill>
+                  <a:srgbClr val="014172"/>
+                </a:solidFill>
+                <a:latin typeface="Yu Gothic UI"/>
+              </a:rPr>
+              <a:t>本</a:t>
+            </a:r>
+          </a:p>
+        </p:txBody>
+      </p:sp>
+      <p:sp>
+        <p:nvSpPr>
+          <p:cNvPr id="48" name="Rectangle 47"/>
+          <p:cNvSpPr/>
+          <p:nvPr/>
+        </p:nvSpPr>
+        <p:spPr>
+          <a:xfrm>
+            <a:off x="609600" y="5295900"/>
+            <a:ext cx="10210800" cy="9525"/>
+          </a:xfrm>
+          <a:prstGeom prst="rect">
+            <a:avLst/>
+          </a:prstGeom>
+          <a:solidFill>
+            <a:srgbClr val="E2E7EC"/>
+          </a:solidFill>
+          <a:ln>
+            <a:noFill/>
+          </a:ln>
+          <a:effectLst/>
+        </p:spPr>
+        <p:txBody>
+          <a:bodyPr rtlCol="0" anchor="ctr"/>
+          <a:lstStyle/>
+          <a:p>
+            <a:pPr algn="ctr"/>
+          </a:p>
+        </p:txBody>
+      </p:sp>
+      <p:sp>
+        <p:nvSpPr>
+          <p:cNvPr id="49" name="TextBox 48"/>
+          <p:cNvSpPr txBox="1"/>
+          <p:nvPr/>
+        </p:nvSpPr>
+        <p:spPr>
+          <a:xfrm>
+            <a:off x="609600" y="5429250"/>
+            <a:ext cx="7239000" cy="247650"/>
+          </a:xfrm>
+          <a:prstGeom prst="rect">
+            <a:avLst/>
+          </a:prstGeom>
+          <a:noFill/>
+        </p:spPr>
+        <p:txBody>
+          <a:bodyPr wrap="none" lIns="0" rIns="0" tIns="0" bIns="0" anchor="ctr">
+            <a:spAutoFit/>
+          </a:bodyPr>
+          <a:lstStyle/>
+          <a:p>
+            <a:pPr algn="l"/>
+            <a:r>
+              <a:rPr sz="1425" b="1">
+                <a:solidFill>
+                  <a:srgbClr val="2E2E33"/>
+                </a:solidFill>
+                <a:latin typeface="Yu Gothic UI"/>
+              </a:rPr>
+              <a:t>公表容量が違っても、入る本数は同じでした。</a:t>
+            </a:r>
+          </a:p>
+        </p:txBody>
+      </p:sp>
+      <p:sp>
+        <p:nvSpPr>
+          <p:cNvPr id="50" name="TextBox 49"/>
+          <p:cNvSpPr txBox="1"/>
+          <p:nvPr/>
+        </p:nvSpPr>
+        <p:spPr>
+          <a:xfrm>
+            <a:off x="609600" y="5676900"/>
+            <a:ext cx="7620000" cy="209550"/>
+          </a:xfrm>
+          <a:prstGeom prst="rect">
+            <a:avLst/>
+          </a:prstGeom>
+          <a:noFill/>
+        </p:spPr>
+        <p:txBody>
+          <a:bodyPr wrap="none" lIns="0" rIns="0" tIns="0" bIns="0" anchor="ctr">
+            <a:spAutoFit/>
+          </a:bodyPr>
+          <a:lstStyle/>
+          <a:p>
+            <a:pPr algn="l"/>
+            <a:r>
+              <a:rPr sz="1050" b="0">
+                <a:solidFill>
+                  <a:srgbClr val="6A717B"/>
+                </a:solidFill>
+                <a:latin typeface="Yu Gothic UI"/>
+              </a:rPr>
+              <a:t>メーカー公表値からの計算です（実測ではありません）</a:t>
+            </a:r>
+          </a:p>
+        </p:txBody>
+      </p:sp>
+      <p:sp>
+        <p:nvSpPr>
+          <p:cNvPr id="51" name="TextBox 50"/>
+          <p:cNvSpPr txBox="1"/>
+          <p:nvPr/>
+        </p:nvSpPr>
+        <p:spPr>
+          <a:xfrm>
+            <a:off x="7962900" y="5676900"/>
+            <a:ext cx="2857500" cy="209550"/>
+          </a:xfrm>
+          <a:prstGeom prst="rect">
+            <a:avLst/>
+          </a:prstGeom>
+          <a:noFill/>
+        </p:spPr>
+        <p:txBody>
+          <a:bodyPr wrap="none" lIns="0" rIns="0" tIns="0" bIns="0" anchor="ctr">
+            <a:spAutoFit/>
+          </a:bodyPr>
+          <a:lstStyle/>
+          <a:p>
+            <a:pPr algn="r"/>
+            <a:r>
+              <a:rPr sz="1050" b="0">
+                <a:solidFill>
+                  <a:srgbClr val="6A717B"/>
+                </a:solidFill>
+                <a:latin typeface="Yu Gothic UI"/>
+              </a:rPr>
+              <a:t>寸法で選ぶ　sunpou.nexeed-lab.com</a:t>
+            </a:r>
+          </a:p>
+        </p:txBody>
+      </p:sp>
+    </p:spTree>
+  </p:cSld>
+  <p:clrMapOvr>
+    <a:masterClrMapping/>
+  </p:clrMapOvr>
+</p:sld>
+</file>
+
+<file path=ppt/slides/slide23.xml><?xml version="1.0" encoding="utf-8"?>
+<p:sld xmlns:a="http://schemas.openxmlformats.org/drawingml/2006/main" xmlns:p="http://schemas.openxmlformats.org/presentationml/2006/main" xmlns:r="http://schemas.openxmlformats.org/officeDocument/2006/relationships">
+  <p:cSld>
+    <p:spTree>
+      <p:nvGrpSpPr>
+        <p:cNvPr id="1" name=""/>
+        <p:cNvGrpSpPr/>
+        <p:nvPr/>
+      </p:nvGrpSpPr>
+      <p:grpSpPr/>
+      <p:sp>
+        <p:nvSpPr>
+          <p:cNvPr id="2" name="Rectangle 1"/>
+          <p:cNvSpPr/>
+          <p:nvPr/>
+        </p:nvSpPr>
+        <p:spPr>
+          <a:xfrm>
+            <a:off x="0" y="0"/>
+            <a:ext cx="11430000" cy="6000750"/>
+          </a:xfrm>
+          <a:prstGeom prst="rect">
+            <a:avLst/>
+          </a:prstGeom>
+          <a:solidFill>
+            <a:srgbClr val="FCFCFC"/>
+          </a:solidFill>
+          <a:ln>
+            <a:noFill/>
+          </a:ln>
+          <a:effectLst/>
+        </p:spPr>
+        <p:txBody>
+          <a:bodyPr rtlCol="0" anchor="ctr"/>
+          <a:lstStyle/>
+          <a:p>
+            <a:pPr algn="ctr"/>
+          </a:p>
+        </p:txBody>
+      </p:sp>
+      <p:sp>
+        <p:nvSpPr>
+          <p:cNvPr id="3" name="Rectangle 2"/>
+          <p:cNvSpPr/>
+          <p:nvPr/>
+        </p:nvSpPr>
+        <p:spPr>
+          <a:xfrm>
+            <a:off x="0" y="0"/>
+            <a:ext cx="114300" cy="6000750"/>
+          </a:xfrm>
+          <a:prstGeom prst="rect">
+            <a:avLst/>
+          </a:prstGeom>
+          <a:solidFill>
+            <a:srgbClr val="014172"/>
+          </a:solidFill>
+          <a:ln>
+            <a:noFill/>
+          </a:ln>
+          <a:effectLst/>
+        </p:spPr>
+        <p:txBody>
+          <a:bodyPr rtlCol="0" anchor="ctr"/>
+          <a:lstStyle/>
+          <a:p>
+            <a:pPr algn="ctr"/>
+          </a:p>
+        </p:txBody>
+      </p:sp>
+      <p:sp>
+        <p:nvSpPr>
+          <p:cNvPr id="4" name="Rectangle 3"/>
+          <p:cNvSpPr/>
+          <p:nvPr/>
+        </p:nvSpPr>
+        <p:spPr>
+          <a:xfrm>
+            <a:off x="0" y="0"/>
+            <a:ext cx="11430000" cy="1504950"/>
+          </a:xfrm>
+          <a:prstGeom prst="rect">
+            <a:avLst/>
+          </a:prstGeom>
+          <a:solidFill>
+            <a:srgbClr val="014172"/>
+          </a:solidFill>
+          <a:ln>
+            <a:noFill/>
+          </a:ln>
+          <a:effectLst/>
+        </p:spPr>
+        <p:txBody>
+          <a:bodyPr rtlCol="0" anchor="ctr"/>
+          <a:lstStyle/>
+          <a:p>
+            <a:pPr algn="ctr"/>
+          </a:p>
+        </p:txBody>
+      </p:sp>
+      <p:sp>
+        <p:nvSpPr>
+          <p:cNvPr id="5" name="TextBox 4"/>
+          <p:cNvSpPr txBox="1"/>
+          <p:nvPr/>
+        </p:nvSpPr>
+        <p:spPr>
+          <a:xfrm>
+            <a:off x="609600" y="361950"/>
+            <a:ext cx="7429500" cy="476250"/>
+          </a:xfrm>
+          <a:prstGeom prst="rect">
+            <a:avLst/>
+          </a:prstGeom>
+          <a:noFill/>
+        </p:spPr>
+        <p:txBody>
+          <a:bodyPr wrap="none" lIns="0" rIns="0" tIns="0" bIns="0" anchor="ctr">
+            <a:spAutoFit/>
+          </a:bodyPr>
+          <a:lstStyle/>
+          <a:p>
+            <a:pPr algn="l"/>
+            <a:r>
+              <a:rPr sz="3000" b="1">
+                <a:solidFill>
+                  <a:srgbClr val="FFFFFF"/>
+                </a:solidFill>
+                <a:latin typeface="Yu Gothic UI"/>
+              </a:rPr>
+              <a:t>同じ箱・同じ1枚。置き方だけで違う</a:t>
+            </a:r>
+          </a:p>
+        </p:txBody>
+      </p:sp>
+      <p:sp>
+        <p:nvSpPr>
+          <p:cNvPr id="6" name="TextBox 5"/>
+          <p:cNvSpPr txBox="1"/>
+          <p:nvPr/>
+        </p:nvSpPr>
+        <p:spPr>
+          <a:xfrm>
+            <a:off x="609600" y="876300"/>
+            <a:ext cx="7429500" cy="247650"/>
+          </a:xfrm>
+          <a:prstGeom prst="rect">
+            <a:avLst/>
+          </a:prstGeom>
+          <a:noFill/>
+        </p:spPr>
+        <p:txBody>
+          <a:bodyPr wrap="none" lIns="0" rIns="0" tIns="0" bIns="0" anchor="ctr">
+            <a:spAutoFit/>
+          </a:bodyPr>
+          <a:lstStyle/>
+          <a:p>
+            <a:pPr algn="l"/>
+            <a:r>
+              <a:rPr sz="1425" b="0">
+                <a:solidFill>
+                  <a:srgbClr val="DAE7F2"/>
+                </a:solidFill>
+                <a:latin typeface="Yu Gothic UI"/>
+              </a:rPr>
+              <a:t>ダイワ S2000（20L）内寸 22 × 39cm ／ 500ml角型 胴径60mm</a:t>
+            </a:r>
+          </a:p>
+        </p:txBody>
+      </p:sp>
+      <p:sp>
+        <p:nvSpPr>
+          <p:cNvPr id="7" name="Rounded Rectangle 6"/>
+          <p:cNvSpPr/>
+          <p:nvPr/>
+        </p:nvSpPr>
+        <p:spPr>
+          <a:xfrm>
+            <a:off x="8305800" y="247650"/>
+            <a:ext cx="2514600" cy="1009650"/>
+          </a:xfrm>
+          <a:prstGeom prst="roundRect">
+            <a:avLst>
+              <a:gd name="adj" fmla="val 12000"/>
+            </a:avLst>
+          </a:prstGeom>
+          <a:solidFill>
+            <a:srgbClr val="FFFFFF"/>
+          </a:solidFill>
+          <a:ln>
+            <a:noFill/>
+          </a:ln>
+          <a:effectLst>
+            <a:outerShdw blurRad="254000" dist="63500" dir="5400000" rotWithShape="0">
+              <a:srgbClr val="0B2B45">
+                <a:alpha val="30000"/>
+              </a:srgbClr>
+            </a:outerShdw>
+          </a:effectLst>
+        </p:spPr>
+        <p:txBody>
+          <a:bodyPr rtlCol="0" anchor="ctr"/>
+          <a:lstStyle/>
+          <a:p>
+            <a:pPr algn="ctr"/>
+          </a:p>
+        </p:txBody>
+      </p:sp>
+      <p:sp>
+        <p:nvSpPr>
+          <p:cNvPr id="8" name="TextBox 7"/>
+          <p:cNvSpPr txBox="1"/>
+          <p:nvPr/>
+        </p:nvSpPr>
+        <p:spPr>
+          <a:xfrm>
+            <a:off x="8515350" y="400050"/>
+            <a:ext cx="2133600" cy="209550"/>
+          </a:xfrm>
+          <a:prstGeom prst="rect">
+            <a:avLst/>
+          </a:prstGeom>
+          <a:noFill/>
+        </p:spPr>
+        <p:txBody>
+          <a:bodyPr wrap="none" lIns="0" rIns="0" tIns="0" bIns="0" anchor="ctr">
+            <a:spAutoFit/>
+          </a:bodyPr>
+          <a:lstStyle/>
+          <a:p>
+            <a:pPr algn="l"/>
+            <a:r>
+              <a:rPr sz="1125" b="0">
+                <a:solidFill>
+                  <a:srgbClr val="6A717B"/>
+                </a:solidFill>
+                <a:latin typeface="Yu Gothic UI"/>
+              </a:rPr>
+              <a:t>寝かせると</a:t>
+            </a:r>
+          </a:p>
+        </p:txBody>
+      </p:sp>
+      <p:sp>
+        <p:nvSpPr>
+          <p:cNvPr id="9" name="TextBox 8"/>
+          <p:cNvSpPr txBox="1"/>
+          <p:nvPr/>
+        </p:nvSpPr>
+        <p:spPr>
+          <a:xfrm>
+            <a:off x="8515350" y="647700"/>
+            <a:ext cx="2133600" cy="533400"/>
+          </a:xfrm>
+          <a:prstGeom prst="rect">
+            <a:avLst/>
+          </a:prstGeom>
+          <a:noFill/>
+        </p:spPr>
+        <p:txBody>
+          <a:bodyPr wrap="none" lIns="0" rIns="0" tIns="0" bIns="0" anchor="ctr">
+            <a:spAutoFit/>
+          </a:bodyPr>
+          <a:lstStyle/>
+          <a:p>
+            <a:pPr algn="l"/>
+            <a:r>
+              <a:rPr sz="3900" b="1">
+                <a:solidFill>
+                  <a:srgbClr val="014172"/>
+                </a:solidFill>
+                <a:latin typeface="Yu Gothic UI"/>
+              </a:rPr>
+              <a:t>6</a:t>
+            </a:r>
+            <a:r>
+              <a:rPr sz="1950" b="1">
+                <a:solidFill>
+                  <a:srgbClr val="014172"/>
+                </a:solidFill>
+                <a:latin typeface="Yu Gothic UI"/>
+              </a:rPr>
+              <a:t>本</a:t>
+            </a:r>
+          </a:p>
+        </p:txBody>
+      </p:sp>
+      <p:sp>
+        <p:nvSpPr>
+          <p:cNvPr id="10" name="TextBox 9"/>
+          <p:cNvSpPr txBox="1"/>
+          <p:nvPr/>
+        </p:nvSpPr>
+        <p:spPr>
+          <a:xfrm>
+            <a:off x="762000" y="1905000"/>
+            <a:ext cx="4953000" cy="228600"/>
+          </a:xfrm>
+          <a:prstGeom prst="rect">
+            <a:avLst/>
+          </a:prstGeom>
+          <a:noFill/>
+        </p:spPr>
+        <p:txBody>
+          <a:bodyPr wrap="none" lIns="0" rIns="0" tIns="0" bIns="0" anchor="ctr">
+            <a:spAutoFit/>
+          </a:bodyPr>
+          <a:lstStyle/>
+          <a:p>
+            <a:pPr algn="l"/>
+            <a:r>
+              <a:rPr sz="1125" b="1">
+                <a:solidFill>
+                  <a:srgbClr val="2E2E33"/>
+                </a:solidFill>
+                <a:latin typeface="Yu Gothic UI"/>
+              </a:rPr>
+              <a:t>氷点下パックL（25.5 × 16.4 × 厚2.5cm）を床に寝かせる</a:t>
+            </a:r>
+          </a:p>
+        </p:txBody>
+      </p:sp>
+      <p:sp>
+        <p:nvSpPr>
+          <p:cNvPr id="11" name="Rectangle 10"/>
+          <p:cNvSpPr/>
+          <p:nvPr/>
+        </p:nvSpPr>
+        <p:spPr>
+          <a:xfrm>
+            <a:off x="762000" y="2190750"/>
+            <a:ext cx="2748915" cy="1550670"/>
+          </a:xfrm>
+          <a:prstGeom prst="rect">
+            <a:avLst/>
+          </a:prstGeom>
+          <a:solidFill>
+            <a:srgbClr val="F2F5F8"/>
+          </a:solidFill>
+          <a:ln w="19050">
+            <a:solidFill>
+              <a:srgbClr val="DAE7F2"/>
+            </a:solidFill>
+          </a:ln>
+          <a:effectLst/>
+        </p:spPr>
+        <p:txBody>
+          <a:bodyPr rtlCol="0" anchor="ctr"/>
+          <a:lstStyle/>
+          <a:p>
+            <a:pPr algn="ctr"/>
+          </a:p>
+        </p:txBody>
+      </p:sp>
+      <p:sp>
+        <p:nvSpPr>
+          <p:cNvPr id="12" name="Rectangle 11"/>
+          <p:cNvSpPr/>
+          <p:nvPr/>
+        </p:nvSpPr>
+        <p:spPr>
+          <a:xfrm>
+            <a:off x="762000" y="2190750"/>
+            <a:ext cx="1797368" cy="1155954"/>
+          </a:xfrm>
+          <a:prstGeom prst="rect">
+            <a:avLst/>
+          </a:prstGeom>
+          <a:solidFill>
+            <a:srgbClr val="FDF2E4"/>
+          </a:solidFill>
+          <a:ln w="19050">
+            <a:solidFill>
+              <a:srgbClr val="A8410F"/>
+            </a:solidFill>
+          </a:ln>
+          <a:effectLst/>
+        </p:spPr>
+        <p:txBody>
+          <a:bodyPr rtlCol="0" anchor="ctr"/>
+          <a:lstStyle/>
+          <a:p>
+            <a:pPr algn="ctr"/>
+          </a:p>
+        </p:txBody>
+      </p:sp>
+      <p:sp>
+        <p:nvSpPr>
+          <p:cNvPr id="13" name="Oval 12"/>
+          <p:cNvSpPr/>
+          <p:nvPr/>
+        </p:nvSpPr>
+        <p:spPr>
+          <a:xfrm>
+            <a:off x="762000" y="3384804"/>
+            <a:ext cx="422910" cy="422910"/>
+          </a:xfrm>
+          <a:prstGeom prst="ellipse">
+            <a:avLst/>
+          </a:prstGeom>
+          <a:solidFill>
+            <a:srgbClr val="EEF4F9"/>
+          </a:solidFill>
+          <a:ln w="19050">
+            <a:solidFill>
+              <a:srgbClr val="014172"/>
+            </a:solidFill>
+          </a:ln>
+          <a:effectLst/>
+        </p:spPr>
+        <p:txBody>
+          <a:bodyPr rtlCol="0" anchor="ctr"/>
+          <a:lstStyle/>
+          <a:p>
+            <a:pPr algn="ctr"/>
+          </a:p>
+        </p:txBody>
+      </p:sp>
+      <p:sp>
+        <p:nvSpPr>
+          <p:cNvPr id="14" name="Oval 13"/>
+          <p:cNvSpPr/>
+          <p:nvPr/>
+        </p:nvSpPr>
+        <p:spPr>
+          <a:xfrm>
+            <a:off x="1184910" y="3384804"/>
+            <a:ext cx="422910" cy="422910"/>
+          </a:xfrm>
+          <a:prstGeom prst="ellipse">
+            <a:avLst/>
+          </a:prstGeom>
+          <a:solidFill>
+            <a:srgbClr val="EEF4F9"/>
+          </a:solidFill>
+          <a:ln w="19050">
+            <a:solidFill>
+              <a:srgbClr val="014172"/>
+            </a:solidFill>
+          </a:ln>
+          <a:effectLst/>
+        </p:spPr>
+        <p:txBody>
+          <a:bodyPr rtlCol="0" anchor="ctr"/>
+          <a:lstStyle/>
+          <a:p>
+            <a:pPr algn="ctr"/>
+          </a:p>
+        </p:txBody>
+      </p:sp>
+      <p:sp>
+        <p:nvSpPr>
+          <p:cNvPr id="15" name="Oval 14"/>
+          <p:cNvSpPr/>
+          <p:nvPr/>
+        </p:nvSpPr>
+        <p:spPr>
+          <a:xfrm>
+            <a:off x="1607820" y="3384804"/>
+            <a:ext cx="422910" cy="422910"/>
+          </a:xfrm>
+          <a:prstGeom prst="ellipse">
+            <a:avLst/>
+          </a:prstGeom>
+          <a:solidFill>
+            <a:srgbClr val="EEF4F9"/>
+          </a:solidFill>
+          <a:ln w="19050">
+            <a:solidFill>
+              <a:srgbClr val="014172"/>
+            </a:solidFill>
+          </a:ln>
+          <a:effectLst/>
+        </p:spPr>
+        <p:txBody>
+          <a:bodyPr rtlCol="0" anchor="ctr"/>
+          <a:lstStyle/>
+          <a:p>
+            <a:pPr algn="ctr"/>
+          </a:p>
+        </p:txBody>
+      </p:sp>
+      <p:sp>
+        <p:nvSpPr>
+          <p:cNvPr id="16" name="Oval 15"/>
+          <p:cNvSpPr/>
+          <p:nvPr/>
+        </p:nvSpPr>
+        <p:spPr>
+          <a:xfrm>
+            <a:off x="762000" y="3807714"/>
+            <a:ext cx="422910" cy="422910"/>
+          </a:xfrm>
+          <a:prstGeom prst="ellipse">
+            <a:avLst/>
+          </a:prstGeom>
+          <a:solidFill>
+            <a:srgbClr val="EEF4F9"/>
+          </a:solidFill>
+          <a:ln w="19050">
+            <a:solidFill>
+              <a:srgbClr val="014172"/>
+            </a:solidFill>
+          </a:ln>
+          <a:effectLst/>
+        </p:spPr>
+        <p:txBody>
+          <a:bodyPr rtlCol="0" anchor="ctr"/>
+          <a:lstStyle/>
+          <a:p>
+            <a:pPr algn="ctr"/>
+          </a:p>
+        </p:txBody>
+      </p:sp>
+      <p:sp>
+        <p:nvSpPr>
+          <p:cNvPr id="17" name="Oval 16"/>
+          <p:cNvSpPr/>
+          <p:nvPr/>
+        </p:nvSpPr>
+        <p:spPr>
+          <a:xfrm>
+            <a:off x="1184910" y="3807714"/>
+            <a:ext cx="422910" cy="422910"/>
+          </a:xfrm>
+          <a:prstGeom prst="ellipse">
+            <a:avLst/>
+          </a:prstGeom>
+          <a:solidFill>
+            <a:srgbClr val="EEF4F9"/>
+          </a:solidFill>
+          <a:ln w="19050">
+            <a:solidFill>
+              <a:srgbClr val="014172"/>
+            </a:solidFill>
+          </a:ln>
+          <a:effectLst/>
+        </p:spPr>
+        <p:txBody>
+          <a:bodyPr rtlCol="0" anchor="ctr"/>
+          <a:lstStyle/>
+          <a:p>
+            <a:pPr algn="ctr"/>
+          </a:p>
+        </p:txBody>
+      </p:sp>
+      <p:sp>
+        <p:nvSpPr>
+          <p:cNvPr id="18" name="Oval 17"/>
+          <p:cNvSpPr/>
+          <p:nvPr/>
+        </p:nvSpPr>
+        <p:spPr>
+          <a:xfrm>
+            <a:off x="1607820" y="3807714"/>
+            <a:ext cx="422910" cy="422910"/>
+          </a:xfrm>
+          <a:prstGeom prst="ellipse">
+            <a:avLst/>
+          </a:prstGeom>
+          <a:solidFill>
+            <a:srgbClr val="EEF4F9"/>
+          </a:solidFill>
+          <a:ln w="19050">
+            <a:solidFill>
+              <a:srgbClr val="014172"/>
+            </a:solidFill>
+          </a:ln>
+          <a:effectLst/>
+        </p:spPr>
+        <p:txBody>
+          <a:bodyPr rtlCol="0" anchor="ctr"/>
+          <a:lstStyle/>
+          <a:p>
+            <a:pPr algn="ctr"/>
+          </a:p>
+        </p:txBody>
+      </p:sp>
+      <p:sp>
+        <p:nvSpPr>
+          <p:cNvPr id="19" name="TextBox 18"/>
+          <p:cNvSpPr txBox="1"/>
+          <p:nvPr/>
+        </p:nvSpPr>
+        <p:spPr>
+          <a:xfrm>
+            <a:off x="762000" y="3893820"/>
+            <a:ext cx="3810000" cy="381000"/>
+          </a:xfrm>
+          <a:prstGeom prst="rect">
+            <a:avLst/>
+          </a:prstGeom>
+          <a:noFill/>
+        </p:spPr>
+        <p:txBody>
+          <a:bodyPr wrap="none" lIns="0" rIns="0" tIns="0" bIns="0" anchor="ctr">
+            <a:spAutoFit/>
+          </a:bodyPr>
+          <a:lstStyle/>
+          <a:p>
+            <a:pPr algn="l"/>
+            <a:r>
+              <a:rPr sz="2400" b="1">
+                <a:solidFill>
+                  <a:srgbClr val="A8410F"/>
+                </a:solidFill>
+                <a:latin typeface="Yu Gothic UI"/>
+              </a:rPr>
+              <a:t>6</a:t>
+            </a:r>
+            <a:r>
+              <a:rPr sz="1500" b="1">
+                <a:solidFill>
+                  <a:srgbClr val="A8410F"/>
+                </a:solidFill>
+                <a:latin typeface="Yu Gothic UI"/>
+              </a:rPr>
+              <a:t>本</a:t>
+            </a:r>
+          </a:p>
+        </p:txBody>
+      </p:sp>
+      <p:sp>
+        <p:nvSpPr>
+          <p:cNvPr id="20" name="TextBox 19"/>
+          <p:cNvSpPr txBox="1"/>
+          <p:nvPr/>
+        </p:nvSpPr>
+        <p:spPr>
+          <a:xfrm>
+            <a:off x="762000" y="4293870"/>
+            <a:ext cx="4953000" cy="228600"/>
+          </a:xfrm>
+          <a:prstGeom prst="rect">
+            <a:avLst/>
+          </a:prstGeom>
+          <a:noFill/>
+        </p:spPr>
+        <p:txBody>
+          <a:bodyPr wrap="none" lIns="0" rIns="0" tIns="0" bIns="0" anchor="ctr">
+            <a:spAutoFit/>
+          </a:bodyPr>
+          <a:lstStyle/>
+          <a:p>
+            <a:pPr algn="l"/>
+            <a:r>
+              <a:rPr sz="1050" b="0">
+                <a:solidFill>
+                  <a:srgbClr val="6A717B"/>
+                </a:solidFill>
+                <a:latin typeface="Yu Gothic UI"/>
+              </a:rPr>
+              <a:t>残る帯は 22 − 16.4 ＝ 5.6cm。胴径6cmに足りず丸ごと死ぬ</a:t>
+            </a:r>
+          </a:p>
+        </p:txBody>
+      </p:sp>
+      <p:sp>
+        <p:nvSpPr>
+          <p:cNvPr id="21" name="TextBox 20"/>
+          <p:cNvSpPr txBox="1"/>
+          <p:nvPr/>
+        </p:nvSpPr>
+        <p:spPr>
+          <a:xfrm>
+            <a:off x="5905500" y="1905000"/>
+            <a:ext cx="4953000" cy="228600"/>
+          </a:xfrm>
+          <a:prstGeom prst="rect">
+            <a:avLst/>
+          </a:prstGeom>
+          <a:noFill/>
+        </p:spPr>
+        <p:txBody>
+          <a:bodyPr wrap="none" lIns="0" rIns="0" tIns="0" bIns="0" anchor="ctr">
+            <a:spAutoFit/>
+          </a:bodyPr>
+          <a:lstStyle/>
+          <a:p>
+            <a:pPr algn="l"/>
+            <a:r>
+              <a:rPr sz="1125" b="1">
+                <a:solidFill>
+                  <a:srgbClr val="2E2E33"/>
+                </a:solidFill>
+                <a:latin typeface="Yu Gothic UI"/>
+              </a:rPr>
+              <a:t>氷点下パックM（19.6 × 13.8 × 厚2.6cm）を壁に立てかける</a:t>
+            </a:r>
+          </a:p>
+        </p:txBody>
+      </p:sp>
+      <p:sp>
+        <p:nvSpPr>
+          <p:cNvPr id="22" name="Rectangle 21"/>
+          <p:cNvSpPr/>
+          <p:nvPr/>
+        </p:nvSpPr>
+        <p:spPr>
+          <a:xfrm>
+            <a:off x="5905500" y="2190750"/>
+            <a:ext cx="2748915" cy="1550670"/>
+          </a:xfrm>
+          <a:prstGeom prst="rect">
+            <a:avLst/>
+          </a:prstGeom>
+          <a:solidFill>
+            <a:srgbClr val="F2F5F8"/>
+          </a:solidFill>
+          <a:ln w="19050">
+            <a:solidFill>
+              <a:srgbClr val="DAE7F2"/>
+            </a:solidFill>
+          </a:ln>
+          <a:effectLst/>
+        </p:spPr>
+        <p:txBody>
+          <a:bodyPr rtlCol="0" anchor="ctr"/>
+          <a:lstStyle/>
+          <a:p>
+            <a:pPr algn="ctr"/>
+          </a:p>
+        </p:txBody>
+      </p:sp>
+      <p:sp>
+        <p:nvSpPr>
+          <p:cNvPr id="23" name="Rectangle 22"/>
+          <p:cNvSpPr/>
+          <p:nvPr/>
+        </p:nvSpPr>
+        <p:spPr>
+          <a:xfrm>
+            <a:off x="5905500" y="2190750"/>
+            <a:ext cx="1381506" cy="183261"/>
+          </a:xfrm>
+          <a:prstGeom prst="rect">
+            <a:avLst/>
+          </a:prstGeom>
+          <a:solidFill>
+            <a:srgbClr val="DAE7F2"/>
+          </a:solidFill>
+          <a:ln w="19050">
+            <a:solidFill>
+              <a:srgbClr val="014172"/>
+            </a:solidFill>
+          </a:ln>
+          <a:effectLst/>
+        </p:spPr>
+        <p:txBody>
+          <a:bodyPr rtlCol="0" anchor="ctr"/>
+          <a:lstStyle/>
+          <a:p>
+            <a:pPr algn="ctr"/>
+          </a:p>
+        </p:txBody>
+      </p:sp>
+      <p:sp>
+        <p:nvSpPr>
+          <p:cNvPr id="24" name="Oval 23"/>
+          <p:cNvSpPr/>
+          <p:nvPr/>
+        </p:nvSpPr>
+        <p:spPr>
+          <a:xfrm>
+            <a:off x="5905500" y="2190750"/>
+            <a:ext cx="422910" cy="422910"/>
+          </a:xfrm>
+          <a:prstGeom prst="ellipse">
+            <a:avLst/>
+          </a:prstGeom>
+          <a:solidFill>
+            <a:srgbClr val="EEF4F9"/>
+          </a:solidFill>
+          <a:ln w="19050">
+            <a:solidFill>
+              <a:srgbClr val="014172"/>
+            </a:solidFill>
+          </a:ln>
+          <a:effectLst/>
+        </p:spPr>
+        <p:txBody>
+          <a:bodyPr rtlCol="0" anchor="ctr"/>
+          <a:lstStyle/>
+          <a:p>
+            <a:pPr algn="ctr"/>
+          </a:p>
+        </p:txBody>
+      </p:sp>
+      <p:sp>
+        <p:nvSpPr>
+          <p:cNvPr id="25" name="Oval 24"/>
+          <p:cNvSpPr/>
+          <p:nvPr/>
+        </p:nvSpPr>
+        <p:spPr>
+          <a:xfrm>
+            <a:off x="6328410" y="2190750"/>
+            <a:ext cx="422910" cy="422910"/>
+          </a:xfrm>
+          <a:prstGeom prst="ellipse">
+            <a:avLst/>
+          </a:prstGeom>
+          <a:solidFill>
+            <a:srgbClr val="EEF4F9"/>
+          </a:solidFill>
+          <a:ln w="19050">
+            <a:solidFill>
+              <a:srgbClr val="014172"/>
+            </a:solidFill>
+          </a:ln>
+          <a:effectLst/>
+        </p:spPr>
+        <p:txBody>
+          <a:bodyPr rtlCol="0" anchor="ctr"/>
+          <a:lstStyle/>
+          <a:p>
+            <a:pPr algn="ctr"/>
+          </a:p>
+        </p:txBody>
+      </p:sp>
+      <p:sp>
+        <p:nvSpPr>
+          <p:cNvPr id="26" name="Oval 25"/>
+          <p:cNvSpPr/>
+          <p:nvPr/>
+        </p:nvSpPr>
+        <p:spPr>
+          <a:xfrm>
+            <a:off x="6751320" y="2190750"/>
+            <a:ext cx="422910" cy="422910"/>
+          </a:xfrm>
+          <a:prstGeom prst="ellipse">
+            <a:avLst/>
+          </a:prstGeom>
+          <a:solidFill>
+            <a:srgbClr val="EEF4F9"/>
+          </a:solidFill>
+          <a:ln w="19050">
+            <a:solidFill>
+              <a:srgbClr val="014172"/>
+            </a:solidFill>
+          </a:ln>
+          <a:effectLst/>
+        </p:spPr>
+        <p:txBody>
+          <a:bodyPr rtlCol="0" anchor="ctr"/>
+          <a:lstStyle/>
+          <a:p>
+            <a:pPr algn="ctr"/>
+          </a:p>
+        </p:txBody>
+      </p:sp>
+      <p:sp>
+        <p:nvSpPr>
+          <p:cNvPr id="27" name="Oval 26"/>
+          <p:cNvSpPr/>
+          <p:nvPr/>
+        </p:nvSpPr>
+        <p:spPr>
+          <a:xfrm>
+            <a:off x="7174230" y="2190750"/>
+            <a:ext cx="422910" cy="422910"/>
+          </a:xfrm>
+          <a:prstGeom prst="ellipse">
+            <a:avLst/>
+          </a:prstGeom>
+          <a:solidFill>
+            <a:srgbClr val="EEF4F9"/>
+          </a:solidFill>
+          <a:ln w="19050">
+            <a:solidFill>
+              <a:srgbClr val="014172"/>
+            </a:solidFill>
+          </a:ln>
+          <a:effectLst/>
+        </p:spPr>
+        <p:txBody>
+          <a:bodyPr rtlCol="0" anchor="ctr"/>
+          <a:lstStyle/>
+          <a:p>
+            <a:pPr algn="ctr"/>
+          </a:p>
+        </p:txBody>
+      </p:sp>
+      <p:sp>
+        <p:nvSpPr>
+          <p:cNvPr id="28" name="Oval 27"/>
+          <p:cNvSpPr/>
+          <p:nvPr/>
+        </p:nvSpPr>
+        <p:spPr>
+          <a:xfrm>
+            <a:off x="7597140" y="2190750"/>
+            <a:ext cx="422910" cy="422910"/>
+          </a:xfrm>
+          <a:prstGeom prst="ellipse">
+            <a:avLst/>
+          </a:prstGeom>
+          <a:solidFill>
+            <a:srgbClr val="EEF4F9"/>
+          </a:solidFill>
+          <a:ln w="19050">
+            <a:solidFill>
+              <a:srgbClr val="014172"/>
+            </a:solidFill>
+          </a:ln>
+          <a:effectLst/>
+        </p:spPr>
+        <p:txBody>
+          <a:bodyPr rtlCol="0" anchor="ctr"/>
+          <a:lstStyle/>
+          <a:p>
+            <a:pPr algn="ctr"/>
+          </a:p>
+        </p:txBody>
+      </p:sp>
+      <p:sp>
+        <p:nvSpPr>
+          <p:cNvPr id="29" name="Oval 28"/>
+          <p:cNvSpPr/>
+          <p:nvPr/>
+        </p:nvSpPr>
+        <p:spPr>
+          <a:xfrm>
+            <a:off x="8020050" y="2190750"/>
+            <a:ext cx="422910" cy="422910"/>
+          </a:xfrm>
+          <a:prstGeom prst="ellipse">
+            <a:avLst/>
+          </a:prstGeom>
+          <a:solidFill>
+            <a:srgbClr val="EEF4F9"/>
+          </a:solidFill>
+          <a:ln w="19050">
+            <a:solidFill>
+              <a:srgbClr val="014172"/>
+            </a:solidFill>
+          </a:ln>
+          <a:effectLst/>
+        </p:spPr>
+        <p:txBody>
+          <a:bodyPr rtlCol="0" anchor="ctr"/>
+          <a:lstStyle/>
+          <a:p>
+            <a:pPr algn="ctr"/>
+          </a:p>
+        </p:txBody>
+      </p:sp>
+      <p:sp>
+        <p:nvSpPr>
+          <p:cNvPr id="30" name="Oval 29"/>
+          <p:cNvSpPr/>
+          <p:nvPr/>
+        </p:nvSpPr>
+        <p:spPr>
+          <a:xfrm>
+            <a:off x="5905500" y="2613660"/>
+            <a:ext cx="422910" cy="422910"/>
+          </a:xfrm>
+          <a:prstGeom prst="ellipse">
+            <a:avLst/>
+          </a:prstGeom>
+          <a:solidFill>
+            <a:srgbClr val="EEF4F9"/>
+          </a:solidFill>
+          <a:ln w="19050">
+            <a:solidFill>
+              <a:srgbClr val="014172"/>
+            </a:solidFill>
+          </a:ln>
+          <a:effectLst/>
+        </p:spPr>
+        <p:txBody>
+          <a:bodyPr rtlCol="0" anchor="ctr"/>
+          <a:lstStyle/>
+          <a:p>
+            <a:pPr algn="ctr"/>
+          </a:p>
+        </p:txBody>
+      </p:sp>
+      <p:sp>
+        <p:nvSpPr>
+          <p:cNvPr id="31" name="Oval 30"/>
+          <p:cNvSpPr/>
+          <p:nvPr/>
+        </p:nvSpPr>
+        <p:spPr>
+          <a:xfrm>
+            <a:off x="6328410" y="2613660"/>
+            <a:ext cx="422910" cy="422910"/>
+          </a:xfrm>
+          <a:prstGeom prst="ellipse">
+            <a:avLst/>
+          </a:prstGeom>
+          <a:solidFill>
+            <a:srgbClr val="EEF4F9"/>
+          </a:solidFill>
+          <a:ln w="19050">
+            <a:solidFill>
+              <a:srgbClr val="014172"/>
+            </a:solidFill>
+          </a:ln>
+          <a:effectLst/>
+        </p:spPr>
+        <p:txBody>
+          <a:bodyPr rtlCol="0" anchor="ctr"/>
+          <a:lstStyle/>
+          <a:p>
+            <a:pPr algn="ctr"/>
+          </a:p>
+        </p:txBody>
+      </p:sp>
+      <p:sp>
+        <p:nvSpPr>
+          <p:cNvPr id="32" name="Oval 31"/>
+          <p:cNvSpPr/>
+          <p:nvPr/>
+        </p:nvSpPr>
+        <p:spPr>
+          <a:xfrm>
+            <a:off x="6751320" y="2613660"/>
+            <a:ext cx="422910" cy="422910"/>
+          </a:xfrm>
+          <a:prstGeom prst="ellipse">
+            <a:avLst/>
+          </a:prstGeom>
+          <a:solidFill>
+            <a:srgbClr val="EEF4F9"/>
+          </a:solidFill>
+          <a:ln w="19050">
+            <a:solidFill>
+              <a:srgbClr val="014172"/>
+            </a:solidFill>
+          </a:ln>
+          <a:effectLst/>
+        </p:spPr>
+        <p:txBody>
+          <a:bodyPr rtlCol="0" anchor="ctr"/>
+          <a:lstStyle/>
+          <a:p>
+            <a:pPr algn="ctr"/>
+          </a:p>
+        </p:txBody>
+      </p:sp>
+      <p:sp>
+        <p:nvSpPr>
+          <p:cNvPr id="33" name="Oval 32"/>
+          <p:cNvSpPr/>
+          <p:nvPr/>
+        </p:nvSpPr>
+        <p:spPr>
+          <a:xfrm>
+            <a:off x="7174230" y="2613660"/>
+            <a:ext cx="422910" cy="422910"/>
+          </a:xfrm>
+          <a:prstGeom prst="ellipse">
+            <a:avLst/>
+          </a:prstGeom>
+          <a:solidFill>
+            <a:srgbClr val="EEF4F9"/>
+          </a:solidFill>
+          <a:ln w="19050">
+            <a:solidFill>
+              <a:srgbClr val="014172"/>
+            </a:solidFill>
+          </a:ln>
+          <a:effectLst/>
+        </p:spPr>
+        <p:txBody>
+          <a:bodyPr rtlCol="0" anchor="ctr"/>
+          <a:lstStyle/>
+          <a:p>
+            <a:pPr algn="ctr"/>
+          </a:p>
+        </p:txBody>
+      </p:sp>
+      <p:sp>
+        <p:nvSpPr>
+          <p:cNvPr id="34" name="Oval 33"/>
+          <p:cNvSpPr/>
+          <p:nvPr/>
+        </p:nvSpPr>
+        <p:spPr>
+          <a:xfrm>
+            <a:off x="7597140" y="2613660"/>
+            <a:ext cx="422910" cy="422910"/>
+          </a:xfrm>
+          <a:prstGeom prst="ellipse">
+            <a:avLst/>
+          </a:prstGeom>
+          <a:solidFill>
+            <a:srgbClr val="EEF4F9"/>
+          </a:solidFill>
+          <a:ln w="19050">
+            <a:solidFill>
+              <a:srgbClr val="014172"/>
+            </a:solidFill>
+          </a:ln>
+          <a:effectLst/>
+        </p:spPr>
+        <p:txBody>
+          <a:bodyPr rtlCol="0" anchor="ctr"/>
+          <a:lstStyle/>
+          <a:p>
+            <a:pPr algn="ctr"/>
+          </a:p>
+        </p:txBody>
+      </p:sp>
+      <p:sp>
+        <p:nvSpPr>
+          <p:cNvPr id="35" name="Oval 34"/>
+          <p:cNvSpPr/>
+          <p:nvPr/>
+        </p:nvSpPr>
+        <p:spPr>
+          <a:xfrm>
+            <a:off x="8020050" y="2613660"/>
+            <a:ext cx="422910" cy="422910"/>
+          </a:xfrm>
+          <a:prstGeom prst="ellipse">
+            <a:avLst/>
+          </a:prstGeom>
+          <a:solidFill>
+            <a:srgbClr val="EEF4F9"/>
+          </a:solidFill>
+          <a:ln w="19050">
+            <a:solidFill>
+              <a:srgbClr val="014172"/>
+            </a:solidFill>
+          </a:ln>
+          <a:effectLst/>
+        </p:spPr>
+        <p:txBody>
+          <a:bodyPr rtlCol="0" anchor="ctr"/>
+          <a:lstStyle/>
+          <a:p>
+            <a:pPr algn="ctr"/>
+          </a:p>
+        </p:txBody>
+      </p:sp>
+      <p:sp>
+        <p:nvSpPr>
+          <p:cNvPr id="36" name="Oval 35"/>
+          <p:cNvSpPr/>
+          <p:nvPr/>
+        </p:nvSpPr>
+        <p:spPr>
+          <a:xfrm>
+            <a:off x="5905500" y="3036570"/>
+            <a:ext cx="422910" cy="422910"/>
+          </a:xfrm>
+          <a:prstGeom prst="ellipse">
+            <a:avLst/>
+          </a:prstGeom>
+          <a:solidFill>
+            <a:srgbClr val="EEF4F9"/>
+          </a:solidFill>
+          <a:ln w="19050">
+            <a:solidFill>
+              <a:srgbClr val="014172"/>
+            </a:solidFill>
+          </a:ln>
+          <a:effectLst/>
+        </p:spPr>
+        <p:txBody>
+          <a:bodyPr rtlCol="0" anchor="ctr"/>
+          <a:lstStyle/>
+          <a:p>
+            <a:pPr algn="ctr"/>
+          </a:p>
+        </p:txBody>
+      </p:sp>
+      <p:sp>
+        <p:nvSpPr>
+          <p:cNvPr id="37" name="Oval 36"/>
+          <p:cNvSpPr/>
+          <p:nvPr/>
+        </p:nvSpPr>
+        <p:spPr>
+          <a:xfrm>
+            <a:off x="6328410" y="3036570"/>
+            <a:ext cx="422910" cy="422910"/>
+          </a:xfrm>
+          <a:prstGeom prst="ellipse">
+            <a:avLst/>
+          </a:prstGeom>
+          <a:solidFill>
+            <a:srgbClr val="EEF4F9"/>
+          </a:solidFill>
+          <a:ln w="19050">
+            <a:solidFill>
+              <a:srgbClr val="014172"/>
+            </a:solidFill>
+          </a:ln>
+          <a:effectLst/>
+        </p:spPr>
+        <p:txBody>
+          <a:bodyPr rtlCol="0" anchor="ctr"/>
+          <a:lstStyle/>
+          <a:p>
+            <a:pPr algn="ctr"/>
+          </a:p>
+        </p:txBody>
+      </p:sp>
+      <p:sp>
+        <p:nvSpPr>
+          <p:cNvPr id="38" name="Oval 37"/>
+          <p:cNvSpPr/>
+          <p:nvPr/>
+        </p:nvSpPr>
+        <p:spPr>
+          <a:xfrm>
+            <a:off x="6751320" y="3036570"/>
+            <a:ext cx="422910" cy="422910"/>
+          </a:xfrm>
+          <a:prstGeom prst="ellipse">
+            <a:avLst/>
+          </a:prstGeom>
+          <a:solidFill>
+            <a:srgbClr val="EEF4F9"/>
+          </a:solidFill>
+          <a:ln w="19050">
+            <a:solidFill>
+              <a:srgbClr val="014172"/>
+            </a:solidFill>
+          </a:ln>
+          <a:effectLst/>
+        </p:spPr>
+        <p:txBody>
+          <a:bodyPr rtlCol="0" anchor="ctr"/>
+          <a:lstStyle/>
+          <a:p>
+            <a:pPr algn="ctr"/>
+          </a:p>
+        </p:txBody>
+      </p:sp>
+      <p:sp>
+        <p:nvSpPr>
+          <p:cNvPr id="39" name="Oval 38"/>
+          <p:cNvSpPr/>
+          <p:nvPr/>
+        </p:nvSpPr>
+        <p:spPr>
+          <a:xfrm>
+            <a:off x="7174230" y="3036570"/>
+            <a:ext cx="422910" cy="422910"/>
+          </a:xfrm>
+          <a:prstGeom prst="ellipse">
+            <a:avLst/>
+          </a:prstGeom>
+          <a:solidFill>
+            <a:srgbClr val="EEF4F9"/>
+          </a:solidFill>
+          <a:ln w="19050">
+            <a:solidFill>
+              <a:srgbClr val="014172"/>
+            </a:solidFill>
+          </a:ln>
+          <a:effectLst/>
+        </p:spPr>
+        <p:txBody>
+          <a:bodyPr rtlCol="0" anchor="ctr"/>
+          <a:lstStyle/>
+          <a:p>
+            <a:pPr algn="ctr"/>
+          </a:p>
+        </p:txBody>
+      </p:sp>
+      <p:sp>
+        <p:nvSpPr>
+          <p:cNvPr id="40" name="Oval 39"/>
+          <p:cNvSpPr/>
+          <p:nvPr/>
+        </p:nvSpPr>
+        <p:spPr>
+          <a:xfrm>
+            <a:off x="7597140" y="3036570"/>
+            <a:ext cx="422910" cy="422910"/>
+          </a:xfrm>
+          <a:prstGeom prst="ellipse">
+            <a:avLst/>
+          </a:prstGeom>
+          <a:solidFill>
+            <a:srgbClr val="EEF4F9"/>
+          </a:solidFill>
+          <a:ln w="19050">
+            <a:solidFill>
+              <a:srgbClr val="014172"/>
+            </a:solidFill>
+          </a:ln>
+          <a:effectLst/>
+        </p:spPr>
+        <p:txBody>
+          <a:bodyPr rtlCol="0" anchor="ctr"/>
+          <a:lstStyle/>
+          <a:p>
+            <a:pPr algn="ctr"/>
+          </a:p>
+        </p:txBody>
+      </p:sp>
+      <p:sp>
+        <p:nvSpPr>
+          <p:cNvPr id="41" name="Oval 40"/>
+          <p:cNvSpPr/>
+          <p:nvPr/>
+        </p:nvSpPr>
+        <p:spPr>
+          <a:xfrm>
+            <a:off x="8020050" y="3036570"/>
+            <a:ext cx="422910" cy="422910"/>
+          </a:xfrm>
+          <a:prstGeom prst="ellipse">
+            <a:avLst/>
+          </a:prstGeom>
+          <a:solidFill>
+            <a:srgbClr val="EEF4F9"/>
+          </a:solidFill>
+          <a:ln w="19050">
+            <a:solidFill>
+              <a:srgbClr val="014172"/>
+            </a:solidFill>
+          </a:ln>
+          <a:effectLst/>
+        </p:spPr>
+        <p:txBody>
+          <a:bodyPr rtlCol="0" anchor="ctr"/>
+          <a:lstStyle/>
+          <a:p>
+            <a:pPr algn="ctr"/>
+          </a:p>
+        </p:txBody>
+      </p:sp>
+      <p:sp>
+        <p:nvSpPr>
+          <p:cNvPr id="42" name="TextBox 41"/>
+          <p:cNvSpPr txBox="1"/>
+          <p:nvPr/>
+        </p:nvSpPr>
+        <p:spPr>
+          <a:xfrm>
+            <a:off x="5905500" y="3893820"/>
+            <a:ext cx="3810000" cy="381000"/>
+          </a:xfrm>
+          <a:prstGeom prst="rect">
+            <a:avLst/>
+          </a:prstGeom>
+          <a:noFill/>
+        </p:spPr>
+        <p:txBody>
+          <a:bodyPr wrap="none" lIns="0" rIns="0" tIns="0" bIns="0" anchor="ctr">
+            <a:spAutoFit/>
+          </a:bodyPr>
+          <a:lstStyle/>
+          <a:p>
+            <a:pPr algn="l"/>
+            <a:r>
+              <a:rPr sz="2400" b="1">
+                <a:solidFill>
+                  <a:srgbClr val="014172"/>
+                </a:solidFill>
+                <a:latin typeface="Yu Gothic UI"/>
+              </a:rPr>
+              <a:t>18</a:t>
+            </a:r>
+            <a:r>
+              <a:rPr sz="1500" b="1">
+                <a:solidFill>
+                  <a:srgbClr val="014172"/>
+                </a:solidFill>
+                <a:latin typeface="Yu Gothic UI"/>
+              </a:rPr>
+              <a:t>本</a:t>
+            </a:r>
+          </a:p>
+        </p:txBody>
+      </p:sp>
+      <p:sp>
+        <p:nvSpPr>
+          <p:cNvPr id="43" name="TextBox 42"/>
+          <p:cNvSpPr txBox="1"/>
+          <p:nvPr/>
+        </p:nvSpPr>
+        <p:spPr>
+          <a:xfrm>
+            <a:off x="5905500" y="4293870"/>
+            <a:ext cx="4953000" cy="228600"/>
+          </a:xfrm>
+          <a:prstGeom prst="rect">
+            <a:avLst/>
+          </a:prstGeom>
+          <a:noFill/>
+        </p:spPr>
+        <p:txBody>
+          <a:bodyPr wrap="none" lIns="0" rIns="0" tIns="0" bIns="0" anchor="ctr">
+            <a:spAutoFit/>
+          </a:bodyPr>
+          <a:lstStyle/>
+          <a:p>
+            <a:pPr algn="l"/>
+            <a:r>
+              <a:rPr sz="1050" b="0">
+                <a:solidFill>
+                  <a:srgbClr val="6A717B"/>
+                </a:solidFill>
+                <a:latin typeface="Yu Gothic UI"/>
+              </a:rPr>
+              <a:t>床の余り 4cm と 3cm に、厚さ2.6cmがそのまま収まる</a:t>
+            </a:r>
+          </a:p>
+        </p:txBody>
+      </p:sp>
+      <p:sp>
+        <p:nvSpPr>
+          <p:cNvPr id="44" name="Rectangle 43"/>
+          <p:cNvSpPr/>
+          <p:nvPr/>
+        </p:nvSpPr>
+        <p:spPr>
+          <a:xfrm>
+            <a:off x="609600" y="5295900"/>
+            <a:ext cx="10210800" cy="9525"/>
+          </a:xfrm>
+          <a:prstGeom prst="rect">
+            <a:avLst/>
+          </a:prstGeom>
+          <a:solidFill>
+            <a:srgbClr val="E2E7EC"/>
+          </a:solidFill>
+          <a:ln>
+            <a:noFill/>
+          </a:ln>
+          <a:effectLst/>
+        </p:spPr>
+        <p:txBody>
+          <a:bodyPr rtlCol="0" anchor="ctr"/>
+          <a:lstStyle/>
+          <a:p>
+            <a:pPr algn="ctr"/>
+          </a:p>
+        </p:txBody>
+      </p:sp>
+      <p:sp>
+        <p:nvSpPr>
+          <p:cNvPr id="45" name="TextBox 44"/>
+          <p:cNvSpPr txBox="1"/>
+          <p:nvPr/>
+        </p:nvSpPr>
+        <p:spPr>
+          <a:xfrm>
+            <a:off x="609600" y="5429250"/>
+            <a:ext cx="7239000" cy="247650"/>
+          </a:xfrm>
+          <a:prstGeom prst="rect">
+            <a:avLst/>
+          </a:prstGeom>
+          <a:noFill/>
+        </p:spPr>
+        <p:txBody>
+          <a:bodyPr wrap="none" lIns="0" rIns="0" tIns="0" bIns="0" anchor="ctr">
+            <a:spAutoFit/>
+          </a:bodyPr>
+          <a:lstStyle/>
+          <a:p>
+            <a:pPr algn="l"/>
+            <a:r>
+              <a:rPr sz="1425" b="1">
+                <a:solidFill>
+                  <a:srgbClr val="2E2E33"/>
+                </a:solidFill>
+                <a:latin typeface="Yu Gothic UI"/>
+              </a:rPr>
+              <a:t>面積ではなく、残った帯が胴径で割り切れるかで決まります。</a:t>
+            </a:r>
+          </a:p>
+        </p:txBody>
+      </p:sp>
+      <p:sp>
+        <p:nvSpPr>
+          <p:cNvPr id="46" name="TextBox 45"/>
+          <p:cNvSpPr txBox="1"/>
+          <p:nvPr/>
+        </p:nvSpPr>
+        <p:spPr>
+          <a:xfrm>
+            <a:off x="609600" y="5676900"/>
+            <a:ext cx="7620000" cy="209550"/>
+          </a:xfrm>
+          <a:prstGeom prst="rect">
+            <a:avLst/>
+          </a:prstGeom>
+          <a:noFill/>
+        </p:spPr>
+        <p:txBody>
+          <a:bodyPr wrap="none" lIns="0" rIns="0" tIns="0" bIns="0" anchor="ctr">
+            <a:spAutoFit/>
+          </a:bodyPr>
+          <a:lstStyle/>
+          <a:p>
+            <a:pPr algn="l"/>
+            <a:r>
+              <a:rPr sz="1050" b="0">
+                <a:solidFill>
+                  <a:srgbClr val="6A717B"/>
+                </a:solidFill>
+                <a:latin typeface="Yu Gothic UI"/>
+              </a:rPr>
+              <a:t>メーカー公表値からの計算です（実測ではありません）</a:t>
+            </a:r>
+          </a:p>
+        </p:txBody>
+      </p:sp>
+      <p:sp>
+        <p:nvSpPr>
+          <p:cNvPr id="47" name="TextBox 46"/>
+          <p:cNvSpPr txBox="1"/>
+          <p:nvPr/>
+        </p:nvSpPr>
+        <p:spPr>
+          <a:xfrm>
+            <a:off x="7962900" y="5676900"/>
+            <a:ext cx="2857500" cy="209550"/>
+          </a:xfrm>
+          <a:prstGeom prst="rect">
+            <a:avLst/>
+          </a:prstGeom>
+          <a:noFill/>
+        </p:spPr>
+        <p:txBody>
+          <a:bodyPr wrap="none" lIns="0" rIns="0" tIns="0" bIns="0" anchor="ctr">
+            <a:spAutoFit/>
+          </a:bodyPr>
+          <a:lstStyle/>
+          <a:p>
+            <a:pPr algn="r"/>
+            <a:r>
+              <a:rPr sz="1050" b="0">
+                <a:solidFill>
+                  <a:srgbClr val="6A717B"/>
+                </a:solidFill>
+                <a:latin typeface="Yu Gothic UI"/>
+              </a:rPr>
+              <a:t>寸法で選ぶ　sunpou.nexeed-lab.com</a:t>
+            </a:r>
+          </a:p>
+        </p:txBody>
+      </p:sp>
+    </p:spTree>
+  </p:cSld>
+  <p:clrMapOvr>
+    <a:masterClrMapping/>
+  </p:clrMapOvr>
+</p:sld>
+</file>
+
+<file path=ppt/slides/slide24.xml><?xml version="1.0" encoding="utf-8"?>
+<p:sld xmlns:a="http://schemas.openxmlformats.org/drawingml/2006/main" xmlns:p="http://schemas.openxmlformats.org/presentationml/2006/main" xmlns:r="http://schemas.openxmlformats.org/officeDocument/2006/relationships">
+  <p:cSld>
+    <p:spTree>
+      <p:nvGrpSpPr>
+        <p:cNvPr id="1" name=""/>
+        <p:cNvGrpSpPr/>
+        <p:nvPr/>
+      </p:nvGrpSpPr>
+      <p:grpSpPr/>
+      <p:sp>
+        <p:nvSpPr>
+          <p:cNvPr id="2" name="Rectangle 1"/>
+          <p:cNvSpPr/>
+          <p:nvPr/>
+        </p:nvSpPr>
+        <p:spPr>
+          <a:xfrm>
+            <a:off x="0" y="0"/>
+            <a:ext cx="11430000" cy="6000750"/>
+          </a:xfrm>
+          <a:prstGeom prst="rect">
+            <a:avLst/>
+          </a:prstGeom>
+          <a:solidFill>
+            <a:srgbClr val="FCFCFC"/>
+          </a:solidFill>
+          <a:ln>
+            <a:noFill/>
+          </a:ln>
+          <a:effectLst/>
+        </p:spPr>
+        <p:txBody>
+          <a:bodyPr rtlCol="0" anchor="ctr"/>
+          <a:lstStyle/>
+          <a:p>
+            <a:pPr algn="ctr"/>
+          </a:p>
+        </p:txBody>
+      </p:sp>
+      <p:sp>
+        <p:nvSpPr>
+          <p:cNvPr id="3" name="Rectangle 2"/>
+          <p:cNvSpPr/>
+          <p:nvPr/>
+        </p:nvSpPr>
+        <p:spPr>
+          <a:xfrm>
+            <a:off x="0" y="0"/>
+            <a:ext cx="114300" cy="6000750"/>
+          </a:xfrm>
+          <a:prstGeom prst="rect">
+            <a:avLst/>
+          </a:prstGeom>
+          <a:solidFill>
+            <a:srgbClr val="014172"/>
+          </a:solidFill>
+          <a:ln>
+            <a:noFill/>
+          </a:ln>
+          <a:effectLst/>
+        </p:spPr>
+        <p:txBody>
+          <a:bodyPr rtlCol="0" anchor="ctr"/>
+          <a:lstStyle/>
+          <a:p>
+            <a:pPr algn="ctr"/>
+          </a:p>
+        </p:txBody>
+      </p:sp>
+      <p:sp>
+        <p:nvSpPr>
+          <p:cNvPr id="4" name="Rectangle 3"/>
+          <p:cNvSpPr/>
+          <p:nvPr/>
+        </p:nvSpPr>
+        <p:spPr>
+          <a:xfrm>
+            <a:off x="0" y="0"/>
+            <a:ext cx="11430000" cy="1504950"/>
+          </a:xfrm>
+          <a:prstGeom prst="rect">
+            <a:avLst/>
+          </a:prstGeom>
+          <a:solidFill>
+            <a:srgbClr val="014172"/>
+          </a:solidFill>
+          <a:ln>
+            <a:noFill/>
+          </a:ln>
+          <a:effectLst/>
+        </p:spPr>
+        <p:txBody>
+          <a:bodyPr rtlCol="0" anchor="ctr"/>
+          <a:lstStyle/>
+          <a:p>
+            <a:pPr algn="ctr"/>
+          </a:p>
+        </p:txBody>
+      </p:sp>
+      <p:sp>
+        <p:nvSpPr>
+          <p:cNvPr id="5" name="TextBox 4"/>
+          <p:cNvSpPr txBox="1"/>
+          <p:nvPr/>
+        </p:nvSpPr>
+        <p:spPr>
+          <a:xfrm>
+            <a:off x="609600" y="361950"/>
+            <a:ext cx="7429500" cy="476250"/>
+          </a:xfrm>
+          <a:prstGeom prst="rect">
+            <a:avLst/>
+          </a:prstGeom>
+          <a:noFill/>
+        </p:spPr>
+        <p:txBody>
+          <a:bodyPr wrap="none" lIns="0" rIns="0" tIns="0" bIns="0" anchor="ctr">
+            <a:spAutoFit/>
+          </a:bodyPr>
+          <a:lstStyle/>
+          <a:p>
+            <a:pPr algn="l"/>
+            <a:r>
+              <a:rPr sz="3000" b="1">
+                <a:solidFill>
+                  <a:srgbClr val="FFFFFF"/>
+                </a:solidFill>
+                <a:latin typeface="Yu Gothic UI"/>
+              </a:rPr>
+              <a:t>斜めに置くと、長辺より長いものが入る</a:t>
+            </a:r>
+          </a:p>
+        </p:txBody>
+      </p:sp>
+      <p:sp>
+        <p:nvSpPr>
+          <p:cNvPr id="6" name="TextBox 5"/>
+          <p:cNvSpPr txBox="1"/>
+          <p:nvPr/>
+        </p:nvSpPr>
+        <p:spPr>
+          <a:xfrm>
+            <a:off x="609600" y="876300"/>
+            <a:ext cx="7429500" cy="247650"/>
+          </a:xfrm>
+          <a:prstGeom prst="rect">
+            <a:avLst/>
+          </a:prstGeom>
+          <a:noFill/>
+        </p:spPr>
+        <p:txBody>
+          <a:bodyPr wrap="none" lIns="0" rIns="0" tIns="0" bIns="0" anchor="ctr">
+            <a:spAutoFit/>
+          </a:bodyPr>
+          <a:lstStyle/>
+          <a:p>
+            <a:pPr algn="l"/>
+            <a:r>
+              <a:rPr sz="1425" b="0">
+                <a:solidFill>
+                  <a:srgbClr val="DAE7F2"/>
+                </a:solidFill>
+                <a:latin typeface="Yu Gothic UI"/>
+              </a:rPr>
+              <a:t>シマノ スペーザ 350（内寸 25.2 × 59.2 × 深さ 23.0cm）を上から見た床</a:t>
+            </a:r>
+          </a:p>
+        </p:txBody>
+      </p:sp>
+      <p:sp>
+        <p:nvSpPr>
+          <p:cNvPr id="7" name="Rounded Rectangle 6"/>
+          <p:cNvSpPr/>
+          <p:nvPr/>
+        </p:nvSpPr>
+        <p:spPr>
+          <a:xfrm>
+            <a:off x="8305800" y="247650"/>
+            <a:ext cx="2514600" cy="1009650"/>
+          </a:xfrm>
+          <a:prstGeom prst="roundRect">
+            <a:avLst>
+              <a:gd name="adj" fmla="val 12000"/>
+            </a:avLst>
+          </a:prstGeom>
+          <a:solidFill>
+            <a:srgbClr val="FFFFFF"/>
+          </a:solidFill>
+          <a:ln>
+            <a:noFill/>
+          </a:ln>
+          <a:effectLst>
+            <a:outerShdw blurRad="254000" dist="63500" dir="5400000" rotWithShape="0">
+              <a:srgbClr val="0B2B45">
+                <a:alpha val="30000"/>
+              </a:srgbClr>
+            </a:outerShdw>
+          </a:effectLst>
+        </p:spPr>
+        <p:txBody>
+          <a:bodyPr rtlCol="0" anchor="ctr"/>
+          <a:lstStyle/>
+          <a:p>
+            <a:pPr algn="ctr"/>
+          </a:p>
+        </p:txBody>
+      </p:sp>
+      <p:sp>
+        <p:nvSpPr>
+          <p:cNvPr id="8" name="TextBox 7"/>
+          <p:cNvSpPr txBox="1"/>
+          <p:nvPr/>
+        </p:nvSpPr>
+        <p:spPr>
+          <a:xfrm>
+            <a:off x="8515350" y="400050"/>
+            <a:ext cx="2133600" cy="209550"/>
+          </a:xfrm>
+          <a:prstGeom prst="rect">
+            <a:avLst/>
+          </a:prstGeom>
+          <a:noFill/>
+        </p:spPr>
+        <p:txBody>
+          <a:bodyPr wrap="none" lIns="0" rIns="0" tIns="0" bIns="0" anchor="ctr">
+            <a:spAutoFit/>
+          </a:bodyPr>
+          <a:lstStyle/>
+          <a:p>
+            <a:pPr algn="l"/>
+            <a:r>
+              <a:rPr sz="1125" b="0">
+                <a:solidFill>
+                  <a:srgbClr val="6A717B"/>
+                </a:solidFill>
+                <a:latin typeface="Yu Gothic UI"/>
+              </a:rPr>
+              <a:t>立体の対角線</a:t>
+            </a:r>
+          </a:p>
+        </p:txBody>
+      </p:sp>
+      <p:sp>
+        <p:nvSpPr>
+          <p:cNvPr id="9" name="TextBox 8"/>
+          <p:cNvSpPr txBox="1"/>
+          <p:nvPr/>
+        </p:nvSpPr>
+        <p:spPr>
+          <a:xfrm>
+            <a:off x="8515350" y="647700"/>
+            <a:ext cx="2133600" cy="533400"/>
+          </a:xfrm>
+          <a:prstGeom prst="rect">
+            <a:avLst/>
+          </a:prstGeom>
+          <a:noFill/>
+        </p:spPr>
+        <p:txBody>
+          <a:bodyPr wrap="none" lIns="0" rIns="0" tIns="0" bIns="0" anchor="ctr">
+            <a:spAutoFit/>
+          </a:bodyPr>
+          <a:lstStyle/>
+          <a:p>
+            <a:pPr algn="l"/>
+            <a:r>
+              <a:rPr sz="3900" b="1">
+                <a:solidFill>
+                  <a:srgbClr val="014172"/>
+                </a:solidFill>
+                <a:latin typeface="Yu Gothic UI"/>
+              </a:rPr>
+              <a:t>68.3</a:t>
+            </a:r>
+            <a:r>
+              <a:rPr sz="1950" b="1">
+                <a:solidFill>
+                  <a:srgbClr val="014172"/>
+                </a:solidFill>
+                <a:latin typeface="Yu Gothic UI"/>
+              </a:rPr>
+              <a:t>cm</a:t>
+            </a:r>
+          </a:p>
+        </p:txBody>
+      </p:sp>
+      <p:sp>
+        <p:nvSpPr>
+          <p:cNvPr id="10" name="Rectangle 9"/>
+          <p:cNvSpPr/>
+          <p:nvPr/>
+        </p:nvSpPr>
+        <p:spPr>
+          <a:xfrm>
+            <a:off x="952500" y="2190750"/>
+            <a:ext cx="3608832" cy="1536192"/>
+          </a:xfrm>
+          <a:prstGeom prst="rect">
+            <a:avLst/>
+          </a:prstGeom>
+          <a:solidFill>
+            <a:srgbClr val="F2F5F8"/>
+          </a:solidFill>
+          <a:ln w="19050">
+            <a:solidFill>
+              <a:srgbClr val="DAE7F2"/>
+            </a:solidFill>
+          </a:ln>
+          <a:effectLst/>
+        </p:spPr>
+        <p:txBody>
+          <a:bodyPr rtlCol="0" anchor="ctr"/>
+          <a:lstStyle/>
+          <a:p>
+            <a:pPr algn="ctr"/>
+          </a:p>
+        </p:txBody>
+      </p:sp>
+      <p:sp>
+        <p:nvSpPr>
+          <p:cNvPr id="11" name="Rectangle 10"/>
+          <p:cNvSpPr/>
+          <p:nvPr/>
+        </p:nvSpPr>
+        <p:spPr>
+          <a:xfrm>
+            <a:off x="952500" y="2190750"/>
+            <a:ext cx="3608832" cy="1536192"/>
+          </a:xfrm>
+          <a:prstGeom prst="rect">
+            <a:avLst/>
+          </a:prstGeom>
+          <a:noFill/>
+          <a:ln w="19050">
+            <a:solidFill>
+              <a:srgbClr val="014172"/>
+            </a:solidFill>
+            <a:prstDash val="dash"/>
+          </a:ln>
+          <a:effectLst/>
+        </p:spPr>
+        <p:txBody>
+          <a:bodyPr rtlCol="0" anchor="ctr"/>
+          <a:lstStyle/>
+          <a:p>
+            <a:pPr algn="ctr"/>
+          </a:p>
+        </p:txBody>
+      </p:sp>
+      <p:sp>
+        <p:nvSpPr>
+          <p:cNvPr id="12" name="Rounded Rectangle 11"/>
+          <p:cNvSpPr/>
+          <p:nvPr/>
+        </p:nvSpPr>
+        <p:spPr>
+          <a:xfrm>
+            <a:off x="5905500" y="2000250"/>
+            <a:ext cx="4572000" cy="1143000"/>
+          </a:xfrm>
+          <a:prstGeom prst="roundRect">
+            <a:avLst>
+              <a:gd name="adj" fmla="val 6000"/>
+            </a:avLst>
+          </a:prstGeom>
+          <a:solidFill>
+            <a:srgbClr val="F2F5F8"/>
+          </a:solidFill>
+          <a:ln>
+            <a:noFill/>
+          </a:ln>
+          <a:effectLst/>
+        </p:spPr>
+        <p:txBody>
+          <a:bodyPr rtlCol="0" anchor="ctr"/>
+          <a:lstStyle/>
+          <a:p>
+            <a:pPr algn="ctr"/>
+          </a:p>
+        </p:txBody>
+      </p:sp>
+      <p:sp>
+        <p:nvSpPr>
+          <p:cNvPr id="13" name="TextBox 12"/>
+          <p:cNvSpPr txBox="1"/>
+          <p:nvPr/>
+        </p:nvSpPr>
+        <p:spPr>
+          <a:xfrm>
+            <a:off x="6096000" y="2190750"/>
+            <a:ext cx="4191000" cy="247650"/>
+          </a:xfrm>
+          <a:prstGeom prst="rect">
+            <a:avLst/>
+          </a:prstGeom>
+          <a:noFill/>
+        </p:spPr>
+        <p:txBody>
+          <a:bodyPr wrap="none" lIns="0" rIns="0" tIns="0" bIns="0" anchor="ctr">
+            <a:spAutoFit/>
+          </a:bodyPr>
+          <a:lstStyle/>
+          <a:p>
+            <a:pPr algn="l"/>
+            <a:r>
+              <a:rPr sz="1350" b="0">
+                <a:solidFill>
+                  <a:srgbClr val="6A717B"/>
+                </a:solidFill>
+                <a:latin typeface="Yu Gothic UI"/>
+              </a:rPr>
+              <a:t>床の対角線</a:t>
+            </a:r>
+          </a:p>
+        </p:txBody>
+      </p:sp>
+      <p:sp>
+        <p:nvSpPr>
+          <p:cNvPr id="14" name="TextBox 13"/>
+          <p:cNvSpPr txBox="1"/>
+          <p:nvPr/>
+        </p:nvSpPr>
+        <p:spPr>
+          <a:xfrm>
+            <a:off x="6096000" y="2514600"/>
+            <a:ext cx="4191000" cy="323850"/>
+          </a:xfrm>
+          <a:prstGeom prst="rect">
+            <a:avLst/>
+          </a:prstGeom>
+          <a:noFill/>
+        </p:spPr>
+        <p:txBody>
+          <a:bodyPr wrap="none" lIns="0" rIns="0" tIns="0" bIns="0" anchor="ctr">
+            <a:spAutoFit/>
+          </a:bodyPr>
+          <a:lstStyle/>
+          <a:p>
+            <a:pPr algn="l"/>
+            <a:r>
+              <a:rPr sz="1575" b="1">
+                <a:solidFill>
+                  <a:srgbClr val="014172"/>
+                </a:solidFill>
+                <a:latin typeface="Yu Gothic UI"/>
+              </a:rPr>
+              <a:t>√(25.2² ＋ 59.2²) ＝ 64.3</a:t>
+            </a:r>
+          </a:p>
+        </p:txBody>
+      </p:sp>
+      <p:sp>
+        <p:nvSpPr>
+          <p:cNvPr id="15" name="Rounded Rectangle 14"/>
+          <p:cNvSpPr/>
+          <p:nvPr/>
+        </p:nvSpPr>
+        <p:spPr>
+          <a:xfrm>
+            <a:off x="5905500" y="3295650"/>
+            <a:ext cx="4572000" cy="1143000"/>
+          </a:xfrm>
+          <a:prstGeom prst="roundRect">
+            <a:avLst>
+              <a:gd name="adj" fmla="val 6000"/>
+            </a:avLst>
+          </a:prstGeom>
+          <a:solidFill>
+            <a:srgbClr val="FFFFFF"/>
+          </a:solidFill>
+          <a:ln w="19050">
+            <a:solidFill>
+              <a:srgbClr val="DAE7F2"/>
+            </a:solidFill>
+          </a:ln>
+          <a:effectLst/>
+        </p:spPr>
+        <p:txBody>
+          <a:bodyPr rtlCol="0" anchor="ctr"/>
+          <a:lstStyle/>
+          <a:p>
+            <a:pPr algn="ctr"/>
+          </a:p>
+        </p:txBody>
+      </p:sp>
+      <p:sp>
+        <p:nvSpPr>
+          <p:cNvPr id="16" name="TextBox 15"/>
+          <p:cNvSpPr txBox="1"/>
+          <p:nvPr/>
+        </p:nvSpPr>
+        <p:spPr>
+          <a:xfrm>
+            <a:off x="6096000" y="3486150"/>
+            <a:ext cx="4191000" cy="247650"/>
+          </a:xfrm>
+          <a:prstGeom prst="rect">
+            <a:avLst/>
+          </a:prstGeom>
+          <a:noFill/>
+        </p:spPr>
+        <p:txBody>
+          <a:bodyPr wrap="none" lIns="0" rIns="0" tIns="0" bIns="0" anchor="ctr">
+            <a:spAutoFit/>
+          </a:bodyPr>
+          <a:lstStyle/>
+          <a:p>
+            <a:pPr algn="l"/>
+            <a:r>
+              <a:rPr sz="1350" b="0">
+                <a:solidFill>
+                  <a:srgbClr val="6A717B"/>
+                </a:solidFill>
+                <a:latin typeface="Yu Gothic UI"/>
+              </a:rPr>
+              <a:t>立体の対角線</a:t>
+            </a:r>
+          </a:p>
+        </p:txBody>
+      </p:sp>
+      <p:sp>
+        <p:nvSpPr>
+          <p:cNvPr id="17" name="TextBox 16"/>
+          <p:cNvSpPr txBox="1"/>
+          <p:nvPr/>
+        </p:nvSpPr>
+        <p:spPr>
+          <a:xfrm>
+            <a:off x="6096000" y="3810000"/>
+            <a:ext cx="4191000" cy="323850"/>
+          </a:xfrm>
+          <a:prstGeom prst="rect">
+            <a:avLst/>
+          </a:prstGeom>
+          <a:noFill/>
+        </p:spPr>
+        <p:txBody>
+          <a:bodyPr wrap="none" lIns="0" rIns="0" tIns="0" bIns="0" anchor="ctr">
+            <a:spAutoFit/>
+          </a:bodyPr>
+          <a:lstStyle/>
+          <a:p>
+            <a:pPr algn="l"/>
+            <a:r>
+              <a:rPr sz="1500" b="1">
+                <a:solidFill>
+                  <a:srgbClr val="014172"/>
+                </a:solidFill>
+                <a:latin typeface="Yu Gothic UI"/>
+              </a:rPr>
+              <a:t>√(25.2² ＋ 59.2² ＋ 23.0²) ＝ 68.3</a:t>
+            </a:r>
+          </a:p>
+        </p:txBody>
+      </p:sp>
+      <p:sp>
+        <p:nvSpPr>
+          <p:cNvPr id="18" name="Rectangle 17"/>
+          <p:cNvSpPr/>
+          <p:nvPr/>
+        </p:nvSpPr>
+        <p:spPr>
+          <a:xfrm>
+            <a:off x="609600" y="5295900"/>
+            <a:ext cx="10210800" cy="9525"/>
+          </a:xfrm>
+          <a:prstGeom prst="rect">
+            <a:avLst/>
+          </a:prstGeom>
+          <a:solidFill>
+            <a:srgbClr val="E2E7EC"/>
+          </a:solidFill>
+          <a:ln>
+            <a:noFill/>
+          </a:ln>
+          <a:effectLst/>
+        </p:spPr>
+        <p:txBody>
+          <a:bodyPr rtlCol="0" anchor="ctr"/>
+          <a:lstStyle/>
+          <a:p>
+            <a:pPr algn="ctr"/>
+          </a:p>
+        </p:txBody>
+      </p:sp>
+      <p:sp>
+        <p:nvSpPr>
+          <p:cNvPr id="19" name="TextBox 18"/>
+          <p:cNvSpPr txBox="1"/>
+          <p:nvPr/>
+        </p:nvSpPr>
+        <p:spPr>
+          <a:xfrm>
+            <a:off x="609600" y="5429250"/>
+            <a:ext cx="7239000" cy="247650"/>
+          </a:xfrm>
+          <a:prstGeom prst="rect">
+            <a:avLst/>
+          </a:prstGeom>
+          <a:noFill/>
+        </p:spPr>
+        <p:txBody>
+          <a:bodyPr wrap="none" lIns="0" rIns="0" tIns="0" bIns="0" anchor="ctr">
+            <a:spAutoFit/>
+          </a:bodyPr>
+          <a:lstStyle/>
+          <a:p>
+            <a:pPr algn="l"/>
+            <a:r>
+              <a:rPr sz="1425" b="1">
+                <a:solidFill>
+                  <a:srgbClr val="2E2E33"/>
+                </a:solidFill>
+                <a:latin typeface="Yu Gothic UI"/>
+              </a:rPr>
+              <a:t>角の丸みや水栓の出っ張りは計算に入っていません。</a:t>
+            </a:r>
+          </a:p>
+        </p:txBody>
+      </p:sp>
+      <p:sp>
+        <p:nvSpPr>
+          <p:cNvPr id="20" name="TextBox 19"/>
+          <p:cNvSpPr txBox="1"/>
+          <p:nvPr/>
+        </p:nvSpPr>
+        <p:spPr>
+          <a:xfrm>
+            <a:off x="609600" y="5676900"/>
+            <a:ext cx="7620000" cy="209550"/>
+          </a:xfrm>
+          <a:prstGeom prst="rect">
+            <a:avLst/>
+          </a:prstGeom>
+          <a:noFill/>
+        </p:spPr>
+        <p:txBody>
+          <a:bodyPr wrap="none" lIns="0" rIns="0" tIns="0" bIns="0" anchor="ctr">
+            <a:spAutoFit/>
+          </a:bodyPr>
+          <a:lstStyle/>
+          <a:p>
+            <a:pPr algn="l"/>
+            <a:r>
+              <a:rPr sz="1050" b="0">
+                <a:solidFill>
+                  <a:srgbClr val="6A717B"/>
+                </a:solidFill>
+                <a:latin typeface="Yu Gothic UI"/>
+              </a:rPr>
+              <a:t>メーカー公表値からの計算です（実測ではありません）</a:t>
+            </a:r>
+          </a:p>
+        </p:txBody>
+      </p:sp>
+      <p:sp>
+        <p:nvSpPr>
+          <p:cNvPr id="21" name="TextBox 20"/>
+          <p:cNvSpPr txBox="1"/>
+          <p:nvPr/>
+        </p:nvSpPr>
+        <p:spPr>
+          <a:xfrm>
+            <a:off x="7962900" y="5676900"/>
+            <a:ext cx="2857500" cy="209550"/>
+          </a:xfrm>
+          <a:prstGeom prst="rect">
+            <a:avLst/>
+          </a:prstGeom>
+          <a:noFill/>
+        </p:spPr>
+        <p:txBody>
+          <a:bodyPr wrap="none" lIns="0" rIns="0" tIns="0" bIns="0" anchor="ctr">
+            <a:spAutoFit/>
+          </a:bodyPr>
+          <a:lstStyle/>
+          <a:p>
+            <a:pPr algn="r"/>
+            <a:r>
+              <a:rPr sz="1050" b="0">
+                <a:solidFill>
+                  <a:srgbClr val="6A717B"/>
+                </a:solidFill>
+                <a:latin typeface="Yu Gothic UI"/>
+              </a:rPr>
+              <a:t>寸法で選ぶ　sunpou.nexeed-lab.com</a:t>
+            </a:r>
+          </a:p>
+        </p:txBody>
+      </p:sp>
+    </p:spTree>
+  </p:cSld>
+  <p:clrMapOvr>
+    <a:masterClrMapping/>
+  </p:clrMapOvr>
+</p:sld>
+</file>
+
+<file path=ppt/slides/slide25.xml><?xml version="1.0" encoding="utf-8"?>
+<p:sld xmlns:a="http://schemas.openxmlformats.org/drawingml/2006/main" xmlns:p="http://schemas.openxmlformats.org/presentationml/2006/main" xmlns:r="http://schemas.openxmlformats.org/officeDocument/2006/relationships">
+  <p:cSld>
+    <p:spTree>
+      <p:nvGrpSpPr>
+        <p:cNvPr id="1" name=""/>
+        <p:cNvGrpSpPr/>
+        <p:nvPr/>
+      </p:nvGrpSpPr>
+      <p:grpSpPr/>
+      <p:sp>
+        <p:nvSpPr>
+          <p:cNvPr id="2" name="Rectangle 1"/>
+          <p:cNvSpPr/>
+          <p:nvPr/>
+        </p:nvSpPr>
+        <p:spPr>
+          <a:xfrm>
+            <a:off x="0" y="0"/>
+            <a:ext cx="11430000" cy="6000750"/>
+          </a:xfrm>
+          <a:prstGeom prst="rect">
+            <a:avLst/>
+          </a:prstGeom>
+          <a:solidFill>
+            <a:srgbClr val="FCFCFC"/>
+          </a:solidFill>
+          <a:ln>
+            <a:noFill/>
+          </a:ln>
+          <a:effectLst/>
+        </p:spPr>
+        <p:txBody>
+          <a:bodyPr rtlCol="0" anchor="ctr"/>
+          <a:lstStyle/>
+          <a:p>
+            <a:pPr algn="ctr"/>
+          </a:p>
+        </p:txBody>
+      </p:sp>
+      <p:sp>
+        <p:nvSpPr>
+          <p:cNvPr id="3" name="Rectangle 2"/>
+          <p:cNvSpPr/>
+          <p:nvPr/>
+        </p:nvSpPr>
+        <p:spPr>
+          <a:xfrm>
+            <a:off x="0" y="0"/>
+            <a:ext cx="114300" cy="6000750"/>
+          </a:xfrm>
+          <a:prstGeom prst="rect">
+            <a:avLst/>
+          </a:prstGeom>
+          <a:solidFill>
+            <a:srgbClr val="014172"/>
+          </a:solidFill>
+          <a:ln>
+            <a:noFill/>
+          </a:ln>
+          <a:effectLst/>
+        </p:spPr>
+        <p:txBody>
+          <a:bodyPr rtlCol="0" anchor="ctr"/>
+          <a:lstStyle/>
+          <a:p>
+            <a:pPr algn="ctr"/>
+          </a:p>
+        </p:txBody>
+      </p:sp>
+      <p:sp>
+        <p:nvSpPr>
+          <p:cNvPr id="4" name="Rectangle 3"/>
+          <p:cNvSpPr/>
+          <p:nvPr/>
+        </p:nvSpPr>
+        <p:spPr>
+          <a:xfrm>
+            <a:off x="0" y="0"/>
+            <a:ext cx="11430000" cy="1504950"/>
+          </a:xfrm>
+          <a:prstGeom prst="rect">
+            <a:avLst/>
+          </a:prstGeom>
+          <a:solidFill>
+            <a:srgbClr val="014172"/>
+          </a:solidFill>
+          <a:ln>
+            <a:noFill/>
+          </a:ln>
+          <a:effectLst/>
+        </p:spPr>
+        <p:txBody>
+          <a:bodyPr rtlCol="0" anchor="ctr"/>
+          <a:lstStyle/>
+          <a:p>
+            <a:pPr algn="ctr"/>
+          </a:p>
+        </p:txBody>
+      </p:sp>
+      <p:sp>
+        <p:nvSpPr>
+          <p:cNvPr id="5" name="TextBox 4"/>
+          <p:cNvSpPr txBox="1"/>
+          <p:nvPr/>
+        </p:nvSpPr>
+        <p:spPr>
+          <a:xfrm>
+            <a:off x="609600" y="361950"/>
+            <a:ext cx="7429500" cy="476250"/>
+          </a:xfrm>
+          <a:prstGeom prst="rect">
+            <a:avLst/>
+          </a:prstGeom>
+          <a:noFill/>
+        </p:spPr>
+        <p:txBody>
+          <a:bodyPr wrap="none" lIns="0" rIns="0" tIns="0" bIns="0" anchor="ctr">
+            <a:spAutoFit/>
+          </a:bodyPr>
+          <a:lstStyle/>
+          <a:p>
+            <a:pPr algn="l"/>
+            <a:r>
+              <a:rPr sz="3000" b="1">
+                <a:solidFill>
+                  <a:srgbClr val="FFFFFF"/>
+                </a:solidFill>
+                <a:latin typeface="Yu Gothic UI"/>
+              </a:rPr>
+              <a:t>どちらも15L。中の広さは違う</a:t>
+            </a:r>
+          </a:p>
+        </p:txBody>
+      </p:sp>
+      <p:sp>
+        <p:nvSpPr>
+          <p:cNvPr id="6" name="TextBox 5"/>
+          <p:cNvSpPr txBox="1"/>
+          <p:nvPr/>
+        </p:nvSpPr>
+        <p:spPr>
+          <a:xfrm>
+            <a:off x="609600" y="876300"/>
+            <a:ext cx="7429500" cy="247650"/>
+          </a:xfrm>
+          <a:prstGeom prst="rect">
+            <a:avLst/>
+          </a:prstGeom>
+          <a:noFill/>
+        </p:spPr>
+        <p:txBody>
+          <a:bodyPr wrap="none" lIns="0" rIns="0" tIns="0" bIns="0" anchor="ctr">
+            <a:spAutoFit/>
+          </a:bodyPr>
+          <a:lstStyle/>
+          <a:p>
+            <a:pPr algn="l"/>
+            <a:r>
+              <a:rPr sz="1425" b="0">
+                <a:solidFill>
+                  <a:srgbClr val="DAE7F2"/>
+                </a:solidFill>
+                <a:latin typeface="Yu Gothic UI"/>
+              </a:rPr>
+              <a:t>上から見た床面 ／ 灰色の外枠＝外寸、青い内枠＝内寸（メーカー公表値）</a:t>
+            </a:r>
+          </a:p>
+        </p:txBody>
+      </p:sp>
+      <p:sp>
+        <p:nvSpPr>
+          <p:cNvPr id="7" name="Rounded Rectangle 6"/>
+          <p:cNvSpPr/>
+          <p:nvPr/>
+        </p:nvSpPr>
+        <p:spPr>
+          <a:xfrm>
+            <a:off x="8305800" y="247650"/>
+            <a:ext cx="2514600" cy="1009650"/>
+          </a:xfrm>
+          <a:prstGeom prst="roundRect">
+            <a:avLst>
+              <a:gd name="adj" fmla="val 12000"/>
+            </a:avLst>
+          </a:prstGeom>
+          <a:solidFill>
+            <a:srgbClr val="FFFFFF"/>
+          </a:solidFill>
+          <a:ln>
+            <a:noFill/>
+          </a:ln>
+          <a:effectLst>
+            <a:outerShdw blurRad="254000" dist="63500" dir="5400000" rotWithShape="0">
+              <a:srgbClr val="0B2B45">
+                <a:alpha val="30000"/>
+              </a:srgbClr>
+            </a:outerShdw>
+          </a:effectLst>
+        </p:spPr>
+        <p:txBody>
+          <a:bodyPr rtlCol="0" anchor="ctr"/>
+          <a:lstStyle/>
+          <a:p>
+            <a:pPr algn="ctr"/>
+          </a:p>
+        </p:txBody>
+      </p:sp>
+      <p:sp>
+        <p:nvSpPr>
+          <p:cNvPr id="8" name="TextBox 7"/>
+          <p:cNvSpPr txBox="1"/>
+          <p:nvPr/>
+        </p:nvSpPr>
+        <p:spPr>
+          <a:xfrm>
+            <a:off x="8515350" y="400050"/>
+            <a:ext cx="2133600" cy="209550"/>
+          </a:xfrm>
+          <a:prstGeom prst="rect">
+            <a:avLst/>
+          </a:prstGeom>
+          <a:noFill/>
+        </p:spPr>
+        <p:txBody>
+          <a:bodyPr wrap="none" lIns="0" rIns="0" tIns="0" bIns="0" anchor="ctr">
+            <a:spAutoFit/>
+          </a:bodyPr>
+          <a:lstStyle/>
+          <a:p>
+            <a:pPr algn="l"/>
+            <a:r>
+              <a:rPr sz="1125" b="0">
+                <a:solidFill>
+                  <a:srgbClr val="6A717B"/>
+                </a:solidFill>
+                <a:latin typeface="Yu Gothic UI"/>
+              </a:rPr>
+              <a:t>断熱で片側</a:t>
+            </a:r>
+          </a:p>
+        </p:txBody>
+      </p:sp>
+      <p:sp>
+        <p:nvSpPr>
+          <p:cNvPr id="9" name="TextBox 8"/>
+          <p:cNvSpPr txBox="1"/>
+          <p:nvPr/>
+        </p:nvSpPr>
+        <p:spPr>
+          <a:xfrm>
+            <a:off x="8515350" y="647700"/>
+            <a:ext cx="2133600" cy="533400"/>
+          </a:xfrm>
+          <a:prstGeom prst="rect">
+            <a:avLst/>
+          </a:prstGeom>
+          <a:noFill/>
+        </p:spPr>
+        <p:txBody>
+          <a:bodyPr wrap="none" lIns="0" rIns="0" tIns="0" bIns="0" anchor="ctr">
+            <a:spAutoFit/>
+          </a:bodyPr>
+          <a:lstStyle/>
+          <a:p>
+            <a:pPr algn="l"/>
+            <a:r>
+              <a:rPr sz="3900" b="1">
+                <a:solidFill>
+                  <a:srgbClr val="014172"/>
+                </a:solidFill>
+                <a:latin typeface="Yu Gothic UI"/>
+              </a:rPr>
+              <a:t>6.3</a:t>
+            </a:r>
+            <a:r>
+              <a:rPr sz="1950" b="1">
+                <a:solidFill>
+                  <a:srgbClr val="014172"/>
+                </a:solidFill>
+                <a:latin typeface="Yu Gothic UI"/>
+              </a:rPr>
+              <a:t>cm</a:t>
+            </a:r>
+          </a:p>
+        </p:txBody>
+      </p:sp>
+      <p:sp>
+        <p:nvSpPr>
+          <p:cNvPr id="10" name="TextBox 9"/>
+          <p:cNvSpPr txBox="1"/>
+          <p:nvPr/>
+        </p:nvSpPr>
+        <p:spPr>
+          <a:xfrm>
+            <a:off x="952500" y="1905000"/>
+            <a:ext cx="4953000" cy="228600"/>
+          </a:xfrm>
+          <a:prstGeom prst="rect">
+            <a:avLst/>
+          </a:prstGeom>
+          <a:noFill/>
+        </p:spPr>
+        <p:txBody>
+          <a:bodyPr wrap="none" lIns="0" rIns="0" tIns="0" bIns="0" anchor="ctr">
+            <a:spAutoFit/>
+          </a:bodyPr>
+          <a:lstStyle/>
+          <a:p>
+            <a:pPr algn="l"/>
+            <a:r>
+              <a:rPr sz="1125" b="1">
+                <a:solidFill>
+                  <a:srgbClr val="2E2E33"/>
+                </a:solidFill>
+                <a:latin typeface="Yu Gothic UI"/>
+              </a:rPr>
+              <a:t>アイリスオーヤマ HUGEL 15L（真空断熱パネル）</a:t>
+            </a:r>
+          </a:p>
+        </p:txBody>
+      </p:sp>
+      <p:sp>
+        <p:nvSpPr>
+          <p:cNvPr id="11" name="Rectangle 10"/>
+          <p:cNvSpPr/>
+          <p:nvPr/>
+        </p:nvSpPr>
+        <p:spPr>
+          <a:xfrm>
+            <a:off x="952500" y="2190750"/>
+            <a:ext cx="2743200" cy="1877568"/>
+          </a:xfrm>
+          <a:prstGeom prst="rect">
+            <a:avLst/>
+          </a:prstGeom>
+          <a:solidFill>
+            <a:srgbClr val="F2F5F8"/>
+          </a:solidFill>
+          <a:ln w="19050">
+            <a:solidFill>
+              <a:srgbClr val="DAE7F2"/>
+            </a:solidFill>
+          </a:ln>
+          <a:effectLst/>
+        </p:spPr>
+        <p:txBody>
+          <a:bodyPr rtlCol="0" anchor="ctr"/>
+          <a:lstStyle/>
+          <a:p>
+            <a:pPr algn="ctr"/>
+          </a:p>
+        </p:txBody>
+      </p:sp>
+      <p:sp>
+        <p:nvSpPr>
+          <p:cNvPr id="12" name="Rectangle 11"/>
+          <p:cNvSpPr/>
+          <p:nvPr/>
+        </p:nvSpPr>
+        <p:spPr>
+          <a:xfrm>
+            <a:off x="1403604" y="2574798"/>
+            <a:ext cx="1840992" cy="1109472"/>
+          </a:xfrm>
+          <a:prstGeom prst="rect">
+            <a:avLst/>
+          </a:prstGeom>
+          <a:solidFill>
+            <a:srgbClr val="EEF4F9"/>
+          </a:solidFill>
+          <a:ln w="28575">
+            <a:solidFill>
+              <a:srgbClr val="014172"/>
+            </a:solidFill>
+          </a:ln>
+          <a:effectLst/>
+        </p:spPr>
+        <p:txBody>
+          <a:bodyPr rtlCol="0" anchor="ctr"/>
+          <a:lstStyle/>
+          <a:p>
+            <a:pPr algn="ctr"/>
+          </a:p>
+        </p:txBody>
+      </p:sp>
+      <p:sp>
+        <p:nvSpPr>
+          <p:cNvPr id="13" name="TextBox 12"/>
+          <p:cNvSpPr txBox="1"/>
+          <p:nvPr/>
+        </p:nvSpPr>
+        <p:spPr>
+          <a:xfrm>
+            <a:off x="952500" y="4239768"/>
+            <a:ext cx="4572000" cy="247650"/>
+          </a:xfrm>
+          <a:prstGeom prst="rect">
+            <a:avLst/>
+          </a:prstGeom>
+          <a:noFill/>
+        </p:spPr>
+        <p:txBody>
+          <a:bodyPr wrap="none" lIns="0" rIns="0" tIns="0" bIns="0" anchor="ctr">
+            <a:spAutoFit/>
+          </a:bodyPr>
+          <a:lstStyle/>
+          <a:p>
+            <a:pPr algn="l"/>
+            <a:r>
+              <a:rPr sz="1350" b="1">
+                <a:solidFill>
+                  <a:srgbClr val="2E2E33"/>
+                </a:solidFill>
+                <a:latin typeface="Yu Gothic UI"/>
+              </a:rPr>
+              <a:t>外寸 45.0 × 30.8cm</a:t>
+            </a:r>
+          </a:p>
+        </p:txBody>
+      </p:sp>
+      <p:sp>
+        <p:nvSpPr>
+          <p:cNvPr id="14" name="TextBox 13"/>
+          <p:cNvSpPr txBox="1"/>
+          <p:nvPr/>
+        </p:nvSpPr>
+        <p:spPr>
+          <a:xfrm>
+            <a:off x="952500" y="4506468"/>
+            <a:ext cx="4572000" cy="247650"/>
+          </a:xfrm>
+          <a:prstGeom prst="rect">
+            <a:avLst/>
+          </a:prstGeom>
+          <a:noFill/>
+        </p:spPr>
+        <p:txBody>
+          <a:bodyPr wrap="none" lIns="0" rIns="0" tIns="0" bIns="0" anchor="ctr">
+            <a:spAutoFit/>
+          </a:bodyPr>
+          <a:lstStyle/>
+          <a:p>
+            <a:pPr algn="l"/>
+            <a:r>
+              <a:rPr sz="1350" b="1">
+                <a:solidFill>
+                  <a:srgbClr val="014172"/>
+                </a:solidFill>
+                <a:latin typeface="Yu Gothic UI"/>
+              </a:rPr>
+              <a:t>→ 内寸 30.2 × 18.2cm</a:t>
+            </a:r>
+          </a:p>
+        </p:txBody>
+      </p:sp>
+      <p:sp>
+        <p:nvSpPr>
+          <p:cNvPr id="15" name="TextBox 14"/>
+          <p:cNvSpPr txBox="1"/>
+          <p:nvPr/>
+        </p:nvSpPr>
+        <p:spPr>
+          <a:xfrm>
+            <a:off x="952500" y="4773168"/>
+            <a:ext cx="4572000" cy="228600"/>
+          </a:xfrm>
+          <a:prstGeom prst="rect">
+            <a:avLst/>
+          </a:prstGeom>
+          <a:noFill/>
+        </p:spPr>
+        <p:txBody>
+          <a:bodyPr wrap="none" lIns="0" rIns="0" tIns="0" bIns="0" anchor="ctr">
+            <a:spAutoFit/>
+          </a:bodyPr>
+          <a:lstStyle/>
+          <a:p>
+            <a:pPr algn="l"/>
+            <a:r>
+              <a:rPr sz="1050" b="0">
+                <a:solidFill>
+                  <a:srgbClr val="6A717B"/>
+                </a:solidFill>
+                <a:latin typeface="Yu Gothic UI"/>
+              </a:rPr>
+              <a:t>外寸と内寸の差は 長辺で片側7.4cm ／ 短辺で片側6.3cm</a:t>
+            </a:r>
+          </a:p>
+        </p:txBody>
+      </p:sp>
+      <p:sp>
+        <p:nvSpPr>
+          <p:cNvPr id="16" name="TextBox 15"/>
+          <p:cNvSpPr txBox="1"/>
+          <p:nvPr/>
+        </p:nvSpPr>
+        <p:spPr>
+          <a:xfrm>
+            <a:off x="6096000" y="1905000"/>
+            <a:ext cx="4953000" cy="228600"/>
+          </a:xfrm>
+          <a:prstGeom prst="rect">
+            <a:avLst/>
+          </a:prstGeom>
+          <a:noFill/>
+        </p:spPr>
+        <p:txBody>
+          <a:bodyPr wrap="none" lIns="0" rIns="0" tIns="0" bIns="0" anchor="ctr">
+            <a:spAutoFit/>
+          </a:bodyPr>
+          <a:lstStyle/>
+          <a:p>
+            <a:pPr algn="l"/>
+            <a:r>
+              <a:rPr sz="1125" b="1">
+                <a:solidFill>
+                  <a:srgbClr val="2E2E33"/>
+                </a:solidFill>
+                <a:latin typeface="Yu Gothic UI"/>
+              </a:rPr>
+              <a:t>ダイワ クールラインα3 S1500（発泡スチロール）</a:t>
+            </a:r>
+          </a:p>
+        </p:txBody>
+      </p:sp>
+      <p:sp>
+        <p:nvSpPr>
+          <p:cNvPr id="17" name="Rectangle 16"/>
+          <p:cNvSpPr/>
+          <p:nvPr/>
+        </p:nvSpPr>
+        <p:spPr>
+          <a:xfrm>
+            <a:off x="6096000" y="2190750"/>
+            <a:ext cx="2895600" cy="1524000"/>
+          </a:xfrm>
+          <a:prstGeom prst="rect">
+            <a:avLst/>
+          </a:prstGeom>
+          <a:solidFill>
+            <a:srgbClr val="F2F5F8"/>
+          </a:solidFill>
+          <a:ln w="19050">
+            <a:solidFill>
+              <a:srgbClr val="DAE7F2"/>
+            </a:solidFill>
+          </a:ln>
+          <a:effectLst/>
+        </p:spPr>
+        <p:txBody>
+          <a:bodyPr rtlCol="0" anchor="ctr"/>
+          <a:lstStyle/>
+          <a:p>
+            <a:pPr algn="ctr"/>
+          </a:p>
+        </p:txBody>
+      </p:sp>
+      <p:sp>
+        <p:nvSpPr>
+          <p:cNvPr id="18" name="Rectangle 17"/>
+          <p:cNvSpPr/>
+          <p:nvPr/>
+        </p:nvSpPr>
+        <p:spPr>
+          <a:xfrm>
+            <a:off x="6446520" y="2434590"/>
+            <a:ext cx="2194560" cy="1036320"/>
+          </a:xfrm>
+          <a:prstGeom prst="rect">
+            <a:avLst/>
+          </a:prstGeom>
+          <a:solidFill>
+            <a:srgbClr val="EEF4F9"/>
+          </a:solidFill>
+          <a:ln w="28575">
+            <a:solidFill>
+              <a:srgbClr val="014172"/>
+            </a:solidFill>
+          </a:ln>
+          <a:effectLst/>
+        </p:spPr>
+        <p:txBody>
+          <a:bodyPr rtlCol="0" anchor="ctr"/>
+          <a:lstStyle/>
+          <a:p>
+            <a:pPr algn="ctr"/>
+          </a:p>
+        </p:txBody>
+      </p:sp>
+      <p:sp>
+        <p:nvSpPr>
+          <p:cNvPr id="19" name="TextBox 18"/>
+          <p:cNvSpPr txBox="1"/>
+          <p:nvPr/>
+        </p:nvSpPr>
+        <p:spPr>
+          <a:xfrm>
+            <a:off x="6096000" y="3886200"/>
+            <a:ext cx="4572000" cy="247650"/>
+          </a:xfrm>
+          <a:prstGeom prst="rect">
+            <a:avLst/>
+          </a:prstGeom>
+          <a:noFill/>
+        </p:spPr>
+        <p:txBody>
+          <a:bodyPr wrap="none" lIns="0" rIns="0" tIns="0" bIns="0" anchor="ctr">
+            <a:spAutoFit/>
+          </a:bodyPr>
+          <a:lstStyle/>
+          <a:p>
+            <a:pPr algn="l"/>
+            <a:r>
+              <a:rPr sz="1350" b="1">
+                <a:solidFill>
+                  <a:srgbClr val="2E2E33"/>
+                </a:solidFill>
+                <a:latin typeface="Yu Gothic UI"/>
+              </a:rPr>
+              <a:t>外寸 47.5 × 25.0cm</a:t>
+            </a:r>
+          </a:p>
+        </p:txBody>
+      </p:sp>
+      <p:sp>
+        <p:nvSpPr>
+          <p:cNvPr id="20" name="TextBox 19"/>
+          <p:cNvSpPr txBox="1"/>
+          <p:nvPr/>
+        </p:nvSpPr>
+        <p:spPr>
+          <a:xfrm>
+            <a:off x="6096000" y="4152900"/>
+            <a:ext cx="4572000" cy="247650"/>
+          </a:xfrm>
+          <a:prstGeom prst="rect">
+            <a:avLst/>
+          </a:prstGeom>
+          <a:noFill/>
+        </p:spPr>
+        <p:txBody>
+          <a:bodyPr wrap="none" lIns="0" rIns="0" tIns="0" bIns="0" anchor="ctr">
+            <a:spAutoFit/>
+          </a:bodyPr>
+          <a:lstStyle/>
+          <a:p>
+            <a:pPr algn="l"/>
+            <a:r>
+              <a:rPr sz="1350" b="1">
+                <a:solidFill>
+                  <a:srgbClr val="014172"/>
+                </a:solidFill>
+                <a:latin typeface="Yu Gothic UI"/>
+              </a:rPr>
+              <a:t>→ 内寸 36.0 × 17.0cm</a:t>
+            </a:r>
+          </a:p>
+        </p:txBody>
+      </p:sp>
+      <p:sp>
+        <p:nvSpPr>
+          <p:cNvPr id="21" name="TextBox 20"/>
+          <p:cNvSpPr txBox="1"/>
+          <p:nvPr/>
+        </p:nvSpPr>
+        <p:spPr>
+          <a:xfrm>
+            <a:off x="6096000" y="4419600"/>
+            <a:ext cx="4572000" cy="228600"/>
+          </a:xfrm>
+          <a:prstGeom prst="rect">
+            <a:avLst/>
+          </a:prstGeom>
+          <a:noFill/>
+        </p:spPr>
+        <p:txBody>
+          <a:bodyPr wrap="none" lIns="0" rIns="0" tIns="0" bIns="0" anchor="ctr">
+            <a:spAutoFit/>
+          </a:bodyPr>
+          <a:lstStyle/>
+          <a:p>
+            <a:pPr algn="l"/>
+            <a:r>
+              <a:rPr sz="1050" b="0">
+                <a:solidFill>
+                  <a:srgbClr val="6A717B"/>
+                </a:solidFill>
+                <a:latin typeface="Yu Gothic UI"/>
+              </a:rPr>
+              <a:t>外寸と内寸の差は 長辺で片側5.75cm ／ 短辺で片側4.0cm</a:t>
+            </a:r>
+          </a:p>
+        </p:txBody>
+      </p:sp>
+      <p:sp>
+        <p:nvSpPr>
+          <p:cNvPr id="22" name="Rectangle 21"/>
+          <p:cNvSpPr/>
+          <p:nvPr/>
+        </p:nvSpPr>
+        <p:spPr>
+          <a:xfrm>
+            <a:off x="609600" y="5295900"/>
+            <a:ext cx="10210800" cy="9525"/>
+          </a:xfrm>
+          <a:prstGeom prst="rect">
+            <a:avLst/>
+          </a:prstGeom>
+          <a:solidFill>
+            <a:srgbClr val="E2E7EC"/>
+          </a:solidFill>
+          <a:ln>
+            <a:noFill/>
+          </a:ln>
+          <a:effectLst/>
+        </p:spPr>
+        <p:txBody>
+          <a:bodyPr rtlCol="0" anchor="ctr"/>
+          <a:lstStyle/>
+          <a:p>
+            <a:pPr algn="ctr"/>
+          </a:p>
+        </p:txBody>
+      </p:sp>
+      <p:sp>
+        <p:nvSpPr>
+          <p:cNvPr id="23" name="TextBox 22"/>
+          <p:cNvSpPr txBox="1"/>
+          <p:nvPr/>
+        </p:nvSpPr>
+        <p:spPr>
+          <a:xfrm>
+            <a:off x="609600" y="5429250"/>
+            <a:ext cx="7239000" cy="247650"/>
+          </a:xfrm>
+          <a:prstGeom prst="rect">
+            <a:avLst/>
+          </a:prstGeom>
+          <a:noFill/>
+        </p:spPr>
+        <p:txBody>
+          <a:bodyPr wrap="none" lIns="0" rIns="0" tIns="0" bIns="0" anchor="ctr">
+            <a:spAutoFit/>
+          </a:bodyPr>
+          <a:lstStyle/>
+          <a:p>
+            <a:pPr algn="l"/>
+            <a:r>
+              <a:rPr sz="1425" b="1">
+                <a:solidFill>
+                  <a:srgbClr val="2E2E33"/>
+                </a:solidFill>
+                <a:latin typeface="Yu Gothic UI"/>
+              </a:rPr>
+              <a:t>外寸が大きくても、断熱が厚ければ中は狭くなります。</a:t>
+            </a:r>
+          </a:p>
+        </p:txBody>
+      </p:sp>
+      <p:sp>
+        <p:nvSpPr>
+          <p:cNvPr id="24" name="TextBox 23"/>
+          <p:cNvSpPr txBox="1"/>
+          <p:nvPr/>
+        </p:nvSpPr>
+        <p:spPr>
+          <a:xfrm>
+            <a:off x="609600" y="5676900"/>
+            <a:ext cx="7620000" cy="209550"/>
+          </a:xfrm>
+          <a:prstGeom prst="rect">
+            <a:avLst/>
+          </a:prstGeom>
+          <a:noFill/>
+        </p:spPr>
+        <p:txBody>
+          <a:bodyPr wrap="none" lIns="0" rIns="0" tIns="0" bIns="0" anchor="ctr">
+            <a:spAutoFit/>
+          </a:bodyPr>
+          <a:lstStyle/>
+          <a:p>
+            <a:pPr algn="l"/>
+            <a:r>
+              <a:rPr sz="1050" b="0">
+                <a:solidFill>
+                  <a:srgbClr val="6A717B"/>
+                </a:solidFill>
+                <a:latin typeface="Yu Gothic UI"/>
+              </a:rPr>
+              <a:t>メーカー公表値からの計算です（実測ではありません）</a:t>
+            </a:r>
+          </a:p>
+        </p:txBody>
+      </p:sp>
+      <p:sp>
+        <p:nvSpPr>
+          <p:cNvPr id="25" name="TextBox 24"/>
           <p:cNvSpPr txBox="1"/>
           <p:nvPr/>
         </p:nvSpPr>

--- a/site/public/img/figures.pptx
+++ b/site/public/img/figures.pptx
@@ -30,6 +30,12 @@
     <p:sldId id="278" r:id="rId29"/>
     <p:sldId id="279" r:id="rId30"/>
     <p:sldId id="280" r:id="rId31"/>
+    <p:sldId id="281" r:id="rId32"/>
+    <p:sldId id="282" r:id="rId33"/>
+    <p:sldId id="283" r:id="rId34"/>
+    <p:sldId id="284" r:id="rId35"/>
+    <p:sldId id="285" r:id="rId36"/>
+    <p:sldId id="286" r:id="rId37"/>
   </p:sldIdLst>
   <p:sldSz cx="11430000" cy="6000750" type="screen4x3"/>
   <p:notesSz cx="6858000" cy="9144000"/>
@@ -26223,6 +26229,4671 @@
 </p:sld>
 </file>
 
+<file path=ppt/slides/slide26.xml><?xml version="1.0" encoding="utf-8"?>
+<p:sld xmlns:a="http://schemas.openxmlformats.org/drawingml/2006/main" xmlns:p="http://schemas.openxmlformats.org/presentationml/2006/main" xmlns:r="http://schemas.openxmlformats.org/officeDocument/2006/relationships">
+  <p:cSld>
+    <p:spTree>
+      <p:nvGrpSpPr>
+        <p:cNvPr id="1" name=""/>
+        <p:cNvGrpSpPr/>
+        <p:nvPr/>
+      </p:nvGrpSpPr>
+      <p:grpSpPr/>
+      <p:sp>
+        <p:nvSpPr>
+          <p:cNvPr id="2" name="Rectangle 1"/>
+          <p:cNvSpPr/>
+          <p:nvPr/>
+        </p:nvSpPr>
+        <p:spPr>
+          <a:xfrm>
+            <a:off x="0" y="0"/>
+            <a:ext cx="11430000" cy="6000750"/>
+          </a:xfrm>
+          <a:prstGeom prst="rect">
+            <a:avLst/>
+          </a:prstGeom>
+          <a:solidFill>
+            <a:srgbClr val="FCFCFC"/>
+          </a:solidFill>
+          <a:ln>
+            <a:noFill/>
+          </a:ln>
+          <a:effectLst/>
+        </p:spPr>
+        <p:txBody>
+          <a:bodyPr rtlCol="0" anchor="ctr"/>
+          <a:lstStyle/>
+          <a:p>
+            <a:pPr algn="ctr"/>
+          </a:p>
+        </p:txBody>
+      </p:sp>
+      <p:sp>
+        <p:nvSpPr>
+          <p:cNvPr id="3" name="Rectangle 2"/>
+          <p:cNvSpPr/>
+          <p:nvPr/>
+        </p:nvSpPr>
+        <p:spPr>
+          <a:xfrm>
+            <a:off x="0" y="0"/>
+            <a:ext cx="114300" cy="6000750"/>
+          </a:xfrm>
+          <a:prstGeom prst="rect">
+            <a:avLst/>
+          </a:prstGeom>
+          <a:solidFill>
+            <a:srgbClr val="014172"/>
+          </a:solidFill>
+          <a:ln>
+            <a:noFill/>
+          </a:ln>
+          <a:effectLst/>
+        </p:spPr>
+        <p:txBody>
+          <a:bodyPr rtlCol="0" anchor="ctr"/>
+          <a:lstStyle/>
+          <a:p>
+            <a:pPr algn="ctr"/>
+          </a:p>
+        </p:txBody>
+      </p:sp>
+      <p:sp>
+        <p:nvSpPr>
+          <p:cNvPr id="4" name="Rectangle 3"/>
+          <p:cNvSpPr/>
+          <p:nvPr/>
+        </p:nvSpPr>
+        <p:spPr>
+          <a:xfrm>
+            <a:off x="0" y="0"/>
+            <a:ext cx="11430000" cy="1504950"/>
+          </a:xfrm>
+          <a:prstGeom prst="rect">
+            <a:avLst/>
+          </a:prstGeom>
+          <a:solidFill>
+            <a:srgbClr val="014172"/>
+          </a:solidFill>
+          <a:ln>
+            <a:noFill/>
+          </a:ln>
+          <a:effectLst/>
+        </p:spPr>
+        <p:txBody>
+          <a:bodyPr rtlCol="0" anchor="ctr"/>
+          <a:lstStyle/>
+          <a:p>
+            <a:pPr algn="ctr"/>
+          </a:p>
+        </p:txBody>
+      </p:sp>
+      <p:sp>
+        <p:nvSpPr>
+          <p:cNvPr id="5" name="TextBox 4"/>
+          <p:cNvSpPr txBox="1"/>
+          <p:nvPr/>
+        </p:nvSpPr>
+        <p:spPr>
+          <a:xfrm>
+            <a:off x="609600" y="361950"/>
+            <a:ext cx="7429500" cy="476250"/>
+          </a:xfrm>
+          <a:prstGeom prst="rect">
+            <a:avLst/>
+          </a:prstGeom>
+          <a:noFill/>
+        </p:spPr>
+        <p:txBody>
+          <a:bodyPr wrap="none" lIns="0" rIns="0" tIns="0" bIns="0" anchor="ctr">
+            <a:spAutoFit/>
+          </a:bodyPr>
+          <a:lstStyle/>
+          <a:p>
+            <a:pPr algn="l"/>
+            <a:r>
+              <a:rPr sz="3000" b="1">
+                <a:solidFill>
+                  <a:srgbClr val="FFFFFF"/>
+                </a:solidFill>
+                <a:latin typeface="Yu Gothic UI"/>
+              </a:rPr>
+              <a:t>入れたいものから内寸を逆に引く</a:t>
+            </a:r>
+          </a:p>
+        </p:txBody>
+      </p:sp>
+      <p:sp>
+        <p:nvSpPr>
+          <p:cNvPr id="6" name="TextBox 5"/>
+          <p:cNvSpPr txBox="1"/>
+          <p:nvPr/>
+        </p:nvSpPr>
+        <p:spPr>
+          <a:xfrm>
+            <a:off x="609600" y="876300"/>
+            <a:ext cx="7429500" cy="247650"/>
+          </a:xfrm>
+          <a:prstGeom prst="rect">
+            <a:avLst/>
+          </a:prstGeom>
+          <a:noFill/>
+        </p:spPr>
+        <p:txBody>
+          <a:bodyPr wrap="none" lIns="0" rIns="0" tIns="0" bIns="0" anchor="ctr">
+            <a:spAutoFit/>
+          </a:bodyPr>
+          <a:lstStyle/>
+          <a:p>
+            <a:pPr algn="l"/>
+            <a:r>
+              <a:rPr sz="1425" b="0">
+                <a:solidFill>
+                  <a:srgbClr val="DAE7F2"/>
+                </a:solidFill>
+                <a:latin typeface="Yu Gothic UI"/>
+              </a:rPr>
+              <a:t>容量Lは「何が入るか」を教えてくれない</a:t>
+            </a:r>
+          </a:p>
+        </p:txBody>
+      </p:sp>
+      <p:sp>
+        <p:nvSpPr>
+          <p:cNvPr id="7" name="Rounded Rectangle 6"/>
+          <p:cNvSpPr/>
+          <p:nvPr/>
+        </p:nvSpPr>
+        <p:spPr>
+          <a:xfrm>
+            <a:off x="8305800" y="247650"/>
+            <a:ext cx="2514600" cy="1009650"/>
+          </a:xfrm>
+          <a:prstGeom prst="roundRect">
+            <a:avLst>
+              <a:gd name="adj" fmla="val 12000"/>
+            </a:avLst>
+          </a:prstGeom>
+          <a:solidFill>
+            <a:srgbClr val="FFFFFF"/>
+          </a:solidFill>
+          <a:ln>
+            <a:noFill/>
+          </a:ln>
+          <a:effectLst>
+            <a:outerShdw blurRad="254000" dist="63500" dir="5400000" rotWithShape="0">
+              <a:srgbClr val="0B2B45">
+                <a:alpha val="30000"/>
+              </a:srgbClr>
+            </a:outerShdw>
+          </a:effectLst>
+        </p:spPr>
+        <p:txBody>
+          <a:bodyPr rtlCol="0" anchor="ctr"/>
+          <a:lstStyle/>
+          <a:p>
+            <a:pPr algn="ctr"/>
+          </a:p>
+        </p:txBody>
+      </p:sp>
+      <p:sp>
+        <p:nvSpPr>
+          <p:cNvPr id="8" name="TextBox 7"/>
+          <p:cNvSpPr txBox="1"/>
+          <p:nvPr/>
+        </p:nvSpPr>
+        <p:spPr>
+          <a:xfrm>
+            <a:off x="8515350" y="400050"/>
+            <a:ext cx="2133600" cy="209550"/>
+          </a:xfrm>
+          <a:prstGeom prst="rect">
+            <a:avLst/>
+          </a:prstGeom>
+          <a:noFill/>
+        </p:spPr>
+        <p:txBody>
+          <a:bodyPr wrap="none" lIns="0" rIns="0" tIns="0" bIns="0" anchor="ctr">
+            <a:spAutoFit/>
+          </a:bodyPr>
+          <a:lstStyle/>
+          <a:p>
+            <a:pPr algn="l"/>
+            <a:r>
+              <a:rPr sz="1125" b="0">
+                <a:solidFill>
+                  <a:srgbClr val="6A717B"/>
+                </a:solidFill>
+                <a:latin typeface="Yu Gothic UI"/>
+              </a:rPr>
+              <a:t>内寸を並べた</a:t>
+            </a:r>
+          </a:p>
+        </p:txBody>
+      </p:sp>
+      <p:sp>
+        <p:nvSpPr>
+          <p:cNvPr id="9" name="TextBox 8"/>
+          <p:cNvSpPr txBox="1"/>
+          <p:nvPr/>
+        </p:nvSpPr>
+        <p:spPr>
+          <a:xfrm>
+            <a:off x="8515350" y="647700"/>
+            <a:ext cx="2133600" cy="533400"/>
+          </a:xfrm>
+          <a:prstGeom prst="rect">
+            <a:avLst/>
+          </a:prstGeom>
+          <a:noFill/>
+        </p:spPr>
+        <p:txBody>
+          <a:bodyPr wrap="none" lIns="0" rIns="0" tIns="0" bIns="0" anchor="ctr">
+            <a:spAutoFit/>
+          </a:bodyPr>
+          <a:lstStyle/>
+          <a:p>
+            <a:pPr algn="l"/>
+            <a:r>
+              <a:rPr sz="3900" b="1">
+                <a:solidFill>
+                  <a:srgbClr val="014172"/>
+                </a:solidFill>
+                <a:latin typeface="Yu Gothic UI"/>
+              </a:rPr>
+              <a:t>26</a:t>
+            </a:r>
+            <a:r>
+              <a:rPr sz="1950" b="1">
+                <a:solidFill>
+                  <a:srgbClr val="014172"/>
+                </a:solidFill>
+                <a:latin typeface="Yu Gothic UI"/>
+              </a:rPr>
+              <a:t>製品</a:t>
+            </a:r>
+          </a:p>
+        </p:txBody>
+      </p:sp>
+      <p:sp>
+        <p:nvSpPr>
+          <p:cNvPr id="10" name="Rectangle 9"/>
+          <p:cNvSpPr/>
+          <p:nvPr/>
+        </p:nvSpPr>
+        <p:spPr>
+          <a:xfrm>
+            <a:off x="495300" y="1695450"/>
+            <a:ext cx="10439400" cy="609600"/>
+          </a:xfrm>
+          <a:prstGeom prst="rect">
+            <a:avLst/>
+          </a:prstGeom>
+          <a:solidFill>
+            <a:srgbClr val="F2F5F8"/>
+          </a:solidFill>
+          <a:ln>
+            <a:noFill/>
+          </a:ln>
+          <a:effectLst/>
+        </p:spPr>
+        <p:txBody>
+          <a:bodyPr rtlCol="0" anchor="ctr"/>
+          <a:lstStyle/>
+          <a:p>
+            <a:pPr algn="ctr"/>
+          </a:p>
+        </p:txBody>
+      </p:sp>
+      <p:sp>
+        <p:nvSpPr>
+          <p:cNvPr id="11" name="Rectangle 10"/>
+          <p:cNvSpPr/>
+          <p:nvPr/>
+        </p:nvSpPr>
+        <p:spPr>
+          <a:xfrm>
+            <a:off x="495300" y="2381250"/>
+            <a:ext cx="10439400" cy="609600"/>
+          </a:xfrm>
+          <a:prstGeom prst="rect">
+            <a:avLst/>
+          </a:prstGeom>
+          <a:solidFill>
+            <a:srgbClr val="FCFCFC"/>
+          </a:solidFill>
+          <a:ln>
+            <a:noFill/>
+          </a:ln>
+          <a:effectLst/>
+        </p:spPr>
+        <p:txBody>
+          <a:bodyPr rtlCol="0" anchor="ctr"/>
+          <a:lstStyle/>
+          <a:p>
+            <a:pPr algn="ctr"/>
+          </a:p>
+        </p:txBody>
+      </p:sp>
+      <p:sp>
+        <p:nvSpPr>
+          <p:cNvPr id="12" name="Rectangle 11"/>
+          <p:cNvSpPr/>
+          <p:nvPr/>
+        </p:nvSpPr>
+        <p:spPr>
+          <a:xfrm>
+            <a:off x="495300" y="3067050"/>
+            <a:ext cx="10439400" cy="609600"/>
+          </a:xfrm>
+          <a:prstGeom prst="rect">
+            <a:avLst/>
+          </a:prstGeom>
+          <a:solidFill>
+            <a:srgbClr val="F2F5F8"/>
+          </a:solidFill>
+          <a:ln>
+            <a:noFill/>
+          </a:ln>
+          <a:effectLst/>
+        </p:spPr>
+        <p:txBody>
+          <a:bodyPr rtlCol="0" anchor="ctr"/>
+          <a:lstStyle/>
+          <a:p>
+            <a:pPr algn="ctr"/>
+          </a:p>
+        </p:txBody>
+      </p:sp>
+      <p:sp>
+        <p:nvSpPr>
+          <p:cNvPr id="13" name="Rectangle 12"/>
+          <p:cNvSpPr/>
+          <p:nvPr/>
+        </p:nvSpPr>
+        <p:spPr>
+          <a:xfrm>
+            <a:off x="495300" y="3752850"/>
+            <a:ext cx="10439400" cy="609600"/>
+          </a:xfrm>
+          <a:prstGeom prst="rect">
+            <a:avLst/>
+          </a:prstGeom>
+          <a:solidFill>
+            <a:srgbClr val="FCFCFC"/>
+          </a:solidFill>
+          <a:ln>
+            <a:noFill/>
+          </a:ln>
+          <a:effectLst/>
+        </p:spPr>
+        <p:txBody>
+          <a:bodyPr rtlCol="0" anchor="ctr"/>
+          <a:lstStyle/>
+          <a:p>
+            <a:pPr algn="ctr"/>
+          </a:p>
+        </p:txBody>
+      </p:sp>
+      <p:sp>
+        <p:nvSpPr>
+          <p:cNvPr id="14" name="Rectangle 13"/>
+          <p:cNvSpPr/>
+          <p:nvPr/>
+        </p:nvSpPr>
+        <p:spPr>
+          <a:xfrm>
+            <a:off x="495300" y="4438650"/>
+            <a:ext cx="10439400" cy="609600"/>
+          </a:xfrm>
+          <a:prstGeom prst="rect">
+            <a:avLst/>
+          </a:prstGeom>
+          <a:solidFill>
+            <a:srgbClr val="F2F5F8"/>
+          </a:solidFill>
+          <a:ln>
+            <a:noFill/>
+          </a:ln>
+          <a:effectLst/>
+        </p:spPr>
+        <p:txBody>
+          <a:bodyPr rtlCol="0" anchor="ctr"/>
+          <a:lstStyle/>
+          <a:p>
+            <a:pPr algn="ctr"/>
+          </a:p>
+        </p:txBody>
+      </p:sp>
+      <p:sp>
+        <p:nvSpPr>
+          <p:cNvPr id="15" name="TextBox 14"/>
+          <p:cNvSpPr txBox="1"/>
+          <p:nvPr/>
+        </p:nvSpPr>
+        <p:spPr>
+          <a:xfrm>
+            <a:off x="704850" y="1790700"/>
+            <a:ext cx="2857500" cy="228600"/>
+          </a:xfrm>
+          <a:prstGeom prst="rect">
+            <a:avLst/>
+          </a:prstGeom>
+          <a:noFill/>
+        </p:spPr>
+        <p:txBody>
+          <a:bodyPr wrap="none" lIns="0" rIns="0" tIns="0" bIns="0" anchor="ctr">
+            <a:spAutoFit/>
+          </a:bodyPr>
+          <a:lstStyle/>
+          <a:p>
+            <a:pPr algn="l"/>
+            <a:r>
+              <a:rPr sz="1275" b="1">
+                <a:solidFill>
+                  <a:srgbClr val="2E2E33"/>
+                </a:solidFill>
+                <a:latin typeface="Yu Gothic UI"/>
+              </a:rPr>
+              <a:t>500ml ペットボトル</a:t>
+            </a:r>
+          </a:p>
+        </p:txBody>
+      </p:sp>
+      <p:sp>
+        <p:nvSpPr>
+          <p:cNvPr id="16" name="TextBox 15"/>
+          <p:cNvSpPr txBox="1"/>
+          <p:nvPr/>
+        </p:nvSpPr>
+        <p:spPr>
+          <a:xfrm>
+            <a:off x="704850" y="2038350"/>
+            <a:ext cx="2857500" cy="209550"/>
+          </a:xfrm>
+          <a:prstGeom prst="rect">
+            <a:avLst/>
+          </a:prstGeom>
+          <a:noFill/>
+        </p:spPr>
+        <p:txBody>
+          <a:bodyPr wrap="none" lIns="0" rIns="0" tIns="0" bIns="0" anchor="ctr">
+            <a:spAutoFit/>
+          </a:bodyPr>
+          <a:lstStyle/>
+          <a:p>
+            <a:pPr algn="l"/>
+            <a:r>
+              <a:rPr sz="1050" b="0">
+                <a:solidFill>
+                  <a:srgbClr val="6A717B"/>
+                </a:solidFill>
+                <a:latin typeface="Yu Gothic UI"/>
+              </a:rPr>
+              <a:t>全高 207mm</a:t>
+            </a:r>
+          </a:p>
+        </p:txBody>
+      </p:sp>
+      <p:sp>
+        <p:nvSpPr>
+          <p:cNvPr id="17" name="TextBox 16"/>
+          <p:cNvSpPr txBox="1"/>
+          <p:nvPr/>
+        </p:nvSpPr>
+        <p:spPr>
+          <a:xfrm>
+            <a:off x="3733800" y="1866900"/>
+            <a:ext cx="476250" cy="266700"/>
+          </a:xfrm>
+          <a:prstGeom prst="rect">
+            <a:avLst/>
+          </a:prstGeom>
+          <a:noFill/>
+        </p:spPr>
+        <p:txBody>
+          <a:bodyPr wrap="none" lIns="0" rIns="0" tIns="0" bIns="0" anchor="ctr">
+            <a:spAutoFit/>
+          </a:bodyPr>
+          <a:lstStyle/>
+          <a:p>
+            <a:pPr algn="l"/>
+            <a:r>
+              <a:rPr sz="1500" b="1">
+                <a:solidFill>
+                  <a:srgbClr val="014172"/>
+                </a:solidFill>
+                <a:latin typeface="Yu Gothic UI"/>
+              </a:rPr>
+              <a:t>→</a:t>
+            </a:r>
+          </a:p>
+        </p:txBody>
+      </p:sp>
+      <p:sp>
+        <p:nvSpPr>
+          <p:cNvPr id="18" name="TextBox 17"/>
+          <p:cNvSpPr txBox="1"/>
+          <p:nvPr/>
+        </p:nvSpPr>
+        <p:spPr>
+          <a:xfrm>
+            <a:off x="4343400" y="1790700"/>
+            <a:ext cx="2857500" cy="228600"/>
+          </a:xfrm>
+          <a:prstGeom prst="rect">
+            <a:avLst/>
+          </a:prstGeom>
+          <a:noFill/>
+        </p:spPr>
+        <p:txBody>
+          <a:bodyPr wrap="none" lIns="0" rIns="0" tIns="0" bIns="0" anchor="ctr">
+            <a:spAutoFit/>
+          </a:bodyPr>
+          <a:lstStyle/>
+          <a:p>
+            <a:pPr algn="l"/>
+            <a:r>
+              <a:rPr sz="1275" b="1">
+                <a:solidFill>
+                  <a:srgbClr val="014172"/>
+                </a:solidFill>
+                <a:latin typeface="Yu Gothic UI"/>
+              </a:rPr>
+              <a:t>内寸の辺 ÷ 胴径</a:t>
+            </a:r>
+          </a:p>
+        </p:txBody>
+      </p:sp>
+      <p:sp>
+        <p:nvSpPr>
+          <p:cNvPr id="19" name="TextBox 18"/>
+          <p:cNvSpPr txBox="1"/>
+          <p:nvPr/>
+        </p:nvSpPr>
+        <p:spPr>
+          <a:xfrm>
+            <a:off x="7524750" y="1866900"/>
+            <a:ext cx="3238500" cy="266700"/>
+          </a:xfrm>
+          <a:prstGeom prst="rect">
+            <a:avLst/>
+          </a:prstGeom>
+          <a:noFill/>
+        </p:spPr>
+        <p:txBody>
+          <a:bodyPr wrap="none" lIns="0" rIns="0" tIns="0" bIns="0" anchor="ctr">
+            <a:spAutoFit/>
+          </a:bodyPr>
+          <a:lstStyle/>
+          <a:p>
+            <a:pPr algn="l"/>
+            <a:r>
+              <a:rPr sz="1275" b="1">
+                <a:solidFill>
+                  <a:srgbClr val="2E2E33"/>
+                </a:solidFill>
+                <a:latin typeface="Yu Gothic UI"/>
+              </a:rPr>
+              <a:t>同じ20Lでも 15〜18本</a:t>
+            </a:r>
+          </a:p>
+        </p:txBody>
+      </p:sp>
+      <p:sp>
+        <p:nvSpPr>
+          <p:cNvPr id="20" name="TextBox 19"/>
+          <p:cNvSpPr txBox="1"/>
+          <p:nvPr/>
+        </p:nvSpPr>
+        <p:spPr>
+          <a:xfrm>
+            <a:off x="704850" y="2476500"/>
+            <a:ext cx="2857500" cy="228600"/>
+          </a:xfrm>
+          <a:prstGeom prst="rect">
+            <a:avLst/>
+          </a:prstGeom>
+          <a:noFill/>
+        </p:spPr>
+        <p:txBody>
+          <a:bodyPr wrap="none" lIns="0" rIns="0" tIns="0" bIns="0" anchor="ctr">
+            <a:spAutoFit/>
+          </a:bodyPr>
+          <a:lstStyle/>
+          <a:p>
+            <a:pPr algn="l"/>
+            <a:r>
+              <a:rPr sz="1275" b="1">
+                <a:solidFill>
+                  <a:srgbClr val="2E2E33"/>
+                </a:solidFill>
+                <a:latin typeface="Yu Gothic UI"/>
+              </a:rPr>
+              <a:t>2L ペットボトル</a:t>
+            </a:r>
+          </a:p>
+        </p:txBody>
+      </p:sp>
+      <p:sp>
+        <p:nvSpPr>
+          <p:cNvPr id="21" name="TextBox 20"/>
+          <p:cNvSpPr txBox="1"/>
+          <p:nvPr/>
+        </p:nvSpPr>
+        <p:spPr>
+          <a:xfrm>
+            <a:off x="704850" y="2724150"/>
+            <a:ext cx="2857500" cy="209550"/>
+          </a:xfrm>
+          <a:prstGeom prst="rect">
+            <a:avLst/>
+          </a:prstGeom>
+          <a:noFill/>
+        </p:spPr>
+        <p:txBody>
+          <a:bodyPr wrap="none" lIns="0" rIns="0" tIns="0" bIns="0" anchor="ctr">
+            <a:spAutoFit/>
+          </a:bodyPr>
+          <a:lstStyle/>
+          <a:p>
+            <a:pPr algn="l"/>
+            <a:r>
+              <a:rPr sz="1050" b="0">
+                <a:solidFill>
+                  <a:srgbClr val="6A717B"/>
+                </a:solidFill>
+                <a:latin typeface="Yu Gothic UI"/>
+              </a:rPr>
+              <a:t>全高 306mm</a:t>
+            </a:r>
+          </a:p>
+        </p:txBody>
+      </p:sp>
+      <p:sp>
+        <p:nvSpPr>
+          <p:cNvPr id="22" name="TextBox 21"/>
+          <p:cNvSpPr txBox="1"/>
+          <p:nvPr/>
+        </p:nvSpPr>
+        <p:spPr>
+          <a:xfrm>
+            <a:off x="3733800" y="2552700"/>
+            <a:ext cx="476250" cy="266700"/>
+          </a:xfrm>
+          <a:prstGeom prst="rect">
+            <a:avLst/>
+          </a:prstGeom>
+          <a:noFill/>
+        </p:spPr>
+        <p:txBody>
+          <a:bodyPr wrap="none" lIns="0" rIns="0" tIns="0" bIns="0" anchor="ctr">
+            <a:spAutoFit/>
+          </a:bodyPr>
+          <a:lstStyle/>
+          <a:p>
+            <a:pPr algn="l"/>
+            <a:r>
+              <a:rPr sz="1500" b="1">
+                <a:solidFill>
+                  <a:srgbClr val="014172"/>
+                </a:solidFill>
+                <a:latin typeface="Yu Gothic UI"/>
+              </a:rPr>
+              <a:t>→</a:t>
+            </a:r>
+          </a:p>
+        </p:txBody>
+      </p:sp>
+      <p:sp>
+        <p:nvSpPr>
+          <p:cNvPr id="23" name="TextBox 22"/>
+          <p:cNvSpPr txBox="1"/>
+          <p:nvPr/>
+        </p:nvSpPr>
+        <p:spPr>
+          <a:xfrm>
+            <a:off x="4343400" y="2476500"/>
+            <a:ext cx="2857500" cy="228600"/>
+          </a:xfrm>
+          <a:prstGeom prst="rect">
+            <a:avLst/>
+          </a:prstGeom>
+          <a:noFill/>
+        </p:spPr>
+        <p:txBody>
+          <a:bodyPr wrap="none" lIns="0" rIns="0" tIns="0" bIns="0" anchor="ctr">
+            <a:spAutoFit/>
+          </a:bodyPr>
+          <a:lstStyle/>
+          <a:p>
+            <a:pPr algn="l"/>
+            <a:r>
+              <a:rPr sz="1275" b="1">
+                <a:solidFill>
+                  <a:srgbClr val="014172"/>
+                </a:solidFill>
+                <a:latin typeface="Yu Gothic UI"/>
+              </a:rPr>
+              <a:t>内寸の深さ</a:t>
+            </a:r>
+          </a:p>
+        </p:txBody>
+      </p:sp>
+      <p:sp>
+        <p:nvSpPr>
+          <p:cNvPr id="24" name="TextBox 23"/>
+          <p:cNvSpPr txBox="1"/>
+          <p:nvPr/>
+        </p:nvSpPr>
+        <p:spPr>
+          <a:xfrm>
+            <a:off x="7524750" y="2552700"/>
+            <a:ext cx="3238500" cy="266700"/>
+          </a:xfrm>
+          <a:prstGeom prst="rect">
+            <a:avLst/>
+          </a:prstGeom>
+          <a:noFill/>
+        </p:spPr>
+        <p:txBody>
+          <a:bodyPr wrap="none" lIns="0" rIns="0" tIns="0" bIns="0" anchor="ctr">
+            <a:spAutoFit/>
+          </a:bodyPr>
+          <a:lstStyle/>
+          <a:p>
+            <a:pPr algn="l"/>
+            <a:r>
+              <a:rPr sz="1275" b="1">
+                <a:solidFill>
+                  <a:srgbClr val="2E2E33"/>
+                </a:solidFill>
+                <a:latin typeface="Yu Gothic UI"/>
+              </a:rPr>
+              <a:t>306mm以上は 26製品中3つ</a:t>
+            </a:r>
+          </a:p>
+        </p:txBody>
+      </p:sp>
+      <p:sp>
+        <p:nvSpPr>
+          <p:cNvPr id="25" name="TextBox 24"/>
+          <p:cNvSpPr txBox="1"/>
+          <p:nvPr/>
+        </p:nvSpPr>
+        <p:spPr>
+          <a:xfrm>
+            <a:off x="704850" y="3162300"/>
+            <a:ext cx="2857500" cy="228600"/>
+          </a:xfrm>
+          <a:prstGeom prst="rect">
+            <a:avLst/>
+          </a:prstGeom>
+          <a:noFill/>
+        </p:spPr>
+        <p:txBody>
+          <a:bodyPr wrap="none" lIns="0" rIns="0" tIns="0" bIns="0" anchor="ctr">
+            <a:spAutoFit/>
+          </a:bodyPr>
+          <a:lstStyle/>
+          <a:p>
+            <a:pPr algn="l"/>
+            <a:r>
+              <a:rPr sz="1275" b="1">
+                <a:solidFill>
+                  <a:srgbClr val="2E2E33"/>
+                </a:solidFill>
+                <a:latin typeface="Yu Gothic UI"/>
+              </a:rPr>
+              <a:t>保冷剤</a:t>
+            </a:r>
+          </a:p>
+        </p:txBody>
+      </p:sp>
+      <p:sp>
+        <p:nvSpPr>
+          <p:cNvPr id="26" name="TextBox 25"/>
+          <p:cNvSpPr txBox="1"/>
+          <p:nvPr/>
+        </p:nvSpPr>
+        <p:spPr>
+          <a:xfrm>
+            <a:off x="704850" y="3409950"/>
+            <a:ext cx="2857500" cy="209550"/>
+          </a:xfrm>
+          <a:prstGeom prst="rect">
+            <a:avLst/>
+          </a:prstGeom>
+          <a:noFill/>
+        </p:spPr>
+        <p:txBody>
+          <a:bodyPr wrap="none" lIns="0" rIns="0" tIns="0" bIns="0" anchor="ctr">
+            <a:spAutoFit/>
+          </a:bodyPr>
+          <a:lstStyle/>
+          <a:p>
+            <a:pPr algn="l"/>
+            <a:r>
+              <a:rPr sz="1050" b="0">
+                <a:solidFill>
+                  <a:srgbClr val="6A717B"/>
+                </a:solidFill>
+                <a:latin typeface="Yu Gothic UI"/>
+              </a:rPr>
+              <a:t>厚さ 25〜35mm</a:t>
+            </a:r>
+          </a:p>
+        </p:txBody>
+      </p:sp>
+      <p:sp>
+        <p:nvSpPr>
+          <p:cNvPr id="27" name="TextBox 26"/>
+          <p:cNvSpPr txBox="1"/>
+          <p:nvPr/>
+        </p:nvSpPr>
+        <p:spPr>
+          <a:xfrm>
+            <a:off x="3733800" y="3238500"/>
+            <a:ext cx="476250" cy="266700"/>
+          </a:xfrm>
+          <a:prstGeom prst="rect">
+            <a:avLst/>
+          </a:prstGeom>
+          <a:noFill/>
+        </p:spPr>
+        <p:txBody>
+          <a:bodyPr wrap="none" lIns="0" rIns="0" tIns="0" bIns="0" anchor="ctr">
+            <a:spAutoFit/>
+          </a:bodyPr>
+          <a:lstStyle/>
+          <a:p>
+            <a:pPr algn="l"/>
+            <a:r>
+              <a:rPr sz="1500" b="1">
+                <a:solidFill>
+                  <a:srgbClr val="014172"/>
+                </a:solidFill>
+                <a:latin typeface="Yu Gothic UI"/>
+              </a:rPr>
+              <a:t>→</a:t>
+            </a:r>
+          </a:p>
+        </p:txBody>
+      </p:sp>
+      <p:sp>
+        <p:nvSpPr>
+          <p:cNvPr id="28" name="TextBox 27"/>
+          <p:cNvSpPr txBox="1"/>
+          <p:nvPr/>
+        </p:nvSpPr>
+        <p:spPr>
+          <a:xfrm>
+            <a:off x="4343400" y="3162300"/>
+            <a:ext cx="2857500" cy="228600"/>
+          </a:xfrm>
+          <a:prstGeom prst="rect">
+            <a:avLst/>
+          </a:prstGeom>
+          <a:noFill/>
+        </p:spPr>
+        <p:txBody>
+          <a:bodyPr wrap="none" lIns="0" rIns="0" tIns="0" bIns="0" anchor="ctr">
+            <a:spAutoFit/>
+          </a:bodyPr>
+          <a:lstStyle/>
+          <a:p>
+            <a:pPr algn="l"/>
+            <a:r>
+              <a:rPr sz="1275" b="1">
+                <a:solidFill>
+                  <a:srgbClr val="014172"/>
+                </a:solidFill>
+                <a:latin typeface="Yu Gothic UI"/>
+              </a:rPr>
+              <a:t>深さの余り</a:t>
+            </a:r>
+          </a:p>
+        </p:txBody>
+      </p:sp>
+      <p:sp>
+        <p:nvSpPr>
+          <p:cNvPr id="29" name="TextBox 28"/>
+          <p:cNvSpPr txBox="1"/>
+          <p:nvPr/>
+        </p:nvSpPr>
+        <p:spPr>
+          <a:xfrm>
+            <a:off x="7524750" y="3238500"/>
+            <a:ext cx="3238500" cy="266700"/>
+          </a:xfrm>
+          <a:prstGeom prst="rect">
+            <a:avLst/>
+          </a:prstGeom>
+          <a:noFill/>
+        </p:spPr>
+        <p:txBody>
+          <a:bodyPr wrap="none" lIns="0" rIns="0" tIns="0" bIns="0" anchor="ctr">
+            <a:spAutoFit/>
+          </a:bodyPr>
+          <a:lstStyle/>
+          <a:p>
+            <a:pPr algn="l"/>
+            <a:r>
+              <a:rPr sz="1275" b="1">
+                <a:solidFill>
+                  <a:srgbClr val="2E2E33"/>
+                </a:solidFill>
+                <a:latin typeface="Yu Gothic UI"/>
+              </a:rPr>
+              <a:t>25mm未満なら床を食う</a:t>
+            </a:r>
+          </a:p>
+        </p:txBody>
+      </p:sp>
+      <p:sp>
+        <p:nvSpPr>
+          <p:cNvPr id="30" name="TextBox 29"/>
+          <p:cNvSpPr txBox="1"/>
+          <p:nvPr/>
+        </p:nvSpPr>
+        <p:spPr>
+          <a:xfrm>
+            <a:off x="704850" y="3848100"/>
+            <a:ext cx="2857500" cy="228600"/>
+          </a:xfrm>
+          <a:prstGeom prst="rect">
+            <a:avLst/>
+          </a:prstGeom>
+          <a:noFill/>
+        </p:spPr>
+        <p:txBody>
+          <a:bodyPr wrap="none" lIns="0" rIns="0" tIns="0" bIns="0" anchor="ctr">
+            <a:spAutoFit/>
+          </a:bodyPr>
+          <a:lstStyle/>
+          <a:p>
+            <a:pPr algn="l"/>
+            <a:r>
+              <a:rPr sz="1275" b="1">
+                <a:solidFill>
+                  <a:srgbClr val="2E2E33"/>
+                </a:solidFill>
+                <a:latin typeface="Yu Gothic UI"/>
+              </a:rPr>
+              <a:t>大きい魚</a:t>
+            </a:r>
+          </a:p>
+        </p:txBody>
+      </p:sp>
+      <p:sp>
+        <p:nvSpPr>
+          <p:cNvPr id="31" name="TextBox 30"/>
+          <p:cNvSpPr txBox="1"/>
+          <p:nvPr/>
+        </p:nvSpPr>
+        <p:spPr>
+          <a:xfrm>
+            <a:off x="704850" y="4095750"/>
+            <a:ext cx="2857500" cy="209550"/>
+          </a:xfrm>
+          <a:prstGeom prst="rect">
+            <a:avLst/>
+          </a:prstGeom>
+          <a:noFill/>
+        </p:spPr>
+        <p:txBody>
+          <a:bodyPr wrap="none" lIns="0" rIns="0" tIns="0" bIns="0" anchor="ctr">
+            <a:spAutoFit/>
+          </a:bodyPr>
+          <a:lstStyle/>
+          <a:p>
+            <a:pPr algn="l"/>
+            <a:r>
+              <a:rPr sz="1050" b="0">
+                <a:solidFill>
+                  <a:srgbClr val="6A717B"/>
+                </a:solidFill>
+                <a:latin typeface="Yu Gothic UI"/>
+              </a:rPr>
+              <a:t>まっすぐ入る長さ</a:t>
+            </a:r>
+          </a:p>
+        </p:txBody>
+      </p:sp>
+      <p:sp>
+        <p:nvSpPr>
+          <p:cNvPr id="32" name="TextBox 31"/>
+          <p:cNvSpPr txBox="1"/>
+          <p:nvPr/>
+        </p:nvSpPr>
+        <p:spPr>
+          <a:xfrm>
+            <a:off x="3733800" y="3924300"/>
+            <a:ext cx="476250" cy="266700"/>
+          </a:xfrm>
+          <a:prstGeom prst="rect">
+            <a:avLst/>
+          </a:prstGeom>
+          <a:noFill/>
+        </p:spPr>
+        <p:txBody>
+          <a:bodyPr wrap="none" lIns="0" rIns="0" tIns="0" bIns="0" anchor="ctr">
+            <a:spAutoFit/>
+          </a:bodyPr>
+          <a:lstStyle/>
+          <a:p>
+            <a:pPr algn="l"/>
+            <a:r>
+              <a:rPr sz="1500" b="1">
+                <a:solidFill>
+                  <a:srgbClr val="014172"/>
+                </a:solidFill>
+                <a:latin typeface="Yu Gothic UI"/>
+              </a:rPr>
+              <a:t>→</a:t>
+            </a:r>
+          </a:p>
+        </p:txBody>
+      </p:sp>
+      <p:sp>
+        <p:nvSpPr>
+          <p:cNvPr id="33" name="TextBox 32"/>
+          <p:cNvSpPr txBox="1"/>
+          <p:nvPr/>
+        </p:nvSpPr>
+        <p:spPr>
+          <a:xfrm>
+            <a:off x="4343400" y="3848100"/>
+            <a:ext cx="2857500" cy="228600"/>
+          </a:xfrm>
+          <a:prstGeom prst="rect">
+            <a:avLst/>
+          </a:prstGeom>
+          <a:noFill/>
+        </p:spPr>
+        <p:txBody>
+          <a:bodyPr wrap="none" lIns="0" rIns="0" tIns="0" bIns="0" anchor="ctr">
+            <a:spAutoFit/>
+          </a:bodyPr>
+          <a:lstStyle/>
+          <a:p>
+            <a:pPr algn="l"/>
+            <a:r>
+              <a:rPr sz="1275" b="1">
+                <a:solidFill>
+                  <a:srgbClr val="014172"/>
+                </a:solidFill>
+                <a:latin typeface="Yu Gothic UI"/>
+              </a:rPr>
+              <a:t>内寸の長辺</a:t>
+            </a:r>
+          </a:p>
+        </p:txBody>
+      </p:sp>
+      <p:sp>
+        <p:nvSpPr>
+          <p:cNvPr id="34" name="TextBox 33"/>
+          <p:cNvSpPr txBox="1"/>
+          <p:nvPr/>
+        </p:nvSpPr>
+        <p:spPr>
+          <a:xfrm>
+            <a:off x="7524750" y="3924300"/>
+            <a:ext cx="3238500" cy="266700"/>
+          </a:xfrm>
+          <a:prstGeom prst="rect">
+            <a:avLst/>
+          </a:prstGeom>
+          <a:noFill/>
+        </p:spPr>
+        <p:txBody>
+          <a:bodyPr wrap="none" lIns="0" rIns="0" tIns="0" bIns="0" anchor="ctr">
+            <a:spAutoFit/>
+          </a:bodyPr>
+          <a:lstStyle/>
+          <a:p>
+            <a:pPr algn="l"/>
+            <a:r>
+              <a:rPr sz="1275" b="1">
+                <a:solidFill>
+                  <a:srgbClr val="2E2E33"/>
+                </a:solidFill>
+                <a:latin typeface="Yu Gothic UI"/>
+              </a:rPr>
+              <a:t>80cm以上は 3製品</a:t>
+            </a:r>
+          </a:p>
+        </p:txBody>
+      </p:sp>
+      <p:sp>
+        <p:nvSpPr>
+          <p:cNvPr id="35" name="TextBox 34"/>
+          <p:cNvSpPr txBox="1"/>
+          <p:nvPr/>
+        </p:nvSpPr>
+        <p:spPr>
+          <a:xfrm>
+            <a:off x="704850" y="4533900"/>
+            <a:ext cx="2857500" cy="228600"/>
+          </a:xfrm>
+          <a:prstGeom prst="rect">
+            <a:avLst/>
+          </a:prstGeom>
+          <a:noFill/>
+        </p:spPr>
+        <p:txBody>
+          <a:bodyPr wrap="none" lIns="0" rIns="0" tIns="0" bIns="0" anchor="ctr">
+            <a:spAutoFit/>
+          </a:bodyPr>
+          <a:lstStyle/>
+          <a:p>
+            <a:pPr algn="l"/>
+            <a:r>
+              <a:rPr sz="1275" b="1">
+                <a:solidFill>
+                  <a:srgbClr val="2E2E33"/>
+                </a:solidFill>
+                <a:latin typeface="Yu Gothic UI"/>
+              </a:rPr>
+              <a:t>持ち運び</a:t>
+            </a:r>
+          </a:p>
+        </p:txBody>
+      </p:sp>
+      <p:sp>
+        <p:nvSpPr>
+          <p:cNvPr id="36" name="TextBox 35"/>
+          <p:cNvSpPr txBox="1"/>
+          <p:nvPr/>
+        </p:nvSpPr>
+        <p:spPr>
+          <a:xfrm>
+            <a:off x="704850" y="4781550"/>
+            <a:ext cx="2857500" cy="209550"/>
+          </a:xfrm>
+          <a:prstGeom prst="rect">
+            <a:avLst/>
+          </a:prstGeom>
+          <a:noFill/>
+        </p:spPr>
+        <p:txBody>
+          <a:bodyPr wrap="none" lIns="0" rIns="0" tIns="0" bIns="0" anchor="ctr">
+            <a:spAutoFit/>
+          </a:bodyPr>
+          <a:lstStyle/>
+          <a:p>
+            <a:pPr algn="l"/>
+            <a:r>
+              <a:rPr sz="1050" b="0">
+                <a:solidFill>
+                  <a:srgbClr val="6A717B"/>
+                </a:solidFill>
+                <a:latin typeface="Yu Gothic UI"/>
+              </a:rPr>
+              <a:t>空のときの重さ</a:t>
+            </a:r>
+          </a:p>
+        </p:txBody>
+      </p:sp>
+      <p:sp>
+        <p:nvSpPr>
+          <p:cNvPr id="37" name="TextBox 36"/>
+          <p:cNvSpPr txBox="1"/>
+          <p:nvPr/>
+        </p:nvSpPr>
+        <p:spPr>
+          <a:xfrm>
+            <a:off x="3733800" y="4610100"/>
+            <a:ext cx="476250" cy="266700"/>
+          </a:xfrm>
+          <a:prstGeom prst="rect">
+            <a:avLst/>
+          </a:prstGeom>
+          <a:noFill/>
+        </p:spPr>
+        <p:txBody>
+          <a:bodyPr wrap="none" lIns="0" rIns="0" tIns="0" bIns="0" anchor="ctr">
+            <a:spAutoFit/>
+          </a:bodyPr>
+          <a:lstStyle/>
+          <a:p>
+            <a:pPr algn="l"/>
+            <a:r>
+              <a:rPr sz="1500" b="1">
+                <a:solidFill>
+                  <a:srgbClr val="014172"/>
+                </a:solidFill>
+                <a:latin typeface="Yu Gothic UI"/>
+              </a:rPr>
+              <a:t>→</a:t>
+            </a:r>
+          </a:p>
+        </p:txBody>
+      </p:sp>
+      <p:sp>
+        <p:nvSpPr>
+          <p:cNvPr id="38" name="TextBox 37"/>
+          <p:cNvSpPr txBox="1"/>
+          <p:nvPr/>
+        </p:nvSpPr>
+        <p:spPr>
+          <a:xfrm>
+            <a:off x="4343400" y="4533900"/>
+            <a:ext cx="2857500" cy="228600"/>
+          </a:xfrm>
+          <a:prstGeom prst="rect">
+            <a:avLst/>
+          </a:prstGeom>
+          <a:noFill/>
+        </p:spPr>
+        <p:txBody>
+          <a:bodyPr wrap="none" lIns="0" rIns="0" tIns="0" bIns="0" anchor="ctr">
+            <a:spAutoFit/>
+          </a:bodyPr>
+          <a:lstStyle/>
+          <a:p>
+            <a:pPr algn="l"/>
+            <a:r>
+              <a:rPr sz="1275" b="1">
+                <a:solidFill>
+                  <a:srgbClr val="014172"/>
+                </a:solidFill>
+                <a:latin typeface="Yu Gothic UI"/>
+              </a:rPr>
+              <a:t>自重</a:t>
+            </a:r>
+          </a:p>
+        </p:txBody>
+      </p:sp>
+      <p:sp>
+        <p:nvSpPr>
+          <p:cNvPr id="39" name="TextBox 38"/>
+          <p:cNvSpPr txBox="1"/>
+          <p:nvPr/>
+        </p:nvSpPr>
+        <p:spPr>
+          <a:xfrm>
+            <a:off x="7524750" y="4610100"/>
+            <a:ext cx="3238500" cy="266700"/>
+          </a:xfrm>
+          <a:prstGeom prst="rect">
+            <a:avLst/>
+          </a:prstGeom>
+          <a:noFill/>
+        </p:spPr>
+        <p:txBody>
+          <a:bodyPr wrap="none" lIns="0" rIns="0" tIns="0" bIns="0" anchor="ctr">
+            <a:spAutoFit/>
+          </a:bodyPr>
+          <a:lstStyle/>
+          <a:p>
+            <a:pPr algn="l"/>
+            <a:r>
+              <a:rPr sz="1275" b="1">
+                <a:solidFill>
+                  <a:srgbClr val="2E2E33"/>
+                </a:solidFill>
+                <a:latin typeface="Yu Gothic UI"/>
+              </a:rPr>
+              <a:t>1.5kg 〜 13.2kg</a:t>
+            </a:r>
+          </a:p>
+        </p:txBody>
+      </p:sp>
+      <p:sp>
+        <p:nvSpPr>
+          <p:cNvPr id="40" name="Rectangle 39"/>
+          <p:cNvSpPr/>
+          <p:nvPr/>
+        </p:nvSpPr>
+        <p:spPr>
+          <a:xfrm>
+            <a:off x="609600" y="5295900"/>
+            <a:ext cx="10210800" cy="9525"/>
+          </a:xfrm>
+          <a:prstGeom prst="rect">
+            <a:avLst/>
+          </a:prstGeom>
+          <a:solidFill>
+            <a:srgbClr val="E2E7EC"/>
+          </a:solidFill>
+          <a:ln>
+            <a:noFill/>
+          </a:ln>
+          <a:effectLst/>
+        </p:spPr>
+        <p:txBody>
+          <a:bodyPr rtlCol="0" anchor="ctr"/>
+          <a:lstStyle/>
+          <a:p>
+            <a:pPr algn="ctr"/>
+          </a:p>
+        </p:txBody>
+      </p:sp>
+      <p:sp>
+        <p:nvSpPr>
+          <p:cNvPr id="41" name="TextBox 40"/>
+          <p:cNvSpPr txBox="1"/>
+          <p:nvPr/>
+        </p:nvSpPr>
+        <p:spPr>
+          <a:xfrm>
+            <a:off x="609600" y="5429250"/>
+            <a:ext cx="7239000" cy="247650"/>
+          </a:xfrm>
+          <a:prstGeom prst="rect">
+            <a:avLst/>
+          </a:prstGeom>
+          <a:noFill/>
+        </p:spPr>
+        <p:txBody>
+          <a:bodyPr wrap="none" lIns="0" rIns="0" tIns="0" bIns="0" anchor="ctr">
+            <a:spAutoFit/>
+          </a:bodyPr>
+          <a:lstStyle/>
+          <a:p>
+            <a:pPr algn="l"/>
+            <a:r>
+              <a:rPr sz="1425" b="1">
+                <a:solidFill>
+                  <a:srgbClr val="2E2E33"/>
+                </a:solidFill>
+                <a:latin typeface="Yu Gothic UI"/>
+              </a:rPr>
+              <a:t>容量Lではなく、入れたいものから内寸を決めます。</a:t>
+            </a:r>
+          </a:p>
+        </p:txBody>
+      </p:sp>
+      <p:sp>
+        <p:nvSpPr>
+          <p:cNvPr id="42" name="TextBox 41"/>
+          <p:cNvSpPr txBox="1"/>
+          <p:nvPr/>
+        </p:nvSpPr>
+        <p:spPr>
+          <a:xfrm>
+            <a:off x="609600" y="5676900"/>
+            <a:ext cx="7620000" cy="209550"/>
+          </a:xfrm>
+          <a:prstGeom prst="rect">
+            <a:avLst/>
+          </a:prstGeom>
+          <a:noFill/>
+        </p:spPr>
+        <p:txBody>
+          <a:bodyPr wrap="none" lIns="0" rIns="0" tIns="0" bIns="0" anchor="ctr">
+            <a:spAutoFit/>
+          </a:bodyPr>
+          <a:lstStyle/>
+          <a:p>
+            <a:pPr algn="l"/>
+            <a:r>
+              <a:rPr sz="1050" b="0">
+                <a:solidFill>
+                  <a:srgbClr val="6A717B"/>
+                </a:solidFill>
+                <a:latin typeface="Yu Gothic UI"/>
+              </a:rPr>
+              <a:t>メーカー公表値からの計算です（実測ではありません）</a:t>
+            </a:r>
+          </a:p>
+        </p:txBody>
+      </p:sp>
+      <p:sp>
+        <p:nvSpPr>
+          <p:cNvPr id="43" name="TextBox 42"/>
+          <p:cNvSpPr txBox="1"/>
+          <p:nvPr/>
+        </p:nvSpPr>
+        <p:spPr>
+          <a:xfrm>
+            <a:off x="7962900" y="5676900"/>
+            <a:ext cx="2857500" cy="209550"/>
+          </a:xfrm>
+          <a:prstGeom prst="rect">
+            <a:avLst/>
+          </a:prstGeom>
+          <a:noFill/>
+        </p:spPr>
+        <p:txBody>
+          <a:bodyPr wrap="none" lIns="0" rIns="0" tIns="0" bIns="0" anchor="ctr">
+            <a:spAutoFit/>
+          </a:bodyPr>
+          <a:lstStyle/>
+          <a:p>
+            <a:pPr algn="r"/>
+            <a:r>
+              <a:rPr sz="1050" b="0">
+                <a:solidFill>
+                  <a:srgbClr val="6A717B"/>
+                </a:solidFill>
+                <a:latin typeface="Yu Gothic UI"/>
+              </a:rPr>
+              <a:t>寸法で選ぶ　sunpou.nexeed-lab.com</a:t>
+            </a:r>
+          </a:p>
+        </p:txBody>
+      </p:sp>
+    </p:spTree>
+  </p:cSld>
+  <p:clrMapOvr>
+    <a:masterClrMapping/>
+  </p:clrMapOvr>
+</p:sld>
+</file>
+
+<file path=ppt/slides/slide27.xml><?xml version="1.0" encoding="utf-8"?>
+<p:sld xmlns:a="http://schemas.openxmlformats.org/drawingml/2006/main" xmlns:p="http://schemas.openxmlformats.org/presentationml/2006/main" xmlns:r="http://schemas.openxmlformats.org/officeDocument/2006/relationships">
+  <p:cSld>
+    <p:spTree>
+      <p:nvGrpSpPr>
+        <p:cNvPr id="1" name=""/>
+        <p:cNvGrpSpPr/>
+        <p:nvPr/>
+      </p:nvGrpSpPr>
+      <p:grpSpPr/>
+      <p:sp>
+        <p:nvSpPr>
+          <p:cNvPr id="2" name="Rectangle 1"/>
+          <p:cNvSpPr/>
+          <p:nvPr/>
+        </p:nvSpPr>
+        <p:spPr>
+          <a:xfrm>
+            <a:off x="0" y="0"/>
+            <a:ext cx="11430000" cy="6000750"/>
+          </a:xfrm>
+          <a:prstGeom prst="rect">
+            <a:avLst/>
+          </a:prstGeom>
+          <a:solidFill>
+            <a:srgbClr val="FCFCFC"/>
+          </a:solidFill>
+          <a:ln>
+            <a:noFill/>
+          </a:ln>
+          <a:effectLst/>
+        </p:spPr>
+        <p:txBody>
+          <a:bodyPr rtlCol="0" anchor="ctr"/>
+          <a:lstStyle/>
+          <a:p>
+            <a:pPr algn="ctr"/>
+          </a:p>
+        </p:txBody>
+      </p:sp>
+      <p:sp>
+        <p:nvSpPr>
+          <p:cNvPr id="3" name="Rectangle 2"/>
+          <p:cNvSpPr/>
+          <p:nvPr/>
+        </p:nvSpPr>
+        <p:spPr>
+          <a:xfrm>
+            <a:off x="0" y="0"/>
+            <a:ext cx="114300" cy="6000750"/>
+          </a:xfrm>
+          <a:prstGeom prst="rect">
+            <a:avLst/>
+          </a:prstGeom>
+          <a:solidFill>
+            <a:srgbClr val="014172"/>
+          </a:solidFill>
+          <a:ln>
+            <a:noFill/>
+          </a:ln>
+          <a:effectLst/>
+        </p:spPr>
+        <p:txBody>
+          <a:bodyPr rtlCol="0" anchor="ctr"/>
+          <a:lstStyle/>
+          <a:p>
+            <a:pPr algn="ctr"/>
+          </a:p>
+        </p:txBody>
+      </p:sp>
+      <p:sp>
+        <p:nvSpPr>
+          <p:cNvPr id="4" name="Rectangle 3"/>
+          <p:cNvSpPr/>
+          <p:nvPr/>
+        </p:nvSpPr>
+        <p:spPr>
+          <a:xfrm>
+            <a:off x="0" y="0"/>
+            <a:ext cx="11430000" cy="1504950"/>
+          </a:xfrm>
+          <a:prstGeom prst="rect">
+            <a:avLst/>
+          </a:prstGeom>
+          <a:solidFill>
+            <a:srgbClr val="014172"/>
+          </a:solidFill>
+          <a:ln>
+            <a:noFill/>
+          </a:ln>
+          <a:effectLst/>
+        </p:spPr>
+        <p:txBody>
+          <a:bodyPr rtlCol="0" anchor="ctr"/>
+          <a:lstStyle/>
+          <a:p>
+            <a:pPr algn="ctr"/>
+          </a:p>
+        </p:txBody>
+      </p:sp>
+      <p:sp>
+        <p:nvSpPr>
+          <p:cNvPr id="5" name="TextBox 4"/>
+          <p:cNvSpPr txBox="1"/>
+          <p:nvPr/>
+        </p:nvSpPr>
+        <p:spPr>
+          <a:xfrm>
+            <a:off x="609600" y="361950"/>
+            <a:ext cx="7429500" cy="476250"/>
+          </a:xfrm>
+          <a:prstGeom prst="rect">
+            <a:avLst/>
+          </a:prstGeom>
+          <a:noFill/>
+        </p:spPr>
+        <p:txBody>
+          <a:bodyPr wrap="none" lIns="0" rIns="0" tIns="0" bIns="0" anchor="ctr">
+            <a:spAutoFit/>
+          </a:bodyPr>
+          <a:lstStyle/>
+          <a:p>
+            <a:pPr algn="l"/>
+            <a:r>
+              <a:rPr sz="3000" b="1">
+                <a:solidFill>
+                  <a:srgbClr val="FFFFFF"/>
+                </a:solidFill>
+                <a:latin typeface="Yu Gothic UI"/>
+              </a:rPr>
+              <a:t>「10号まで」でも土鍋のほうが広い</a:t>
+            </a:r>
+          </a:p>
+        </p:txBody>
+      </p:sp>
+      <p:sp>
+        <p:nvSpPr>
+          <p:cNvPr id="6" name="TextBox 5"/>
+          <p:cNvSpPr txBox="1"/>
+          <p:nvPr/>
+        </p:nvSpPr>
+        <p:spPr>
+          <a:xfrm>
+            <a:off x="609600" y="876300"/>
+            <a:ext cx="7429500" cy="247650"/>
+          </a:xfrm>
+          <a:prstGeom prst="rect">
+            <a:avLst/>
+          </a:prstGeom>
+          <a:noFill/>
+        </p:spPr>
+        <p:txBody>
+          <a:bodyPr wrap="none" lIns="0" rIns="0" tIns="0" bIns="0" anchor="ctr">
+            <a:spAutoFit/>
+          </a:bodyPr>
+          <a:lstStyle/>
+          <a:p>
+            <a:pPr algn="l"/>
+            <a:r>
+              <a:rPr sz="1425" b="0">
+                <a:solidFill>
+                  <a:srgbClr val="DAE7F2"/>
+                </a:solidFill>
+                <a:latin typeface="Yu Gothic UI"/>
+              </a:rPr>
+              <a:t>上から見た図 ／ 灰色＝コンロ本体、橙＝土鍋（口径31cm＋取手）</a:t>
+            </a:r>
+          </a:p>
+        </p:txBody>
+      </p:sp>
+      <p:sp>
+        <p:nvSpPr>
+          <p:cNvPr id="7" name="Rounded Rectangle 6"/>
+          <p:cNvSpPr/>
+          <p:nvPr/>
+        </p:nvSpPr>
+        <p:spPr>
+          <a:xfrm>
+            <a:off x="8305800" y="247650"/>
+            <a:ext cx="2514600" cy="1009650"/>
+          </a:xfrm>
+          <a:prstGeom prst="roundRect">
+            <a:avLst>
+              <a:gd name="adj" fmla="val 12000"/>
+            </a:avLst>
+          </a:prstGeom>
+          <a:solidFill>
+            <a:srgbClr val="FFFFFF"/>
+          </a:solidFill>
+          <a:ln>
+            <a:noFill/>
+          </a:ln>
+          <a:effectLst>
+            <a:outerShdw blurRad="254000" dist="63500" dir="5400000" rotWithShape="0">
+              <a:srgbClr val="0B2B45">
+                <a:alpha val="30000"/>
+              </a:srgbClr>
+            </a:outerShdw>
+          </a:effectLst>
+        </p:spPr>
+        <p:txBody>
+          <a:bodyPr rtlCol="0" anchor="ctr"/>
+          <a:lstStyle/>
+          <a:p>
+            <a:pPr algn="ctr"/>
+          </a:p>
+        </p:txBody>
+      </p:sp>
+      <p:sp>
+        <p:nvSpPr>
+          <p:cNvPr id="8" name="TextBox 7"/>
+          <p:cNvSpPr txBox="1"/>
+          <p:nvPr/>
+        </p:nvSpPr>
+        <p:spPr>
+          <a:xfrm>
+            <a:off x="8515350" y="400050"/>
+            <a:ext cx="2133600" cy="209550"/>
+          </a:xfrm>
+          <a:prstGeom prst="rect">
+            <a:avLst/>
+          </a:prstGeom>
+          <a:noFill/>
+        </p:spPr>
+        <p:txBody>
+          <a:bodyPr wrap="none" lIns="0" rIns="0" tIns="0" bIns="0" anchor="ctr">
+            <a:spAutoFit/>
+          </a:bodyPr>
+          <a:lstStyle/>
+          <a:p>
+            <a:pPr algn="l"/>
+            <a:r>
+              <a:rPr sz="1125" b="0">
+                <a:solidFill>
+                  <a:srgbClr val="6A717B"/>
+                </a:solidFill>
+                <a:latin typeface="Yu Gothic UI"/>
+              </a:rPr>
+              <a:t>左右にはみ出す</a:t>
+            </a:r>
+          </a:p>
+        </p:txBody>
+      </p:sp>
+      <p:sp>
+        <p:nvSpPr>
+          <p:cNvPr id="9" name="TextBox 8"/>
+          <p:cNvSpPr txBox="1"/>
+          <p:nvPr/>
+        </p:nvSpPr>
+        <p:spPr>
+          <a:xfrm>
+            <a:off x="8515350" y="647700"/>
+            <a:ext cx="2133600" cy="533400"/>
+          </a:xfrm>
+          <a:prstGeom prst="rect">
+            <a:avLst/>
+          </a:prstGeom>
+          <a:noFill/>
+        </p:spPr>
+        <p:txBody>
+          <a:bodyPr wrap="none" lIns="0" rIns="0" tIns="0" bIns="0" anchor="ctr">
+            <a:spAutoFit/>
+          </a:bodyPr>
+          <a:lstStyle/>
+          <a:p>
+            <a:pPr algn="l"/>
+            <a:r>
+              <a:rPr sz="3900" b="1">
+                <a:solidFill>
+                  <a:srgbClr val="014172"/>
+                </a:solidFill>
+                <a:latin typeface="Yu Gothic UI"/>
+              </a:rPr>
+              <a:t>1.3</a:t>
+            </a:r>
+            <a:r>
+              <a:rPr sz="1950" b="1">
+                <a:solidFill>
+                  <a:srgbClr val="014172"/>
+                </a:solidFill>
+                <a:latin typeface="Yu Gothic UI"/>
+              </a:rPr>
+              <a:t>cm</a:t>
+            </a:r>
+          </a:p>
+        </p:txBody>
+      </p:sp>
+      <p:sp>
+        <p:nvSpPr>
+          <p:cNvPr id="10" name="Rectangle 9"/>
+          <p:cNvSpPr/>
+          <p:nvPr/>
+        </p:nvSpPr>
+        <p:spPr>
+          <a:xfrm>
+            <a:off x="1047750" y="2286000"/>
+            <a:ext cx="2290572" cy="1879092"/>
+          </a:xfrm>
+          <a:prstGeom prst="rect">
+            <a:avLst/>
+          </a:prstGeom>
+          <a:solidFill>
+            <a:srgbClr val="F2F5F8"/>
+          </a:solidFill>
+          <a:ln w="19050">
+            <a:solidFill>
+              <a:srgbClr val="DAE7F2"/>
+            </a:solidFill>
+          </a:ln>
+          <a:effectLst/>
+        </p:spPr>
+        <p:txBody>
+          <a:bodyPr rtlCol="0" anchor="ctr"/>
+          <a:lstStyle/>
+          <a:p>
+            <a:pPr algn="ctr"/>
+          </a:p>
+        </p:txBody>
+      </p:sp>
+      <p:sp>
+        <p:nvSpPr>
+          <p:cNvPr id="11" name="Oval 10"/>
+          <p:cNvSpPr/>
+          <p:nvPr/>
+        </p:nvSpPr>
+        <p:spPr>
+          <a:xfrm>
+            <a:off x="958596" y="2311146"/>
+            <a:ext cx="2468880" cy="1828800"/>
+          </a:xfrm>
+          <a:prstGeom prst="ellipse">
+            <a:avLst/>
+          </a:prstGeom>
+          <a:solidFill>
+            <a:srgbClr val="FDF2E4"/>
+          </a:solidFill>
+          <a:ln w="28575">
+            <a:solidFill>
+              <a:srgbClr val="A8410F"/>
+            </a:solidFill>
+          </a:ln>
+          <a:effectLst/>
+        </p:spPr>
+        <p:txBody>
+          <a:bodyPr rtlCol="0" anchor="ctr"/>
+          <a:lstStyle/>
+          <a:p>
+            <a:pPr algn="ctr"/>
+          </a:p>
+        </p:txBody>
+      </p:sp>
+      <p:sp>
+        <p:nvSpPr>
+          <p:cNvPr id="12" name="TextBox 11"/>
+          <p:cNvSpPr txBox="1"/>
+          <p:nvPr/>
+        </p:nvSpPr>
+        <p:spPr>
+          <a:xfrm>
+            <a:off x="6096000" y="2038350"/>
+            <a:ext cx="4381500" cy="247650"/>
+          </a:xfrm>
+          <a:prstGeom prst="rect">
+            <a:avLst/>
+          </a:prstGeom>
+          <a:noFill/>
+        </p:spPr>
+        <p:txBody>
+          <a:bodyPr wrap="none" lIns="0" rIns="0" tIns="0" bIns="0" anchor="ctr">
+            <a:spAutoFit/>
+          </a:bodyPr>
+          <a:lstStyle/>
+          <a:p>
+            <a:pPr algn="l"/>
+            <a:r>
+              <a:rPr sz="1350" b="1">
+                <a:solidFill>
+                  <a:srgbClr val="2E2E33"/>
+                </a:solidFill>
+                <a:latin typeface="Yu Gothic UI"/>
+              </a:rPr>
+              <a:t>イワタニ エコプレミアムIII</a:t>
+            </a:r>
+          </a:p>
+        </p:txBody>
+      </p:sp>
+      <p:sp>
+        <p:nvSpPr>
+          <p:cNvPr id="13" name="TextBox 12"/>
+          <p:cNvSpPr txBox="1"/>
+          <p:nvPr/>
+        </p:nvSpPr>
+        <p:spPr>
+          <a:xfrm>
+            <a:off x="6096000" y="2324100"/>
+            <a:ext cx="4381500" cy="247650"/>
+          </a:xfrm>
+          <a:prstGeom prst="rect">
+            <a:avLst/>
+          </a:prstGeom>
+          <a:noFill/>
+        </p:spPr>
+        <p:txBody>
+          <a:bodyPr wrap="none" lIns="0" rIns="0" tIns="0" bIns="0" anchor="ctr">
+            <a:spAutoFit/>
+          </a:bodyPr>
+          <a:lstStyle/>
+          <a:p>
+            <a:pPr algn="l"/>
+            <a:r>
+              <a:rPr sz="1350" b="1">
+                <a:solidFill>
+                  <a:srgbClr val="014172"/>
+                </a:solidFill>
+                <a:latin typeface="Yu Gothic UI"/>
+              </a:rPr>
+              <a:t>本体 33.4 × 27.4cm</a:t>
+            </a:r>
+          </a:p>
+        </p:txBody>
+      </p:sp>
+      <p:sp>
+        <p:nvSpPr>
+          <p:cNvPr id="14" name="TextBox 13"/>
+          <p:cNvSpPr txBox="1"/>
+          <p:nvPr/>
+        </p:nvSpPr>
+        <p:spPr>
+          <a:xfrm>
+            <a:off x="6096000" y="2819400"/>
+            <a:ext cx="4381500" cy="247650"/>
+          </a:xfrm>
+          <a:prstGeom prst="rect">
+            <a:avLst/>
+          </a:prstGeom>
+          <a:noFill/>
+        </p:spPr>
+        <p:txBody>
+          <a:bodyPr wrap="none" lIns="0" rIns="0" tIns="0" bIns="0" anchor="ctr">
+            <a:spAutoFit/>
+          </a:bodyPr>
+          <a:lstStyle/>
+          <a:p>
+            <a:pPr algn="l"/>
+            <a:r>
+              <a:rPr sz="1350" b="1">
+                <a:solidFill>
+                  <a:srgbClr val="2E2E33"/>
+                </a:solidFill>
+                <a:latin typeface="Yu Gothic UI"/>
+              </a:rPr>
+              <a:t>墨貫入 10号</a:t>
+            </a:r>
+          </a:p>
+        </p:txBody>
+      </p:sp>
+      <p:sp>
+        <p:nvSpPr>
+          <p:cNvPr id="15" name="TextBox 14"/>
+          <p:cNvSpPr txBox="1"/>
+          <p:nvPr/>
+        </p:nvSpPr>
+        <p:spPr>
+          <a:xfrm>
+            <a:off x="6096000" y="3105150"/>
+            <a:ext cx="4381500" cy="247650"/>
+          </a:xfrm>
+          <a:prstGeom prst="rect">
+            <a:avLst/>
+          </a:prstGeom>
+          <a:noFill/>
+        </p:spPr>
+        <p:txBody>
+          <a:bodyPr wrap="none" lIns="0" rIns="0" tIns="0" bIns="0" anchor="ctr">
+            <a:spAutoFit/>
+          </a:bodyPr>
+          <a:lstStyle/>
+          <a:p>
+            <a:pPr algn="l"/>
+            <a:r>
+              <a:rPr sz="1350" b="1">
+                <a:solidFill>
+                  <a:srgbClr val="A8410F"/>
+                </a:solidFill>
+                <a:latin typeface="Yu Gothic UI"/>
+              </a:rPr>
+              <a:t>幅（取手込）36cm</a:t>
+            </a:r>
+          </a:p>
+        </p:txBody>
+      </p:sp>
+      <p:sp>
+        <p:nvSpPr>
+          <p:cNvPr id="16" name="Rounded Rectangle 15"/>
+          <p:cNvSpPr/>
+          <p:nvPr/>
+        </p:nvSpPr>
+        <p:spPr>
+          <a:xfrm>
+            <a:off x="5905500" y="3486150"/>
+            <a:ext cx="4572000" cy="628650"/>
+          </a:xfrm>
+          <a:prstGeom prst="roundRect">
+            <a:avLst>
+              <a:gd name="adj" fmla="val 6000"/>
+            </a:avLst>
+          </a:prstGeom>
+          <a:solidFill>
+            <a:srgbClr val="FDF2E4"/>
+          </a:solidFill>
+          <a:ln w="19050">
+            <a:solidFill>
+              <a:srgbClr val="A8410F"/>
+            </a:solidFill>
+          </a:ln>
+          <a:effectLst/>
+        </p:spPr>
+        <p:txBody>
+          <a:bodyPr rtlCol="0" anchor="ctr"/>
+          <a:lstStyle/>
+          <a:p>
+            <a:pPr algn="ctr"/>
+          </a:p>
+        </p:txBody>
+      </p:sp>
+      <p:sp>
+        <p:nvSpPr>
+          <p:cNvPr id="17" name="TextBox 16"/>
+          <p:cNvSpPr txBox="1"/>
+          <p:nvPr/>
+        </p:nvSpPr>
+        <p:spPr>
+          <a:xfrm>
+            <a:off x="6096000" y="3676650"/>
+            <a:ext cx="4191000" cy="247650"/>
+          </a:xfrm>
+          <a:prstGeom prst="rect">
+            <a:avLst/>
+          </a:prstGeom>
+          <a:noFill/>
+        </p:spPr>
+        <p:txBody>
+          <a:bodyPr wrap="none" lIns="0" rIns="0" tIns="0" bIns="0" anchor="ctr">
+            <a:spAutoFit/>
+          </a:bodyPr>
+          <a:lstStyle/>
+          <a:p>
+            <a:pPr algn="l"/>
+            <a:r>
+              <a:rPr sz="1425" b="1">
+                <a:solidFill>
+                  <a:srgbClr val="A8410F"/>
+                </a:solidFill>
+                <a:latin typeface="Yu Gothic UI"/>
+              </a:rPr>
+              <a:t>左右に 1.3cm ずつはみ出す</a:t>
+            </a:r>
+          </a:p>
+        </p:txBody>
+      </p:sp>
+      <p:sp>
+        <p:nvSpPr>
+          <p:cNvPr id="18" name="TextBox 17"/>
+          <p:cNvSpPr txBox="1"/>
+          <p:nvPr/>
+        </p:nvSpPr>
+        <p:spPr>
+          <a:xfrm>
+            <a:off x="6096000" y="4305300"/>
+            <a:ext cx="4572000" cy="228600"/>
+          </a:xfrm>
+          <a:prstGeom prst="rect">
+            <a:avLst/>
+          </a:prstGeom>
+          <a:noFill/>
+        </p:spPr>
+        <p:txBody>
+          <a:bodyPr wrap="none" lIns="0" rIns="0" tIns="0" bIns="0" anchor="ctr">
+            <a:spAutoFit/>
+          </a:bodyPr>
+          <a:lstStyle/>
+          <a:p>
+            <a:pPr algn="l"/>
+            <a:r>
+              <a:rPr sz="1125" b="0">
+                <a:solidFill>
+                  <a:srgbClr val="6A717B"/>
+                </a:solidFill>
+                <a:latin typeface="Yu Gothic UI"/>
+              </a:rPr>
+              <a:t>はみ出しても五徳に乗れば使えます。</a:t>
+            </a:r>
+          </a:p>
+        </p:txBody>
+      </p:sp>
+      <p:sp>
+        <p:nvSpPr>
+          <p:cNvPr id="19" name="TextBox 18"/>
+          <p:cNvSpPr txBox="1"/>
+          <p:nvPr/>
+        </p:nvSpPr>
+        <p:spPr>
+          <a:xfrm>
+            <a:off x="6096000" y="4572000"/>
+            <a:ext cx="4572000" cy="228600"/>
+          </a:xfrm>
+          <a:prstGeom prst="rect">
+            <a:avLst/>
+          </a:prstGeom>
+          <a:noFill/>
+        </p:spPr>
+        <p:txBody>
+          <a:bodyPr wrap="none" lIns="0" rIns="0" tIns="0" bIns="0" anchor="ctr">
+            <a:spAutoFit/>
+          </a:bodyPr>
+          <a:lstStyle/>
+          <a:p>
+            <a:pPr algn="l"/>
+            <a:r>
+              <a:rPr sz="1125" b="0">
+                <a:solidFill>
+                  <a:srgbClr val="6A717B"/>
+                </a:solidFill>
+                <a:latin typeface="Yu Gothic UI"/>
+              </a:rPr>
+              <a:t>効くのは「卓上で必要な幅」のほうです。</a:t>
+            </a:r>
+          </a:p>
+        </p:txBody>
+      </p:sp>
+      <p:sp>
+        <p:nvSpPr>
+          <p:cNvPr id="20" name="Rectangle 19"/>
+          <p:cNvSpPr/>
+          <p:nvPr/>
+        </p:nvSpPr>
+        <p:spPr>
+          <a:xfrm>
+            <a:off x="609600" y="5295900"/>
+            <a:ext cx="10210800" cy="9525"/>
+          </a:xfrm>
+          <a:prstGeom prst="rect">
+            <a:avLst/>
+          </a:prstGeom>
+          <a:solidFill>
+            <a:srgbClr val="E2E7EC"/>
+          </a:solidFill>
+          <a:ln>
+            <a:noFill/>
+          </a:ln>
+          <a:effectLst/>
+        </p:spPr>
+        <p:txBody>
+          <a:bodyPr rtlCol="0" anchor="ctr"/>
+          <a:lstStyle/>
+          <a:p>
+            <a:pPr algn="ctr"/>
+          </a:p>
+        </p:txBody>
+      </p:sp>
+      <p:sp>
+        <p:nvSpPr>
+          <p:cNvPr id="21" name="TextBox 20"/>
+          <p:cNvSpPr txBox="1"/>
+          <p:nvPr/>
+        </p:nvSpPr>
+        <p:spPr>
+          <a:xfrm>
+            <a:off x="609600" y="5429250"/>
+            <a:ext cx="7239000" cy="247650"/>
+          </a:xfrm>
+          <a:prstGeom prst="rect">
+            <a:avLst/>
+          </a:prstGeom>
+          <a:noFill/>
+        </p:spPr>
+        <p:txBody>
+          <a:bodyPr wrap="none" lIns="0" rIns="0" tIns="0" bIns="0" anchor="ctr">
+            <a:spAutoFit/>
+          </a:bodyPr>
+          <a:lstStyle/>
+          <a:p>
+            <a:pPr algn="l"/>
+            <a:r>
+              <a:rPr sz="1425" b="1">
+                <a:solidFill>
+                  <a:srgbClr val="2E2E33"/>
+                </a:solidFill>
+                <a:latin typeface="Yu Gothic UI"/>
+              </a:rPr>
+              <a:t>号数ではなく、取手込みの幅で決まります。</a:t>
+            </a:r>
+          </a:p>
+        </p:txBody>
+      </p:sp>
+      <p:sp>
+        <p:nvSpPr>
+          <p:cNvPr id="22" name="TextBox 21"/>
+          <p:cNvSpPr txBox="1"/>
+          <p:nvPr/>
+        </p:nvSpPr>
+        <p:spPr>
+          <a:xfrm>
+            <a:off x="609600" y="5676900"/>
+            <a:ext cx="7620000" cy="209550"/>
+          </a:xfrm>
+          <a:prstGeom prst="rect">
+            <a:avLst/>
+          </a:prstGeom>
+          <a:noFill/>
+        </p:spPr>
+        <p:txBody>
+          <a:bodyPr wrap="none" lIns="0" rIns="0" tIns="0" bIns="0" anchor="ctr">
+            <a:spAutoFit/>
+          </a:bodyPr>
+          <a:lstStyle/>
+          <a:p>
+            <a:pPr algn="l"/>
+            <a:r>
+              <a:rPr sz="1050" b="0">
+                <a:solidFill>
+                  <a:srgbClr val="6A717B"/>
+                </a:solidFill>
+                <a:latin typeface="Yu Gothic UI"/>
+              </a:rPr>
+              <a:t>メーカー公表値からの計算です（実測ではありません）</a:t>
+            </a:r>
+          </a:p>
+        </p:txBody>
+      </p:sp>
+      <p:sp>
+        <p:nvSpPr>
+          <p:cNvPr id="23" name="TextBox 22"/>
+          <p:cNvSpPr txBox="1"/>
+          <p:nvPr/>
+        </p:nvSpPr>
+        <p:spPr>
+          <a:xfrm>
+            <a:off x="7962900" y="5676900"/>
+            <a:ext cx="2857500" cy="209550"/>
+          </a:xfrm>
+          <a:prstGeom prst="rect">
+            <a:avLst/>
+          </a:prstGeom>
+          <a:noFill/>
+        </p:spPr>
+        <p:txBody>
+          <a:bodyPr wrap="none" lIns="0" rIns="0" tIns="0" bIns="0" anchor="ctr">
+            <a:spAutoFit/>
+          </a:bodyPr>
+          <a:lstStyle/>
+          <a:p>
+            <a:pPr algn="r"/>
+            <a:r>
+              <a:rPr sz="1050" b="0">
+                <a:solidFill>
+                  <a:srgbClr val="6A717B"/>
+                </a:solidFill>
+                <a:latin typeface="Yu Gothic UI"/>
+              </a:rPr>
+              <a:t>寸法で選ぶ　sunpou.nexeed-lab.com</a:t>
+            </a:r>
+          </a:p>
+        </p:txBody>
+      </p:sp>
+    </p:spTree>
+  </p:cSld>
+  <p:clrMapOvr>
+    <a:masterClrMapping/>
+  </p:clrMapOvr>
+</p:sld>
+</file>
+
+<file path=ppt/slides/slide28.xml><?xml version="1.0" encoding="utf-8"?>
+<p:sld xmlns:a="http://schemas.openxmlformats.org/drawingml/2006/main" xmlns:p="http://schemas.openxmlformats.org/presentationml/2006/main" xmlns:r="http://schemas.openxmlformats.org/officeDocument/2006/relationships">
+  <p:cSld>
+    <p:spTree>
+      <p:nvGrpSpPr>
+        <p:cNvPr id="1" name=""/>
+        <p:cNvGrpSpPr/>
+        <p:nvPr/>
+      </p:nvGrpSpPr>
+      <p:grpSpPr/>
+      <p:sp>
+        <p:nvSpPr>
+          <p:cNvPr id="2" name="Rectangle 1"/>
+          <p:cNvSpPr/>
+          <p:nvPr/>
+        </p:nvSpPr>
+        <p:spPr>
+          <a:xfrm>
+            <a:off x="0" y="0"/>
+            <a:ext cx="11430000" cy="6000750"/>
+          </a:xfrm>
+          <a:prstGeom prst="rect">
+            <a:avLst/>
+          </a:prstGeom>
+          <a:solidFill>
+            <a:srgbClr val="FCFCFC"/>
+          </a:solidFill>
+          <a:ln>
+            <a:noFill/>
+          </a:ln>
+          <a:effectLst/>
+        </p:spPr>
+        <p:txBody>
+          <a:bodyPr rtlCol="0" anchor="ctr"/>
+          <a:lstStyle/>
+          <a:p>
+            <a:pPr algn="ctr"/>
+          </a:p>
+        </p:txBody>
+      </p:sp>
+      <p:sp>
+        <p:nvSpPr>
+          <p:cNvPr id="3" name="Rectangle 2"/>
+          <p:cNvSpPr/>
+          <p:nvPr/>
+        </p:nvSpPr>
+        <p:spPr>
+          <a:xfrm>
+            <a:off x="0" y="0"/>
+            <a:ext cx="114300" cy="6000750"/>
+          </a:xfrm>
+          <a:prstGeom prst="rect">
+            <a:avLst/>
+          </a:prstGeom>
+          <a:solidFill>
+            <a:srgbClr val="014172"/>
+          </a:solidFill>
+          <a:ln>
+            <a:noFill/>
+          </a:ln>
+          <a:effectLst/>
+        </p:spPr>
+        <p:txBody>
+          <a:bodyPr rtlCol="0" anchor="ctr"/>
+          <a:lstStyle/>
+          <a:p>
+            <a:pPr algn="ctr"/>
+          </a:p>
+        </p:txBody>
+      </p:sp>
+      <p:sp>
+        <p:nvSpPr>
+          <p:cNvPr id="4" name="Rectangle 3"/>
+          <p:cNvSpPr/>
+          <p:nvPr/>
+        </p:nvSpPr>
+        <p:spPr>
+          <a:xfrm>
+            <a:off x="0" y="0"/>
+            <a:ext cx="11430000" cy="1504950"/>
+          </a:xfrm>
+          <a:prstGeom prst="rect">
+            <a:avLst/>
+          </a:prstGeom>
+          <a:solidFill>
+            <a:srgbClr val="014172"/>
+          </a:solidFill>
+          <a:ln>
+            <a:noFill/>
+          </a:ln>
+          <a:effectLst/>
+        </p:spPr>
+        <p:txBody>
+          <a:bodyPr rtlCol="0" anchor="ctr"/>
+          <a:lstStyle/>
+          <a:p>
+            <a:pPr algn="ctr"/>
+          </a:p>
+        </p:txBody>
+      </p:sp>
+      <p:sp>
+        <p:nvSpPr>
+          <p:cNvPr id="5" name="TextBox 4"/>
+          <p:cNvSpPr txBox="1"/>
+          <p:nvPr/>
+        </p:nvSpPr>
+        <p:spPr>
+          <a:xfrm>
+            <a:off x="609600" y="361950"/>
+            <a:ext cx="7429500" cy="476250"/>
+          </a:xfrm>
+          <a:prstGeom prst="rect">
+            <a:avLst/>
+          </a:prstGeom>
+          <a:noFill/>
+        </p:spPr>
+        <p:txBody>
+          <a:bodyPr wrap="none" lIns="0" rIns="0" tIns="0" bIns="0" anchor="ctr">
+            <a:spAutoFit/>
+          </a:bodyPr>
+          <a:lstStyle/>
+          <a:p>
+            <a:pPr algn="l"/>
+            <a:r>
+              <a:rPr sz="3000" b="1">
+                <a:solidFill>
+                  <a:srgbClr val="FFFFFF"/>
+                </a:solidFill>
+                <a:latin typeface="Yu Gothic UI"/>
+              </a:rPr>
+              <a:t>「180」でも足を置けるのは 1.40m</a:t>
+            </a:r>
+          </a:p>
+        </p:txBody>
+      </p:sp>
+      <p:sp>
+        <p:nvSpPr>
+          <p:cNvPr id="6" name="TextBox 5"/>
+          <p:cNvSpPr txBox="1"/>
+          <p:nvPr/>
+        </p:nvSpPr>
+        <p:spPr>
+          <a:xfrm>
+            <a:off x="609600" y="876300"/>
+            <a:ext cx="7429500" cy="247650"/>
+          </a:xfrm>
+          <a:prstGeom prst="rect">
+            <a:avLst/>
+          </a:prstGeom>
+          <a:noFill/>
+        </p:spPr>
+        <p:txBody>
+          <a:bodyPr wrap="none" lIns="0" rIns="0" tIns="0" bIns="0" anchor="ctr">
+            <a:spAutoFit/>
+          </a:bodyPr>
+          <a:lstStyle/>
+          <a:p>
+            <a:pPr algn="l"/>
+            <a:r>
+              <a:rPr sz="1425" b="0">
+                <a:solidFill>
+                  <a:srgbClr val="DAE7F2"/>
+                </a:solidFill>
+                <a:latin typeface="Yu Gothic UI"/>
+              </a:rPr>
+              <a:t>長谷川工業 RHB-18a ／ 横から見た図 ／ 踏ざんは省略</a:t>
+            </a:r>
+          </a:p>
+        </p:txBody>
+      </p:sp>
+      <p:sp>
+        <p:nvSpPr>
+          <p:cNvPr id="7" name="Rounded Rectangle 6"/>
+          <p:cNvSpPr/>
+          <p:nvPr/>
+        </p:nvSpPr>
+        <p:spPr>
+          <a:xfrm>
+            <a:off x="8305800" y="247650"/>
+            <a:ext cx="2514600" cy="1009650"/>
+          </a:xfrm>
+          <a:prstGeom prst="roundRect">
+            <a:avLst>
+              <a:gd name="adj" fmla="val 12000"/>
+            </a:avLst>
+          </a:prstGeom>
+          <a:solidFill>
+            <a:srgbClr val="FFFFFF"/>
+          </a:solidFill>
+          <a:ln>
+            <a:noFill/>
+          </a:ln>
+          <a:effectLst>
+            <a:outerShdw blurRad="254000" dist="63500" dir="5400000" rotWithShape="0">
+              <a:srgbClr val="0B2B45">
+                <a:alpha val="30000"/>
+              </a:srgbClr>
+            </a:outerShdw>
+          </a:effectLst>
+        </p:spPr>
+        <p:txBody>
+          <a:bodyPr rtlCol="0" anchor="ctr"/>
+          <a:lstStyle/>
+          <a:p>
+            <a:pPr algn="ctr"/>
+          </a:p>
+        </p:txBody>
+      </p:sp>
+      <p:sp>
+        <p:nvSpPr>
+          <p:cNvPr id="8" name="TextBox 7"/>
+          <p:cNvSpPr txBox="1"/>
+          <p:nvPr/>
+        </p:nvSpPr>
+        <p:spPr>
+          <a:xfrm>
+            <a:off x="8515350" y="400050"/>
+            <a:ext cx="2133600" cy="209550"/>
+          </a:xfrm>
+          <a:prstGeom prst="rect">
+            <a:avLst/>
+          </a:prstGeom>
+          <a:noFill/>
+        </p:spPr>
+        <p:txBody>
+          <a:bodyPr wrap="none" lIns="0" rIns="0" tIns="0" bIns="0" anchor="ctr">
+            <a:spAutoFit/>
+          </a:bodyPr>
+          <a:lstStyle/>
+          <a:p>
+            <a:pPr algn="l"/>
+            <a:r>
+              <a:rPr sz="1125" b="0">
+                <a:solidFill>
+                  <a:srgbClr val="6A717B"/>
+                </a:solidFill>
+                <a:latin typeface="Yu Gothic UI"/>
+              </a:rPr>
+              <a:t>型番より低い</a:t>
+            </a:r>
+          </a:p>
+        </p:txBody>
+      </p:sp>
+      <p:sp>
+        <p:nvSpPr>
+          <p:cNvPr id="9" name="TextBox 8"/>
+          <p:cNvSpPr txBox="1"/>
+          <p:nvPr/>
+        </p:nvSpPr>
+        <p:spPr>
+          <a:xfrm>
+            <a:off x="8515350" y="647700"/>
+            <a:ext cx="2133600" cy="533400"/>
+          </a:xfrm>
+          <a:prstGeom prst="rect">
+            <a:avLst/>
+          </a:prstGeom>
+          <a:noFill/>
+        </p:spPr>
+        <p:txBody>
+          <a:bodyPr wrap="none" lIns="0" rIns="0" tIns="0" bIns="0" anchor="ctr">
+            <a:spAutoFit/>
+          </a:bodyPr>
+          <a:lstStyle/>
+          <a:p>
+            <a:pPr algn="l"/>
+            <a:r>
+              <a:rPr sz="3900" b="1">
+                <a:solidFill>
+                  <a:srgbClr val="014172"/>
+                </a:solidFill>
+                <a:latin typeface="Yu Gothic UI"/>
+              </a:rPr>
+              <a:t>40</a:t>
+            </a:r>
+            <a:r>
+              <a:rPr sz="1950" b="1">
+                <a:solidFill>
+                  <a:srgbClr val="014172"/>
+                </a:solidFill>
+                <a:latin typeface="Yu Gothic UI"/>
+              </a:rPr>
+              <a:t>cm</a:t>
+            </a:r>
+          </a:p>
+        </p:txBody>
+      </p:sp>
+      <p:sp>
+        <p:nvSpPr>
+          <p:cNvPr id="10" name="Rounded Rectangle 9"/>
+          <p:cNvSpPr/>
+          <p:nvPr/>
+        </p:nvSpPr>
+        <p:spPr>
+          <a:xfrm>
+            <a:off x="1428750" y="2556510"/>
+            <a:ext cx="1905000" cy="2396490"/>
+          </a:xfrm>
+          <a:prstGeom prst="roundRect">
+            <a:avLst>
+              <a:gd name="adj" fmla="val 3000"/>
+            </a:avLst>
+          </a:prstGeom>
+          <a:gradFill rotWithShape="1">
+            <a:gsLst>
+              <a:gs pos="0">
+                <a:srgbClr val="EEF4F9"/>
+              </a:gs>
+              <a:gs pos="100000">
+                <a:srgbClr val="DAE7F2"/>
+              </a:gs>
+            </a:gsLst>
+            <a:lin scaled="0" ang="16200000"/>
+          </a:gradFill>
+          <a:ln w="19050">
+            <a:solidFill>
+              <a:srgbClr val="014172"/>
+            </a:solidFill>
+          </a:ln>
+          <a:effectLst/>
+        </p:spPr>
+        <p:txBody>
+          <a:bodyPr rtlCol="0" anchor="ctr"/>
+          <a:lstStyle/>
+          <a:p>
+            <a:pPr algn="ctr"/>
+          </a:p>
+        </p:txBody>
+      </p:sp>
+      <p:sp>
+        <p:nvSpPr>
+          <p:cNvPr id="11" name="Rectangle 10"/>
+          <p:cNvSpPr/>
+          <p:nvPr/>
+        </p:nvSpPr>
+        <p:spPr>
+          <a:xfrm>
+            <a:off x="1238250" y="2979420"/>
+            <a:ext cx="2286000" cy="38100"/>
+          </a:xfrm>
+          <a:prstGeom prst="rect">
+            <a:avLst/>
+          </a:prstGeom>
+          <a:solidFill>
+            <a:srgbClr val="A8410F"/>
+          </a:solidFill>
+          <a:ln>
+            <a:noFill/>
+          </a:ln>
+          <a:effectLst/>
+        </p:spPr>
+        <p:txBody>
+          <a:bodyPr rtlCol="0" anchor="ctr"/>
+          <a:lstStyle/>
+          <a:p>
+            <a:pPr algn="ctr"/>
+          </a:p>
+        </p:txBody>
+      </p:sp>
+      <p:sp>
+        <p:nvSpPr>
+          <p:cNvPr id="12" name="Rounded Rectangle 11"/>
+          <p:cNvSpPr/>
+          <p:nvPr/>
+        </p:nvSpPr>
+        <p:spPr>
+          <a:xfrm>
+            <a:off x="4572000" y="1752600"/>
+            <a:ext cx="4762500" cy="590550"/>
+          </a:xfrm>
+          <a:prstGeom prst="roundRect">
+            <a:avLst>
+              <a:gd name="adj" fmla="val 6000"/>
+            </a:avLst>
+          </a:prstGeom>
+          <a:solidFill>
+            <a:srgbClr val="F2F5F8"/>
+          </a:solidFill>
+          <a:ln>
+            <a:noFill/>
+          </a:ln>
+          <a:effectLst/>
+        </p:spPr>
+        <p:txBody>
+          <a:bodyPr rtlCol="0" anchor="ctr"/>
+          <a:lstStyle/>
+          <a:p>
+            <a:pPr algn="ctr"/>
+          </a:p>
+        </p:txBody>
+      </p:sp>
+      <p:sp>
+        <p:nvSpPr>
+          <p:cNvPr id="13" name="TextBox 12"/>
+          <p:cNvSpPr txBox="1"/>
+          <p:nvPr/>
+        </p:nvSpPr>
+        <p:spPr>
+          <a:xfrm>
+            <a:off x="4762500" y="1866900"/>
+            <a:ext cx="4381500" cy="247650"/>
+          </a:xfrm>
+          <a:prstGeom prst="rect">
+            <a:avLst/>
+          </a:prstGeom>
+          <a:noFill/>
+        </p:spPr>
+        <p:txBody>
+          <a:bodyPr wrap="none" lIns="0" rIns="0" tIns="0" bIns="0" anchor="ctr">
+            <a:spAutoFit/>
+          </a:bodyPr>
+          <a:lstStyle/>
+          <a:p>
+            <a:pPr algn="l"/>
+            <a:r>
+              <a:rPr sz="1500" b="1">
+                <a:solidFill>
+                  <a:srgbClr val="2E2E33"/>
+                </a:solidFill>
+                <a:latin typeface="Yu Gothic UI"/>
+              </a:rPr>
+              <a:t>型番の数字 180</a:t>
+            </a:r>
+          </a:p>
+        </p:txBody>
+      </p:sp>
+      <p:sp>
+        <p:nvSpPr>
+          <p:cNvPr id="14" name="TextBox 13"/>
+          <p:cNvSpPr txBox="1"/>
+          <p:nvPr/>
+        </p:nvSpPr>
+        <p:spPr>
+          <a:xfrm>
+            <a:off x="4762500" y="2133600"/>
+            <a:ext cx="4381500" cy="228600"/>
+          </a:xfrm>
+          <a:prstGeom prst="rect">
+            <a:avLst/>
+          </a:prstGeom>
+          <a:noFill/>
+        </p:spPr>
+        <p:txBody>
+          <a:bodyPr wrap="none" lIns="0" rIns="0" tIns="0" bIns="0" anchor="ctr">
+            <a:spAutoFit/>
+          </a:bodyPr>
+          <a:lstStyle/>
+          <a:p>
+            <a:pPr algn="l"/>
+            <a:r>
+              <a:rPr sz="1125" b="0">
+                <a:solidFill>
+                  <a:srgbClr val="6A717B"/>
+                </a:solidFill>
+                <a:latin typeface="Yu Gothic UI"/>
+              </a:rPr>
+              <a:t>開いた状態の高さではありません</a:t>
+            </a:r>
+          </a:p>
+        </p:txBody>
+      </p:sp>
+      <p:sp>
+        <p:nvSpPr>
+          <p:cNvPr id="15" name="Rounded Rectangle 14"/>
+          <p:cNvSpPr/>
+          <p:nvPr/>
+        </p:nvSpPr>
+        <p:spPr>
+          <a:xfrm>
+            <a:off x="4572000" y="2438400"/>
+            <a:ext cx="4762500" cy="590550"/>
+          </a:xfrm>
+          <a:prstGeom prst="roundRect">
+            <a:avLst>
+              <a:gd name="adj" fmla="val 6000"/>
+            </a:avLst>
+          </a:prstGeom>
+          <a:solidFill>
+            <a:srgbClr val="F2F5F8"/>
+          </a:solidFill>
+          <a:ln>
+            <a:noFill/>
+          </a:ln>
+          <a:effectLst/>
+        </p:spPr>
+        <p:txBody>
+          <a:bodyPr rtlCol="0" anchor="ctr"/>
+          <a:lstStyle/>
+          <a:p>
+            <a:pPr algn="ctr"/>
+          </a:p>
+        </p:txBody>
+      </p:sp>
+      <p:sp>
+        <p:nvSpPr>
+          <p:cNvPr id="16" name="TextBox 15"/>
+          <p:cNvSpPr txBox="1"/>
+          <p:nvPr/>
+        </p:nvSpPr>
+        <p:spPr>
+          <a:xfrm>
+            <a:off x="4762500" y="2552700"/>
+            <a:ext cx="4381500" cy="247650"/>
+          </a:xfrm>
+          <a:prstGeom prst="rect">
+            <a:avLst/>
+          </a:prstGeom>
+          <a:noFill/>
+        </p:spPr>
+        <p:txBody>
+          <a:bodyPr wrap="none" lIns="0" rIns="0" tIns="0" bIns="0" anchor="ctr">
+            <a:spAutoFit/>
+          </a:bodyPr>
+          <a:lstStyle/>
+          <a:p>
+            <a:pPr algn="l"/>
+            <a:r>
+              <a:rPr sz="1500" b="1">
+                <a:solidFill>
+                  <a:srgbClr val="2E2E33"/>
+                </a:solidFill>
+                <a:latin typeface="Yu Gothic UI"/>
+              </a:rPr>
+              <a:t>天板の高さ 1.70m</a:t>
+            </a:r>
+          </a:p>
+        </p:txBody>
+      </p:sp>
+      <p:sp>
+        <p:nvSpPr>
+          <p:cNvPr id="17" name="TextBox 16"/>
+          <p:cNvSpPr txBox="1"/>
+          <p:nvPr/>
+        </p:nvSpPr>
+        <p:spPr>
+          <a:xfrm>
+            <a:off x="4762500" y="2819400"/>
+            <a:ext cx="4381500" cy="228600"/>
+          </a:xfrm>
+          <a:prstGeom prst="rect">
+            <a:avLst/>
+          </a:prstGeom>
+          <a:noFill/>
+        </p:spPr>
+        <p:txBody>
+          <a:bodyPr wrap="none" lIns="0" rIns="0" tIns="0" bIns="0" anchor="ctr">
+            <a:spAutoFit/>
+          </a:bodyPr>
+          <a:lstStyle/>
+          <a:p>
+            <a:pPr algn="l"/>
+            <a:r>
+              <a:rPr sz="1125" b="0">
+                <a:solidFill>
+                  <a:srgbClr val="6A717B"/>
+                </a:solidFill>
+                <a:latin typeface="Yu Gothic UI"/>
+              </a:rPr>
+              <a:t>乗ることは禁止されています</a:t>
+            </a:r>
+          </a:p>
+        </p:txBody>
+      </p:sp>
+      <p:sp>
+        <p:nvSpPr>
+          <p:cNvPr id="18" name="Rounded Rectangle 17"/>
+          <p:cNvSpPr/>
+          <p:nvPr/>
+        </p:nvSpPr>
+        <p:spPr>
+          <a:xfrm>
+            <a:off x="4572000" y="3124200"/>
+            <a:ext cx="4762500" cy="590550"/>
+          </a:xfrm>
+          <a:prstGeom prst="roundRect">
+            <a:avLst>
+              <a:gd name="adj" fmla="val 6000"/>
+            </a:avLst>
+          </a:prstGeom>
+          <a:solidFill>
+            <a:srgbClr val="FDF2E4"/>
+          </a:solidFill>
+          <a:ln w="19050">
+            <a:solidFill>
+              <a:srgbClr val="A8410F"/>
+            </a:solidFill>
+          </a:ln>
+          <a:effectLst/>
+        </p:spPr>
+        <p:txBody>
+          <a:bodyPr rtlCol="0" anchor="ctr"/>
+          <a:lstStyle/>
+          <a:p>
+            <a:pPr algn="ctr"/>
+          </a:p>
+        </p:txBody>
+      </p:sp>
+      <p:sp>
+        <p:nvSpPr>
+          <p:cNvPr id="19" name="TextBox 18"/>
+          <p:cNvSpPr txBox="1"/>
+          <p:nvPr/>
+        </p:nvSpPr>
+        <p:spPr>
+          <a:xfrm>
+            <a:off x="4762500" y="3238500"/>
+            <a:ext cx="4381500" cy="247650"/>
+          </a:xfrm>
+          <a:prstGeom prst="rect">
+            <a:avLst/>
+          </a:prstGeom>
+          <a:noFill/>
+        </p:spPr>
+        <p:txBody>
+          <a:bodyPr wrap="none" lIns="0" rIns="0" tIns="0" bIns="0" anchor="ctr">
+            <a:spAutoFit/>
+          </a:bodyPr>
+          <a:lstStyle/>
+          <a:p>
+            <a:pPr algn="l"/>
+            <a:r>
+              <a:rPr sz="1500" b="1">
+                <a:solidFill>
+                  <a:srgbClr val="A8410F"/>
+                </a:solidFill>
+                <a:latin typeface="Yu Gothic UI"/>
+              </a:rPr>
+              <a:t>使用最大高さ 1.40m</a:t>
+            </a:r>
+          </a:p>
+        </p:txBody>
+      </p:sp>
+      <p:sp>
+        <p:nvSpPr>
+          <p:cNvPr id="20" name="TextBox 19"/>
+          <p:cNvSpPr txBox="1"/>
+          <p:nvPr/>
+        </p:nvSpPr>
+        <p:spPr>
+          <a:xfrm>
+            <a:off x="4762500" y="3505200"/>
+            <a:ext cx="4381500" cy="228600"/>
+          </a:xfrm>
+          <a:prstGeom prst="rect">
+            <a:avLst/>
+          </a:prstGeom>
+          <a:noFill/>
+        </p:spPr>
+        <p:txBody>
+          <a:bodyPr wrap="none" lIns="0" rIns="0" tIns="0" bIns="0" anchor="ctr">
+            <a:spAutoFit/>
+          </a:bodyPr>
+          <a:lstStyle/>
+          <a:p>
+            <a:pPr algn="l"/>
+            <a:r>
+              <a:rPr sz="1125" b="0">
+                <a:solidFill>
+                  <a:srgbClr val="6A717B"/>
+                </a:solidFill>
+                <a:latin typeface="Yu Gothic UI"/>
+              </a:rPr>
+              <a:t>足を置けるのはここまで</a:t>
+            </a:r>
+          </a:p>
+        </p:txBody>
+      </p:sp>
+      <p:sp>
+        <p:nvSpPr>
+          <p:cNvPr id="21" name="TextBox 20"/>
+          <p:cNvSpPr txBox="1"/>
+          <p:nvPr/>
+        </p:nvSpPr>
+        <p:spPr>
+          <a:xfrm>
+            <a:off x="4762500" y="4133850"/>
+            <a:ext cx="4762500" cy="247650"/>
+          </a:xfrm>
+          <a:prstGeom prst="rect">
+            <a:avLst/>
+          </a:prstGeom>
+          <a:noFill/>
+        </p:spPr>
+        <p:txBody>
+          <a:bodyPr wrap="none" lIns="0" rIns="0" tIns="0" bIns="0" anchor="ctr">
+            <a:spAutoFit/>
+          </a:bodyPr>
+          <a:lstStyle/>
+          <a:p>
+            <a:pPr algn="l"/>
+            <a:r>
+              <a:rPr sz="1425" b="1">
+                <a:solidFill>
+                  <a:srgbClr val="014172"/>
+                </a:solidFill>
+                <a:latin typeface="Yu Gothic UI"/>
+              </a:rPr>
+              <a:t>型番の数字より 40cm 低い</a:t>
+            </a:r>
+          </a:p>
+        </p:txBody>
+      </p:sp>
+      <p:sp>
+        <p:nvSpPr>
+          <p:cNvPr id="22" name="TextBox 21"/>
+          <p:cNvSpPr txBox="1"/>
+          <p:nvPr/>
+        </p:nvSpPr>
+        <p:spPr>
+          <a:xfrm>
+            <a:off x="4762500" y="4419600"/>
+            <a:ext cx="4762500" cy="228600"/>
+          </a:xfrm>
+          <a:prstGeom prst="rect">
+            <a:avLst/>
+          </a:prstGeom>
+          <a:noFill/>
+        </p:spPr>
+        <p:txBody>
+          <a:bodyPr wrap="none" lIns="0" rIns="0" tIns="0" bIns="0" anchor="ctr">
+            <a:spAutoFit/>
+          </a:bodyPr>
+          <a:lstStyle/>
+          <a:p>
+            <a:pPr algn="l"/>
+            <a:r>
+              <a:rPr sz="1125" b="0">
+                <a:solidFill>
+                  <a:srgbClr val="6A717B"/>
+                </a:solidFill>
+                <a:latin typeface="Yu Gothic UI"/>
+              </a:rPr>
+              <a:t>RHB は5サイズすべてこの差でした</a:t>
+            </a:r>
+          </a:p>
+        </p:txBody>
+      </p:sp>
+      <p:sp>
+        <p:nvSpPr>
+          <p:cNvPr id="23" name="TextBox 22"/>
+          <p:cNvSpPr txBox="1"/>
+          <p:nvPr/>
+        </p:nvSpPr>
+        <p:spPr>
+          <a:xfrm>
+            <a:off x="4762500" y="4686300"/>
+            <a:ext cx="4953000" cy="228600"/>
+          </a:xfrm>
+          <a:prstGeom prst="rect">
+            <a:avLst/>
+          </a:prstGeom>
+          <a:noFill/>
+        </p:spPr>
+        <p:txBody>
+          <a:bodyPr wrap="none" lIns="0" rIns="0" tIns="0" bIns="0" anchor="ctr">
+            <a:spAutoFit/>
+          </a:bodyPr>
+          <a:lstStyle/>
+          <a:p>
+            <a:pPr algn="l"/>
+            <a:r>
+              <a:rPr sz="1125" b="0">
+                <a:solidFill>
+                  <a:srgbClr val="6A717B"/>
+                </a:solidFill>
+                <a:latin typeface="Yu Gothic UI"/>
+              </a:rPr>
+              <a:t>BSA-A と SEC-S の仕様表にはこの欄がありません</a:t>
+            </a:r>
+          </a:p>
+        </p:txBody>
+      </p:sp>
+      <p:sp>
+        <p:nvSpPr>
+          <p:cNvPr id="24" name="Rectangle 23"/>
+          <p:cNvSpPr/>
+          <p:nvPr/>
+        </p:nvSpPr>
+        <p:spPr>
+          <a:xfrm>
+            <a:off x="609600" y="5295900"/>
+            <a:ext cx="10210800" cy="9525"/>
+          </a:xfrm>
+          <a:prstGeom prst="rect">
+            <a:avLst/>
+          </a:prstGeom>
+          <a:solidFill>
+            <a:srgbClr val="E2E7EC"/>
+          </a:solidFill>
+          <a:ln>
+            <a:noFill/>
+          </a:ln>
+          <a:effectLst/>
+        </p:spPr>
+        <p:txBody>
+          <a:bodyPr rtlCol="0" anchor="ctr"/>
+          <a:lstStyle/>
+          <a:p>
+            <a:pPr algn="ctr"/>
+          </a:p>
+        </p:txBody>
+      </p:sp>
+      <p:sp>
+        <p:nvSpPr>
+          <p:cNvPr id="25" name="TextBox 24"/>
+          <p:cNvSpPr txBox="1"/>
+          <p:nvPr/>
+        </p:nvSpPr>
+        <p:spPr>
+          <a:xfrm>
+            <a:off x="609600" y="5429250"/>
+            <a:ext cx="7239000" cy="247650"/>
+          </a:xfrm>
+          <a:prstGeom prst="rect">
+            <a:avLst/>
+          </a:prstGeom>
+          <a:noFill/>
+        </p:spPr>
+        <p:txBody>
+          <a:bodyPr wrap="none" lIns="0" rIns="0" tIns="0" bIns="0" anchor="ctr">
+            <a:spAutoFit/>
+          </a:bodyPr>
+          <a:lstStyle/>
+          <a:p>
+            <a:pPr algn="l"/>
+            <a:r>
+              <a:rPr sz="1425" b="1">
+                <a:solidFill>
+                  <a:srgbClr val="2E2E33"/>
+                </a:solidFill>
+                <a:latin typeface="Yu Gothic UI"/>
+              </a:rPr>
+              <a:t>型番の数字は、足を置ける高さではありません。</a:t>
+            </a:r>
+          </a:p>
+        </p:txBody>
+      </p:sp>
+      <p:sp>
+        <p:nvSpPr>
+          <p:cNvPr id="26" name="TextBox 25"/>
+          <p:cNvSpPr txBox="1"/>
+          <p:nvPr/>
+        </p:nvSpPr>
+        <p:spPr>
+          <a:xfrm>
+            <a:off x="609600" y="5676900"/>
+            <a:ext cx="7620000" cy="209550"/>
+          </a:xfrm>
+          <a:prstGeom prst="rect">
+            <a:avLst/>
+          </a:prstGeom>
+          <a:noFill/>
+        </p:spPr>
+        <p:txBody>
+          <a:bodyPr wrap="none" lIns="0" rIns="0" tIns="0" bIns="0" anchor="ctr">
+            <a:spAutoFit/>
+          </a:bodyPr>
+          <a:lstStyle/>
+          <a:p>
+            <a:pPr algn="l"/>
+            <a:r>
+              <a:rPr sz="1050" b="0">
+                <a:solidFill>
+                  <a:srgbClr val="6A717B"/>
+                </a:solidFill>
+                <a:latin typeface="Yu Gothic UI"/>
+              </a:rPr>
+              <a:t>メーカー公表値からの計算です（実測ではありません）</a:t>
+            </a:r>
+          </a:p>
+        </p:txBody>
+      </p:sp>
+      <p:sp>
+        <p:nvSpPr>
+          <p:cNvPr id="27" name="TextBox 26"/>
+          <p:cNvSpPr txBox="1"/>
+          <p:nvPr/>
+        </p:nvSpPr>
+        <p:spPr>
+          <a:xfrm>
+            <a:off x="7962900" y="5676900"/>
+            <a:ext cx="2857500" cy="209550"/>
+          </a:xfrm>
+          <a:prstGeom prst="rect">
+            <a:avLst/>
+          </a:prstGeom>
+          <a:noFill/>
+        </p:spPr>
+        <p:txBody>
+          <a:bodyPr wrap="none" lIns="0" rIns="0" tIns="0" bIns="0" anchor="ctr">
+            <a:spAutoFit/>
+          </a:bodyPr>
+          <a:lstStyle/>
+          <a:p>
+            <a:pPr algn="r"/>
+            <a:r>
+              <a:rPr sz="1050" b="0">
+                <a:solidFill>
+                  <a:srgbClr val="6A717B"/>
+                </a:solidFill>
+                <a:latin typeface="Yu Gothic UI"/>
+              </a:rPr>
+              <a:t>寸法で選ぶ　sunpou.nexeed-lab.com</a:t>
+            </a:r>
+          </a:p>
+        </p:txBody>
+      </p:sp>
+    </p:spTree>
+  </p:cSld>
+  <p:clrMapOvr>
+    <a:masterClrMapping/>
+  </p:clrMapOvr>
+</p:sld>
+</file>
+
+<file path=ppt/slides/slide29.xml><?xml version="1.0" encoding="utf-8"?>
+<p:sld xmlns:a="http://schemas.openxmlformats.org/drawingml/2006/main" xmlns:p="http://schemas.openxmlformats.org/presentationml/2006/main" xmlns:r="http://schemas.openxmlformats.org/officeDocument/2006/relationships">
+  <p:cSld>
+    <p:spTree>
+      <p:nvGrpSpPr>
+        <p:cNvPr id="1" name=""/>
+        <p:cNvGrpSpPr/>
+        <p:nvPr/>
+      </p:nvGrpSpPr>
+      <p:grpSpPr/>
+      <p:sp>
+        <p:nvSpPr>
+          <p:cNvPr id="2" name="Rectangle 1"/>
+          <p:cNvSpPr/>
+          <p:nvPr/>
+        </p:nvSpPr>
+        <p:spPr>
+          <a:xfrm>
+            <a:off x="0" y="0"/>
+            <a:ext cx="11430000" cy="6000750"/>
+          </a:xfrm>
+          <a:prstGeom prst="rect">
+            <a:avLst/>
+          </a:prstGeom>
+          <a:solidFill>
+            <a:srgbClr val="FCFCFC"/>
+          </a:solidFill>
+          <a:ln>
+            <a:noFill/>
+          </a:ln>
+          <a:effectLst/>
+        </p:spPr>
+        <p:txBody>
+          <a:bodyPr rtlCol="0" anchor="ctr"/>
+          <a:lstStyle/>
+          <a:p>
+            <a:pPr algn="ctr"/>
+          </a:p>
+        </p:txBody>
+      </p:sp>
+      <p:sp>
+        <p:nvSpPr>
+          <p:cNvPr id="3" name="Rectangle 2"/>
+          <p:cNvSpPr/>
+          <p:nvPr/>
+        </p:nvSpPr>
+        <p:spPr>
+          <a:xfrm>
+            <a:off x="0" y="0"/>
+            <a:ext cx="114300" cy="6000750"/>
+          </a:xfrm>
+          <a:prstGeom prst="rect">
+            <a:avLst/>
+          </a:prstGeom>
+          <a:solidFill>
+            <a:srgbClr val="014172"/>
+          </a:solidFill>
+          <a:ln>
+            <a:noFill/>
+          </a:ln>
+          <a:effectLst/>
+        </p:spPr>
+        <p:txBody>
+          <a:bodyPr rtlCol="0" anchor="ctr"/>
+          <a:lstStyle/>
+          <a:p>
+            <a:pPr algn="ctr"/>
+          </a:p>
+        </p:txBody>
+      </p:sp>
+      <p:sp>
+        <p:nvSpPr>
+          <p:cNvPr id="4" name="Rectangle 3"/>
+          <p:cNvSpPr/>
+          <p:nvPr/>
+        </p:nvSpPr>
+        <p:spPr>
+          <a:xfrm>
+            <a:off x="0" y="0"/>
+            <a:ext cx="11430000" cy="1504950"/>
+          </a:xfrm>
+          <a:prstGeom prst="rect">
+            <a:avLst/>
+          </a:prstGeom>
+          <a:solidFill>
+            <a:srgbClr val="014172"/>
+          </a:solidFill>
+          <a:ln>
+            <a:noFill/>
+          </a:ln>
+          <a:effectLst/>
+        </p:spPr>
+        <p:txBody>
+          <a:bodyPr rtlCol="0" anchor="ctr"/>
+          <a:lstStyle/>
+          <a:p>
+            <a:pPr algn="ctr"/>
+          </a:p>
+        </p:txBody>
+      </p:sp>
+      <p:sp>
+        <p:nvSpPr>
+          <p:cNvPr id="5" name="TextBox 4"/>
+          <p:cNvSpPr txBox="1"/>
+          <p:nvPr/>
+        </p:nvSpPr>
+        <p:spPr>
+          <a:xfrm>
+            <a:off x="609600" y="361950"/>
+            <a:ext cx="7429500" cy="476250"/>
+          </a:xfrm>
+          <a:prstGeom prst="rect">
+            <a:avLst/>
+          </a:prstGeom>
+          <a:noFill/>
+        </p:spPr>
+        <p:txBody>
+          <a:bodyPr wrap="none" lIns="0" rIns="0" tIns="0" bIns="0" anchor="ctr">
+            <a:spAutoFit/>
+          </a:bodyPr>
+          <a:lstStyle/>
+          <a:p>
+            <a:pPr algn="l"/>
+            <a:r>
+              <a:rPr sz="3000" b="1">
+                <a:solidFill>
+                  <a:srgbClr val="FFFFFF"/>
+                </a:solidFill>
+                <a:latin typeface="Yu Gothic UI"/>
+              </a:rPr>
+              <a:t>0.8m前後に立つのに 2.5kg と 7.6kg</a:t>
+            </a:r>
+          </a:p>
+        </p:txBody>
+      </p:sp>
+      <p:sp>
+        <p:nvSpPr>
+          <p:cNvPr id="6" name="TextBox 5"/>
+          <p:cNvSpPr txBox="1"/>
+          <p:nvPr/>
+        </p:nvSpPr>
+        <p:spPr>
+          <a:xfrm>
+            <a:off x="609600" y="876300"/>
+            <a:ext cx="7429500" cy="247650"/>
+          </a:xfrm>
+          <a:prstGeom prst="rect">
+            <a:avLst/>
+          </a:prstGeom>
+          <a:noFill/>
+        </p:spPr>
+        <p:txBody>
+          <a:bodyPr wrap="none" lIns="0" rIns="0" tIns="0" bIns="0" anchor="ctr">
+            <a:spAutoFit/>
+          </a:bodyPr>
+          <a:lstStyle/>
+          <a:p>
+            <a:pPr algn="l"/>
+            <a:r>
+              <a:rPr sz="1425" b="0">
+                <a:solidFill>
+                  <a:srgbClr val="DAE7F2"/>
+                </a:solidFill>
+                <a:latin typeface="Yu Gothic UI"/>
+              </a:rPr>
+              <a:t>踏台は天板高さ、脚立は使用最大高さでそろえています</a:t>
+            </a:r>
+          </a:p>
+        </p:txBody>
+      </p:sp>
+      <p:sp>
+        <p:nvSpPr>
+          <p:cNvPr id="7" name="Rounded Rectangle 6"/>
+          <p:cNvSpPr/>
+          <p:nvPr/>
+        </p:nvSpPr>
+        <p:spPr>
+          <a:xfrm>
+            <a:off x="8305800" y="247650"/>
+            <a:ext cx="2514600" cy="1009650"/>
+          </a:xfrm>
+          <a:prstGeom prst="roundRect">
+            <a:avLst>
+              <a:gd name="adj" fmla="val 12000"/>
+            </a:avLst>
+          </a:prstGeom>
+          <a:solidFill>
+            <a:srgbClr val="FFFFFF"/>
+          </a:solidFill>
+          <a:ln>
+            <a:noFill/>
+          </a:ln>
+          <a:effectLst>
+            <a:outerShdw blurRad="254000" dist="63500" dir="5400000" rotWithShape="0">
+              <a:srgbClr val="0B2B45">
+                <a:alpha val="30000"/>
+              </a:srgbClr>
+            </a:outerShdw>
+          </a:effectLst>
+        </p:spPr>
+        <p:txBody>
+          <a:bodyPr rtlCol="0" anchor="ctr"/>
+          <a:lstStyle/>
+          <a:p>
+            <a:pPr algn="ctr"/>
+          </a:p>
+        </p:txBody>
+      </p:sp>
+      <p:sp>
+        <p:nvSpPr>
+          <p:cNvPr id="8" name="TextBox 7"/>
+          <p:cNvSpPr txBox="1"/>
+          <p:nvPr/>
+        </p:nvSpPr>
+        <p:spPr>
+          <a:xfrm>
+            <a:off x="8515350" y="400050"/>
+            <a:ext cx="2133600" cy="209550"/>
+          </a:xfrm>
+          <a:prstGeom prst="rect">
+            <a:avLst/>
+          </a:prstGeom>
+          <a:noFill/>
+        </p:spPr>
+        <p:txBody>
+          <a:bodyPr wrap="none" lIns="0" rIns="0" tIns="0" bIns="0" anchor="ctr">
+            <a:spAutoFit/>
+          </a:bodyPr>
+          <a:lstStyle/>
+          <a:p>
+            <a:pPr algn="l"/>
+            <a:r>
+              <a:rPr sz="1125" b="0">
+                <a:solidFill>
+                  <a:srgbClr val="6A717B"/>
+                </a:solidFill>
+                <a:latin typeface="Yu Gothic UI"/>
+              </a:rPr>
+              <a:t>重さの差は</a:t>
+            </a:r>
+          </a:p>
+        </p:txBody>
+      </p:sp>
+      <p:sp>
+        <p:nvSpPr>
+          <p:cNvPr id="9" name="TextBox 8"/>
+          <p:cNvSpPr txBox="1"/>
+          <p:nvPr/>
+        </p:nvSpPr>
+        <p:spPr>
+          <a:xfrm>
+            <a:off x="8515350" y="647700"/>
+            <a:ext cx="2133600" cy="533400"/>
+          </a:xfrm>
+          <a:prstGeom prst="rect">
+            <a:avLst/>
+          </a:prstGeom>
+          <a:noFill/>
+        </p:spPr>
+        <p:txBody>
+          <a:bodyPr wrap="none" lIns="0" rIns="0" tIns="0" bIns="0" anchor="ctr">
+            <a:spAutoFit/>
+          </a:bodyPr>
+          <a:lstStyle/>
+          <a:p>
+            <a:pPr algn="l"/>
+            <a:r>
+              <a:rPr sz="3900" b="1">
+                <a:solidFill>
+                  <a:srgbClr val="014172"/>
+                </a:solidFill>
+                <a:latin typeface="Yu Gothic UI"/>
+              </a:rPr>
+              <a:t>3.0</a:t>
+            </a:r>
+            <a:r>
+              <a:rPr sz="1950" b="1">
+                <a:solidFill>
+                  <a:srgbClr val="014172"/>
+                </a:solidFill>
+                <a:latin typeface="Yu Gothic UI"/>
+              </a:rPr>
+              <a:t>倍</a:t>
+            </a:r>
+          </a:p>
+        </p:txBody>
+      </p:sp>
+      <p:sp>
+        <p:nvSpPr>
+          <p:cNvPr id="10" name="Rectangle 9"/>
+          <p:cNvSpPr/>
+          <p:nvPr/>
+        </p:nvSpPr>
+        <p:spPr>
+          <a:xfrm>
+            <a:off x="495300" y="1676400"/>
+            <a:ext cx="10439400" cy="514350"/>
+          </a:xfrm>
+          <a:prstGeom prst="rect">
+            <a:avLst/>
+          </a:prstGeom>
+          <a:solidFill>
+            <a:srgbClr val="F2F5F8"/>
+          </a:solidFill>
+          <a:ln>
+            <a:noFill/>
+          </a:ln>
+          <a:effectLst/>
+        </p:spPr>
+        <p:txBody>
+          <a:bodyPr rtlCol="0" anchor="ctr"/>
+          <a:lstStyle/>
+          <a:p>
+            <a:pPr algn="ctr"/>
+          </a:p>
+        </p:txBody>
+      </p:sp>
+      <p:sp>
+        <p:nvSpPr>
+          <p:cNvPr id="11" name="Rectangle 10"/>
+          <p:cNvSpPr/>
+          <p:nvPr/>
+        </p:nvSpPr>
+        <p:spPr>
+          <a:xfrm>
+            <a:off x="495300" y="2266950"/>
+            <a:ext cx="10439400" cy="514350"/>
+          </a:xfrm>
+          <a:prstGeom prst="rect">
+            <a:avLst/>
+          </a:prstGeom>
+          <a:solidFill>
+            <a:srgbClr val="FCFCFC"/>
+          </a:solidFill>
+          <a:ln>
+            <a:noFill/>
+          </a:ln>
+          <a:effectLst/>
+        </p:spPr>
+        <p:txBody>
+          <a:bodyPr rtlCol="0" anchor="ctr"/>
+          <a:lstStyle/>
+          <a:p>
+            <a:pPr algn="ctr"/>
+          </a:p>
+        </p:txBody>
+      </p:sp>
+      <p:sp>
+        <p:nvSpPr>
+          <p:cNvPr id="12" name="Rectangle 11"/>
+          <p:cNvSpPr/>
+          <p:nvPr/>
+        </p:nvSpPr>
+        <p:spPr>
+          <a:xfrm>
+            <a:off x="495300" y="2857500"/>
+            <a:ext cx="10439400" cy="514350"/>
+          </a:xfrm>
+          <a:prstGeom prst="rect">
+            <a:avLst/>
+          </a:prstGeom>
+          <a:solidFill>
+            <a:srgbClr val="F2F5F8"/>
+          </a:solidFill>
+          <a:ln>
+            <a:noFill/>
+          </a:ln>
+          <a:effectLst/>
+        </p:spPr>
+        <p:txBody>
+          <a:bodyPr rtlCol="0" anchor="ctr"/>
+          <a:lstStyle/>
+          <a:p>
+            <a:pPr algn="ctr"/>
+          </a:p>
+        </p:txBody>
+      </p:sp>
+      <p:sp>
+        <p:nvSpPr>
+          <p:cNvPr id="13" name="Rectangle 12"/>
+          <p:cNvSpPr/>
+          <p:nvPr/>
+        </p:nvSpPr>
+        <p:spPr>
+          <a:xfrm>
+            <a:off x="495300" y="3448050"/>
+            <a:ext cx="10439400" cy="514350"/>
+          </a:xfrm>
+          <a:prstGeom prst="rect">
+            <a:avLst/>
+          </a:prstGeom>
+          <a:solidFill>
+            <a:srgbClr val="FCFCFC"/>
+          </a:solidFill>
+          <a:ln>
+            <a:noFill/>
+          </a:ln>
+          <a:effectLst/>
+        </p:spPr>
+        <p:txBody>
+          <a:bodyPr rtlCol="0" anchor="ctr"/>
+          <a:lstStyle/>
+          <a:p>
+            <a:pPr algn="ctr"/>
+          </a:p>
+        </p:txBody>
+      </p:sp>
+      <p:sp>
+        <p:nvSpPr>
+          <p:cNvPr id="14" name="Rectangle 13"/>
+          <p:cNvSpPr/>
+          <p:nvPr/>
+        </p:nvSpPr>
+        <p:spPr>
+          <a:xfrm>
+            <a:off x="495300" y="4038600"/>
+            <a:ext cx="10439400" cy="514350"/>
+          </a:xfrm>
+          <a:prstGeom prst="rect">
+            <a:avLst/>
+          </a:prstGeom>
+          <a:solidFill>
+            <a:srgbClr val="F2F5F8"/>
+          </a:solidFill>
+          <a:ln>
+            <a:noFill/>
+          </a:ln>
+          <a:effectLst/>
+        </p:spPr>
+        <p:txBody>
+          <a:bodyPr rtlCol="0" anchor="ctr"/>
+          <a:lstStyle/>
+          <a:p>
+            <a:pPr algn="ctr"/>
+          </a:p>
+        </p:txBody>
+      </p:sp>
+      <p:sp>
+        <p:nvSpPr>
+          <p:cNvPr id="15" name="Rectangle 14"/>
+          <p:cNvSpPr/>
+          <p:nvPr/>
+        </p:nvSpPr>
+        <p:spPr>
+          <a:xfrm>
+            <a:off x="495300" y="4629150"/>
+            <a:ext cx="10439400" cy="514350"/>
+          </a:xfrm>
+          <a:prstGeom prst="rect">
+            <a:avLst/>
+          </a:prstGeom>
+          <a:solidFill>
+            <a:srgbClr val="E6EEF6"/>
+          </a:solidFill>
+          <a:ln>
+            <a:noFill/>
+          </a:ln>
+          <a:effectLst/>
+        </p:spPr>
+        <p:txBody>
+          <a:bodyPr rtlCol="0" anchor="ctr"/>
+          <a:lstStyle/>
+          <a:p>
+            <a:pPr algn="ctr"/>
+          </a:p>
+        </p:txBody>
+      </p:sp>
+      <p:sp>
+        <p:nvSpPr>
+          <p:cNvPr id="16" name="Rectangle 15"/>
+          <p:cNvSpPr/>
+          <p:nvPr/>
+        </p:nvSpPr>
+        <p:spPr>
+          <a:xfrm>
+            <a:off x="495300" y="4629150"/>
+            <a:ext cx="47625" cy="514350"/>
+          </a:xfrm>
+          <a:prstGeom prst="rect">
+            <a:avLst/>
+          </a:prstGeom>
+          <a:solidFill>
+            <a:srgbClr val="014172"/>
+          </a:solidFill>
+          <a:ln>
+            <a:noFill/>
+          </a:ln>
+          <a:effectLst/>
+        </p:spPr>
+        <p:txBody>
+          <a:bodyPr rtlCol="0" anchor="ctr"/>
+          <a:lstStyle/>
+          <a:p>
+            <a:pPr algn="ctr"/>
+          </a:p>
+        </p:txBody>
+      </p:sp>
+      <p:sp>
+        <p:nvSpPr>
+          <p:cNvPr id="17" name="Rounded Rectangle 16"/>
+          <p:cNvSpPr/>
+          <p:nvPr/>
+        </p:nvSpPr>
+        <p:spPr>
+          <a:xfrm>
+            <a:off x="4095750" y="1809750"/>
+            <a:ext cx="1857375" cy="266700"/>
+          </a:xfrm>
+          <a:prstGeom prst="roundRect">
+            <a:avLst>
+              <a:gd name="adj" fmla="val 30000"/>
+            </a:avLst>
+          </a:prstGeom>
+          <a:gradFill rotWithShape="1">
+            <a:gsLst>
+              <a:gs pos="0">
+                <a:srgbClr val="EEF4F9"/>
+              </a:gs>
+              <a:gs pos="100000">
+                <a:srgbClr val="DAE7F2"/>
+              </a:gs>
+            </a:gsLst>
+            <a:lin scaled="0" ang="16200000"/>
+          </a:gradFill>
+          <a:ln w="19050">
+            <a:solidFill>
+              <a:srgbClr val="014172"/>
+            </a:solidFill>
+          </a:ln>
+          <a:effectLst/>
+        </p:spPr>
+        <p:txBody>
+          <a:bodyPr rtlCol="0" anchor="ctr"/>
+          <a:lstStyle/>
+          <a:p>
+            <a:pPr algn="ctr"/>
+          </a:p>
+        </p:txBody>
+      </p:sp>
+      <p:sp>
+        <p:nvSpPr>
+          <p:cNvPr id="18" name="TextBox 17"/>
+          <p:cNvSpPr txBox="1"/>
+          <p:nvPr/>
+        </p:nvSpPr>
+        <p:spPr>
+          <a:xfrm>
+            <a:off x="704850" y="1752600"/>
+            <a:ext cx="3333750" cy="228600"/>
+          </a:xfrm>
+          <a:prstGeom prst="rect">
+            <a:avLst/>
+          </a:prstGeom>
+          <a:noFill/>
+        </p:spPr>
+        <p:txBody>
+          <a:bodyPr wrap="none" lIns="0" rIns="0" tIns="0" bIns="0" anchor="ctr">
+            <a:spAutoFit/>
+          </a:bodyPr>
+          <a:lstStyle/>
+          <a:p>
+            <a:pPr algn="l"/>
+            <a:r>
+              <a:rPr sz="1200" b="1">
+                <a:solidFill>
+                  <a:srgbClr val="2E2E33"/>
+                </a:solidFill>
+                <a:latin typeface="Yu Gothic UI"/>
+              </a:rPr>
+              <a:t>アルインコ CCA-80K</a:t>
+            </a:r>
+          </a:p>
+        </p:txBody>
+      </p:sp>
+      <p:sp>
+        <p:nvSpPr>
+          <p:cNvPr id="19" name="TextBox 18"/>
+          <p:cNvSpPr txBox="1"/>
+          <p:nvPr/>
+        </p:nvSpPr>
+        <p:spPr>
+          <a:xfrm>
+            <a:off x="704850" y="1981200"/>
+            <a:ext cx="3333750" cy="209550"/>
+          </a:xfrm>
+          <a:prstGeom prst="rect">
+            <a:avLst/>
+          </a:prstGeom>
+          <a:noFill/>
+        </p:spPr>
+        <p:txBody>
+          <a:bodyPr wrap="none" lIns="0" rIns="0" tIns="0" bIns="0" anchor="ctr">
+            <a:spAutoFit/>
+          </a:bodyPr>
+          <a:lstStyle/>
+          <a:p>
+            <a:pPr algn="l"/>
+            <a:r>
+              <a:rPr sz="1050" b="0">
+                <a:solidFill>
+                  <a:srgbClr val="6A717B"/>
+                </a:solidFill>
+                <a:latin typeface="Yu Gothic UI"/>
+              </a:rPr>
+              <a:t>踏台 ／ 0.79m</a:t>
+            </a:r>
+          </a:p>
+        </p:txBody>
+      </p:sp>
+      <p:sp>
+        <p:nvSpPr>
+          <p:cNvPr id="20" name="TextBox 19"/>
+          <p:cNvSpPr txBox="1"/>
+          <p:nvPr/>
+        </p:nvSpPr>
+        <p:spPr>
+          <a:xfrm>
+            <a:off x="6067425" y="1809750"/>
+            <a:ext cx="1047750" cy="266700"/>
+          </a:xfrm>
+          <a:prstGeom prst="rect">
+            <a:avLst/>
+          </a:prstGeom>
+          <a:noFill/>
+        </p:spPr>
+        <p:txBody>
+          <a:bodyPr wrap="none" lIns="0" rIns="0" tIns="0" bIns="0" anchor="ctr">
+            <a:spAutoFit/>
+          </a:bodyPr>
+          <a:lstStyle/>
+          <a:p>
+            <a:pPr algn="l"/>
+            <a:r>
+              <a:rPr sz="1350" b="1">
+                <a:solidFill>
+                  <a:srgbClr val="014172"/>
+                </a:solidFill>
+                <a:latin typeface="Yu Gothic UI"/>
+              </a:rPr>
+              <a:t>2.5kg</a:t>
+            </a:r>
+          </a:p>
+        </p:txBody>
+      </p:sp>
+      <p:sp>
+        <p:nvSpPr>
+          <p:cNvPr id="21" name="Rounded Rectangle 20"/>
+          <p:cNvSpPr/>
+          <p:nvPr/>
+        </p:nvSpPr>
+        <p:spPr>
+          <a:xfrm>
+            <a:off x="4095750" y="2400300"/>
+            <a:ext cx="1931670" cy="266700"/>
+          </a:xfrm>
+          <a:prstGeom prst="roundRect">
+            <a:avLst>
+              <a:gd name="adj" fmla="val 30000"/>
+            </a:avLst>
+          </a:prstGeom>
+          <a:gradFill rotWithShape="1">
+            <a:gsLst>
+              <a:gs pos="0">
+                <a:srgbClr val="EEF4F9"/>
+              </a:gs>
+              <a:gs pos="100000">
+                <a:srgbClr val="DAE7F2"/>
+              </a:gs>
+            </a:gsLst>
+            <a:lin scaled="0" ang="16200000"/>
+          </a:gradFill>
+          <a:ln w="19050">
+            <a:solidFill>
+              <a:srgbClr val="014172"/>
+            </a:solidFill>
+          </a:ln>
+          <a:effectLst/>
+        </p:spPr>
+        <p:txBody>
+          <a:bodyPr rtlCol="0" anchor="ctr"/>
+          <a:lstStyle/>
+          <a:p>
+            <a:pPr algn="ctr"/>
+          </a:p>
+        </p:txBody>
+      </p:sp>
+      <p:sp>
+        <p:nvSpPr>
+          <p:cNvPr id="22" name="TextBox 21"/>
+          <p:cNvSpPr txBox="1"/>
+          <p:nvPr/>
+        </p:nvSpPr>
+        <p:spPr>
+          <a:xfrm>
+            <a:off x="704850" y="2343150"/>
+            <a:ext cx="3333750" cy="228600"/>
+          </a:xfrm>
+          <a:prstGeom prst="rect">
+            <a:avLst/>
+          </a:prstGeom>
+          <a:noFill/>
+        </p:spPr>
+        <p:txBody>
+          <a:bodyPr wrap="none" lIns="0" rIns="0" tIns="0" bIns="0" anchor="ctr">
+            <a:spAutoFit/>
+          </a:bodyPr>
+          <a:lstStyle/>
+          <a:p>
+            <a:pPr algn="l"/>
+            <a:r>
+              <a:rPr sz="1200" b="1">
+                <a:solidFill>
+                  <a:srgbClr val="2E2E33"/>
+                </a:solidFill>
+                <a:latin typeface="Yu Gothic UI"/>
+              </a:rPr>
+              <a:t>長谷川 SE-8a</a:t>
+            </a:r>
+          </a:p>
+        </p:txBody>
+      </p:sp>
+      <p:sp>
+        <p:nvSpPr>
+          <p:cNvPr id="23" name="TextBox 22"/>
+          <p:cNvSpPr txBox="1"/>
+          <p:nvPr/>
+        </p:nvSpPr>
+        <p:spPr>
+          <a:xfrm>
+            <a:off x="704850" y="2571750"/>
+            <a:ext cx="3333750" cy="209550"/>
+          </a:xfrm>
+          <a:prstGeom prst="rect">
+            <a:avLst/>
+          </a:prstGeom>
+          <a:noFill/>
+        </p:spPr>
+        <p:txBody>
+          <a:bodyPr wrap="none" lIns="0" rIns="0" tIns="0" bIns="0" anchor="ctr">
+            <a:spAutoFit/>
+          </a:bodyPr>
+          <a:lstStyle/>
+          <a:p>
+            <a:pPr algn="l"/>
+            <a:r>
+              <a:rPr sz="1050" b="0">
+                <a:solidFill>
+                  <a:srgbClr val="6A717B"/>
+                </a:solidFill>
+                <a:latin typeface="Yu Gothic UI"/>
+              </a:rPr>
+              <a:t>踏台 ／ 0.79m</a:t>
+            </a:r>
+          </a:p>
+        </p:txBody>
+      </p:sp>
+      <p:sp>
+        <p:nvSpPr>
+          <p:cNvPr id="24" name="TextBox 23"/>
+          <p:cNvSpPr txBox="1"/>
+          <p:nvPr/>
+        </p:nvSpPr>
+        <p:spPr>
+          <a:xfrm>
+            <a:off x="6141720" y="2400300"/>
+            <a:ext cx="1047750" cy="266700"/>
+          </a:xfrm>
+          <a:prstGeom prst="rect">
+            <a:avLst/>
+          </a:prstGeom>
+          <a:noFill/>
+        </p:spPr>
+        <p:txBody>
+          <a:bodyPr wrap="none" lIns="0" rIns="0" tIns="0" bIns="0" anchor="ctr">
+            <a:spAutoFit/>
+          </a:bodyPr>
+          <a:lstStyle/>
+          <a:p>
+            <a:pPr algn="l"/>
+            <a:r>
+              <a:rPr sz="1350" b="1">
+                <a:solidFill>
+                  <a:srgbClr val="014172"/>
+                </a:solidFill>
+                <a:latin typeface="Yu Gothic UI"/>
+              </a:rPr>
+              <a:t>2.6kg</a:t>
+            </a:r>
+          </a:p>
+        </p:txBody>
+      </p:sp>
+      <p:sp>
+        <p:nvSpPr>
+          <p:cNvPr id="25" name="Rounded Rectangle 24"/>
+          <p:cNvSpPr/>
+          <p:nvPr/>
+        </p:nvSpPr>
+        <p:spPr>
+          <a:xfrm>
+            <a:off x="4095750" y="2990850"/>
+            <a:ext cx="2823210" cy="266700"/>
+          </a:xfrm>
+          <a:prstGeom prst="roundRect">
+            <a:avLst>
+              <a:gd name="adj" fmla="val 30000"/>
+            </a:avLst>
+          </a:prstGeom>
+          <a:gradFill rotWithShape="1">
+            <a:gsLst>
+              <a:gs pos="0">
+                <a:srgbClr val="EEF4F9"/>
+              </a:gs>
+              <a:gs pos="100000">
+                <a:srgbClr val="DAE7F2"/>
+              </a:gs>
+            </a:gsLst>
+            <a:lin scaled="0" ang="16200000"/>
+          </a:gradFill>
+          <a:ln w="19050">
+            <a:solidFill>
+              <a:srgbClr val="014172"/>
+            </a:solidFill>
+          </a:ln>
+          <a:effectLst/>
+        </p:spPr>
+        <p:txBody>
+          <a:bodyPr rtlCol="0" anchor="ctr"/>
+          <a:lstStyle/>
+          <a:p>
+            <a:pPr algn="ctr"/>
+          </a:p>
+        </p:txBody>
+      </p:sp>
+      <p:sp>
+        <p:nvSpPr>
+          <p:cNvPr id="26" name="TextBox 25"/>
+          <p:cNvSpPr txBox="1"/>
+          <p:nvPr/>
+        </p:nvSpPr>
+        <p:spPr>
+          <a:xfrm>
+            <a:off x="704850" y="2933700"/>
+            <a:ext cx="3333750" cy="228600"/>
+          </a:xfrm>
+          <a:prstGeom prst="rect">
+            <a:avLst/>
+          </a:prstGeom>
+          <a:noFill/>
+        </p:spPr>
+        <p:txBody>
+          <a:bodyPr wrap="none" lIns="0" rIns="0" tIns="0" bIns="0" anchor="ctr">
+            <a:spAutoFit/>
+          </a:bodyPr>
+          <a:lstStyle/>
+          <a:p>
+            <a:pPr algn="l"/>
+            <a:r>
+              <a:rPr sz="1200" b="1">
+                <a:solidFill>
+                  <a:srgbClr val="2E2E33"/>
+                </a:solidFill>
+                <a:latin typeface="Yu Gothic UI"/>
+              </a:rPr>
+              <a:t>アルインコ TBF-4</a:t>
+            </a:r>
+          </a:p>
+        </p:txBody>
+      </p:sp>
+      <p:sp>
+        <p:nvSpPr>
+          <p:cNvPr id="27" name="TextBox 26"/>
+          <p:cNvSpPr txBox="1"/>
+          <p:nvPr/>
+        </p:nvSpPr>
+        <p:spPr>
+          <a:xfrm>
+            <a:off x="704850" y="3162300"/>
+            <a:ext cx="3333750" cy="209550"/>
+          </a:xfrm>
+          <a:prstGeom prst="rect">
+            <a:avLst/>
+          </a:prstGeom>
+          <a:noFill/>
+        </p:spPr>
+        <p:txBody>
+          <a:bodyPr wrap="none" lIns="0" rIns="0" tIns="0" bIns="0" anchor="ctr">
+            <a:spAutoFit/>
+          </a:bodyPr>
+          <a:lstStyle/>
+          <a:p>
+            <a:pPr algn="l"/>
+            <a:r>
+              <a:rPr sz="1050" b="0">
+                <a:solidFill>
+                  <a:srgbClr val="6A717B"/>
+                </a:solidFill>
+                <a:latin typeface="Yu Gothic UI"/>
+              </a:rPr>
+              <a:t>踏台（上わく付き）／ 0.77m</a:t>
+            </a:r>
+          </a:p>
+        </p:txBody>
+      </p:sp>
+      <p:sp>
+        <p:nvSpPr>
+          <p:cNvPr id="28" name="TextBox 27"/>
+          <p:cNvSpPr txBox="1"/>
+          <p:nvPr/>
+        </p:nvSpPr>
+        <p:spPr>
+          <a:xfrm>
+            <a:off x="7033260" y="2990850"/>
+            <a:ext cx="1047750" cy="266700"/>
+          </a:xfrm>
+          <a:prstGeom prst="rect">
+            <a:avLst/>
+          </a:prstGeom>
+          <a:noFill/>
+        </p:spPr>
+        <p:txBody>
+          <a:bodyPr wrap="none" lIns="0" rIns="0" tIns="0" bIns="0" anchor="ctr">
+            <a:spAutoFit/>
+          </a:bodyPr>
+          <a:lstStyle/>
+          <a:p>
+            <a:pPr algn="l"/>
+            <a:r>
+              <a:rPr sz="1350" b="1">
+                <a:solidFill>
+                  <a:srgbClr val="014172"/>
+                </a:solidFill>
+                <a:latin typeface="Yu Gothic UI"/>
+              </a:rPr>
+              <a:t>3.8kg</a:t>
+            </a:r>
+          </a:p>
+        </p:txBody>
+      </p:sp>
+      <p:sp>
+        <p:nvSpPr>
+          <p:cNvPr id="29" name="Rounded Rectangle 28"/>
+          <p:cNvSpPr/>
+          <p:nvPr/>
+        </p:nvSpPr>
+        <p:spPr>
+          <a:xfrm>
+            <a:off x="4095750" y="3581400"/>
+            <a:ext cx="3268980" cy="266700"/>
+          </a:xfrm>
+          <a:prstGeom prst="roundRect">
+            <a:avLst>
+              <a:gd name="adj" fmla="val 30000"/>
+            </a:avLst>
+          </a:prstGeom>
+          <a:gradFill rotWithShape="1">
+            <a:gsLst>
+              <a:gs pos="0">
+                <a:srgbClr val="EEF4F9"/>
+              </a:gs>
+              <a:gs pos="100000">
+                <a:srgbClr val="DAE7F2"/>
+              </a:gs>
+            </a:gsLst>
+            <a:lin scaled="0" ang="16200000"/>
+          </a:gradFill>
+          <a:ln w="19050">
+            <a:solidFill>
+              <a:srgbClr val="014172"/>
+            </a:solidFill>
+          </a:ln>
+          <a:effectLst/>
+        </p:spPr>
+        <p:txBody>
+          <a:bodyPr rtlCol="0" anchor="ctr"/>
+          <a:lstStyle/>
+          <a:p>
+            <a:pPr algn="ctr"/>
+          </a:p>
+        </p:txBody>
+      </p:sp>
+      <p:sp>
+        <p:nvSpPr>
+          <p:cNvPr id="30" name="TextBox 29"/>
+          <p:cNvSpPr txBox="1"/>
+          <p:nvPr/>
+        </p:nvSpPr>
+        <p:spPr>
+          <a:xfrm>
+            <a:off x="704850" y="3524250"/>
+            <a:ext cx="3333750" cy="228600"/>
+          </a:xfrm>
+          <a:prstGeom prst="rect">
+            <a:avLst/>
+          </a:prstGeom>
+          <a:noFill/>
+        </p:spPr>
+        <p:txBody>
+          <a:bodyPr wrap="none" lIns="0" rIns="0" tIns="0" bIns="0" anchor="ctr">
+            <a:spAutoFit/>
+          </a:bodyPr>
+          <a:lstStyle/>
+          <a:p>
+            <a:pPr algn="l"/>
+            <a:r>
+              <a:rPr sz="1200" b="1">
+                <a:solidFill>
+                  <a:srgbClr val="2E2E33"/>
+                </a:solidFill>
+                <a:latin typeface="Yu Gothic UI"/>
+              </a:rPr>
+              <a:t>長谷川 EFA-08</a:t>
+            </a:r>
+          </a:p>
+        </p:txBody>
+      </p:sp>
+      <p:sp>
+        <p:nvSpPr>
+          <p:cNvPr id="31" name="TextBox 30"/>
+          <p:cNvSpPr txBox="1"/>
+          <p:nvPr/>
+        </p:nvSpPr>
+        <p:spPr>
+          <a:xfrm>
+            <a:off x="704850" y="3752850"/>
+            <a:ext cx="3333750" cy="209550"/>
+          </a:xfrm>
+          <a:prstGeom prst="rect">
+            <a:avLst/>
+          </a:prstGeom>
+          <a:noFill/>
+        </p:spPr>
+        <p:txBody>
+          <a:bodyPr wrap="none" lIns="0" rIns="0" tIns="0" bIns="0" anchor="ctr">
+            <a:spAutoFit/>
+          </a:bodyPr>
+          <a:lstStyle/>
+          <a:p>
+            <a:pPr algn="l"/>
+            <a:r>
+              <a:rPr sz="1050" b="0">
+                <a:solidFill>
+                  <a:srgbClr val="6A717B"/>
+                </a:solidFill>
+                <a:latin typeface="Yu Gothic UI"/>
+              </a:rPr>
+              <a:t>踏台（上わく付き）／ 0.79m</a:t>
+            </a:r>
+          </a:p>
+        </p:txBody>
+      </p:sp>
+      <p:sp>
+        <p:nvSpPr>
+          <p:cNvPr id="32" name="TextBox 31"/>
+          <p:cNvSpPr txBox="1"/>
+          <p:nvPr/>
+        </p:nvSpPr>
+        <p:spPr>
+          <a:xfrm>
+            <a:off x="7479030" y="3581400"/>
+            <a:ext cx="1047750" cy="266700"/>
+          </a:xfrm>
+          <a:prstGeom prst="rect">
+            <a:avLst/>
+          </a:prstGeom>
+          <a:noFill/>
+        </p:spPr>
+        <p:txBody>
+          <a:bodyPr wrap="none" lIns="0" rIns="0" tIns="0" bIns="0" anchor="ctr">
+            <a:spAutoFit/>
+          </a:bodyPr>
+          <a:lstStyle/>
+          <a:p>
+            <a:pPr algn="l"/>
+            <a:r>
+              <a:rPr sz="1350" b="1">
+                <a:solidFill>
+                  <a:srgbClr val="014172"/>
+                </a:solidFill>
+                <a:latin typeface="Yu Gothic UI"/>
+              </a:rPr>
+              <a:t>4.4kg</a:t>
+            </a:r>
+          </a:p>
+        </p:txBody>
+      </p:sp>
+      <p:sp>
+        <p:nvSpPr>
+          <p:cNvPr id="33" name="Rounded Rectangle 32"/>
+          <p:cNvSpPr/>
+          <p:nvPr/>
+        </p:nvSpPr>
+        <p:spPr>
+          <a:xfrm>
+            <a:off x="4095750" y="4171950"/>
+            <a:ext cx="3343275" cy="266700"/>
+          </a:xfrm>
+          <a:prstGeom prst="roundRect">
+            <a:avLst>
+              <a:gd name="adj" fmla="val 30000"/>
+            </a:avLst>
+          </a:prstGeom>
+          <a:gradFill rotWithShape="1">
+            <a:gsLst>
+              <a:gs pos="0">
+                <a:srgbClr val="EEF4F9"/>
+              </a:gs>
+              <a:gs pos="100000">
+                <a:srgbClr val="DAE7F2"/>
+              </a:gs>
+            </a:gsLst>
+            <a:lin scaled="0" ang="16200000"/>
+          </a:gradFill>
+          <a:ln w="19050">
+            <a:solidFill>
+              <a:srgbClr val="014172"/>
+            </a:solidFill>
+          </a:ln>
+          <a:effectLst/>
+        </p:spPr>
+        <p:txBody>
+          <a:bodyPr rtlCol="0" anchor="ctr"/>
+          <a:lstStyle/>
+          <a:p>
+            <a:pPr algn="ctr"/>
+          </a:p>
+        </p:txBody>
+      </p:sp>
+      <p:sp>
+        <p:nvSpPr>
+          <p:cNvPr id="34" name="TextBox 33"/>
+          <p:cNvSpPr txBox="1"/>
+          <p:nvPr/>
+        </p:nvSpPr>
+        <p:spPr>
+          <a:xfrm>
+            <a:off x="704850" y="4114800"/>
+            <a:ext cx="3333750" cy="228600"/>
+          </a:xfrm>
+          <a:prstGeom prst="rect">
+            <a:avLst/>
+          </a:prstGeom>
+          <a:noFill/>
+        </p:spPr>
+        <p:txBody>
+          <a:bodyPr wrap="none" lIns="0" rIns="0" tIns="0" bIns="0" anchor="ctr">
+            <a:spAutoFit/>
+          </a:bodyPr>
+          <a:lstStyle/>
+          <a:p>
+            <a:pPr algn="l"/>
+            <a:r>
+              <a:rPr sz="1200" b="1">
+                <a:solidFill>
+                  <a:srgbClr val="2E2E33"/>
+                </a:solidFill>
+                <a:latin typeface="Yu Gothic UI"/>
+              </a:rPr>
+              <a:t>長谷川 RHB-12a</a:t>
+            </a:r>
+          </a:p>
+        </p:txBody>
+      </p:sp>
+      <p:sp>
+        <p:nvSpPr>
+          <p:cNvPr id="35" name="TextBox 34"/>
+          <p:cNvSpPr txBox="1"/>
+          <p:nvPr/>
+        </p:nvSpPr>
+        <p:spPr>
+          <a:xfrm>
+            <a:off x="704850" y="4343400"/>
+            <a:ext cx="3333750" cy="209550"/>
+          </a:xfrm>
+          <a:prstGeom prst="rect">
+            <a:avLst/>
+          </a:prstGeom>
+          <a:noFill/>
+        </p:spPr>
+        <p:txBody>
+          <a:bodyPr wrap="none" lIns="0" rIns="0" tIns="0" bIns="0" anchor="ctr">
+            <a:spAutoFit/>
+          </a:bodyPr>
+          <a:lstStyle/>
+          <a:p>
+            <a:pPr algn="l"/>
+            <a:r>
+              <a:rPr sz="1050" b="0">
+                <a:solidFill>
+                  <a:srgbClr val="6A717B"/>
+                </a:solidFill>
+                <a:latin typeface="Yu Gothic UI"/>
+              </a:rPr>
+              <a:t>はしご兼用脚立 ／ 0.80m</a:t>
+            </a:r>
+          </a:p>
+        </p:txBody>
+      </p:sp>
+      <p:sp>
+        <p:nvSpPr>
+          <p:cNvPr id="36" name="TextBox 35"/>
+          <p:cNvSpPr txBox="1"/>
+          <p:nvPr/>
+        </p:nvSpPr>
+        <p:spPr>
+          <a:xfrm>
+            <a:off x="7553325" y="4171950"/>
+            <a:ext cx="1047750" cy="266700"/>
+          </a:xfrm>
+          <a:prstGeom prst="rect">
+            <a:avLst/>
+          </a:prstGeom>
+          <a:noFill/>
+        </p:spPr>
+        <p:txBody>
+          <a:bodyPr wrap="none" lIns="0" rIns="0" tIns="0" bIns="0" anchor="ctr">
+            <a:spAutoFit/>
+          </a:bodyPr>
+          <a:lstStyle/>
+          <a:p>
+            <a:pPr algn="l"/>
+            <a:r>
+              <a:rPr sz="1350" b="1">
+                <a:solidFill>
+                  <a:srgbClr val="014172"/>
+                </a:solidFill>
+                <a:latin typeface="Yu Gothic UI"/>
+              </a:rPr>
+              <a:t>4.5kg</a:t>
+            </a:r>
+          </a:p>
+        </p:txBody>
+      </p:sp>
+      <p:sp>
+        <p:nvSpPr>
+          <p:cNvPr id="37" name="Rounded Rectangle 36"/>
+          <p:cNvSpPr/>
+          <p:nvPr/>
+        </p:nvSpPr>
+        <p:spPr>
+          <a:xfrm>
+            <a:off x="4095750" y="4762500"/>
+            <a:ext cx="5646420" cy="266700"/>
+          </a:xfrm>
+          <a:prstGeom prst="roundRect">
+            <a:avLst>
+              <a:gd name="adj" fmla="val 30000"/>
+            </a:avLst>
+          </a:prstGeom>
+          <a:gradFill rotWithShape="1">
+            <a:gsLst>
+              <a:gs pos="0">
+                <a:srgbClr val="EEF4F9"/>
+              </a:gs>
+              <a:gs pos="100000">
+                <a:srgbClr val="DAE7F2"/>
+              </a:gs>
+            </a:gsLst>
+            <a:lin scaled="0" ang="16200000"/>
+          </a:gradFill>
+          <a:ln w="19050">
+            <a:solidFill>
+              <a:srgbClr val="014172"/>
+            </a:solidFill>
+          </a:ln>
+          <a:effectLst/>
+        </p:spPr>
+        <p:txBody>
+          <a:bodyPr rtlCol="0" anchor="ctr"/>
+          <a:lstStyle/>
+          <a:p>
+            <a:pPr algn="ctr"/>
+          </a:p>
+        </p:txBody>
+      </p:sp>
+      <p:sp>
+        <p:nvSpPr>
+          <p:cNvPr id="38" name="TextBox 37"/>
+          <p:cNvSpPr txBox="1"/>
+          <p:nvPr/>
+        </p:nvSpPr>
+        <p:spPr>
+          <a:xfrm>
+            <a:off x="704850" y="4705350"/>
+            <a:ext cx="3333750" cy="228600"/>
+          </a:xfrm>
+          <a:prstGeom prst="rect">
+            <a:avLst/>
+          </a:prstGeom>
+          <a:noFill/>
+        </p:spPr>
+        <p:txBody>
+          <a:bodyPr wrap="none" lIns="0" rIns="0" tIns="0" bIns="0" anchor="ctr">
+            <a:spAutoFit/>
+          </a:bodyPr>
+          <a:lstStyle/>
+          <a:p>
+            <a:pPr algn="l"/>
+            <a:r>
+              <a:rPr sz="1200" b="1">
+                <a:solidFill>
+                  <a:srgbClr val="2E2E33"/>
+                </a:solidFill>
+                <a:latin typeface="Yu Gothic UI"/>
+              </a:rPr>
+              <a:t>長谷川 SWH-12</a:t>
+            </a:r>
+          </a:p>
+        </p:txBody>
+      </p:sp>
+      <p:sp>
+        <p:nvSpPr>
+          <p:cNvPr id="39" name="TextBox 38"/>
+          <p:cNvSpPr txBox="1"/>
+          <p:nvPr/>
+        </p:nvSpPr>
+        <p:spPr>
+          <a:xfrm>
+            <a:off x="704850" y="4933950"/>
+            <a:ext cx="3333750" cy="209550"/>
+          </a:xfrm>
+          <a:prstGeom prst="rect">
+            <a:avLst/>
+          </a:prstGeom>
+          <a:noFill/>
+        </p:spPr>
+        <p:txBody>
+          <a:bodyPr wrap="none" lIns="0" rIns="0" tIns="0" bIns="0" anchor="ctr">
+            <a:spAutoFit/>
+          </a:bodyPr>
+          <a:lstStyle/>
+          <a:p>
+            <a:pPr algn="l"/>
+            <a:r>
+              <a:rPr sz="1050" b="0">
+                <a:solidFill>
+                  <a:srgbClr val="6A717B"/>
+                </a:solidFill>
+                <a:latin typeface="Yu Gothic UI"/>
+              </a:rPr>
+              <a:t>強力型脚立 ／ 0.90m</a:t>
+            </a:r>
+          </a:p>
+        </p:txBody>
+      </p:sp>
+      <p:sp>
+        <p:nvSpPr>
+          <p:cNvPr id="40" name="TextBox 39"/>
+          <p:cNvSpPr txBox="1"/>
+          <p:nvPr/>
+        </p:nvSpPr>
+        <p:spPr>
+          <a:xfrm>
+            <a:off x="9856470" y="4762500"/>
+            <a:ext cx="1047750" cy="266700"/>
+          </a:xfrm>
+          <a:prstGeom prst="rect">
+            <a:avLst/>
+          </a:prstGeom>
+          <a:noFill/>
+        </p:spPr>
+        <p:txBody>
+          <a:bodyPr wrap="none" lIns="0" rIns="0" tIns="0" bIns="0" anchor="ctr">
+            <a:spAutoFit/>
+          </a:bodyPr>
+          <a:lstStyle/>
+          <a:p>
+            <a:pPr algn="l"/>
+            <a:r>
+              <a:rPr sz="1350" b="1">
+                <a:solidFill>
+                  <a:srgbClr val="014172"/>
+                </a:solidFill>
+                <a:latin typeface="Yu Gothic UI"/>
+              </a:rPr>
+              <a:t>7.6kg</a:t>
+            </a:r>
+          </a:p>
+        </p:txBody>
+      </p:sp>
+      <p:sp>
+        <p:nvSpPr>
+          <p:cNvPr id="41" name="Rectangle 40"/>
+          <p:cNvSpPr/>
+          <p:nvPr/>
+        </p:nvSpPr>
+        <p:spPr>
+          <a:xfrm>
+            <a:off x="609600" y="5295900"/>
+            <a:ext cx="10210800" cy="9525"/>
+          </a:xfrm>
+          <a:prstGeom prst="rect">
+            <a:avLst/>
+          </a:prstGeom>
+          <a:solidFill>
+            <a:srgbClr val="E2E7EC"/>
+          </a:solidFill>
+          <a:ln>
+            <a:noFill/>
+          </a:ln>
+          <a:effectLst/>
+        </p:spPr>
+        <p:txBody>
+          <a:bodyPr rtlCol="0" anchor="ctr"/>
+          <a:lstStyle/>
+          <a:p>
+            <a:pPr algn="ctr"/>
+          </a:p>
+        </p:txBody>
+      </p:sp>
+      <p:sp>
+        <p:nvSpPr>
+          <p:cNvPr id="42" name="TextBox 41"/>
+          <p:cNvSpPr txBox="1"/>
+          <p:nvPr/>
+        </p:nvSpPr>
+        <p:spPr>
+          <a:xfrm>
+            <a:off x="609600" y="5429250"/>
+            <a:ext cx="7239000" cy="247650"/>
+          </a:xfrm>
+          <a:prstGeom prst="rect">
+            <a:avLst/>
+          </a:prstGeom>
+          <a:noFill/>
+        </p:spPr>
+        <p:txBody>
+          <a:bodyPr wrap="none" lIns="0" rIns="0" tIns="0" bIns="0" anchor="ctr">
+            <a:spAutoFit/>
+          </a:bodyPr>
+          <a:lstStyle/>
+          <a:p>
+            <a:pPr algn="l"/>
+            <a:r>
+              <a:rPr sz="1425" b="1">
+                <a:solidFill>
+                  <a:srgbClr val="2E2E33"/>
+                </a:solidFill>
+                <a:latin typeface="Yu Gothic UI"/>
+              </a:rPr>
+              <a:t>いちばん軽い2.5kgと、いちばん重い7.6kgで3.0倍の差があります。</a:t>
+            </a:r>
+          </a:p>
+        </p:txBody>
+      </p:sp>
+      <p:sp>
+        <p:nvSpPr>
+          <p:cNvPr id="43" name="TextBox 42"/>
+          <p:cNvSpPr txBox="1"/>
+          <p:nvPr/>
+        </p:nvSpPr>
+        <p:spPr>
+          <a:xfrm>
+            <a:off x="609600" y="5676900"/>
+            <a:ext cx="7620000" cy="209550"/>
+          </a:xfrm>
+          <a:prstGeom prst="rect">
+            <a:avLst/>
+          </a:prstGeom>
+          <a:noFill/>
+        </p:spPr>
+        <p:txBody>
+          <a:bodyPr wrap="none" lIns="0" rIns="0" tIns="0" bIns="0" anchor="ctr">
+            <a:spAutoFit/>
+          </a:bodyPr>
+          <a:lstStyle/>
+          <a:p>
+            <a:pPr algn="l"/>
+            <a:r>
+              <a:rPr sz="1050" b="0">
+                <a:solidFill>
+                  <a:srgbClr val="6A717B"/>
+                </a:solidFill>
+                <a:latin typeface="Yu Gothic UI"/>
+              </a:rPr>
+              <a:t>メーカー公表値からの計算です（実測ではありません）</a:t>
+            </a:r>
+          </a:p>
+        </p:txBody>
+      </p:sp>
+      <p:sp>
+        <p:nvSpPr>
+          <p:cNvPr id="44" name="TextBox 43"/>
+          <p:cNvSpPr txBox="1"/>
+          <p:nvPr/>
+        </p:nvSpPr>
+        <p:spPr>
+          <a:xfrm>
+            <a:off x="7962900" y="5676900"/>
+            <a:ext cx="2857500" cy="209550"/>
+          </a:xfrm>
+          <a:prstGeom prst="rect">
+            <a:avLst/>
+          </a:prstGeom>
+          <a:noFill/>
+        </p:spPr>
+        <p:txBody>
+          <a:bodyPr wrap="none" lIns="0" rIns="0" tIns="0" bIns="0" anchor="ctr">
+            <a:spAutoFit/>
+          </a:bodyPr>
+          <a:lstStyle/>
+          <a:p>
+            <a:pPr algn="r"/>
+            <a:r>
+              <a:rPr sz="1050" b="0">
+                <a:solidFill>
+                  <a:srgbClr val="6A717B"/>
+                </a:solidFill>
+                <a:latin typeface="Yu Gothic UI"/>
+              </a:rPr>
+              <a:t>寸法で選ぶ　sunpou.nexeed-lab.com</a:t>
+            </a:r>
+          </a:p>
+        </p:txBody>
+      </p:sp>
+    </p:spTree>
+  </p:cSld>
+  <p:clrMapOvr>
+    <a:masterClrMapping/>
+  </p:clrMapOvr>
+</p:sld>
+</file>
+
 <file path=ppt/slides/slide3.xml><?xml version="1.0" encoding="utf-8"?>
 <p:sld xmlns:a="http://schemas.openxmlformats.org/drawingml/2006/main" xmlns:p="http://schemas.openxmlformats.org/presentationml/2006/main" xmlns:r="http://schemas.openxmlformats.org/officeDocument/2006/relationships">
   <p:cSld>
@@ -27385,6 +32056,1907 @@
       <p:sp>
         <p:nvSpPr>
           <p:cNvPr id="36" name="TextBox 35"/>
+          <p:cNvSpPr txBox="1"/>
+          <p:nvPr/>
+        </p:nvSpPr>
+        <p:spPr>
+          <a:xfrm>
+            <a:off x="7962900" y="5676900"/>
+            <a:ext cx="2857500" cy="209550"/>
+          </a:xfrm>
+          <a:prstGeom prst="rect">
+            <a:avLst/>
+          </a:prstGeom>
+          <a:noFill/>
+        </p:spPr>
+        <p:txBody>
+          <a:bodyPr wrap="none" lIns="0" rIns="0" tIns="0" bIns="0" anchor="ctr">
+            <a:spAutoFit/>
+          </a:bodyPr>
+          <a:lstStyle/>
+          <a:p>
+            <a:pPr algn="r"/>
+            <a:r>
+              <a:rPr sz="1050" b="0">
+                <a:solidFill>
+                  <a:srgbClr val="6A717B"/>
+                </a:solidFill>
+                <a:latin typeface="Yu Gothic UI"/>
+              </a:rPr>
+              <a:t>寸法で選ぶ　sunpou.nexeed-lab.com</a:t>
+            </a:r>
+          </a:p>
+        </p:txBody>
+      </p:sp>
+    </p:spTree>
+  </p:cSld>
+  <p:clrMapOvr>
+    <a:masterClrMapping/>
+  </p:clrMapOvr>
+</p:sld>
+</file>
+
+<file path=ppt/slides/slide30.xml><?xml version="1.0" encoding="utf-8"?>
+<p:sld xmlns:a="http://schemas.openxmlformats.org/drawingml/2006/main" xmlns:p="http://schemas.openxmlformats.org/presentationml/2006/main" xmlns:r="http://schemas.openxmlformats.org/officeDocument/2006/relationships">
+  <p:cSld>
+    <p:spTree>
+      <p:nvGrpSpPr>
+        <p:cNvPr id="1" name=""/>
+        <p:cNvGrpSpPr/>
+        <p:nvPr/>
+      </p:nvGrpSpPr>
+      <p:grpSpPr/>
+      <p:sp>
+        <p:nvSpPr>
+          <p:cNvPr id="2" name="Rectangle 1"/>
+          <p:cNvSpPr/>
+          <p:nvPr/>
+        </p:nvSpPr>
+        <p:spPr>
+          <a:xfrm>
+            <a:off x="0" y="0"/>
+            <a:ext cx="11430000" cy="6000750"/>
+          </a:xfrm>
+          <a:prstGeom prst="rect">
+            <a:avLst/>
+          </a:prstGeom>
+          <a:solidFill>
+            <a:srgbClr val="FCFCFC"/>
+          </a:solidFill>
+          <a:ln>
+            <a:noFill/>
+          </a:ln>
+          <a:effectLst/>
+        </p:spPr>
+        <p:txBody>
+          <a:bodyPr rtlCol="0" anchor="ctr"/>
+          <a:lstStyle/>
+          <a:p>
+            <a:pPr algn="ctr"/>
+          </a:p>
+        </p:txBody>
+      </p:sp>
+      <p:sp>
+        <p:nvSpPr>
+          <p:cNvPr id="3" name="Rectangle 2"/>
+          <p:cNvSpPr/>
+          <p:nvPr/>
+        </p:nvSpPr>
+        <p:spPr>
+          <a:xfrm>
+            <a:off x="0" y="0"/>
+            <a:ext cx="114300" cy="6000750"/>
+          </a:xfrm>
+          <a:prstGeom prst="rect">
+            <a:avLst/>
+          </a:prstGeom>
+          <a:solidFill>
+            <a:srgbClr val="014172"/>
+          </a:solidFill>
+          <a:ln>
+            <a:noFill/>
+          </a:ln>
+          <a:effectLst/>
+        </p:spPr>
+        <p:txBody>
+          <a:bodyPr rtlCol="0" anchor="ctr"/>
+          <a:lstStyle/>
+          <a:p>
+            <a:pPr algn="ctr"/>
+          </a:p>
+        </p:txBody>
+      </p:sp>
+      <p:sp>
+        <p:nvSpPr>
+          <p:cNvPr id="4" name="Rectangle 3"/>
+          <p:cNvSpPr/>
+          <p:nvPr/>
+        </p:nvSpPr>
+        <p:spPr>
+          <a:xfrm>
+            <a:off x="0" y="0"/>
+            <a:ext cx="11430000" cy="1504950"/>
+          </a:xfrm>
+          <a:prstGeom prst="rect">
+            <a:avLst/>
+          </a:prstGeom>
+          <a:solidFill>
+            <a:srgbClr val="014172"/>
+          </a:solidFill>
+          <a:ln>
+            <a:noFill/>
+          </a:ln>
+          <a:effectLst/>
+        </p:spPr>
+        <p:txBody>
+          <a:bodyPr rtlCol="0" anchor="ctr"/>
+          <a:lstStyle/>
+          <a:p>
+            <a:pPr algn="ctr"/>
+          </a:p>
+        </p:txBody>
+      </p:sp>
+      <p:sp>
+        <p:nvSpPr>
+          <p:cNvPr id="5" name="TextBox 4"/>
+          <p:cNvSpPr txBox="1"/>
+          <p:nvPr/>
+        </p:nvSpPr>
+        <p:spPr>
+          <a:xfrm>
+            <a:off x="609600" y="361950"/>
+            <a:ext cx="7429500" cy="476250"/>
+          </a:xfrm>
+          <a:prstGeom prst="rect">
+            <a:avLst/>
+          </a:prstGeom>
+          <a:noFill/>
+        </p:spPr>
+        <p:txBody>
+          <a:bodyPr wrap="none" lIns="0" rIns="0" tIns="0" bIns="0" anchor="ctr">
+            <a:spAutoFit/>
+          </a:bodyPr>
+          <a:lstStyle/>
+          <a:p>
+            <a:pPr algn="l"/>
+            <a:r>
+              <a:rPr sz="3000" b="1">
+                <a:solidFill>
+                  <a:srgbClr val="FFFFFF"/>
+                </a:solidFill>
+                <a:latin typeface="Yu Gothic UI"/>
+              </a:rPr>
+              <a:t>階段では前脚と後脚が3段離れます</a:t>
+            </a:r>
+          </a:p>
+        </p:txBody>
+      </p:sp>
+      <p:sp>
+        <p:nvSpPr>
+          <p:cNvPr id="6" name="TextBox 5"/>
+          <p:cNvSpPr txBox="1"/>
+          <p:nvPr/>
+        </p:nvSpPr>
+        <p:spPr>
+          <a:xfrm>
+            <a:off x="609600" y="876300"/>
+            <a:ext cx="7429500" cy="247650"/>
+          </a:xfrm>
+          <a:prstGeom prst="rect">
+            <a:avLst/>
+          </a:prstGeom>
+          <a:noFill/>
+        </p:spPr>
+        <p:txBody>
+          <a:bodyPr wrap="none" lIns="0" rIns="0" tIns="0" bIns="0" anchor="ctr">
+            <a:spAutoFit/>
+          </a:bodyPr>
+          <a:lstStyle/>
+          <a:p>
+            <a:pPr algn="l"/>
+            <a:r>
+              <a:rPr sz="1425" b="0">
+                <a:solidFill>
+                  <a:srgbClr val="DAE7F2"/>
+                </a:solidFill>
+                <a:latin typeface="Yu Gothic UI"/>
+              </a:rPr>
+              <a:t>踏面15cm・蹴上げ23cm（住宅の法定の限界値）／ 脚立の設置奥行 55.2cm</a:t>
+            </a:r>
+          </a:p>
+        </p:txBody>
+      </p:sp>
+      <p:sp>
+        <p:nvSpPr>
+          <p:cNvPr id="7" name="Rounded Rectangle 6"/>
+          <p:cNvSpPr/>
+          <p:nvPr/>
+        </p:nvSpPr>
+        <p:spPr>
+          <a:xfrm>
+            <a:off x="8305800" y="247650"/>
+            <a:ext cx="2514600" cy="1009650"/>
+          </a:xfrm>
+          <a:prstGeom prst="roundRect">
+            <a:avLst>
+              <a:gd name="adj" fmla="val 12000"/>
+            </a:avLst>
+          </a:prstGeom>
+          <a:solidFill>
+            <a:srgbClr val="FFFFFF"/>
+          </a:solidFill>
+          <a:ln>
+            <a:noFill/>
+          </a:ln>
+          <a:effectLst>
+            <a:outerShdw blurRad="254000" dist="63500" dir="5400000" rotWithShape="0">
+              <a:srgbClr val="0B2B45">
+                <a:alpha val="30000"/>
+              </a:srgbClr>
+            </a:outerShdw>
+          </a:effectLst>
+        </p:spPr>
+        <p:txBody>
+          <a:bodyPr rtlCol="0" anchor="ctr"/>
+          <a:lstStyle/>
+          <a:p>
+            <a:pPr algn="ctr"/>
+          </a:p>
+        </p:txBody>
+      </p:sp>
+      <p:sp>
+        <p:nvSpPr>
+          <p:cNvPr id="8" name="TextBox 7"/>
+          <p:cNvSpPr txBox="1"/>
+          <p:nvPr/>
+        </p:nvSpPr>
+        <p:spPr>
+          <a:xfrm>
+            <a:off x="8515350" y="400050"/>
+            <a:ext cx="2133600" cy="209550"/>
+          </a:xfrm>
+          <a:prstGeom prst="rect">
+            <a:avLst/>
+          </a:prstGeom>
+          <a:noFill/>
+        </p:spPr>
+        <p:txBody>
+          <a:bodyPr wrap="none" lIns="0" rIns="0" tIns="0" bIns="0" anchor="ctr">
+            <a:spAutoFit/>
+          </a:bodyPr>
+          <a:lstStyle/>
+          <a:p>
+            <a:pPr algn="l"/>
+            <a:r>
+              <a:rPr sz="1125" b="0">
+                <a:solidFill>
+                  <a:srgbClr val="6A717B"/>
+                </a:solidFill>
+                <a:latin typeface="Yu Gothic UI"/>
+              </a:rPr>
+              <a:t>足りない分</a:t>
+            </a:r>
+          </a:p>
+        </p:txBody>
+      </p:sp>
+      <p:sp>
+        <p:nvSpPr>
+          <p:cNvPr id="9" name="TextBox 8"/>
+          <p:cNvSpPr txBox="1"/>
+          <p:nvPr/>
+        </p:nvSpPr>
+        <p:spPr>
+          <a:xfrm>
+            <a:off x="8515350" y="647700"/>
+            <a:ext cx="2133600" cy="533400"/>
+          </a:xfrm>
+          <a:prstGeom prst="rect">
+            <a:avLst/>
+          </a:prstGeom>
+          <a:noFill/>
+        </p:spPr>
+        <p:txBody>
+          <a:bodyPr wrap="none" lIns="0" rIns="0" tIns="0" bIns="0" anchor="ctr">
+            <a:spAutoFit/>
+          </a:bodyPr>
+          <a:lstStyle/>
+          <a:p>
+            <a:pPr algn="l"/>
+            <a:r>
+              <a:rPr sz="3900" b="1">
+                <a:solidFill>
+                  <a:srgbClr val="014172"/>
+                </a:solidFill>
+                <a:latin typeface="Yu Gothic UI"/>
+              </a:rPr>
+              <a:t>38</a:t>
+            </a:r>
+            <a:r>
+              <a:rPr sz="1950" b="1">
+                <a:solidFill>
+                  <a:srgbClr val="014172"/>
+                </a:solidFill>
+                <a:latin typeface="Yu Gothic UI"/>
+              </a:rPr>
+              <a:t>cm</a:t>
+            </a:r>
+          </a:p>
+        </p:txBody>
+      </p:sp>
+      <p:sp>
+        <p:nvSpPr>
+          <p:cNvPr id="10" name="Rectangle 9"/>
+          <p:cNvSpPr/>
+          <p:nvPr/>
+        </p:nvSpPr>
+        <p:spPr>
+          <a:xfrm>
+            <a:off x="1047750" y="3870960"/>
+            <a:ext cx="476250" cy="720090"/>
+          </a:xfrm>
+          <a:prstGeom prst="rect">
+            <a:avLst/>
+          </a:prstGeom>
+          <a:solidFill>
+            <a:srgbClr val="F2F5F8"/>
+          </a:solidFill>
+          <a:ln w="19050">
+            <a:solidFill>
+              <a:srgbClr val="DAE7F2"/>
+            </a:solidFill>
+          </a:ln>
+          <a:effectLst/>
+        </p:spPr>
+        <p:txBody>
+          <a:bodyPr rtlCol="0" anchor="ctr"/>
+          <a:lstStyle/>
+          <a:p>
+            <a:pPr algn="ctr"/>
+          </a:p>
+        </p:txBody>
+      </p:sp>
+      <p:sp>
+        <p:nvSpPr>
+          <p:cNvPr id="11" name="Rectangle 10"/>
+          <p:cNvSpPr/>
+          <p:nvPr/>
+        </p:nvSpPr>
+        <p:spPr>
+          <a:xfrm>
+            <a:off x="1504950" y="3169920"/>
+            <a:ext cx="476250" cy="720090"/>
+          </a:xfrm>
+          <a:prstGeom prst="rect">
+            <a:avLst/>
+          </a:prstGeom>
+          <a:solidFill>
+            <a:srgbClr val="F2F5F8"/>
+          </a:solidFill>
+          <a:ln w="19050">
+            <a:solidFill>
+              <a:srgbClr val="DAE7F2"/>
+            </a:solidFill>
+          </a:ln>
+          <a:effectLst/>
+        </p:spPr>
+        <p:txBody>
+          <a:bodyPr rtlCol="0" anchor="ctr"/>
+          <a:lstStyle/>
+          <a:p>
+            <a:pPr algn="ctr"/>
+          </a:p>
+        </p:txBody>
+      </p:sp>
+      <p:sp>
+        <p:nvSpPr>
+          <p:cNvPr id="12" name="Rectangle 11"/>
+          <p:cNvSpPr/>
+          <p:nvPr/>
+        </p:nvSpPr>
+        <p:spPr>
+          <a:xfrm>
+            <a:off x="1962150" y="2468880"/>
+            <a:ext cx="476250" cy="720090"/>
+          </a:xfrm>
+          <a:prstGeom prst="rect">
+            <a:avLst/>
+          </a:prstGeom>
+          <a:solidFill>
+            <a:srgbClr val="F2F5F8"/>
+          </a:solidFill>
+          <a:ln w="19050">
+            <a:solidFill>
+              <a:srgbClr val="DAE7F2"/>
+            </a:solidFill>
+          </a:ln>
+          <a:effectLst/>
+        </p:spPr>
+        <p:txBody>
+          <a:bodyPr rtlCol="0" anchor="ctr"/>
+          <a:lstStyle/>
+          <a:p>
+            <a:pPr algn="ctr"/>
+          </a:p>
+        </p:txBody>
+      </p:sp>
+      <p:sp>
+        <p:nvSpPr>
+          <p:cNvPr id="13" name="Rectangle 12"/>
+          <p:cNvSpPr/>
+          <p:nvPr/>
+        </p:nvSpPr>
+        <p:spPr>
+          <a:xfrm>
+            <a:off x="2419350" y="1767840"/>
+            <a:ext cx="476250" cy="720090"/>
+          </a:xfrm>
+          <a:prstGeom prst="rect">
+            <a:avLst/>
+          </a:prstGeom>
+          <a:solidFill>
+            <a:srgbClr val="F2F5F8"/>
+          </a:solidFill>
+          <a:ln w="19050">
+            <a:solidFill>
+              <a:srgbClr val="DAE7F2"/>
+            </a:solidFill>
+          </a:ln>
+          <a:effectLst/>
+        </p:spPr>
+        <p:txBody>
+          <a:bodyPr rtlCol="0" anchor="ctr"/>
+          <a:lstStyle/>
+          <a:p>
+            <a:pPr algn="ctr"/>
+          </a:p>
+        </p:txBody>
+      </p:sp>
+      <p:sp>
+        <p:nvSpPr>
+          <p:cNvPr id="14" name="Rectangle 13"/>
+          <p:cNvSpPr/>
+          <p:nvPr/>
+        </p:nvSpPr>
+        <p:spPr>
+          <a:xfrm>
+            <a:off x="914400" y="2468880"/>
+            <a:ext cx="47625" cy="2103120"/>
+          </a:xfrm>
+          <a:prstGeom prst="rect">
+            <a:avLst/>
+          </a:prstGeom>
+          <a:solidFill>
+            <a:srgbClr val="A8410F"/>
+          </a:solidFill>
+          <a:ln>
+            <a:noFill/>
+          </a:ln>
+          <a:effectLst/>
+        </p:spPr>
+        <p:txBody>
+          <a:bodyPr rtlCol="0" anchor="ctr"/>
+          <a:lstStyle/>
+          <a:p>
+            <a:pPr algn="ctr"/>
+          </a:p>
+        </p:txBody>
+      </p:sp>
+      <p:sp>
+        <p:nvSpPr>
+          <p:cNvPr id="15" name="TextBox 14"/>
+          <p:cNvSpPr txBox="1"/>
+          <p:nvPr/>
+        </p:nvSpPr>
+        <p:spPr>
+          <a:xfrm>
+            <a:off x="990600" y="2164080"/>
+            <a:ext cx="1905000" cy="247650"/>
+          </a:xfrm>
+          <a:prstGeom prst="rect">
+            <a:avLst/>
+          </a:prstGeom>
+          <a:noFill/>
+        </p:spPr>
+        <p:txBody>
+          <a:bodyPr wrap="none" lIns="0" rIns="0" tIns="0" bIns="0" anchor="ctr">
+            <a:spAutoFit/>
+          </a:bodyPr>
+          <a:lstStyle/>
+          <a:p>
+            <a:pPr algn="l"/>
+            <a:r>
+              <a:rPr sz="1425" b="1">
+                <a:solidFill>
+                  <a:srgbClr val="A8410F"/>
+                </a:solidFill>
+                <a:latin typeface="Yu Gothic UI"/>
+              </a:rPr>
+              <a:t>69cm</a:t>
+            </a:r>
+          </a:p>
+        </p:txBody>
+      </p:sp>
+      <p:sp>
+        <p:nvSpPr>
+          <p:cNvPr id="16" name="Rectangle 15"/>
+          <p:cNvSpPr/>
+          <p:nvPr/>
+        </p:nvSpPr>
+        <p:spPr>
+          <a:xfrm>
+            <a:off x="3238500" y="3627120"/>
+            <a:ext cx="47625" cy="944880"/>
+          </a:xfrm>
+          <a:prstGeom prst="rect">
+            <a:avLst/>
+          </a:prstGeom>
+          <a:solidFill>
+            <a:srgbClr val="014172"/>
+          </a:solidFill>
+          <a:ln>
+            <a:noFill/>
+          </a:ln>
+          <a:effectLst/>
+        </p:spPr>
+        <p:txBody>
+          <a:bodyPr rtlCol="0" anchor="ctr"/>
+          <a:lstStyle/>
+          <a:p>
+            <a:pPr algn="ctr"/>
+          </a:p>
+        </p:txBody>
+      </p:sp>
+      <p:sp>
+        <p:nvSpPr>
+          <p:cNvPr id="17" name="TextBox 16"/>
+          <p:cNvSpPr txBox="1"/>
+          <p:nvPr/>
+        </p:nvSpPr>
+        <p:spPr>
+          <a:xfrm>
+            <a:off x="3352800" y="3322320"/>
+            <a:ext cx="1905000" cy="247650"/>
+          </a:xfrm>
+          <a:prstGeom prst="rect">
+            <a:avLst/>
+          </a:prstGeom>
+          <a:noFill/>
+        </p:spPr>
+        <p:txBody>
+          <a:bodyPr wrap="none" lIns="0" rIns="0" tIns="0" bIns="0" anchor="ctr">
+            <a:spAutoFit/>
+          </a:bodyPr>
+          <a:lstStyle/>
+          <a:p>
+            <a:pPr algn="l"/>
+            <a:r>
+              <a:rPr sz="1425" b="1">
+                <a:solidFill>
+                  <a:srgbClr val="014172"/>
+                </a:solidFill>
+                <a:latin typeface="Yu Gothic UI"/>
+              </a:rPr>
+              <a:t>31cm</a:t>
+            </a:r>
+          </a:p>
+        </p:txBody>
+      </p:sp>
+      <p:sp>
+        <p:nvSpPr>
+          <p:cNvPr id="18" name="Rounded Rectangle 17"/>
+          <p:cNvSpPr/>
+          <p:nvPr/>
+        </p:nvSpPr>
+        <p:spPr>
+          <a:xfrm>
+            <a:off x="5143500" y="1866900"/>
+            <a:ext cx="4762500" cy="742950"/>
+          </a:xfrm>
+          <a:prstGeom prst="roundRect">
+            <a:avLst>
+              <a:gd name="adj" fmla="val 6000"/>
+            </a:avLst>
+          </a:prstGeom>
+          <a:solidFill>
+            <a:srgbClr val="FDF2E4"/>
+          </a:solidFill>
+          <a:ln w="19050">
+            <a:solidFill>
+              <a:srgbClr val="A8410F"/>
+            </a:solidFill>
+          </a:ln>
+          <a:effectLst/>
+        </p:spPr>
+        <p:txBody>
+          <a:bodyPr rtlCol="0" anchor="ctr"/>
+          <a:lstStyle/>
+          <a:p>
+            <a:pPr algn="ctr"/>
+          </a:p>
+        </p:txBody>
+      </p:sp>
+      <p:sp>
+        <p:nvSpPr>
+          <p:cNvPr id="19" name="TextBox 18"/>
+          <p:cNvSpPr txBox="1"/>
+          <p:nvPr/>
+        </p:nvSpPr>
+        <p:spPr>
+          <a:xfrm>
+            <a:off x="5334000" y="2038350"/>
+            <a:ext cx="4381500" cy="247650"/>
+          </a:xfrm>
+          <a:prstGeom prst="rect">
+            <a:avLst/>
+          </a:prstGeom>
+          <a:noFill/>
+        </p:spPr>
+        <p:txBody>
+          <a:bodyPr wrap="none" lIns="0" rIns="0" tIns="0" bIns="0" anchor="ctr">
+            <a:spAutoFit/>
+          </a:bodyPr>
+          <a:lstStyle/>
+          <a:p>
+            <a:pPr algn="l"/>
+            <a:r>
+              <a:rPr sz="1500" b="1">
+                <a:solidFill>
+                  <a:srgbClr val="A8410F"/>
+                </a:solidFill>
+                <a:latin typeface="Yu Gothic UI"/>
+              </a:rPr>
+              <a:t>必要な高低差 69cm</a:t>
+            </a:r>
+          </a:p>
+        </p:txBody>
+      </p:sp>
+      <p:sp>
+        <p:nvSpPr>
+          <p:cNvPr id="20" name="TextBox 19"/>
+          <p:cNvSpPr txBox="1"/>
+          <p:nvPr/>
+        </p:nvSpPr>
+        <p:spPr>
+          <a:xfrm>
+            <a:off x="5334000" y="2324100"/>
+            <a:ext cx="4381500" cy="228600"/>
+          </a:xfrm>
+          <a:prstGeom prst="rect">
+            <a:avLst/>
+          </a:prstGeom>
+          <a:noFill/>
+        </p:spPr>
+        <p:txBody>
+          <a:bodyPr wrap="none" lIns="0" rIns="0" tIns="0" bIns="0" anchor="ctr">
+            <a:spAutoFit/>
+          </a:bodyPr>
+          <a:lstStyle/>
+          <a:p>
+            <a:pPr algn="l"/>
+            <a:r>
+              <a:rPr sz="1125" b="0">
+                <a:solidFill>
+                  <a:srgbClr val="6A717B"/>
+                </a:solidFill>
+                <a:latin typeface="Yu Gothic UI"/>
+              </a:rPr>
+              <a:t>3段離れる × 蹴上げ23cm</a:t>
+            </a:r>
+          </a:p>
+        </p:txBody>
+      </p:sp>
+      <p:sp>
+        <p:nvSpPr>
+          <p:cNvPr id="21" name="Rounded Rectangle 20"/>
+          <p:cNvSpPr/>
+          <p:nvPr/>
+        </p:nvSpPr>
+        <p:spPr>
+          <a:xfrm>
+            <a:off x="5143500" y="2781300"/>
+            <a:ext cx="4762500" cy="742950"/>
+          </a:xfrm>
+          <a:prstGeom prst="roundRect">
+            <a:avLst>
+              <a:gd name="adj" fmla="val 6000"/>
+            </a:avLst>
+          </a:prstGeom>
+          <a:solidFill>
+            <a:srgbClr val="F2F5F8"/>
+          </a:solidFill>
+          <a:ln>
+            <a:noFill/>
+          </a:ln>
+          <a:effectLst/>
+        </p:spPr>
+        <p:txBody>
+          <a:bodyPr rtlCol="0" anchor="ctr"/>
+          <a:lstStyle/>
+          <a:p>
+            <a:pPr algn="ctr"/>
+          </a:p>
+        </p:txBody>
+      </p:sp>
+      <p:sp>
+        <p:nvSpPr>
+          <p:cNvPr id="22" name="TextBox 21"/>
+          <p:cNvSpPr txBox="1"/>
+          <p:nvPr/>
+        </p:nvSpPr>
+        <p:spPr>
+          <a:xfrm>
+            <a:off x="5334000" y="2952750"/>
+            <a:ext cx="4381500" cy="247650"/>
+          </a:xfrm>
+          <a:prstGeom prst="rect">
+            <a:avLst/>
+          </a:prstGeom>
+          <a:noFill/>
+        </p:spPr>
+        <p:txBody>
+          <a:bodyPr wrap="none" lIns="0" rIns="0" tIns="0" bIns="0" anchor="ctr">
+            <a:spAutoFit/>
+          </a:bodyPr>
+          <a:lstStyle/>
+          <a:p>
+            <a:pPr algn="l"/>
+            <a:r>
+              <a:rPr sz="1500" b="1">
+                <a:solidFill>
+                  <a:srgbClr val="2E2E33"/>
+                </a:solidFill>
+                <a:latin typeface="Yu Gothic UI"/>
+              </a:rPr>
+              <a:t>伸縮脚で調整できるのは 31cm</a:t>
+            </a:r>
+          </a:p>
+        </p:txBody>
+      </p:sp>
+      <p:sp>
+        <p:nvSpPr>
+          <p:cNvPr id="23" name="TextBox 22"/>
+          <p:cNvSpPr txBox="1"/>
+          <p:nvPr/>
+        </p:nvSpPr>
+        <p:spPr>
+          <a:xfrm>
+            <a:off x="5334000" y="3238500"/>
+            <a:ext cx="4381500" cy="228600"/>
+          </a:xfrm>
+          <a:prstGeom prst="rect">
+            <a:avLst/>
+          </a:prstGeom>
+          <a:noFill/>
+        </p:spPr>
+        <p:txBody>
+          <a:bodyPr wrap="none" lIns="0" rIns="0" tIns="0" bIns="0" anchor="ctr">
+            <a:spAutoFit/>
+          </a:bodyPr>
+          <a:lstStyle/>
+          <a:p>
+            <a:pPr algn="l"/>
+            <a:r>
+              <a:rPr sz="1125" b="0">
+                <a:solidFill>
+                  <a:srgbClr val="6A717B"/>
+                </a:solidFill>
+                <a:latin typeface="Yu Gothic UI"/>
+              </a:rPr>
+              <a:t>ピカ スタッピー SXJ-90A の公表値</a:t>
+            </a:r>
+          </a:p>
+        </p:txBody>
+      </p:sp>
+      <p:sp>
+        <p:nvSpPr>
+          <p:cNvPr id="24" name="TextBox 23"/>
+          <p:cNvSpPr txBox="1"/>
+          <p:nvPr/>
+        </p:nvSpPr>
+        <p:spPr>
+          <a:xfrm>
+            <a:off x="5334000" y="3810000"/>
+            <a:ext cx="4381500" cy="285750"/>
+          </a:xfrm>
+          <a:prstGeom prst="rect">
+            <a:avLst/>
+          </a:prstGeom>
+          <a:noFill/>
+        </p:spPr>
+        <p:txBody>
+          <a:bodyPr wrap="none" lIns="0" rIns="0" tIns="0" bIns="0" anchor="ctr">
+            <a:spAutoFit/>
+          </a:bodyPr>
+          <a:lstStyle/>
+          <a:p>
+            <a:pPr algn="l"/>
+            <a:r>
+              <a:rPr sz="1800" b="1">
+                <a:solidFill>
+                  <a:srgbClr val="A8410F"/>
+                </a:solidFill>
+                <a:latin typeface="Yu Gothic UI"/>
+              </a:rPr>
+              <a:t>38cm 足りません</a:t>
+            </a:r>
+          </a:p>
+        </p:txBody>
+      </p:sp>
+      <p:sp>
+        <p:nvSpPr>
+          <p:cNvPr id="25" name="TextBox 24"/>
+          <p:cNvSpPr txBox="1"/>
+          <p:nvPr/>
+        </p:nvSpPr>
+        <p:spPr>
+          <a:xfrm>
+            <a:off x="5334000" y="4191000"/>
+            <a:ext cx="4953000" cy="228600"/>
+          </a:xfrm>
+          <a:prstGeom prst="rect">
+            <a:avLst/>
+          </a:prstGeom>
+          <a:noFill/>
+        </p:spPr>
+        <p:txBody>
+          <a:bodyPr wrap="none" lIns="0" rIns="0" tIns="0" bIns="0" anchor="ctr">
+            <a:spAutoFit/>
+          </a:bodyPr>
+          <a:lstStyle/>
+          <a:p>
+            <a:pPr algn="l"/>
+            <a:r>
+              <a:rPr sz="1125" b="0">
+                <a:solidFill>
+                  <a:srgbClr val="6A717B"/>
+                </a:solidFill>
+                <a:latin typeface="Yu Gothic UI"/>
+              </a:rPr>
+              <a:t>踏面が広い階段でも2段離れるので、</a:t>
+            </a:r>
+          </a:p>
+        </p:txBody>
+      </p:sp>
+      <p:sp>
+        <p:nvSpPr>
+          <p:cNvPr id="26" name="TextBox 25"/>
+          <p:cNvSpPr txBox="1"/>
+          <p:nvPr/>
+        </p:nvSpPr>
+        <p:spPr>
+          <a:xfrm>
+            <a:off x="5334000" y="4457700"/>
+            <a:ext cx="4953000" cy="228600"/>
+          </a:xfrm>
+          <a:prstGeom prst="rect">
+            <a:avLst/>
+          </a:prstGeom>
+          <a:noFill/>
+        </p:spPr>
+        <p:txBody>
+          <a:bodyPr wrap="none" lIns="0" rIns="0" tIns="0" bIns="0" anchor="ctr">
+            <a:spAutoFit/>
+          </a:bodyPr>
+          <a:lstStyle/>
+          <a:p>
+            <a:pPr algn="l"/>
+            <a:r>
+              <a:rPr sz="1125" b="0">
+                <a:solidFill>
+                  <a:srgbClr val="6A717B"/>
+                </a:solidFill>
+                <a:latin typeface="Yu Gothic UI"/>
+              </a:rPr>
+              <a:t>必要なのは32cm以上でした</a:t>
+            </a:r>
+          </a:p>
+        </p:txBody>
+      </p:sp>
+      <p:sp>
+        <p:nvSpPr>
+          <p:cNvPr id="27" name="Rectangle 26"/>
+          <p:cNvSpPr/>
+          <p:nvPr/>
+        </p:nvSpPr>
+        <p:spPr>
+          <a:xfrm>
+            <a:off x="609600" y="5295900"/>
+            <a:ext cx="10210800" cy="9525"/>
+          </a:xfrm>
+          <a:prstGeom prst="rect">
+            <a:avLst/>
+          </a:prstGeom>
+          <a:solidFill>
+            <a:srgbClr val="E2E7EC"/>
+          </a:solidFill>
+          <a:ln>
+            <a:noFill/>
+          </a:ln>
+          <a:effectLst/>
+        </p:spPr>
+        <p:txBody>
+          <a:bodyPr rtlCol="0" anchor="ctr"/>
+          <a:lstStyle/>
+          <a:p>
+            <a:pPr algn="ctr"/>
+          </a:p>
+        </p:txBody>
+      </p:sp>
+      <p:sp>
+        <p:nvSpPr>
+          <p:cNvPr id="28" name="TextBox 27"/>
+          <p:cNvSpPr txBox="1"/>
+          <p:nvPr/>
+        </p:nvSpPr>
+        <p:spPr>
+          <a:xfrm>
+            <a:off x="609600" y="5429250"/>
+            <a:ext cx="7239000" cy="247650"/>
+          </a:xfrm>
+          <a:prstGeom prst="rect">
+            <a:avLst/>
+          </a:prstGeom>
+          <a:noFill/>
+        </p:spPr>
+        <p:txBody>
+          <a:bodyPr wrap="none" lIns="0" rIns="0" tIns="0" bIns="0" anchor="ctr">
+            <a:spAutoFit/>
+          </a:bodyPr>
+          <a:lstStyle/>
+          <a:p>
+            <a:pPr algn="l"/>
+            <a:r>
+              <a:rPr sz="1425" b="1">
+                <a:solidFill>
+                  <a:srgbClr val="2E2E33"/>
+                </a:solidFill>
+                <a:latin typeface="Yu Gothic UI"/>
+              </a:rPr>
+              <a:t>伸縮脚では、住宅の階段の高低差に届きません。</a:t>
+            </a:r>
+          </a:p>
+        </p:txBody>
+      </p:sp>
+      <p:sp>
+        <p:nvSpPr>
+          <p:cNvPr id="29" name="TextBox 28"/>
+          <p:cNvSpPr txBox="1"/>
+          <p:nvPr/>
+        </p:nvSpPr>
+        <p:spPr>
+          <a:xfrm>
+            <a:off x="609600" y="5676900"/>
+            <a:ext cx="7620000" cy="209550"/>
+          </a:xfrm>
+          <a:prstGeom prst="rect">
+            <a:avLst/>
+          </a:prstGeom>
+          <a:noFill/>
+        </p:spPr>
+        <p:txBody>
+          <a:bodyPr wrap="none" lIns="0" rIns="0" tIns="0" bIns="0" anchor="ctr">
+            <a:spAutoFit/>
+          </a:bodyPr>
+          <a:lstStyle/>
+          <a:p>
+            <a:pPr algn="l"/>
+            <a:r>
+              <a:rPr sz="1050" b="0">
+                <a:solidFill>
+                  <a:srgbClr val="6A717B"/>
+                </a:solidFill>
+                <a:latin typeface="Yu Gothic UI"/>
+              </a:rPr>
+              <a:t>メーカー公表値からの計算です（実測ではありません）</a:t>
+            </a:r>
+          </a:p>
+        </p:txBody>
+      </p:sp>
+      <p:sp>
+        <p:nvSpPr>
+          <p:cNvPr id="30" name="TextBox 29"/>
+          <p:cNvSpPr txBox="1"/>
+          <p:nvPr/>
+        </p:nvSpPr>
+        <p:spPr>
+          <a:xfrm>
+            <a:off x="7962900" y="5676900"/>
+            <a:ext cx="2857500" cy="209550"/>
+          </a:xfrm>
+          <a:prstGeom prst="rect">
+            <a:avLst/>
+          </a:prstGeom>
+          <a:noFill/>
+        </p:spPr>
+        <p:txBody>
+          <a:bodyPr wrap="none" lIns="0" rIns="0" tIns="0" bIns="0" anchor="ctr">
+            <a:spAutoFit/>
+          </a:bodyPr>
+          <a:lstStyle/>
+          <a:p>
+            <a:pPr algn="r"/>
+            <a:r>
+              <a:rPr sz="1050" b="0">
+                <a:solidFill>
+                  <a:srgbClr val="6A717B"/>
+                </a:solidFill>
+                <a:latin typeface="Yu Gothic UI"/>
+              </a:rPr>
+              <a:t>寸法で選ぶ　sunpou.nexeed-lab.com</a:t>
+            </a:r>
+          </a:p>
+        </p:txBody>
+      </p:sp>
+    </p:spTree>
+  </p:cSld>
+  <p:clrMapOvr>
+    <a:masterClrMapping/>
+  </p:clrMapOvr>
+</p:sld>
+</file>
+
+<file path=ppt/slides/slide31.xml><?xml version="1.0" encoding="utf-8"?>
+<p:sld xmlns:a="http://schemas.openxmlformats.org/drawingml/2006/main" xmlns:p="http://schemas.openxmlformats.org/presentationml/2006/main" xmlns:r="http://schemas.openxmlformats.org/officeDocument/2006/relationships">
+  <p:cSld>
+    <p:spTree>
+      <p:nvGrpSpPr>
+        <p:cNvPr id="1" name=""/>
+        <p:cNvGrpSpPr/>
+        <p:nvPr/>
+      </p:nvGrpSpPr>
+      <p:grpSpPr/>
+      <p:sp>
+        <p:nvSpPr>
+          <p:cNvPr id="2" name="Rectangle 1"/>
+          <p:cNvSpPr/>
+          <p:nvPr/>
+        </p:nvSpPr>
+        <p:spPr>
+          <a:xfrm>
+            <a:off x="0" y="0"/>
+            <a:ext cx="11430000" cy="6000750"/>
+          </a:xfrm>
+          <a:prstGeom prst="rect">
+            <a:avLst/>
+          </a:prstGeom>
+          <a:solidFill>
+            <a:srgbClr val="FCFCFC"/>
+          </a:solidFill>
+          <a:ln>
+            <a:noFill/>
+          </a:ln>
+          <a:effectLst/>
+        </p:spPr>
+        <p:txBody>
+          <a:bodyPr rtlCol="0" anchor="ctr"/>
+          <a:lstStyle/>
+          <a:p>
+            <a:pPr algn="ctr"/>
+          </a:p>
+        </p:txBody>
+      </p:sp>
+      <p:sp>
+        <p:nvSpPr>
+          <p:cNvPr id="3" name="Rectangle 2"/>
+          <p:cNvSpPr/>
+          <p:nvPr/>
+        </p:nvSpPr>
+        <p:spPr>
+          <a:xfrm>
+            <a:off x="0" y="0"/>
+            <a:ext cx="114300" cy="6000750"/>
+          </a:xfrm>
+          <a:prstGeom prst="rect">
+            <a:avLst/>
+          </a:prstGeom>
+          <a:solidFill>
+            <a:srgbClr val="014172"/>
+          </a:solidFill>
+          <a:ln>
+            <a:noFill/>
+          </a:ln>
+          <a:effectLst/>
+        </p:spPr>
+        <p:txBody>
+          <a:bodyPr rtlCol="0" anchor="ctr"/>
+          <a:lstStyle/>
+          <a:p>
+            <a:pPr algn="ctr"/>
+          </a:p>
+        </p:txBody>
+      </p:sp>
+      <p:sp>
+        <p:nvSpPr>
+          <p:cNvPr id="4" name="Rectangle 3"/>
+          <p:cNvSpPr/>
+          <p:nvPr/>
+        </p:nvSpPr>
+        <p:spPr>
+          <a:xfrm>
+            <a:off x="0" y="0"/>
+            <a:ext cx="11430000" cy="1504950"/>
+          </a:xfrm>
+          <a:prstGeom prst="rect">
+            <a:avLst/>
+          </a:prstGeom>
+          <a:solidFill>
+            <a:srgbClr val="014172"/>
+          </a:solidFill>
+          <a:ln>
+            <a:noFill/>
+          </a:ln>
+          <a:effectLst/>
+        </p:spPr>
+        <p:txBody>
+          <a:bodyPr rtlCol="0" anchor="ctr"/>
+          <a:lstStyle/>
+          <a:p>
+            <a:pPr algn="ctr"/>
+          </a:p>
+        </p:txBody>
+      </p:sp>
+      <p:sp>
+        <p:nvSpPr>
+          <p:cNvPr id="5" name="TextBox 4"/>
+          <p:cNvSpPr txBox="1"/>
+          <p:nvPr/>
+        </p:nvSpPr>
+        <p:spPr>
+          <a:xfrm>
+            <a:off x="609600" y="361950"/>
+            <a:ext cx="7429500" cy="476250"/>
+          </a:xfrm>
+          <a:prstGeom prst="rect">
+            <a:avLst/>
+          </a:prstGeom>
+          <a:noFill/>
+        </p:spPr>
+        <p:txBody>
+          <a:bodyPr wrap="none" lIns="0" rIns="0" tIns="0" bIns="0" anchor="ctr">
+            <a:spAutoFit/>
+          </a:bodyPr>
+          <a:lstStyle/>
+          <a:p>
+            <a:pPr algn="l"/>
+            <a:r>
+              <a:rPr sz="3000" b="1">
+                <a:solidFill>
+                  <a:srgbClr val="FFFFFF"/>
+                </a:solidFill>
+                <a:latin typeface="Yu Gothic UI"/>
+              </a:rPr>
+              <a:t>天板は同じでも足場の高さが違う</a:t>
+            </a:r>
+          </a:p>
+        </p:txBody>
+      </p:sp>
+      <p:sp>
+        <p:nvSpPr>
+          <p:cNvPr id="6" name="TextBox 5"/>
+          <p:cNvSpPr txBox="1"/>
+          <p:nvPr/>
+        </p:nvSpPr>
+        <p:spPr>
+          <a:xfrm>
+            <a:off x="609600" y="876300"/>
+            <a:ext cx="7429500" cy="247650"/>
+          </a:xfrm>
+          <a:prstGeom prst="rect">
+            <a:avLst/>
+          </a:prstGeom>
+          <a:noFill/>
+        </p:spPr>
+        <p:txBody>
+          <a:bodyPr wrap="none" lIns="0" rIns="0" tIns="0" bIns="0" anchor="ctr">
+            <a:spAutoFit/>
+          </a:bodyPr>
+          <a:lstStyle/>
+          <a:p>
+            <a:pPr algn="l"/>
+            <a:r>
+              <a:rPr sz="1425" b="0">
+                <a:solidFill>
+                  <a:srgbClr val="DAE7F2"/>
+                </a:solidFill>
+                <a:latin typeface="Yu Gothic UI"/>
+              </a:rPr>
+              <a:t>横から見た図 ／ 同じ0.8m前後の2製品を並べています</a:t>
+            </a:r>
+          </a:p>
+        </p:txBody>
+      </p:sp>
+      <p:sp>
+        <p:nvSpPr>
+          <p:cNvPr id="7" name="Rounded Rectangle 6"/>
+          <p:cNvSpPr/>
+          <p:nvPr/>
+        </p:nvSpPr>
+        <p:spPr>
+          <a:xfrm>
+            <a:off x="8305800" y="247650"/>
+            <a:ext cx="2514600" cy="1009650"/>
+          </a:xfrm>
+          <a:prstGeom prst="roundRect">
+            <a:avLst>
+              <a:gd name="adj" fmla="val 12000"/>
+            </a:avLst>
+          </a:prstGeom>
+          <a:solidFill>
+            <a:srgbClr val="FFFFFF"/>
+          </a:solidFill>
+          <a:ln>
+            <a:noFill/>
+          </a:ln>
+          <a:effectLst>
+            <a:outerShdw blurRad="254000" dist="63500" dir="5400000" rotWithShape="0">
+              <a:srgbClr val="0B2B45">
+                <a:alpha val="30000"/>
+              </a:srgbClr>
+            </a:outerShdw>
+          </a:effectLst>
+        </p:spPr>
+        <p:txBody>
+          <a:bodyPr rtlCol="0" anchor="ctr"/>
+          <a:lstStyle/>
+          <a:p>
+            <a:pPr algn="ctr"/>
+          </a:p>
+        </p:txBody>
+      </p:sp>
+      <p:sp>
+        <p:nvSpPr>
+          <p:cNvPr id="8" name="TextBox 7"/>
+          <p:cNvSpPr txBox="1"/>
+          <p:nvPr/>
+        </p:nvSpPr>
+        <p:spPr>
+          <a:xfrm>
+            <a:off x="8515350" y="400050"/>
+            <a:ext cx="2133600" cy="209550"/>
+          </a:xfrm>
+          <a:prstGeom prst="rect">
+            <a:avLst/>
+          </a:prstGeom>
+          <a:noFill/>
+        </p:spPr>
+        <p:txBody>
+          <a:bodyPr wrap="none" lIns="0" rIns="0" tIns="0" bIns="0" anchor="ctr">
+            <a:spAutoFit/>
+          </a:bodyPr>
+          <a:lstStyle/>
+          <a:p>
+            <a:pPr algn="l"/>
+            <a:r>
+              <a:rPr sz="1125" b="0">
+                <a:solidFill>
+                  <a:srgbClr val="6A717B"/>
+                </a:solidFill>
+                <a:latin typeface="Yu Gothic UI"/>
+              </a:rPr>
+              <a:t>脚立で立てるのは</a:t>
+            </a:r>
+          </a:p>
+        </p:txBody>
+      </p:sp>
+      <p:sp>
+        <p:nvSpPr>
+          <p:cNvPr id="9" name="TextBox 8"/>
+          <p:cNvSpPr txBox="1"/>
+          <p:nvPr/>
+        </p:nvSpPr>
+        <p:spPr>
+          <a:xfrm>
+            <a:off x="8515350" y="647700"/>
+            <a:ext cx="2133600" cy="533400"/>
+          </a:xfrm>
+          <a:prstGeom prst="rect">
+            <a:avLst/>
+          </a:prstGeom>
+          <a:noFill/>
+        </p:spPr>
+        <p:txBody>
+          <a:bodyPr wrap="none" lIns="0" rIns="0" tIns="0" bIns="0" anchor="ctr">
+            <a:spAutoFit/>
+          </a:bodyPr>
+          <a:lstStyle/>
+          <a:p>
+            <a:pPr algn="l"/>
+            <a:r>
+              <a:rPr sz="3900" b="1">
+                <a:solidFill>
+                  <a:srgbClr val="014172"/>
+                </a:solidFill>
+                <a:latin typeface="Yu Gothic UI"/>
+              </a:rPr>
+              <a:t>0.50</a:t>
+            </a:r>
+            <a:r>
+              <a:rPr sz="1950" b="1">
+                <a:solidFill>
+                  <a:srgbClr val="014172"/>
+                </a:solidFill>
+                <a:latin typeface="Yu Gothic UI"/>
+              </a:rPr>
+              <a:t>m</a:t>
+            </a:r>
+          </a:p>
+        </p:txBody>
+      </p:sp>
+      <p:sp>
+        <p:nvSpPr>
+          <p:cNvPr id="10" name="Rounded Rectangle 9"/>
+          <p:cNvSpPr/>
+          <p:nvPr/>
+        </p:nvSpPr>
+        <p:spPr>
+          <a:xfrm>
+            <a:off x="1428750" y="3370421"/>
+            <a:ext cx="1619250" cy="1392079"/>
+          </a:xfrm>
+          <a:prstGeom prst="roundRect">
+            <a:avLst>
+              <a:gd name="adj" fmla="val 3000"/>
+            </a:avLst>
+          </a:prstGeom>
+          <a:gradFill rotWithShape="1">
+            <a:gsLst>
+              <a:gs pos="0">
+                <a:srgbClr val="EEF4F9"/>
+              </a:gs>
+              <a:gs pos="100000">
+                <a:srgbClr val="DAE7F2"/>
+              </a:gs>
+            </a:gsLst>
+            <a:lin scaled="0" ang="16200000"/>
+          </a:gradFill>
+          <a:ln w="19050">
+            <a:solidFill>
+              <a:srgbClr val="014172"/>
+            </a:solidFill>
+          </a:ln>
+          <a:effectLst/>
+        </p:spPr>
+        <p:txBody>
+          <a:bodyPr rtlCol="0" anchor="ctr"/>
+          <a:lstStyle/>
+          <a:p>
+            <a:pPr algn="ctr"/>
+          </a:p>
+        </p:txBody>
+      </p:sp>
+      <p:sp>
+        <p:nvSpPr>
+          <p:cNvPr id="11" name="Rectangle 10"/>
+          <p:cNvSpPr/>
+          <p:nvPr/>
+        </p:nvSpPr>
+        <p:spPr>
+          <a:xfrm>
+            <a:off x="1619250" y="2295525"/>
+            <a:ext cx="1238250" cy="1074896"/>
+          </a:xfrm>
+          <a:prstGeom prst="rect">
+            <a:avLst/>
+          </a:prstGeom>
+          <a:noFill/>
+          <a:ln w="19050">
+            <a:solidFill>
+              <a:srgbClr val="014172"/>
+            </a:solidFill>
+            <a:prstDash val="dash"/>
+          </a:ln>
+          <a:effectLst/>
+        </p:spPr>
+        <p:txBody>
+          <a:bodyPr rtlCol="0" anchor="ctr"/>
+          <a:lstStyle/>
+          <a:p>
+            <a:pPr algn="ctr"/>
+          </a:p>
+        </p:txBody>
+      </p:sp>
+      <p:sp>
+        <p:nvSpPr>
+          <p:cNvPr id="12" name="TextBox 11"/>
+          <p:cNvSpPr txBox="1"/>
+          <p:nvPr/>
+        </p:nvSpPr>
+        <p:spPr>
+          <a:xfrm>
+            <a:off x="1428750" y="1990725"/>
+            <a:ext cx="2857500" cy="247650"/>
+          </a:xfrm>
+          <a:prstGeom prst="rect">
+            <a:avLst/>
+          </a:prstGeom>
+          <a:noFill/>
+        </p:spPr>
+        <p:txBody>
+          <a:bodyPr wrap="none" lIns="0" rIns="0" tIns="0" bIns="0" anchor="ctr">
+            <a:spAutoFit/>
+          </a:bodyPr>
+          <a:lstStyle/>
+          <a:p>
+            <a:pPr algn="l"/>
+            <a:r>
+              <a:rPr sz="1275" b="0">
+                <a:solidFill>
+                  <a:srgbClr val="6A717B"/>
+                </a:solidFill>
+                <a:latin typeface="Yu Gothic UI"/>
+              </a:rPr>
+              <a:t>全高 1.40m</a:t>
+            </a:r>
+          </a:p>
+        </p:txBody>
+      </p:sp>
+      <p:sp>
+        <p:nvSpPr>
+          <p:cNvPr id="13" name="TextBox 12"/>
+          <p:cNvSpPr txBox="1"/>
+          <p:nvPr/>
+        </p:nvSpPr>
+        <p:spPr>
+          <a:xfrm>
+            <a:off x="3238500" y="2894648"/>
+            <a:ext cx="2381250" cy="247650"/>
+          </a:xfrm>
+          <a:prstGeom prst="rect">
+            <a:avLst/>
+          </a:prstGeom>
+          <a:noFill/>
+        </p:spPr>
+        <p:txBody>
+          <a:bodyPr wrap="none" lIns="0" rIns="0" tIns="0" bIns="0" anchor="ctr">
+            <a:spAutoFit/>
+          </a:bodyPr>
+          <a:lstStyle/>
+          <a:p>
+            <a:pPr algn="l"/>
+            <a:r>
+              <a:rPr sz="1275" b="1">
+                <a:solidFill>
+                  <a:srgbClr val="014172"/>
+                </a:solidFill>
+                <a:latin typeface="Yu Gothic UI"/>
+              </a:rPr>
+              <a:t>上わく ＋61cm</a:t>
+            </a:r>
+          </a:p>
+        </p:txBody>
+      </p:sp>
+      <p:sp>
+        <p:nvSpPr>
+          <p:cNvPr id="14" name="TextBox 13"/>
+          <p:cNvSpPr txBox="1"/>
+          <p:nvPr/>
+        </p:nvSpPr>
+        <p:spPr>
+          <a:xfrm>
+            <a:off x="3238500" y="3370421"/>
+            <a:ext cx="2381250" cy="247650"/>
+          </a:xfrm>
+          <a:prstGeom prst="rect">
+            <a:avLst/>
+          </a:prstGeom>
+          <a:noFill/>
+        </p:spPr>
+        <p:txBody>
+          <a:bodyPr wrap="none" lIns="0" rIns="0" tIns="0" bIns="0" anchor="ctr">
+            <a:spAutoFit/>
+          </a:bodyPr>
+          <a:lstStyle/>
+          <a:p>
+            <a:pPr algn="l"/>
+            <a:r>
+              <a:rPr sz="1275" b="1">
+                <a:solidFill>
+                  <a:srgbClr val="2E2E33"/>
+                </a:solidFill>
+                <a:latin typeface="Yu Gothic UI"/>
+              </a:rPr>
+              <a:t>天板 0.79m</a:t>
+            </a:r>
+          </a:p>
+        </p:txBody>
+      </p:sp>
+      <p:sp>
+        <p:nvSpPr>
+          <p:cNvPr id="15" name="TextBox 14"/>
+          <p:cNvSpPr txBox="1"/>
+          <p:nvPr/>
+        </p:nvSpPr>
+        <p:spPr>
+          <a:xfrm>
+            <a:off x="1428750" y="4857750"/>
+            <a:ext cx="3048000" cy="228600"/>
+          </a:xfrm>
+          <a:prstGeom prst="rect">
+            <a:avLst/>
+          </a:prstGeom>
+          <a:noFill/>
+        </p:spPr>
+        <p:txBody>
+          <a:bodyPr wrap="none" lIns="0" rIns="0" tIns="0" bIns="0" anchor="ctr">
+            <a:spAutoFit/>
+          </a:bodyPr>
+          <a:lstStyle/>
+          <a:p>
+            <a:pPr algn="l"/>
+            <a:r>
+              <a:rPr sz="1200" b="1">
+                <a:solidFill>
+                  <a:srgbClr val="2E2E33"/>
+                </a:solidFill>
+                <a:latin typeface="Yu Gothic UI"/>
+              </a:rPr>
+              <a:t>踏台（上わく付き）</a:t>
+            </a:r>
+          </a:p>
+        </p:txBody>
+      </p:sp>
+      <p:sp>
+        <p:nvSpPr>
+          <p:cNvPr id="16" name="TextBox 15"/>
+          <p:cNvSpPr txBox="1"/>
+          <p:nvPr/>
+        </p:nvSpPr>
+        <p:spPr>
+          <a:xfrm>
+            <a:off x="1428750" y="5067300"/>
+            <a:ext cx="3048000" cy="209550"/>
+          </a:xfrm>
+          <a:prstGeom prst="rect">
+            <a:avLst/>
+          </a:prstGeom>
+          <a:noFill/>
+        </p:spPr>
+        <p:txBody>
+          <a:bodyPr wrap="none" lIns="0" rIns="0" tIns="0" bIns="0" anchor="ctr">
+            <a:spAutoFit/>
+          </a:bodyPr>
+          <a:lstStyle/>
+          <a:p>
+            <a:pPr algn="l"/>
+            <a:r>
+              <a:rPr sz="1125" b="0">
+                <a:solidFill>
+                  <a:srgbClr val="6A717B"/>
+                </a:solidFill>
+                <a:latin typeface="Yu Gothic UI"/>
+              </a:rPr>
+              <a:t>長谷川工業 EFA-08</a:t>
+            </a:r>
+          </a:p>
+        </p:txBody>
+      </p:sp>
+      <p:sp>
+        <p:nvSpPr>
+          <p:cNvPr id="17" name="Rounded Rectangle 16"/>
+          <p:cNvSpPr/>
+          <p:nvPr/>
+        </p:nvSpPr>
+        <p:spPr>
+          <a:xfrm>
+            <a:off x="6667500" y="3335179"/>
+            <a:ext cx="1619250" cy="1427321"/>
+          </a:xfrm>
+          <a:prstGeom prst="roundRect">
+            <a:avLst>
+              <a:gd name="adj" fmla="val 3000"/>
+            </a:avLst>
+          </a:prstGeom>
+          <a:gradFill rotWithShape="1">
+            <a:gsLst>
+              <a:gs pos="0">
+                <a:srgbClr val="F2F5F8"/>
+              </a:gs>
+              <a:gs pos="100000">
+                <a:srgbClr val="F2F5F8"/>
+              </a:gs>
+            </a:gsLst>
+            <a:lin scaled="0" ang="16200000"/>
+          </a:gradFill>
+          <a:ln w="19050">
+            <a:solidFill>
+              <a:srgbClr val="6A717B"/>
+            </a:solidFill>
+          </a:ln>
+          <a:effectLst/>
+        </p:spPr>
+        <p:txBody>
+          <a:bodyPr rtlCol="0" anchor="ctr"/>
+          <a:lstStyle/>
+          <a:p>
+            <a:pPr algn="ctr"/>
+          </a:p>
+        </p:txBody>
+      </p:sp>
+      <p:sp>
+        <p:nvSpPr>
+          <p:cNvPr id="18" name="Rounded Rectangle 17"/>
+          <p:cNvSpPr/>
+          <p:nvPr/>
+        </p:nvSpPr>
+        <p:spPr>
+          <a:xfrm>
+            <a:off x="6667500" y="3881438"/>
+            <a:ext cx="1619250" cy="881062"/>
+          </a:xfrm>
+          <a:prstGeom prst="roundRect">
+            <a:avLst>
+              <a:gd name="adj" fmla="val 3000"/>
+            </a:avLst>
+          </a:prstGeom>
+          <a:gradFill rotWithShape="1">
+            <a:gsLst>
+              <a:gs pos="0">
+                <a:srgbClr val="EEF4F9"/>
+              </a:gs>
+              <a:gs pos="100000">
+                <a:srgbClr val="DAE7F2"/>
+              </a:gs>
+            </a:gsLst>
+            <a:lin scaled="0" ang="16200000"/>
+          </a:gradFill>
+          <a:ln w="19050">
+            <a:solidFill>
+              <a:srgbClr val="014172"/>
+            </a:solidFill>
+          </a:ln>
+          <a:effectLst/>
+        </p:spPr>
+        <p:txBody>
+          <a:bodyPr rtlCol="0" anchor="ctr"/>
+          <a:lstStyle/>
+          <a:p>
+            <a:pPr algn="ctr"/>
+          </a:p>
+        </p:txBody>
+      </p:sp>
+      <p:sp>
+        <p:nvSpPr>
+          <p:cNvPr id="19" name="TextBox 18"/>
+          <p:cNvSpPr txBox="1"/>
+          <p:nvPr/>
+        </p:nvSpPr>
+        <p:spPr>
+          <a:xfrm>
+            <a:off x="8477250" y="3335179"/>
+            <a:ext cx="2381250" cy="247650"/>
+          </a:xfrm>
+          <a:prstGeom prst="rect">
+            <a:avLst/>
+          </a:prstGeom>
+          <a:noFill/>
+        </p:spPr>
+        <p:txBody>
+          <a:bodyPr wrap="none" lIns="0" rIns="0" tIns="0" bIns="0" anchor="ctr">
+            <a:spAutoFit/>
+          </a:bodyPr>
+          <a:lstStyle/>
+          <a:p>
+            <a:pPr algn="l"/>
+            <a:r>
+              <a:rPr sz="1275" b="1">
+                <a:solidFill>
+                  <a:srgbClr val="6A717B"/>
+                </a:solidFill>
+                <a:latin typeface="Yu Gothic UI"/>
+              </a:rPr>
+              <a:t>天板 0.81m</a:t>
+            </a:r>
+          </a:p>
+        </p:txBody>
+      </p:sp>
+      <p:sp>
+        <p:nvSpPr>
+          <p:cNvPr id="20" name="TextBox 19"/>
+          <p:cNvSpPr txBox="1"/>
+          <p:nvPr/>
+        </p:nvSpPr>
+        <p:spPr>
+          <a:xfrm>
+            <a:off x="8477250" y="3881438"/>
+            <a:ext cx="2381250" cy="247650"/>
+          </a:xfrm>
+          <a:prstGeom prst="rect">
+            <a:avLst/>
+          </a:prstGeom>
+          <a:noFill/>
+        </p:spPr>
+        <p:txBody>
+          <a:bodyPr wrap="none" lIns="0" rIns="0" tIns="0" bIns="0" anchor="ctr">
+            <a:spAutoFit/>
+          </a:bodyPr>
+          <a:lstStyle/>
+          <a:p>
+            <a:pPr algn="l"/>
+            <a:r>
+              <a:rPr sz="1275" b="1">
+                <a:solidFill>
+                  <a:srgbClr val="014172"/>
+                </a:solidFill>
+                <a:latin typeface="Yu Gothic UI"/>
+              </a:rPr>
+              <a:t>使用最大 0.50m</a:t>
+            </a:r>
+          </a:p>
+        </p:txBody>
+      </p:sp>
+      <p:sp>
+        <p:nvSpPr>
+          <p:cNvPr id="21" name="TextBox 20"/>
+          <p:cNvSpPr txBox="1"/>
+          <p:nvPr/>
+        </p:nvSpPr>
+        <p:spPr>
+          <a:xfrm>
+            <a:off x="6667500" y="4857750"/>
+            <a:ext cx="3048000" cy="228600"/>
+          </a:xfrm>
+          <a:prstGeom prst="rect">
+            <a:avLst/>
+          </a:prstGeom>
+          <a:noFill/>
+        </p:spPr>
+        <p:txBody>
+          <a:bodyPr wrap="none" lIns="0" rIns="0" tIns="0" bIns="0" anchor="ctr">
+            <a:spAutoFit/>
+          </a:bodyPr>
+          <a:lstStyle/>
+          <a:p>
+            <a:pPr algn="l"/>
+            <a:r>
+              <a:rPr sz="1200" b="1">
+                <a:solidFill>
+                  <a:srgbClr val="2E2E33"/>
+                </a:solidFill>
+                <a:latin typeface="Yu Gothic UI"/>
+              </a:rPr>
+              <a:t>はしご兼用脚立</a:t>
+            </a:r>
+          </a:p>
+        </p:txBody>
+      </p:sp>
+      <p:sp>
+        <p:nvSpPr>
+          <p:cNvPr id="22" name="TextBox 21"/>
+          <p:cNvSpPr txBox="1"/>
+          <p:nvPr/>
+        </p:nvSpPr>
+        <p:spPr>
+          <a:xfrm>
+            <a:off x="6667500" y="5067300"/>
+            <a:ext cx="3048000" cy="209550"/>
+          </a:xfrm>
+          <a:prstGeom prst="rect">
+            <a:avLst/>
+          </a:prstGeom>
+          <a:noFill/>
+        </p:spPr>
+        <p:txBody>
+          <a:bodyPr wrap="none" lIns="0" rIns="0" tIns="0" bIns="0" anchor="ctr">
+            <a:spAutoFit/>
+          </a:bodyPr>
+          <a:lstStyle/>
+          <a:p>
+            <a:pPr algn="l"/>
+            <a:r>
+              <a:rPr sz="1125" b="0">
+                <a:solidFill>
+                  <a:srgbClr val="6A717B"/>
+                </a:solidFill>
+                <a:latin typeface="Yu Gothic UI"/>
+              </a:rPr>
+              <a:t>長谷川工業 RHB-09a</a:t>
+            </a:r>
+          </a:p>
+        </p:txBody>
+      </p:sp>
+      <p:sp>
+        <p:nvSpPr>
+          <p:cNvPr id="23" name="Rectangle 22"/>
+          <p:cNvSpPr/>
+          <p:nvPr/>
+        </p:nvSpPr>
+        <p:spPr>
+          <a:xfrm>
+            <a:off x="609600" y="5295900"/>
+            <a:ext cx="10210800" cy="9525"/>
+          </a:xfrm>
+          <a:prstGeom prst="rect">
+            <a:avLst/>
+          </a:prstGeom>
+          <a:solidFill>
+            <a:srgbClr val="E2E7EC"/>
+          </a:solidFill>
+          <a:ln>
+            <a:noFill/>
+          </a:ln>
+          <a:effectLst/>
+        </p:spPr>
+        <p:txBody>
+          <a:bodyPr rtlCol="0" anchor="ctr"/>
+          <a:lstStyle/>
+          <a:p>
+            <a:pPr algn="ctr"/>
+          </a:p>
+        </p:txBody>
+      </p:sp>
+      <p:sp>
+        <p:nvSpPr>
+          <p:cNvPr id="24" name="TextBox 23"/>
+          <p:cNvSpPr txBox="1"/>
+          <p:nvPr/>
+        </p:nvSpPr>
+        <p:spPr>
+          <a:xfrm>
+            <a:off x="609600" y="5429250"/>
+            <a:ext cx="7239000" cy="247650"/>
+          </a:xfrm>
+          <a:prstGeom prst="rect">
+            <a:avLst/>
+          </a:prstGeom>
+          <a:noFill/>
+        </p:spPr>
+        <p:txBody>
+          <a:bodyPr wrap="none" lIns="0" rIns="0" tIns="0" bIns="0" anchor="ctr">
+            <a:spAutoFit/>
+          </a:bodyPr>
+          <a:lstStyle/>
+          <a:p>
+            <a:pPr algn="l"/>
+            <a:r>
+              <a:rPr sz="1425" b="1">
+                <a:solidFill>
+                  <a:srgbClr val="2E2E33"/>
+                </a:solidFill>
+                <a:latin typeface="Yu Gothic UI"/>
+              </a:rPr>
+              <a:t>天板は0.79mと0.81m。足を置ける高さは0.79mと0.50mに分かれます。</a:t>
+            </a:r>
+          </a:p>
+        </p:txBody>
+      </p:sp>
+      <p:sp>
+        <p:nvSpPr>
+          <p:cNvPr id="25" name="TextBox 24"/>
+          <p:cNvSpPr txBox="1"/>
+          <p:nvPr/>
+        </p:nvSpPr>
+        <p:spPr>
+          <a:xfrm>
+            <a:off x="609600" y="5676900"/>
+            <a:ext cx="7620000" cy="209550"/>
+          </a:xfrm>
+          <a:prstGeom prst="rect">
+            <a:avLst/>
+          </a:prstGeom>
+          <a:noFill/>
+        </p:spPr>
+        <p:txBody>
+          <a:bodyPr wrap="none" lIns="0" rIns="0" tIns="0" bIns="0" anchor="ctr">
+            <a:spAutoFit/>
+          </a:bodyPr>
+          <a:lstStyle/>
+          <a:p>
+            <a:pPr algn="l"/>
+            <a:r>
+              <a:rPr sz="1050" b="0">
+                <a:solidFill>
+                  <a:srgbClr val="6A717B"/>
+                </a:solidFill>
+                <a:latin typeface="Yu Gothic UI"/>
+              </a:rPr>
+              <a:t>メーカー公表値からの計算です（実測ではありません）</a:t>
+            </a:r>
+          </a:p>
+        </p:txBody>
+      </p:sp>
+      <p:sp>
+        <p:nvSpPr>
+          <p:cNvPr id="26" name="TextBox 25"/>
           <p:cNvSpPr txBox="1"/>
           <p:nvPr/>
         </p:nvSpPr>
@@ -27720,7 +34292,7 @@
         </p:nvSpPr>
         <p:spPr>
           <a:xfrm>
-            <a:off x="4286250" y="2524125"/>
+            <a:off x="4286250" y="2333625"/>
             <a:ext cx="2286000" cy="2428875"/>
           </a:xfrm>
           <a:prstGeom prst="rect">
@@ -27752,7 +34324,7 @@
         </p:nvSpPr>
         <p:spPr>
           <a:xfrm>
-            <a:off x="4286250" y="2257425"/>
+            <a:off x="4286250" y="2066925"/>
             <a:ext cx="2857500" cy="228600"/>
           </a:xfrm>
           <a:prstGeom prst="rect">
@@ -27787,7 +34359,7 @@
         </p:nvSpPr>
         <p:spPr>
           <a:xfrm>
-            <a:off x="4857750" y="2038350"/>
+            <a:off x="4857750" y="1847850"/>
             <a:ext cx="914400" cy="2914650"/>
           </a:xfrm>
           <a:prstGeom prst="roundRect">
@@ -27829,7 +34401,7 @@
         </p:nvSpPr>
         <p:spPr>
           <a:xfrm>
-            <a:off x="4857750" y="5086350"/>
+            <a:off x="4857750" y="4895850"/>
             <a:ext cx="3048000" cy="228600"/>
           </a:xfrm>
           <a:prstGeom prst="rect">
@@ -27864,7 +34436,7 @@
         </p:nvSpPr>
         <p:spPr>
           <a:xfrm>
-            <a:off x="4857750" y="2038350"/>
+            <a:off x="4857750" y="1847850"/>
             <a:ext cx="914400" cy="485775"/>
           </a:xfrm>
           <a:prstGeom prst="rect">
@@ -27896,7 +34468,7 @@
         </p:nvSpPr>
         <p:spPr>
           <a:xfrm>
-            <a:off x="5905500" y="2095500"/>
+            <a:off x="5905500" y="1905000"/>
             <a:ext cx="2857500" cy="285750"/>
           </a:xfrm>
           <a:prstGeom prst="rect">

--- a/site/public/img/figures.pptx
+++ b/site/public/img/figures.pptx
@@ -36,6 +36,7 @@
     <p:sldId id="284" r:id="rId35"/>
     <p:sldId id="285" r:id="rId36"/>
     <p:sldId id="286" r:id="rId37"/>
+    <p:sldId id="287" r:id="rId38"/>
   </p:sldIdLst>
   <p:sldSz cx="11430000" cy="6000750" type="screen4x3"/>
   <p:notesSz cx="6858000" cy="9144000"/>
@@ -33957,6 +33958,1768 @@
       <p:sp>
         <p:nvSpPr>
           <p:cNvPr id="26" name="TextBox 25"/>
+          <p:cNvSpPr txBox="1"/>
+          <p:nvPr/>
+        </p:nvSpPr>
+        <p:spPr>
+          <a:xfrm>
+            <a:off x="7962900" y="5676900"/>
+            <a:ext cx="2857500" cy="209550"/>
+          </a:xfrm>
+          <a:prstGeom prst="rect">
+            <a:avLst/>
+          </a:prstGeom>
+          <a:noFill/>
+        </p:spPr>
+        <p:txBody>
+          <a:bodyPr wrap="none" lIns="0" rIns="0" tIns="0" bIns="0" anchor="ctr">
+            <a:spAutoFit/>
+          </a:bodyPr>
+          <a:lstStyle/>
+          <a:p>
+            <a:pPr algn="r"/>
+            <a:r>
+              <a:rPr sz="1050" b="0">
+                <a:solidFill>
+                  <a:srgbClr val="6A717B"/>
+                </a:solidFill>
+                <a:latin typeface="Yu Gothic UI"/>
+              </a:rPr>
+              <a:t>寸法で選ぶ　sunpou.nexeed-lab.com</a:t>
+            </a:r>
+          </a:p>
+        </p:txBody>
+      </p:sp>
+    </p:spTree>
+  </p:cSld>
+  <p:clrMapOvr>
+    <a:masterClrMapping/>
+  </p:clrMapOvr>
+</p:sld>
+</file>
+
+<file path=ppt/slides/slide32.xml><?xml version="1.0" encoding="utf-8"?>
+<p:sld xmlns:a="http://schemas.openxmlformats.org/drawingml/2006/main" xmlns:p="http://schemas.openxmlformats.org/presentationml/2006/main" xmlns:r="http://schemas.openxmlformats.org/officeDocument/2006/relationships">
+  <p:cSld>
+    <p:spTree>
+      <p:nvGrpSpPr>
+        <p:cNvPr id="1" name=""/>
+        <p:cNvGrpSpPr/>
+        <p:nvPr/>
+      </p:nvGrpSpPr>
+      <p:grpSpPr/>
+      <p:sp>
+        <p:nvSpPr>
+          <p:cNvPr id="2" name="Rectangle 1"/>
+          <p:cNvSpPr/>
+          <p:nvPr/>
+        </p:nvSpPr>
+        <p:spPr>
+          <a:xfrm>
+            <a:off x="0" y="0"/>
+            <a:ext cx="11430000" cy="6000750"/>
+          </a:xfrm>
+          <a:prstGeom prst="rect">
+            <a:avLst/>
+          </a:prstGeom>
+          <a:solidFill>
+            <a:srgbClr val="FCFCFC"/>
+          </a:solidFill>
+          <a:ln>
+            <a:noFill/>
+          </a:ln>
+          <a:effectLst/>
+        </p:spPr>
+        <p:txBody>
+          <a:bodyPr rtlCol="0" anchor="ctr"/>
+          <a:lstStyle/>
+          <a:p>
+            <a:pPr algn="ctr"/>
+          </a:p>
+        </p:txBody>
+      </p:sp>
+      <p:sp>
+        <p:nvSpPr>
+          <p:cNvPr id="3" name="Rectangle 2"/>
+          <p:cNvSpPr/>
+          <p:nvPr/>
+        </p:nvSpPr>
+        <p:spPr>
+          <a:xfrm>
+            <a:off x="0" y="0"/>
+            <a:ext cx="114300" cy="6000750"/>
+          </a:xfrm>
+          <a:prstGeom prst="rect">
+            <a:avLst/>
+          </a:prstGeom>
+          <a:solidFill>
+            <a:srgbClr val="014172"/>
+          </a:solidFill>
+          <a:ln>
+            <a:noFill/>
+          </a:ln>
+          <a:effectLst/>
+        </p:spPr>
+        <p:txBody>
+          <a:bodyPr rtlCol="0" anchor="ctr"/>
+          <a:lstStyle/>
+          <a:p>
+            <a:pPr algn="ctr"/>
+          </a:p>
+        </p:txBody>
+      </p:sp>
+      <p:sp>
+        <p:nvSpPr>
+          <p:cNvPr id="4" name="Rectangle 3"/>
+          <p:cNvSpPr/>
+          <p:nvPr/>
+        </p:nvSpPr>
+        <p:spPr>
+          <a:xfrm>
+            <a:off x="0" y="0"/>
+            <a:ext cx="11430000" cy="1504950"/>
+          </a:xfrm>
+          <a:prstGeom prst="rect">
+            <a:avLst/>
+          </a:prstGeom>
+          <a:solidFill>
+            <a:srgbClr val="014172"/>
+          </a:solidFill>
+          <a:ln>
+            <a:noFill/>
+          </a:ln>
+          <a:effectLst/>
+        </p:spPr>
+        <p:txBody>
+          <a:bodyPr rtlCol="0" anchor="ctr"/>
+          <a:lstStyle/>
+          <a:p>
+            <a:pPr algn="ctr"/>
+          </a:p>
+        </p:txBody>
+      </p:sp>
+      <p:sp>
+        <p:nvSpPr>
+          <p:cNvPr id="5" name="TextBox 4"/>
+          <p:cNvSpPr txBox="1"/>
+          <p:nvPr/>
+        </p:nvSpPr>
+        <p:spPr>
+          <a:xfrm>
+            <a:off x="609600" y="361950"/>
+            <a:ext cx="7429500" cy="476250"/>
+          </a:xfrm>
+          <a:prstGeom prst="rect">
+            <a:avLst/>
+          </a:prstGeom>
+          <a:noFill/>
+        </p:spPr>
+        <p:txBody>
+          <a:bodyPr wrap="none" lIns="0" rIns="0" tIns="0" bIns="0" anchor="ctr">
+            <a:spAutoFit/>
+          </a:bodyPr>
+          <a:lstStyle/>
+          <a:p>
+            <a:pPr algn="l"/>
+            <a:r>
+              <a:rPr sz="3000" b="1">
+                <a:solidFill>
+                  <a:srgbClr val="FFFFFF"/>
+                </a:solidFill>
+                <a:latin typeface="Yu Gothic UI"/>
+              </a:rPr>
+              <a:t>中身を入れると何kgになる？</a:t>
+            </a:r>
+          </a:p>
+        </p:txBody>
+      </p:sp>
+      <p:sp>
+        <p:nvSpPr>
+          <p:cNvPr id="6" name="TextBox 5"/>
+          <p:cNvSpPr txBox="1"/>
+          <p:nvPr/>
+        </p:nvSpPr>
+        <p:spPr>
+          <a:xfrm>
+            <a:off x="609600" y="876300"/>
+            <a:ext cx="7429500" cy="247650"/>
+          </a:xfrm>
+          <a:prstGeom prst="rect">
+            <a:avLst/>
+          </a:prstGeom>
+          <a:noFill/>
+        </p:spPr>
+        <p:txBody>
+          <a:bodyPr wrap="none" lIns="0" rIns="0" tIns="0" bIns="0" anchor="ctr">
+            <a:spAutoFit/>
+          </a:bodyPr>
+          <a:lstStyle/>
+          <a:p>
+            <a:pPr algn="l"/>
+            <a:r>
+              <a:rPr sz="1425" b="0">
+                <a:solidFill>
+                  <a:srgbClr val="DAE7F2"/>
+                </a:solidFill>
+                <a:latin typeface="Yu Gothic UI"/>
+              </a:rPr>
+              <a:t>濃い色が自重（メーカー公表）、薄い色まで伸びると満載の上限</a:t>
+            </a:r>
+          </a:p>
+        </p:txBody>
+      </p:sp>
+      <p:sp>
+        <p:nvSpPr>
+          <p:cNvPr id="7" name="Rounded Rectangle 6"/>
+          <p:cNvSpPr/>
+          <p:nvPr/>
+        </p:nvSpPr>
+        <p:spPr>
+          <a:xfrm>
+            <a:off x="8305800" y="247650"/>
+            <a:ext cx="2514600" cy="1009650"/>
+          </a:xfrm>
+          <a:prstGeom prst="roundRect">
+            <a:avLst>
+              <a:gd name="adj" fmla="val 12000"/>
+            </a:avLst>
+          </a:prstGeom>
+          <a:solidFill>
+            <a:srgbClr val="FFFFFF"/>
+          </a:solidFill>
+          <a:ln>
+            <a:noFill/>
+          </a:ln>
+          <a:effectLst>
+            <a:outerShdw blurRad="254000" dist="63500" dir="5400000" rotWithShape="0">
+              <a:srgbClr val="0B2B45">
+                <a:alpha val="30000"/>
+              </a:srgbClr>
+            </a:outerShdw>
+          </a:effectLst>
+        </p:spPr>
+        <p:txBody>
+          <a:bodyPr rtlCol="0" anchor="ctr"/>
+          <a:lstStyle/>
+          <a:p>
+            <a:pPr algn="ctr"/>
+          </a:p>
+        </p:txBody>
+      </p:sp>
+      <p:sp>
+        <p:nvSpPr>
+          <p:cNvPr id="8" name="TextBox 7"/>
+          <p:cNvSpPr txBox="1"/>
+          <p:nvPr/>
+        </p:nvSpPr>
+        <p:spPr>
+          <a:xfrm>
+            <a:off x="8515350" y="400050"/>
+            <a:ext cx="2133600" cy="209550"/>
+          </a:xfrm>
+          <a:prstGeom prst="rect">
+            <a:avLst/>
+          </a:prstGeom>
+          <a:noFill/>
+        </p:spPr>
+        <p:txBody>
+          <a:bodyPr wrap="none" lIns="0" rIns="0" tIns="0" bIns="0" anchor="ctr">
+            <a:spAutoFit/>
+          </a:bodyPr>
+          <a:lstStyle/>
+          <a:p>
+            <a:pPr algn="l"/>
+            <a:r>
+              <a:rPr sz="1125" b="0">
+                <a:solidFill>
+                  <a:srgbClr val="6A717B"/>
+                </a:solidFill>
+                <a:latin typeface="Yu Gothic UI"/>
+              </a:rPr>
+              <a:t>80Lは満載で</a:t>
+            </a:r>
+          </a:p>
+        </p:txBody>
+      </p:sp>
+      <p:sp>
+        <p:nvSpPr>
+          <p:cNvPr id="9" name="TextBox 8"/>
+          <p:cNvSpPr txBox="1"/>
+          <p:nvPr/>
+        </p:nvSpPr>
+        <p:spPr>
+          <a:xfrm>
+            <a:off x="8515350" y="647700"/>
+            <a:ext cx="2133600" cy="533400"/>
+          </a:xfrm>
+          <a:prstGeom prst="rect">
+            <a:avLst/>
+          </a:prstGeom>
+          <a:noFill/>
+        </p:spPr>
+        <p:txBody>
+          <a:bodyPr wrap="none" lIns="0" rIns="0" tIns="0" bIns="0" anchor="ctr">
+            <a:spAutoFit/>
+          </a:bodyPr>
+          <a:lstStyle/>
+          <a:p>
+            <a:pPr algn="l"/>
+            <a:r>
+              <a:rPr sz="3900" b="1">
+                <a:solidFill>
+                  <a:srgbClr val="014172"/>
+                </a:solidFill>
+                <a:latin typeface="Yu Gothic UI"/>
+              </a:rPr>
+              <a:t>91</a:t>
+            </a:r>
+            <a:r>
+              <a:rPr sz="1950" b="1">
+                <a:solidFill>
+                  <a:srgbClr val="014172"/>
+                </a:solidFill>
+                <a:latin typeface="Yu Gothic UI"/>
+              </a:rPr>
+              <a:t>kg</a:t>
+            </a:r>
+          </a:p>
+        </p:txBody>
+      </p:sp>
+      <p:sp>
+        <p:nvSpPr>
+          <p:cNvPr id="10" name="Rectangle 9"/>
+          <p:cNvSpPr/>
+          <p:nvPr/>
+        </p:nvSpPr>
+        <p:spPr>
+          <a:xfrm>
+            <a:off x="495300" y="1733550"/>
+            <a:ext cx="10439400" cy="514350"/>
+          </a:xfrm>
+          <a:prstGeom prst="rect">
+            <a:avLst/>
+          </a:prstGeom>
+          <a:solidFill>
+            <a:srgbClr val="F2F5F8"/>
+          </a:solidFill>
+          <a:ln>
+            <a:noFill/>
+          </a:ln>
+          <a:effectLst/>
+        </p:spPr>
+        <p:txBody>
+          <a:bodyPr rtlCol="0" anchor="ctr"/>
+          <a:lstStyle/>
+          <a:p>
+            <a:pPr algn="ctr"/>
+          </a:p>
+        </p:txBody>
+      </p:sp>
+      <p:sp>
+        <p:nvSpPr>
+          <p:cNvPr id="11" name="Rectangle 10"/>
+          <p:cNvSpPr/>
+          <p:nvPr/>
+        </p:nvSpPr>
+        <p:spPr>
+          <a:xfrm>
+            <a:off x="495300" y="2324100"/>
+            <a:ext cx="10439400" cy="514350"/>
+          </a:xfrm>
+          <a:prstGeom prst="rect">
+            <a:avLst/>
+          </a:prstGeom>
+          <a:solidFill>
+            <a:srgbClr val="FCFCFC"/>
+          </a:solidFill>
+          <a:ln>
+            <a:noFill/>
+          </a:ln>
+          <a:effectLst/>
+        </p:spPr>
+        <p:txBody>
+          <a:bodyPr rtlCol="0" anchor="ctr"/>
+          <a:lstStyle/>
+          <a:p>
+            <a:pPr algn="ctr"/>
+          </a:p>
+        </p:txBody>
+      </p:sp>
+      <p:sp>
+        <p:nvSpPr>
+          <p:cNvPr id="12" name="Rectangle 11"/>
+          <p:cNvSpPr/>
+          <p:nvPr/>
+        </p:nvSpPr>
+        <p:spPr>
+          <a:xfrm>
+            <a:off x="495300" y="2914650"/>
+            <a:ext cx="10439400" cy="514350"/>
+          </a:xfrm>
+          <a:prstGeom prst="rect">
+            <a:avLst/>
+          </a:prstGeom>
+          <a:solidFill>
+            <a:srgbClr val="F2F5F8"/>
+          </a:solidFill>
+          <a:ln>
+            <a:noFill/>
+          </a:ln>
+          <a:effectLst/>
+        </p:spPr>
+        <p:txBody>
+          <a:bodyPr rtlCol="0" anchor="ctr"/>
+          <a:lstStyle/>
+          <a:p>
+            <a:pPr algn="ctr"/>
+          </a:p>
+        </p:txBody>
+      </p:sp>
+      <p:sp>
+        <p:nvSpPr>
+          <p:cNvPr id="13" name="Rectangle 12"/>
+          <p:cNvSpPr/>
+          <p:nvPr/>
+        </p:nvSpPr>
+        <p:spPr>
+          <a:xfrm>
+            <a:off x="495300" y="3505200"/>
+            <a:ext cx="10439400" cy="514350"/>
+          </a:xfrm>
+          <a:prstGeom prst="rect">
+            <a:avLst/>
+          </a:prstGeom>
+          <a:solidFill>
+            <a:srgbClr val="FCFCFC"/>
+          </a:solidFill>
+          <a:ln>
+            <a:noFill/>
+          </a:ln>
+          <a:effectLst/>
+        </p:spPr>
+        <p:txBody>
+          <a:bodyPr rtlCol="0" anchor="ctr"/>
+          <a:lstStyle/>
+          <a:p>
+            <a:pPr algn="ctr"/>
+          </a:p>
+        </p:txBody>
+      </p:sp>
+      <p:sp>
+        <p:nvSpPr>
+          <p:cNvPr id="14" name="Rectangle 13"/>
+          <p:cNvSpPr/>
+          <p:nvPr/>
+        </p:nvSpPr>
+        <p:spPr>
+          <a:xfrm>
+            <a:off x="495300" y="4095750"/>
+            <a:ext cx="10439400" cy="514350"/>
+          </a:xfrm>
+          <a:prstGeom prst="rect">
+            <a:avLst/>
+          </a:prstGeom>
+          <a:solidFill>
+            <a:srgbClr val="F2F5F8"/>
+          </a:solidFill>
+          <a:ln>
+            <a:noFill/>
+          </a:ln>
+          <a:effectLst/>
+        </p:spPr>
+        <p:txBody>
+          <a:bodyPr rtlCol="0" anchor="ctr"/>
+          <a:lstStyle/>
+          <a:p>
+            <a:pPr algn="ctr"/>
+          </a:p>
+        </p:txBody>
+      </p:sp>
+      <p:sp>
+        <p:nvSpPr>
+          <p:cNvPr id="15" name="Rectangle 14"/>
+          <p:cNvSpPr/>
+          <p:nvPr/>
+        </p:nvSpPr>
+        <p:spPr>
+          <a:xfrm>
+            <a:off x="495300" y="4686300"/>
+            <a:ext cx="10439400" cy="514350"/>
+          </a:xfrm>
+          <a:prstGeom prst="rect">
+            <a:avLst/>
+          </a:prstGeom>
+          <a:solidFill>
+            <a:srgbClr val="E6EEF6"/>
+          </a:solidFill>
+          <a:ln>
+            <a:noFill/>
+          </a:ln>
+          <a:effectLst/>
+        </p:spPr>
+        <p:txBody>
+          <a:bodyPr rtlCol="0" anchor="ctr"/>
+          <a:lstStyle/>
+          <a:p>
+            <a:pPr algn="ctr"/>
+          </a:p>
+        </p:txBody>
+      </p:sp>
+      <p:sp>
+        <p:nvSpPr>
+          <p:cNvPr id="16" name="Rectangle 15"/>
+          <p:cNvSpPr/>
+          <p:nvPr/>
+        </p:nvSpPr>
+        <p:spPr>
+          <a:xfrm>
+            <a:off x="495300" y="4686300"/>
+            <a:ext cx="47625" cy="514350"/>
+          </a:xfrm>
+          <a:prstGeom prst="rect">
+            <a:avLst/>
+          </a:prstGeom>
+          <a:solidFill>
+            <a:srgbClr val="014172"/>
+          </a:solidFill>
+          <a:ln>
+            <a:noFill/>
+          </a:ln>
+          <a:effectLst/>
+        </p:spPr>
+        <p:txBody>
+          <a:bodyPr rtlCol="0" anchor="ctr"/>
+          <a:lstStyle/>
+          <a:p>
+            <a:pPr algn="ctr"/>
+          </a:p>
+        </p:txBody>
+      </p:sp>
+      <p:sp>
+        <p:nvSpPr>
+          <p:cNvPr id="17" name="Rounded Rectangle 16"/>
+          <p:cNvSpPr/>
+          <p:nvPr/>
+        </p:nvSpPr>
+        <p:spPr>
+          <a:xfrm>
+            <a:off x="4476750" y="1866900"/>
+            <a:ext cx="1249204" cy="266700"/>
+          </a:xfrm>
+          <a:prstGeom prst="roundRect">
+            <a:avLst>
+              <a:gd name="adj" fmla="val 30000"/>
+            </a:avLst>
+          </a:prstGeom>
+          <a:gradFill rotWithShape="1">
+            <a:gsLst>
+              <a:gs pos="0">
+                <a:srgbClr val="EEF4F9"/>
+              </a:gs>
+              <a:gs pos="100000">
+                <a:srgbClr val="DAE7F2"/>
+              </a:gs>
+            </a:gsLst>
+            <a:lin scaled="0" ang="16200000"/>
+          </a:gradFill>
+          <a:ln w="19050">
+            <a:solidFill>
+              <a:srgbClr val="014172"/>
+            </a:solidFill>
+          </a:ln>
+          <a:effectLst/>
+        </p:spPr>
+        <p:txBody>
+          <a:bodyPr rtlCol="0" anchor="ctr"/>
+          <a:lstStyle/>
+          <a:p>
+            <a:pPr algn="ctr"/>
+          </a:p>
+        </p:txBody>
+      </p:sp>
+      <p:sp>
+        <p:nvSpPr>
+          <p:cNvPr id="18" name="Rounded Rectangle 17"/>
+          <p:cNvSpPr/>
+          <p:nvPr/>
+        </p:nvSpPr>
+        <p:spPr>
+          <a:xfrm>
+            <a:off x="4476750" y="1866900"/>
+            <a:ext cx="87154" cy="266700"/>
+          </a:xfrm>
+          <a:prstGeom prst="roundRect">
+            <a:avLst>
+              <a:gd name="adj" fmla="val 40000"/>
+            </a:avLst>
+          </a:prstGeom>
+          <a:gradFill rotWithShape="1">
+            <a:gsLst>
+              <a:gs pos="0">
+                <a:srgbClr val="0B5C99"/>
+              </a:gs>
+              <a:gs pos="100000">
+                <a:srgbClr val="014172"/>
+              </a:gs>
+            </a:gsLst>
+            <a:lin scaled="0" ang="16200000"/>
+          </a:gradFill>
+          <a:ln>
+            <a:noFill/>
+          </a:ln>
+          <a:effectLst/>
+        </p:spPr>
+        <p:txBody>
+          <a:bodyPr rtlCol="0" anchor="ctr"/>
+          <a:lstStyle/>
+          <a:p>
+            <a:pPr algn="ctr"/>
+          </a:p>
+        </p:txBody>
+      </p:sp>
+      <p:sp>
+        <p:nvSpPr>
+          <p:cNvPr id="19" name="TextBox 18"/>
+          <p:cNvSpPr txBox="1"/>
+          <p:nvPr/>
+        </p:nvSpPr>
+        <p:spPr>
+          <a:xfrm>
+            <a:off x="704850" y="1809750"/>
+            <a:ext cx="3619500" cy="228600"/>
+          </a:xfrm>
+          <a:prstGeom prst="rect">
+            <a:avLst/>
+          </a:prstGeom>
+          <a:noFill/>
+        </p:spPr>
+        <p:txBody>
+          <a:bodyPr wrap="none" lIns="0" rIns="0" tIns="0" bIns="0" anchor="ctr">
+            <a:spAutoFit/>
+          </a:bodyPr>
+          <a:lstStyle/>
+          <a:p>
+            <a:pPr algn="l"/>
+            <a:r>
+              <a:rPr sz="1200" b="1">
+                <a:solidFill>
+                  <a:srgbClr val="2E2E33"/>
+                </a:solidFill>
+                <a:latin typeface="Yu Gothic UI"/>
+              </a:rPr>
+              <a:t>ロゴス ハイパー氷点下クーラーL</a:t>
+            </a:r>
+          </a:p>
+        </p:txBody>
+      </p:sp>
+      <p:sp>
+        <p:nvSpPr>
+          <p:cNvPr id="20" name="TextBox 19"/>
+          <p:cNvSpPr txBox="1"/>
+          <p:nvPr/>
+        </p:nvSpPr>
+        <p:spPr>
+          <a:xfrm>
+            <a:off x="704850" y="2038350"/>
+            <a:ext cx="3619500" cy="209550"/>
+          </a:xfrm>
+          <a:prstGeom prst="rect">
+            <a:avLst/>
+          </a:prstGeom>
+          <a:noFill/>
+        </p:spPr>
+        <p:txBody>
+          <a:bodyPr wrap="none" lIns="0" rIns="0" tIns="0" bIns="0" anchor="ctr">
+            <a:spAutoFit/>
+          </a:bodyPr>
+          <a:lstStyle/>
+          <a:p>
+            <a:pPr algn="l"/>
+            <a:r>
+              <a:rPr sz="1050" b="0">
+                <a:solidFill>
+                  <a:srgbClr val="6A717B"/>
+                </a:solidFill>
+                <a:latin typeface="Yu Gothic UI"/>
+              </a:rPr>
+              <a:t>20L ／ 自重 1.5kg</a:t>
+            </a:r>
+          </a:p>
+        </p:txBody>
+      </p:sp>
+      <p:sp>
+        <p:nvSpPr>
+          <p:cNvPr id="21" name="TextBox 20"/>
+          <p:cNvSpPr txBox="1"/>
+          <p:nvPr/>
+        </p:nvSpPr>
+        <p:spPr>
+          <a:xfrm>
+            <a:off x="5840254" y="1866900"/>
+            <a:ext cx="1143000" cy="266700"/>
+          </a:xfrm>
+          <a:prstGeom prst="rect">
+            <a:avLst/>
+          </a:prstGeom>
+          <a:noFill/>
+        </p:spPr>
+        <p:txBody>
+          <a:bodyPr wrap="none" lIns="0" rIns="0" tIns="0" bIns="0" anchor="ctr">
+            <a:spAutoFit/>
+          </a:bodyPr>
+          <a:lstStyle/>
+          <a:p>
+            <a:pPr algn="l"/>
+            <a:r>
+              <a:rPr sz="1350" b="1">
+                <a:solidFill>
+                  <a:srgbClr val="014172"/>
+                </a:solidFill>
+                <a:latin typeface="Yu Gothic UI"/>
+              </a:rPr>
+              <a:t>21.5kg</a:t>
+            </a:r>
+          </a:p>
+        </p:txBody>
+      </p:sp>
+      <p:sp>
+        <p:nvSpPr>
+          <p:cNvPr id="22" name="Rounded Rectangle 21"/>
+          <p:cNvSpPr/>
+          <p:nvPr/>
+        </p:nvSpPr>
+        <p:spPr>
+          <a:xfrm>
+            <a:off x="4476750" y="2457450"/>
+            <a:ext cx="703040" cy="266700"/>
+          </a:xfrm>
+          <a:prstGeom prst="roundRect">
+            <a:avLst>
+              <a:gd name="adj" fmla="val 30000"/>
+            </a:avLst>
+          </a:prstGeom>
+          <a:gradFill rotWithShape="1">
+            <a:gsLst>
+              <a:gs pos="0">
+                <a:srgbClr val="EEF4F9"/>
+              </a:gs>
+              <a:gs pos="100000">
+                <a:srgbClr val="DAE7F2"/>
+              </a:gs>
+            </a:gsLst>
+            <a:lin scaled="0" ang="16200000"/>
+          </a:gradFill>
+          <a:ln w="19050">
+            <a:solidFill>
+              <a:srgbClr val="014172"/>
+            </a:solidFill>
+          </a:ln>
+          <a:effectLst/>
+        </p:spPr>
+        <p:txBody>
+          <a:bodyPr rtlCol="0" anchor="ctr"/>
+          <a:lstStyle/>
+          <a:p>
+            <a:pPr algn="ctr"/>
+          </a:p>
+        </p:txBody>
+      </p:sp>
+      <p:sp>
+        <p:nvSpPr>
+          <p:cNvPr id="23" name="Rounded Rectangle 22"/>
+          <p:cNvSpPr/>
+          <p:nvPr/>
+        </p:nvSpPr>
+        <p:spPr>
+          <a:xfrm>
+            <a:off x="4476750" y="2457450"/>
+            <a:ext cx="122015" cy="266700"/>
+          </a:xfrm>
+          <a:prstGeom prst="roundRect">
+            <a:avLst>
+              <a:gd name="adj" fmla="val 40000"/>
+            </a:avLst>
+          </a:prstGeom>
+          <a:gradFill rotWithShape="1">
+            <a:gsLst>
+              <a:gs pos="0">
+                <a:srgbClr val="0B5C99"/>
+              </a:gs>
+              <a:gs pos="100000">
+                <a:srgbClr val="014172"/>
+              </a:gs>
+            </a:gsLst>
+            <a:lin scaled="0" ang="16200000"/>
+          </a:gradFill>
+          <a:ln>
+            <a:noFill/>
+          </a:ln>
+          <a:effectLst/>
+        </p:spPr>
+        <p:txBody>
+          <a:bodyPr rtlCol="0" anchor="ctr"/>
+          <a:lstStyle/>
+          <a:p>
+            <a:pPr algn="ctr"/>
+          </a:p>
+        </p:txBody>
+      </p:sp>
+      <p:sp>
+        <p:nvSpPr>
+          <p:cNvPr id="24" name="TextBox 23"/>
+          <p:cNvSpPr txBox="1"/>
+          <p:nvPr/>
+        </p:nvSpPr>
+        <p:spPr>
+          <a:xfrm>
+            <a:off x="704850" y="2400300"/>
+            <a:ext cx="3619500" cy="228600"/>
+          </a:xfrm>
+          <a:prstGeom prst="rect">
+            <a:avLst/>
+          </a:prstGeom>
+          <a:noFill/>
+        </p:spPr>
+        <p:txBody>
+          <a:bodyPr wrap="none" lIns="0" rIns="0" tIns="0" bIns="0" anchor="ctr">
+            <a:spAutoFit/>
+          </a:bodyPr>
+          <a:lstStyle/>
+          <a:p>
+            <a:pPr algn="l"/>
+            <a:r>
+              <a:rPr sz="1200" b="1">
+                <a:solidFill>
+                  <a:srgbClr val="2E2E33"/>
+                </a:solidFill>
+                <a:latin typeface="Yu Gothic UI"/>
+              </a:rPr>
+              <a:t>ダイワ クールラインα3 S1000X</a:t>
+            </a:r>
+          </a:p>
+        </p:txBody>
+      </p:sp>
+      <p:sp>
+        <p:nvSpPr>
+          <p:cNvPr id="25" name="TextBox 24"/>
+          <p:cNvSpPr txBox="1"/>
+          <p:nvPr/>
+        </p:nvSpPr>
+        <p:spPr>
+          <a:xfrm>
+            <a:off x="704850" y="2628900"/>
+            <a:ext cx="3619500" cy="209550"/>
+          </a:xfrm>
+          <a:prstGeom prst="rect">
+            <a:avLst/>
+          </a:prstGeom>
+          <a:noFill/>
+        </p:spPr>
+        <p:txBody>
+          <a:bodyPr wrap="none" lIns="0" rIns="0" tIns="0" bIns="0" anchor="ctr">
+            <a:spAutoFit/>
+          </a:bodyPr>
+          <a:lstStyle/>
+          <a:p>
+            <a:pPr algn="l"/>
+            <a:r>
+              <a:rPr sz="1050" b="0">
+                <a:solidFill>
+                  <a:srgbClr val="6A717B"/>
+                </a:solidFill>
+                <a:latin typeface="Yu Gothic UI"/>
+              </a:rPr>
+              <a:t>10L ／ 自重 2.1kg</a:t>
+            </a:r>
+          </a:p>
+        </p:txBody>
+      </p:sp>
+      <p:sp>
+        <p:nvSpPr>
+          <p:cNvPr id="26" name="TextBox 25"/>
+          <p:cNvSpPr txBox="1"/>
+          <p:nvPr/>
+        </p:nvSpPr>
+        <p:spPr>
+          <a:xfrm>
+            <a:off x="5294090" y="2457450"/>
+            <a:ext cx="1143000" cy="266700"/>
+          </a:xfrm>
+          <a:prstGeom prst="rect">
+            <a:avLst/>
+          </a:prstGeom>
+          <a:noFill/>
+        </p:spPr>
+        <p:txBody>
+          <a:bodyPr wrap="none" lIns="0" rIns="0" tIns="0" bIns="0" anchor="ctr">
+            <a:spAutoFit/>
+          </a:bodyPr>
+          <a:lstStyle/>
+          <a:p>
+            <a:pPr algn="l"/>
+            <a:r>
+              <a:rPr sz="1350" b="1">
+                <a:solidFill>
+                  <a:srgbClr val="014172"/>
+                </a:solidFill>
+                <a:latin typeface="Yu Gothic UI"/>
+              </a:rPr>
+              <a:t>12.1kg</a:t>
+            </a:r>
+          </a:p>
+        </p:txBody>
+      </p:sp>
+      <p:sp>
+        <p:nvSpPr>
+          <p:cNvPr id="27" name="Rounded Rectangle 26"/>
+          <p:cNvSpPr/>
+          <p:nvPr/>
+        </p:nvSpPr>
+        <p:spPr>
+          <a:xfrm>
+            <a:off x="4476750" y="3048000"/>
+            <a:ext cx="1377029" cy="266700"/>
+          </a:xfrm>
+          <a:prstGeom prst="roundRect">
+            <a:avLst>
+              <a:gd name="adj" fmla="val 30000"/>
+            </a:avLst>
+          </a:prstGeom>
+          <a:gradFill rotWithShape="1">
+            <a:gsLst>
+              <a:gs pos="0">
+                <a:srgbClr val="EEF4F9"/>
+              </a:gs>
+              <a:gs pos="100000">
+                <a:srgbClr val="DAE7F2"/>
+              </a:gs>
+            </a:gsLst>
+            <a:lin scaled="0" ang="16200000"/>
+          </a:gradFill>
+          <a:ln w="19050">
+            <a:solidFill>
+              <a:srgbClr val="014172"/>
+            </a:solidFill>
+          </a:ln>
+          <a:effectLst/>
+        </p:spPr>
+        <p:txBody>
+          <a:bodyPr rtlCol="0" anchor="ctr"/>
+          <a:lstStyle/>
+          <a:p>
+            <a:pPr algn="ctr"/>
+          </a:p>
+        </p:txBody>
+      </p:sp>
+      <p:sp>
+        <p:nvSpPr>
+          <p:cNvPr id="28" name="Rounded Rectangle 27"/>
+          <p:cNvSpPr/>
+          <p:nvPr/>
+        </p:nvSpPr>
+        <p:spPr>
+          <a:xfrm>
+            <a:off x="4476750" y="3048000"/>
+            <a:ext cx="214979" cy="266700"/>
+          </a:xfrm>
+          <a:prstGeom prst="roundRect">
+            <a:avLst>
+              <a:gd name="adj" fmla="val 40000"/>
+            </a:avLst>
+          </a:prstGeom>
+          <a:gradFill rotWithShape="1">
+            <a:gsLst>
+              <a:gs pos="0">
+                <a:srgbClr val="0B5C99"/>
+              </a:gs>
+              <a:gs pos="100000">
+                <a:srgbClr val="014172"/>
+              </a:gs>
+            </a:gsLst>
+            <a:lin scaled="0" ang="16200000"/>
+          </a:gradFill>
+          <a:ln>
+            <a:noFill/>
+          </a:ln>
+          <a:effectLst/>
+        </p:spPr>
+        <p:txBody>
+          <a:bodyPr rtlCol="0" anchor="ctr"/>
+          <a:lstStyle/>
+          <a:p>
+            <a:pPr algn="ctr"/>
+          </a:p>
+        </p:txBody>
+      </p:sp>
+      <p:sp>
+        <p:nvSpPr>
+          <p:cNvPr id="29" name="TextBox 28"/>
+          <p:cNvSpPr txBox="1"/>
+          <p:nvPr/>
+        </p:nvSpPr>
+        <p:spPr>
+          <a:xfrm>
+            <a:off x="704850" y="2990850"/>
+            <a:ext cx="3619500" cy="228600"/>
+          </a:xfrm>
+          <a:prstGeom prst="rect">
+            <a:avLst/>
+          </a:prstGeom>
+          <a:noFill/>
+        </p:spPr>
+        <p:txBody>
+          <a:bodyPr wrap="none" lIns="0" rIns="0" tIns="0" bIns="0" anchor="ctr">
+            <a:spAutoFit/>
+          </a:bodyPr>
+          <a:lstStyle/>
+          <a:p>
+            <a:pPr algn="l"/>
+            <a:r>
+              <a:rPr sz="1200" b="1">
+                <a:solidFill>
+                  <a:srgbClr val="2E2E33"/>
+                </a:solidFill>
+                <a:latin typeface="Yu Gothic UI"/>
+              </a:rPr>
+              <a:t>ダイワ クールラインα3 S2000</a:t>
+            </a:r>
+          </a:p>
+        </p:txBody>
+      </p:sp>
+      <p:sp>
+        <p:nvSpPr>
+          <p:cNvPr id="30" name="TextBox 29"/>
+          <p:cNvSpPr txBox="1"/>
+          <p:nvPr/>
+        </p:nvSpPr>
+        <p:spPr>
+          <a:xfrm>
+            <a:off x="704850" y="3219450"/>
+            <a:ext cx="3619500" cy="209550"/>
+          </a:xfrm>
+          <a:prstGeom prst="rect">
+            <a:avLst/>
+          </a:prstGeom>
+          <a:noFill/>
+        </p:spPr>
+        <p:txBody>
+          <a:bodyPr wrap="none" lIns="0" rIns="0" tIns="0" bIns="0" anchor="ctr">
+            <a:spAutoFit/>
+          </a:bodyPr>
+          <a:lstStyle/>
+          <a:p>
+            <a:pPr algn="l"/>
+            <a:r>
+              <a:rPr sz="1050" b="0">
+                <a:solidFill>
+                  <a:srgbClr val="6A717B"/>
+                </a:solidFill>
+                <a:latin typeface="Yu Gothic UI"/>
+              </a:rPr>
+              <a:t>20L ／ 自重 3.7kg</a:t>
+            </a:r>
+          </a:p>
+        </p:txBody>
+      </p:sp>
+      <p:sp>
+        <p:nvSpPr>
+          <p:cNvPr id="31" name="TextBox 30"/>
+          <p:cNvSpPr txBox="1"/>
+          <p:nvPr/>
+        </p:nvSpPr>
+        <p:spPr>
+          <a:xfrm>
+            <a:off x="5968079" y="3048000"/>
+            <a:ext cx="1143000" cy="266700"/>
+          </a:xfrm>
+          <a:prstGeom prst="rect">
+            <a:avLst/>
+          </a:prstGeom>
+          <a:noFill/>
+        </p:spPr>
+        <p:txBody>
+          <a:bodyPr wrap="none" lIns="0" rIns="0" tIns="0" bIns="0" anchor="ctr">
+            <a:spAutoFit/>
+          </a:bodyPr>
+          <a:lstStyle/>
+          <a:p>
+            <a:pPr algn="l"/>
+            <a:r>
+              <a:rPr sz="1350" b="1">
+                <a:solidFill>
+                  <a:srgbClr val="014172"/>
+                </a:solidFill>
+                <a:latin typeface="Yu Gothic UI"/>
+              </a:rPr>
+              <a:t>23.7kg</a:t>
+            </a:r>
+          </a:p>
+        </p:txBody>
+      </p:sp>
+      <p:sp>
+        <p:nvSpPr>
+          <p:cNvPr id="32" name="Rounded Rectangle 31"/>
+          <p:cNvSpPr/>
+          <p:nvPr/>
+        </p:nvSpPr>
+        <p:spPr>
+          <a:xfrm>
+            <a:off x="4476750" y="3638550"/>
+            <a:ext cx="3096863" cy="266700"/>
+          </a:xfrm>
+          <a:prstGeom prst="roundRect">
+            <a:avLst>
+              <a:gd name="adj" fmla="val 30000"/>
+            </a:avLst>
+          </a:prstGeom>
+          <a:gradFill rotWithShape="1">
+            <a:gsLst>
+              <a:gs pos="0">
+                <a:srgbClr val="EEF4F9"/>
+              </a:gs>
+              <a:gs pos="100000">
+                <a:srgbClr val="DAE7F2"/>
+              </a:gs>
+            </a:gsLst>
+            <a:lin scaled="0" ang="16200000"/>
+          </a:gradFill>
+          <a:ln w="19050">
+            <a:solidFill>
+              <a:srgbClr val="014172"/>
+            </a:solidFill>
+          </a:ln>
+          <a:effectLst/>
+        </p:spPr>
+        <p:txBody>
+          <a:bodyPr rtlCol="0" anchor="ctr"/>
+          <a:lstStyle/>
+          <a:p>
+            <a:pPr algn="ctr"/>
+          </a:p>
+        </p:txBody>
+      </p:sp>
+      <p:sp>
+        <p:nvSpPr>
+          <p:cNvPr id="33" name="Rounded Rectangle 32"/>
+          <p:cNvSpPr/>
+          <p:nvPr/>
+        </p:nvSpPr>
+        <p:spPr>
+          <a:xfrm>
+            <a:off x="4476750" y="3638550"/>
+            <a:ext cx="366046" cy="266700"/>
+          </a:xfrm>
+          <a:prstGeom prst="roundRect">
+            <a:avLst>
+              <a:gd name="adj" fmla="val 40000"/>
+            </a:avLst>
+          </a:prstGeom>
+          <a:gradFill rotWithShape="1">
+            <a:gsLst>
+              <a:gs pos="0">
+                <a:srgbClr val="0B5C99"/>
+              </a:gs>
+              <a:gs pos="100000">
+                <a:srgbClr val="014172"/>
+              </a:gs>
+            </a:gsLst>
+            <a:lin scaled="0" ang="16200000"/>
+          </a:gradFill>
+          <a:ln>
+            <a:noFill/>
+          </a:ln>
+          <a:effectLst/>
+        </p:spPr>
+        <p:txBody>
+          <a:bodyPr rtlCol="0" anchor="ctr"/>
+          <a:lstStyle/>
+          <a:p>
+            <a:pPr algn="ctr"/>
+          </a:p>
+        </p:txBody>
+      </p:sp>
+      <p:sp>
+        <p:nvSpPr>
+          <p:cNvPr id="34" name="TextBox 33"/>
+          <p:cNvSpPr txBox="1"/>
+          <p:nvPr/>
+        </p:nvSpPr>
+        <p:spPr>
+          <a:xfrm>
+            <a:off x="704850" y="3581400"/>
+            <a:ext cx="3619500" cy="228600"/>
+          </a:xfrm>
+          <a:prstGeom prst="rect">
+            <a:avLst/>
+          </a:prstGeom>
+          <a:noFill/>
+        </p:spPr>
+        <p:txBody>
+          <a:bodyPr wrap="none" lIns="0" rIns="0" tIns="0" bIns="0" anchor="ctr">
+            <a:spAutoFit/>
+          </a:bodyPr>
+          <a:lstStyle/>
+          <a:p>
+            <a:pPr algn="l"/>
+            <a:r>
+              <a:rPr sz="1200" b="1">
+                <a:solidFill>
+                  <a:srgbClr val="2E2E33"/>
+                </a:solidFill>
+                <a:latin typeface="Yu Gothic UI"/>
+              </a:rPr>
+              <a:t>コールマン 50QT</a:t>
+            </a:r>
+          </a:p>
+        </p:txBody>
+      </p:sp>
+      <p:sp>
+        <p:nvSpPr>
+          <p:cNvPr id="35" name="TextBox 34"/>
+          <p:cNvSpPr txBox="1"/>
+          <p:nvPr/>
+        </p:nvSpPr>
+        <p:spPr>
+          <a:xfrm>
+            <a:off x="704850" y="3810000"/>
+            <a:ext cx="3619500" cy="209550"/>
+          </a:xfrm>
+          <a:prstGeom prst="rect">
+            <a:avLst/>
+          </a:prstGeom>
+          <a:noFill/>
+        </p:spPr>
+        <p:txBody>
+          <a:bodyPr wrap="none" lIns="0" rIns="0" tIns="0" bIns="0" anchor="ctr">
+            <a:spAutoFit/>
+          </a:bodyPr>
+          <a:lstStyle/>
+          <a:p>
+            <a:pPr algn="l"/>
+            <a:r>
+              <a:rPr sz="1050" b="0">
+                <a:solidFill>
+                  <a:srgbClr val="6A717B"/>
+                </a:solidFill>
+                <a:latin typeface="Yu Gothic UI"/>
+              </a:rPr>
+              <a:t>約47L ／ 自重 6.3kg</a:t>
+            </a:r>
+          </a:p>
+        </p:txBody>
+      </p:sp>
+      <p:sp>
+        <p:nvSpPr>
+          <p:cNvPr id="36" name="TextBox 35"/>
+          <p:cNvSpPr txBox="1"/>
+          <p:nvPr/>
+        </p:nvSpPr>
+        <p:spPr>
+          <a:xfrm>
+            <a:off x="7687913" y="3638550"/>
+            <a:ext cx="1143000" cy="266700"/>
+          </a:xfrm>
+          <a:prstGeom prst="rect">
+            <a:avLst/>
+          </a:prstGeom>
+          <a:noFill/>
+        </p:spPr>
+        <p:txBody>
+          <a:bodyPr wrap="none" lIns="0" rIns="0" tIns="0" bIns="0" anchor="ctr">
+            <a:spAutoFit/>
+          </a:bodyPr>
+          <a:lstStyle/>
+          <a:p>
+            <a:pPr algn="l"/>
+            <a:r>
+              <a:rPr sz="1350" b="1">
+                <a:solidFill>
+                  <a:srgbClr val="014172"/>
+                </a:solidFill>
+                <a:latin typeface="Yu Gothic UI"/>
+              </a:rPr>
+              <a:t>53.3kg</a:t>
+            </a:r>
+          </a:p>
+        </p:txBody>
+      </p:sp>
+      <p:sp>
+        <p:nvSpPr>
+          <p:cNvPr id="37" name="Rounded Rectangle 36"/>
+          <p:cNvSpPr/>
+          <p:nvPr/>
+        </p:nvSpPr>
+        <p:spPr>
+          <a:xfrm>
+            <a:off x="4476750" y="4229100"/>
+            <a:ext cx="3735991" cy="266700"/>
+          </a:xfrm>
+          <a:prstGeom prst="roundRect">
+            <a:avLst>
+              <a:gd name="adj" fmla="val 30000"/>
+            </a:avLst>
+          </a:prstGeom>
+          <a:gradFill rotWithShape="1">
+            <a:gsLst>
+              <a:gs pos="0">
+                <a:srgbClr val="EEF4F9"/>
+              </a:gs>
+              <a:gs pos="100000">
+                <a:srgbClr val="DAE7F2"/>
+              </a:gs>
+            </a:gsLst>
+            <a:lin scaled="0" ang="16200000"/>
+          </a:gradFill>
+          <a:ln w="19050">
+            <a:solidFill>
+              <a:srgbClr val="014172"/>
+            </a:solidFill>
+          </a:ln>
+          <a:effectLst/>
+        </p:spPr>
+        <p:txBody>
+          <a:bodyPr rtlCol="0" anchor="ctr"/>
+          <a:lstStyle/>
+          <a:p>
+            <a:pPr algn="ctr"/>
+          </a:p>
+        </p:txBody>
+      </p:sp>
+      <p:sp>
+        <p:nvSpPr>
+          <p:cNvPr id="38" name="Rounded Rectangle 37"/>
+          <p:cNvSpPr/>
+          <p:nvPr/>
+        </p:nvSpPr>
+        <p:spPr>
+          <a:xfrm>
+            <a:off x="4476750" y="4229100"/>
+            <a:ext cx="366046" cy="266700"/>
+          </a:xfrm>
+          <a:prstGeom prst="roundRect">
+            <a:avLst>
+              <a:gd name="adj" fmla="val 40000"/>
+            </a:avLst>
+          </a:prstGeom>
+          <a:gradFill rotWithShape="1">
+            <a:gsLst>
+              <a:gs pos="0">
+                <a:srgbClr val="0B5C99"/>
+              </a:gs>
+              <a:gs pos="100000">
+                <a:srgbClr val="014172"/>
+              </a:gs>
+            </a:gsLst>
+            <a:lin scaled="0" ang="16200000"/>
+          </a:gradFill>
+          <a:ln>
+            <a:noFill/>
+          </a:ln>
+          <a:effectLst/>
+        </p:spPr>
+        <p:txBody>
+          <a:bodyPr rtlCol="0" anchor="ctr"/>
+          <a:lstStyle/>
+          <a:p>
+            <a:pPr algn="ctr"/>
+          </a:p>
+        </p:txBody>
+      </p:sp>
+      <p:sp>
+        <p:nvSpPr>
+          <p:cNvPr id="39" name="TextBox 38"/>
+          <p:cNvSpPr txBox="1"/>
+          <p:nvPr/>
+        </p:nvSpPr>
+        <p:spPr>
+          <a:xfrm>
+            <a:off x="704850" y="4171950"/>
+            <a:ext cx="3619500" cy="228600"/>
+          </a:xfrm>
+          <a:prstGeom prst="rect">
+            <a:avLst/>
+          </a:prstGeom>
+          <a:noFill/>
+        </p:spPr>
+        <p:txBody>
+          <a:bodyPr wrap="none" lIns="0" rIns="0" tIns="0" bIns="0" anchor="ctr">
+            <a:spAutoFit/>
+          </a:bodyPr>
+          <a:lstStyle/>
+          <a:p>
+            <a:pPr algn="l"/>
+            <a:r>
+              <a:rPr sz="1200" b="1">
+                <a:solidFill>
+                  <a:srgbClr val="2E2E33"/>
+                </a:solidFill>
+                <a:latin typeface="Yu Gothic UI"/>
+              </a:rPr>
+              <a:t>コールマン 62QT</a:t>
+            </a:r>
+          </a:p>
+        </p:txBody>
+      </p:sp>
+      <p:sp>
+        <p:nvSpPr>
+          <p:cNvPr id="40" name="TextBox 39"/>
+          <p:cNvSpPr txBox="1"/>
+          <p:nvPr/>
+        </p:nvSpPr>
+        <p:spPr>
+          <a:xfrm>
+            <a:off x="704850" y="4400550"/>
+            <a:ext cx="3619500" cy="209550"/>
+          </a:xfrm>
+          <a:prstGeom prst="rect">
+            <a:avLst/>
+          </a:prstGeom>
+          <a:noFill/>
+        </p:spPr>
+        <p:txBody>
+          <a:bodyPr wrap="none" lIns="0" rIns="0" tIns="0" bIns="0" anchor="ctr">
+            <a:spAutoFit/>
+          </a:bodyPr>
+          <a:lstStyle/>
+          <a:p>
+            <a:pPr algn="l"/>
+            <a:r>
+              <a:rPr sz="1050" b="0">
+                <a:solidFill>
+                  <a:srgbClr val="6A717B"/>
+                </a:solidFill>
+                <a:latin typeface="Yu Gothic UI"/>
+              </a:rPr>
+              <a:t>約58L ／ 自重 6.3kg</a:t>
+            </a:r>
+          </a:p>
+        </p:txBody>
+      </p:sp>
+      <p:sp>
+        <p:nvSpPr>
+          <p:cNvPr id="41" name="TextBox 40"/>
+          <p:cNvSpPr txBox="1"/>
+          <p:nvPr/>
+        </p:nvSpPr>
+        <p:spPr>
+          <a:xfrm>
+            <a:off x="8327041" y="4229100"/>
+            <a:ext cx="1143000" cy="266700"/>
+          </a:xfrm>
+          <a:prstGeom prst="rect">
+            <a:avLst/>
+          </a:prstGeom>
+          <a:noFill/>
+        </p:spPr>
+        <p:txBody>
+          <a:bodyPr wrap="none" lIns="0" rIns="0" tIns="0" bIns="0" anchor="ctr">
+            <a:spAutoFit/>
+          </a:bodyPr>
+          <a:lstStyle/>
+          <a:p>
+            <a:pPr algn="l"/>
+            <a:r>
+              <a:rPr sz="1350" b="1">
+                <a:solidFill>
+                  <a:srgbClr val="014172"/>
+                </a:solidFill>
+                <a:latin typeface="Yu Gothic UI"/>
+              </a:rPr>
+              <a:t>64.3kg</a:t>
+            </a:r>
+          </a:p>
+        </p:txBody>
+      </p:sp>
+      <p:sp>
+        <p:nvSpPr>
+          <p:cNvPr id="42" name="Rounded Rectangle 41"/>
+          <p:cNvSpPr/>
+          <p:nvPr/>
+        </p:nvSpPr>
+        <p:spPr>
+          <a:xfrm>
+            <a:off x="4476750" y="4819650"/>
+            <a:ext cx="5287328" cy="266700"/>
+          </a:xfrm>
+          <a:prstGeom prst="roundRect">
+            <a:avLst>
+              <a:gd name="adj" fmla="val 30000"/>
+            </a:avLst>
+          </a:prstGeom>
+          <a:gradFill rotWithShape="1">
+            <a:gsLst>
+              <a:gs pos="0">
+                <a:srgbClr val="EEF4F9"/>
+              </a:gs>
+              <a:gs pos="100000">
+                <a:srgbClr val="DAE7F2"/>
+              </a:gs>
+            </a:gsLst>
+            <a:lin scaled="0" ang="16200000"/>
+          </a:gradFill>
+          <a:ln w="19050">
+            <a:solidFill>
+              <a:srgbClr val="014172"/>
+            </a:solidFill>
+          </a:ln>
+          <a:effectLst/>
+        </p:spPr>
+        <p:txBody>
+          <a:bodyPr rtlCol="0" anchor="ctr"/>
+          <a:lstStyle/>
+          <a:p>
+            <a:pPr algn="ctr"/>
+          </a:p>
+        </p:txBody>
+      </p:sp>
+      <p:sp>
+        <p:nvSpPr>
+          <p:cNvPr id="43" name="Rounded Rectangle 42"/>
+          <p:cNvSpPr/>
+          <p:nvPr/>
+        </p:nvSpPr>
+        <p:spPr>
+          <a:xfrm>
+            <a:off x="4476750" y="4819650"/>
+            <a:ext cx="639127" cy="266700"/>
+          </a:xfrm>
+          <a:prstGeom prst="roundRect">
+            <a:avLst>
+              <a:gd name="adj" fmla="val 40000"/>
+            </a:avLst>
+          </a:prstGeom>
+          <a:gradFill rotWithShape="1">
+            <a:gsLst>
+              <a:gs pos="0">
+                <a:srgbClr val="0B5C99"/>
+              </a:gs>
+              <a:gs pos="100000">
+                <a:srgbClr val="014172"/>
+              </a:gs>
+            </a:gsLst>
+            <a:lin scaled="0" ang="16200000"/>
+          </a:gradFill>
+          <a:ln>
+            <a:noFill/>
+          </a:ln>
+          <a:effectLst/>
+        </p:spPr>
+        <p:txBody>
+          <a:bodyPr rtlCol="0" anchor="ctr"/>
+          <a:lstStyle/>
+          <a:p>
+            <a:pPr algn="ctr"/>
+          </a:p>
+        </p:txBody>
+      </p:sp>
+      <p:sp>
+        <p:nvSpPr>
+          <p:cNvPr id="44" name="TextBox 43"/>
+          <p:cNvSpPr txBox="1"/>
+          <p:nvPr/>
+        </p:nvSpPr>
+        <p:spPr>
+          <a:xfrm>
+            <a:off x="704850" y="4762500"/>
+            <a:ext cx="3619500" cy="228600"/>
+          </a:xfrm>
+          <a:prstGeom prst="rect">
+            <a:avLst/>
+          </a:prstGeom>
+          <a:noFill/>
+        </p:spPr>
+        <p:txBody>
+          <a:bodyPr wrap="none" lIns="0" rIns="0" tIns="0" bIns="0" anchor="ctr">
+            <a:spAutoFit/>
+          </a:bodyPr>
+          <a:lstStyle/>
+          <a:p>
+            <a:pPr algn="l"/>
+            <a:r>
+              <a:rPr sz="1200" b="1">
+                <a:solidFill>
+                  <a:srgbClr val="2E2E33"/>
+                </a:solidFill>
+                <a:latin typeface="Yu Gothic UI"/>
+              </a:rPr>
+              <a:t>ダイワ トランクマスターHD III 8000</a:t>
+            </a:r>
+          </a:p>
+        </p:txBody>
+      </p:sp>
+      <p:sp>
+        <p:nvSpPr>
+          <p:cNvPr id="45" name="TextBox 44"/>
+          <p:cNvSpPr txBox="1"/>
+          <p:nvPr/>
+        </p:nvSpPr>
+        <p:spPr>
+          <a:xfrm>
+            <a:off x="704850" y="4991100"/>
+            <a:ext cx="3619500" cy="209550"/>
+          </a:xfrm>
+          <a:prstGeom prst="rect">
+            <a:avLst/>
+          </a:prstGeom>
+          <a:noFill/>
+        </p:spPr>
+        <p:txBody>
+          <a:bodyPr wrap="none" lIns="0" rIns="0" tIns="0" bIns="0" anchor="ctr">
+            <a:spAutoFit/>
+          </a:bodyPr>
+          <a:lstStyle/>
+          <a:p>
+            <a:pPr algn="l"/>
+            <a:r>
+              <a:rPr sz="1050" b="0">
+                <a:solidFill>
+                  <a:srgbClr val="6A717B"/>
+                </a:solidFill>
+                <a:latin typeface="Yu Gothic UI"/>
+              </a:rPr>
+              <a:t>80L ／ 自重 11.0kg</a:t>
+            </a:r>
+          </a:p>
+        </p:txBody>
+      </p:sp>
+      <p:sp>
+        <p:nvSpPr>
+          <p:cNvPr id="46" name="TextBox 45"/>
+          <p:cNvSpPr txBox="1"/>
+          <p:nvPr/>
+        </p:nvSpPr>
+        <p:spPr>
+          <a:xfrm>
+            <a:off x="9878377" y="4819650"/>
+            <a:ext cx="1143000" cy="266700"/>
+          </a:xfrm>
+          <a:prstGeom prst="rect">
+            <a:avLst/>
+          </a:prstGeom>
+          <a:noFill/>
+        </p:spPr>
+        <p:txBody>
+          <a:bodyPr wrap="none" lIns="0" rIns="0" tIns="0" bIns="0" anchor="ctr">
+            <a:spAutoFit/>
+          </a:bodyPr>
+          <a:lstStyle/>
+          <a:p>
+            <a:pPr algn="l"/>
+            <a:r>
+              <a:rPr sz="1350" b="1">
+                <a:solidFill>
+                  <a:srgbClr val="014172"/>
+                </a:solidFill>
+                <a:latin typeface="Yu Gothic UI"/>
+              </a:rPr>
+              <a:t>91.0kg</a:t>
+            </a:r>
+          </a:p>
+        </p:txBody>
+      </p:sp>
+      <p:sp>
+        <p:nvSpPr>
+          <p:cNvPr id="47" name="Rectangle 46"/>
+          <p:cNvSpPr/>
+          <p:nvPr/>
+        </p:nvSpPr>
+        <p:spPr>
+          <a:xfrm>
+            <a:off x="609600" y="5295900"/>
+            <a:ext cx="10210800" cy="9525"/>
+          </a:xfrm>
+          <a:prstGeom prst="rect">
+            <a:avLst/>
+          </a:prstGeom>
+          <a:solidFill>
+            <a:srgbClr val="E2E7EC"/>
+          </a:solidFill>
+          <a:ln>
+            <a:noFill/>
+          </a:ln>
+          <a:effectLst/>
+        </p:spPr>
+        <p:txBody>
+          <a:bodyPr rtlCol="0" anchor="ctr"/>
+          <a:lstStyle/>
+          <a:p>
+            <a:pPr algn="ctr"/>
+          </a:p>
+        </p:txBody>
+      </p:sp>
+      <p:sp>
+        <p:nvSpPr>
+          <p:cNvPr id="48" name="TextBox 47"/>
+          <p:cNvSpPr txBox="1"/>
+          <p:nvPr/>
+        </p:nvSpPr>
+        <p:spPr>
+          <a:xfrm>
+            <a:off x="609600" y="5429250"/>
+            <a:ext cx="7239000" cy="247650"/>
+          </a:xfrm>
+          <a:prstGeom prst="rect">
+            <a:avLst/>
+          </a:prstGeom>
+          <a:noFill/>
+        </p:spPr>
+        <p:txBody>
+          <a:bodyPr wrap="none" lIns="0" rIns="0" tIns="0" bIns="0" anchor="ctr">
+            <a:spAutoFit/>
+          </a:bodyPr>
+          <a:lstStyle/>
+          <a:p>
+            <a:pPr algn="l"/>
+            <a:r>
+              <a:rPr sz="1425" b="1">
+                <a:solidFill>
+                  <a:srgbClr val="2E2E33"/>
+                </a:solidFill>
+                <a:latin typeface="Yu Gothic UI"/>
+              </a:rPr>
+              <a:t>自重がいちばん軽い1.5kgの製品が、満載では21.5kgになります。</a:t>
+            </a:r>
+          </a:p>
+        </p:txBody>
+      </p:sp>
+      <p:sp>
+        <p:nvSpPr>
+          <p:cNvPr id="49" name="TextBox 48"/>
+          <p:cNvSpPr txBox="1"/>
+          <p:nvPr/>
+        </p:nvSpPr>
+        <p:spPr>
+          <a:xfrm>
+            <a:off x="609600" y="5676900"/>
+            <a:ext cx="7620000" cy="209550"/>
+          </a:xfrm>
+          <a:prstGeom prst="rect">
+            <a:avLst/>
+          </a:prstGeom>
+          <a:noFill/>
+        </p:spPr>
+        <p:txBody>
+          <a:bodyPr wrap="none" lIns="0" rIns="0" tIns="0" bIns="0" anchor="ctr">
+            <a:spAutoFit/>
+          </a:bodyPr>
+          <a:lstStyle/>
+          <a:p>
+            <a:pPr algn="l"/>
+            <a:r>
+              <a:rPr sz="1050" b="0">
+                <a:solidFill>
+                  <a:srgbClr val="6A717B"/>
+                </a:solidFill>
+                <a:latin typeface="Yu Gothic UI"/>
+              </a:rPr>
+              <a:t>メーカー公表値からの計算です（実測ではありません）</a:t>
+            </a:r>
+          </a:p>
+        </p:txBody>
+      </p:sp>
+      <p:sp>
+        <p:nvSpPr>
+          <p:cNvPr id="50" name="TextBox 49"/>
           <p:cNvSpPr txBox="1"/>
           <p:nvPr/>
         </p:nvSpPr>

--- a/site/public/img/figures.pptx
+++ b/site/public/img/figures.pptx
@@ -12471,7 +12471,7 @@
                 </a:solidFill>
                 <a:latin typeface="Yu Gothic UI"/>
               </a:rPr>
-              <a:t>足を置ける高さが0.5〜0.6mの5製品</a:t>
+              <a:t>足を置ける高さ0.5〜0.6m（伸縮脚付きは除く）</a:t>
             </a:r>
           </a:p>
         </p:txBody>
@@ -26503,7 +26503,7 @@
                 </a:solidFill>
                 <a:latin typeface="Yu Gothic UI"/>
               </a:rPr>
-              <a:t>26</a:t>
+              <a:t>33</a:t>
             </a:r>
             <a:r>
               <a:rPr sz="1950" b="1">
@@ -27012,7 +27012,7 @@
                 </a:solidFill>
                 <a:latin typeface="Yu Gothic UI"/>
               </a:rPr>
-              <a:t>306mm以上は 26製品中3つ</a:t>
+              <a:t>306mm以上は 33製品中9つ</a:t>
             </a:r>
           </a:p>
         </p:txBody>
